--- a/ppts_output_v3/01_增值税风险指引.pptx
+++ b/ppts_output_v3/01_增值税风险指引.pptx
@@ -3332,7 +3332,7 @@
           <a:p>
             <a:pPr algn="l">
               <a:lnSpc>
-                <a:spcPts val="1820"/>
+                <a:spcPts val="2080"/>
               </a:lnSpc>
               <a:spcBef>
                 <a:spcPts val="0"/>
@@ -3342,7 +3342,7 @@
               </a:spcAft>
             </a:pPr>
             <a:r>
-              <a:rPr sz="1400" b="1">
+              <a:rPr sz="1600" b="1">
                 <a:solidFill>
                   <a:srgbClr val="1B3A5C"/>
                 </a:solidFill>
@@ -3354,7 +3354,7 @@
           <a:p>
             <a:pPr algn="l">
               <a:lnSpc>
-                <a:spcPts val="1820"/>
+                <a:spcPts val="2080"/>
               </a:lnSpc>
               <a:spcBef>
                 <a:spcPts val="800"/>
@@ -3364,7 +3364,7 @@
               </a:spcAft>
             </a:pPr>
             <a:r>
-              <a:rPr sz="1400" b="1">
+              <a:rPr sz="1600" b="1">
                 <a:solidFill>
                   <a:srgbClr val="333333"/>
                 </a:solidFill>
@@ -3376,17 +3376,17 @@
           <a:p>
             <a:pPr algn="l">
               <a:lnSpc>
-                <a:spcPts val="1430"/>
-              </a:lnSpc>
-              <a:spcBef>
-                <a:spcPts val="200"/>
-              </a:spcBef>
-              <a:spcAft>
-                <a:spcPts val="200"/>
-              </a:spcAft>
-            </a:pPr>
-            <a:r>
-              <a:rPr sz="1100" b="0">
+                <a:spcPts val="1820"/>
+              </a:lnSpc>
+              <a:spcBef>
+                <a:spcPts val="200"/>
+              </a:spcBef>
+              <a:spcAft>
+                <a:spcPts val="200"/>
+              </a:spcAft>
+            </a:pPr>
+            <a:r>
+              <a:rPr sz="1400" b="0">
                 <a:solidFill>
                   <a:srgbClr val="000000"/>
                 </a:solidFill>
@@ -3398,7 +3398,7 @@
           <a:p>
             <a:pPr algn="l">
               <a:lnSpc>
-                <a:spcPts val="1820"/>
+                <a:spcPts val="2080"/>
               </a:lnSpc>
               <a:spcBef>
                 <a:spcPts val="800"/>
@@ -3408,7 +3408,7 @@
               </a:spcAft>
             </a:pPr>
             <a:r>
-              <a:rPr sz="1400" b="1">
+              <a:rPr sz="1600" b="1">
                 <a:solidFill>
                   <a:srgbClr val="1B5C9E"/>
                 </a:solidFill>
@@ -3420,17 +3420,17 @@
           <a:p>
             <a:pPr algn="l">
               <a:lnSpc>
-                <a:spcPts val="1430"/>
-              </a:lnSpc>
-              <a:spcBef>
-                <a:spcPts val="200"/>
-              </a:spcBef>
-              <a:spcAft>
-                <a:spcPts val="200"/>
-              </a:spcAft>
-            </a:pPr>
-            <a:r>
-              <a:rPr sz="1100" b="0">
+                <a:spcPts val="1820"/>
+              </a:lnSpc>
+              <a:spcBef>
+                <a:spcPts val="200"/>
+              </a:spcBef>
+              <a:spcAft>
+                <a:spcPts val="200"/>
+              </a:spcAft>
+            </a:pPr>
+            <a:r>
+              <a:rPr sz="1400" b="0">
                 <a:solidFill>
                   <a:srgbClr val="000000"/>
                 </a:solidFill>
@@ -3442,17 +3442,17 @@
           <a:p>
             <a:pPr algn="l">
               <a:lnSpc>
-                <a:spcPts val="1430"/>
-              </a:lnSpc>
-              <a:spcBef>
-                <a:spcPts val="200"/>
-              </a:spcBef>
-              <a:spcAft>
-                <a:spcPts val="200"/>
-              </a:spcAft>
-            </a:pPr>
-            <a:r>
-              <a:rPr sz="1100" b="0">
+                <a:spcPts val="1820"/>
+              </a:lnSpc>
+              <a:spcBef>
+                <a:spcPts val="200"/>
+              </a:spcBef>
+              <a:spcAft>
+                <a:spcPts val="200"/>
+              </a:spcAft>
+            </a:pPr>
+            <a:r>
+              <a:rPr sz="1400" b="0">
                 <a:solidFill>
                   <a:srgbClr val="000000"/>
                 </a:solidFill>
@@ -3464,7 +3464,7 @@
           <a:p>
             <a:pPr algn="l">
               <a:lnSpc>
-                <a:spcPts val="1820"/>
+                <a:spcPts val="2080"/>
               </a:lnSpc>
               <a:spcBef>
                 <a:spcPts val="800"/>
@@ -3474,7 +3474,7 @@
               </a:spcAft>
             </a:pPr>
             <a:r>
-              <a:rPr sz="1400" b="1">
+              <a:rPr sz="1600" b="1">
                 <a:solidFill>
                   <a:srgbClr val="CC3333"/>
                 </a:solidFill>
@@ -3486,17 +3486,17 @@
           <a:p>
             <a:pPr algn="l">
               <a:lnSpc>
-                <a:spcPts val="1430"/>
-              </a:lnSpc>
-              <a:spcBef>
-                <a:spcPts val="200"/>
-              </a:spcBef>
-              <a:spcAft>
-                <a:spcPts val="200"/>
-              </a:spcAft>
-            </a:pPr>
-            <a:r>
-              <a:rPr sz="1100" b="0">
+                <a:spcPts val="1820"/>
+              </a:lnSpc>
+              <a:spcBef>
+                <a:spcPts val="200"/>
+              </a:spcBef>
+              <a:spcAft>
+                <a:spcPts val="200"/>
+              </a:spcAft>
+            </a:pPr>
+            <a:r>
+              <a:rPr sz="1400" b="0">
                 <a:solidFill>
                   <a:srgbClr val="000000"/>
                 </a:solidFill>
@@ -3508,7 +3508,7 @@
           <a:p>
             <a:pPr algn="l">
               <a:lnSpc>
-                <a:spcPts val="1820"/>
+                <a:spcPts val="2080"/>
               </a:lnSpc>
               <a:spcBef>
                 <a:spcPts val="800"/>
@@ -3518,7 +3518,7 @@
               </a:spcAft>
             </a:pPr>
             <a:r>
-              <a:rPr sz="1400" b="1">
+              <a:rPr sz="1600" b="1">
                 <a:solidFill>
                   <a:srgbClr val="008040"/>
                 </a:solidFill>
@@ -3530,17 +3530,17 @@
           <a:p>
             <a:pPr algn="l">
               <a:lnSpc>
-                <a:spcPts val="1430"/>
-              </a:lnSpc>
-              <a:spcBef>
-                <a:spcPts val="200"/>
-              </a:spcBef>
-              <a:spcAft>
-                <a:spcPts val="200"/>
-              </a:spcAft>
-            </a:pPr>
-            <a:r>
-              <a:rPr sz="1100" b="0">
+                <a:spcPts val="1820"/>
+              </a:lnSpc>
+              <a:spcBef>
+                <a:spcPts val="200"/>
+              </a:spcBef>
+              <a:spcAft>
+                <a:spcPts val="200"/>
+              </a:spcAft>
+            </a:pPr>
+            <a:r>
+              <a:rPr sz="1400" b="0">
                 <a:solidFill>
                   <a:srgbClr val="000000"/>
                 </a:solidFill>
@@ -3645,7 +3645,7 @@
           <a:p>
             <a:pPr algn="l">
               <a:lnSpc>
-                <a:spcPts val="1820"/>
+                <a:spcPts val="2080"/>
               </a:lnSpc>
               <a:spcBef>
                 <a:spcPts val="0"/>
@@ -3655,7 +3655,7 @@
               </a:spcAft>
             </a:pPr>
             <a:r>
-              <a:rPr sz="1400" b="1">
+              <a:rPr sz="1600" b="1">
                 <a:solidFill>
                   <a:srgbClr val="1B3A5C"/>
                 </a:solidFill>
@@ -3667,7 +3667,7 @@
           <a:p>
             <a:pPr algn="l">
               <a:lnSpc>
-                <a:spcPts val="1820"/>
+                <a:spcPts val="2080"/>
               </a:lnSpc>
               <a:spcBef>
                 <a:spcPts val="800"/>
@@ -3677,7 +3677,7 @@
               </a:spcAft>
             </a:pPr>
             <a:r>
-              <a:rPr sz="1400" b="1">
+              <a:rPr sz="1600" b="1">
                 <a:solidFill>
                   <a:srgbClr val="333333"/>
                 </a:solidFill>
@@ -3689,17 +3689,17 @@
           <a:p>
             <a:pPr algn="l">
               <a:lnSpc>
-                <a:spcPts val="1430"/>
-              </a:lnSpc>
-              <a:spcBef>
-                <a:spcPts val="200"/>
-              </a:spcBef>
-              <a:spcAft>
-                <a:spcPts val="200"/>
-              </a:spcAft>
-            </a:pPr>
-            <a:r>
-              <a:rPr sz="1100" b="0">
+                <a:spcPts val="1820"/>
+              </a:lnSpc>
+              <a:spcBef>
+                <a:spcPts val="200"/>
+              </a:spcBef>
+              <a:spcAft>
+                <a:spcPts val="200"/>
+              </a:spcAft>
+            </a:pPr>
+            <a:r>
+              <a:rPr sz="1400" b="0">
                 <a:solidFill>
                   <a:srgbClr val="000000"/>
                 </a:solidFill>
@@ -3711,7 +3711,7 @@
           <a:p>
             <a:pPr algn="l">
               <a:lnSpc>
-                <a:spcPts val="1820"/>
+                <a:spcPts val="2080"/>
               </a:lnSpc>
               <a:spcBef>
                 <a:spcPts val="800"/>
@@ -3721,7 +3721,7 @@
               </a:spcAft>
             </a:pPr>
             <a:r>
-              <a:rPr sz="1400" b="1">
+              <a:rPr sz="1600" b="1">
                 <a:solidFill>
                   <a:srgbClr val="1B5C9E"/>
                 </a:solidFill>
@@ -3733,17 +3733,17 @@
           <a:p>
             <a:pPr algn="l">
               <a:lnSpc>
-                <a:spcPts val="1430"/>
-              </a:lnSpc>
-              <a:spcBef>
-                <a:spcPts val="200"/>
-              </a:spcBef>
-              <a:spcAft>
-                <a:spcPts val="200"/>
-              </a:spcAft>
-            </a:pPr>
-            <a:r>
-              <a:rPr sz="1100" b="0">
+                <a:spcPts val="1820"/>
+              </a:lnSpc>
+              <a:spcBef>
+                <a:spcPts val="200"/>
+              </a:spcBef>
+              <a:spcAft>
+                <a:spcPts val="200"/>
+              </a:spcAft>
+            </a:pPr>
+            <a:r>
+              <a:rPr sz="1400" b="0">
                 <a:solidFill>
                   <a:srgbClr val="000000"/>
                 </a:solidFill>
@@ -3755,7 +3755,7 @@
           <a:p>
             <a:pPr algn="l">
               <a:lnSpc>
-                <a:spcPts val="1820"/>
+                <a:spcPts val="2080"/>
               </a:lnSpc>
               <a:spcBef>
                 <a:spcPts val="800"/>
@@ -3765,7 +3765,7 @@
               </a:spcAft>
             </a:pPr>
             <a:r>
-              <a:rPr sz="1400" b="1">
+              <a:rPr sz="1600" b="1">
                 <a:solidFill>
                   <a:srgbClr val="CC3333"/>
                 </a:solidFill>
@@ -3777,17 +3777,17 @@
           <a:p>
             <a:pPr algn="l">
               <a:lnSpc>
-                <a:spcPts val="1430"/>
-              </a:lnSpc>
-              <a:spcBef>
-                <a:spcPts val="200"/>
-              </a:spcBef>
-              <a:spcAft>
-                <a:spcPts val="200"/>
-              </a:spcAft>
-            </a:pPr>
-            <a:r>
-              <a:rPr sz="1100" b="0">
+                <a:spcPts val="1820"/>
+              </a:lnSpc>
+              <a:spcBef>
+                <a:spcPts val="200"/>
+              </a:spcBef>
+              <a:spcAft>
+                <a:spcPts val="200"/>
+              </a:spcAft>
+            </a:pPr>
+            <a:r>
+              <a:rPr sz="1400" b="0">
                 <a:solidFill>
                   <a:srgbClr val="000000"/>
                 </a:solidFill>
@@ -3799,7 +3799,7 @@
           <a:p>
             <a:pPr algn="l">
               <a:lnSpc>
-                <a:spcPts val="1820"/>
+                <a:spcPts val="2080"/>
               </a:lnSpc>
               <a:spcBef>
                 <a:spcPts val="800"/>
@@ -3809,7 +3809,7 @@
               </a:spcAft>
             </a:pPr>
             <a:r>
-              <a:rPr sz="1400" b="1">
+              <a:rPr sz="1600" b="1">
                 <a:solidFill>
                   <a:srgbClr val="008040"/>
                 </a:solidFill>
@@ -3821,17 +3821,17 @@
           <a:p>
             <a:pPr algn="l">
               <a:lnSpc>
-                <a:spcPts val="1430"/>
-              </a:lnSpc>
-              <a:spcBef>
-                <a:spcPts val="200"/>
-              </a:spcBef>
-              <a:spcAft>
-                <a:spcPts val="200"/>
-              </a:spcAft>
-            </a:pPr>
-            <a:r>
-              <a:rPr sz="1100" b="0">
+                <a:spcPts val="1820"/>
+              </a:lnSpc>
+              <a:spcBef>
+                <a:spcPts val="200"/>
+              </a:spcBef>
+              <a:spcAft>
+                <a:spcPts val="200"/>
+              </a:spcAft>
+            </a:pPr>
+            <a:r>
+              <a:rPr sz="1400" b="0">
                 <a:solidFill>
                   <a:srgbClr val="000000"/>
                 </a:solidFill>
@@ -3936,7 +3936,7 @@
           <a:p>
             <a:pPr algn="l">
               <a:lnSpc>
-                <a:spcPts val="1820"/>
+                <a:spcPts val="2080"/>
               </a:lnSpc>
               <a:spcBef>
                 <a:spcPts val="0"/>
@@ -3946,7 +3946,7 @@
               </a:spcAft>
             </a:pPr>
             <a:r>
-              <a:rPr sz="1400" b="1">
+              <a:rPr sz="1600" b="1">
                 <a:solidFill>
                   <a:srgbClr val="1B3A5C"/>
                 </a:solidFill>
@@ -3958,7 +3958,7 @@
           <a:p>
             <a:pPr algn="l">
               <a:lnSpc>
-                <a:spcPts val="1820"/>
+                <a:spcPts val="2080"/>
               </a:lnSpc>
               <a:spcBef>
                 <a:spcPts val="800"/>
@@ -3968,7 +3968,7 @@
               </a:spcAft>
             </a:pPr>
             <a:r>
-              <a:rPr sz="1400" b="1">
+              <a:rPr sz="1600" b="1">
                 <a:solidFill>
                   <a:srgbClr val="333333"/>
                 </a:solidFill>
@@ -3980,17 +3980,17 @@
           <a:p>
             <a:pPr algn="l">
               <a:lnSpc>
-                <a:spcPts val="1430"/>
-              </a:lnSpc>
-              <a:spcBef>
-                <a:spcPts val="200"/>
-              </a:spcBef>
-              <a:spcAft>
-                <a:spcPts val="200"/>
-              </a:spcAft>
-            </a:pPr>
-            <a:r>
-              <a:rPr sz="1100" b="0">
+                <a:spcPts val="1820"/>
+              </a:lnSpc>
+              <a:spcBef>
+                <a:spcPts val="200"/>
+              </a:spcBef>
+              <a:spcAft>
+                <a:spcPts val="200"/>
+              </a:spcAft>
+            </a:pPr>
+            <a:r>
+              <a:rPr sz="1400" b="0">
                 <a:solidFill>
                   <a:srgbClr val="000000"/>
                 </a:solidFill>
@@ -4002,7 +4002,7 @@
           <a:p>
             <a:pPr algn="l">
               <a:lnSpc>
-                <a:spcPts val="1820"/>
+                <a:spcPts val="2080"/>
               </a:lnSpc>
               <a:spcBef>
                 <a:spcPts val="800"/>
@@ -4012,7 +4012,7 @@
               </a:spcAft>
             </a:pPr>
             <a:r>
-              <a:rPr sz="1400" b="1">
+              <a:rPr sz="1600" b="1">
                 <a:solidFill>
                   <a:srgbClr val="1B5C9E"/>
                 </a:solidFill>
@@ -4024,17 +4024,17 @@
           <a:p>
             <a:pPr algn="l">
               <a:lnSpc>
-                <a:spcPts val="1430"/>
-              </a:lnSpc>
-              <a:spcBef>
-                <a:spcPts val="200"/>
-              </a:spcBef>
-              <a:spcAft>
-                <a:spcPts val="200"/>
-              </a:spcAft>
-            </a:pPr>
-            <a:r>
-              <a:rPr sz="1100" b="0">
+                <a:spcPts val="1820"/>
+              </a:lnSpc>
+              <a:spcBef>
+                <a:spcPts val="200"/>
+              </a:spcBef>
+              <a:spcAft>
+                <a:spcPts val="200"/>
+              </a:spcAft>
+            </a:pPr>
+            <a:r>
+              <a:rPr sz="1400" b="0">
                 <a:solidFill>
                   <a:srgbClr val="000000"/>
                 </a:solidFill>
@@ -4046,17 +4046,17 @@
           <a:p>
             <a:pPr algn="l">
               <a:lnSpc>
-                <a:spcPts val="1430"/>
-              </a:lnSpc>
-              <a:spcBef>
-                <a:spcPts val="200"/>
-              </a:spcBef>
-              <a:spcAft>
-                <a:spcPts val="200"/>
-              </a:spcAft>
-            </a:pPr>
-            <a:r>
-              <a:rPr sz="1100" b="0">
+                <a:spcPts val="1820"/>
+              </a:lnSpc>
+              <a:spcBef>
+                <a:spcPts val="200"/>
+              </a:spcBef>
+              <a:spcAft>
+                <a:spcPts val="200"/>
+              </a:spcAft>
+            </a:pPr>
+            <a:r>
+              <a:rPr sz="1400" b="0">
                 <a:solidFill>
                   <a:srgbClr val="000000"/>
                 </a:solidFill>
@@ -4068,17 +4068,17 @@
           <a:p>
             <a:pPr algn="l">
               <a:lnSpc>
-                <a:spcPts val="1430"/>
-              </a:lnSpc>
-              <a:spcBef>
-                <a:spcPts val="200"/>
-              </a:spcBef>
-              <a:spcAft>
-                <a:spcPts val="200"/>
-              </a:spcAft>
-            </a:pPr>
-            <a:r>
-              <a:rPr sz="1100" b="0">
+                <a:spcPts val="1820"/>
+              </a:lnSpc>
+              <a:spcBef>
+                <a:spcPts val="200"/>
+              </a:spcBef>
+              <a:spcAft>
+                <a:spcPts val="200"/>
+              </a:spcAft>
+            </a:pPr>
+            <a:r>
+              <a:rPr sz="1400" b="0">
                 <a:solidFill>
                   <a:srgbClr val="000000"/>
                 </a:solidFill>
@@ -4090,7 +4090,7 @@
           <a:p>
             <a:pPr algn="l">
               <a:lnSpc>
-                <a:spcPts val="1820"/>
+                <a:spcPts val="2080"/>
               </a:lnSpc>
               <a:spcBef>
                 <a:spcPts val="800"/>
@@ -4100,7 +4100,7 @@
               </a:spcAft>
             </a:pPr>
             <a:r>
-              <a:rPr sz="1400" b="1">
+              <a:rPr sz="1600" b="1">
                 <a:solidFill>
                   <a:srgbClr val="CC3333"/>
                 </a:solidFill>
@@ -4112,17 +4112,17 @@
           <a:p>
             <a:pPr algn="l">
               <a:lnSpc>
-                <a:spcPts val="1430"/>
-              </a:lnSpc>
-              <a:spcBef>
-                <a:spcPts val="200"/>
-              </a:spcBef>
-              <a:spcAft>
-                <a:spcPts val="200"/>
-              </a:spcAft>
-            </a:pPr>
-            <a:r>
-              <a:rPr sz="1100" b="0">
+                <a:spcPts val="1820"/>
+              </a:lnSpc>
+              <a:spcBef>
+                <a:spcPts val="200"/>
+              </a:spcBef>
+              <a:spcAft>
+                <a:spcPts val="200"/>
+              </a:spcAft>
+            </a:pPr>
+            <a:r>
+              <a:rPr sz="1400" b="0">
                 <a:solidFill>
                   <a:srgbClr val="000000"/>
                 </a:solidFill>
@@ -4134,7 +4134,7 @@
           <a:p>
             <a:pPr algn="l">
               <a:lnSpc>
-                <a:spcPts val="1820"/>
+                <a:spcPts val="2080"/>
               </a:lnSpc>
               <a:spcBef>
                 <a:spcPts val="800"/>
@@ -4144,7 +4144,7 @@
               </a:spcAft>
             </a:pPr>
             <a:r>
-              <a:rPr sz="1400" b="1">
+              <a:rPr sz="1600" b="1">
                 <a:solidFill>
                   <a:srgbClr val="008040"/>
                 </a:solidFill>
@@ -4156,17 +4156,17 @@
           <a:p>
             <a:pPr algn="l">
               <a:lnSpc>
-                <a:spcPts val="1430"/>
-              </a:lnSpc>
-              <a:spcBef>
-                <a:spcPts val="200"/>
-              </a:spcBef>
-              <a:spcAft>
-                <a:spcPts val="200"/>
-              </a:spcAft>
-            </a:pPr>
-            <a:r>
-              <a:rPr sz="1100" b="0">
+                <a:spcPts val="1820"/>
+              </a:lnSpc>
+              <a:spcBef>
+                <a:spcPts val="200"/>
+              </a:spcBef>
+              <a:spcAft>
+                <a:spcPts val="200"/>
+              </a:spcAft>
+            </a:pPr>
+            <a:r>
+              <a:rPr sz="1400" b="0">
                 <a:solidFill>
                   <a:srgbClr val="000000"/>
                 </a:solidFill>
@@ -4271,7 +4271,7 @@
           <a:p>
             <a:pPr algn="l">
               <a:lnSpc>
-                <a:spcPts val="1820"/>
+                <a:spcPts val="2080"/>
               </a:lnSpc>
               <a:spcBef>
                 <a:spcPts val="0"/>
@@ -4281,7 +4281,7 @@
               </a:spcAft>
             </a:pPr>
             <a:r>
-              <a:rPr sz="1400" b="1">
+              <a:rPr sz="1600" b="1">
                 <a:solidFill>
                   <a:srgbClr val="1B3A5C"/>
                 </a:solidFill>
@@ -4293,7 +4293,7 @@
           <a:p>
             <a:pPr algn="l">
               <a:lnSpc>
-                <a:spcPts val="1820"/>
+                <a:spcPts val="2080"/>
               </a:lnSpc>
               <a:spcBef>
                 <a:spcPts val="800"/>
@@ -4303,7 +4303,7 @@
               </a:spcAft>
             </a:pPr>
             <a:r>
-              <a:rPr sz="1400" b="1">
+              <a:rPr sz="1600" b="1">
                 <a:solidFill>
                   <a:srgbClr val="333333"/>
                 </a:solidFill>
@@ -4315,17 +4315,17 @@
           <a:p>
             <a:pPr algn="l">
               <a:lnSpc>
-                <a:spcPts val="1430"/>
-              </a:lnSpc>
-              <a:spcBef>
-                <a:spcPts val="200"/>
-              </a:spcBef>
-              <a:spcAft>
-                <a:spcPts val="200"/>
-              </a:spcAft>
-            </a:pPr>
-            <a:r>
-              <a:rPr sz="1100" b="0">
+                <a:spcPts val="1820"/>
+              </a:lnSpc>
+              <a:spcBef>
+                <a:spcPts val="200"/>
+              </a:spcBef>
+              <a:spcAft>
+                <a:spcPts val="200"/>
+              </a:spcAft>
+            </a:pPr>
+            <a:r>
+              <a:rPr sz="1400" b="0">
                 <a:solidFill>
                   <a:srgbClr val="000000"/>
                 </a:solidFill>
@@ -4337,7 +4337,7 @@
           <a:p>
             <a:pPr algn="l">
               <a:lnSpc>
-                <a:spcPts val="1820"/>
+                <a:spcPts val="2080"/>
               </a:lnSpc>
               <a:spcBef>
                 <a:spcPts val="800"/>
@@ -4347,7 +4347,7 @@
               </a:spcAft>
             </a:pPr>
             <a:r>
-              <a:rPr sz="1400" b="1">
+              <a:rPr sz="1600" b="1">
                 <a:solidFill>
                   <a:srgbClr val="1B5C9E"/>
                 </a:solidFill>
@@ -4359,17 +4359,17 @@
           <a:p>
             <a:pPr algn="l">
               <a:lnSpc>
-                <a:spcPts val="1430"/>
-              </a:lnSpc>
-              <a:spcBef>
-                <a:spcPts val="200"/>
-              </a:spcBef>
-              <a:spcAft>
-                <a:spcPts val="200"/>
-              </a:spcAft>
-            </a:pPr>
-            <a:r>
-              <a:rPr sz="1100" b="0">
+                <a:spcPts val="1820"/>
+              </a:lnSpc>
+              <a:spcBef>
+                <a:spcPts val="200"/>
+              </a:spcBef>
+              <a:spcAft>
+                <a:spcPts val="200"/>
+              </a:spcAft>
+            </a:pPr>
+            <a:r>
+              <a:rPr sz="1400" b="0">
                 <a:solidFill>
                   <a:srgbClr val="000000"/>
                 </a:solidFill>
@@ -4381,17 +4381,17 @@
           <a:p>
             <a:pPr algn="l">
               <a:lnSpc>
-                <a:spcPts val="1430"/>
-              </a:lnSpc>
-              <a:spcBef>
-                <a:spcPts val="200"/>
-              </a:spcBef>
-              <a:spcAft>
-                <a:spcPts val="200"/>
-              </a:spcAft>
-            </a:pPr>
-            <a:r>
-              <a:rPr sz="1100" b="0">
+                <a:spcPts val="1820"/>
+              </a:lnSpc>
+              <a:spcBef>
+                <a:spcPts val="200"/>
+              </a:spcBef>
+              <a:spcAft>
+                <a:spcPts val="200"/>
+              </a:spcAft>
+            </a:pPr>
+            <a:r>
+              <a:rPr sz="1400" b="0">
                 <a:solidFill>
                   <a:srgbClr val="000000"/>
                 </a:solidFill>
@@ -4403,7 +4403,7 @@
           <a:p>
             <a:pPr algn="l">
               <a:lnSpc>
-                <a:spcPts val="1820"/>
+                <a:spcPts val="2080"/>
               </a:lnSpc>
               <a:spcBef>
                 <a:spcPts val="800"/>
@@ -4413,7 +4413,7 @@
               </a:spcAft>
             </a:pPr>
             <a:r>
-              <a:rPr sz="1400" b="1">
+              <a:rPr sz="1600" b="1">
                 <a:solidFill>
                   <a:srgbClr val="CC3333"/>
                 </a:solidFill>
@@ -4425,17 +4425,17 @@
           <a:p>
             <a:pPr algn="l">
               <a:lnSpc>
-                <a:spcPts val="1430"/>
-              </a:lnSpc>
-              <a:spcBef>
-                <a:spcPts val="200"/>
-              </a:spcBef>
-              <a:spcAft>
-                <a:spcPts val="200"/>
-              </a:spcAft>
-            </a:pPr>
-            <a:r>
-              <a:rPr sz="1100" b="0">
+                <a:spcPts val="1820"/>
+              </a:lnSpc>
+              <a:spcBef>
+                <a:spcPts val="200"/>
+              </a:spcBef>
+              <a:spcAft>
+                <a:spcPts val="200"/>
+              </a:spcAft>
+            </a:pPr>
+            <a:r>
+              <a:rPr sz="1400" b="0">
                 <a:solidFill>
                   <a:srgbClr val="000000"/>
                 </a:solidFill>
@@ -4447,7 +4447,7 @@
           <a:p>
             <a:pPr algn="l">
               <a:lnSpc>
-                <a:spcPts val="1820"/>
+                <a:spcPts val="2080"/>
               </a:lnSpc>
               <a:spcBef>
                 <a:spcPts val="800"/>
@@ -4457,7 +4457,7 @@
               </a:spcAft>
             </a:pPr>
             <a:r>
-              <a:rPr sz="1400" b="1">
+              <a:rPr sz="1600" b="1">
                 <a:solidFill>
                   <a:srgbClr val="008040"/>
                 </a:solidFill>
@@ -4469,17 +4469,17 @@
           <a:p>
             <a:pPr algn="l">
               <a:lnSpc>
-                <a:spcPts val="1430"/>
-              </a:lnSpc>
-              <a:spcBef>
-                <a:spcPts val="200"/>
-              </a:spcBef>
-              <a:spcAft>
-                <a:spcPts val="200"/>
-              </a:spcAft>
-            </a:pPr>
-            <a:r>
-              <a:rPr sz="1100" b="0">
+                <a:spcPts val="1820"/>
+              </a:lnSpc>
+              <a:spcBef>
+                <a:spcPts val="200"/>
+              </a:spcBef>
+              <a:spcAft>
+                <a:spcPts val="200"/>
+              </a:spcAft>
+            </a:pPr>
+            <a:r>
+              <a:rPr sz="1400" b="0">
                 <a:solidFill>
                   <a:srgbClr val="000000"/>
                 </a:solidFill>
@@ -4584,7 +4584,7 @@
           <a:p>
             <a:pPr algn="l">
               <a:lnSpc>
-                <a:spcPts val="1820"/>
+                <a:spcPts val="2080"/>
               </a:lnSpc>
               <a:spcBef>
                 <a:spcPts val="0"/>
@@ -4594,7 +4594,7 @@
               </a:spcAft>
             </a:pPr>
             <a:r>
-              <a:rPr sz="1400" b="1">
+              <a:rPr sz="1600" b="1">
                 <a:solidFill>
                   <a:srgbClr val="1B3A5C"/>
                 </a:solidFill>
@@ -4606,7 +4606,7 @@
           <a:p>
             <a:pPr algn="l">
               <a:lnSpc>
-                <a:spcPts val="1820"/>
+                <a:spcPts val="2080"/>
               </a:lnSpc>
               <a:spcBef>
                 <a:spcPts val="800"/>
@@ -4616,7 +4616,7 @@
               </a:spcAft>
             </a:pPr>
             <a:r>
-              <a:rPr sz="1400" b="1">
+              <a:rPr sz="1600" b="1">
                 <a:solidFill>
                   <a:srgbClr val="333333"/>
                 </a:solidFill>
@@ -4628,17 +4628,17 @@
           <a:p>
             <a:pPr algn="l">
               <a:lnSpc>
-                <a:spcPts val="1430"/>
-              </a:lnSpc>
-              <a:spcBef>
-                <a:spcPts val="200"/>
-              </a:spcBef>
-              <a:spcAft>
-                <a:spcPts val="200"/>
-              </a:spcAft>
-            </a:pPr>
-            <a:r>
-              <a:rPr sz="1100" b="0">
+                <a:spcPts val="1820"/>
+              </a:lnSpc>
+              <a:spcBef>
+                <a:spcPts val="200"/>
+              </a:spcBef>
+              <a:spcAft>
+                <a:spcPts val="200"/>
+              </a:spcAft>
+            </a:pPr>
+            <a:r>
+              <a:rPr sz="1400" b="0">
                 <a:solidFill>
                   <a:srgbClr val="000000"/>
                 </a:solidFill>
@@ -4650,7 +4650,7 @@
           <a:p>
             <a:pPr algn="l">
               <a:lnSpc>
-                <a:spcPts val="1820"/>
+                <a:spcPts val="2080"/>
               </a:lnSpc>
               <a:spcBef>
                 <a:spcPts val="800"/>
@@ -4660,7 +4660,7 @@
               </a:spcAft>
             </a:pPr>
             <a:r>
-              <a:rPr sz="1400" b="1">
+              <a:rPr sz="1600" b="1">
                 <a:solidFill>
                   <a:srgbClr val="1B5C9E"/>
                 </a:solidFill>
@@ -4672,17 +4672,17 @@
           <a:p>
             <a:pPr algn="l">
               <a:lnSpc>
-                <a:spcPts val="1430"/>
-              </a:lnSpc>
-              <a:spcBef>
-                <a:spcPts val="200"/>
-              </a:spcBef>
-              <a:spcAft>
-                <a:spcPts val="200"/>
-              </a:spcAft>
-            </a:pPr>
-            <a:r>
-              <a:rPr sz="1100" b="0">
+                <a:spcPts val="1820"/>
+              </a:lnSpc>
+              <a:spcBef>
+                <a:spcPts val="200"/>
+              </a:spcBef>
+              <a:spcAft>
+                <a:spcPts val="200"/>
+              </a:spcAft>
+            </a:pPr>
+            <a:r>
+              <a:rPr sz="1400" b="0">
                 <a:solidFill>
                   <a:srgbClr val="000000"/>
                 </a:solidFill>
@@ -4694,17 +4694,17 @@
           <a:p>
             <a:pPr algn="l">
               <a:lnSpc>
-                <a:spcPts val="1430"/>
-              </a:lnSpc>
-              <a:spcBef>
-                <a:spcPts val="200"/>
-              </a:spcBef>
-              <a:spcAft>
-                <a:spcPts val="200"/>
-              </a:spcAft>
-            </a:pPr>
-            <a:r>
-              <a:rPr sz="1100" b="0">
+                <a:spcPts val="1820"/>
+              </a:lnSpc>
+              <a:spcBef>
+                <a:spcPts val="200"/>
+              </a:spcBef>
+              <a:spcAft>
+                <a:spcPts val="200"/>
+              </a:spcAft>
+            </a:pPr>
+            <a:r>
+              <a:rPr sz="1400" b="0">
                 <a:solidFill>
                   <a:srgbClr val="000000"/>
                 </a:solidFill>
@@ -4716,17 +4716,17 @@
           <a:p>
             <a:pPr algn="l">
               <a:lnSpc>
-                <a:spcPts val="1430"/>
-              </a:lnSpc>
-              <a:spcBef>
-                <a:spcPts val="200"/>
-              </a:spcBef>
-              <a:spcAft>
-                <a:spcPts val="200"/>
-              </a:spcAft>
-            </a:pPr>
-            <a:r>
-              <a:rPr sz="1100" b="0">
+                <a:spcPts val="1820"/>
+              </a:lnSpc>
+              <a:spcBef>
+                <a:spcPts val="200"/>
+              </a:spcBef>
+              <a:spcAft>
+                <a:spcPts val="200"/>
+              </a:spcAft>
+            </a:pPr>
+            <a:r>
+              <a:rPr sz="1400" b="0">
                 <a:solidFill>
                   <a:srgbClr val="000000"/>
                 </a:solidFill>
@@ -4738,7 +4738,7 @@
           <a:p>
             <a:pPr algn="l">
               <a:lnSpc>
-                <a:spcPts val="1820"/>
+                <a:spcPts val="2080"/>
               </a:lnSpc>
               <a:spcBef>
                 <a:spcPts val="800"/>
@@ -4748,7 +4748,7 @@
               </a:spcAft>
             </a:pPr>
             <a:r>
-              <a:rPr sz="1400" b="1">
+              <a:rPr sz="1600" b="1">
                 <a:solidFill>
                   <a:srgbClr val="CC3333"/>
                 </a:solidFill>
@@ -4760,17 +4760,17 @@
           <a:p>
             <a:pPr algn="l">
               <a:lnSpc>
-                <a:spcPts val="1430"/>
-              </a:lnSpc>
-              <a:spcBef>
-                <a:spcPts val="200"/>
-              </a:spcBef>
-              <a:spcAft>
-                <a:spcPts val="200"/>
-              </a:spcAft>
-            </a:pPr>
-            <a:r>
-              <a:rPr sz="1100" b="0">
+                <a:spcPts val="1820"/>
+              </a:lnSpc>
+              <a:spcBef>
+                <a:spcPts val="200"/>
+              </a:spcBef>
+              <a:spcAft>
+                <a:spcPts val="200"/>
+              </a:spcAft>
+            </a:pPr>
+            <a:r>
+              <a:rPr sz="1400" b="0">
                 <a:solidFill>
                   <a:srgbClr val="000000"/>
                 </a:solidFill>
@@ -4782,7 +4782,7 @@
           <a:p>
             <a:pPr algn="l">
               <a:lnSpc>
-                <a:spcPts val="1820"/>
+                <a:spcPts val="2080"/>
               </a:lnSpc>
               <a:spcBef>
                 <a:spcPts val="800"/>
@@ -4792,7 +4792,7 @@
               </a:spcAft>
             </a:pPr>
             <a:r>
-              <a:rPr sz="1400" b="1">
+              <a:rPr sz="1600" b="1">
                 <a:solidFill>
                   <a:srgbClr val="008040"/>
                 </a:solidFill>
@@ -4804,17 +4804,17 @@
           <a:p>
             <a:pPr algn="l">
               <a:lnSpc>
-                <a:spcPts val="1430"/>
-              </a:lnSpc>
-              <a:spcBef>
-                <a:spcPts val="200"/>
-              </a:spcBef>
-              <a:spcAft>
-                <a:spcPts val="200"/>
-              </a:spcAft>
-            </a:pPr>
-            <a:r>
-              <a:rPr sz="1100" b="0">
+                <a:spcPts val="1820"/>
+              </a:lnSpc>
+              <a:spcBef>
+                <a:spcPts val="200"/>
+              </a:spcBef>
+              <a:spcAft>
+                <a:spcPts val="200"/>
+              </a:spcAft>
+            </a:pPr>
+            <a:r>
+              <a:rPr sz="1400" b="0">
                 <a:solidFill>
                   <a:srgbClr val="000000"/>
                 </a:solidFill>
@@ -4919,7 +4919,7 @@
           <a:p>
             <a:pPr algn="l">
               <a:lnSpc>
-                <a:spcPts val="1820"/>
+                <a:spcPts val="2080"/>
               </a:lnSpc>
               <a:spcBef>
                 <a:spcPts val="0"/>
@@ -4929,7 +4929,7 @@
               </a:spcAft>
             </a:pPr>
             <a:r>
-              <a:rPr sz="1400" b="1">
+              <a:rPr sz="1600" b="1">
                 <a:solidFill>
                   <a:srgbClr val="1B3A5C"/>
                 </a:solidFill>
@@ -4941,7 +4941,7 @@
           <a:p>
             <a:pPr algn="l">
               <a:lnSpc>
-                <a:spcPts val="1820"/>
+                <a:spcPts val="2080"/>
               </a:lnSpc>
               <a:spcBef>
                 <a:spcPts val="800"/>
@@ -4951,7 +4951,7 @@
               </a:spcAft>
             </a:pPr>
             <a:r>
-              <a:rPr sz="1400" b="1">
+              <a:rPr sz="1600" b="1">
                 <a:solidFill>
                   <a:srgbClr val="333333"/>
                 </a:solidFill>
@@ -4963,17 +4963,17 @@
           <a:p>
             <a:pPr algn="l">
               <a:lnSpc>
-                <a:spcPts val="1430"/>
-              </a:lnSpc>
-              <a:spcBef>
-                <a:spcPts val="200"/>
-              </a:spcBef>
-              <a:spcAft>
-                <a:spcPts val="200"/>
-              </a:spcAft>
-            </a:pPr>
-            <a:r>
-              <a:rPr sz="1100" b="0">
+                <a:spcPts val="1820"/>
+              </a:lnSpc>
+              <a:spcBef>
+                <a:spcPts val="200"/>
+              </a:spcBef>
+              <a:spcAft>
+                <a:spcPts val="200"/>
+              </a:spcAft>
+            </a:pPr>
+            <a:r>
+              <a:rPr sz="1400" b="0">
                 <a:solidFill>
                   <a:srgbClr val="000000"/>
                 </a:solidFill>
@@ -4985,7 +4985,7 @@
           <a:p>
             <a:pPr algn="l">
               <a:lnSpc>
-                <a:spcPts val="1820"/>
+                <a:spcPts val="2080"/>
               </a:lnSpc>
               <a:spcBef>
                 <a:spcPts val="800"/>
@@ -4995,7 +4995,7 @@
               </a:spcAft>
             </a:pPr>
             <a:r>
-              <a:rPr sz="1400" b="1">
+              <a:rPr sz="1600" b="1">
                 <a:solidFill>
                   <a:srgbClr val="1B5C9E"/>
                 </a:solidFill>
@@ -5007,17 +5007,17 @@
           <a:p>
             <a:pPr algn="l">
               <a:lnSpc>
-                <a:spcPts val="1430"/>
-              </a:lnSpc>
-              <a:spcBef>
-                <a:spcPts val="200"/>
-              </a:spcBef>
-              <a:spcAft>
-                <a:spcPts val="200"/>
-              </a:spcAft>
-            </a:pPr>
-            <a:r>
-              <a:rPr sz="1100" b="0">
+                <a:spcPts val="1820"/>
+              </a:lnSpc>
+              <a:spcBef>
+                <a:spcPts val="200"/>
+              </a:spcBef>
+              <a:spcAft>
+                <a:spcPts val="200"/>
+              </a:spcAft>
+            </a:pPr>
+            <a:r>
+              <a:rPr sz="1400" b="0">
                 <a:solidFill>
                   <a:srgbClr val="000000"/>
                 </a:solidFill>
@@ -5029,7 +5029,7 @@
           <a:p>
             <a:pPr algn="l">
               <a:lnSpc>
-                <a:spcPts val="1820"/>
+                <a:spcPts val="2080"/>
               </a:lnSpc>
               <a:spcBef>
                 <a:spcPts val="800"/>
@@ -5039,7 +5039,7 @@
               </a:spcAft>
             </a:pPr>
             <a:r>
-              <a:rPr sz="1400" b="1">
+              <a:rPr sz="1600" b="1">
                 <a:solidFill>
                   <a:srgbClr val="CC3333"/>
                 </a:solidFill>
@@ -5051,17 +5051,17 @@
           <a:p>
             <a:pPr algn="l">
               <a:lnSpc>
-                <a:spcPts val="1430"/>
-              </a:lnSpc>
-              <a:spcBef>
-                <a:spcPts val="200"/>
-              </a:spcBef>
-              <a:spcAft>
-                <a:spcPts val="200"/>
-              </a:spcAft>
-            </a:pPr>
-            <a:r>
-              <a:rPr sz="1100" b="0">
+                <a:spcPts val="1820"/>
+              </a:lnSpc>
+              <a:spcBef>
+                <a:spcPts val="200"/>
+              </a:spcBef>
+              <a:spcAft>
+                <a:spcPts val="200"/>
+              </a:spcAft>
+            </a:pPr>
+            <a:r>
+              <a:rPr sz="1400" b="0">
                 <a:solidFill>
                   <a:srgbClr val="000000"/>
                 </a:solidFill>
@@ -5073,7 +5073,7 @@
           <a:p>
             <a:pPr algn="l">
               <a:lnSpc>
-                <a:spcPts val="1820"/>
+                <a:spcPts val="2080"/>
               </a:lnSpc>
               <a:spcBef>
                 <a:spcPts val="800"/>
@@ -5083,7 +5083,7 @@
               </a:spcAft>
             </a:pPr>
             <a:r>
-              <a:rPr sz="1400" b="1">
+              <a:rPr sz="1600" b="1">
                 <a:solidFill>
                   <a:srgbClr val="008040"/>
                 </a:solidFill>
@@ -5095,17 +5095,17 @@
           <a:p>
             <a:pPr algn="l">
               <a:lnSpc>
-                <a:spcPts val="1430"/>
-              </a:lnSpc>
-              <a:spcBef>
-                <a:spcPts val="200"/>
-              </a:spcBef>
-              <a:spcAft>
-                <a:spcPts val="200"/>
-              </a:spcAft>
-            </a:pPr>
-            <a:r>
-              <a:rPr sz="1100" b="0">
+                <a:spcPts val="1820"/>
+              </a:lnSpc>
+              <a:spcBef>
+                <a:spcPts val="200"/>
+              </a:spcBef>
+              <a:spcAft>
+                <a:spcPts val="200"/>
+              </a:spcAft>
+            </a:pPr>
+            <a:r>
+              <a:rPr sz="1400" b="0">
                 <a:solidFill>
                   <a:srgbClr val="000000"/>
                 </a:solidFill>
@@ -5210,7 +5210,7 @@
           <a:p>
             <a:pPr algn="l">
               <a:lnSpc>
-                <a:spcPts val="1820"/>
+                <a:spcPts val="2080"/>
               </a:lnSpc>
               <a:spcBef>
                 <a:spcPts val="0"/>
@@ -5220,7 +5220,7 @@
               </a:spcAft>
             </a:pPr>
             <a:r>
-              <a:rPr sz="1400" b="1">
+              <a:rPr sz="1600" b="1">
                 <a:solidFill>
                   <a:srgbClr val="1B3A5C"/>
                 </a:solidFill>
@@ -5232,7 +5232,7 @@
           <a:p>
             <a:pPr algn="l">
               <a:lnSpc>
-                <a:spcPts val="1820"/>
+                <a:spcPts val="2080"/>
               </a:lnSpc>
               <a:spcBef>
                 <a:spcPts val="800"/>
@@ -5242,7 +5242,7 @@
               </a:spcAft>
             </a:pPr>
             <a:r>
-              <a:rPr sz="1400" b="1">
+              <a:rPr sz="1600" b="1">
                 <a:solidFill>
                   <a:srgbClr val="333333"/>
                 </a:solidFill>
@@ -5254,17 +5254,17 @@
           <a:p>
             <a:pPr algn="l">
               <a:lnSpc>
-                <a:spcPts val="1430"/>
-              </a:lnSpc>
-              <a:spcBef>
-                <a:spcPts val="200"/>
-              </a:spcBef>
-              <a:spcAft>
-                <a:spcPts val="200"/>
-              </a:spcAft>
-            </a:pPr>
-            <a:r>
-              <a:rPr sz="1100" b="0">
+                <a:spcPts val="1820"/>
+              </a:lnSpc>
+              <a:spcBef>
+                <a:spcPts val="200"/>
+              </a:spcBef>
+              <a:spcAft>
+                <a:spcPts val="200"/>
+              </a:spcAft>
+            </a:pPr>
+            <a:r>
+              <a:rPr sz="1400" b="0">
                 <a:solidFill>
                   <a:srgbClr val="000000"/>
                 </a:solidFill>
@@ -5276,7 +5276,7 @@
           <a:p>
             <a:pPr algn="l">
               <a:lnSpc>
-                <a:spcPts val="1820"/>
+                <a:spcPts val="2080"/>
               </a:lnSpc>
               <a:spcBef>
                 <a:spcPts val="800"/>
@@ -5286,7 +5286,7 @@
               </a:spcAft>
             </a:pPr>
             <a:r>
-              <a:rPr sz="1400" b="1">
+              <a:rPr sz="1600" b="1">
                 <a:solidFill>
                   <a:srgbClr val="1B5C9E"/>
                 </a:solidFill>
@@ -5298,17 +5298,17 @@
           <a:p>
             <a:pPr algn="l">
               <a:lnSpc>
-                <a:spcPts val="1430"/>
-              </a:lnSpc>
-              <a:spcBef>
-                <a:spcPts val="200"/>
-              </a:spcBef>
-              <a:spcAft>
-                <a:spcPts val="200"/>
-              </a:spcAft>
-            </a:pPr>
-            <a:r>
-              <a:rPr sz="1100" b="0">
+                <a:spcPts val="1820"/>
+              </a:lnSpc>
+              <a:spcBef>
+                <a:spcPts val="200"/>
+              </a:spcBef>
+              <a:spcAft>
+                <a:spcPts val="200"/>
+              </a:spcAft>
+            </a:pPr>
+            <a:r>
+              <a:rPr sz="1400" b="0">
                 <a:solidFill>
                   <a:srgbClr val="000000"/>
                 </a:solidFill>
@@ -5320,17 +5320,17 @@
           <a:p>
             <a:pPr algn="l">
               <a:lnSpc>
-                <a:spcPts val="1430"/>
-              </a:lnSpc>
-              <a:spcBef>
-                <a:spcPts val="200"/>
-              </a:spcBef>
-              <a:spcAft>
-                <a:spcPts val="200"/>
-              </a:spcAft>
-            </a:pPr>
-            <a:r>
-              <a:rPr sz="1100" b="0">
+                <a:spcPts val="1820"/>
+              </a:lnSpc>
+              <a:spcBef>
+                <a:spcPts val="200"/>
+              </a:spcBef>
+              <a:spcAft>
+                <a:spcPts val="200"/>
+              </a:spcAft>
+            </a:pPr>
+            <a:r>
+              <a:rPr sz="1400" b="0">
                 <a:solidFill>
                   <a:srgbClr val="000000"/>
                 </a:solidFill>
@@ -5342,7 +5342,7 @@
           <a:p>
             <a:pPr algn="l">
               <a:lnSpc>
-                <a:spcPts val="1820"/>
+                <a:spcPts val="2080"/>
               </a:lnSpc>
               <a:spcBef>
                 <a:spcPts val="800"/>
@@ -5352,7 +5352,7 @@
               </a:spcAft>
             </a:pPr>
             <a:r>
-              <a:rPr sz="1400" b="1">
+              <a:rPr sz="1600" b="1">
                 <a:solidFill>
                   <a:srgbClr val="CC3333"/>
                 </a:solidFill>
@@ -5364,17 +5364,17 @@
           <a:p>
             <a:pPr algn="l">
               <a:lnSpc>
-                <a:spcPts val="1430"/>
-              </a:lnSpc>
-              <a:spcBef>
-                <a:spcPts val="200"/>
-              </a:spcBef>
-              <a:spcAft>
-                <a:spcPts val="200"/>
-              </a:spcAft>
-            </a:pPr>
-            <a:r>
-              <a:rPr sz="1100" b="0">
+                <a:spcPts val="1820"/>
+              </a:lnSpc>
+              <a:spcBef>
+                <a:spcPts val="200"/>
+              </a:spcBef>
+              <a:spcAft>
+                <a:spcPts val="200"/>
+              </a:spcAft>
+            </a:pPr>
+            <a:r>
+              <a:rPr sz="1400" b="0">
                 <a:solidFill>
                   <a:srgbClr val="000000"/>
                 </a:solidFill>
@@ -5386,7 +5386,7 @@
           <a:p>
             <a:pPr algn="l">
               <a:lnSpc>
-                <a:spcPts val="1820"/>
+                <a:spcPts val="2080"/>
               </a:lnSpc>
               <a:spcBef>
                 <a:spcPts val="800"/>
@@ -5396,7 +5396,7 @@
               </a:spcAft>
             </a:pPr>
             <a:r>
-              <a:rPr sz="1400" b="1">
+              <a:rPr sz="1600" b="1">
                 <a:solidFill>
                   <a:srgbClr val="008040"/>
                 </a:solidFill>
@@ -5408,17 +5408,17 @@
           <a:p>
             <a:pPr algn="l">
               <a:lnSpc>
-                <a:spcPts val="1430"/>
-              </a:lnSpc>
-              <a:spcBef>
-                <a:spcPts val="200"/>
-              </a:spcBef>
-              <a:spcAft>
-                <a:spcPts val="200"/>
-              </a:spcAft>
-            </a:pPr>
-            <a:r>
-              <a:rPr sz="1100" b="0">
+                <a:spcPts val="1820"/>
+              </a:lnSpc>
+              <a:spcBef>
+                <a:spcPts val="200"/>
+              </a:spcBef>
+              <a:spcAft>
+                <a:spcPts val="200"/>
+              </a:spcAft>
+            </a:pPr>
+            <a:r>
+              <a:rPr sz="1400" b="0">
                 <a:solidFill>
                   <a:srgbClr val="000000"/>
                 </a:solidFill>
@@ -5523,7 +5523,7 @@
           <a:p>
             <a:pPr algn="l">
               <a:lnSpc>
-                <a:spcPts val="1820"/>
+                <a:spcPts val="2080"/>
               </a:lnSpc>
               <a:spcBef>
                 <a:spcPts val="0"/>
@@ -5533,7 +5533,7 @@
               </a:spcAft>
             </a:pPr>
             <a:r>
-              <a:rPr sz="1400" b="1">
+              <a:rPr sz="1600" b="1">
                 <a:solidFill>
                   <a:srgbClr val="1B3A5C"/>
                 </a:solidFill>
@@ -5545,7 +5545,7 @@
           <a:p>
             <a:pPr algn="l">
               <a:lnSpc>
-                <a:spcPts val="1820"/>
+                <a:spcPts val="2080"/>
               </a:lnSpc>
               <a:spcBef>
                 <a:spcPts val="800"/>
@@ -5555,7 +5555,7 @@
               </a:spcAft>
             </a:pPr>
             <a:r>
-              <a:rPr sz="1400" b="1">
+              <a:rPr sz="1600" b="1">
                 <a:solidFill>
                   <a:srgbClr val="333333"/>
                 </a:solidFill>
@@ -5567,17 +5567,17 @@
           <a:p>
             <a:pPr algn="l">
               <a:lnSpc>
-                <a:spcPts val="1430"/>
-              </a:lnSpc>
-              <a:spcBef>
-                <a:spcPts val="200"/>
-              </a:spcBef>
-              <a:spcAft>
-                <a:spcPts val="200"/>
-              </a:spcAft>
-            </a:pPr>
-            <a:r>
-              <a:rPr sz="1100" b="0">
+                <a:spcPts val="1820"/>
+              </a:lnSpc>
+              <a:spcBef>
+                <a:spcPts val="200"/>
+              </a:spcBef>
+              <a:spcAft>
+                <a:spcPts val="200"/>
+              </a:spcAft>
+            </a:pPr>
+            <a:r>
+              <a:rPr sz="1400" b="0">
                 <a:solidFill>
                   <a:srgbClr val="000000"/>
                 </a:solidFill>
@@ -5589,7 +5589,7 @@
           <a:p>
             <a:pPr algn="l">
               <a:lnSpc>
-                <a:spcPts val="1820"/>
+                <a:spcPts val="2080"/>
               </a:lnSpc>
               <a:spcBef>
                 <a:spcPts val="800"/>
@@ -5599,7 +5599,7 @@
               </a:spcAft>
             </a:pPr>
             <a:r>
-              <a:rPr sz="1400" b="1">
+              <a:rPr sz="1600" b="1">
                 <a:solidFill>
                   <a:srgbClr val="1B5C9E"/>
                 </a:solidFill>
@@ -5611,17 +5611,17 @@
           <a:p>
             <a:pPr algn="l">
               <a:lnSpc>
-                <a:spcPts val="1430"/>
-              </a:lnSpc>
-              <a:spcBef>
-                <a:spcPts val="200"/>
-              </a:spcBef>
-              <a:spcAft>
-                <a:spcPts val="200"/>
-              </a:spcAft>
-            </a:pPr>
-            <a:r>
-              <a:rPr sz="1100" b="0">
+                <a:spcPts val="1820"/>
+              </a:lnSpc>
+              <a:spcBef>
+                <a:spcPts val="200"/>
+              </a:spcBef>
+              <a:spcAft>
+                <a:spcPts val="200"/>
+              </a:spcAft>
+            </a:pPr>
+            <a:r>
+              <a:rPr sz="1400" b="0">
                 <a:solidFill>
                   <a:srgbClr val="000000"/>
                 </a:solidFill>
@@ -5633,17 +5633,17 @@
           <a:p>
             <a:pPr algn="l">
               <a:lnSpc>
-                <a:spcPts val="1430"/>
-              </a:lnSpc>
-              <a:spcBef>
-                <a:spcPts val="200"/>
-              </a:spcBef>
-              <a:spcAft>
-                <a:spcPts val="200"/>
-              </a:spcAft>
-            </a:pPr>
-            <a:r>
-              <a:rPr sz="1100" b="0">
+                <a:spcPts val="1820"/>
+              </a:lnSpc>
+              <a:spcBef>
+                <a:spcPts val="200"/>
+              </a:spcBef>
+              <a:spcAft>
+                <a:spcPts val="200"/>
+              </a:spcAft>
+            </a:pPr>
+            <a:r>
+              <a:rPr sz="1400" b="0">
                 <a:solidFill>
                   <a:srgbClr val="000000"/>
                 </a:solidFill>
@@ -5655,17 +5655,17 @@
           <a:p>
             <a:pPr algn="l">
               <a:lnSpc>
-                <a:spcPts val="1430"/>
-              </a:lnSpc>
-              <a:spcBef>
-                <a:spcPts val="200"/>
-              </a:spcBef>
-              <a:spcAft>
-                <a:spcPts val="200"/>
-              </a:spcAft>
-            </a:pPr>
-            <a:r>
-              <a:rPr sz="1100" b="0">
+                <a:spcPts val="1820"/>
+              </a:lnSpc>
+              <a:spcBef>
+                <a:spcPts val="200"/>
+              </a:spcBef>
+              <a:spcAft>
+                <a:spcPts val="200"/>
+              </a:spcAft>
+            </a:pPr>
+            <a:r>
+              <a:rPr sz="1400" b="0">
                 <a:solidFill>
                   <a:srgbClr val="000000"/>
                 </a:solidFill>
@@ -5677,7 +5677,7 @@
           <a:p>
             <a:pPr algn="l">
               <a:lnSpc>
-                <a:spcPts val="1820"/>
+                <a:spcPts val="2080"/>
               </a:lnSpc>
               <a:spcBef>
                 <a:spcPts val="800"/>
@@ -5687,7 +5687,7 @@
               </a:spcAft>
             </a:pPr>
             <a:r>
-              <a:rPr sz="1400" b="1">
+              <a:rPr sz="1600" b="1">
                 <a:solidFill>
                   <a:srgbClr val="CC3333"/>
                 </a:solidFill>
@@ -5699,17 +5699,17 @@
           <a:p>
             <a:pPr algn="l">
               <a:lnSpc>
-                <a:spcPts val="1430"/>
-              </a:lnSpc>
-              <a:spcBef>
-                <a:spcPts val="200"/>
-              </a:spcBef>
-              <a:spcAft>
-                <a:spcPts val="200"/>
-              </a:spcAft>
-            </a:pPr>
-            <a:r>
-              <a:rPr sz="1100" b="0">
+                <a:spcPts val="1820"/>
+              </a:lnSpc>
+              <a:spcBef>
+                <a:spcPts val="200"/>
+              </a:spcBef>
+              <a:spcAft>
+                <a:spcPts val="200"/>
+              </a:spcAft>
+            </a:pPr>
+            <a:r>
+              <a:rPr sz="1400" b="0">
                 <a:solidFill>
                   <a:srgbClr val="000000"/>
                 </a:solidFill>
@@ -5721,7 +5721,7 @@
           <a:p>
             <a:pPr algn="l">
               <a:lnSpc>
-                <a:spcPts val="1820"/>
+                <a:spcPts val="2080"/>
               </a:lnSpc>
               <a:spcBef>
                 <a:spcPts val="800"/>
@@ -5731,7 +5731,7 @@
               </a:spcAft>
             </a:pPr>
             <a:r>
-              <a:rPr sz="1400" b="1">
+              <a:rPr sz="1600" b="1">
                 <a:solidFill>
                   <a:srgbClr val="008040"/>
                 </a:solidFill>
@@ -5743,17 +5743,17 @@
           <a:p>
             <a:pPr algn="l">
               <a:lnSpc>
-                <a:spcPts val="1430"/>
-              </a:lnSpc>
-              <a:spcBef>
-                <a:spcPts val="200"/>
-              </a:spcBef>
-              <a:spcAft>
-                <a:spcPts val="200"/>
-              </a:spcAft>
-            </a:pPr>
-            <a:r>
-              <a:rPr sz="1100" b="0">
+                <a:spcPts val="1820"/>
+              </a:lnSpc>
+              <a:spcBef>
+                <a:spcPts val="200"/>
+              </a:spcBef>
+              <a:spcAft>
+                <a:spcPts val="200"/>
+              </a:spcAft>
+            </a:pPr>
+            <a:r>
+              <a:rPr sz="1400" b="0">
                 <a:solidFill>
                   <a:srgbClr val="000000"/>
                 </a:solidFill>
@@ -5858,7 +5858,7 @@
           <a:p>
             <a:pPr algn="l">
               <a:lnSpc>
-                <a:spcPts val="1820"/>
+                <a:spcPts val="2080"/>
               </a:lnSpc>
               <a:spcBef>
                 <a:spcPts val="0"/>
@@ -5868,7 +5868,7 @@
               </a:spcAft>
             </a:pPr>
             <a:r>
-              <a:rPr sz="1400" b="1">
+              <a:rPr sz="1600" b="1">
                 <a:solidFill>
                   <a:srgbClr val="1B3A5C"/>
                 </a:solidFill>
@@ -5880,7 +5880,7 @@
           <a:p>
             <a:pPr algn="l">
               <a:lnSpc>
-                <a:spcPts val="1820"/>
+                <a:spcPts val="2080"/>
               </a:lnSpc>
               <a:spcBef>
                 <a:spcPts val="800"/>
@@ -5890,7 +5890,7 @@
               </a:spcAft>
             </a:pPr>
             <a:r>
-              <a:rPr sz="1400" b="1">
+              <a:rPr sz="1600" b="1">
                 <a:solidFill>
                   <a:srgbClr val="333333"/>
                 </a:solidFill>
@@ -5902,17 +5902,17 @@
           <a:p>
             <a:pPr algn="l">
               <a:lnSpc>
-                <a:spcPts val="1430"/>
-              </a:lnSpc>
-              <a:spcBef>
-                <a:spcPts val="200"/>
-              </a:spcBef>
-              <a:spcAft>
-                <a:spcPts val="200"/>
-              </a:spcAft>
-            </a:pPr>
-            <a:r>
-              <a:rPr sz="1100" b="0">
+                <a:spcPts val="1820"/>
+              </a:lnSpc>
+              <a:spcBef>
+                <a:spcPts val="200"/>
+              </a:spcBef>
+              <a:spcAft>
+                <a:spcPts val="200"/>
+              </a:spcAft>
+            </a:pPr>
+            <a:r>
+              <a:rPr sz="1400" b="0">
                 <a:solidFill>
                   <a:srgbClr val="000000"/>
                 </a:solidFill>
@@ -5924,7 +5924,7 @@
           <a:p>
             <a:pPr algn="l">
               <a:lnSpc>
-                <a:spcPts val="1820"/>
+                <a:spcPts val="2080"/>
               </a:lnSpc>
               <a:spcBef>
                 <a:spcPts val="800"/>
@@ -5934,7 +5934,7 @@
               </a:spcAft>
             </a:pPr>
             <a:r>
-              <a:rPr sz="1400" b="1">
+              <a:rPr sz="1600" b="1">
                 <a:solidFill>
                   <a:srgbClr val="1B5C9E"/>
                 </a:solidFill>
@@ -5946,17 +5946,17 @@
           <a:p>
             <a:pPr algn="l">
               <a:lnSpc>
-                <a:spcPts val="1430"/>
-              </a:lnSpc>
-              <a:spcBef>
-                <a:spcPts val="200"/>
-              </a:spcBef>
-              <a:spcAft>
-                <a:spcPts val="200"/>
-              </a:spcAft>
-            </a:pPr>
-            <a:r>
-              <a:rPr sz="1100" b="0">
+                <a:spcPts val="1820"/>
+              </a:lnSpc>
+              <a:spcBef>
+                <a:spcPts val="200"/>
+              </a:spcBef>
+              <a:spcAft>
+                <a:spcPts val="200"/>
+              </a:spcAft>
+            </a:pPr>
+            <a:r>
+              <a:rPr sz="1400" b="0">
                 <a:solidFill>
                   <a:srgbClr val="000000"/>
                 </a:solidFill>
@@ -5968,17 +5968,17 @@
           <a:p>
             <a:pPr algn="l">
               <a:lnSpc>
-                <a:spcPts val="1430"/>
-              </a:lnSpc>
-              <a:spcBef>
-                <a:spcPts val="200"/>
-              </a:spcBef>
-              <a:spcAft>
-                <a:spcPts val="200"/>
-              </a:spcAft>
-            </a:pPr>
-            <a:r>
-              <a:rPr sz="1100" b="0">
+                <a:spcPts val="1820"/>
+              </a:lnSpc>
+              <a:spcBef>
+                <a:spcPts val="200"/>
+              </a:spcBef>
+              <a:spcAft>
+                <a:spcPts val="200"/>
+              </a:spcAft>
+            </a:pPr>
+            <a:r>
+              <a:rPr sz="1400" b="0">
                 <a:solidFill>
                   <a:srgbClr val="000000"/>
                 </a:solidFill>
@@ -5990,7 +5990,7 @@
           <a:p>
             <a:pPr algn="l">
               <a:lnSpc>
-                <a:spcPts val="1820"/>
+                <a:spcPts val="2080"/>
               </a:lnSpc>
               <a:spcBef>
                 <a:spcPts val="800"/>
@@ -6000,7 +6000,7 @@
               </a:spcAft>
             </a:pPr>
             <a:r>
-              <a:rPr sz="1400" b="1">
+              <a:rPr sz="1600" b="1">
                 <a:solidFill>
                   <a:srgbClr val="CC3333"/>
                 </a:solidFill>
@@ -6012,17 +6012,17 @@
           <a:p>
             <a:pPr algn="l">
               <a:lnSpc>
-                <a:spcPts val="1430"/>
-              </a:lnSpc>
-              <a:spcBef>
-                <a:spcPts val="200"/>
-              </a:spcBef>
-              <a:spcAft>
-                <a:spcPts val="200"/>
-              </a:spcAft>
-            </a:pPr>
-            <a:r>
-              <a:rPr sz="1100" b="0">
+                <a:spcPts val="1820"/>
+              </a:lnSpc>
+              <a:spcBef>
+                <a:spcPts val="200"/>
+              </a:spcBef>
+              <a:spcAft>
+                <a:spcPts val="200"/>
+              </a:spcAft>
+            </a:pPr>
+            <a:r>
+              <a:rPr sz="1400" b="0">
                 <a:solidFill>
                   <a:srgbClr val="000000"/>
                 </a:solidFill>
@@ -6034,7 +6034,7 @@
           <a:p>
             <a:pPr algn="l">
               <a:lnSpc>
-                <a:spcPts val="1820"/>
+                <a:spcPts val="2080"/>
               </a:lnSpc>
               <a:spcBef>
                 <a:spcPts val="800"/>
@@ -6044,7 +6044,7 @@
               </a:spcAft>
             </a:pPr>
             <a:r>
-              <a:rPr sz="1400" b="1">
+              <a:rPr sz="1600" b="1">
                 <a:solidFill>
                   <a:srgbClr val="008040"/>
                 </a:solidFill>
@@ -6056,17 +6056,17 @@
           <a:p>
             <a:pPr algn="l">
               <a:lnSpc>
-                <a:spcPts val="1430"/>
-              </a:lnSpc>
-              <a:spcBef>
-                <a:spcPts val="200"/>
-              </a:spcBef>
-              <a:spcAft>
-                <a:spcPts val="200"/>
-              </a:spcAft>
-            </a:pPr>
-            <a:r>
-              <a:rPr sz="1100" b="0">
+                <a:spcPts val="1820"/>
+              </a:lnSpc>
+              <a:spcBef>
+                <a:spcPts val="200"/>
+              </a:spcBef>
+              <a:spcAft>
+                <a:spcPts val="200"/>
+              </a:spcAft>
+            </a:pPr>
+            <a:r>
+              <a:rPr sz="1400" b="0">
                 <a:solidFill>
                   <a:srgbClr val="000000"/>
                 </a:solidFill>
@@ -6171,7 +6171,7 @@
           <a:p>
             <a:pPr algn="l">
               <a:lnSpc>
-                <a:spcPts val="1820"/>
+                <a:spcPts val="2080"/>
               </a:lnSpc>
               <a:spcBef>
                 <a:spcPts val="0"/>
@@ -6181,7 +6181,7 @@
               </a:spcAft>
             </a:pPr>
             <a:r>
-              <a:rPr sz="1400" b="1">
+              <a:rPr sz="1600" b="1">
                 <a:solidFill>
                   <a:srgbClr val="1B3A5C"/>
                 </a:solidFill>
@@ -6193,7 +6193,7 @@
           <a:p>
             <a:pPr algn="l">
               <a:lnSpc>
-                <a:spcPts val="1820"/>
+                <a:spcPts val="2080"/>
               </a:lnSpc>
               <a:spcBef>
                 <a:spcPts val="800"/>
@@ -6203,7 +6203,7 @@
               </a:spcAft>
             </a:pPr>
             <a:r>
-              <a:rPr sz="1400" b="1">
+              <a:rPr sz="1600" b="1">
                 <a:solidFill>
                   <a:srgbClr val="333333"/>
                 </a:solidFill>
@@ -6215,17 +6215,17 @@
           <a:p>
             <a:pPr algn="l">
               <a:lnSpc>
-                <a:spcPts val="1430"/>
-              </a:lnSpc>
-              <a:spcBef>
-                <a:spcPts val="200"/>
-              </a:spcBef>
-              <a:spcAft>
-                <a:spcPts val="200"/>
-              </a:spcAft>
-            </a:pPr>
-            <a:r>
-              <a:rPr sz="1100" b="0">
+                <a:spcPts val="1820"/>
+              </a:lnSpc>
+              <a:spcBef>
+                <a:spcPts val="200"/>
+              </a:spcBef>
+              <a:spcAft>
+                <a:spcPts val="200"/>
+              </a:spcAft>
+            </a:pPr>
+            <a:r>
+              <a:rPr sz="1400" b="0">
                 <a:solidFill>
                   <a:srgbClr val="000000"/>
                 </a:solidFill>
@@ -6237,7 +6237,7 @@
           <a:p>
             <a:pPr algn="l">
               <a:lnSpc>
-                <a:spcPts val="1820"/>
+                <a:spcPts val="2080"/>
               </a:lnSpc>
               <a:spcBef>
                 <a:spcPts val="800"/>
@@ -6247,7 +6247,7 @@
               </a:spcAft>
             </a:pPr>
             <a:r>
-              <a:rPr sz="1400" b="1">
+              <a:rPr sz="1600" b="1">
                 <a:solidFill>
                   <a:srgbClr val="1B5C9E"/>
                 </a:solidFill>
@@ -6259,17 +6259,17 @@
           <a:p>
             <a:pPr algn="l">
               <a:lnSpc>
-                <a:spcPts val="1430"/>
-              </a:lnSpc>
-              <a:spcBef>
-                <a:spcPts val="200"/>
-              </a:spcBef>
-              <a:spcAft>
-                <a:spcPts val="200"/>
-              </a:spcAft>
-            </a:pPr>
-            <a:r>
-              <a:rPr sz="1100" b="0">
+                <a:spcPts val="1820"/>
+              </a:lnSpc>
+              <a:spcBef>
+                <a:spcPts val="200"/>
+              </a:spcBef>
+              <a:spcAft>
+                <a:spcPts val="200"/>
+              </a:spcAft>
+            </a:pPr>
+            <a:r>
+              <a:rPr sz="1400" b="0">
                 <a:solidFill>
                   <a:srgbClr val="000000"/>
                 </a:solidFill>
@@ -6281,17 +6281,17 @@
           <a:p>
             <a:pPr algn="l">
               <a:lnSpc>
-                <a:spcPts val="1430"/>
-              </a:lnSpc>
-              <a:spcBef>
-                <a:spcPts val="200"/>
-              </a:spcBef>
-              <a:spcAft>
-                <a:spcPts val="200"/>
-              </a:spcAft>
-            </a:pPr>
-            <a:r>
-              <a:rPr sz="1100" b="0">
+                <a:spcPts val="1820"/>
+              </a:lnSpc>
+              <a:spcBef>
+                <a:spcPts val="200"/>
+              </a:spcBef>
+              <a:spcAft>
+                <a:spcPts val="200"/>
+              </a:spcAft>
+            </a:pPr>
+            <a:r>
+              <a:rPr sz="1400" b="0">
                 <a:solidFill>
                   <a:srgbClr val="000000"/>
                 </a:solidFill>
@@ -6303,7 +6303,7 @@
           <a:p>
             <a:pPr algn="l">
               <a:lnSpc>
-                <a:spcPts val="1820"/>
+                <a:spcPts val="2080"/>
               </a:lnSpc>
               <a:spcBef>
                 <a:spcPts val="800"/>
@@ -6313,7 +6313,7 @@
               </a:spcAft>
             </a:pPr>
             <a:r>
-              <a:rPr sz="1400" b="1">
+              <a:rPr sz="1600" b="1">
                 <a:solidFill>
                   <a:srgbClr val="CC3333"/>
                 </a:solidFill>
@@ -6325,17 +6325,17 @@
           <a:p>
             <a:pPr algn="l">
               <a:lnSpc>
-                <a:spcPts val="1430"/>
-              </a:lnSpc>
-              <a:spcBef>
-                <a:spcPts val="200"/>
-              </a:spcBef>
-              <a:spcAft>
-                <a:spcPts val="200"/>
-              </a:spcAft>
-            </a:pPr>
-            <a:r>
-              <a:rPr sz="1100" b="0">
+                <a:spcPts val="1820"/>
+              </a:lnSpc>
+              <a:spcBef>
+                <a:spcPts val="200"/>
+              </a:spcBef>
+              <a:spcAft>
+                <a:spcPts val="200"/>
+              </a:spcAft>
+            </a:pPr>
+            <a:r>
+              <a:rPr sz="1400" b="0">
                 <a:solidFill>
                   <a:srgbClr val="000000"/>
                 </a:solidFill>
@@ -6347,7 +6347,7 @@
           <a:p>
             <a:pPr algn="l">
               <a:lnSpc>
-                <a:spcPts val="1820"/>
+                <a:spcPts val="2080"/>
               </a:lnSpc>
               <a:spcBef>
                 <a:spcPts val="800"/>
@@ -6357,7 +6357,7 @@
               </a:spcAft>
             </a:pPr>
             <a:r>
-              <a:rPr sz="1400" b="1">
+              <a:rPr sz="1600" b="1">
                 <a:solidFill>
                   <a:srgbClr val="008040"/>
                 </a:solidFill>
@@ -6369,17 +6369,17 @@
           <a:p>
             <a:pPr algn="l">
               <a:lnSpc>
-                <a:spcPts val="1430"/>
-              </a:lnSpc>
-              <a:spcBef>
-                <a:spcPts val="200"/>
-              </a:spcBef>
-              <a:spcAft>
-                <a:spcPts val="200"/>
-              </a:spcAft>
-            </a:pPr>
-            <a:r>
-              <a:rPr sz="1100" b="0">
+                <a:spcPts val="1820"/>
+              </a:lnSpc>
+              <a:spcBef>
+                <a:spcPts val="200"/>
+              </a:spcBef>
+              <a:spcAft>
+                <a:spcPts val="200"/>
+              </a:spcAft>
+            </a:pPr>
+            <a:r>
+              <a:rPr sz="1400" b="0">
                 <a:solidFill>
                   <a:srgbClr val="000000"/>
                 </a:solidFill>
@@ -6484,7 +6484,7 @@
           <a:p>
             <a:pPr algn="l">
               <a:lnSpc>
-                <a:spcPts val="1820"/>
+                <a:spcPts val="2080"/>
               </a:lnSpc>
               <a:spcBef>
                 <a:spcPts val="0"/>
@@ -6494,7 +6494,7 @@
               </a:spcAft>
             </a:pPr>
             <a:r>
-              <a:rPr sz="1400" b="1">
+              <a:rPr sz="1600" b="1">
                 <a:solidFill>
                   <a:srgbClr val="1B3A5C"/>
                 </a:solidFill>
@@ -6506,7 +6506,7 @@
           <a:p>
             <a:pPr algn="l">
               <a:lnSpc>
-                <a:spcPts val="1820"/>
+                <a:spcPts val="2080"/>
               </a:lnSpc>
               <a:spcBef>
                 <a:spcPts val="800"/>
@@ -6516,7 +6516,7 @@
               </a:spcAft>
             </a:pPr>
             <a:r>
-              <a:rPr sz="1400" b="1">
+              <a:rPr sz="1600" b="1">
                 <a:solidFill>
                   <a:srgbClr val="333333"/>
                 </a:solidFill>
@@ -6528,17 +6528,17 @@
           <a:p>
             <a:pPr algn="l">
               <a:lnSpc>
-                <a:spcPts val="1430"/>
-              </a:lnSpc>
-              <a:spcBef>
-                <a:spcPts val="200"/>
-              </a:spcBef>
-              <a:spcAft>
-                <a:spcPts val="200"/>
-              </a:spcAft>
-            </a:pPr>
-            <a:r>
-              <a:rPr sz="1100" b="0">
+                <a:spcPts val="1820"/>
+              </a:lnSpc>
+              <a:spcBef>
+                <a:spcPts val="200"/>
+              </a:spcBef>
+              <a:spcAft>
+                <a:spcPts val="200"/>
+              </a:spcAft>
+            </a:pPr>
+            <a:r>
+              <a:rPr sz="1400" b="0">
                 <a:solidFill>
                   <a:srgbClr val="000000"/>
                 </a:solidFill>
@@ -6550,7 +6550,7 @@
           <a:p>
             <a:pPr algn="l">
               <a:lnSpc>
-                <a:spcPts val="1820"/>
+                <a:spcPts val="2080"/>
               </a:lnSpc>
               <a:spcBef>
                 <a:spcPts val="800"/>
@@ -6560,7 +6560,7 @@
               </a:spcAft>
             </a:pPr>
             <a:r>
-              <a:rPr sz="1400" b="1">
+              <a:rPr sz="1600" b="1">
                 <a:solidFill>
                   <a:srgbClr val="1B5C9E"/>
                 </a:solidFill>
@@ -6572,17 +6572,17 @@
           <a:p>
             <a:pPr algn="l">
               <a:lnSpc>
-                <a:spcPts val="1430"/>
-              </a:lnSpc>
-              <a:spcBef>
-                <a:spcPts val="200"/>
-              </a:spcBef>
-              <a:spcAft>
-                <a:spcPts val="200"/>
-              </a:spcAft>
-            </a:pPr>
-            <a:r>
-              <a:rPr sz="1100" b="0">
+                <a:spcPts val="1820"/>
+              </a:lnSpc>
+              <a:spcBef>
+                <a:spcPts val="200"/>
+              </a:spcBef>
+              <a:spcAft>
+                <a:spcPts val="200"/>
+              </a:spcAft>
+            </a:pPr>
+            <a:r>
+              <a:rPr sz="1400" b="0">
                 <a:solidFill>
                   <a:srgbClr val="000000"/>
                 </a:solidFill>
@@ -6594,17 +6594,17 @@
           <a:p>
             <a:pPr algn="l">
               <a:lnSpc>
-                <a:spcPts val="1430"/>
-              </a:lnSpc>
-              <a:spcBef>
-                <a:spcPts val="200"/>
-              </a:spcBef>
-              <a:spcAft>
-                <a:spcPts val="200"/>
-              </a:spcAft>
-            </a:pPr>
-            <a:r>
-              <a:rPr sz="1100" b="0">
+                <a:spcPts val="1820"/>
+              </a:lnSpc>
+              <a:spcBef>
+                <a:spcPts val="200"/>
+              </a:spcBef>
+              <a:spcAft>
+                <a:spcPts val="200"/>
+              </a:spcAft>
+            </a:pPr>
+            <a:r>
+              <a:rPr sz="1400" b="0">
                 <a:solidFill>
                   <a:srgbClr val="000000"/>
                 </a:solidFill>
@@ -6616,17 +6616,17 @@
           <a:p>
             <a:pPr algn="l">
               <a:lnSpc>
-                <a:spcPts val="1430"/>
-              </a:lnSpc>
-              <a:spcBef>
-                <a:spcPts val="200"/>
-              </a:spcBef>
-              <a:spcAft>
-                <a:spcPts val="200"/>
-              </a:spcAft>
-            </a:pPr>
-            <a:r>
-              <a:rPr sz="1100" b="0">
+                <a:spcPts val="1820"/>
+              </a:lnSpc>
+              <a:spcBef>
+                <a:spcPts val="200"/>
+              </a:spcBef>
+              <a:spcAft>
+                <a:spcPts val="200"/>
+              </a:spcAft>
+            </a:pPr>
+            <a:r>
+              <a:rPr sz="1400" b="0">
                 <a:solidFill>
                   <a:srgbClr val="000000"/>
                 </a:solidFill>
@@ -6638,17 +6638,17 @@
           <a:p>
             <a:pPr algn="l">
               <a:lnSpc>
-                <a:spcPts val="1430"/>
-              </a:lnSpc>
-              <a:spcBef>
-                <a:spcPts val="200"/>
-              </a:spcBef>
-              <a:spcAft>
-                <a:spcPts val="200"/>
-              </a:spcAft>
-            </a:pPr>
-            <a:r>
-              <a:rPr sz="1100" b="0">
+                <a:spcPts val="1820"/>
+              </a:lnSpc>
+              <a:spcBef>
+                <a:spcPts val="200"/>
+              </a:spcBef>
+              <a:spcAft>
+                <a:spcPts val="200"/>
+              </a:spcAft>
+            </a:pPr>
+            <a:r>
+              <a:rPr sz="1400" b="0">
                 <a:solidFill>
                   <a:srgbClr val="000000"/>
                 </a:solidFill>
@@ -6660,17 +6660,17 @@
           <a:p>
             <a:pPr algn="l">
               <a:lnSpc>
-                <a:spcPts val="1430"/>
-              </a:lnSpc>
-              <a:spcBef>
-                <a:spcPts val="200"/>
-              </a:spcBef>
-              <a:spcAft>
-                <a:spcPts val="200"/>
-              </a:spcAft>
-            </a:pPr>
-            <a:r>
-              <a:rPr sz="1100" b="0">
+                <a:spcPts val="1820"/>
+              </a:lnSpc>
+              <a:spcBef>
+                <a:spcPts val="200"/>
+              </a:spcBef>
+              <a:spcAft>
+                <a:spcPts val="200"/>
+              </a:spcAft>
+            </a:pPr>
+            <a:r>
+              <a:rPr sz="1400" b="0">
                 <a:solidFill>
                   <a:srgbClr val="000000"/>
                 </a:solidFill>
@@ -6682,7 +6682,7 @@
           <a:p>
             <a:pPr algn="l">
               <a:lnSpc>
-                <a:spcPts val="1820"/>
+                <a:spcPts val="2080"/>
               </a:lnSpc>
               <a:spcBef>
                 <a:spcPts val="800"/>
@@ -6692,7 +6692,7 @@
               </a:spcAft>
             </a:pPr>
             <a:r>
-              <a:rPr sz="1400" b="1">
+              <a:rPr sz="1600" b="1">
                 <a:solidFill>
                   <a:srgbClr val="CC3333"/>
                 </a:solidFill>
@@ -6704,17 +6704,17 @@
           <a:p>
             <a:pPr algn="l">
               <a:lnSpc>
-                <a:spcPts val="1430"/>
-              </a:lnSpc>
-              <a:spcBef>
-                <a:spcPts val="200"/>
-              </a:spcBef>
-              <a:spcAft>
-                <a:spcPts val="200"/>
-              </a:spcAft>
-            </a:pPr>
-            <a:r>
-              <a:rPr sz="1100" b="0">
+                <a:spcPts val="1820"/>
+              </a:lnSpc>
+              <a:spcBef>
+                <a:spcPts val="200"/>
+              </a:spcBef>
+              <a:spcAft>
+                <a:spcPts val="200"/>
+              </a:spcAft>
+            </a:pPr>
+            <a:r>
+              <a:rPr sz="1400" b="0">
                 <a:solidFill>
                   <a:srgbClr val="000000"/>
                 </a:solidFill>
@@ -6726,7 +6726,7 @@
           <a:p>
             <a:pPr algn="l">
               <a:lnSpc>
-                <a:spcPts val="1820"/>
+                <a:spcPts val="2080"/>
               </a:lnSpc>
               <a:spcBef>
                 <a:spcPts val="800"/>
@@ -6736,7 +6736,7 @@
               </a:spcAft>
             </a:pPr>
             <a:r>
-              <a:rPr sz="1400" b="1">
+              <a:rPr sz="1600" b="1">
                 <a:solidFill>
                   <a:srgbClr val="008040"/>
                 </a:solidFill>
@@ -6748,17 +6748,17 @@
           <a:p>
             <a:pPr algn="l">
               <a:lnSpc>
-                <a:spcPts val="1430"/>
-              </a:lnSpc>
-              <a:spcBef>
-                <a:spcPts val="200"/>
-              </a:spcBef>
-              <a:spcAft>
-                <a:spcPts val="200"/>
-              </a:spcAft>
-            </a:pPr>
-            <a:r>
-              <a:rPr sz="1100" b="0">
+                <a:spcPts val="1820"/>
+              </a:lnSpc>
+              <a:spcBef>
+                <a:spcPts val="200"/>
+              </a:spcBef>
+              <a:spcAft>
+                <a:spcPts val="200"/>
+              </a:spcAft>
+            </a:pPr>
+            <a:r>
+              <a:rPr sz="1400" b="0">
                 <a:solidFill>
                   <a:srgbClr val="000000"/>
                 </a:solidFill>
@@ -6863,7 +6863,7 @@
           <a:p>
             <a:pPr algn="l">
               <a:lnSpc>
-                <a:spcPts val="1820"/>
+                <a:spcPts val="2080"/>
               </a:lnSpc>
               <a:spcBef>
                 <a:spcPts val="0"/>
@@ -6873,7 +6873,7 @@
               </a:spcAft>
             </a:pPr>
             <a:r>
-              <a:rPr sz="1400" b="1">
+              <a:rPr sz="1600" b="1">
                 <a:solidFill>
                   <a:srgbClr val="1B3A5C"/>
                 </a:solidFill>
@@ -6885,7 +6885,7 @@
           <a:p>
             <a:pPr algn="l">
               <a:lnSpc>
-                <a:spcPts val="1820"/>
+                <a:spcPts val="2080"/>
               </a:lnSpc>
               <a:spcBef>
                 <a:spcPts val="800"/>
@@ -6895,7 +6895,7 @@
               </a:spcAft>
             </a:pPr>
             <a:r>
-              <a:rPr sz="1400" b="1">
+              <a:rPr sz="1600" b="1">
                 <a:solidFill>
                   <a:srgbClr val="333333"/>
                 </a:solidFill>
@@ -6907,17 +6907,17 @@
           <a:p>
             <a:pPr algn="l">
               <a:lnSpc>
-                <a:spcPts val="1430"/>
-              </a:lnSpc>
-              <a:spcBef>
-                <a:spcPts val="200"/>
-              </a:spcBef>
-              <a:spcAft>
-                <a:spcPts val="200"/>
-              </a:spcAft>
-            </a:pPr>
-            <a:r>
-              <a:rPr sz="1100" b="0">
+                <a:spcPts val="1820"/>
+              </a:lnSpc>
+              <a:spcBef>
+                <a:spcPts val="200"/>
+              </a:spcBef>
+              <a:spcAft>
+                <a:spcPts val="200"/>
+              </a:spcAft>
+            </a:pPr>
+            <a:r>
+              <a:rPr sz="1400" b="0">
                 <a:solidFill>
                   <a:srgbClr val="000000"/>
                 </a:solidFill>
@@ -6929,7 +6929,7 @@
           <a:p>
             <a:pPr algn="l">
               <a:lnSpc>
-                <a:spcPts val="1820"/>
+                <a:spcPts val="2080"/>
               </a:lnSpc>
               <a:spcBef>
                 <a:spcPts val="800"/>
@@ -6939,7 +6939,7 @@
               </a:spcAft>
             </a:pPr>
             <a:r>
-              <a:rPr sz="1400" b="1">
+              <a:rPr sz="1600" b="1">
                 <a:solidFill>
                   <a:srgbClr val="1B5C9E"/>
                 </a:solidFill>
@@ -6951,17 +6951,17 @@
           <a:p>
             <a:pPr algn="l">
               <a:lnSpc>
-                <a:spcPts val="1430"/>
-              </a:lnSpc>
-              <a:spcBef>
-                <a:spcPts val="200"/>
-              </a:spcBef>
-              <a:spcAft>
-                <a:spcPts val="200"/>
-              </a:spcAft>
-            </a:pPr>
-            <a:r>
-              <a:rPr sz="1100" b="0">
+                <a:spcPts val="1820"/>
+              </a:lnSpc>
+              <a:spcBef>
+                <a:spcPts val="200"/>
+              </a:spcBef>
+              <a:spcAft>
+                <a:spcPts val="200"/>
+              </a:spcAft>
+            </a:pPr>
+            <a:r>
+              <a:rPr sz="1400" b="0">
                 <a:solidFill>
                   <a:srgbClr val="000000"/>
                 </a:solidFill>
@@ -6973,17 +6973,17 @@
           <a:p>
             <a:pPr algn="l">
               <a:lnSpc>
-                <a:spcPts val="1430"/>
-              </a:lnSpc>
-              <a:spcBef>
-                <a:spcPts val="200"/>
-              </a:spcBef>
-              <a:spcAft>
-                <a:spcPts val="200"/>
-              </a:spcAft>
-            </a:pPr>
-            <a:r>
-              <a:rPr sz="1100" b="0">
+                <a:spcPts val="1820"/>
+              </a:lnSpc>
+              <a:spcBef>
+                <a:spcPts val="200"/>
+              </a:spcBef>
+              <a:spcAft>
+                <a:spcPts val="200"/>
+              </a:spcAft>
+            </a:pPr>
+            <a:r>
+              <a:rPr sz="1400" b="0">
                 <a:solidFill>
                   <a:srgbClr val="000000"/>
                 </a:solidFill>
@@ -6995,7 +6995,7 @@
           <a:p>
             <a:pPr algn="l">
               <a:lnSpc>
-                <a:spcPts val="1820"/>
+                <a:spcPts val="2080"/>
               </a:lnSpc>
               <a:spcBef>
                 <a:spcPts val="800"/>
@@ -7005,7 +7005,7 @@
               </a:spcAft>
             </a:pPr>
             <a:r>
-              <a:rPr sz="1400" b="1">
+              <a:rPr sz="1600" b="1">
                 <a:solidFill>
                   <a:srgbClr val="CC3333"/>
                 </a:solidFill>
@@ -7017,17 +7017,17 @@
           <a:p>
             <a:pPr algn="l">
               <a:lnSpc>
-                <a:spcPts val="1430"/>
-              </a:lnSpc>
-              <a:spcBef>
-                <a:spcPts val="200"/>
-              </a:spcBef>
-              <a:spcAft>
-                <a:spcPts val="200"/>
-              </a:spcAft>
-            </a:pPr>
-            <a:r>
-              <a:rPr sz="1100" b="0">
+                <a:spcPts val="1820"/>
+              </a:lnSpc>
+              <a:spcBef>
+                <a:spcPts val="200"/>
+              </a:spcBef>
+              <a:spcAft>
+                <a:spcPts val="200"/>
+              </a:spcAft>
+            </a:pPr>
+            <a:r>
+              <a:rPr sz="1400" b="0">
                 <a:solidFill>
                   <a:srgbClr val="000000"/>
                 </a:solidFill>
@@ -7039,7 +7039,7 @@
           <a:p>
             <a:pPr algn="l">
               <a:lnSpc>
-                <a:spcPts val="1820"/>
+                <a:spcPts val="2080"/>
               </a:lnSpc>
               <a:spcBef>
                 <a:spcPts val="800"/>
@@ -7049,7 +7049,7 @@
               </a:spcAft>
             </a:pPr>
             <a:r>
-              <a:rPr sz="1400" b="1">
+              <a:rPr sz="1600" b="1">
                 <a:solidFill>
                   <a:srgbClr val="008040"/>
                 </a:solidFill>
@@ -7061,17 +7061,17 @@
           <a:p>
             <a:pPr algn="l">
               <a:lnSpc>
-                <a:spcPts val="1430"/>
-              </a:lnSpc>
-              <a:spcBef>
-                <a:spcPts val="200"/>
-              </a:spcBef>
-              <a:spcAft>
-                <a:spcPts val="200"/>
-              </a:spcAft>
-            </a:pPr>
-            <a:r>
-              <a:rPr sz="1100" b="0">
+                <a:spcPts val="1820"/>
+              </a:lnSpc>
+              <a:spcBef>
+                <a:spcPts val="200"/>
+              </a:spcBef>
+              <a:spcAft>
+                <a:spcPts val="200"/>
+              </a:spcAft>
+            </a:pPr>
+            <a:r>
+              <a:rPr sz="1400" b="0">
                 <a:solidFill>
                   <a:srgbClr val="000000"/>
                 </a:solidFill>
@@ -7176,7 +7176,7 @@
           <a:p>
             <a:pPr algn="l">
               <a:lnSpc>
-                <a:spcPts val="1820"/>
+                <a:spcPts val="2080"/>
               </a:lnSpc>
               <a:spcBef>
                 <a:spcPts val="0"/>
@@ -7186,7 +7186,7 @@
               </a:spcAft>
             </a:pPr>
             <a:r>
-              <a:rPr sz="1400" b="1">
+              <a:rPr sz="1600" b="1">
                 <a:solidFill>
                   <a:srgbClr val="1B3A5C"/>
                 </a:solidFill>
@@ -7198,7 +7198,7 @@
           <a:p>
             <a:pPr algn="l">
               <a:lnSpc>
-                <a:spcPts val="1820"/>
+                <a:spcPts val="2080"/>
               </a:lnSpc>
               <a:spcBef>
                 <a:spcPts val="800"/>
@@ -7208,7 +7208,7 @@
               </a:spcAft>
             </a:pPr>
             <a:r>
-              <a:rPr sz="1400" b="1">
+              <a:rPr sz="1600" b="1">
                 <a:solidFill>
                   <a:srgbClr val="333333"/>
                 </a:solidFill>
@@ -7220,17 +7220,17 @@
           <a:p>
             <a:pPr algn="l">
               <a:lnSpc>
-                <a:spcPts val="1430"/>
-              </a:lnSpc>
-              <a:spcBef>
-                <a:spcPts val="200"/>
-              </a:spcBef>
-              <a:spcAft>
-                <a:spcPts val="200"/>
-              </a:spcAft>
-            </a:pPr>
-            <a:r>
-              <a:rPr sz="1100" b="0">
+                <a:spcPts val="1820"/>
+              </a:lnSpc>
+              <a:spcBef>
+                <a:spcPts val="200"/>
+              </a:spcBef>
+              <a:spcAft>
+                <a:spcPts val="200"/>
+              </a:spcAft>
+            </a:pPr>
+            <a:r>
+              <a:rPr sz="1400" b="0">
                 <a:solidFill>
                   <a:srgbClr val="000000"/>
                 </a:solidFill>
@@ -7242,7 +7242,7 @@
           <a:p>
             <a:pPr algn="l">
               <a:lnSpc>
-                <a:spcPts val="1820"/>
+                <a:spcPts val="2080"/>
               </a:lnSpc>
               <a:spcBef>
                 <a:spcPts val="800"/>
@@ -7252,7 +7252,7 @@
               </a:spcAft>
             </a:pPr>
             <a:r>
-              <a:rPr sz="1400" b="1">
+              <a:rPr sz="1600" b="1">
                 <a:solidFill>
                   <a:srgbClr val="1B5C9E"/>
                 </a:solidFill>
@@ -7264,17 +7264,17 @@
           <a:p>
             <a:pPr algn="l">
               <a:lnSpc>
-                <a:spcPts val="1430"/>
-              </a:lnSpc>
-              <a:spcBef>
-                <a:spcPts val="200"/>
-              </a:spcBef>
-              <a:spcAft>
-                <a:spcPts val="200"/>
-              </a:spcAft>
-            </a:pPr>
-            <a:r>
-              <a:rPr sz="1100" b="0">
+                <a:spcPts val="1820"/>
+              </a:lnSpc>
+              <a:spcBef>
+                <a:spcPts val="200"/>
+              </a:spcBef>
+              <a:spcAft>
+                <a:spcPts val="200"/>
+              </a:spcAft>
+            </a:pPr>
+            <a:r>
+              <a:rPr sz="1400" b="0">
                 <a:solidFill>
                   <a:srgbClr val="000000"/>
                 </a:solidFill>
@@ -7286,17 +7286,17 @@
           <a:p>
             <a:pPr algn="l">
               <a:lnSpc>
-                <a:spcPts val="1430"/>
-              </a:lnSpc>
-              <a:spcBef>
-                <a:spcPts val="200"/>
-              </a:spcBef>
-              <a:spcAft>
-                <a:spcPts val="200"/>
-              </a:spcAft>
-            </a:pPr>
-            <a:r>
-              <a:rPr sz="1100" b="0">
+                <a:spcPts val="1820"/>
+              </a:lnSpc>
+              <a:spcBef>
+                <a:spcPts val="200"/>
+              </a:spcBef>
+              <a:spcAft>
+                <a:spcPts val="200"/>
+              </a:spcAft>
+            </a:pPr>
+            <a:r>
+              <a:rPr sz="1400" b="0">
                 <a:solidFill>
                   <a:srgbClr val="000000"/>
                 </a:solidFill>
@@ -7308,7 +7308,7 @@
           <a:p>
             <a:pPr algn="l">
               <a:lnSpc>
-                <a:spcPts val="1820"/>
+                <a:spcPts val="2080"/>
               </a:lnSpc>
               <a:spcBef>
                 <a:spcPts val="800"/>
@@ -7318,7 +7318,7 @@
               </a:spcAft>
             </a:pPr>
             <a:r>
-              <a:rPr sz="1400" b="1">
+              <a:rPr sz="1600" b="1">
                 <a:solidFill>
                   <a:srgbClr val="CC3333"/>
                 </a:solidFill>
@@ -7330,17 +7330,17 @@
           <a:p>
             <a:pPr algn="l">
               <a:lnSpc>
-                <a:spcPts val="1430"/>
-              </a:lnSpc>
-              <a:spcBef>
-                <a:spcPts val="200"/>
-              </a:spcBef>
-              <a:spcAft>
-                <a:spcPts val="200"/>
-              </a:spcAft>
-            </a:pPr>
-            <a:r>
-              <a:rPr sz="1100" b="0">
+                <a:spcPts val="1820"/>
+              </a:lnSpc>
+              <a:spcBef>
+                <a:spcPts val="200"/>
+              </a:spcBef>
+              <a:spcAft>
+                <a:spcPts val="200"/>
+              </a:spcAft>
+            </a:pPr>
+            <a:r>
+              <a:rPr sz="1400" b="0">
                 <a:solidFill>
                   <a:srgbClr val="000000"/>
                 </a:solidFill>
@@ -7352,7 +7352,7 @@
           <a:p>
             <a:pPr algn="l">
               <a:lnSpc>
-                <a:spcPts val="1820"/>
+                <a:spcPts val="2080"/>
               </a:lnSpc>
               <a:spcBef>
                 <a:spcPts val="800"/>
@@ -7362,7 +7362,7 @@
               </a:spcAft>
             </a:pPr>
             <a:r>
-              <a:rPr sz="1400" b="1">
+              <a:rPr sz="1600" b="1">
                 <a:solidFill>
                   <a:srgbClr val="008040"/>
                 </a:solidFill>
@@ -7374,17 +7374,17 @@
           <a:p>
             <a:pPr algn="l">
               <a:lnSpc>
-                <a:spcPts val="1430"/>
-              </a:lnSpc>
-              <a:spcBef>
-                <a:spcPts val="200"/>
-              </a:spcBef>
-              <a:spcAft>
-                <a:spcPts val="200"/>
-              </a:spcAft>
-            </a:pPr>
-            <a:r>
-              <a:rPr sz="1100" b="0">
+                <a:spcPts val="1820"/>
+              </a:lnSpc>
+              <a:spcBef>
+                <a:spcPts val="200"/>
+              </a:spcBef>
+              <a:spcAft>
+                <a:spcPts val="200"/>
+              </a:spcAft>
+            </a:pPr>
+            <a:r>
+              <a:rPr sz="1400" b="0">
                 <a:solidFill>
                   <a:srgbClr val="000000"/>
                 </a:solidFill>
@@ -7489,7 +7489,7 @@
           <a:p>
             <a:pPr algn="l">
               <a:lnSpc>
-                <a:spcPts val="1820"/>
+                <a:spcPts val="2080"/>
               </a:lnSpc>
               <a:spcBef>
                 <a:spcPts val="0"/>
@@ -7499,7 +7499,7 @@
               </a:spcAft>
             </a:pPr>
             <a:r>
-              <a:rPr sz="1400" b="1">
+              <a:rPr sz="1600" b="1">
                 <a:solidFill>
                   <a:srgbClr val="1B3A5C"/>
                 </a:solidFill>
@@ -7511,7 +7511,7 @@
           <a:p>
             <a:pPr algn="l">
               <a:lnSpc>
-                <a:spcPts val="1820"/>
+                <a:spcPts val="2080"/>
               </a:lnSpc>
               <a:spcBef>
                 <a:spcPts val="800"/>
@@ -7521,7 +7521,7 @@
               </a:spcAft>
             </a:pPr>
             <a:r>
-              <a:rPr sz="1400" b="1">
+              <a:rPr sz="1600" b="1">
                 <a:solidFill>
                   <a:srgbClr val="333333"/>
                 </a:solidFill>
@@ -7533,17 +7533,17 @@
           <a:p>
             <a:pPr algn="l">
               <a:lnSpc>
-                <a:spcPts val="1430"/>
-              </a:lnSpc>
-              <a:spcBef>
-                <a:spcPts val="200"/>
-              </a:spcBef>
-              <a:spcAft>
-                <a:spcPts val="200"/>
-              </a:spcAft>
-            </a:pPr>
-            <a:r>
-              <a:rPr sz="1100" b="0">
+                <a:spcPts val="1820"/>
+              </a:lnSpc>
+              <a:spcBef>
+                <a:spcPts val="200"/>
+              </a:spcBef>
+              <a:spcAft>
+                <a:spcPts val="200"/>
+              </a:spcAft>
+            </a:pPr>
+            <a:r>
+              <a:rPr sz="1400" b="0">
                 <a:solidFill>
                   <a:srgbClr val="000000"/>
                 </a:solidFill>
@@ -7555,7 +7555,7 @@
           <a:p>
             <a:pPr algn="l">
               <a:lnSpc>
-                <a:spcPts val="1820"/>
+                <a:spcPts val="2080"/>
               </a:lnSpc>
               <a:spcBef>
                 <a:spcPts val="800"/>
@@ -7565,7 +7565,7 @@
               </a:spcAft>
             </a:pPr>
             <a:r>
-              <a:rPr sz="1400" b="1">
+              <a:rPr sz="1600" b="1">
                 <a:solidFill>
                   <a:srgbClr val="1B5C9E"/>
                 </a:solidFill>
@@ -7577,17 +7577,17 @@
           <a:p>
             <a:pPr algn="l">
               <a:lnSpc>
-                <a:spcPts val="1430"/>
-              </a:lnSpc>
-              <a:spcBef>
-                <a:spcPts val="200"/>
-              </a:spcBef>
-              <a:spcAft>
-                <a:spcPts val="200"/>
-              </a:spcAft>
-            </a:pPr>
-            <a:r>
-              <a:rPr sz="1100" b="0">
+                <a:spcPts val="1820"/>
+              </a:lnSpc>
+              <a:spcBef>
+                <a:spcPts val="200"/>
+              </a:spcBef>
+              <a:spcAft>
+                <a:spcPts val="200"/>
+              </a:spcAft>
+            </a:pPr>
+            <a:r>
+              <a:rPr sz="1400" b="0">
                 <a:solidFill>
                   <a:srgbClr val="000000"/>
                 </a:solidFill>
@@ -7599,7 +7599,7 @@
           <a:p>
             <a:pPr algn="l">
               <a:lnSpc>
-                <a:spcPts val="1820"/>
+                <a:spcPts val="2080"/>
               </a:lnSpc>
               <a:spcBef>
                 <a:spcPts val="800"/>
@@ -7609,7 +7609,7 @@
               </a:spcAft>
             </a:pPr>
             <a:r>
-              <a:rPr sz="1400" b="1">
+              <a:rPr sz="1600" b="1">
                 <a:solidFill>
                   <a:srgbClr val="CC3333"/>
                 </a:solidFill>
@@ -7621,17 +7621,17 @@
           <a:p>
             <a:pPr algn="l">
               <a:lnSpc>
-                <a:spcPts val="1430"/>
-              </a:lnSpc>
-              <a:spcBef>
-                <a:spcPts val="200"/>
-              </a:spcBef>
-              <a:spcAft>
-                <a:spcPts val="200"/>
-              </a:spcAft>
-            </a:pPr>
-            <a:r>
-              <a:rPr sz="1100" b="0">
+                <a:spcPts val="1820"/>
+              </a:lnSpc>
+              <a:spcBef>
+                <a:spcPts val="200"/>
+              </a:spcBef>
+              <a:spcAft>
+                <a:spcPts val="200"/>
+              </a:spcAft>
+            </a:pPr>
+            <a:r>
+              <a:rPr sz="1400" b="0">
                 <a:solidFill>
                   <a:srgbClr val="000000"/>
                 </a:solidFill>
@@ -7643,7 +7643,7 @@
           <a:p>
             <a:pPr algn="l">
               <a:lnSpc>
-                <a:spcPts val="1820"/>
+                <a:spcPts val="2080"/>
               </a:lnSpc>
               <a:spcBef>
                 <a:spcPts val="800"/>
@@ -7653,7 +7653,7 @@
               </a:spcAft>
             </a:pPr>
             <a:r>
-              <a:rPr sz="1400" b="1">
+              <a:rPr sz="1600" b="1">
                 <a:solidFill>
                   <a:srgbClr val="008040"/>
                 </a:solidFill>
@@ -7665,17 +7665,17 @@
           <a:p>
             <a:pPr algn="l">
               <a:lnSpc>
-                <a:spcPts val="1430"/>
-              </a:lnSpc>
-              <a:spcBef>
-                <a:spcPts val="200"/>
-              </a:spcBef>
-              <a:spcAft>
-                <a:spcPts val="200"/>
-              </a:spcAft>
-            </a:pPr>
-            <a:r>
-              <a:rPr sz="1100" b="0">
+                <a:spcPts val="1820"/>
+              </a:lnSpc>
+              <a:spcBef>
+                <a:spcPts val="200"/>
+              </a:spcBef>
+              <a:spcAft>
+                <a:spcPts val="200"/>
+              </a:spcAft>
+            </a:pPr>
+            <a:r>
+              <a:rPr sz="1400" b="0">
                 <a:solidFill>
                   <a:srgbClr val="000000"/>
                 </a:solidFill>
@@ -7780,7 +7780,7 @@
           <a:p>
             <a:pPr algn="l">
               <a:lnSpc>
-                <a:spcPts val="1820"/>
+                <a:spcPts val="2080"/>
               </a:lnSpc>
               <a:spcBef>
                 <a:spcPts val="0"/>
@@ -7790,7 +7790,7 @@
               </a:spcAft>
             </a:pPr>
             <a:r>
-              <a:rPr sz="1400" b="1">
+              <a:rPr sz="1600" b="1">
                 <a:solidFill>
                   <a:srgbClr val="1B3A5C"/>
                 </a:solidFill>
@@ -7802,7 +7802,7 @@
           <a:p>
             <a:pPr algn="l">
               <a:lnSpc>
-                <a:spcPts val="1820"/>
+                <a:spcPts val="2080"/>
               </a:lnSpc>
               <a:spcBef>
                 <a:spcPts val="800"/>
@@ -7812,7 +7812,7 @@
               </a:spcAft>
             </a:pPr>
             <a:r>
-              <a:rPr sz="1400" b="1">
+              <a:rPr sz="1600" b="1">
                 <a:solidFill>
                   <a:srgbClr val="333333"/>
                 </a:solidFill>
@@ -7824,17 +7824,17 @@
           <a:p>
             <a:pPr algn="l">
               <a:lnSpc>
-                <a:spcPts val="1430"/>
-              </a:lnSpc>
-              <a:spcBef>
-                <a:spcPts val="200"/>
-              </a:spcBef>
-              <a:spcAft>
-                <a:spcPts val="200"/>
-              </a:spcAft>
-            </a:pPr>
-            <a:r>
-              <a:rPr sz="1100" b="0">
+                <a:spcPts val="1820"/>
+              </a:lnSpc>
+              <a:spcBef>
+                <a:spcPts val="200"/>
+              </a:spcBef>
+              <a:spcAft>
+                <a:spcPts val="200"/>
+              </a:spcAft>
+            </a:pPr>
+            <a:r>
+              <a:rPr sz="1400" b="0">
                 <a:solidFill>
                   <a:srgbClr val="000000"/>
                 </a:solidFill>
@@ -7846,7 +7846,7 @@
           <a:p>
             <a:pPr algn="l">
               <a:lnSpc>
-                <a:spcPts val="1820"/>
+                <a:spcPts val="2080"/>
               </a:lnSpc>
               <a:spcBef>
                 <a:spcPts val="800"/>
@@ -7856,7 +7856,7 @@
               </a:spcAft>
             </a:pPr>
             <a:r>
-              <a:rPr sz="1400" b="1">
+              <a:rPr sz="1600" b="1">
                 <a:solidFill>
                   <a:srgbClr val="1B5C9E"/>
                 </a:solidFill>
@@ -7868,17 +7868,17 @@
           <a:p>
             <a:pPr algn="l">
               <a:lnSpc>
-                <a:spcPts val="1430"/>
-              </a:lnSpc>
-              <a:spcBef>
-                <a:spcPts val="200"/>
-              </a:spcBef>
-              <a:spcAft>
-                <a:spcPts val="200"/>
-              </a:spcAft>
-            </a:pPr>
-            <a:r>
-              <a:rPr sz="1100" b="0">
+                <a:spcPts val="1820"/>
+              </a:lnSpc>
+              <a:spcBef>
+                <a:spcPts val="200"/>
+              </a:spcBef>
+              <a:spcAft>
+                <a:spcPts val="200"/>
+              </a:spcAft>
+            </a:pPr>
+            <a:r>
+              <a:rPr sz="1400" b="0">
                 <a:solidFill>
                   <a:srgbClr val="000000"/>
                 </a:solidFill>
@@ -7890,17 +7890,17 @@
           <a:p>
             <a:pPr algn="l">
               <a:lnSpc>
-                <a:spcPts val="1430"/>
-              </a:lnSpc>
-              <a:spcBef>
-                <a:spcPts val="200"/>
-              </a:spcBef>
-              <a:spcAft>
-                <a:spcPts val="200"/>
-              </a:spcAft>
-            </a:pPr>
-            <a:r>
-              <a:rPr sz="1100" b="0">
+                <a:spcPts val="1820"/>
+              </a:lnSpc>
+              <a:spcBef>
+                <a:spcPts val="200"/>
+              </a:spcBef>
+              <a:spcAft>
+                <a:spcPts val="200"/>
+              </a:spcAft>
+            </a:pPr>
+            <a:r>
+              <a:rPr sz="1400" b="0">
                 <a:solidFill>
                   <a:srgbClr val="000000"/>
                 </a:solidFill>
@@ -7912,17 +7912,17 @@
           <a:p>
             <a:pPr algn="l">
               <a:lnSpc>
-                <a:spcPts val="1430"/>
-              </a:lnSpc>
-              <a:spcBef>
-                <a:spcPts val="200"/>
-              </a:spcBef>
-              <a:spcAft>
-                <a:spcPts val="200"/>
-              </a:spcAft>
-            </a:pPr>
-            <a:r>
-              <a:rPr sz="1100" b="0">
+                <a:spcPts val="1820"/>
+              </a:lnSpc>
+              <a:spcBef>
+                <a:spcPts val="200"/>
+              </a:spcBef>
+              <a:spcAft>
+                <a:spcPts val="200"/>
+              </a:spcAft>
+            </a:pPr>
+            <a:r>
+              <a:rPr sz="1400" b="0">
                 <a:solidFill>
                   <a:srgbClr val="000000"/>
                 </a:solidFill>
@@ -7934,17 +7934,17 @@
           <a:p>
             <a:pPr algn="l">
               <a:lnSpc>
-                <a:spcPts val="1430"/>
-              </a:lnSpc>
-              <a:spcBef>
-                <a:spcPts val="200"/>
-              </a:spcBef>
-              <a:spcAft>
-                <a:spcPts val="200"/>
-              </a:spcAft>
-            </a:pPr>
-            <a:r>
-              <a:rPr sz="1100" b="0">
+                <a:spcPts val="1820"/>
+              </a:lnSpc>
+              <a:spcBef>
+                <a:spcPts val="200"/>
+              </a:spcBef>
+              <a:spcAft>
+                <a:spcPts val="200"/>
+              </a:spcAft>
+            </a:pPr>
+            <a:r>
+              <a:rPr sz="1400" b="0">
                 <a:solidFill>
                   <a:srgbClr val="000000"/>
                 </a:solidFill>
@@ -7956,7 +7956,7 @@
           <a:p>
             <a:pPr algn="l">
               <a:lnSpc>
-                <a:spcPts val="1820"/>
+                <a:spcPts val="2080"/>
               </a:lnSpc>
               <a:spcBef>
                 <a:spcPts val="800"/>
@@ -7966,7 +7966,7 @@
               </a:spcAft>
             </a:pPr>
             <a:r>
-              <a:rPr sz="1400" b="1">
+              <a:rPr sz="1600" b="1">
                 <a:solidFill>
                   <a:srgbClr val="CC3333"/>
                 </a:solidFill>
@@ -7978,17 +7978,17 @@
           <a:p>
             <a:pPr algn="l">
               <a:lnSpc>
-                <a:spcPts val="1430"/>
-              </a:lnSpc>
-              <a:spcBef>
-                <a:spcPts val="200"/>
-              </a:spcBef>
-              <a:spcAft>
-                <a:spcPts val="200"/>
-              </a:spcAft>
-            </a:pPr>
-            <a:r>
-              <a:rPr sz="1100" b="0">
+                <a:spcPts val="1820"/>
+              </a:lnSpc>
+              <a:spcBef>
+                <a:spcPts val="200"/>
+              </a:spcBef>
+              <a:spcAft>
+                <a:spcPts val="200"/>
+              </a:spcAft>
+            </a:pPr>
+            <a:r>
+              <a:rPr sz="1400" b="0">
                 <a:solidFill>
                   <a:srgbClr val="000000"/>
                 </a:solidFill>
@@ -8000,7 +8000,7 @@
           <a:p>
             <a:pPr algn="l">
               <a:lnSpc>
-                <a:spcPts val="1820"/>
+                <a:spcPts val="2080"/>
               </a:lnSpc>
               <a:spcBef>
                 <a:spcPts val="800"/>
@@ -8010,7 +8010,7 @@
               </a:spcAft>
             </a:pPr>
             <a:r>
-              <a:rPr sz="1400" b="1">
+              <a:rPr sz="1600" b="1">
                 <a:solidFill>
                   <a:srgbClr val="008040"/>
                 </a:solidFill>
@@ -8022,17 +8022,17 @@
           <a:p>
             <a:pPr algn="l">
               <a:lnSpc>
-                <a:spcPts val="1430"/>
-              </a:lnSpc>
-              <a:spcBef>
-                <a:spcPts val="200"/>
-              </a:spcBef>
-              <a:spcAft>
-                <a:spcPts val="200"/>
-              </a:spcAft>
-            </a:pPr>
-            <a:r>
-              <a:rPr sz="1100" b="0">
+                <a:spcPts val="1820"/>
+              </a:lnSpc>
+              <a:spcBef>
+                <a:spcPts val="200"/>
+              </a:spcBef>
+              <a:spcAft>
+                <a:spcPts val="200"/>
+              </a:spcAft>
+            </a:pPr>
+            <a:r>
+              <a:rPr sz="1400" b="0">
                 <a:solidFill>
                   <a:srgbClr val="000000"/>
                 </a:solidFill>
@@ -8137,7 +8137,7 @@
           <a:p>
             <a:pPr algn="l">
               <a:lnSpc>
-                <a:spcPts val="1820"/>
+                <a:spcPts val="2080"/>
               </a:lnSpc>
               <a:spcBef>
                 <a:spcPts val="0"/>
@@ -8147,7 +8147,7 @@
               </a:spcAft>
             </a:pPr>
             <a:r>
-              <a:rPr sz="1400" b="1">
+              <a:rPr sz="1600" b="1">
                 <a:solidFill>
                   <a:srgbClr val="1B3A5C"/>
                 </a:solidFill>
@@ -8159,7 +8159,7 @@
           <a:p>
             <a:pPr algn="l">
               <a:lnSpc>
-                <a:spcPts val="1820"/>
+                <a:spcPts val="2080"/>
               </a:lnSpc>
               <a:spcBef>
                 <a:spcPts val="800"/>
@@ -8169,7 +8169,7 @@
               </a:spcAft>
             </a:pPr>
             <a:r>
-              <a:rPr sz="1400" b="1">
+              <a:rPr sz="1600" b="1">
                 <a:solidFill>
                   <a:srgbClr val="333333"/>
                 </a:solidFill>
@@ -8181,17 +8181,17 @@
           <a:p>
             <a:pPr algn="l">
               <a:lnSpc>
-                <a:spcPts val="1430"/>
-              </a:lnSpc>
-              <a:spcBef>
-                <a:spcPts val="200"/>
-              </a:spcBef>
-              <a:spcAft>
-                <a:spcPts val="200"/>
-              </a:spcAft>
-            </a:pPr>
-            <a:r>
-              <a:rPr sz="1100" b="0">
+                <a:spcPts val="1820"/>
+              </a:lnSpc>
+              <a:spcBef>
+                <a:spcPts val="200"/>
+              </a:spcBef>
+              <a:spcAft>
+                <a:spcPts val="200"/>
+              </a:spcAft>
+            </a:pPr>
+            <a:r>
+              <a:rPr sz="1400" b="0">
                 <a:solidFill>
                   <a:srgbClr val="000000"/>
                 </a:solidFill>
@@ -8203,7 +8203,7 @@
           <a:p>
             <a:pPr algn="l">
               <a:lnSpc>
-                <a:spcPts val="1820"/>
+                <a:spcPts val="2080"/>
               </a:lnSpc>
               <a:spcBef>
                 <a:spcPts val="800"/>
@@ -8213,7 +8213,7 @@
               </a:spcAft>
             </a:pPr>
             <a:r>
-              <a:rPr sz="1400" b="1">
+              <a:rPr sz="1600" b="1">
                 <a:solidFill>
                   <a:srgbClr val="1B5C9E"/>
                 </a:solidFill>
@@ -8225,17 +8225,17 @@
           <a:p>
             <a:pPr algn="l">
               <a:lnSpc>
-                <a:spcPts val="1430"/>
-              </a:lnSpc>
-              <a:spcBef>
-                <a:spcPts val="200"/>
-              </a:spcBef>
-              <a:spcAft>
-                <a:spcPts val="200"/>
-              </a:spcAft>
-            </a:pPr>
-            <a:r>
-              <a:rPr sz="1100" b="0">
+                <a:spcPts val="1820"/>
+              </a:lnSpc>
+              <a:spcBef>
+                <a:spcPts val="200"/>
+              </a:spcBef>
+              <a:spcAft>
+                <a:spcPts val="200"/>
+              </a:spcAft>
+            </a:pPr>
+            <a:r>
+              <a:rPr sz="1400" b="0">
                 <a:solidFill>
                   <a:srgbClr val="000000"/>
                 </a:solidFill>
@@ -8247,17 +8247,17 @@
           <a:p>
             <a:pPr algn="l">
               <a:lnSpc>
-                <a:spcPts val="1430"/>
-              </a:lnSpc>
-              <a:spcBef>
-                <a:spcPts val="200"/>
-              </a:spcBef>
-              <a:spcAft>
-                <a:spcPts val="200"/>
-              </a:spcAft>
-            </a:pPr>
-            <a:r>
-              <a:rPr sz="1100" b="0">
+                <a:spcPts val="1820"/>
+              </a:lnSpc>
+              <a:spcBef>
+                <a:spcPts val="200"/>
+              </a:spcBef>
+              <a:spcAft>
+                <a:spcPts val="200"/>
+              </a:spcAft>
+            </a:pPr>
+            <a:r>
+              <a:rPr sz="1400" b="0">
                 <a:solidFill>
                   <a:srgbClr val="000000"/>
                 </a:solidFill>
@@ -8269,7 +8269,7 @@
           <a:p>
             <a:pPr algn="l">
               <a:lnSpc>
-                <a:spcPts val="1820"/>
+                <a:spcPts val="2080"/>
               </a:lnSpc>
               <a:spcBef>
                 <a:spcPts val="800"/>
@@ -8279,7 +8279,7 @@
               </a:spcAft>
             </a:pPr>
             <a:r>
-              <a:rPr sz="1400" b="1">
+              <a:rPr sz="1600" b="1">
                 <a:solidFill>
                   <a:srgbClr val="CC3333"/>
                 </a:solidFill>
@@ -8291,17 +8291,17 @@
           <a:p>
             <a:pPr algn="l">
               <a:lnSpc>
-                <a:spcPts val="1430"/>
-              </a:lnSpc>
-              <a:spcBef>
-                <a:spcPts val="200"/>
-              </a:spcBef>
-              <a:spcAft>
-                <a:spcPts val="200"/>
-              </a:spcAft>
-            </a:pPr>
-            <a:r>
-              <a:rPr sz="1100" b="0">
+                <a:spcPts val="1820"/>
+              </a:lnSpc>
+              <a:spcBef>
+                <a:spcPts val="200"/>
+              </a:spcBef>
+              <a:spcAft>
+                <a:spcPts val="200"/>
+              </a:spcAft>
+            </a:pPr>
+            <a:r>
+              <a:rPr sz="1400" b="0">
                 <a:solidFill>
                   <a:srgbClr val="000000"/>
                 </a:solidFill>
@@ -8313,7 +8313,7 @@
           <a:p>
             <a:pPr algn="l">
               <a:lnSpc>
-                <a:spcPts val="1820"/>
+                <a:spcPts val="2080"/>
               </a:lnSpc>
               <a:spcBef>
                 <a:spcPts val="800"/>
@@ -8323,7 +8323,7 @@
               </a:spcAft>
             </a:pPr>
             <a:r>
-              <a:rPr sz="1400" b="1">
+              <a:rPr sz="1600" b="1">
                 <a:solidFill>
                   <a:srgbClr val="008040"/>
                 </a:solidFill>
@@ -8335,17 +8335,17 @@
           <a:p>
             <a:pPr algn="l">
               <a:lnSpc>
-                <a:spcPts val="1430"/>
-              </a:lnSpc>
-              <a:spcBef>
-                <a:spcPts val="200"/>
-              </a:spcBef>
-              <a:spcAft>
-                <a:spcPts val="200"/>
-              </a:spcAft>
-            </a:pPr>
-            <a:r>
-              <a:rPr sz="1100" b="0">
+                <a:spcPts val="1820"/>
+              </a:lnSpc>
+              <a:spcBef>
+                <a:spcPts val="200"/>
+              </a:spcBef>
+              <a:spcAft>
+                <a:spcPts val="200"/>
+              </a:spcAft>
+            </a:pPr>
+            <a:r>
+              <a:rPr sz="1400" b="0">
                 <a:solidFill>
                   <a:srgbClr val="000000"/>
                 </a:solidFill>
@@ -8450,7 +8450,7 @@
           <a:p>
             <a:pPr algn="l">
               <a:lnSpc>
-                <a:spcPts val="1820"/>
+                <a:spcPts val="2080"/>
               </a:lnSpc>
               <a:spcBef>
                 <a:spcPts val="0"/>
@@ -8460,7 +8460,7 @@
               </a:spcAft>
             </a:pPr>
             <a:r>
-              <a:rPr sz="1400" b="1">
+              <a:rPr sz="1600" b="1">
                 <a:solidFill>
                   <a:srgbClr val="1B3A5C"/>
                 </a:solidFill>
@@ -8472,7 +8472,7 @@
           <a:p>
             <a:pPr algn="l">
               <a:lnSpc>
-                <a:spcPts val="1820"/>
+                <a:spcPts val="2080"/>
               </a:lnSpc>
               <a:spcBef>
                 <a:spcPts val="800"/>
@@ -8482,7 +8482,7 @@
               </a:spcAft>
             </a:pPr>
             <a:r>
-              <a:rPr sz="1400" b="1">
+              <a:rPr sz="1600" b="1">
                 <a:solidFill>
                   <a:srgbClr val="333333"/>
                 </a:solidFill>
@@ -8494,17 +8494,17 @@
           <a:p>
             <a:pPr algn="l">
               <a:lnSpc>
-                <a:spcPts val="1430"/>
-              </a:lnSpc>
-              <a:spcBef>
-                <a:spcPts val="200"/>
-              </a:spcBef>
-              <a:spcAft>
-                <a:spcPts val="200"/>
-              </a:spcAft>
-            </a:pPr>
-            <a:r>
-              <a:rPr sz="1100" b="0">
+                <a:spcPts val="1820"/>
+              </a:lnSpc>
+              <a:spcBef>
+                <a:spcPts val="200"/>
+              </a:spcBef>
+              <a:spcAft>
+                <a:spcPts val="200"/>
+              </a:spcAft>
+            </a:pPr>
+            <a:r>
+              <a:rPr sz="1400" b="0">
                 <a:solidFill>
                   <a:srgbClr val="000000"/>
                 </a:solidFill>
@@ -8516,7 +8516,7 @@
           <a:p>
             <a:pPr algn="l">
               <a:lnSpc>
-                <a:spcPts val="1820"/>
+                <a:spcPts val="2080"/>
               </a:lnSpc>
               <a:spcBef>
                 <a:spcPts val="800"/>
@@ -8526,7 +8526,7 @@
               </a:spcAft>
             </a:pPr>
             <a:r>
-              <a:rPr sz="1400" b="1">
+              <a:rPr sz="1600" b="1">
                 <a:solidFill>
                   <a:srgbClr val="1B5C9E"/>
                 </a:solidFill>
@@ -8538,17 +8538,17 @@
           <a:p>
             <a:pPr algn="l">
               <a:lnSpc>
-                <a:spcPts val="1430"/>
-              </a:lnSpc>
-              <a:spcBef>
-                <a:spcPts val="200"/>
-              </a:spcBef>
-              <a:spcAft>
-                <a:spcPts val="200"/>
-              </a:spcAft>
-            </a:pPr>
-            <a:r>
-              <a:rPr sz="1100" b="0">
+                <a:spcPts val="1820"/>
+              </a:lnSpc>
+              <a:spcBef>
+                <a:spcPts val="200"/>
+              </a:spcBef>
+              <a:spcAft>
+                <a:spcPts val="200"/>
+              </a:spcAft>
+            </a:pPr>
+            <a:r>
+              <a:rPr sz="1400" b="0">
                 <a:solidFill>
                   <a:srgbClr val="000000"/>
                 </a:solidFill>
@@ -8560,17 +8560,17 @@
           <a:p>
             <a:pPr algn="l">
               <a:lnSpc>
-                <a:spcPts val="1430"/>
-              </a:lnSpc>
-              <a:spcBef>
-                <a:spcPts val="200"/>
-              </a:spcBef>
-              <a:spcAft>
-                <a:spcPts val="200"/>
-              </a:spcAft>
-            </a:pPr>
-            <a:r>
-              <a:rPr sz="1100" b="0">
+                <a:spcPts val="1820"/>
+              </a:lnSpc>
+              <a:spcBef>
+                <a:spcPts val="200"/>
+              </a:spcBef>
+              <a:spcAft>
+                <a:spcPts val="200"/>
+              </a:spcAft>
+            </a:pPr>
+            <a:r>
+              <a:rPr sz="1400" b="0">
                 <a:solidFill>
                   <a:srgbClr val="000000"/>
                 </a:solidFill>
@@ -8582,17 +8582,17 @@
           <a:p>
             <a:pPr algn="l">
               <a:lnSpc>
-                <a:spcPts val="1430"/>
-              </a:lnSpc>
-              <a:spcBef>
-                <a:spcPts val="200"/>
-              </a:spcBef>
-              <a:spcAft>
-                <a:spcPts val="200"/>
-              </a:spcAft>
-            </a:pPr>
-            <a:r>
-              <a:rPr sz="1100" b="0">
+                <a:spcPts val="1820"/>
+              </a:lnSpc>
+              <a:spcBef>
+                <a:spcPts val="200"/>
+              </a:spcBef>
+              <a:spcAft>
+                <a:spcPts val="200"/>
+              </a:spcAft>
+            </a:pPr>
+            <a:r>
+              <a:rPr sz="1400" b="0">
                 <a:solidFill>
                   <a:srgbClr val="000000"/>
                 </a:solidFill>
@@ -8604,17 +8604,17 @@
           <a:p>
             <a:pPr algn="l">
               <a:lnSpc>
-                <a:spcPts val="1430"/>
-              </a:lnSpc>
-              <a:spcBef>
-                <a:spcPts val="200"/>
-              </a:spcBef>
-              <a:spcAft>
-                <a:spcPts val="200"/>
-              </a:spcAft>
-            </a:pPr>
-            <a:r>
-              <a:rPr sz="1100" b="0">
+                <a:spcPts val="1820"/>
+              </a:lnSpc>
+              <a:spcBef>
+                <a:spcPts val="200"/>
+              </a:spcBef>
+              <a:spcAft>
+                <a:spcPts val="200"/>
+              </a:spcAft>
+            </a:pPr>
+            <a:r>
+              <a:rPr sz="1400" b="0">
                 <a:solidFill>
                   <a:srgbClr val="000000"/>
                 </a:solidFill>
@@ -8626,17 +8626,17 @@
           <a:p>
             <a:pPr algn="l">
               <a:lnSpc>
-                <a:spcPts val="1430"/>
-              </a:lnSpc>
-              <a:spcBef>
-                <a:spcPts val="200"/>
-              </a:spcBef>
-              <a:spcAft>
-                <a:spcPts val="200"/>
-              </a:spcAft>
-            </a:pPr>
-            <a:r>
-              <a:rPr sz="1100" b="0">
+                <a:spcPts val="1820"/>
+              </a:lnSpc>
+              <a:spcBef>
+                <a:spcPts val="200"/>
+              </a:spcBef>
+              <a:spcAft>
+                <a:spcPts val="200"/>
+              </a:spcAft>
+            </a:pPr>
+            <a:r>
+              <a:rPr sz="1400" b="0">
                 <a:solidFill>
                   <a:srgbClr val="000000"/>
                 </a:solidFill>
@@ -8648,17 +8648,17 @@
           <a:p>
             <a:pPr algn="l">
               <a:lnSpc>
-                <a:spcPts val="1430"/>
-              </a:lnSpc>
-              <a:spcBef>
-                <a:spcPts val="200"/>
-              </a:spcBef>
-              <a:spcAft>
-                <a:spcPts val="200"/>
-              </a:spcAft>
-            </a:pPr>
-            <a:r>
-              <a:rPr sz="1100" b="0">
+                <a:spcPts val="1820"/>
+              </a:lnSpc>
+              <a:spcBef>
+                <a:spcPts val="200"/>
+              </a:spcBef>
+              <a:spcAft>
+                <a:spcPts val="200"/>
+              </a:spcAft>
+            </a:pPr>
+            <a:r>
+              <a:rPr sz="1400" b="0">
                 <a:solidFill>
                   <a:srgbClr val="000000"/>
                 </a:solidFill>
@@ -8670,17 +8670,17 @@
           <a:p>
             <a:pPr algn="l">
               <a:lnSpc>
-                <a:spcPts val="1430"/>
-              </a:lnSpc>
-              <a:spcBef>
-                <a:spcPts val="200"/>
-              </a:spcBef>
-              <a:spcAft>
-                <a:spcPts val="200"/>
-              </a:spcAft>
-            </a:pPr>
-            <a:r>
-              <a:rPr sz="1100" b="0">
+                <a:spcPts val="1820"/>
+              </a:lnSpc>
+              <a:spcBef>
+                <a:spcPts val="200"/>
+              </a:spcBef>
+              <a:spcAft>
+                <a:spcPts val="200"/>
+              </a:spcAft>
+            </a:pPr>
+            <a:r>
+              <a:rPr sz="1400" b="0">
                 <a:solidFill>
                   <a:srgbClr val="000000"/>
                 </a:solidFill>
@@ -8692,7 +8692,7 @@
           <a:p>
             <a:pPr algn="l">
               <a:lnSpc>
-                <a:spcPts val="1820"/>
+                <a:spcPts val="2080"/>
               </a:lnSpc>
               <a:spcBef>
                 <a:spcPts val="800"/>
@@ -8702,7 +8702,7 @@
               </a:spcAft>
             </a:pPr>
             <a:r>
-              <a:rPr sz="1400" b="1">
+              <a:rPr sz="1600" b="1">
                 <a:solidFill>
                   <a:srgbClr val="CC3333"/>
                 </a:solidFill>
@@ -8714,17 +8714,17 @@
           <a:p>
             <a:pPr algn="l">
               <a:lnSpc>
-                <a:spcPts val="1430"/>
-              </a:lnSpc>
-              <a:spcBef>
-                <a:spcPts val="200"/>
-              </a:spcBef>
-              <a:spcAft>
-                <a:spcPts val="200"/>
-              </a:spcAft>
-            </a:pPr>
-            <a:r>
-              <a:rPr sz="1100" b="0">
+                <a:spcPts val="1820"/>
+              </a:lnSpc>
+              <a:spcBef>
+                <a:spcPts val="200"/>
+              </a:spcBef>
+              <a:spcAft>
+                <a:spcPts val="200"/>
+              </a:spcAft>
+            </a:pPr>
+            <a:r>
+              <a:rPr sz="1400" b="0">
                 <a:solidFill>
                   <a:srgbClr val="000000"/>
                 </a:solidFill>
@@ -8736,7 +8736,7 @@
           <a:p>
             <a:pPr algn="l">
               <a:lnSpc>
-                <a:spcPts val="1820"/>
+                <a:spcPts val="2080"/>
               </a:lnSpc>
               <a:spcBef>
                 <a:spcPts val="800"/>
@@ -8746,7 +8746,7 @@
               </a:spcAft>
             </a:pPr>
             <a:r>
-              <a:rPr sz="1400" b="1">
+              <a:rPr sz="1600" b="1">
                 <a:solidFill>
                   <a:srgbClr val="008040"/>
                 </a:solidFill>
@@ -8758,17 +8758,17 @@
           <a:p>
             <a:pPr algn="l">
               <a:lnSpc>
-                <a:spcPts val="1430"/>
-              </a:lnSpc>
-              <a:spcBef>
-                <a:spcPts val="200"/>
-              </a:spcBef>
-              <a:spcAft>
-                <a:spcPts val="200"/>
-              </a:spcAft>
-            </a:pPr>
-            <a:r>
-              <a:rPr sz="1100" b="0">
+                <a:spcPts val="1820"/>
+              </a:lnSpc>
+              <a:spcBef>
+                <a:spcPts val="200"/>
+              </a:spcBef>
+              <a:spcAft>
+                <a:spcPts val="200"/>
+              </a:spcAft>
+            </a:pPr>
+            <a:r>
+              <a:rPr sz="1400" b="0">
                 <a:solidFill>
                   <a:srgbClr val="000000"/>
                 </a:solidFill>
@@ -8873,7 +8873,7 @@
           <a:p>
             <a:pPr algn="l">
               <a:lnSpc>
-                <a:spcPts val="1820"/>
+                <a:spcPts val="2080"/>
               </a:lnSpc>
               <a:spcBef>
                 <a:spcPts val="0"/>
@@ -8883,7 +8883,7 @@
               </a:spcAft>
             </a:pPr>
             <a:r>
-              <a:rPr sz="1400" b="1">
+              <a:rPr sz="1600" b="1">
                 <a:solidFill>
                   <a:srgbClr val="1B3A5C"/>
                 </a:solidFill>
@@ -8895,7 +8895,7 @@
           <a:p>
             <a:pPr algn="l">
               <a:lnSpc>
-                <a:spcPts val="1820"/>
+                <a:spcPts val="2080"/>
               </a:lnSpc>
               <a:spcBef>
                 <a:spcPts val="800"/>
@@ -8905,7 +8905,7 @@
               </a:spcAft>
             </a:pPr>
             <a:r>
-              <a:rPr sz="1400" b="1">
+              <a:rPr sz="1600" b="1">
                 <a:solidFill>
                   <a:srgbClr val="333333"/>
                 </a:solidFill>
@@ -8917,17 +8917,17 @@
           <a:p>
             <a:pPr algn="l">
               <a:lnSpc>
-                <a:spcPts val="1430"/>
-              </a:lnSpc>
-              <a:spcBef>
-                <a:spcPts val="200"/>
-              </a:spcBef>
-              <a:spcAft>
-                <a:spcPts val="200"/>
-              </a:spcAft>
-            </a:pPr>
-            <a:r>
-              <a:rPr sz="1100" b="0">
+                <a:spcPts val="1820"/>
+              </a:lnSpc>
+              <a:spcBef>
+                <a:spcPts val="200"/>
+              </a:spcBef>
+              <a:spcAft>
+                <a:spcPts val="200"/>
+              </a:spcAft>
+            </a:pPr>
+            <a:r>
+              <a:rPr sz="1400" b="0">
                 <a:solidFill>
                   <a:srgbClr val="000000"/>
                 </a:solidFill>
@@ -8939,7 +8939,7 @@
           <a:p>
             <a:pPr algn="l">
               <a:lnSpc>
-                <a:spcPts val="1820"/>
+                <a:spcPts val="2080"/>
               </a:lnSpc>
               <a:spcBef>
                 <a:spcPts val="800"/>
@@ -8949,7 +8949,7 @@
               </a:spcAft>
             </a:pPr>
             <a:r>
-              <a:rPr sz="1400" b="1">
+              <a:rPr sz="1600" b="1">
                 <a:solidFill>
                   <a:srgbClr val="1B5C9E"/>
                 </a:solidFill>
@@ -8961,17 +8961,17 @@
           <a:p>
             <a:pPr algn="l">
               <a:lnSpc>
-                <a:spcPts val="1430"/>
-              </a:lnSpc>
-              <a:spcBef>
-                <a:spcPts val="200"/>
-              </a:spcBef>
-              <a:spcAft>
-                <a:spcPts val="200"/>
-              </a:spcAft>
-            </a:pPr>
-            <a:r>
-              <a:rPr sz="1100" b="0">
+                <a:spcPts val="1820"/>
+              </a:lnSpc>
+              <a:spcBef>
+                <a:spcPts val="200"/>
+              </a:spcBef>
+              <a:spcAft>
+                <a:spcPts val="200"/>
+              </a:spcAft>
+            </a:pPr>
+            <a:r>
+              <a:rPr sz="1400" b="0">
                 <a:solidFill>
                   <a:srgbClr val="000000"/>
                 </a:solidFill>
@@ -8983,17 +8983,17 @@
           <a:p>
             <a:pPr algn="l">
               <a:lnSpc>
-                <a:spcPts val="1430"/>
-              </a:lnSpc>
-              <a:spcBef>
-                <a:spcPts val="200"/>
-              </a:spcBef>
-              <a:spcAft>
-                <a:spcPts val="200"/>
-              </a:spcAft>
-            </a:pPr>
-            <a:r>
-              <a:rPr sz="1100" b="0">
+                <a:spcPts val="1820"/>
+              </a:lnSpc>
+              <a:spcBef>
+                <a:spcPts val="200"/>
+              </a:spcBef>
+              <a:spcAft>
+                <a:spcPts val="200"/>
+              </a:spcAft>
+            </a:pPr>
+            <a:r>
+              <a:rPr sz="1400" b="0">
                 <a:solidFill>
                   <a:srgbClr val="000000"/>
                 </a:solidFill>
@@ -9005,7 +9005,7 @@
           <a:p>
             <a:pPr algn="l">
               <a:lnSpc>
-                <a:spcPts val="1820"/>
+                <a:spcPts val="2080"/>
               </a:lnSpc>
               <a:spcBef>
                 <a:spcPts val="800"/>
@@ -9015,7 +9015,7 @@
               </a:spcAft>
             </a:pPr>
             <a:r>
-              <a:rPr sz="1400" b="1">
+              <a:rPr sz="1600" b="1">
                 <a:solidFill>
                   <a:srgbClr val="CC3333"/>
                 </a:solidFill>
@@ -9027,17 +9027,17 @@
           <a:p>
             <a:pPr algn="l">
               <a:lnSpc>
-                <a:spcPts val="1430"/>
-              </a:lnSpc>
-              <a:spcBef>
-                <a:spcPts val="200"/>
-              </a:spcBef>
-              <a:spcAft>
-                <a:spcPts val="200"/>
-              </a:spcAft>
-            </a:pPr>
-            <a:r>
-              <a:rPr sz="1100" b="0">
+                <a:spcPts val="1820"/>
+              </a:lnSpc>
+              <a:spcBef>
+                <a:spcPts val="200"/>
+              </a:spcBef>
+              <a:spcAft>
+                <a:spcPts val="200"/>
+              </a:spcAft>
+            </a:pPr>
+            <a:r>
+              <a:rPr sz="1400" b="0">
                 <a:solidFill>
                   <a:srgbClr val="000000"/>
                 </a:solidFill>
@@ -9049,7 +9049,7 @@
           <a:p>
             <a:pPr algn="l">
               <a:lnSpc>
-                <a:spcPts val="1820"/>
+                <a:spcPts val="2080"/>
               </a:lnSpc>
               <a:spcBef>
                 <a:spcPts val="800"/>
@@ -9059,7 +9059,7 @@
               </a:spcAft>
             </a:pPr>
             <a:r>
-              <a:rPr sz="1400" b="1">
+              <a:rPr sz="1600" b="1">
                 <a:solidFill>
                   <a:srgbClr val="008040"/>
                 </a:solidFill>
@@ -9071,17 +9071,17 @@
           <a:p>
             <a:pPr algn="l">
               <a:lnSpc>
-                <a:spcPts val="1430"/>
-              </a:lnSpc>
-              <a:spcBef>
-                <a:spcPts val="200"/>
-              </a:spcBef>
-              <a:spcAft>
-                <a:spcPts val="200"/>
-              </a:spcAft>
-            </a:pPr>
-            <a:r>
-              <a:rPr sz="1100" b="0">
+                <a:spcPts val="1820"/>
+              </a:lnSpc>
+              <a:spcBef>
+                <a:spcPts val="200"/>
+              </a:spcBef>
+              <a:spcAft>
+                <a:spcPts val="200"/>
+              </a:spcAft>
+            </a:pPr>
+            <a:r>
+              <a:rPr sz="1400" b="0">
                 <a:solidFill>
                   <a:srgbClr val="000000"/>
                 </a:solidFill>
@@ -9186,7 +9186,7 @@
           <a:p>
             <a:pPr algn="l">
               <a:lnSpc>
-                <a:spcPts val="1820"/>
+                <a:spcPts val="2080"/>
               </a:lnSpc>
               <a:spcBef>
                 <a:spcPts val="0"/>
@@ -9196,7 +9196,7 @@
               </a:spcAft>
             </a:pPr>
             <a:r>
-              <a:rPr sz="1400" b="1">
+              <a:rPr sz="1600" b="1">
                 <a:solidFill>
                   <a:srgbClr val="1B3A5C"/>
                 </a:solidFill>
@@ -9208,7 +9208,7 @@
           <a:p>
             <a:pPr algn="l">
               <a:lnSpc>
-                <a:spcPts val="1820"/>
+                <a:spcPts val="2080"/>
               </a:lnSpc>
               <a:spcBef>
                 <a:spcPts val="800"/>
@@ -9218,7 +9218,7 @@
               </a:spcAft>
             </a:pPr>
             <a:r>
-              <a:rPr sz="1400" b="1">
+              <a:rPr sz="1600" b="1">
                 <a:solidFill>
                   <a:srgbClr val="333333"/>
                 </a:solidFill>
@@ -9230,17 +9230,17 @@
           <a:p>
             <a:pPr algn="l">
               <a:lnSpc>
-                <a:spcPts val="1430"/>
-              </a:lnSpc>
-              <a:spcBef>
-                <a:spcPts val="200"/>
-              </a:spcBef>
-              <a:spcAft>
-                <a:spcPts val="200"/>
-              </a:spcAft>
-            </a:pPr>
-            <a:r>
-              <a:rPr sz="1100" b="0">
+                <a:spcPts val="1820"/>
+              </a:lnSpc>
+              <a:spcBef>
+                <a:spcPts val="200"/>
+              </a:spcBef>
+              <a:spcAft>
+                <a:spcPts val="200"/>
+              </a:spcAft>
+            </a:pPr>
+            <a:r>
+              <a:rPr sz="1400" b="0">
                 <a:solidFill>
                   <a:srgbClr val="000000"/>
                 </a:solidFill>
@@ -9252,7 +9252,7 @@
           <a:p>
             <a:pPr algn="l">
               <a:lnSpc>
-                <a:spcPts val="1820"/>
+                <a:spcPts val="2080"/>
               </a:lnSpc>
               <a:spcBef>
                 <a:spcPts val="800"/>
@@ -9262,7 +9262,7 @@
               </a:spcAft>
             </a:pPr>
             <a:r>
-              <a:rPr sz="1400" b="1">
+              <a:rPr sz="1600" b="1">
                 <a:solidFill>
                   <a:srgbClr val="1B5C9E"/>
                 </a:solidFill>
@@ -9274,17 +9274,17 @@
           <a:p>
             <a:pPr algn="l">
               <a:lnSpc>
-                <a:spcPts val="1430"/>
-              </a:lnSpc>
-              <a:spcBef>
-                <a:spcPts val="200"/>
-              </a:spcBef>
-              <a:spcAft>
-                <a:spcPts val="200"/>
-              </a:spcAft>
-            </a:pPr>
-            <a:r>
-              <a:rPr sz="1100" b="0">
+                <a:spcPts val="1820"/>
+              </a:lnSpc>
+              <a:spcBef>
+                <a:spcPts val="200"/>
+              </a:spcBef>
+              <a:spcAft>
+                <a:spcPts val="200"/>
+              </a:spcAft>
+            </a:pPr>
+            <a:r>
+              <a:rPr sz="1400" b="0">
                 <a:solidFill>
                   <a:srgbClr val="000000"/>
                 </a:solidFill>
@@ -9296,7 +9296,7 @@
           <a:p>
             <a:pPr algn="l">
               <a:lnSpc>
-                <a:spcPts val="1820"/>
+                <a:spcPts val="2080"/>
               </a:lnSpc>
               <a:spcBef>
                 <a:spcPts val="800"/>
@@ -9306,7 +9306,7 @@
               </a:spcAft>
             </a:pPr>
             <a:r>
-              <a:rPr sz="1400" b="1">
+              <a:rPr sz="1600" b="1">
                 <a:solidFill>
                   <a:srgbClr val="CC3333"/>
                 </a:solidFill>
@@ -9318,17 +9318,17 @@
           <a:p>
             <a:pPr algn="l">
               <a:lnSpc>
-                <a:spcPts val="1430"/>
-              </a:lnSpc>
-              <a:spcBef>
-                <a:spcPts val="200"/>
-              </a:spcBef>
-              <a:spcAft>
-                <a:spcPts val="200"/>
-              </a:spcAft>
-            </a:pPr>
-            <a:r>
-              <a:rPr sz="1100" b="0">
+                <a:spcPts val="1820"/>
+              </a:lnSpc>
+              <a:spcBef>
+                <a:spcPts val="200"/>
+              </a:spcBef>
+              <a:spcAft>
+                <a:spcPts val="200"/>
+              </a:spcAft>
+            </a:pPr>
+            <a:r>
+              <a:rPr sz="1400" b="0">
                 <a:solidFill>
                   <a:srgbClr val="000000"/>
                 </a:solidFill>
@@ -9340,7 +9340,7 @@
           <a:p>
             <a:pPr algn="l">
               <a:lnSpc>
-                <a:spcPts val="1820"/>
+                <a:spcPts val="2080"/>
               </a:lnSpc>
               <a:spcBef>
                 <a:spcPts val="800"/>
@@ -9350,7 +9350,7 @@
               </a:spcAft>
             </a:pPr>
             <a:r>
-              <a:rPr sz="1400" b="1">
+              <a:rPr sz="1600" b="1">
                 <a:solidFill>
                   <a:srgbClr val="008040"/>
                 </a:solidFill>
@@ -9362,17 +9362,17 @@
           <a:p>
             <a:pPr algn="l">
               <a:lnSpc>
-                <a:spcPts val="1430"/>
-              </a:lnSpc>
-              <a:spcBef>
-                <a:spcPts val="200"/>
-              </a:spcBef>
-              <a:spcAft>
-                <a:spcPts val="200"/>
-              </a:spcAft>
-            </a:pPr>
-            <a:r>
-              <a:rPr sz="1100" b="0">
+                <a:spcPts val="1820"/>
+              </a:lnSpc>
+              <a:spcBef>
+                <a:spcPts val="200"/>
+              </a:spcBef>
+              <a:spcAft>
+                <a:spcPts val="200"/>
+              </a:spcAft>
+            </a:pPr>
+            <a:r>
+              <a:rPr sz="1400" b="0">
                 <a:solidFill>
                   <a:srgbClr val="000000"/>
                 </a:solidFill>
@@ -9477,7 +9477,7 @@
           <a:p>
             <a:pPr algn="l">
               <a:lnSpc>
-                <a:spcPts val="1820"/>
+                <a:spcPts val="2080"/>
               </a:lnSpc>
               <a:spcBef>
                 <a:spcPts val="0"/>
@@ -9487,7 +9487,7 @@
               </a:spcAft>
             </a:pPr>
             <a:r>
-              <a:rPr sz="1400" b="1">
+              <a:rPr sz="1600" b="1">
                 <a:solidFill>
                   <a:srgbClr val="1B3A5C"/>
                 </a:solidFill>
@@ -9499,7 +9499,7 @@
           <a:p>
             <a:pPr algn="l">
               <a:lnSpc>
-                <a:spcPts val="1820"/>
+                <a:spcPts val="2080"/>
               </a:lnSpc>
               <a:spcBef>
                 <a:spcPts val="800"/>
@@ -9509,7 +9509,7 @@
               </a:spcAft>
             </a:pPr>
             <a:r>
-              <a:rPr sz="1400" b="1">
+              <a:rPr sz="1600" b="1">
                 <a:solidFill>
                   <a:srgbClr val="333333"/>
                 </a:solidFill>
@@ -9521,17 +9521,17 @@
           <a:p>
             <a:pPr algn="l">
               <a:lnSpc>
-                <a:spcPts val="1430"/>
-              </a:lnSpc>
-              <a:spcBef>
-                <a:spcPts val="200"/>
-              </a:spcBef>
-              <a:spcAft>
-                <a:spcPts val="200"/>
-              </a:spcAft>
-            </a:pPr>
-            <a:r>
-              <a:rPr sz="1100" b="0">
+                <a:spcPts val="1820"/>
+              </a:lnSpc>
+              <a:spcBef>
+                <a:spcPts val="200"/>
+              </a:spcBef>
+              <a:spcAft>
+                <a:spcPts val="200"/>
+              </a:spcAft>
+            </a:pPr>
+            <a:r>
+              <a:rPr sz="1400" b="0">
                 <a:solidFill>
                   <a:srgbClr val="000000"/>
                 </a:solidFill>
@@ -9543,7 +9543,7 @@
           <a:p>
             <a:pPr algn="l">
               <a:lnSpc>
-                <a:spcPts val="1820"/>
+                <a:spcPts val="2080"/>
               </a:lnSpc>
               <a:spcBef>
                 <a:spcPts val="800"/>
@@ -9553,7 +9553,7 @@
               </a:spcAft>
             </a:pPr>
             <a:r>
-              <a:rPr sz="1400" b="1">
+              <a:rPr sz="1600" b="1">
                 <a:solidFill>
                   <a:srgbClr val="1B5C9E"/>
                 </a:solidFill>
@@ -9565,17 +9565,17 @@
           <a:p>
             <a:pPr algn="l">
               <a:lnSpc>
-                <a:spcPts val="1430"/>
-              </a:lnSpc>
-              <a:spcBef>
-                <a:spcPts val="200"/>
-              </a:spcBef>
-              <a:spcAft>
-                <a:spcPts val="200"/>
-              </a:spcAft>
-            </a:pPr>
-            <a:r>
-              <a:rPr sz="1100" b="0">
+                <a:spcPts val="1820"/>
+              </a:lnSpc>
+              <a:spcBef>
+                <a:spcPts val="200"/>
+              </a:spcBef>
+              <a:spcAft>
+                <a:spcPts val="200"/>
+              </a:spcAft>
+            </a:pPr>
+            <a:r>
+              <a:rPr sz="1400" b="0">
                 <a:solidFill>
                   <a:srgbClr val="000000"/>
                 </a:solidFill>
@@ -9587,17 +9587,17 @@
           <a:p>
             <a:pPr algn="l">
               <a:lnSpc>
-                <a:spcPts val="1430"/>
-              </a:lnSpc>
-              <a:spcBef>
-                <a:spcPts val="200"/>
-              </a:spcBef>
-              <a:spcAft>
-                <a:spcPts val="200"/>
-              </a:spcAft>
-            </a:pPr>
-            <a:r>
-              <a:rPr sz="1100" b="0">
+                <a:spcPts val="1820"/>
+              </a:lnSpc>
+              <a:spcBef>
+                <a:spcPts val="200"/>
+              </a:spcBef>
+              <a:spcAft>
+                <a:spcPts val="200"/>
+              </a:spcAft>
+            </a:pPr>
+            <a:r>
+              <a:rPr sz="1400" b="0">
                 <a:solidFill>
                   <a:srgbClr val="000000"/>
                 </a:solidFill>
@@ -9609,7 +9609,7 @@
           <a:p>
             <a:pPr algn="l">
               <a:lnSpc>
-                <a:spcPts val="1820"/>
+                <a:spcPts val="2080"/>
               </a:lnSpc>
               <a:spcBef>
                 <a:spcPts val="800"/>
@@ -9619,7 +9619,7 @@
               </a:spcAft>
             </a:pPr>
             <a:r>
-              <a:rPr sz="1400" b="1">
+              <a:rPr sz="1600" b="1">
                 <a:solidFill>
                   <a:srgbClr val="CC3333"/>
                 </a:solidFill>
@@ -9631,17 +9631,17 @@
           <a:p>
             <a:pPr algn="l">
               <a:lnSpc>
-                <a:spcPts val="1430"/>
-              </a:lnSpc>
-              <a:spcBef>
-                <a:spcPts val="200"/>
-              </a:spcBef>
-              <a:spcAft>
-                <a:spcPts val="200"/>
-              </a:spcAft>
-            </a:pPr>
-            <a:r>
-              <a:rPr sz="1100" b="0">
+                <a:spcPts val="1820"/>
+              </a:lnSpc>
+              <a:spcBef>
+                <a:spcPts val="200"/>
+              </a:spcBef>
+              <a:spcAft>
+                <a:spcPts val="200"/>
+              </a:spcAft>
+            </a:pPr>
+            <a:r>
+              <a:rPr sz="1400" b="0">
                 <a:solidFill>
                   <a:srgbClr val="000000"/>
                 </a:solidFill>
@@ -9653,7 +9653,7 @@
           <a:p>
             <a:pPr algn="l">
               <a:lnSpc>
-                <a:spcPts val="1820"/>
+                <a:spcPts val="2080"/>
               </a:lnSpc>
               <a:spcBef>
                 <a:spcPts val="800"/>
@@ -9663,7 +9663,7 @@
               </a:spcAft>
             </a:pPr>
             <a:r>
-              <a:rPr sz="1400" b="1">
+              <a:rPr sz="1600" b="1">
                 <a:solidFill>
                   <a:srgbClr val="008040"/>
                 </a:solidFill>
@@ -9675,17 +9675,17 @@
           <a:p>
             <a:pPr algn="l">
               <a:lnSpc>
-                <a:spcPts val="1430"/>
-              </a:lnSpc>
-              <a:spcBef>
-                <a:spcPts val="200"/>
-              </a:spcBef>
-              <a:spcAft>
-                <a:spcPts val="200"/>
-              </a:spcAft>
-            </a:pPr>
-            <a:r>
-              <a:rPr sz="1100" b="0">
+                <a:spcPts val="1820"/>
+              </a:lnSpc>
+              <a:spcBef>
+                <a:spcPts val="200"/>
+              </a:spcBef>
+              <a:spcAft>
+                <a:spcPts val="200"/>
+              </a:spcAft>
+            </a:pPr>
+            <a:r>
+              <a:rPr sz="1400" b="0">
                 <a:solidFill>
                   <a:srgbClr val="000000"/>
                 </a:solidFill>
@@ -9790,7 +9790,7 @@
           <a:p>
             <a:pPr algn="l">
               <a:lnSpc>
-                <a:spcPts val="1820"/>
+                <a:spcPts val="2080"/>
               </a:lnSpc>
               <a:spcBef>
                 <a:spcPts val="0"/>
@@ -9800,7 +9800,7 @@
               </a:spcAft>
             </a:pPr>
             <a:r>
-              <a:rPr sz="1400" b="1">
+              <a:rPr sz="1600" b="1">
                 <a:solidFill>
                   <a:srgbClr val="1B3A5C"/>
                 </a:solidFill>
@@ -9812,7 +9812,7 @@
           <a:p>
             <a:pPr algn="l">
               <a:lnSpc>
-                <a:spcPts val="1820"/>
+                <a:spcPts val="2080"/>
               </a:lnSpc>
               <a:spcBef>
                 <a:spcPts val="800"/>
@@ -9822,7 +9822,7 @@
               </a:spcAft>
             </a:pPr>
             <a:r>
-              <a:rPr sz="1400" b="1">
+              <a:rPr sz="1600" b="1">
                 <a:solidFill>
                   <a:srgbClr val="333333"/>
                 </a:solidFill>
@@ -9834,17 +9834,17 @@
           <a:p>
             <a:pPr algn="l">
               <a:lnSpc>
-                <a:spcPts val="1430"/>
-              </a:lnSpc>
-              <a:spcBef>
-                <a:spcPts val="200"/>
-              </a:spcBef>
-              <a:spcAft>
-                <a:spcPts val="200"/>
-              </a:spcAft>
-            </a:pPr>
-            <a:r>
-              <a:rPr sz="1100" b="0">
+                <a:spcPts val="1820"/>
+              </a:lnSpc>
+              <a:spcBef>
+                <a:spcPts val="200"/>
+              </a:spcBef>
+              <a:spcAft>
+                <a:spcPts val="200"/>
+              </a:spcAft>
+            </a:pPr>
+            <a:r>
+              <a:rPr sz="1400" b="0">
                 <a:solidFill>
                   <a:srgbClr val="000000"/>
                 </a:solidFill>
@@ -9856,7 +9856,7 @@
           <a:p>
             <a:pPr algn="l">
               <a:lnSpc>
-                <a:spcPts val="1820"/>
+                <a:spcPts val="2080"/>
               </a:lnSpc>
               <a:spcBef>
                 <a:spcPts val="800"/>
@@ -9866,7 +9866,7 @@
               </a:spcAft>
             </a:pPr>
             <a:r>
-              <a:rPr sz="1400" b="1">
+              <a:rPr sz="1600" b="1">
                 <a:solidFill>
                   <a:srgbClr val="1B5C9E"/>
                 </a:solidFill>
@@ -9878,17 +9878,17 @@
           <a:p>
             <a:pPr algn="l">
               <a:lnSpc>
-                <a:spcPts val="1430"/>
-              </a:lnSpc>
-              <a:spcBef>
-                <a:spcPts val="200"/>
-              </a:spcBef>
-              <a:spcAft>
-                <a:spcPts val="200"/>
-              </a:spcAft>
-            </a:pPr>
-            <a:r>
-              <a:rPr sz="1100" b="0">
+                <a:spcPts val="1820"/>
+              </a:lnSpc>
+              <a:spcBef>
+                <a:spcPts val="200"/>
+              </a:spcBef>
+              <a:spcAft>
+                <a:spcPts val="200"/>
+              </a:spcAft>
+            </a:pPr>
+            <a:r>
+              <a:rPr sz="1400" b="0">
                 <a:solidFill>
                   <a:srgbClr val="000000"/>
                 </a:solidFill>
@@ -9900,17 +9900,17 @@
           <a:p>
             <a:pPr algn="l">
               <a:lnSpc>
-                <a:spcPts val="1430"/>
-              </a:lnSpc>
-              <a:spcBef>
-                <a:spcPts val="200"/>
-              </a:spcBef>
-              <a:spcAft>
-                <a:spcPts val="200"/>
-              </a:spcAft>
-            </a:pPr>
-            <a:r>
-              <a:rPr sz="1100" b="0">
+                <a:spcPts val="1820"/>
+              </a:lnSpc>
+              <a:spcBef>
+                <a:spcPts val="200"/>
+              </a:spcBef>
+              <a:spcAft>
+                <a:spcPts val="200"/>
+              </a:spcAft>
+            </a:pPr>
+            <a:r>
+              <a:rPr sz="1400" b="0">
                 <a:solidFill>
                   <a:srgbClr val="000000"/>
                 </a:solidFill>
@@ -9922,7 +9922,7 @@
           <a:p>
             <a:pPr algn="l">
               <a:lnSpc>
-                <a:spcPts val="1820"/>
+                <a:spcPts val="2080"/>
               </a:lnSpc>
               <a:spcBef>
                 <a:spcPts val="800"/>
@@ -9932,7 +9932,7 @@
               </a:spcAft>
             </a:pPr>
             <a:r>
-              <a:rPr sz="1400" b="1">
+              <a:rPr sz="1600" b="1">
                 <a:solidFill>
                   <a:srgbClr val="CC3333"/>
                 </a:solidFill>
@@ -9944,17 +9944,17 @@
           <a:p>
             <a:pPr algn="l">
               <a:lnSpc>
-                <a:spcPts val="1430"/>
-              </a:lnSpc>
-              <a:spcBef>
-                <a:spcPts val="200"/>
-              </a:spcBef>
-              <a:spcAft>
-                <a:spcPts val="200"/>
-              </a:spcAft>
-            </a:pPr>
-            <a:r>
-              <a:rPr sz="1100" b="0">
+                <a:spcPts val="1820"/>
+              </a:lnSpc>
+              <a:spcBef>
+                <a:spcPts val="200"/>
+              </a:spcBef>
+              <a:spcAft>
+                <a:spcPts val="200"/>
+              </a:spcAft>
+            </a:pPr>
+            <a:r>
+              <a:rPr sz="1400" b="0">
                 <a:solidFill>
                   <a:srgbClr val="000000"/>
                 </a:solidFill>
@@ -9966,7 +9966,7 @@
           <a:p>
             <a:pPr algn="l">
               <a:lnSpc>
-                <a:spcPts val="1820"/>
+                <a:spcPts val="2080"/>
               </a:lnSpc>
               <a:spcBef>
                 <a:spcPts val="800"/>
@@ -9976,7 +9976,7 @@
               </a:spcAft>
             </a:pPr>
             <a:r>
-              <a:rPr sz="1400" b="1">
+              <a:rPr sz="1600" b="1">
                 <a:solidFill>
                   <a:srgbClr val="008040"/>
                 </a:solidFill>
@@ -9988,17 +9988,17 @@
           <a:p>
             <a:pPr algn="l">
               <a:lnSpc>
-                <a:spcPts val="1430"/>
-              </a:lnSpc>
-              <a:spcBef>
-                <a:spcPts val="200"/>
-              </a:spcBef>
-              <a:spcAft>
-                <a:spcPts val="200"/>
-              </a:spcAft>
-            </a:pPr>
-            <a:r>
-              <a:rPr sz="1100" b="0">
+                <a:spcPts val="1820"/>
+              </a:lnSpc>
+              <a:spcBef>
+                <a:spcPts val="200"/>
+              </a:spcBef>
+              <a:spcAft>
+                <a:spcPts val="200"/>
+              </a:spcAft>
+            </a:pPr>
+            <a:r>
+              <a:rPr sz="1400" b="0">
                 <a:solidFill>
                   <a:srgbClr val="000000"/>
                 </a:solidFill>
@@ -10010,17 +10010,17 @@
           <a:p>
             <a:pPr algn="l">
               <a:lnSpc>
-                <a:spcPts val="1430"/>
-              </a:lnSpc>
-              <a:spcBef>
-                <a:spcPts val="200"/>
-              </a:spcBef>
-              <a:spcAft>
-                <a:spcPts val="200"/>
-              </a:spcAft>
-            </a:pPr>
-            <a:r>
-              <a:rPr sz="1100" b="0">
+                <a:spcPts val="1820"/>
+              </a:lnSpc>
+              <a:spcBef>
+                <a:spcPts val="200"/>
+              </a:spcBef>
+              <a:spcAft>
+                <a:spcPts val="200"/>
+              </a:spcAft>
+            </a:pPr>
+            <a:r>
+              <a:rPr sz="1400" b="0">
                 <a:solidFill>
                   <a:srgbClr val="000000"/>
                 </a:solidFill>
@@ -10125,7 +10125,7 @@
           <a:p>
             <a:pPr algn="l">
               <a:lnSpc>
-                <a:spcPts val="1820"/>
+                <a:spcPts val="2080"/>
               </a:lnSpc>
               <a:spcBef>
                 <a:spcPts val="0"/>
@@ -10135,7 +10135,7 @@
               </a:spcAft>
             </a:pPr>
             <a:r>
-              <a:rPr sz="1400" b="1">
+              <a:rPr sz="1600" b="1">
                 <a:solidFill>
                   <a:srgbClr val="1B3A5C"/>
                 </a:solidFill>
@@ -10147,7 +10147,7 @@
           <a:p>
             <a:pPr algn="l">
               <a:lnSpc>
-                <a:spcPts val="1820"/>
+                <a:spcPts val="2080"/>
               </a:lnSpc>
               <a:spcBef>
                 <a:spcPts val="800"/>
@@ -10157,7 +10157,7 @@
               </a:spcAft>
             </a:pPr>
             <a:r>
-              <a:rPr sz="1400" b="1">
+              <a:rPr sz="1600" b="1">
                 <a:solidFill>
                   <a:srgbClr val="333333"/>
                 </a:solidFill>
@@ -10169,17 +10169,17 @@
           <a:p>
             <a:pPr algn="l">
               <a:lnSpc>
-                <a:spcPts val="1430"/>
-              </a:lnSpc>
-              <a:spcBef>
-                <a:spcPts val="200"/>
-              </a:spcBef>
-              <a:spcAft>
-                <a:spcPts val="200"/>
-              </a:spcAft>
-            </a:pPr>
-            <a:r>
-              <a:rPr sz="1100" b="0">
+                <a:spcPts val="1820"/>
+              </a:lnSpc>
+              <a:spcBef>
+                <a:spcPts val="200"/>
+              </a:spcBef>
+              <a:spcAft>
+                <a:spcPts val="200"/>
+              </a:spcAft>
+            </a:pPr>
+            <a:r>
+              <a:rPr sz="1400" b="0">
                 <a:solidFill>
                   <a:srgbClr val="000000"/>
                 </a:solidFill>
@@ -10191,7 +10191,7 @@
           <a:p>
             <a:pPr algn="l">
               <a:lnSpc>
-                <a:spcPts val="1820"/>
+                <a:spcPts val="2080"/>
               </a:lnSpc>
               <a:spcBef>
                 <a:spcPts val="800"/>
@@ -10201,7 +10201,7 @@
               </a:spcAft>
             </a:pPr>
             <a:r>
-              <a:rPr sz="1400" b="1">
+              <a:rPr sz="1600" b="1">
                 <a:solidFill>
                   <a:srgbClr val="1B5C9E"/>
                 </a:solidFill>
@@ -10213,17 +10213,17 @@
           <a:p>
             <a:pPr algn="l">
               <a:lnSpc>
-                <a:spcPts val="1430"/>
-              </a:lnSpc>
-              <a:spcBef>
-                <a:spcPts val="200"/>
-              </a:spcBef>
-              <a:spcAft>
-                <a:spcPts val="200"/>
-              </a:spcAft>
-            </a:pPr>
-            <a:r>
-              <a:rPr sz="1100" b="0">
+                <a:spcPts val="1820"/>
+              </a:lnSpc>
+              <a:spcBef>
+                <a:spcPts val="200"/>
+              </a:spcBef>
+              <a:spcAft>
+                <a:spcPts val="200"/>
+              </a:spcAft>
+            </a:pPr>
+            <a:r>
+              <a:rPr sz="1400" b="0">
                 <a:solidFill>
                   <a:srgbClr val="000000"/>
                 </a:solidFill>
@@ -10235,17 +10235,17 @@
           <a:p>
             <a:pPr algn="l">
               <a:lnSpc>
-                <a:spcPts val="1430"/>
-              </a:lnSpc>
-              <a:spcBef>
-                <a:spcPts val="200"/>
-              </a:spcBef>
-              <a:spcAft>
-                <a:spcPts val="200"/>
-              </a:spcAft>
-            </a:pPr>
-            <a:r>
-              <a:rPr sz="1100" b="0">
+                <a:spcPts val="1820"/>
+              </a:lnSpc>
+              <a:spcBef>
+                <a:spcPts val="200"/>
+              </a:spcBef>
+              <a:spcAft>
+                <a:spcPts val="200"/>
+              </a:spcAft>
+            </a:pPr>
+            <a:r>
+              <a:rPr sz="1400" b="0">
                 <a:solidFill>
                   <a:srgbClr val="000000"/>
                 </a:solidFill>
@@ -10257,7 +10257,7 @@
           <a:p>
             <a:pPr algn="l">
               <a:lnSpc>
-                <a:spcPts val="1820"/>
+                <a:spcPts val="2080"/>
               </a:lnSpc>
               <a:spcBef>
                 <a:spcPts val="800"/>
@@ -10267,7 +10267,7 @@
               </a:spcAft>
             </a:pPr>
             <a:r>
-              <a:rPr sz="1400" b="1">
+              <a:rPr sz="1600" b="1">
                 <a:solidFill>
                   <a:srgbClr val="CC3333"/>
                 </a:solidFill>
@@ -10279,17 +10279,17 @@
           <a:p>
             <a:pPr algn="l">
               <a:lnSpc>
-                <a:spcPts val="1430"/>
-              </a:lnSpc>
-              <a:spcBef>
-                <a:spcPts val="200"/>
-              </a:spcBef>
-              <a:spcAft>
-                <a:spcPts val="200"/>
-              </a:spcAft>
-            </a:pPr>
-            <a:r>
-              <a:rPr sz="1100" b="0">
+                <a:spcPts val="1820"/>
+              </a:lnSpc>
+              <a:spcBef>
+                <a:spcPts val="200"/>
+              </a:spcBef>
+              <a:spcAft>
+                <a:spcPts val="200"/>
+              </a:spcAft>
+            </a:pPr>
+            <a:r>
+              <a:rPr sz="1400" b="0">
                 <a:solidFill>
                   <a:srgbClr val="000000"/>
                 </a:solidFill>
@@ -10301,7 +10301,7 @@
           <a:p>
             <a:pPr algn="l">
               <a:lnSpc>
-                <a:spcPts val="1820"/>
+                <a:spcPts val="2080"/>
               </a:lnSpc>
               <a:spcBef>
                 <a:spcPts val="800"/>
@@ -10311,7 +10311,7 @@
               </a:spcAft>
             </a:pPr>
             <a:r>
-              <a:rPr sz="1400" b="1">
+              <a:rPr sz="1600" b="1">
                 <a:solidFill>
                   <a:srgbClr val="008040"/>
                 </a:solidFill>
@@ -10323,17 +10323,17 @@
           <a:p>
             <a:pPr algn="l">
               <a:lnSpc>
-                <a:spcPts val="1430"/>
-              </a:lnSpc>
-              <a:spcBef>
-                <a:spcPts val="200"/>
-              </a:spcBef>
-              <a:spcAft>
-                <a:spcPts val="200"/>
-              </a:spcAft>
-            </a:pPr>
-            <a:r>
-              <a:rPr sz="1100" b="0">
+                <a:spcPts val="1820"/>
+              </a:lnSpc>
+              <a:spcBef>
+                <a:spcPts val="200"/>
+              </a:spcBef>
+              <a:spcAft>
+                <a:spcPts val="200"/>
+              </a:spcAft>
+            </a:pPr>
+            <a:r>
+              <a:rPr sz="1400" b="0">
                 <a:solidFill>
                   <a:srgbClr val="000000"/>
                 </a:solidFill>
@@ -10438,7 +10438,7 @@
           <a:p>
             <a:pPr algn="l">
               <a:lnSpc>
-                <a:spcPts val="1820"/>
+                <a:spcPts val="2080"/>
               </a:lnSpc>
               <a:spcBef>
                 <a:spcPts val="0"/>
@@ -10448,7 +10448,7 @@
               </a:spcAft>
             </a:pPr>
             <a:r>
-              <a:rPr sz="1400" b="1">
+              <a:rPr sz="1600" b="1">
                 <a:solidFill>
                   <a:srgbClr val="1B3A5C"/>
                 </a:solidFill>
@@ -10460,7 +10460,7 @@
           <a:p>
             <a:pPr algn="l">
               <a:lnSpc>
-                <a:spcPts val="1820"/>
+                <a:spcPts val="2080"/>
               </a:lnSpc>
               <a:spcBef>
                 <a:spcPts val="800"/>
@@ -10470,7 +10470,7 @@
               </a:spcAft>
             </a:pPr>
             <a:r>
-              <a:rPr sz="1400" b="1">
+              <a:rPr sz="1600" b="1">
                 <a:solidFill>
                   <a:srgbClr val="333333"/>
                 </a:solidFill>
@@ -10482,17 +10482,17 @@
           <a:p>
             <a:pPr algn="l">
               <a:lnSpc>
-                <a:spcPts val="1430"/>
-              </a:lnSpc>
-              <a:spcBef>
-                <a:spcPts val="200"/>
-              </a:spcBef>
-              <a:spcAft>
-                <a:spcPts val="200"/>
-              </a:spcAft>
-            </a:pPr>
-            <a:r>
-              <a:rPr sz="1100" b="0">
+                <a:spcPts val="1820"/>
+              </a:lnSpc>
+              <a:spcBef>
+                <a:spcPts val="200"/>
+              </a:spcBef>
+              <a:spcAft>
+                <a:spcPts val="200"/>
+              </a:spcAft>
+            </a:pPr>
+            <a:r>
+              <a:rPr sz="1400" b="0">
                 <a:solidFill>
                   <a:srgbClr val="000000"/>
                 </a:solidFill>
@@ -10504,7 +10504,7 @@
           <a:p>
             <a:pPr algn="l">
               <a:lnSpc>
-                <a:spcPts val="1820"/>
+                <a:spcPts val="2080"/>
               </a:lnSpc>
               <a:spcBef>
                 <a:spcPts val="800"/>
@@ -10514,7 +10514,7 @@
               </a:spcAft>
             </a:pPr>
             <a:r>
-              <a:rPr sz="1400" b="1">
+              <a:rPr sz="1600" b="1">
                 <a:solidFill>
                   <a:srgbClr val="1B5C9E"/>
                 </a:solidFill>
@@ -10526,17 +10526,17 @@
           <a:p>
             <a:pPr algn="l">
               <a:lnSpc>
-                <a:spcPts val="1430"/>
-              </a:lnSpc>
-              <a:spcBef>
-                <a:spcPts val="200"/>
-              </a:spcBef>
-              <a:spcAft>
-                <a:spcPts val="200"/>
-              </a:spcAft>
-            </a:pPr>
-            <a:r>
-              <a:rPr sz="1100" b="0">
+                <a:spcPts val="1820"/>
+              </a:lnSpc>
+              <a:spcBef>
+                <a:spcPts val="200"/>
+              </a:spcBef>
+              <a:spcAft>
+                <a:spcPts val="200"/>
+              </a:spcAft>
+            </a:pPr>
+            <a:r>
+              <a:rPr sz="1400" b="0">
                 <a:solidFill>
                   <a:srgbClr val="000000"/>
                 </a:solidFill>
@@ -10548,7 +10548,7 @@
           <a:p>
             <a:pPr algn="l">
               <a:lnSpc>
-                <a:spcPts val="1820"/>
+                <a:spcPts val="2080"/>
               </a:lnSpc>
               <a:spcBef>
                 <a:spcPts val="800"/>
@@ -10558,7 +10558,7 @@
               </a:spcAft>
             </a:pPr>
             <a:r>
-              <a:rPr sz="1400" b="1">
+              <a:rPr sz="1600" b="1">
                 <a:solidFill>
                   <a:srgbClr val="CC3333"/>
                 </a:solidFill>
@@ -10570,17 +10570,17 @@
           <a:p>
             <a:pPr algn="l">
               <a:lnSpc>
-                <a:spcPts val="1430"/>
-              </a:lnSpc>
-              <a:spcBef>
-                <a:spcPts val="200"/>
-              </a:spcBef>
-              <a:spcAft>
-                <a:spcPts val="200"/>
-              </a:spcAft>
-            </a:pPr>
-            <a:r>
-              <a:rPr sz="1100" b="0">
+                <a:spcPts val="1820"/>
+              </a:lnSpc>
+              <a:spcBef>
+                <a:spcPts val="200"/>
+              </a:spcBef>
+              <a:spcAft>
+                <a:spcPts val="200"/>
+              </a:spcAft>
+            </a:pPr>
+            <a:r>
+              <a:rPr sz="1400" b="0">
                 <a:solidFill>
                   <a:srgbClr val="000000"/>
                 </a:solidFill>
@@ -10592,7 +10592,7 @@
           <a:p>
             <a:pPr algn="l">
               <a:lnSpc>
-                <a:spcPts val="1820"/>
+                <a:spcPts val="2080"/>
               </a:lnSpc>
               <a:spcBef>
                 <a:spcPts val="800"/>
@@ -10602,7 +10602,7 @@
               </a:spcAft>
             </a:pPr>
             <a:r>
-              <a:rPr sz="1400" b="1">
+              <a:rPr sz="1600" b="1">
                 <a:solidFill>
                   <a:srgbClr val="008040"/>
                 </a:solidFill>
@@ -10614,17 +10614,17 @@
           <a:p>
             <a:pPr algn="l">
               <a:lnSpc>
-                <a:spcPts val="1430"/>
-              </a:lnSpc>
-              <a:spcBef>
-                <a:spcPts val="200"/>
-              </a:spcBef>
-              <a:spcAft>
-                <a:spcPts val="200"/>
-              </a:spcAft>
-            </a:pPr>
-            <a:r>
-              <a:rPr sz="1100" b="0">
+                <a:spcPts val="1820"/>
+              </a:lnSpc>
+              <a:spcBef>
+                <a:spcPts val="200"/>
+              </a:spcBef>
+              <a:spcAft>
+                <a:spcPts val="200"/>
+              </a:spcAft>
+            </a:pPr>
+            <a:r>
+              <a:rPr sz="1400" b="0">
                 <a:solidFill>
                   <a:srgbClr val="000000"/>
                 </a:solidFill>
@@ -10729,7 +10729,7 @@
           <a:p>
             <a:pPr algn="l">
               <a:lnSpc>
-                <a:spcPts val="1820"/>
+                <a:spcPts val="2080"/>
               </a:lnSpc>
               <a:spcBef>
                 <a:spcPts val="0"/>
@@ -10739,7 +10739,7 @@
               </a:spcAft>
             </a:pPr>
             <a:r>
-              <a:rPr sz="1400" b="1">
+              <a:rPr sz="1600" b="1">
                 <a:solidFill>
                   <a:srgbClr val="1B3A5C"/>
                 </a:solidFill>
@@ -10751,7 +10751,7 @@
           <a:p>
             <a:pPr algn="l">
               <a:lnSpc>
-                <a:spcPts val="1820"/>
+                <a:spcPts val="2080"/>
               </a:lnSpc>
               <a:spcBef>
                 <a:spcPts val="800"/>
@@ -10761,7 +10761,7 @@
               </a:spcAft>
             </a:pPr>
             <a:r>
-              <a:rPr sz="1400" b="1">
+              <a:rPr sz="1600" b="1">
                 <a:solidFill>
                   <a:srgbClr val="333333"/>
                 </a:solidFill>
@@ -10773,17 +10773,17 @@
           <a:p>
             <a:pPr algn="l">
               <a:lnSpc>
-                <a:spcPts val="1430"/>
-              </a:lnSpc>
-              <a:spcBef>
-                <a:spcPts val="200"/>
-              </a:spcBef>
-              <a:spcAft>
-                <a:spcPts val="200"/>
-              </a:spcAft>
-            </a:pPr>
-            <a:r>
-              <a:rPr sz="1100" b="0">
+                <a:spcPts val="1820"/>
+              </a:lnSpc>
+              <a:spcBef>
+                <a:spcPts val="200"/>
+              </a:spcBef>
+              <a:spcAft>
+                <a:spcPts val="200"/>
+              </a:spcAft>
+            </a:pPr>
+            <a:r>
+              <a:rPr sz="1400" b="0">
                 <a:solidFill>
                   <a:srgbClr val="000000"/>
                 </a:solidFill>
@@ -10795,7 +10795,7 @@
           <a:p>
             <a:pPr algn="l">
               <a:lnSpc>
-                <a:spcPts val="1820"/>
+                <a:spcPts val="2080"/>
               </a:lnSpc>
               <a:spcBef>
                 <a:spcPts val="800"/>
@@ -10805,7 +10805,7 @@
               </a:spcAft>
             </a:pPr>
             <a:r>
-              <a:rPr sz="1400" b="1">
+              <a:rPr sz="1600" b="1">
                 <a:solidFill>
                   <a:srgbClr val="1B5C9E"/>
                 </a:solidFill>
@@ -10817,17 +10817,17 @@
           <a:p>
             <a:pPr algn="l">
               <a:lnSpc>
-                <a:spcPts val="1430"/>
-              </a:lnSpc>
-              <a:spcBef>
-                <a:spcPts val="200"/>
-              </a:spcBef>
-              <a:spcAft>
-                <a:spcPts val="200"/>
-              </a:spcAft>
-            </a:pPr>
-            <a:r>
-              <a:rPr sz="1100" b="0">
+                <a:spcPts val="1820"/>
+              </a:lnSpc>
+              <a:spcBef>
+                <a:spcPts val="200"/>
+              </a:spcBef>
+              <a:spcAft>
+                <a:spcPts val="200"/>
+              </a:spcAft>
+            </a:pPr>
+            <a:r>
+              <a:rPr sz="1400" b="0">
                 <a:solidFill>
                   <a:srgbClr val="000000"/>
                 </a:solidFill>
@@ -10839,17 +10839,17 @@
           <a:p>
             <a:pPr algn="l">
               <a:lnSpc>
-                <a:spcPts val="1430"/>
-              </a:lnSpc>
-              <a:spcBef>
-                <a:spcPts val="200"/>
-              </a:spcBef>
-              <a:spcAft>
-                <a:spcPts val="200"/>
-              </a:spcAft>
-            </a:pPr>
-            <a:r>
-              <a:rPr sz="1100" b="0">
+                <a:spcPts val="1820"/>
+              </a:lnSpc>
+              <a:spcBef>
+                <a:spcPts val="200"/>
+              </a:spcBef>
+              <a:spcAft>
+                <a:spcPts val="200"/>
+              </a:spcAft>
+            </a:pPr>
+            <a:r>
+              <a:rPr sz="1400" b="0">
                 <a:solidFill>
                   <a:srgbClr val="000000"/>
                 </a:solidFill>
@@ -10861,17 +10861,17 @@
           <a:p>
             <a:pPr algn="l">
               <a:lnSpc>
-                <a:spcPts val="1430"/>
-              </a:lnSpc>
-              <a:spcBef>
-                <a:spcPts val="200"/>
-              </a:spcBef>
-              <a:spcAft>
-                <a:spcPts val="200"/>
-              </a:spcAft>
-            </a:pPr>
-            <a:r>
-              <a:rPr sz="1100" b="0">
+                <a:spcPts val="1820"/>
+              </a:lnSpc>
+              <a:spcBef>
+                <a:spcPts val="200"/>
+              </a:spcBef>
+              <a:spcAft>
+                <a:spcPts val="200"/>
+              </a:spcAft>
+            </a:pPr>
+            <a:r>
+              <a:rPr sz="1400" b="0">
                 <a:solidFill>
                   <a:srgbClr val="000000"/>
                 </a:solidFill>
@@ -10883,7 +10883,7 @@
           <a:p>
             <a:pPr algn="l">
               <a:lnSpc>
-                <a:spcPts val="1820"/>
+                <a:spcPts val="2080"/>
               </a:lnSpc>
               <a:spcBef>
                 <a:spcPts val="800"/>
@@ -10893,7 +10893,7 @@
               </a:spcAft>
             </a:pPr>
             <a:r>
-              <a:rPr sz="1400" b="1">
+              <a:rPr sz="1600" b="1">
                 <a:solidFill>
                   <a:srgbClr val="CC3333"/>
                 </a:solidFill>
@@ -10905,17 +10905,17 @@
           <a:p>
             <a:pPr algn="l">
               <a:lnSpc>
-                <a:spcPts val="1430"/>
-              </a:lnSpc>
-              <a:spcBef>
-                <a:spcPts val="200"/>
-              </a:spcBef>
-              <a:spcAft>
-                <a:spcPts val="200"/>
-              </a:spcAft>
-            </a:pPr>
-            <a:r>
-              <a:rPr sz="1100" b="0">
+                <a:spcPts val="1820"/>
+              </a:lnSpc>
+              <a:spcBef>
+                <a:spcPts val="200"/>
+              </a:spcBef>
+              <a:spcAft>
+                <a:spcPts val="200"/>
+              </a:spcAft>
+            </a:pPr>
+            <a:r>
+              <a:rPr sz="1400" b="0">
                 <a:solidFill>
                   <a:srgbClr val="000000"/>
                 </a:solidFill>
@@ -10927,7 +10927,7 @@
           <a:p>
             <a:pPr algn="l">
               <a:lnSpc>
-                <a:spcPts val="1820"/>
+                <a:spcPts val="2080"/>
               </a:lnSpc>
               <a:spcBef>
                 <a:spcPts val="800"/>
@@ -10937,7 +10937,7 @@
               </a:spcAft>
             </a:pPr>
             <a:r>
-              <a:rPr sz="1400" b="1">
+              <a:rPr sz="1600" b="1">
                 <a:solidFill>
                   <a:srgbClr val="008040"/>
                 </a:solidFill>
@@ -10949,17 +10949,17 @@
           <a:p>
             <a:pPr algn="l">
               <a:lnSpc>
-                <a:spcPts val="1430"/>
-              </a:lnSpc>
-              <a:spcBef>
-                <a:spcPts val="200"/>
-              </a:spcBef>
-              <a:spcAft>
-                <a:spcPts val="200"/>
-              </a:spcAft>
-            </a:pPr>
-            <a:r>
-              <a:rPr sz="1100" b="0">
+                <a:spcPts val="1820"/>
+              </a:lnSpc>
+              <a:spcBef>
+                <a:spcPts val="200"/>
+              </a:spcBef>
+              <a:spcAft>
+                <a:spcPts val="200"/>
+              </a:spcAft>
+            </a:pPr>
+            <a:r>
+              <a:rPr sz="1400" b="0">
                 <a:solidFill>
                   <a:srgbClr val="000000"/>
                 </a:solidFill>
@@ -11064,7 +11064,7 @@
           <a:p>
             <a:pPr algn="l">
               <a:lnSpc>
-                <a:spcPts val="1820"/>
+                <a:spcPts val="2080"/>
               </a:lnSpc>
               <a:spcBef>
                 <a:spcPts val="0"/>
@@ -11074,7 +11074,7 @@
               </a:spcAft>
             </a:pPr>
             <a:r>
-              <a:rPr sz="1400" b="1">
+              <a:rPr sz="1600" b="1">
                 <a:solidFill>
                   <a:srgbClr val="1B3A5C"/>
                 </a:solidFill>
@@ -11086,7 +11086,7 @@
           <a:p>
             <a:pPr algn="l">
               <a:lnSpc>
-                <a:spcPts val="1820"/>
+                <a:spcPts val="2080"/>
               </a:lnSpc>
               <a:spcBef>
                 <a:spcPts val="800"/>
@@ -11096,7 +11096,7 @@
               </a:spcAft>
             </a:pPr>
             <a:r>
-              <a:rPr sz="1400" b="1">
+              <a:rPr sz="1600" b="1">
                 <a:solidFill>
                   <a:srgbClr val="333333"/>
                 </a:solidFill>
@@ -11108,17 +11108,17 @@
           <a:p>
             <a:pPr algn="l">
               <a:lnSpc>
-                <a:spcPts val="1430"/>
-              </a:lnSpc>
-              <a:spcBef>
-                <a:spcPts val="200"/>
-              </a:spcBef>
-              <a:spcAft>
-                <a:spcPts val="200"/>
-              </a:spcAft>
-            </a:pPr>
-            <a:r>
-              <a:rPr sz="1100" b="0">
+                <a:spcPts val="1820"/>
+              </a:lnSpc>
+              <a:spcBef>
+                <a:spcPts val="200"/>
+              </a:spcBef>
+              <a:spcAft>
+                <a:spcPts val="200"/>
+              </a:spcAft>
+            </a:pPr>
+            <a:r>
+              <a:rPr sz="1400" b="0">
                 <a:solidFill>
                   <a:srgbClr val="000000"/>
                 </a:solidFill>
@@ -11130,7 +11130,7 @@
           <a:p>
             <a:pPr algn="l">
               <a:lnSpc>
-                <a:spcPts val="1820"/>
+                <a:spcPts val="2080"/>
               </a:lnSpc>
               <a:spcBef>
                 <a:spcPts val="800"/>
@@ -11140,7 +11140,7 @@
               </a:spcAft>
             </a:pPr>
             <a:r>
-              <a:rPr sz="1400" b="1">
+              <a:rPr sz="1600" b="1">
                 <a:solidFill>
                   <a:srgbClr val="1B5C9E"/>
                 </a:solidFill>
@@ -11152,17 +11152,17 @@
           <a:p>
             <a:pPr algn="l">
               <a:lnSpc>
-                <a:spcPts val="1430"/>
-              </a:lnSpc>
-              <a:spcBef>
-                <a:spcPts val="200"/>
-              </a:spcBef>
-              <a:spcAft>
-                <a:spcPts val="200"/>
-              </a:spcAft>
-            </a:pPr>
-            <a:r>
-              <a:rPr sz="1100" b="0">
+                <a:spcPts val="1820"/>
+              </a:lnSpc>
+              <a:spcBef>
+                <a:spcPts val="200"/>
+              </a:spcBef>
+              <a:spcAft>
+                <a:spcPts val="200"/>
+              </a:spcAft>
+            </a:pPr>
+            <a:r>
+              <a:rPr sz="1400" b="0">
                 <a:solidFill>
                   <a:srgbClr val="000000"/>
                 </a:solidFill>
@@ -11174,7 +11174,7 @@
           <a:p>
             <a:pPr algn="l">
               <a:lnSpc>
-                <a:spcPts val="1820"/>
+                <a:spcPts val="2080"/>
               </a:lnSpc>
               <a:spcBef>
                 <a:spcPts val="800"/>
@@ -11184,7 +11184,7 @@
               </a:spcAft>
             </a:pPr>
             <a:r>
-              <a:rPr sz="1400" b="1">
+              <a:rPr sz="1600" b="1">
                 <a:solidFill>
                   <a:srgbClr val="CC3333"/>
                 </a:solidFill>
@@ -11196,17 +11196,17 @@
           <a:p>
             <a:pPr algn="l">
               <a:lnSpc>
-                <a:spcPts val="1430"/>
-              </a:lnSpc>
-              <a:spcBef>
-                <a:spcPts val="200"/>
-              </a:spcBef>
-              <a:spcAft>
-                <a:spcPts val="200"/>
-              </a:spcAft>
-            </a:pPr>
-            <a:r>
-              <a:rPr sz="1100" b="0">
+                <a:spcPts val="1820"/>
+              </a:lnSpc>
+              <a:spcBef>
+                <a:spcPts val="200"/>
+              </a:spcBef>
+              <a:spcAft>
+                <a:spcPts val="200"/>
+              </a:spcAft>
+            </a:pPr>
+            <a:r>
+              <a:rPr sz="1400" b="0">
                 <a:solidFill>
                   <a:srgbClr val="000000"/>
                 </a:solidFill>
@@ -11218,7 +11218,7 @@
           <a:p>
             <a:pPr algn="l">
               <a:lnSpc>
-                <a:spcPts val="1820"/>
+                <a:spcPts val="2080"/>
               </a:lnSpc>
               <a:spcBef>
                 <a:spcPts val="800"/>
@@ -11228,7 +11228,7 @@
               </a:spcAft>
             </a:pPr>
             <a:r>
-              <a:rPr sz="1400" b="1">
+              <a:rPr sz="1600" b="1">
                 <a:solidFill>
                   <a:srgbClr val="008040"/>
                 </a:solidFill>
@@ -11240,17 +11240,17 @@
           <a:p>
             <a:pPr algn="l">
               <a:lnSpc>
-                <a:spcPts val="1430"/>
-              </a:lnSpc>
-              <a:spcBef>
-                <a:spcPts val="200"/>
-              </a:spcBef>
-              <a:spcAft>
-                <a:spcPts val="200"/>
-              </a:spcAft>
-            </a:pPr>
-            <a:r>
-              <a:rPr sz="1100" b="0">
+                <a:spcPts val="1820"/>
+              </a:lnSpc>
+              <a:spcBef>
+                <a:spcPts val="200"/>
+              </a:spcBef>
+              <a:spcAft>
+                <a:spcPts val="200"/>
+              </a:spcAft>
+            </a:pPr>
+            <a:r>
+              <a:rPr sz="1400" b="0">
                 <a:solidFill>
                   <a:srgbClr val="000000"/>
                 </a:solidFill>
@@ -11355,7 +11355,7 @@
           <a:p>
             <a:pPr algn="l">
               <a:lnSpc>
-                <a:spcPts val="1820"/>
+                <a:spcPts val="2080"/>
               </a:lnSpc>
               <a:spcBef>
                 <a:spcPts val="0"/>
@@ -11365,7 +11365,7 @@
               </a:spcAft>
             </a:pPr>
             <a:r>
-              <a:rPr sz="1400" b="1">
+              <a:rPr sz="1600" b="1">
                 <a:solidFill>
                   <a:srgbClr val="1B3A5C"/>
                 </a:solidFill>
@@ -11377,7 +11377,7 @@
           <a:p>
             <a:pPr algn="l">
               <a:lnSpc>
-                <a:spcPts val="1820"/>
+                <a:spcPts val="2080"/>
               </a:lnSpc>
               <a:spcBef>
                 <a:spcPts val="800"/>
@@ -11387,7 +11387,7 @@
               </a:spcAft>
             </a:pPr>
             <a:r>
-              <a:rPr sz="1400" b="1">
+              <a:rPr sz="1600" b="1">
                 <a:solidFill>
                   <a:srgbClr val="333333"/>
                 </a:solidFill>
@@ -11399,17 +11399,17 @@
           <a:p>
             <a:pPr algn="l">
               <a:lnSpc>
-                <a:spcPts val="1430"/>
-              </a:lnSpc>
-              <a:spcBef>
-                <a:spcPts val="200"/>
-              </a:spcBef>
-              <a:spcAft>
-                <a:spcPts val="200"/>
-              </a:spcAft>
-            </a:pPr>
-            <a:r>
-              <a:rPr sz="1100" b="0">
+                <a:spcPts val="1820"/>
+              </a:lnSpc>
+              <a:spcBef>
+                <a:spcPts val="200"/>
+              </a:spcBef>
+              <a:spcAft>
+                <a:spcPts val="200"/>
+              </a:spcAft>
+            </a:pPr>
+            <a:r>
+              <a:rPr sz="1400" b="0">
                 <a:solidFill>
                   <a:srgbClr val="000000"/>
                 </a:solidFill>
@@ -11421,7 +11421,7 @@
           <a:p>
             <a:pPr algn="l">
               <a:lnSpc>
-                <a:spcPts val="1820"/>
+                <a:spcPts val="2080"/>
               </a:lnSpc>
               <a:spcBef>
                 <a:spcPts val="800"/>
@@ -11431,7 +11431,7 @@
               </a:spcAft>
             </a:pPr>
             <a:r>
-              <a:rPr sz="1400" b="1">
+              <a:rPr sz="1600" b="1">
                 <a:solidFill>
                   <a:srgbClr val="1B5C9E"/>
                 </a:solidFill>
@@ -11443,17 +11443,17 @@
           <a:p>
             <a:pPr algn="l">
               <a:lnSpc>
-                <a:spcPts val="1430"/>
-              </a:lnSpc>
-              <a:spcBef>
-                <a:spcPts val="200"/>
-              </a:spcBef>
-              <a:spcAft>
-                <a:spcPts val="200"/>
-              </a:spcAft>
-            </a:pPr>
-            <a:r>
-              <a:rPr sz="1100" b="0">
+                <a:spcPts val="1820"/>
+              </a:lnSpc>
+              <a:spcBef>
+                <a:spcPts val="200"/>
+              </a:spcBef>
+              <a:spcAft>
+                <a:spcPts val="200"/>
+              </a:spcAft>
+            </a:pPr>
+            <a:r>
+              <a:rPr sz="1400" b="0">
                 <a:solidFill>
                   <a:srgbClr val="000000"/>
                 </a:solidFill>
@@ -11465,17 +11465,17 @@
           <a:p>
             <a:pPr algn="l">
               <a:lnSpc>
-                <a:spcPts val="1430"/>
-              </a:lnSpc>
-              <a:spcBef>
-                <a:spcPts val="200"/>
-              </a:spcBef>
-              <a:spcAft>
-                <a:spcPts val="200"/>
-              </a:spcAft>
-            </a:pPr>
-            <a:r>
-              <a:rPr sz="1100" b="0">
+                <a:spcPts val="1820"/>
+              </a:lnSpc>
+              <a:spcBef>
+                <a:spcPts val="200"/>
+              </a:spcBef>
+              <a:spcAft>
+                <a:spcPts val="200"/>
+              </a:spcAft>
+            </a:pPr>
+            <a:r>
+              <a:rPr sz="1400" b="0">
                 <a:solidFill>
                   <a:srgbClr val="000000"/>
                 </a:solidFill>
@@ -11487,7 +11487,7 @@
           <a:p>
             <a:pPr algn="l">
               <a:lnSpc>
-                <a:spcPts val="1820"/>
+                <a:spcPts val="2080"/>
               </a:lnSpc>
               <a:spcBef>
                 <a:spcPts val="800"/>
@@ -11497,7 +11497,7 @@
               </a:spcAft>
             </a:pPr>
             <a:r>
-              <a:rPr sz="1400" b="1">
+              <a:rPr sz="1600" b="1">
                 <a:solidFill>
                   <a:srgbClr val="CC3333"/>
                 </a:solidFill>
@@ -11509,17 +11509,17 @@
           <a:p>
             <a:pPr algn="l">
               <a:lnSpc>
-                <a:spcPts val="1430"/>
-              </a:lnSpc>
-              <a:spcBef>
-                <a:spcPts val="200"/>
-              </a:spcBef>
-              <a:spcAft>
-                <a:spcPts val="200"/>
-              </a:spcAft>
-            </a:pPr>
-            <a:r>
-              <a:rPr sz="1100" b="0">
+                <a:spcPts val="1820"/>
+              </a:lnSpc>
+              <a:spcBef>
+                <a:spcPts val="200"/>
+              </a:spcBef>
+              <a:spcAft>
+                <a:spcPts val="200"/>
+              </a:spcAft>
+            </a:pPr>
+            <a:r>
+              <a:rPr sz="1400" b="0">
                 <a:solidFill>
                   <a:srgbClr val="000000"/>
                 </a:solidFill>
@@ -11531,7 +11531,7 @@
           <a:p>
             <a:pPr algn="l">
               <a:lnSpc>
-                <a:spcPts val="1820"/>
+                <a:spcPts val="2080"/>
               </a:lnSpc>
               <a:spcBef>
                 <a:spcPts val="800"/>
@@ -11541,7 +11541,7 @@
               </a:spcAft>
             </a:pPr>
             <a:r>
-              <a:rPr sz="1400" b="1">
+              <a:rPr sz="1600" b="1">
                 <a:solidFill>
                   <a:srgbClr val="008040"/>
                 </a:solidFill>
@@ -11553,17 +11553,17 @@
           <a:p>
             <a:pPr algn="l">
               <a:lnSpc>
-                <a:spcPts val="1430"/>
-              </a:lnSpc>
-              <a:spcBef>
-                <a:spcPts val="200"/>
-              </a:spcBef>
-              <a:spcAft>
-                <a:spcPts val="200"/>
-              </a:spcAft>
-            </a:pPr>
-            <a:r>
-              <a:rPr sz="1100" b="0">
+                <a:spcPts val="1820"/>
+              </a:lnSpc>
+              <a:spcBef>
+                <a:spcPts val="200"/>
+              </a:spcBef>
+              <a:spcAft>
+                <a:spcPts val="200"/>
+              </a:spcAft>
+            </a:pPr>
+            <a:r>
+              <a:rPr sz="1400" b="0">
                 <a:solidFill>
                   <a:srgbClr val="000000"/>
                 </a:solidFill>
@@ -11668,7 +11668,7 @@
           <a:p>
             <a:pPr algn="l">
               <a:lnSpc>
-                <a:spcPts val="1820"/>
+                <a:spcPts val="2080"/>
               </a:lnSpc>
               <a:spcBef>
                 <a:spcPts val="0"/>
@@ -11678,7 +11678,7 @@
               </a:spcAft>
             </a:pPr>
             <a:r>
-              <a:rPr sz="1400" b="1">
+              <a:rPr sz="1600" b="1">
                 <a:solidFill>
                   <a:srgbClr val="1B3A5C"/>
                 </a:solidFill>
@@ -11690,7 +11690,7 @@
           <a:p>
             <a:pPr algn="l">
               <a:lnSpc>
-                <a:spcPts val="1820"/>
+                <a:spcPts val="2080"/>
               </a:lnSpc>
               <a:spcBef>
                 <a:spcPts val="800"/>
@@ -11700,7 +11700,7 @@
               </a:spcAft>
             </a:pPr>
             <a:r>
-              <a:rPr sz="1400" b="1">
+              <a:rPr sz="1600" b="1">
                 <a:solidFill>
                   <a:srgbClr val="333333"/>
                 </a:solidFill>
@@ -11712,17 +11712,17 @@
           <a:p>
             <a:pPr algn="l">
               <a:lnSpc>
-                <a:spcPts val="1430"/>
-              </a:lnSpc>
-              <a:spcBef>
-                <a:spcPts val="200"/>
-              </a:spcBef>
-              <a:spcAft>
-                <a:spcPts val="200"/>
-              </a:spcAft>
-            </a:pPr>
-            <a:r>
-              <a:rPr sz="1100" b="0">
+                <a:spcPts val="1820"/>
+              </a:lnSpc>
+              <a:spcBef>
+                <a:spcPts val="200"/>
+              </a:spcBef>
+              <a:spcAft>
+                <a:spcPts val="200"/>
+              </a:spcAft>
+            </a:pPr>
+            <a:r>
+              <a:rPr sz="1400" b="0">
                 <a:solidFill>
                   <a:srgbClr val="000000"/>
                 </a:solidFill>
@@ -11734,7 +11734,7 @@
           <a:p>
             <a:pPr algn="l">
               <a:lnSpc>
-                <a:spcPts val="1820"/>
+                <a:spcPts val="2080"/>
               </a:lnSpc>
               <a:spcBef>
                 <a:spcPts val="800"/>
@@ -11744,7 +11744,7 @@
               </a:spcAft>
             </a:pPr>
             <a:r>
-              <a:rPr sz="1400" b="1">
+              <a:rPr sz="1600" b="1">
                 <a:solidFill>
                   <a:srgbClr val="1B5C9E"/>
                 </a:solidFill>
@@ -11756,17 +11756,17 @@
           <a:p>
             <a:pPr algn="l">
               <a:lnSpc>
-                <a:spcPts val="1430"/>
-              </a:lnSpc>
-              <a:spcBef>
-                <a:spcPts val="200"/>
-              </a:spcBef>
-              <a:spcAft>
-                <a:spcPts val="200"/>
-              </a:spcAft>
-            </a:pPr>
-            <a:r>
-              <a:rPr sz="1100" b="0">
+                <a:spcPts val="1820"/>
+              </a:lnSpc>
+              <a:spcBef>
+                <a:spcPts val="200"/>
+              </a:spcBef>
+              <a:spcAft>
+                <a:spcPts val="200"/>
+              </a:spcAft>
+            </a:pPr>
+            <a:r>
+              <a:rPr sz="1400" b="0">
                 <a:solidFill>
                   <a:srgbClr val="000000"/>
                 </a:solidFill>
@@ -11778,7 +11778,7 @@
           <a:p>
             <a:pPr algn="l">
               <a:lnSpc>
-                <a:spcPts val="1820"/>
+                <a:spcPts val="2080"/>
               </a:lnSpc>
               <a:spcBef>
                 <a:spcPts val="800"/>
@@ -11788,7 +11788,7 @@
               </a:spcAft>
             </a:pPr>
             <a:r>
-              <a:rPr sz="1400" b="1">
+              <a:rPr sz="1600" b="1">
                 <a:solidFill>
                   <a:srgbClr val="CC3333"/>
                 </a:solidFill>
@@ -11800,17 +11800,17 @@
           <a:p>
             <a:pPr algn="l">
               <a:lnSpc>
-                <a:spcPts val="1430"/>
-              </a:lnSpc>
-              <a:spcBef>
-                <a:spcPts val="200"/>
-              </a:spcBef>
-              <a:spcAft>
-                <a:spcPts val="200"/>
-              </a:spcAft>
-            </a:pPr>
-            <a:r>
-              <a:rPr sz="1100" b="0">
+                <a:spcPts val="1820"/>
+              </a:lnSpc>
+              <a:spcBef>
+                <a:spcPts val="200"/>
+              </a:spcBef>
+              <a:spcAft>
+                <a:spcPts val="200"/>
+              </a:spcAft>
+            </a:pPr>
+            <a:r>
+              <a:rPr sz="1400" b="0">
                 <a:solidFill>
                   <a:srgbClr val="000000"/>
                 </a:solidFill>
@@ -11822,7 +11822,7 @@
           <a:p>
             <a:pPr algn="l">
               <a:lnSpc>
-                <a:spcPts val="1820"/>
+                <a:spcPts val="2080"/>
               </a:lnSpc>
               <a:spcBef>
                 <a:spcPts val="800"/>
@@ -11832,7 +11832,7 @@
               </a:spcAft>
             </a:pPr>
             <a:r>
-              <a:rPr sz="1400" b="1">
+              <a:rPr sz="1600" b="1">
                 <a:solidFill>
                   <a:srgbClr val="008040"/>
                 </a:solidFill>
@@ -11844,17 +11844,17 @@
           <a:p>
             <a:pPr algn="l">
               <a:lnSpc>
-                <a:spcPts val="1430"/>
-              </a:lnSpc>
-              <a:spcBef>
-                <a:spcPts val="200"/>
-              </a:spcBef>
-              <a:spcAft>
-                <a:spcPts val="200"/>
-              </a:spcAft>
-            </a:pPr>
-            <a:r>
-              <a:rPr sz="1100" b="0">
+                <a:spcPts val="1820"/>
+              </a:lnSpc>
+              <a:spcBef>
+                <a:spcPts val="200"/>
+              </a:spcBef>
+              <a:spcAft>
+                <a:spcPts val="200"/>
+              </a:spcAft>
+            </a:pPr>
+            <a:r>
+              <a:rPr sz="1400" b="0">
                 <a:solidFill>
                   <a:srgbClr val="000000"/>
                 </a:solidFill>
@@ -11959,7 +11959,7 @@
           <a:p>
             <a:pPr algn="l">
               <a:lnSpc>
-                <a:spcPts val="1820"/>
+                <a:spcPts val="2080"/>
               </a:lnSpc>
               <a:spcBef>
                 <a:spcPts val="0"/>
@@ -11969,7 +11969,7 @@
               </a:spcAft>
             </a:pPr>
             <a:r>
-              <a:rPr sz="1400" b="1">
+              <a:rPr sz="1600" b="1">
                 <a:solidFill>
                   <a:srgbClr val="1B3A5C"/>
                 </a:solidFill>
@@ -11981,7 +11981,7 @@
           <a:p>
             <a:pPr algn="l">
               <a:lnSpc>
-                <a:spcPts val="1820"/>
+                <a:spcPts val="2080"/>
               </a:lnSpc>
               <a:spcBef>
                 <a:spcPts val="800"/>
@@ -11991,7 +11991,7 @@
               </a:spcAft>
             </a:pPr>
             <a:r>
-              <a:rPr sz="1400" b="1">
+              <a:rPr sz="1600" b="1">
                 <a:solidFill>
                   <a:srgbClr val="333333"/>
                 </a:solidFill>
@@ -12003,17 +12003,17 @@
           <a:p>
             <a:pPr algn="l">
               <a:lnSpc>
-                <a:spcPts val="1430"/>
-              </a:lnSpc>
-              <a:spcBef>
-                <a:spcPts val="200"/>
-              </a:spcBef>
-              <a:spcAft>
-                <a:spcPts val="200"/>
-              </a:spcAft>
-            </a:pPr>
-            <a:r>
-              <a:rPr sz="1100" b="0">
+                <a:spcPts val="1820"/>
+              </a:lnSpc>
+              <a:spcBef>
+                <a:spcPts val="200"/>
+              </a:spcBef>
+              <a:spcAft>
+                <a:spcPts val="200"/>
+              </a:spcAft>
+            </a:pPr>
+            <a:r>
+              <a:rPr sz="1400" b="0">
                 <a:solidFill>
                   <a:srgbClr val="000000"/>
                 </a:solidFill>
@@ -12025,7 +12025,7 @@
           <a:p>
             <a:pPr algn="l">
               <a:lnSpc>
-                <a:spcPts val="1820"/>
+                <a:spcPts val="2080"/>
               </a:lnSpc>
               <a:spcBef>
                 <a:spcPts val="800"/>
@@ -12035,7 +12035,7 @@
               </a:spcAft>
             </a:pPr>
             <a:r>
-              <a:rPr sz="1400" b="1">
+              <a:rPr sz="1600" b="1">
                 <a:solidFill>
                   <a:srgbClr val="1B5C9E"/>
                 </a:solidFill>
@@ -12047,17 +12047,17 @@
           <a:p>
             <a:pPr algn="l">
               <a:lnSpc>
-                <a:spcPts val="1430"/>
-              </a:lnSpc>
-              <a:spcBef>
-                <a:spcPts val="200"/>
-              </a:spcBef>
-              <a:spcAft>
-                <a:spcPts val="200"/>
-              </a:spcAft>
-            </a:pPr>
-            <a:r>
-              <a:rPr sz="1100" b="0">
+                <a:spcPts val="1820"/>
+              </a:lnSpc>
+              <a:spcBef>
+                <a:spcPts val="200"/>
+              </a:spcBef>
+              <a:spcAft>
+                <a:spcPts val="200"/>
+              </a:spcAft>
+            </a:pPr>
+            <a:r>
+              <a:rPr sz="1400" b="0">
                 <a:solidFill>
                   <a:srgbClr val="000000"/>
                 </a:solidFill>
@@ -12069,17 +12069,17 @@
           <a:p>
             <a:pPr algn="l">
               <a:lnSpc>
-                <a:spcPts val="1430"/>
-              </a:lnSpc>
-              <a:spcBef>
-                <a:spcPts val="200"/>
-              </a:spcBef>
-              <a:spcAft>
-                <a:spcPts val="200"/>
-              </a:spcAft>
-            </a:pPr>
-            <a:r>
-              <a:rPr sz="1100" b="0">
+                <a:spcPts val="1820"/>
+              </a:lnSpc>
+              <a:spcBef>
+                <a:spcPts val="200"/>
+              </a:spcBef>
+              <a:spcAft>
+                <a:spcPts val="200"/>
+              </a:spcAft>
+            </a:pPr>
+            <a:r>
+              <a:rPr sz="1400" b="0">
                 <a:solidFill>
                   <a:srgbClr val="000000"/>
                 </a:solidFill>
@@ -12091,17 +12091,17 @@
           <a:p>
             <a:pPr algn="l">
               <a:lnSpc>
-                <a:spcPts val="1430"/>
-              </a:lnSpc>
-              <a:spcBef>
-                <a:spcPts val="200"/>
-              </a:spcBef>
-              <a:spcAft>
-                <a:spcPts val="200"/>
-              </a:spcAft>
-            </a:pPr>
-            <a:r>
-              <a:rPr sz="1100" b="0">
+                <a:spcPts val="1820"/>
+              </a:lnSpc>
+              <a:spcBef>
+                <a:spcPts val="200"/>
+              </a:spcBef>
+              <a:spcAft>
+                <a:spcPts val="200"/>
+              </a:spcAft>
+            </a:pPr>
+            <a:r>
+              <a:rPr sz="1400" b="0">
                 <a:solidFill>
                   <a:srgbClr val="000000"/>
                 </a:solidFill>
@@ -12113,17 +12113,17 @@
           <a:p>
             <a:pPr algn="l">
               <a:lnSpc>
-                <a:spcPts val="1430"/>
-              </a:lnSpc>
-              <a:spcBef>
-                <a:spcPts val="200"/>
-              </a:spcBef>
-              <a:spcAft>
-                <a:spcPts val="200"/>
-              </a:spcAft>
-            </a:pPr>
-            <a:r>
-              <a:rPr sz="1100" b="0">
+                <a:spcPts val="1820"/>
+              </a:lnSpc>
+              <a:spcBef>
+                <a:spcPts val="200"/>
+              </a:spcBef>
+              <a:spcAft>
+                <a:spcPts val="200"/>
+              </a:spcAft>
+            </a:pPr>
+            <a:r>
+              <a:rPr sz="1400" b="0">
                 <a:solidFill>
                   <a:srgbClr val="000000"/>
                 </a:solidFill>
@@ -12135,7 +12135,7 @@
           <a:p>
             <a:pPr algn="l">
               <a:lnSpc>
-                <a:spcPts val="1820"/>
+                <a:spcPts val="2080"/>
               </a:lnSpc>
               <a:spcBef>
                 <a:spcPts val="800"/>
@@ -12145,7 +12145,7 @@
               </a:spcAft>
             </a:pPr>
             <a:r>
-              <a:rPr sz="1400" b="1">
+              <a:rPr sz="1600" b="1">
                 <a:solidFill>
                   <a:srgbClr val="CC3333"/>
                 </a:solidFill>
@@ -12157,17 +12157,17 @@
           <a:p>
             <a:pPr algn="l">
               <a:lnSpc>
-                <a:spcPts val="1430"/>
-              </a:lnSpc>
-              <a:spcBef>
-                <a:spcPts val="200"/>
-              </a:spcBef>
-              <a:spcAft>
-                <a:spcPts val="200"/>
-              </a:spcAft>
-            </a:pPr>
-            <a:r>
-              <a:rPr sz="1100" b="0">
+                <a:spcPts val="1820"/>
+              </a:lnSpc>
+              <a:spcBef>
+                <a:spcPts val="200"/>
+              </a:spcBef>
+              <a:spcAft>
+                <a:spcPts val="200"/>
+              </a:spcAft>
+            </a:pPr>
+            <a:r>
+              <a:rPr sz="1400" b="0">
                 <a:solidFill>
                   <a:srgbClr val="000000"/>
                 </a:solidFill>
@@ -12179,7 +12179,7 @@
           <a:p>
             <a:pPr algn="l">
               <a:lnSpc>
-                <a:spcPts val="1820"/>
+                <a:spcPts val="2080"/>
               </a:lnSpc>
               <a:spcBef>
                 <a:spcPts val="800"/>
@@ -12189,7 +12189,7 @@
               </a:spcAft>
             </a:pPr>
             <a:r>
-              <a:rPr sz="1400" b="1">
+              <a:rPr sz="1600" b="1">
                 <a:solidFill>
                   <a:srgbClr val="008040"/>
                 </a:solidFill>
@@ -12201,17 +12201,17 @@
           <a:p>
             <a:pPr algn="l">
               <a:lnSpc>
-                <a:spcPts val="1430"/>
-              </a:lnSpc>
-              <a:spcBef>
-                <a:spcPts val="200"/>
-              </a:spcBef>
-              <a:spcAft>
-                <a:spcPts val="200"/>
-              </a:spcAft>
-            </a:pPr>
-            <a:r>
-              <a:rPr sz="1100" b="0">
+                <a:spcPts val="1820"/>
+              </a:lnSpc>
+              <a:spcBef>
+                <a:spcPts val="200"/>
+              </a:spcBef>
+              <a:spcAft>
+                <a:spcPts val="200"/>
+              </a:spcAft>
+            </a:pPr>
+            <a:r>
+              <a:rPr sz="1400" b="0">
                 <a:solidFill>
                   <a:srgbClr val="000000"/>
                 </a:solidFill>
@@ -12316,7 +12316,7 @@
           <a:p>
             <a:pPr algn="l">
               <a:lnSpc>
-                <a:spcPts val="1820"/>
+                <a:spcPts val="2080"/>
               </a:lnSpc>
               <a:spcBef>
                 <a:spcPts val="0"/>
@@ -12326,7 +12326,7 @@
               </a:spcAft>
             </a:pPr>
             <a:r>
-              <a:rPr sz="1400" b="1">
+              <a:rPr sz="1600" b="1">
                 <a:solidFill>
                   <a:srgbClr val="1B3A5C"/>
                 </a:solidFill>
@@ -12338,7 +12338,7 @@
           <a:p>
             <a:pPr algn="l">
               <a:lnSpc>
-                <a:spcPts val="1820"/>
+                <a:spcPts val="2080"/>
               </a:lnSpc>
               <a:spcBef>
                 <a:spcPts val="800"/>
@@ -12348,7 +12348,7 @@
               </a:spcAft>
             </a:pPr>
             <a:r>
-              <a:rPr sz="1400" b="1">
+              <a:rPr sz="1600" b="1">
                 <a:solidFill>
                   <a:srgbClr val="333333"/>
                 </a:solidFill>
@@ -12360,17 +12360,17 @@
           <a:p>
             <a:pPr algn="l">
               <a:lnSpc>
-                <a:spcPts val="1430"/>
-              </a:lnSpc>
-              <a:spcBef>
-                <a:spcPts val="200"/>
-              </a:spcBef>
-              <a:spcAft>
-                <a:spcPts val="200"/>
-              </a:spcAft>
-            </a:pPr>
-            <a:r>
-              <a:rPr sz="1100" b="0">
+                <a:spcPts val="1820"/>
+              </a:lnSpc>
+              <a:spcBef>
+                <a:spcPts val="200"/>
+              </a:spcBef>
+              <a:spcAft>
+                <a:spcPts val="200"/>
+              </a:spcAft>
+            </a:pPr>
+            <a:r>
+              <a:rPr sz="1400" b="0">
                 <a:solidFill>
                   <a:srgbClr val="000000"/>
                 </a:solidFill>
@@ -12382,7 +12382,7 @@
           <a:p>
             <a:pPr algn="l">
               <a:lnSpc>
-                <a:spcPts val="1820"/>
+                <a:spcPts val="2080"/>
               </a:lnSpc>
               <a:spcBef>
                 <a:spcPts val="800"/>
@@ -12392,7 +12392,7 @@
               </a:spcAft>
             </a:pPr>
             <a:r>
-              <a:rPr sz="1400" b="1">
+              <a:rPr sz="1600" b="1">
                 <a:solidFill>
                   <a:srgbClr val="1B5C9E"/>
                 </a:solidFill>
@@ -12404,17 +12404,17 @@
           <a:p>
             <a:pPr algn="l">
               <a:lnSpc>
-                <a:spcPts val="1430"/>
-              </a:lnSpc>
-              <a:spcBef>
-                <a:spcPts val="200"/>
-              </a:spcBef>
-              <a:spcAft>
-                <a:spcPts val="200"/>
-              </a:spcAft>
-            </a:pPr>
-            <a:r>
-              <a:rPr sz="1100" b="0">
+                <a:spcPts val="1820"/>
+              </a:lnSpc>
+              <a:spcBef>
+                <a:spcPts val="200"/>
+              </a:spcBef>
+              <a:spcAft>
+                <a:spcPts val="200"/>
+              </a:spcAft>
+            </a:pPr>
+            <a:r>
+              <a:rPr sz="1400" b="0">
                 <a:solidFill>
                   <a:srgbClr val="000000"/>
                 </a:solidFill>
@@ -12426,7 +12426,7 @@
           <a:p>
             <a:pPr algn="l">
               <a:lnSpc>
-                <a:spcPts val="1820"/>
+                <a:spcPts val="2080"/>
               </a:lnSpc>
               <a:spcBef>
                 <a:spcPts val="800"/>
@@ -12436,7 +12436,7 @@
               </a:spcAft>
             </a:pPr>
             <a:r>
-              <a:rPr sz="1400" b="1">
+              <a:rPr sz="1600" b="1">
                 <a:solidFill>
                   <a:srgbClr val="CC3333"/>
                 </a:solidFill>
@@ -12448,17 +12448,17 @@
           <a:p>
             <a:pPr algn="l">
               <a:lnSpc>
-                <a:spcPts val="1430"/>
-              </a:lnSpc>
-              <a:spcBef>
-                <a:spcPts val="200"/>
-              </a:spcBef>
-              <a:spcAft>
-                <a:spcPts val="200"/>
-              </a:spcAft>
-            </a:pPr>
-            <a:r>
-              <a:rPr sz="1100" b="0">
+                <a:spcPts val="1820"/>
+              </a:lnSpc>
+              <a:spcBef>
+                <a:spcPts val="200"/>
+              </a:spcBef>
+              <a:spcAft>
+                <a:spcPts val="200"/>
+              </a:spcAft>
+            </a:pPr>
+            <a:r>
+              <a:rPr sz="1400" b="0">
                 <a:solidFill>
                   <a:srgbClr val="000000"/>
                 </a:solidFill>
@@ -12470,7 +12470,7 @@
           <a:p>
             <a:pPr algn="l">
               <a:lnSpc>
-                <a:spcPts val="1820"/>
+                <a:spcPts val="2080"/>
               </a:lnSpc>
               <a:spcBef>
                 <a:spcPts val="800"/>
@@ -12480,7 +12480,7 @@
               </a:spcAft>
             </a:pPr>
             <a:r>
-              <a:rPr sz="1400" b="1">
+              <a:rPr sz="1600" b="1">
                 <a:solidFill>
                   <a:srgbClr val="008040"/>
                 </a:solidFill>
@@ -12492,17 +12492,17 @@
           <a:p>
             <a:pPr algn="l">
               <a:lnSpc>
-                <a:spcPts val="1430"/>
-              </a:lnSpc>
-              <a:spcBef>
-                <a:spcPts val="200"/>
-              </a:spcBef>
-              <a:spcAft>
-                <a:spcPts val="200"/>
-              </a:spcAft>
-            </a:pPr>
-            <a:r>
-              <a:rPr sz="1100" b="0">
+                <a:spcPts val="1820"/>
+              </a:lnSpc>
+              <a:spcBef>
+                <a:spcPts val="200"/>
+              </a:spcBef>
+              <a:spcAft>
+                <a:spcPts val="200"/>
+              </a:spcAft>
+            </a:pPr>
+            <a:r>
+              <a:rPr sz="1400" b="0">
                 <a:solidFill>
                   <a:srgbClr val="000000"/>
                 </a:solidFill>
@@ -12607,7 +12607,7 @@
           <a:p>
             <a:pPr algn="l">
               <a:lnSpc>
-                <a:spcPts val="1820"/>
+                <a:spcPts val="2080"/>
               </a:lnSpc>
               <a:spcBef>
                 <a:spcPts val="0"/>
@@ -12617,7 +12617,7 @@
               </a:spcAft>
             </a:pPr>
             <a:r>
-              <a:rPr sz="1400" b="1">
+              <a:rPr sz="1600" b="1">
                 <a:solidFill>
                   <a:srgbClr val="1B3A5C"/>
                 </a:solidFill>
@@ -12629,7 +12629,7 @@
           <a:p>
             <a:pPr algn="l">
               <a:lnSpc>
-                <a:spcPts val="1820"/>
+                <a:spcPts val="2080"/>
               </a:lnSpc>
               <a:spcBef>
                 <a:spcPts val="800"/>
@@ -12639,7 +12639,7 @@
               </a:spcAft>
             </a:pPr>
             <a:r>
-              <a:rPr sz="1400" b="1">
+              <a:rPr sz="1600" b="1">
                 <a:solidFill>
                   <a:srgbClr val="333333"/>
                 </a:solidFill>
@@ -12651,17 +12651,17 @@
           <a:p>
             <a:pPr algn="l">
               <a:lnSpc>
-                <a:spcPts val="1430"/>
-              </a:lnSpc>
-              <a:spcBef>
-                <a:spcPts val="200"/>
-              </a:spcBef>
-              <a:spcAft>
-                <a:spcPts val="200"/>
-              </a:spcAft>
-            </a:pPr>
-            <a:r>
-              <a:rPr sz="1100" b="0">
+                <a:spcPts val="1820"/>
+              </a:lnSpc>
+              <a:spcBef>
+                <a:spcPts val="200"/>
+              </a:spcBef>
+              <a:spcAft>
+                <a:spcPts val="200"/>
+              </a:spcAft>
+            </a:pPr>
+            <a:r>
+              <a:rPr sz="1400" b="0">
                 <a:solidFill>
                   <a:srgbClr val="000000"/>
                 </a:solidFill>
@@ -12673,7 +12673,7 @@
           <a:p>
             <a:pPr algn="l">
               <a:lnSpc>
-                <a:spcPts val="1820"/>
+                <a:spcPts val="2080"/>
               </a:lnSpc>
               <a:spcBef>
                 <a:spcPts val="800"/>
@@ -12683,7 +12683,7 @@
               </a:spcAft>
             </a:pPr>
             <a:r>
-              <a:rPr sz="1400" b="1">
+              <a:rPr sz="1600" b="1">
                 <a:solidFill>
                   <a:srgbClr val="1B5C9E"/>
                 </a:solidFill>
@@ -12695,17 +12695,17 @@
           <a:p>
             <a:pPr algn="l">
               <a:lnSpc>
-                <a:spcPts val="1430"/>
-              </a:lnSpc>
-              <a:spcBef>
-                <a:spcPts val="200"/>
-              </a:spcBef>
-              <a:spcAft>
-                <a:spcPts val="200"/>
-              </a:spcAft>
-            </a:pPr>
-            <a:r>
-              <a:rPr sz="1100" b="0">
+                <a:spcPts val="1820"/>
+              </a:lnSpc>
+              <a:spcBef>
+                <a:spcPts val="200"/>
+              </a:spcBef>
+              <a:spcAft>
+                <a:spcPts val="200"/>
+              </a:spcAft>
+            </a:pPr>
+            <a:r>
+              <a:rPr sz="1400" b="0">
                 <a:solidFill>
                   <a:srgbClr val="000000"/>
                 </a:solidFill>
@@ -12717,17 +12717,17 @@
           <a:p>
             <a:pPr algn="l">
               <a:lnSpc>
-                <a:spcPts val="1430"/>
-              </a:lnSpc>
-              <a:spcBef>
-                <a:spcPts val="200"/>
-              </a:spcBef>
-              <a:spcAft>
-                <a:spcPts val="200"/>
-              </a:spcAft>
-            </a:pPr>
-            <a:r>
-              <a:rPr sz="1100" b="0">
+                <a:spcPts val="1820"/>
+              </a:lnSpc>
+              <a:spcBef>
+                <a:spcPts val="200"/>
+              </a:spcBef>
+              <a:spcAft>
+                <a:spcPts val="200"/>
+              </a:spcAft>
+            </a:pPr>
+            <a:r>
+              <a:rPr sz="1400" b="0">
                 <a:solidFill>
                   <a:srgbClr val="000000"/>
                 </a:solidFill>
@@ -12739,7 +12739,7 @@
           <a:p>
             <a:pPr algn="l">
               <a:lnSpc>
-                <a:spcPts val="1820"/>
+                <a:spcPts val="2080"/>
               </a:lnSpc>
               <a:spcBef>
                 <a:spcPts val="800"/>
@@ -12749,7 +12749,7 @@
               </a:spcAft>
             </a:pPr>
             <a:r>
-              <a:rPr sz="1400" b="1">
+              <a:rPr sz="1600" b="1">
                 <a:solidFill>
                   <a:srgbClr val="CC3333"/>
                 </a:solidFill>
@@ -12761,17 +12761,17 @@
           <a:p>
             <a:pPr algn="l">
               <a:lnSpc>
-                <a:spcPts val="1430"/>
-              </a:lnSpc>
-              <a:spcBef>
-                <a:spcPts val="200"/>
-              </a:spcBef>
-              <a:spcAft>
-                <a:spcPts val="200"/>
-              </a:spcAft>
-            </a:pPr>
-            <a:r>
-              <a:rPr sz="1100" b="0">
+                <a:spcPts val="1820"/>
+              </a:lnSpc>
+              <a:spcBef>
+                <a:spcPts val="200"/>
+              </a:spcBef>
+              <a:spcAft>
+                <a:spcPts val="200"/>
+              </a:spcAft>
+            </a:pPr>
+            <a:r>
+              <a:rPr sz="1400" b="0">
                 <a:solidFill>
                   <a:srgbClr val="000000"/>
                 </a:solidFill>
@@ -12783,7 +12783,7 @@
           <a:p>
             <a:pPr algn="l">
               <a:lnSpc>
-                <a:spcPts val="1820"/>
+                <a:spcPts val="2080"/>
               </a:lnSpc>
               <a:spcBef>
                 <a:spcPts val="800"/>
@@ -12793,7 +12793,7 @@
               </a:spcAft>
             </a:pPr>
             <a:r>
-              <a:rPr sz="1400" b="1">
+              <a:rPr sz="1600" b="1">
                 <a:solidFill>
                   <a:srgbClr val="008040"/>
                 </a:solidFill>
@@ -12805,17 +12805,17 @@
           <a:p>
             <a:pPr algn="l">
               <a:lnSpc>
-                <a:spcPts val="1430"/>
-              </a:lnSpc>
-              <a:spcBef>
-                <a:spcPts val="200"/>
-              </a:spcBef>
-              <a:spcAft>
-                <a:spcPts val="200"/>
-              </a:spcAft>
-            </a:pPr>
-            <a:r>
-              <a:rPr sz="1100" b="0">
+                <a:spcPts val="1820"/>
+              </a:lnSpc>
+              <a:spcBef>
+                <a:spcPts val="200"/>
+              </a:spcBef>
+              <a:spcAft>
+                <a:spcPts val="200"/>
+              </a:spcAft>
+            </a:pPr>
+            <a:r>
+              <a:rPr sz="1400" b="0">
                 <a:solidFill>
                   <a:srgbClr val="000000"/>
                 </a:solidFill>
@@ -12920,7 +12920,7 @@
           <a:p>
             <a:pPr algn="l">
               <a:lnSpc>
-                <a:spcPts val="1820"/>
+                <a:spcPts val="2080"/>
               </a:lnSpc>
               <a:spcBef>
                 <a:spcPts val="0"/>
@@ -12930,7 +12930,7 @@
               </a:spcAft>
             </a:pPr>
             <a:r>
-              <a:rPr sz="1400" b="1">
+              <a:rPr sz="1600" b="1">
                 <a:solidFill>
                   <a:srgbClr val="1B3A5C"/>
                 </a:solidFill>
@@ -12942,7 +12942,7 @@
           <a:p>
             <a:pPr algn="l">
               <a:lnSpc>
-                <a:spcPts val="1820"/>
+                <a:spcPts val="2080"/>
               </a:lnSpc>
               <a:spcBef>
                 <a:spcPts val="800"/>
@@ -12952,7 +12952,7 @@
               </a:spcAft>
             </a:pPr>
             <a:r>
-              <a:rPr sz="1400" b="1">
+              <a:rPr sz="1600" b="1">
                 <a:solidFill>
                   <a:srgbClr val="333333"/>
                 </a:solidFill>
@@ -12964,17 +12964,17 @@
           <a:p>
             <a:pPr algn="l">
               <a:lnSpc>
-                <a:spcPts val="1430"/>
-              </a:lnSpc>
-              <a:spcBef>
-                <a:spcPts val="200"/>
-              </a:spcBef>
-              <a:spcAft>
-                <a:spcPts val="200"/>
-              </a:spcAft>
-            </a:pPr>
-            <a:r>
-              <a:rPr sz="1100" b="0">
+                <a:spcPts val="1820"/>
+              </a:lnSpc>
+              <a:spcBef>
+                <a:spcPts val="200"/>
+              </a:spcBef>
+              <a:spcAft>
+                <a:spcPts val="200"/>
+              </a:spcAft>
+            </a:pPr>
+            <a:r>
+              <a:rPr sz="1400" b="0">
                 <a:solidFill>
                   <a:srgbClr val="000000"/>
                 </a:solidFill>
@@ -12986,7 +12986,7 @@
           <a:p>
             <a:pPr algn="l">
               <a:lnSpc>
-                <a:spcPts val="1820"/>
+                <a:spcPts val="2080"/>
               </a:lnSpc>
               <a:spcBef>
                 <a:spcPts val="800"/>
@@ -12996,7 +12996,7 @@
               </a:spcAft>
             </a:pPr>
             <a:r>
-              <a:rPr sz="1400" b="1">
+              <a:rPr sz="1600" b="1">
                 <a:solidFill>
                   <a:srgbClr val="1B5C9E"/>
                 </a:solidFill>
@@ -13008,17 +13008,17 @@
           <a:p>
             <a:pPr algn="l">
               <a:lnSpc>
-                <a:spcPts val="1430"/>
-              </a:lnSpc>
-              <a:spcBef>
-                <a:spcPts val="200"/>
-              </a:spcBef>
-              <a:spcAft>
-                <a:spcPts val="200"/>
-              </a:spcAft>
-            </a:pPr>
-            <a:r>
-              <a:rPr sz="1100" b="0">
+                <a:spcPts val="1820"/>
+              </a:lnSpc>
+              <a:spcBef>
+                <a:spcPts val="200"/>
+              </a:spcBef>
+              <a:spcAft>
+                <a:spcPts val="200"/>
+              </a:spcAft>
+            </a:pPr>
+            <a:r>
+              <a:rPr sz="1400" b="0">
                 <a:solidFill>
                   <a:srgbClr val="000000"/>
                 </a:solidFill>
@@ -13030,17 +13030,17 @@
           <a:p>
             <a:pPr algn="l">
               <a:lnSpc>
-                <a:spcPts val="1430"/>
-              </a:lnSpc>
-              <a:spcBef>
-                <a:spcPts val="200"/>
-              </a:spcBef>
-              <a:spcAft>
-                <a:spcPts val="200"/>
-              </a:spcAft>
-            </a:pPr>
-            <a:r>
-              <a:rPr sz="1100" b="0">
+                <a:spcPts val="1820"/>
+              </a:lnSpc>
+              <a:spcBef>
+                <a:spcPts val="200"/>
+              </a:spcBef>
+              <a:spcAft>
+                <a:spcPts val="200"/>
+              </a:spcAft>
+            </a:pPr>
+            <a:r>
+              <a:rPr sz="1400" b="0">
                 <a:solidFill>
                   <a:srgbClr val="000000"/>
                 </a:solidFill>
@@ -13052,7 +13052,7 @@
           <a:p>
             <a:pPr algn="l">
               <a:lnSpc>
-                <a:spcPts val="1820"/>
+                <a:spcPts val="2080"/>
               </a:lnSpc>
               <a:spcBef>
                 <a:spcPts val="800"/>
@@ -13062,7 +13062,7 @@
               </a:spcAft>
             </a:pPr>
             <a:r>
-              <a:rPr sz="1400" b="1">
+              <a:rPr sz="1600" b="1">
                 <a:solidFill>
                   <a:srgbClr val="CC3333"/>
                 </a:solidFill>
@@ -13074,17 +13074,17 @@
           <a:p>
             <a:pPr algn="l">
               <a:lnSpc>
-                <a:spcPts val="1430"/>
-              </a:lnSpc>
-              <a:spcBef>
-                <a:spcPts val="200"/>
-              </a:spcBef>
-              <a:spcAft>
-                <a:spcPts val="200"/>
-              </a:spcAft>
-            </a:pPr>
-            <a:r>
-              <a:rPr sz="1100" b="0">
+                <a:spcPts val="1820"/>
+              </a:lnSpc>
+              <a:spcBef>
+                <a:spcPts val="200"/>
+              </a:spcBef>
+              <a:spcAft>
+                <a:spcPts val="200"/>
+              </a:spcAft>
+            </a:pPr>
+            <a:r>
+              <a:rPr sz="1400" b="0">
                 <a:solidFill>
                   <a:srgbClr val="000000"/>
                 </a:solidFill>
@@ -13096,7 +13096,7 @@
           <a:p>
             <a:pPr algn="l">
               <a:lnSpc>
-                <a:spcPts val="1820"/>
+                <a:spcPts val="2080"/>
               </a:lnSpc>
               <a:spcBef>
                 <a:spcPts val="800"/>
@@ -13106,7 +13106,7 @@
               </a:spcAft>
             </a:pPr>
             <a:r>
-              <a:rPr sz="1400" b="1">
+              <a:rPr sz="1600" b="1">
                 <a:solidFill>
                   <a:srgbClr val="008040"/>
                 </a:solidFill>
@@ -13118,17 +13118,17 @@
           <a:p>
             <a:pPr algn="l">
               <a:lnSpc>
-                <a:spcPts val="1430"/>
-              </a:lnSpc>
-              <a:spcBef>
-                <a:spcPts val="200"/>
-              </a:spcBef>
-              <a:spcAft>
-                <a:spcPts val="200"/>
-              </a:spcAft>
-            </a:pPr>
-            <a:r>
-              <a:rPr sz="1100" b="0">
+                <a:spcPts val="1820"/>
+              </a:lnSpc>
+              <a:spcBef>
+                <a:spcPts val="200"/>
+              </a:spcBef>
+              <a:spcAft>
+                <a:spcPts val="200"/>
+              </a:spcAft>
+            </a:pPr>
+            <a:r>
+              <a:rPr sz="1400" b="0">
                 <a:solidFill>
                   <a:srgbClr val="000000"/>
                 </a:solidFill>
@@ -13140,17 +13140,17 @@
           <a:p>
             <a:pPr algn="l">
               <a:lnSpc>
-                <a:spcPts val="1430"/>
-              </a:lnSpc>
-              <a:spcBef>
-                <a:spcPts val="200"/>
-              </a:spcBef>
-              <a:spcAft>
-                <a:spcPts val="200"/>
-              </a:spcAft>
-            </a:pPr>
-            <a:r>
-              <a:rPr sz="1100" b="0">
+                <a:spcPts val="1820"/>
+              </a:lnSpc>
+              <a:spcBef>
+                <a:spcPts val="200"/>
+              </a:spcBef>
+              <a:spcAft>
+                <a:spcPts val="200"/>
+              </a:spcAft>
+            </a:pPr>
+            <a:r>
+              <a:rPr sz="1400" b="0">
                 <a:solidFill>
                   <a:srgbClr val="000000"/>
                 </a:solidFill>
@@ -13255,7 +13255,7 @@
           <a:p>
             <a:pPr algn="l">
               <a:lnSpc>
-                <a:spcPts val="1820"/>
+                <a:spcPts val="2080"/>
               </a:lnSpc>
               <a:spcBef>
                 <a:spcPts val="0"/>
@@ -13265,7 +13265,7 @@
               </a:spcAft>
             </a:pPr>
             <a:r>
-              <a:rPr sz="1400" b="1">
+              <a:rPr sz="1600" b="1">
                 <a:solidFill>
                   <a:srgbClr val="1B3A5C"/>
                 </a:solidFill>
@@ -13277,7 +13277,7 @@
           <a:p>
             <a:pPr algn="l">
               <a:lnSpc>
-                <a:spcPts val="1820"/>
+                <a:spcPts val="2080"/>
               </a:lnSpc>
               <a:spcBef>
                 <a:spcPts val="800"/>
@@ -13287,7 +13287,7 @@
               </a:spcAft>
             </a:pPr>
             <a:r>
-              <a:rPr sz="1400" b="1">
+              <a:rPr sz="1600" b="1">
                 <a:solidFill>
                   <a:srgbClr val="333333"/>
                 </a:solidFill>
@@ -13299,17 +13299,17 @@
           <a:p>
             <a:pPr algn="l">
               <a:lnSpc>
-                <a:spcPts val="1430"/>
-              </a:lnSpc>
-              <a:spcBef>
-                <a:spcPts val="200"/>
-              </a:spcBef>
-              <a:spcAft>
-                <a:spcPts val="200"/>
-              </a:spcAft>
-            </a:pPr>
-            <a:r>
-              <a:rPr sz="1100" b="0">
+                <a:spcPts val="1820"/>
+              </a:lnSpc>
+              <a:spcBef>
+                <a:spcPts val="200"/>
+              </a:spcBef>
+              <a:spcAft>
+                <a:spcPts val="200"/>
+              </a:spcAft>
+            </a:pPr>
+            <a:r>
+              <a:rPr sz="1400" b="0">
                 <a:solidFill>
                   <a:srgbClr val="000000"/>
                 </a:solidFill>
@@ -13321,7 +13321,7 @@
           <a:p>
             <a:pPr algn="l">
               <a:lnSpc>
-                <a:spcPts val="1820"/>
+                <a:spcPts val="2080"/>
               </a:lnSpc>
               <a:spcBef>
                 <a:spcPts val="800"/>
@@ -13331,7 +13331,7 @@
               </a:spcAft>
             </a:pPr>
             <a:r>
-              <a:rPr sz="1400" b="1">
+              <a:rPr sz="1600" b="1">
                 <a:solidFill>
                   <a:srgbClr val="1B5C9E"/>
                 </a:solidFill>
@@ -13343,17 +13343,17 @@
           <a:p>
             <a:pPr algn="l">
               <a:lnSpc>
-                <a:spcPts val="1430"/>
-              </a:lnSpc>
-              <a:spcBef>
-                <a:spcPts val="200"/>
-              </a:spcBef>
-              <a:spcAft>
-                <a:spcPts val="200"/>
-              </a:spcAft>
-            </a:pPr>
-            <a:r>
-              <a:rPr sz="1100" b="0">
+                <a:spcPts val="1820"/>
+              </a:lnSpc>
+              <a:spcBef>
+                <a:spcPts val="200"/>
+              </a:spcBef>
+              <a:spcAft>
+                <a:spcPts val="200"/>
+              </a:spcAft>
+            </a:pPr>
+            <a:r>
+              <a:rPr sz="1400" b="0">
                 <a:solidFill>
                   <a:srgbClr val="000000"/>
                 </a:solidFill>
@@ -13365,17 +13365,17 @@
           <a:p>
             <a:pPr algn="l">
               <a:lnSpc>
-                <a:spcPts val="1430"/>
-              </a:lnSpc>
-              <a:spcBef>
-                <a:spcPts val="200"/>
-              </a:spcBef>
-              <a:spcAft>
-                <a:spcPts val="200"/>
-              </a:spcAft>
-            </a:pPr>
-            <a:r>
-              <a:rPr sz="1100" b="0">
+                <a:spcPts val="1820"/>
+              </a:lnSpc>
+              <a:spcBef>
+                <a:spcPts val="200"/>
+              </a:spcBef>
+              <a:spcAft>
+                <a:spcPts val="200"/>
+              </a:spcAft>
+            </a:pPr>
+            <a:r>
+              <a:rPr sz="1400" b="0">
                 <a:solidFill>
                   <a:srgbClr val="000000"/>
                 </a:solidFill>
@@ -13387,17 +13387,17 @@
           <a:p>
             <a:pPr algn="l">
               <a:lnSpc>
-                <a:spcPts val="1430"/>
-              </a:lnSpc>
-              <a:spcBef>
-                <a:spcPts val="200"/>
-              </a:spcBef>
-              <a:spcAft>
-                <a:spcPts val="200"/>
-              </a:spcAft>
-            </a:pPr>
-            <a:r>
-              <a:rPr sz="1100" b="0">
+                <a:spcPts val="1820"/>
+              </a:lnSpc>
+              <a:spcBef>
+                <a:spcPts val="200"/>
+              </a:spcBef>
+              <a:spcAft>
+                <a:spcPts val="200"/>
+              </a:spcAft>
+            </a:pPr>
+            <a:r>
+              <a:rPr sz="1400" b="0">
                 <a:solidFill>
                   <a:srgbClr val="000000"/>
                 </a:solidFill>
@@ -13409,17 +13409,17 @@
           <a:p>
             <a:pPr algn="l">
               <a:lnSpc>
-                <a:spcPts val="1430"/>
-              </a:lnSpc>
-              <a:spcBef>
-                <a:spcPts val="200"/>
-              </a:spcBef>
-              <a:spcAft>
-                <a:spcPts val="200"/>
-              </a:spcAft>
-            </a:pPr>
-            <a:r>
-              <a:rPr sz="1100" b="0">
+                <a:spcPts val="1820"/>
+              </a:lnSpc>
+              <a:spcBef>
+                <a:spcPts val="200"/>
+              </a:spcBef>
+              <a:spcAft>
+                <a:spcPts val="200"/>
+              </a:spcAft>
+            </a:pPr>
+            <a:r>
+              <a:rPr sz="1400" b="0">
                 <a:solidFill>
                   <a:srgbClr val="000000"/>
                 </a:solidFill>
@@ -13431,17 +13431,17 @@
           <a:p>
             <a:pPr algn="l">
               <a:lnSpc>
-                <a:spcPts val="1430"/>
-              </a:lnSpc>
-              <a:spcBef>
-                <a:spcPts val="200"/>
-              </a:spcBef>
-              <a:spcAft>
-                <a:spcPts val="200"/>
-              </a:spcAft>
-            </a:pPr>
-            <a:r>
-              <a:rPr sz="1100" b="0">
+                <a:spcPts val="1820"/>
+              </a:lnSpc>
+              <a:spcBef>
+                <a:spcPts val="200"/>
+              </a:spcBef>
+              <a:spcAft>
+                <a:spcPts val="200"/>
+              </a:spcAft>
+            </a:pPr>
+            <a:r>
+              <a:rPr sz="1400" b="0">
                 <a:solidFill>
                   <a:srgbClr val="000000"/>
                 </a:solidFill>
@@ -13453,17 +13453,17 @@
           <a:p>
             <a:pPr algn="l">
               <a:lnSpc>
-                <a:spcPts val="1430"/>
-              </a:lnSpc>
-              <a:spcBef>
-                <a:spcPts val="200"/>
-              </a:spcBef>
-              <a:spcAft>
-                <a:spcPts val="200"/>
-              </a:spcAft>
-            </a:pPr>
-            <a:r>
-              <a:rPr sz="1100" b="0">
+                <a:spcPts val="1820"/>
+              </a:lnSpc>
+              <a:spcBef>
+                <a:spcPts val="200"/>
+              </a:spcBef>
+              <a:spcAft>
+                <a:spcPts val="200"/>
+              </a:spcAft>
+            </a:pPr>
+            <a:r>
+              <a:rPr sz="1400" b="0">
                 <a:solidFill>
                   <a:srgbClr val="000000"/>
                 </a:solidFill>
@@ -13475,7 +13475,7 @@
           <a:p>
             <a:pPr algn="l">
               <a:lnSpc>
-                <a:spcPts val="1820"/>
+                <a:spcPts val="2080"/>
               </a:lnSpc>
               <a:spcBef>
                 <a:spcPts val="800"/>
@@ -13485,7 +13485,7 @@
               </a:spcAft>
             </a:pPr>
             <a:r>
-              <a:rPr sz="1400" b="1">
+              <a:rPr sz="1600" b="1">
                 <a:solidFill>
                   <a:srgbClr val="CC3333"/>
                 </a:solidFill>
@@ -13497,17 +13497,17 @@
           <a:p>
             <a:pPr algn="l">
               <a:lnSpc>
-                <a:spcPts val="1430"/>
-              </a:lnSpc>
-              <a:spcBef>
-                <a:spcPts val="200"/>
-              </a:spcBef>
-              <a:spcAft>
-                <a:spcPts val="200"/>
-              </a:spcAft>
-            </a:pPr>
-            <a:r>
-              <a:rPr sz="1100" b="0">
+                <a:spcPts val="1820"/>
+              </a:lnSpc>
+              <a:spcBef>
+                <a:spcPts val="200"/>
+              </a:spcBef>
+              <a:spcAft>
+                <a:spcPts val="200"/>
+              </a:spcAft>
+            </a:pPr>
+            <a:r>
+              <a:rPr sz="1400" b="0">
                 <a:solidFill>
                   <a:srgbClr val="000000"/>
                 </a:solidFill>
@@ -13519,7 +13519,7 @@
           <a:p>
             <a:pPr algn="l">
               <a:lnSpc>
-                <a:spcPts val="1820"/>
+                <a:spcPts val="2080"/>
               </a:lnSpc>
               <a:spcBef>
                 <a:spcPts val="800"/>
@@ -13529,7 +13529,7 @@
               </a:spcAft>
             </a:pPr>
             <a:r>
-              <a:rPr sz="1400" b="1">
+              <a:rPr sz="1600" b="1">
                 <a:solidFill>
                   <a:srgbClr val="008040"/>
                 </a:solidFill>
@@ -13541,17 +13541,17 @@
           <a:p>
             <a:pPr algn="l">
               <a:lnSpc>
-                <a:spcPts val="1430"/>
-              </a:lnSpc>
-              <a:spcBef>
-                <a:spcPts val="200"/>
-              </a:spcBef>
-              <a:spcAft>
-                <a:spcPts val="200"/>
-              </a:spcAft>
-            </a:pPr>
-            <a:r>
-              <a:rPr sz="1100" b="0">
+                <a:spcPts val="1820"/>
+              </a:lnSpc>
+              <a:spcBef>
+                <a:spcPts val="200"/>
+              </a:spcBef>
+              <a:spcAft>
+                <a:spcPts val="200"/>
+              </a:spcAft>
+            </a:pPr>
+            <a:r>
+              <a:rPr sz="1400" b="0">
                 <a:solidFill>
                   <a:srgbClr val="000000"/>
                 </a:solidFill>
@@ -13656,7 +13656,7 @@
           <a:p>
             <a:pPr algn="l">
               <a:lnSpc>
-                <a:spcPts val="1820"/>
+                <a:spcPts val="2080"/>
               </a:lnSpc>
               <a:spcBef>
                 <a:spcPts val="0"/>
@@ -13666,7 +13666,7 @@
               </a:spcAft>
             </a:pPr>
             <a:r>
-              <a:rPr sz="1400" b="1">
+              <a:rPr sz="1600" b="1">
                 <a:solidFill>
                   <a:srgbClr val="1B3A5C"/>
                 </a:solidFill>
@@ -13678,7 +13678,7 @@
           <a:p>
             <a:pPr algn="l">
               <a:lnSpc>
-                <a:spcPts val="1820"/>
+                <a:spcPts val="2080"/>
               </a:lnSpc>
               <a:spcBef>
                 <a:spcPts val="800"/>
@@ -13688,7 +13688,7 @@
               </a:spcAft>
             </a:pPr>
             <a:r>
-              <a:rPr sz="1400" b="1">
+              <a:rPr sz="1600" b="1">
                 <a:solidFill>
                   <a:srgbClr val="333333"/>
                 </a:solidFill>
@@ -13700,17 +13700,17 @@
           <a:p>
             <a:pPr algn="l">
               <a:lnSpc>
-                <a:spcPts val="1430"/>
-              </a:lnSpc>
-              <a:spcBef>
-                <a:spcPts val="200"/>
-              </a:spcBef>
-              <a:spcAft>
-                <a:spcPts val="200"/>
-              </a:spcAft>
-            </a:pPr>
-            <a:r>
-              <a:rPr sz="1100" b="0">
+                <a:spcPts val="1820"/>
+              </a:lnSpc>
+              <a:spcBef>
+                <a:spcPts val="200"/>
+              </a:spcBef>
+              <a:spcAft>
+                <a:spcPts val="200"/>
+              </a:spcAft>
+            </a:pPr>
+            <a:r>
+              <a:rPr sz="1400" b="0">
                 <a:solidFill>
                   <a:srgbClr val="000000"/>
                 </a:solidFill>
@@ -13722,7 +13722,7 @@
           <a:p>
             <a:pPr algn="l">
               <a:lnSpc>
-                <a:spcPts val="1820"/>
+                <a:spcPts val="2080"/>
               </a:lnSpc>
               <a:spcBef>
                 <a:spcPts val="800"/>
@@ -13732,7 +13732,7 @@
               </a:spcAft>
             </a:pPr>
             <a:r>
-              <a:rPr sz="1400" b="1">
+              <a:rPr sz="1600" b="1">
                 <a:solidFill>
                   <a:srgbClr val="1B5C9E"/>
                 </a:solidFill>
@@ -13744,17 +13744,17 @@
           <a:p>
             <a:pPr algn="l">
               <a:lnSpc>
-                <a:spcPts val="1430"/>
-              </a:lnSpc>
-              <a:spcBef>
-                <a:spcPts val="200"/>
-              </a:spcBef>
-              <a:spcAft>
-                <a:spcPts val="200"/>
-              </a:spcAft>
-            </a:pPr>
-            <a:r>
-              <a:rPr sz="1100" b="0">
+                <a:spcPts val="1820"/>
+              </a:lnSpc>
+              <a:spcBef>
+                <a:spcPts val="200"/>
+              </a:spcBef>
+              <a:spcAft>
+                <a:spcPts val="200"/>
+              </a:spcAft>
+            </a:pPr>
+            <a:r>
+              <a:rPr sz="1400" b="0">
                 <a:solidFill>
                   <a:srgbClr val="000000"/>
                 </a:solidFill>
@@ -13766,7 +13766,7 @@
           <a:p>
             <a:pPr algn="l">
               <a:lnSpc>
-                <a:spcPts val="1820"/>
+                <a:spcPts val="2080"/>
               </a:lnSpc>
               <a:spcBef>
                 <a:spcPts val="800"/>
@@ -13776,7 +13776,7 @@
               </a:spcAft>
             </a:pPr>
             <a:r>
-              <a:rPr sz="1400" b="1">
+              <a:rPr sz="1600" b="1">
                 <a:solidFill>
                   <a:srgbClr val="CC3333"/>
                 </a:solidFill>
@@ -13788,17 +13788,17 @@
           <a:p>
             <a:pPr algn="l">
               <a:lnSpc>
-                <a:spcPts val="1430"/>
-              </a:lnSpc>
-              <a:spcBef>
-                <a:spcPts val="200"/>
-              </a:spcBef>
-              <a:spcAft>
-                <a:spcPts val="200"/>
-              </a:spcAft>
-            </a:pPr>
-            <a:r>
-              <a:rPr sz="1100" b="0">
+                <a:spcPts val="1820"/>
+              </a:lnSpc>
+              <a:spcBef>
+                <a:spcPts val="200"/>
+              </a:spcBef>
+              <a:spcAft>
+                <a:spcPts val="200"/>
+              </a:spcAft>
+            </a:pPr>
+            <a:r>
+              <a:rPr sz="1400" b="0">
                 <a:solidFill>
                   <a:srgbClr val="000000"/>
                 </a:solidFill>
@@ -13810,7 +13810,7 @@
           <a:p>
             <a:pPr algn="l">
               <a:lnSpc>
-                <a:spcPts val="1820"/>
+                <a:spcPts val="2080"/>
               </a:lnSpc>
               <a:spcBef>
                 <a:spcPts val="800"/>
@@ -13820,7 +13820,7 @@
               </a:spcAft>
             </a:pPr>
             <a:r>
-              <a:rPr sz="1400" b="1">
+              <a:rPr sz="1600" b="1">
                 <a:solidFill>
                   <a:srgbClr val="008040"/>
                 </a:solidFill>
@@ -13832,17 +13832,17 @@
           <a:p>
             <a:pPr algn="l">
               <a:lnSpc>
-                <a:spcPts val="1430"/>
-              </a:lnSpc>
-              <a:spcBef>
-                <a:spcPts val="200"/>
-              </a:spcBef>
-              <a:spcAft>
-                <a:spcPts val="200"/>
-              </a:spcAft>
-            </a:pPr>
-            <a:r>
-              <a:rPr sz="1100" b="0">
+                <a:spcPts val="1820"/>
+              </a:lnSpc>
+              <a:spcBef>
+                <a:spcPts val="200"/>
+              </a:spcBef>
+              <a:spcAft>
+                <a:spcPts val="200"/>
+              </a:spcAft>
+            </a:pPr>
+            <a:r>
+              <a:rPr sz="1400" b="0">
                 <a:solidFill>
                   <a:srgbClr val="000000"/>
                 </a:solidFill>
@@ -13947,7 +13947,7 @@
           <a:p>
             <a:pPr algn="l">
               <a:lnSpc>
-                <a:spcPts val="1820"/>
+                <a:spcPts val="2080"/>
               </a:lnSpc>
               <a:spcBef>
                 <a:spcPts val="0"/>
@@ -13957,7 +13957,7 @@
               </a:spcAft>
             </a:pPr>
             <a:r>
-              <a:rPr sz="1400" b="1">
+              <a:rPr sz="1600" b="1">
                 <a:solidFill>
                   <a:srgbClr val="1B3A5C"/>
                 </a:solidFill>
@@ -13969,7 +13969,7 @@
           <a:p>
             <a:pPr algn="l">
               <a:lnSpc>
-                <a:spcPts val="1820"/>
+                <a:spcPts val="2080"/>
               </a:lnSpc>
               <a:spcBef>
                 <a:spcPts val="800"/>
@@ -13979,7 +13979,7 @@
               </a:spcAft>
             </a:pPr>
             <a:r>
-              <a:rPr sz="1400" b="1">
+              <a:rPr sz="1600" b="1">
                 <a:solidFill>
                   <a:srgbClr val="333333"/>
                 </a:solidFill>
@@ -13991,17 +13991,17 @@
           <a:p>
             <a:pPr algn="l">
               <a:lnSpc>
-                <a:spcPts val="1430"/>
-              </a:lnSpc>
-              <a:spcBef>
-                <a:spcPts val="200"/>
-              </a:spcBef>
-              <a:spcAft>
-                <a:spcPts val="200"/>
-              </a:spcAft>
-            </a:pPr>
-            <a:r>
-              <a:rPr sz="1100" b="0">
+                <a:spcPts val="1820"/>
+              </a:lnSpc>
+              <a:spcBef>
+                <a:spcPts val="200"/>
+              </a:spcBef>
+              <a:spcAft>
+                <a:spcPts val="200"/>
+              </a:spcAft>
+            </a:pPr>
+            <a:r>
+              <a:rPr sz="1400" b="0">
                 <a:solidFill>
                   <a:srgbClr val="000000"/>
                 </a:solidFill>
@@ -14013,7 +14013,7 @@
           <a:p>
             <a:pPr algn="l">
               <a:lnSpc>
-                <a:spcPts val="1820"/>
+                <a:spcPts val="2080"/>
               </a:lnSpc>
               <a:spcBef>
                 <a:spcPts val="800"/>
@@ -14023,7 +14023,7 @@
               </a:spcAft>
             </a:pPr>
             <a:r>
-              <a:rPr sz="1400" b="1">
+              <a:rPr sz="1600" b="1">
                 <a:solidFill>
                   <a:srgbClr val="1B5C9E"/>
                 </a:solidFill>
@@ -14035,17 +14035,17 @@
           <a:p>
             <a:pPr algn="l">
               <a:lnSpc>
-                <a:spcPts val="1430"/>
-              </a:lnSpc>
-              <a:spcBef>
-                <a:spcPts val="200"/>
-              </a:spcBef>
-              <a:spcAft>
-                <a:spcPts val="200"/>
-              </a:spcAft>
-            </a:pPr>
-            <a:r>
-              <a:rPr sz="1100" b="0">
+                <a:spcPts val="1820"/>
+              </a:lnSpc>
+              <a:spcBef>
+                <a:spcPts val="200"/>
+              </a:spcBef>
+              <a:spcAft>
+                <a:spcPts val="200"/>
+              </a:spcAft>
+            </a:pPr>
+            <a:r>
+              <a:rPr sz="1400" b="0">
                 <a:solidFill>
                   <a:srgbClr val="000000"/>
                 </a:solidFill>
@@ -14057,17 +14057,17 @@
           <a:p>
             <a:pPr algn="l">
               <a:lnSpc>
-                <a:spcPts val="1430"/>
-              </a:lnSpc>
-              <a:spcBef>
-                <a:spcPts val="200"/>
-              </a:spcBef>
-              <a:spcAft>
-                <a:spcPts val="200"/>
-              </a:spcAft>
-            </a:pPr>
-            <a:r>
-              <a:rPr sz="1100" b="0">
+                <a:spcPts val="1820"/>
+              </a:lnSpc>
+              <a:spcBef>
+                <a:spcPts val="200"/>
+              </a:spcBef>
+              <a:spcAft>
+                <a:spcPts val="200"/>
+              </a:spcAft>
+            </a:pPr>
+            <a:r>
+              <a:rPr sz="1400" b="0">
                 <a:solidFill>
                   <a:srgbClr val="000000"/>
                 </a:solidFill>
@@ -14079,7 +14079,7 @@
           <a:p>
             <a:pPr algn="l">
               <a:lnSpc>
-                <a:spcPts val="1820"/>
+                <a:spcPts val="2080"/>
               </a:lnSpc>
               <a:spcBef>
                 <a:spcPts val="800"/>
@@ -14089,7 +14089,7 @@
               </a:spcAft>
             </a:pPr>
             <a:r>
-              <a:rPr sz="1400" b="1">
+              <a:rPr sz="1600" b="1">
                 <a:solidFill>
                   <a:srgbClr val="CC3333"/>
                 </a:solidFill>
@@ -14101,17 +14101,17 @@
           <a:p>
             <a:pPr algn="l">
               <a:lnSpc>
-                <a:spcPts val="1430"/>
-              </a:lnSpc>
-              <a:spcBef>
-                <a:spcPts val="200"/>
-              </a:spcBef>
-              <a:spcAft>
-                <a:spcPts val="200"/>
-              </a:spcAft>
-            </a:pPr>
-            <a:r>
-              <a:rPr sz="1100" b="0">
+                <a:spcPts val="1820"/>
+              </a:lnSpc>
+              <a:spcBef>
+                <a:spcPts val="200"/>
+              </a:spcBef>
+              <a:spcAft>
+                <a:spcPts val="200"/>
+              </a:spcAft>
+            </a:pPr>
+            <a:r>
+              <a:rPr sz="1400" b="0">
                 <a:solidFill>
                   <a:srgbClr val="000000"/>
                 </a:solidFill>
@@ -14123,7 +14123,7 @@
           <a:p>
             <a:pPr algn="l">
               <a:lnSpc>
-                <a:spcPts val="1820"/>
+                <a:spcPts val="2080"/>
               </a:lnSpc>
               <a:spcBef>
                 <a:spcPts val="800"/>
@@ -14133,7 +14133,7 @@
               </a:spcAft>
             </a:pPr>
             <a:r>
-              <a:rPr sz="1400" b="1">
+              <a:rPr sz="1600" b="1">
                 <a:solidFill>
                   <a:srgbClr val="008040"/>
                 </a:solidFill>
@@ -14145,17 +14145,17 @@
           <a:p>
             <a:pPr algn="l">
               <a:lnSpc>
-                <a:spcPts val="1430"/>
-              </a:lnSpc>
-              <a:spcBef>
-                <a:spcPts val="200"/>
-              </a:spcBef>
-              <a:spcAft>
-                <a:spcPts val="200"/>
-              </a:spcAft>
-            </a:pPr>
-            <a:r>
-              <a:rPr sz="1100" b="0">
+                <a:spcPts val="1820"/>
+              </a:lnSpc>
+              <a:spcBef>
+                <a:spcPts val="200"/>
+              </a:spcBef>
+              <a:spcAft>
+                <a:spcPts val="200"/>
+              </a:spcAft>
+            </a:pPr>
+            <a:r>
+              <a:rPr sz="1400" b="0">
                 <a:solidFill>
                   <a:srgbClr val="000000"/>
                 </a:solidFill>
@@ -14260,7 +14260,7 @@
           <a:p>
             <a:pPr algn="l">
               <a:lnSpc>
-                <a:spcPts val="1820"/>
+                <a:spcPts val="2080"/>
               </a:lnSpc>
               <a:spcBef>
                 <a:spcPts val="0"/>
@@ -14270,7 +14270,7 @@
               </a:spcAft>
             </a:pPr>
             <a:r>
-              <a:rPr sz="1400" b="1">
+              <a:rPr sz="1600" b="1">
                 <a:solidFill>
                   <a:srgbClr val="1B3A5C"/>
                 </a:solidFill>
@@ -14282,7 +14282,7 @@
           <a:p>
             <a:pPr algn="l">
               <a:lnSpc>
-                <a:spcPts val="1820"/>
+                <a:spcPts val="2080"/>
               </a:lnSpc>
               <a:spcBef>
                 <a:spcPts val="800"/>
@@ -14292,7 +14292,7 @@
               </a:spcAft>
             </a:pPr>
             <a:r>
-              <a:rPr sz="1400" b="1">
+              <a:rPr sz="1600" b="1">
                 <a:solidFill>
                   <a:srgbClr val="333333"/>
                 </a:solidFill>
@@ -14304,17 +14304,17 @@
           <a:p>
             <a:pPr algn="l">
               <a:lnSpc>
-                <a:spcPts val="1430"/>
-              </a:lnSpc>
-              <a:spcBef>
-                <a:spcPts val="200"/>
-              </a:spcBef>
-              <a:spcAft>
-                <a:spcPts val="200"/>
-              </a:spcAft>
-            </a:pPr>
-            <a:r>
-              <a:rPr sz="1100" b="0">
+                <a:spcPts val="1820"/>
+              </a:lnSpc>
+              <a:spcBef>
+                <a:spcPts val="200"/>
+              </a:spcBef>
+              <a:spcAft>
+                <a:spcPts val="200"/>
+              </a:spcAft>
+            </a:pPr>
+            <a:r>
+              <a:rPr sz="1400" b="0">
                 <a:solidFill>
                   <a:srgbClr val="000000"/>
                 </a:solidFill>
@@ -14326,7 +14326,7 @@
           <a:p>
             <a:pPr algn="l">
               <a:lnSpc>
-                <a:spcPts val="1820"/>
+                <a:spcPts val="2080"/>
               </a:lnSpc>
               <a:spcBef>
                 <a:spcPts val="800"/>
@@ -14336,7 +14336,7 @@
               </a:spcAft>
             </a:pPr>
             <a:r>
-              <a:rPr sz="1400" b="1">
+              <a:rPr sz="1600" b="1">
                 <a:solidFill>
                   <a:srgbClr val="1B5C9E"/>
                 </a:solidFill>
@@ -14348,17 +14348,17 @@
           <a:p>
             <a:pPr algn="l">
               <a:lnSpc>
-                <a:spcPts val="1430"/>
-              </a:lnSpc>
-              <a:spcBef>
-                <a:spcPts val="200"/>
-              </a:spcBef>
-              <a:spcAft>
-                <a:spcPts val="200"/>
-              </a:spcAft>
-            </a:pPr>
-            <a:r>
-              <a:rPr sz="1100" b="0">
+                <a:spcPts val="1820"/>
+              </a:lnSpc>
+              <a:spcBef>
+                <a:spcPts val="200"/>
+              </a:spcBef>
+              <a:spcAft>
+                <a:spcPts val="200"/>
+              </a:spcAft>
+            </a:pPr>
+            <a:r>
+              <a:rPr sz="1400" b="0">
                 <a:solidFill>
                   <a:srgbClr val="000000"/>
                 </a:solidFill>
@@ -14370,17 +14370,17 @@
           <a:p>
             <a:pPr algn="l">
               <a:lnSpc>
-                <a:spcPts val="1430"/>
-              </a:lnSpc>
-              <a:spcBef>
-                <a:spcPts val="200"/>
-              </a:spcBef>
-              <a:spcAft>
-                <a:spcPts val="200"/>
-              </a:spcAft>
-            </a:pPr>
-            <a:r>
-              <a:rPr sz="1100" b="0">
+                <a:spcPts val="1820"/>
+              </a:lnSpc>
+              <a:spcBef>
+                <a:spcPts val="200"/>
+              </a:spcBef>
+              <a:spcAft>
+                <a:spcPts val="200"/>
+              </a:spcAft>
+            </a:pPr>
+            <a:r>
+              <a:rPr sz="1400" b="0">
                 <a:solidFill>
                   <a:srgbClr val="000000"/>
                 </a:solidFill>
@@ -14392,7 +14392,7 @@
           <a:p>
             <a:pPr algn="l">
               <a:lnSpc>
-                <a:spcPts val="1820"/>
+                <a:spcPts val="2080"/>
               </a:lnSpc>
               <a:spcBef>
                 <a:spcPts val="800"/>
@@ -14402,7 +14402,7 @@
               </a:spcAft>
             </a:pPr>
             <a:r>
-              <a:rPr sz="1400" b="1">
+              <a:rPr sz="1600" b="1">
                 <a:solidFill>
                   <a:srgbClr val="CC3333"/>
                 </a:solidFill>
@@ -14414,17 +14414,17 @@
           <a:p>
             <a:pPr algn="l">
               <a:lnSpc>
-                <a:spcPts val="1430"/>
-              </a:lnSpc>
-              <a:spcBef>
-                <a:spcPts val="200"/>
-              </a:spcBef>
-              <a:spcAft>
-                <a:spcPts val="200"/>
-              </a:spcAft>
-            </a:pPr>
-            <a:r>
-              <a:rPr sz="1100" b="0">
+                <a:spcPts val="1820"/>
+              </a:lnSpc>
+              <a:spcBef>
+                <a:spcPts val="200"/>
+              </a:spcBef>
+              <a:spcAft>
+                <a:spcPts val="200"/>
+              </a:spcAft>
+            </a:pPr>
+            <a:r>
+              <a:rPr sz="1400" b="0">
                 <a:solidFill>
                   <a:srgbClr val="000000"/>
                 </a:solidFill>
@@ -14436,7 +14436,7 @@
           <a:p>
             <a:pPr algn="l">
               <a:lnSpc>
-                <a:spcPts val="1820"/>
+                <a:spcPts val="2080"/>
               </a:lnSpc>
               <a:spcBef>
                 <a:spcPts val="800"/>
@@ -14446,7 +14446,7 @@
               </a:spcAft>
             </a:pPr>
             <a:r>
-              <a:rPr sz="1400" b="1">
+              <a:rPr sz="1600" b="1">
                 <a:solidFill>
                   <a:srgbClr val="008040"/>
                 </a:solidFill>
@@ -14458,17 +14458,17 @@
           <a:p>
             <a:pPr algn="l">
               <a:lnSpc>
-                <a:spcPts val="1430"/>
-              </a:lnSpc>
-              <a:spcBef>
-                <a:spcPts val="200"/>
-              </a:spcBef>
-              <a:spcAft>
-                <a:spcPts val="200"/>
-              </a:spcAft>
-            </a:pPr>
-            <a:r>
-              <a:rPr sz="1100" b="0">
+                <a:spcPts val="1820"/>
+              </a:lnSpc>
+              <a:spcBef>
+                <a:spcPts val="200"/>
+              </a:spcBef>
+              <a:spcAft>
+                <a:spcPts val="200"/>
+              </a:spcAft>
+            </a:pPr>
+            <a:r>
+              <a:rPr sz="1400" b="0">
                 <a:solidFill>
                   <a:srgbClr val="000000"/>
                 </a:solidFill>
@@ -14573,7 +14573,7 @@
           <a:p>
             <a:pPr algn="l">
               <a:lnSpc>
-                <a:spcPts val="1820"/>
+                <a:spcPts val="2080"/>
               </a:lnSpc>
               <a:spcBef>
                 <a:spcPts val="0"/>
@@ -14583,7 +14583,7 @@
               </a:spcAft>
             </a:pPr>
             <a:r>
-              <a:rPr sz="1400" b="1">
+              <a:rPr sz="1600" b="1">
                 <a:solidFill>
                   <a:srgbClr val="1B3A5C"/>
                 </a:solidFill>
@@ -14595,7 +14595,7 @@
           <a:p>
             <a:pPr algn="l">
               <a:lnSpc>
-                <a:spcPts val="1820"/>
+                <a:spcPts val="2080"/>
               </a:lnSpc>
               <a:spcBef>
                 <a:spcPts val="800"/>
@@ -14605,7 +14605,7 @@
               </a:spcAft>
             </a:pPr>
             <a:r>
-              <a:rPr sz="1400" b="1">
+              <a:rPr sz="1600" b="1">
                 <a:solidFill>
                   <a:srgbClr val="333333"/>
                 </a:solidFill>
@@ -14617,17 +14617,17 @@
           <a:p>
             <a:pPr algn="l">
               <a:lnSpc>
-                <a:spcPts val="1430"/>
-              </a:lnSpc>
-              <a:spcBef>
-                <a:spcPts val="200"/>
-              </a:spcBef>
-              <a:spcAft>
-                <a:spcPts val="200"/>
-              </a:spcAft>
-            </a:pPr>
-            <a:r>
-              <a:rPr sz="1100" b="0">
+                <a:spcPts val="1820"/>
+              </a:lnSpc>
+              <a:spcBef>
+                <a:spcPts val="200"/>
+              </a:spcBef>
+              <a:spcAft>
+                <a:spcPts val="200"/>
+              </a:spcAft>
+            </a:pPr>
+            <a:r>
+              <a:rPr sz="1400" b="0">
                 <a:solidFill>
                   <a:srgbClr val="000000"/>
                 </a:solidFill>
@@ -14639,7 +14639,7 @@
           <a:p>
             <a:pPr algn="l">
               <a:lnSpc>
-                <a:spcPts val="1820"/>
+                <a:spcPts val="2080"/>
               </a:lnSpc>
               <a:spcBef>
                 <a:spcPts val="800"/>
@@ -14649,7 +14649,7 @@
               </a:spcAft>
             </a:pPr>
             <a:r>
-              <a:rPr sz="1400" b="1">
+              <a:rPr sz="1600" b="1">
                 <a:solidFill>
                   <a:srgbClr val="1B5C9E"/>
                 </a:solidFill>
@@ -14661,17 +14661,17 @@
           <a:p>
             <a:pPr algn="l">
               <a:lnSpc>
-                <a:spcPts val="1430"/>
-              </a:lnSpc>
-              <a:spcBef>
-                <a:spcPts val="200"/>
-              </a:spcBef>
-              <a:spcAft>
-                <a:spcPts val="200"/>
-              </a:spcAft>
-            </a:pPr>
-            <a:r>
-              <a:rPr sz="1100" b="0">
+                <a:spcPts val="1820"/>
+              </a:lnSpc>
+              <a:spcBef>
+                <a:spcPts val="200"/>
+              </a:spcBef>
+              <a:spcAft>
+                <a:spcPts val="200"/>
+              </a:spcAft>
+            </a:pPr>
+            <a:r>
+              <a:rPr sz="1400" b="0">
                 <a:solidFill>
                   <a:srgbClr val="000000"/>
                 </a:solidFill>
@@ -14683,17 +14683,17 @@
           <a:p>
             <a:pPr algn="l">
               <a:lnSpc>
-                <a:spcPts val="1430"/>
-              </a:lnSpc>
-              <a:spcBef>
-                <a:spcPts val="200"/>
-              </a:spcBef>
-              <a:spcAft>
-                <a:spcPts val="200"/>
-              </a:spcAft>
-            </a:pPr>
-            <a:r>
-              <a:rPr sz="1100" b="0">
+                <a:spcPts val="1820"/>
+              </a:lnSpc>
+              <a:spcBef>
+                <a:spcPts val="200"/>
+              </a:spcBef>
+              <a:spcAft>
+                <a:spcPts val="200"/>
+              </a:spcAft>
+            </a:pPr>
+            <a:r>
+              <a:rPr sz="1400" b="0">
                 <a:solidFill>
                   <a:srgbClr val="000000"/>
                 </a:solidFill>
@@ -14705,7 +14705,7 @@
           <a:p>
             <a:pPr algn="l">
               <a:lnSpc>
-                <a:spcPts val="1820"/>
+                <a:spcPts val="2080"/>
               </a:lnSpc>
               <a:spcBef>
                 <a:spcPts val="800"/>
@@ -14715,7 +14715,7 @@
               </a:spcAft>
             </a:pPr>
             <a:r>
-              <a:rPr sz="1400" b="1">
+              <a:rPr sz="1600" b="1">
                 <a:solidFill>
                   <a:srgbClr val="CC3333"/>
                 </a:solidFill>
@@ -14727,17 +14727,17 @@
           <a:p>
             <a:pPr algn="l">
               <a:lnSpc>
-                <a:spcPts val="1430"/>
-              </a:lnSpc>
-              <a:spcBef>
-                <a:spcPts val="200"/>
-              </a:spcBef>
-              <a:spcAft>
-                <a:spcPts val="200"/>
-              </a:spcAft>
-            </a:pPr>
-            <a:r>
-              <a:rPr sz="1100" b="0">
+                <a:spcPts val="1820"/>
+              </a:lnSpc>
+              <a:spcBef>
+                <a:spcPts val="200"/>
+              </a:spcBef>
+              <a:spcAft>
+                <a:spcPts val="200"/>
+              </a:spcAft>
+            </a:pPr>
+            <a:r>
+              <a:rPr sz="1400" b="0">
                 <a:solidFill>
                   <a:srgbClr val="000000"/>
                 </a:solidFill>
@@ -14749,7 +14749,7 @@
           <a:p>
             <a:pPr algn="l">
               <a:lnSpc>
-                <a:spcPts val="1820"/>
+                <a:spcPts val="2080"/>
               </a:lnSpc>
               <a:spcBef>
                 <a:spcPts val="800"/>
@@ -14759,7 +14759,7 @@
               </a:spcAft>
             </a:pPr>
             <a:r>
-              <a:rPr sz="1400" b="1">
+              <a:rPr sz="1600" b="1">
                 <a:solidFill>
                   <a:srgbClr val="008040"/>
                 </a:solidFill>
@@ -14771,17 +14771,17 @@
           <a:p>
             <a:pPr algn="l">
               <a:lnSpc>
-                <a:spcPts val="1430"/>
-              </a:lnSpc>
-              <a:spcBef>
-                <a:spcPts val="200"/>
-              </a:spcBef>
-              <a:spcAft>
-                <a:spcPts val="200"/>
-              </a:spcAft>
-            </a:pPr>
-            <a:r>
-              <a:rPr sz="1100" b="0">
+                <a:spcPts val="1820"/>
+              </a:lnSpc>
+              <a:spcBef>
+                <a:spcPts val="200"/>
+              </a:spcBef>
+              <a:spcAft>
+                <a:spcPts val="200"/>
+              </a:spcAft>
+            </a:pPr>
+            <a:r>
+              <a:rPr sz="1400" b="0">
                 <a:solidFill>
                   <a:srgbClr val="000000"/>
                 </a:solidFill>
@@ -14886,7 +14886,7 @@
           <a:p>
             <a:pPr algn="l">
               <a:lnSpc>
-                <a:spcPts val="1820"/>
+                <a:spcPts val="2080"/>
               </a:lnSpc>
               <a:spcBef>
                 <a:spcPts val="0"/>
@@ -14896,7 +14896,7 @@
               </a:spcAft>
             </a:pPr>
             <a:r>
-              <a:rPr sz="1400" b="1">
+              <a:rPr sz="1600" b="1">
                 <a:solidFill>
                   <a:srgbClr val="1B3A5C"/>
                 </a:solidFill>
@@ -14908,7 +14908,7 @@
           <a:p>
             <a:pPr algn="l">
               <a:lnSpc>
-                <a:spcPts val="1820"/>
+                <a:spcPts val="2080"/>
               </a:lnSpc>
               <a:spcBef>
                 <a:spcPts val="800"/>
@@ -14918,7 +14918,7 @@
               </a:spcAft>
             </a:pPr>
             <a:r>
-              <a:rPr sz="1400" b="1">
+              <a:rPr sz="1600" b="1">
                 <a:solidFill>
                   <a:srgbClr val="333333"/>
                 </a:solidFill>
@@ -14930,17 +14930,17 @@
           <a:p>
             <a:pPr algn="l">
               <a:lnSpc>
-                <a:spcPts val="1430"/>
-              </a:lnSpc>
-              <a:spcBef>
-                <a:spcPts val="200"/>
-              </a:spcBef>
-              <a:spcAft>
-                <a:spcPts val="200"/>
-              </a:spcAft>
-            </a:pPr>
-            <a:r>
-              <a:rPr sz="1100" b="0">
+                <a:spcPts val="1820"/>
+              </a:lnSpc>
+              <a:spcBef>
+                <a:spcPts val="200"/>
+              </a:spcBef>
+              <a:spcAft>
+                <a:spcPts val="200"/>
+              </a:spcAft>
+            </a:pPr>
+            <a:r>
+              <a:rPr sz="1400" b="0">
                 <a:solidFill>
                   <a:srgbClr val="000000"/>
                 </a:solidFill>
@@ -14952,7 +14952,7 @@
           <a:p>
             <a:pPr algn="l">
               <a:lnSpc>
-                <a:spcPts val="1820"/>
+                <a:spcPts val="2080"/>
               </a:lnSpc>
               <a:spcBef>
                 <a:spcPts val="800"/>
@@ -14962,7 +14962,7 @@
               </a:spcAft>
             </a:pPr>
             <a:r>
-              <a:rPr sz="1400" b="1">
+              <a:rPr sz="1600" b="1">
                 <a:solidFill>
                   <a:srgbClr val="1B5C9E"/>
                 </a:solidFill>
@@ -14974,17 +14974,17 @@
           <a:p>
             <a:pPr algn="l">
               <a:lnSpc>
-                <a:spcPts val="1430"/>
-              </a:lnSpc>
-              <a:spcBef>
-                <a:spcPts val="200"/>
-              </a:spcBef>
-              <a:spcAft>
-                <a:spcPts val="200"/>
-              </a:spcAft>
-            </a:pPr>
-            <a:r>
-              <a:rPr sz="1100" b="0">
+                <a:spcPts val="1820"/>
+              </a:lnSpc>
+              <a:spcBef>
+                <a:spcPts val="200"/>
+              </a:spcBef>
+              <a:spcAft>
+                <a:spcPts val="200"/>
+              </a:spcAft>
+            </a:pPr>
+            <a:r>
+              <a:rPr sz="1400" b="0">
                 <a:solidFill>
                   <a:srgbClr val="000000"/>
                 </a:solidFill>
@@ -14996,7 +14996,7 @@
           <a:p>
             <a:pPr algn="l">
               <a:lnSpc>
-                <a:spcPts val="1820"/>
+                <a:spcPts val="2080"/>
               </a:lnSpc>
               <a:spcBef>
                 <a:spcPts val="800"/>
@@ -15006,7 +15006,7 @@
               </a:spcAft>
             </a:pPr>
             <a:r>
-              <a:rPr sz="1400" b="1">
+              <a:rPr sz="1600" b="1">
                 <a:solidFill>
                   <a:srgbClr val="CC3333"/>
                 </a:solidFill>
@@ -15018,17 +15018,17 @@
           <a:p>
             <a:pPr algn="l">
               <a:lnSpc>
-                <a:spcPts val="1430"/>
-              </a:lnSpc>
-              <a:spcBef>
-                <a:spcPts val="200"/>
-              </a:spcBef>
-              <a:spcAft>
-                <a:spcPts val="200"/>
-              </a:spcAft>
-            </a:pPr>
-            <a:r>
-              <a:rPr sz="1100" b="0">
+                <a:spcPts val="1820"/>
+              </a:lnSpc>
+              <a:spcBef>
+                <a:spcPts val="200"/>
+              </a:spcBef>
+              <a:spcAft>
+                <a:spcPts val="200"/>
+              </a:spcAft>
+            </a:pPr>
+            <a:r>
+              <a:rPr sz="1400" b="0">
                 <a:solidFill>
                   <a:srgbClr val="000000"/>
                 </a:solidFill>
@@ -15040,7 +15040,7 @@
           <a:p>
             <a:pPr algn="l">
               <a:lnSpc>
-                <a:spcPts val="1820"/>
+                <a:spcPts val="2080"/>
               </a:lnSpc>
               <a:spcBef>
                 <a:spcPts val="800"/>
@@ -15050,7 +15050,7 @@
               </a:spcAft>
             </a:pPr>
             <a:r>
-              <a:rPr sz="1400" b="1">
+              <a:rPr sz="1600" b="1">
                 <a:solidFill>
                   <a:srgbClr val="008040"/>
                 </a:solidFill>
@@ -15062,17 +15062,17 @@
           <a:p>
             <a:pPr algn="l">
               <a:lnSpc>
-                <a:spcPts val="1430"/>
-              </a:lnSpc>
-              <a:spcBef>
-                <a:spcPts val="200"/>
-              </a:spcBef>
-              <a:spcAft>
-                <a:spcPts val="200"/>
-              </a:spcAft>
-            </a:pPr>
-            <a:r>
-              <a:rPr sz="1100" b="0">
+                <a:spcPts val="1820"/>
+              </a:lnSpc>
+              <a:spcBef>
+                <a:spcPts val="200"/>
+              </a:spcBef>
+              <a:spcAft>
+                <a:spcPts val="200"/>
+              </a:spcAft>
+            </a:pPr>
+            <a:r>
+              <a:rPr sz="1400" b="0">
                 <a:solidFill>
                   <a:srgbClr val="000000"/>
                 </a:solidFill>

--- a/ppts_output_v3/01_增值税风险指引.pptx
+++ b/ppts_output_v3/01_增值税风险指引.pptx
@@ -10007,28 +10007,6 @@
               <a:t>核实租赁的各项资产的用途，是否存在转租的情况，查看“主营业务收入”“其他业务收入”科目明细，结合申报数据，判断相关收入是否计征增值税，适用税率是否准确。</a:t>
             </a:r>
           </a:p>
-          <a:p>
-            <a:pPr algn="l">
-              <a:lnSpc>
-                <a:spcPts val="1820"/>
-              </a:lnSpc>
-              <a:spcBef>
-                <a:spcPts val="200"/>
-              </a:spcBef>
-              <a:spcAft>
-                <a:spcPts val="200"/>
-              </a:spcAft>
-            </a:pPr>
-            <a:r>
-              <a:rPr sz="1400" b="0">
-                <a:solidFill>
-                  <a:srgbClr val="000000"/>
-                </a:solidFill>
-                <a:latin typeface="Microsoft YaHei"/>
-              </a:rPr>
-              <a:t>30</a:t>
-            </a:r>
-          </a:p>
         </p:txBody>
       </p:sp>
     </p:spTree>
@@ -13135,28 +13113,6 @@
                 <a:latin typeface="Microsoft YaHei"/>
               </a:rPr>
               <a:t>查看统借统还贷款合同，核实向集团内单位收取高于支付给金融机构的借款利率水平的情况，确认向集团内单位收取高于支付给金融机构借款利率水平的利息是否全额缴纳增值税。</a:t>
-            </a:r>
-          </a:p>
-          <a:p>
-            <a:pPr algn="l">
-              <a:lnSpc>
-                <a:spcPts val="1820"/>
-              </a:lnSpc>
-              <a:spcBef>
-                <a:spcPts val="200"/>
-              </a:spcBef>
-              <a:spcAft>
-                <a:spcPts val="200"/>
-              </a:spcAft>
-            </a:pPr>
-            <a:r>
-              <a:rPr sz="1400" b="0">
-                <a:solidFill>
-                  <a:srgbClr val="000000"/>
-                </a:solidFill>
-                <a:latin typeface="Microsoft YaHei"/>
-              </a:rPr>
-              <a:t>39</a:t>
             </a:r>
           </a:p>
         </p:txBody>

--- a/ppts_output_v3/01_增值税风险指引.pptx
+++ b/ppts_output_v3/01_增值税风险指引.pptx
@@ -3436,7 +3436,7 @@
                 </a:solidFill>
                 <a:latin typeface="Microsoft YaHei"/>
               </a:rPr>
-              <a:t>根据《中华人民共和国增值税法》及其实施条例关于进项税额抵扣的规定，并参照原《国家税务总局关于平销行为征收增值税问题的通知》（国税发〔1997〕167 号）的原则：凡增值税一般纳税人，无论是否有平销行为，因购买货物而从销售方取得的各种形式的返还资金，均应依所购货物的增值税税率计算应冲减的进项税金，并从其取得返还资金当期的进项税金中予以冲减。应冲减的进项税金计算公式如下：</a:t>
+              <a:t>根据《中华人民共和国增值税法》及其实施条例关于进项税额抵扣的规定，并参照原《国家税务总局关于平销行为征收增值税问题的通知》（国税发〔1997〕167号）的原则：凡增值税一般纳税人，无论是否有平销行为，因购买货物而从销售方取得的各种形式的返还资金，均应依所购货物的增值税税率计算应冲减的进项税金，并从其取得返还资金当期的进项税金中予以冲减。应冲减的进项税金计算公式如下：</a:t>
             </a:r>
           </a:p>
           <a:p>
@@ -3749,7 +3749,7 @@
                 </a:solidFill>
                 <a:latin typeface="Microsoft YaHei"/>
               </a:rPr>
-              <a:t>根据《中华人民共和国增值税法》及其实施条例关于纳税义务发生时间及销售额调整的规定，并参照原《国家税务总局关于纳税人折扣折让行为开具红字增值税专用发票问题的通知》（国税函〔2006〕1279 号）及《中华人民共和国增值税暂行条例实施细则》的原则：纳税人销售货物并向购买方开具增值税专用发票后，由于购货方在一定时期内累计购买货物达到一定数量，或者由于市场价格下降等原因，销货方给予购货方相应的价格优惠或补偿等折扣、折让行为，销货方可按现行规定开具红字增值税专用发票。未按规定开具红字增值税专用发票的，增值税额不得从销项税额中扣减。</a:t>
+              <a:t>根据《中华人民共和国增值税法》及其实施条例关于纳税义务发生时间及销售额调整的规定，并参照原《国家税务总局关于纳税人折扣折让行为开具红字增值税专用发票问题的通知》（国税函〔2006〕1279号）及《中华人民共和国增值税暂行条例实施细则》的原则：纳税人销售货物并向购买方开具增值税专用发票后，由于购货方在一定时期内累计购买货物达到一定数量，或者由于市场价格下降等原因，销货方给予购货方相应的价格优惠或补偿等折扣、折让行为，销货方可按现行规定开具红字增值税专用发票。未按规定开具红字增值税专用发票的，增值税额不得从销项税额中扣减。</a:t>
             </a:r>
           </a:p>
           <a:p>
@@ -4375,29 +4375,29 @@
                 </a:solidFill>
                 <a:latin typeface="Microsoft YaHei"/>
               </a:rPr>
-              <a:t>根据《中华人民共和国增值税法实施细则》（中华人民共和国国务院令第 826 号）第十七条的规定：</a:t>
-            </a:r>
-          </a:p>
-          <a:p>
-            <a:pPr algn="l">
-              <a:lnSpc>
-                <a:spcPts val="1820"/>
-              </a:lnSpc>
-              <a:spcBef>
-                <a:spcPts val="200"/>
-              </a:spcBef>
-              <a:spcAft>
-                <a:spcPts val="200"/>
-              </a:spcAft>
-            </a:pPr>
-            <a:r>
-              <a:rPr sz="1400" b="0">
-                <a:solidFill>
-                  <a:srgbClr val="000000"/>
-                </a:solidFill>
-                <a:latin typeface="Microsoft YaHei"/>
-              </a:rPr>
-              <a:t>纳税人以人民币以外的货币结算销售额的，在折合成人民币计算时，折合率可以选择销售额发生的当日或者当月1 日有效的人民币汇率中间价。纳税人确定折合率后，12 个月内不得变更。</a:t>
+              <a:t>根据《中华人民共和国增值税法实施细则》（中华人民共和国国务院令第826号）第十七条的规定：</a:t>
+            </a:r>
+          </a:p>
+          <a:p>
+            <a:pPr algn="l">
+              <a:lnSpc>
+                <a:spcPts val="1820"/>
+              </a:lnSpc>
+              <a:spcBef>
+                <a:spcPts val="200"/>
+              </a:spcBef>
+              <a:spcAft>
+                <a:spcPts val="200"/>
+              </a:spcAft>
+            </a:pPr>
+            <a:r>
+              <a:rPr sz="1400" b="0">
+                <a:solidFill>
+                  <a:srgbClr val="000000"/>
+                </a:solidFill>
+                <a:latin typeface="Microsoft YaHei"/>
+              </a:rPr>
+              <a:t>纳税人以人民币以外的货币结算销售额的，在折合成人民币计算时，折合率可以选择销售额发生的当日或者当月1日有效的人民币汇率中间价。纳税人确定折合率后，12个月内不得变更。</a:t>
             </a:r>
           </a:p>
           <a:p>
@@ -4441,7 +4441,7 @@
                 </a:solidFill>
                 <a:latin typeface="Microsoft YaHei"/>
               </a:rPr>
-              <a:t>企业将以外币结算的销售收入折合成人民币时应按照销售额发生当天或者当月 1 日的人民币汇率中间价，且一经选择12 个月内不得变更，如果企业汇率使用错误，则会多记或少计收入，从而多记或少计销项税额。</a:t>
+              <a:t>企业将以外币结算的销售收入折合成人民币时应按照销售额发生当天或者当月1日的人民币汇率中间价，且一经选择12个月内不得变更，如果企业汇率使用错误，则会多记或少计收入，从而多记或少计销项税额。</a:t>
             </a:r>
           </a:p>
           <a:p>
@@ -5314,7 +5314,7 @@
                 </a:solidFill>
                 <a:latin typeface="Microsoft YaHei"/>
               </a:rPr>
-              <a:t>根据《中华人民共和国增值税法》及其实施条例关于销售额确定的规定，并参照原《国家税务总局关于印发&lt;增值税若干具体问题的规定&gt;的通知》（国税发〔1993〕154 号）及《财政部国家税务总局关于金银首饰等货物征收增值税管理问题的通知》（财税字〔1996〕74 号）的原则：</a:t>
+              <a:t>根据《中华人民共和国增值税法》及其实施条例关于销售额确定的规定，并参照原《国家税务总局关于印发&lt;增值税若干具体问题的规定&gt;的通知》（国税发〔1993〕154号）及《财政部国家税务总局关于金银首饰等货物征收增值税管理问题的通知》（财税字〔1996〕74号）的原则：</a:t>
             </a:r>
           </a:p>
           <a:p>
@@ -5627,7 +5627,7 @@
                 </a:solidFill>
                 <a:latin typeface="Microsoft YaHei"/>
               </a:rPr>
-              <a:t>根据《中华人民共和国增值税法实施条例》（中华人民共和国国务院令第 826 号）第二十一条规定：</a:t>
+              <a:t>根据《中华人民共和国增值税法实施条例》（中华人民共和国国务院令第826号）第二十一条规定：</a:t>
             </a:r>
           </a:p>
           <a:p>
@@ -6275,29 +6275,29 @@
                 </a:solidFill>
                 <a:latin typeface="Microsoft YaHei"/>
               </a:rPr>
-              <a:t>根据《国家税务总局关于发布&lt;房地产开发企业销售自行开发的房地产项目增值税征收管理暂行办法&gt;的公告》（国家税务总局公告2016 年第 18 号）第十条规定：</a:t>
-            </a:r>
-          </a:p>
-          <a:p>
-            <a:pPr algn="l">
-              <a:lnSpc>
-                <a:spcPts val="1820"/>
-              </a:lnSpc>
-              <a:spcBef>
-                <a:spcPts val="200"/>
-              </a:spcBef>
-              <a:spcAft>
-                <a:spcPts val="200"/>
-              </a:spcAft>
-            </a:pPr>
-            <a:r>
-              <a:rPr sz="1400" b="0">
-                <a:solidFill>
-                  <a:srgbClr val="000000"/>
-                </a:solidFill>
-                <a:latin typeface="Microsoft YaHei"/>
-              </a:rPr>
-              <a:t>一般纳税人采取预收款方式销售自行开发的房地产项目，应在收到预收款时按照 3%的预征率预缴增值税。</a:t>
+              <a:t>根据《国家税务总局关于发布&lt;房地产开发企业销售自行开发的房地产项目增值税征收管理暂行办法&gt;的公告》（国家税务总局公告2016年第18号）第十条规定：</a:t>
+            </a:r>
+          </a:p>
+          <a:p>
+            <a:pPr algn="l">
+              <a:lnSpc>
+                <a:spcPts val="1820"/>
+              </a:lnSpc>
+              <a:spcBef>
+                <a:spcPts val="200"/>
+              </a:spcBef>
+              <a:spcAft>
+                <a:spcPts val="200"/>
+              </a:spcAft>
+            </a:pPr>
+            <a:r>
+              <a:rPr sz="1400" b="0">
+                <a:solidFill>
+                  <a:srgbClr val="000000"/>
+                </a:solidFill>
+                <a:latin typeface="Microsoft YaHei"/>
+              </a:rPr>
+              <a:t>一般纳税人采取预收款方式销售自行开发的房地产项目，应在收到预收款时按照3%的预征率预缴增值税。</a:t>
             </a:r>
           </a:p>
           <a:p>
@@ -7280,7 +7280,7 @@
                 </a:solidFill>
                 <a:latin typeface="Microsoft YaHei"/>
               </a:rPr>
-              <a:t>根据《国家税务总局关于发布&lt;房地产开发企业销售自行开发的房地产项目增值税征收管理暂行办法&gt;的公告》（国家税务总局公告2016 年第 18 号）第四条规定：</a:t>
+              <a:t>根据《国家税务总局关于发布&lt;房地产开发企业销售自行开发的房地产项目增值税征收管理暂行办法&gt;的公告》（国家税务总局公告2016年第18号）第四条规定：</a:t>
             </a:r>
           </a:p>
           <a:p>
@@ -7593,7 +7593,7 @@
                 </a:solidFill>
                 <a:latin typeface="Microsoft YaHei"/>
               </a:rPr>
-              <a:t>根据《财政部 国家税务总局关于全面推开营业税改征增值税试点的通知》（财税〔2016〕36 号）附件 3《营业税改征增值税试点过渡政策的规定》及后续补充文件（财税〔2016〕46 号、财税〔2016〕70 号）的规定，金融同业往来利息收入免税范围有明确限定。上述文件在《增值税法》实施后，凡与《增值税法》及其实施条例不冲突的部分，仍可参照执行。</a:t>
+              <a:t>根据《财政部 国家税务总局关于全面推开营业税改征增值税试点的通知》（财税〔2016〕36号）附件3《营业税改征增值税试点过渡政策的规定》及后续补充文件（财税〔2016〕46号、财税〔2016〕70号）的规定，金融同业往来利息收入免税范围有明确限定。上述文件在《增值税法》实施后，凡与《增值税法》及其实施条例不冲突的部分，仍可参照执行。</a:t>
             </a:r>
           </a:p>
           <a:p>
@@ -7884,7 +7884,7 @@
                 </a:solidFill>
                 <a:latin typeface="Microsoft YaHei"/>
               </a:rPr>
-              <a:t>根据《财政部 税务总局关于延续实施金融机构农户贷款利息收入免征增值税政策的公告》（财政部 税务总局公告2023 年第67号）规定：</a:t>
+              <a:t>根据《财政部 税务总局关于延续实施金融机构农户贷款利息收入免征增值税政策的公告》（财政部 税务总局公告2023年第67号）规定：</a:t>
             </a:r>
           </a:p>
           <a:p>
@@ -7950,7 +7950,7 @@
                 </a:solidFill>
                 <a:latin typeface="Microsoft YaHei"/>
               </a:rPr>
-              <a:t>三、本公告所称小额贷款，是指单户授信小于100 万元（含本数）的农户贷款；没有授信额度的，是指单户贷款合同金额且贷款余额在100 万元（含本数）以下的贷款。</a:t>
+              <a:t>三、本公告所称小额贷款，是指单户授信小于100万元（含本数）的农户贷款；没有授信额度的，是指单户贷款合同金额且贷款余额在100万元（含本数）以下的贷款。</a:t>
             </a:r>
           </a:p>
           <a:p>
@@ -8241,7 +8241,7 @@
                 </a:solidFill>
                 <a:latin typeface="Microsoft YaHei"/>
               </a:rPr>
-              <a:t>根据《中华人民共和国增值税法》及其实施条例关于贷款服务的规定，并参照原《财政部 国家税务总局关于全面推开营业税改征增值税试点的通知》（财税〔2016〕36 号）附件1《销售服务、无形资产、不动产注释》：</a:t>
+              <a:t>根据《中华人民共和国增值税法》及其实施条例关于贷款服务的规定，并参照原《财政部 国家税务总局关于全面推开营业税改征增值税试点的通知》（财税〔2016〕36号）附件1《销售服务、无形资产、不动产注释》：</a:t>
             </a:r>
           </a:p>
           <a:p>
@@ -8977,7 +8977,7 @@
                 </a:solidFill>
                 <a:latin typeface="Microsoft YaHei"/>
               </a:rPr>
-              <a:t>根据《中华人民共和国增值税法》及其实施条例关于销售额的规定，并参照原《财政部 国家税务总局关于全面推开营业税改征增值税试点的通知》（财税〔2016〕36 号）附件1《营业税改征增值税试点实施办法》第三十七条的原则：</a:t>
+              <a:t>根据《中华人民共和国增值税法》及其实施条例关于销售额的规定，并参照原《财政部 国家税务总局关于全面推开营业税改征增值税试点的通知》（财税〔2016〕36号）附件1《营业税改征增值税试点实施办法》第三十七条的原则：</a:t>
             </a:r>
           </a:p>
           <a:p>
@@ -9246,7 +9246,7 @@
                 </a:solidFill>
                 <a:latin typeface="Microsoft YaHei"/>
               </a:rPr>
-              <a:t>电信业务种类适用税率不同，其中基础电信服务税率为9%，增值电信服务税率为 6%，销售终端等货物税率为13%，有形动产租赁服务税率为 13%，简易征收业务征收率为3%，可能存在混淆业务种类从低适用税率少缴增值税的风险。</a:t>
+              <a:t>电信业务种类适用税率不同，其中基础电信服务税率为9%，增值电信服务税率为6%，销售终端等货物税率为13%，有形动产租赁服务税率为13%，简易征收业务征收率为3%，可能存在混淆业务种类从低适用税率少缴增值税的风险。</a:t>
             </a:r>
           </a:p>
           <a:p>
@@ -9290,7 +9290,7 @@
                 </a:solidFill>
                 <a:latin typeface="Microsoft YaHei"/>
               </a:rPr>
-              <a:t>根据《中华人民共和国增值税法》及其实施条例关于税率的规定，并参照原《财政部 国家税务总局关于全面推开营业税改征增值税试点的通知》（财税〔2016〕36 号）、《财政部税务总局关于调整增值税税率的通知》（财税〔2018〕32 号）、《财政部税务总局海关总署关于深化增值税改革有关政策的公告》（财政部税务总局海关总署公告 2019 年第 39 号）的税率调整内容，现行税率如下：基础电信服务税率为 9%，增值电信服务税率为6%，销售货物税率为 13%，有形动产租赁服务税率为 13%，简易征收业务征收率为3%。纳税人兼营不同税率的项目，应当分别核算不同税率项目的销售额；未分别核算销售额的，从高适用税率。</a:t>
+              <a:t>根据《中华人民共和国增值税法》及其实施条例关于税率的规定，并参照原《财政部 国家税务总局关于全面推开营业税改征增值税试点的通知》（财税〔2016〕36号）、《财政部税务总局关于调整增值税税率的通知》（财税〔2018〕32号）、《财政部税务总局海关总署关于深化增值税改革有关政策的公告》（财政部税务总局海关总署公告2019年第39号）的税率调整内容，现行税率如下：基础电信服务税率为9%，增值电信服务税率为6%，销售货物税率为13%，有形动产租赁服务税率为13%，简易征收业务征收率为3%。纳税人兼营不同税率的项目，应当分别核算不同税率项目的销售额；未分别核算销售额的，从高适用税率。</a:t>
             </a:r>
           </a:p>
           <a:p>
@@ -9581,7 +9581,7 @@
                 </a:solidFill>
                 <a:latin typeface="Microsoft YaHei"/>
               </a:rPr>
-              <a:t>根据《中华人民共和国增值税法》及其实施条例关于销售额的规定，并参照原《财政部 国家税务总局关于全面推开营业税改征增值税试点的通知》（财税〔2016〕36 号）附件1《销售服务、无形资产、不动产注释》的原则：</a:t>
+              <a:t>根据《中华人民共和国增值税法》及其实施条例关于销售额的规定，并参照原《财政部 国家税务总局关于全面推开营业税改征增值税试点的通知》（财税〔2016〕36号）附件1《销售服务、无形资产、不动产注释》的原则：</a:t>
             </a:r>
           </a:p>
           <a:p>
@@ -9894,7 +9894,7 @@
                 </a:solidFill>
                 <a:latin typeface="Microsoft YaHei"/>
               </a:rPr>
-              <a:t>根据《中华人民共和国增值税法》及其实施条例关于租赁服务的规定，并参照原《国家税务总局关于发布&lt;纳税人提供不动产经营租赁服务增值税征收管理暂行办法&gt;的公告》（国家税务总局公告2016年第 16 号）的原则：</a:t>
+              <a:t>根据《中华人民共和国增值税法》及其实施条例关于租赁服务的规定，并参照原《国家税务总局关于发布&lt;纳税人提供不动产经营租赁服务增值税征收管理暂行办法&gt;的公告》（国家税务总局公告2016年第16号）的原则：</a:t>
             </a:r>
           </a:p>
           <a:p>
@@ -11146,7 +11146,7 @@
                 </a:solidFill>
                 <a:latin typeface="Microsoft YaHei"/>
               </a:rPr>
-              <a:t>根据《中华人民共和国增值税法》及其实施条例关于销售额确定的规定，并参照原《国家税务总局关于商业企业向货物供应方收取的部分费用征收流转税问题的通知》（国税发〔2004〕136 号）的原则：对商业企业向供货方收取的与商品销售量、销售额无必然联系，且商业企业向供货方提供一定劳务的收入，例如进场费、广告促销费、上架费、展示费、管理费等，不属于平销返利，不冲减当期增值税进项税金，应按适用税目税率征收增值税。</a:t>
+              <a:t>根据《中华人民共和国增值税法》及其实施条例关于销售额确定的规定，并参照原《国家税务总局关于商业企业向货物供应方收取的部分费用征收流转税问题的通知》（国税发〔2004〕136号）的原则：对商业企业向供货方收取的与商品销售量、销售额无必然联系，且商业企业向供货方提供一定劳务的收入，例如进场费、广告促销费、上架费、展示费、管理费等，不属于平销返利，不冲减当期增值税进项税金，应按适用税目税率征收增值税。</a:t>
             </a:r>
           </a:p>
           <a:p>
@@ -11437,7 +11437,7 @@
                 </a:solidFill>
                 <a:latin typeface="Microsoft YaHei"/>
               </a:rPr>
-              <a:t>根据《中华人民共和国增值税法》及其实施条例关于进项税额不得抵扣的规定，并参照原《财政部 国家税务总局关于全面推开营业税改征增值税试点的通知》（财税〔2016〕36 号）附件1《营业税改征增值税试点实施办法》第二十九条的原则：适用一般计税方法的纳税人，兼营简易计税方法计税项目、免征增值税项目而无法划分不得抵扣的进项税额，按照下列公式计算不得抵扣的进项税额：</a:t>
+              <a:t>根据《中华人民共和国增值税法》及其实施条例关于进项税额不得抵扣的规定，并参照原《财政部 国家税务总局关于全面推开营业税改征增值税试点的通知》（财税〔2016〕36号）附件1《营业税改征增值税试点实施办法》第二十九条的原则：适用一般计税方法的纳税人，兼营简易计税方法计税项目、免征增值税项目而无法划分不得抵扣的进项税额，按照下列公式计算不得抵扣的进项税额：</a:t>
             </a:r>
           </a:p>
           <a:p>
@@ -12063,7 +12063,7 @@
                 </a:solidFill>
                 <a:latin typeface="Microsoft YaHei"/>
               </a:rPr>
-              <a:t>根据《国家税务总局关于深化增值税改革有关事项的公告》（国家税务总局公告 2019 年第 14 号）第六条（在《增值税法》实施后，与法不冲突的原则继续适用）：</a:t>
+              <a:t>根据《国家税务总局关于深化增值税改革有关事项的公告》（国家税务总局公告2019年第14号）第六条（在《增值税法》实施后，与法不冲突的原则继续适用）：</a:t>
             </a:r>
           </a:p>
           <a:p>
@@ -12689,7 +12689,7 @@
                 </a:solidFill>
                 <a:latin typeface="Microsoft YaHei"/>
               </a:rPr>
-              <a:t>根据《中华人民共和国增值税法》及其实施条例关于免税项目的规定，并参照原《财政部 国家税务总局关于全面推开营业税改征增值税试点的通知》（财税〔2016〕36 号）附件3《营业税改征增值税试点过渡政策的规定》：</a:t>
+              <a:t>根据《中华人民共和国增值税法》及其实施条例关于免税项目的规定，并参照原《财政部 国家税务总局关于全面推开营业税改征增值税试点的通知》（财税〔2016〕36号）附件3《营业税改征增值税试点过渡政策的规定》：</a:t>
             </a:r>
           </a:p>
           <a:p>
@@ -13002,7 +13002,7 @@
                 </a:solidFill>
                 <a:latin typeface="Microsoft YaHei"/>
               </a:rPr>
-              <a:t>根据《中华人民共和国增值税法》及其实施条例关于免税项目的规定，并参照原《财政部 国家税务总局关于全面推开营业税改征增值税试点的通知》（财税〔2016〕36 号）附件3《营业税改征增值税试点过渡政策的规定》：</a:t>
+              <a:t>根据《中华人民共和国增值税法》及其实施条例关于免税项目的规定，并参照原《财政部 国家税务总局关于全面推开营业税改征增值税试点的通知》（财税〔2016〕36号）附件3《营业税改征增值税试点过渡政策的规定》：</a:t>
             </a:r>
           </a:p>
           <a:p>
@@ -13315,7 +13315,7 @@
                 </a:solidFill>
                 <a:latin typeface="Microsoft YaHei"/>
               </a:rPr>
-              <a:t>根据《国家税务总局关于促进残疾人就业增值税优惠政策有关问题的公告》（国家税务总局公告 2013 年第73 号）中的规定：安置残疾人单位聘用非全日制用工的残疾人，与其签订符合法律法规规定的劳动合同或服务协议，并且安置该残疾人在单位实际上岗工作的，可按照“通知”的规定，享受增值税优惠政策。根据《财政部 国家税务总局关于促进残疾人就业增值税优惠政策的通知》（财税〔2016〕52 号）：</a:t>
+              <a:t>根据《国家税务总局关于促进残疾人就业增值税优惠政策有关问题的公告》（国家税务总局公告2013年第73号）中的规定：安置残疾人单位聘用非全日制用工的残疾人，与其签订符合法律法规规定的劳动合同或服务协议，并且安置该残疾人在单位实际上岗工作的，可按照“通知”的规定，享受增值税优惠政策。根据《财政部 国家税务总局关于促进残疾人就业增值税优惠政策的通知》（财税〔2016〕52号）：</a:t>
             </a:r>
           </a:p>
           <a:p>
@@ -13359,51 +13359,51 @@
                 </a:solidFill>
                 <a:latin typeface="Microsoft YaHei"/>
               </a:rPr>
-              <a:t>安置的每位残疾人每月可退还的增值税具体限额，由县级以上税务机关根据纳税人所在区县（含县级市、旗，下同）适用的经省（含自治区、直辖市、计划单列市，下同）人民政府批准的月最低工资标准的 4 倍确定。</a:t>
-            </a:r>
-          </a:p>
-          <a:p>
-            <a:pPr algn="l">
-              <a:lnSpc>
-                <a:spcPts val="1820"/>
-              </a:lnSpc>
-              <a:spcBef>
-                <a:spcPts val="200"/>
-              </a:spcBef>
-              <a:spcAft>
-                <a:spcPts val="200"/>
-              </a:spcAft>
-            </a:pPr>
-            <a:r>
-              <a:rPr sz="1400" b="0">
-                <a:solidFill>
-                  <a:srgbClr val="000000"/>
-                </a:solidFill>
-                <a:latin typeface="Microsoft YaHei"/>
-              </a:rPr>
-              <a:t>二、享受税收优惠政策的条件（一）纳税人（除盲人按摩机构外）月安置的残疾人占在职职工人数的比例不低于 25%（含 25%），并且安置的残疾人人数不少于10 人（含 10 人）；</a:t>
-            </a:r>
-          </a:p>
-          <a:p>
-            <a:pPr algn="l">
-              <a:lnSpc>
-                <a:spcPts val="1820"/>
-              </a:lnSpc>
-              <a:spcBef>
-                <a:spcPts val="200"/>
-              </a:spcBef>
-              <a:spcAft>
-                <a:spcPts val="200"/>
-              </a:spcAft>
-            </a:pPr>
-            <a:r>
-              <a:rPr sz="1400" b="0">
-                <a:solidFill>
-                  <a:srgbClr val="000000"/>
-                </a:solidFill>
-                <a:latin typeface="Microsoft YaHei"/>
-              </a:rPr>
-              <a:t>盲人按摩机构月安置的残疾人占在职职工人数的比例不低于25%（含 25%），并且安置的残疾人人数不少于5 人（含5 人）。（二）依法与安置的每位残疾人签订了一年以上（含一年）的劳动合同或服务协议。</a:t>
+              <a:t>安置的每位残疾人每月可退还的增值税具体限额，由县级以上税务机关根据纳税人所在区县（含县级市、旗，下同）适用的经省（含自治区、直辖市、计划单列市，下同）人民政府批准的月最低工资标准的4倍确定。</a:t>
+            </a:r>
+          </a:p>
+          <a:p>
+            <a:pPr algn="l">
+              <a:lnSpc>
+                <a:spcPts val="1820"/>
+              </a:lnSpc>
+              <a:spcBef>
+                <a:spcPts val="200"/>
+              </a:spcBef>
+              <a:spcAft>
+                <a:spcPts val="200"/>
+              </a:spcAft>
+            </a:pPr>
+            <a:r>
+              <a:rPr sz="1400" b="0">
+                <a:solidFill>
+                  <a:srgbClr val="000000"/>
+                </a:solidFill>
+                <a:latin typeface="Microsoft YaHei"/>
+              </a:rPr>
+              <a:t>二、享受税收优惠政策的条件（一）纳税人（除盲人按摩机构外）月安置的残疾人占在职职工人数的比例不低于25%（含25%），并且安置的残疾人人数不少于10人（含10人）；</a:t>
+            </a:r>
+          </a:p>
+          <a:p>
+            <a:pPr algn="l">
+              <a:lnSpc>
+                <a:spcPts val="1820"/>
+              </a:lnSpc>
+              <a:spcBef>
+                <a:spcPts val="200"/>
+              </a:spcBef>
+              <a:spcAft>
+                <a:spcPts val="200"/>
+              </a:spcAft>
+            </a:pPr>
+            <a:r>
+              <a:rPr sz="1400" b="0">
+                <a:solidFill>
+                  <a:srgbClr val="000000"/>
+                </a:solidFill>
+                <a:latin typeface="Microsoft YaHei"/>
+              </a:rPr>
+              <a:t>盲人按摩机构月安置的残疾人占在职职工人数的比例不低于25%（含25%），并且安置的残疾人人数不少于5人（含5人）。（二）依法与安置的每位残疾人签订了一年以上（含一年）的劳动合同或服务协议。</a:t>
             </a:r>
           </a:p>
           <a:p>
@@ -13716,7 +13716,7 @@
                 </a:solidFill>
                 <a:latin typeface="Microsoft YaHei"/>
               </a:rPr>
-              <a:t>根据《国家税务总局关于营业税改征增值税试点期间有关增值税问题的公告》（国家税务总局公告 2015 年第90 号）第三条的规定：纳税人提供有形动产融资性售后回租服务，计算当期销售额时可以扣除的有形动产价款本金，为书面合同约定的当期应当收取的本金。无书面合同或者书面合同没有约定的，为当期实际收取的本金。</a:t>
+              <a:t>根据《国家税务总局关于营业税改征增值税试点期间有关增值税问题的公告》（国家税务总局公告2015年第90号）第三条的规定：纳税人提供有形动产融资性售后回租服务，计算当期销售额时可以扣除的有形动产价款本金，为书面合同约定的当期应当收取的本金。无书面合同或者书面合同没有约定的，为当期实际收取的本金。</a:t>
             </a:r>
           </a:p>
           <a:p>
@@ -14007,7 +14007,7 @@
                 </a:solidFill>
                 <a:latin typeface="Microsoft YaHei"/>
               </a:rPr>
-              <a:t>根据《中华人民共和国增值税法》及其实施条例关于销售额的规定，并参照原《国家税务总局关于印发&lt;增值税若干具体问题的规定&gt;的通知》（国税发〔1993〕154 号）及《国家税务总局关于取消包装物押金逾期期限审批后有关问题的通知》（国税函〔2004〕827号）的原则：</a:t>
+              <a:t>根据《中华人民共和国增值税法》及其实施条例关于销售额的规定，并参照原《国家税务总局关于印发&lt;增值税若干具体问题的规定&gt;的通知》（国税发〔1993〕154号）及《国家税务总局关于取消包装物押金逾期期限审批后有关问题的通知》（国税函〔2004〕827号）的原则：</a:t>
             </a:r>
           </a:p>
           <a:p>
@@ -14320,7 +14320,7 @@
                 </a:solidFill>
                 <a:latin typeface="Microsoft YaHei"/>
               </a:rPr>
-              <a:t>根据《中华人民共和国增值税法》及其实施条例关于销售额确定的规定，并参照原《国家税务总局关于印发&lt;增值税若干具体问题的规定&gt;的通知》（国税发〔1993〕154 号）及《国家税务总局关于折扣额抵减增值税应税销售额问题通知》（国税函〔2010〕56 号）的原则：</a:t>
+              <a:t>根据《中华人民共和国增值税法》及其实施条例关于销售额确定的规定，并参照原《国家税务总局关于印发&lt;增值税若干具体问题的规定&gt;的通知》（国税发〔1993〕154号）及《国家税务总局关于折扣额抵减增值税应税销售额问题通知》（国税函〔2010〕56号）的原则：</a:t>
             </a:r>
           </a:p>
           <a:p>

--- a/ppts_output_v3/01_增值税风险指引.pptx
+++ b/ppts_output_v3/01_增值税风险指引.pptx
@@ -3328,11 +3328,10 @@
             <a:spAutoFit/>
           </a:bodyPr>
           <a:lstStyle/>
-          <a:p/>
-          <a:p>
-            <a:pPr algn="l">
-              <a:lnSpc>
-                <a:spcPts val="2080"/>
+          <a:p>
+            <a:pPr algn="l">
+              <a:lnSpc>
+                <a:spcPct val="125000"/>
               </a:lnSpc>
               <a:spcBef>
                 <a:spcPts val="0"/>
@@ -3354,7 +3353,7 @@
           <a:p>
             <a:pPr algn="l">
               <a:lnSpc>
-                <a:spcPts val="2080"/>
+                <a:spcPct val="125000"/>
               </a:lnSpc>
               <a:spcBef>
                 <a:spcPts val="800"/>
@@ -3376,7 +3375,7 @@
           <a:p>
             <a:pPr algn="l">
               <a:lnSpc>
-                <a:spcPts val="1820"/>
+                <a:spcPct val="125000"/>
               </a:lnSpc>
               <a:spcBef>
                 <a:spcPts val="200"/>
@@ -3398,7 +3397,7 @@
           <a:p>
             <a:pPr algn="l">
               <a:lnSpc>
-                <a:spcPts val="2080"/>
+                <a:spcPct val="125000"/>
               </a:lnSpc>
               <a:spcBef>
                 <a:spcPts val="800"/>
@@ -3420,7 +3419,7 @@
           <a:p>
             <a:pPr algn="l">
               <a:lnSpc>
-                <a:spcPts val="1820"/>
+                <a:spcPct val="125000"/>
               </a:lnSpc>
               <a:spcBef>
                 <a:spcPts val="200"/>
@@ -3442,7 +3441,7 @@
           <a:p>
             <a:pPr algn="l">
               <a:lnSpc>
-                <a:spcPts val="1820"/>
+                <a:spcPct val="125000"/>
               </a:lnSpc>
               <a:spcBef>
                 <a:spcPts val="200"/>
@@ -3464,7 +3463,7 @@
           <a:p>
             <a:pPr algn="l">
               <a:lnSpc>
-                <a:spcPts val="2080"/>
+                <a:spcPct val="125000"/>
               </a:lnSpc>
               <a:spcBef>
                 <a:spcPts val="800"/>
@@ -3486,7 +3485,7 @@
           <a:p>
             <a:pPr algn="l">
               <a:lnSpc>
-                <a:spcPts val="1820"/>
+                <a:spcPct val="125000"/>
               </a:lnSpc>
               <a:spcBef>
                 <a:spcPts val="200"/>
@@ -3508,7 +3507,7 @@
           <a:p>
             <a:pPr algn="l">
               <a:lnSpc>
-                <a:spcPts val="2080"/>
+                <a:spcPct val="125000"/>
               </a:lnSpc>
               <a:spcBef>
                 <a:spcPts val="800"/>
@@ -3530,7 +3529,7 @@
           <a:p>
             <a:pPr algn="l">
               <a:lnSpc>
-                <a:spcPts val="1820"/>
+                <a:spcPct val="125000"/>
               </a:lnSpc>
               <a:spcBef>
                 <a:spcPts val="200"/>
@@ -3641,11 +3640,10 @@
             <a:spAutoFit/>
           </a:bodyPr>
           <a:lstStyle/>
-          <a:p/>
-          <a:p>
-            <a:pPr algn="l">
-              <a:lnSpc>
-                <a:spcPts val="2080"/>
+          <a:p>
+            <a:pPr algn="l">
+              <a:lnSpc>
+                <a:spcPct val="125000"/>
               </a:lnSpc>
               <a:spcBef>
                 <a:spcPts val="0"/>
@@ -3667,7 +3665,7 @@
           <a:p>
             <a:pPr algn="l">
               <a:lnSpc>
-                <a:spcPts val="2080"/>
+                <a:spcPct val="125000"/>
               </a:lnSpc>
               <a:spcBef>
                 <a:spcPts val="800"/>
@@ -3689,7 +3687,7 @@
           <a:p>
             <a:pPr algn="l">
               <a:lnSpc>
-                <a:spcPts val="1820"/>
+                <a:spcPct val="125000"/>
               </a:lnSpc>
               <a:spcBef>
                 <a:spcPts val="200"/>
@@ -3711,7 +3709,7 @@
           <a:p>
             <a:pPr algn="l">
               <a:lnSpc>
-                <a:spcPts val="2080"/>
+                <a:spcPct val="125000"/>
               </a:lnSpc>
               <a:spcBef>
                 <a:spcPts val="800"/>
@@ -3733,7 +3731,7 @@
           <a:p>
             <a:pPr algn="l">
               <a:lnSpc>
-                <a:spcPts val="1820"/>
+                <a:spcPct val="125000"/>
               </a:lnSpc>
               <a:spcBef>
                 <a:spcPts val="200"/>
@@ -3755,7 +3753,7 @@
           <a:p>
             <a:pPr algn="l">
               <a:lnSpc>
-                <a:spcPts val="2080"/>
+                <a:spcPct val="125000"/>
               </a:lnSpc>
               <a:spcBef>
                 <a:spcPts val="800"/>
@@ -3777,7 +3775,7 @@
           <a:p>
             <a:pPr algn="l">
               <a:lnSpc>
-                <a:spcPts val="1820"/>
+                <a:spcPct val="125000"/>
               </a:lnSpc>
               <a:spcBef>
                 <a:spcPts val="200"/>
@@ -3799,7 +3797,7 @@
           <a:p>
             <a:pPr algn="l">
               <a:lnSpc>
-                <a:spcPts val="2080"/>
+                <a:spcPct val="125000"/>
               </a:lnSpc>
               <a:spcBef>
                 <a:spcPts val="800"/>
@@ -3821,7 +3819,7 @@
           <a:p>
             <a:pPr algn="l">
               <a:lnSpc>
-                <a:spcPts val="1820"/>
+                <a:spcPct val="125000"/>
               </a:lnSpc>
               <a:spcBef>
                 <a:spcPts val="200"/>
@@ -3932,11 +3930,10 @@
             <a:spAutoFit/>
           </a:bodyPr>
           <a:lstStyle/>
-          <a:p/>
-          <a:p>
-            <a:pPr algn="l">
-              <a:lnSpc>
-                <a:spcPts val="2080"/>
+          <a:p>
+            <a:pPr algn="l">
+              <a:lnSpc>
+                <a:spcPct val="125000"/>
               </a:lnSpc>
               <a:spcBef>
                 <a:spcPts val="0"/>
@@ -3958,7 +3955,7 @@
           <a:p>
             <a:pPr algn="l">
               <a:lnSpc>
-                <a:spcPts val="2080"/>
+                <a:spcPct val="125000"/>
               </a:lnSpc>
               <a:spcBef>
                 <a:spcPts val="800"/>
@@ -3980,7 +3977,7 @@
           <a:p>
             <a:pPr algn="l">
               <a:lnSpc>
-                <a:spcPts val="1820"/>
+                <a:spcPct val="125000"/>
               </a:lnSpc>
               <a:spcBef>
                 <a:spcPts val="200"/>
@@ -4002,7 +3999,7 @@
           <a:p>
             <a:pPr algn="l">
               <a:lnSpc>
-                <a:spcPts val="2080"/>
+                <a:spcPct val="125000"/>
               </a:lnSpc>
               <a:spcBef>
                 <a:spcPts val="800"/>
@@ -4024,7 +4021,7 @@
           <a:p>
             <a:pPr algn="l">
               <a:lnSpc>
-                <a:spcPts val="1820"/>
+                <a:spcPct val="125000"/>
               </a:lnSpc>
               <a:spcBef>
                 <a:spcPts val="200"/>
@@ -4046,7 +4043,7 @@
           <a:p>
             <a:pPr algn="l">
               <a:lnSpc>
-                <a:spcPts val="1820"/>
+                <a:spcPct val="125000"/>
               </a:lnSpc>
               <a:spcBef>
                 <a:spcPts val="200"/>
@@ -4068,7 +4065,7 @@
           <a:p>
             <a:pPr algn="l">
               <a:lnSpc>
-                <a:spcPts val="1820"/>
+                <a:spcPct val="125000"/>
               </a:lnSpc>
               <a:spcBef>
                 <a:spcPts val="200"/>
@@ -4090,7 +4087,7 @@
           <a:p>
             <a:pPr algn="l">
               <a:lnSpc>
-                <a:spcPts val="2080"/>
+                <a:spcPct val="125000"/>
               </a:lnSpc>
               <a:spcBef>
                 <a:spcPts val="800"/>
@@ -4112,7 +4109,7 @@
           <a:p>
             <a:pPr algn="l">
               <a:lnSpc>
-                <a:spcPts val="1820"/>
+                <a:spcPct val="125000"/>
               </a:lnSpc>
               <a:spcBef>
                 <a:spcPts val="200"/>
@@ -4134,7 +4131,7 @@
           <a:p>
             <a:pPr algn="l">
               <a:lnSpc>
-                <a:spcPts val="2080"/>
+                <a:spcPct val="125000"/>
               </a:lnSpc>
               <a:spcBef>
                 <a:spcPts val="800"/>
@@ -4156,7 +4153,7 @@
           <a:p>
             <a:pPr algn="l">
               <a:lnSpc>
-                <a:spcPts val="1820"/>
+                <a:spcPct val="125000"/>
               </a:lnSpc>
               <a:spcBef>
                 <a:spcPts val="200"/>
@@ -4267,11 +4264,10 @@
             <a:spAutoFit/>
           </a:bodyPr>
           <a:lstStyle/>
-          <a:p/>
-          <a:p>
-            <a:pPr algn="l">
-              <a:lnSpc>
-                <a:spcPts val="2080"/>
+          <a:p>
+            <a:pPr algn="l">
+              <a:lnSpc>
+                <a:spcPct val="125000"/>
               </a:lnSpc>
               <a:spcBef>
                 <a:spcPts val="0"/>
@@ -4293,7 +4289,7 @@
           <a:p>
             <a:pPr algn="l">
               <a:lnSpc>
-                <a:spcPts val="2080"/>
+                <a:spcPct val="125000"/>
               </a:lnSpc>
               <a:spcBef>
                 <a:spcPts val="800"/>
@@ -4315,7 +4311,7 @@
           <a:p>
             <a:pPr algn="l">
               <a:lnSpc>
-                <a:spcPts val="1820"/>
+                <a:spcPct val="125000"/>
               </a:lnSpc>
               <a:spcBef>
                 <a:spcPts val="200"/>
@@ -4337,7 +4333,7 @@
           <a:p>
             <a:pPr algn="l">
               <a:lnSpc>
-                <a:spcPts val="2080"/>
+                <a:spcPct val="125000"/>
               </a:lnSpc>
               <a:spcBef>
                 <a:spcPts val="800"/>
@@ -4359,7 +4355,7 @@
           <a:p>
             <a:pPr algn="l">
               <a:lnSpc>
-                <a:spcPts val="1820"/>
+                <a:spcPct val="125000"/>
               </a:lnSpc>
               <a:spcBef>
                 <a:spcPts val="200"/>
@@ -4381,7 +4377,7 @@
           <a:p>
             <a:pPr algn="l">
               <a:lnSpc>
-                <a:spcPts val="1820"/>
+                <a:spcPct val="125000"/>
               </a:lnSpc>
               <a:spcBef>
                 <a:spcPts val="200"/>
@@ -4403,7 +4399,7 @@
           <a:p>
             <a:pPr algn="l">
               <a:lnSpc>
-                <a:spcPts val="2080"/>
+                <a:spcPct val="125000"/>
               </a:lnSpc>
               <a:spcBef>
                 <a:spcPts val="800"/>
@@ -4425,7 +4421,7 @@
           <a:p>
             <a:pPr algn="l">
               <a:lnSpc>
-                <a:spcPts val="1820"/>
+                <a:spcPct val="125000"/>
               </a:lnSpc>
               <a:spcBef>
                 <a:spcPts val="200"/>
@@ -4447,7 +4443,7 @@
           <a:p>
             <a:pPr algn="l">
               <a:lnSpc>
-                <a:spcPts val="2080"/>
+                <a:spcPct val="125000"/>
               </a:lnSpc>
               <a:spcBef>
                 <a:spcPts val="800"/>
@@ -4469,7 +4465,7 @@
           <a:p>
             <a:pPr algn="l">
               <a:lnSpc>
-                <a:spcPts val="1820"/>
+                <a:spcPct val="125000"/>
               </a:lnSpc>
               <a:spcBef>
                 <a:spcPts val="200"/>
@@ -4580,11 +4576,10 @@
             <a:spAutoFit/>
           </a:bodyPr>
           <a:lstStyle/>
-          <a:p/>
-          <a:p>
-            <a:pPr algn="l">
-              <a:lnSpc>
-                <a:spcPts val="2080"/>
+          <a:p>
+            <a:pPr algn="l">
+              <a:lnSpc>
+                <a:spcPct val="125000"/>
               </a:lnSpc>
               <a:spcBef>
                 <a:spcPts val="0"/>
@@ -4606,7 +4601,7 @@
           <a:p>
             <a:pPr algn="l">
               <a:lnSpc>
-                <a:spcPts val="2080"/>
+                <a:spcPct val="125000"/>
               </a:lnSpc>
               <a:spcBef>
                 <a:spcPts val="800"/>
@@ -4628,7 +4623,7 @@
           <a:p>
             <a:pPr algn="l">
               <a:lnSpc>
-                <a:spcPts val="1820"/>
+                <a:spcPct val="125000"/>
               </a:lnSpc>
               <a:spcBef>
                 <a:spcPts val="200"/>
@@ -4650,7 +4645,7 @@
           <a:p>
             <a:pPr algn="l">
               <a:lnSpc>
-                <a:spcPts val="2080"/>
+                <a:spcPct val="125000"/>
               </a:lnSpc>
               <a:spcBef>
                 <a:spcPts val="800"/>
@@ -4672,7 +4667,7 @@
           <a:p>
             <a:pPr algn="l">
               <a:lnSpc>
-                <a:spcPts val="1820"/>
+                <a:spcPct val="125000"/>
               </a:lnSpc>
               <a:spcBef>
                 <a:spcPts val="200"/>
@@ -4694,7 +4689,7 @@
           <a:p>
             <a:pPr algn="l">
               <a:lnSpc>
-                <a:spcPts val="1820"/>
+                <a:spcPct val="125000"/>
               </a:lnSpc>
               <a:spcBef>
                 <a:spcPts val="200"/>
@@ -4716,7 +4711,7 @@
           <a:p>
             <a:pPr algn="l">
               <a:lnSpc>
-                <a:spcPts val="1820"/>
+                <a:spcPct val="125000"/>
               </a:lnSpc>
               <a:spcBef>
                 <a:spcPts val="200"/>
@@ -4738,7 +4733,7 @@
           <a:p>
             <a:pPr algn="l">
               <a:lnSpc>
-                <a:spcPts val="2080"/>
+                <a:spcPct val="125000"/>
               </a:lnSpc>
               <a:spcBef>
                 <a:spcPts val="800"/>
@@ -4760,7 +4755,7 @@
           <a:p>
             <a:pPr algn="l">
               <a:lnSpc>
-                <a:spcPts val="1820"/>
+                <a:spcPct val="125000"/>
               </a:lnSpc>
               <a:spcBef>
                 <a:spcPts val="200"/>
@@ -4782,7 +4777,7 @@
           <a:p>
             <a:pPr algn="l">
               <a:lnSpc>
-                <a:spcPts val="2080"/>
+                <a:spcPct val="125000"/>
               </a:lnSpc>
               <a:spcBef>
                 <a:spcPts val="800"/>
@@ -4804,7 +4799,7 @@
           <a:p>
             <a:pPr algn="l">
               <a:lnSpc>
-                <a:spcPts val="1820"/>
+                <a:spcPct val="125000"/>
               </a:lnSpc>
               <a:spcBef>
                 <a:spcPts val="200"/>
@@ -4915,11 +4910,10 @@
             <a:spAutoFit/>
           </a:bodyPr>
           <a:lstStyle/>
-          <a:p/>
-          <a:p>
-            <a:pPr algn="l">
-              <a:lnSpc>
-                <a:spcPts val="2080"/>
+          <a:p>
+            <a:pPr algn="l">
+              <a:lnSpc>
+                <a:spcPct val="125000"/>
               </a:lnSpc>
               <a:spcBef>
                 <a:spcPts val="0"/>
@@ -4941,7 +4935,7 @@
           <a:p>
             <a:pPr algn="l">
               <a:lnSpc>
-                <a:spcPts val="2080"/>
+                <a:spcPct val="125000"/>
               </a:lnSpc>
               <a:spcBef>
                 <a:spcPts val="800"/>
@@ -4963,7 +4957,7 @@
           <a:p>
             <a:pPr algn="l">
               <a:lnSpc>
-                <a:spcPts val="1820"/>
+                <a:spcPct val="125000"/>
               </a:lnSpc>
               <a:spcBef>
                 <a:spcPts val="200"/>
@@ -4985,7 +4979,7 @@
           <a:p>
             <a:pPr algn="l">
               <a:lnSpc>
-                <a:spcPts val="2080"/>
+                <a:spcPct val="125000"/>
               </a:lnSpc>
               <a:spcBef>
                 <a:spcPts val="800"/>
@@ -5007,7 +5001,7 @@
           <a:p>
             <a:pPr algn="l">
               <a:lnSpc>
-                <a:spcPts val="1820"/>
+                <a:spcPct val="125000"/>
               </a:lnSpc>
               <a:spcBef>
                 <a:spcPts val="200"/>
@@ -5029,7 +5023,7 @@
           <a:p>
             <a:pPr algn="l">
               <a:lnSpc>
-                <a:spcPts val="2080"/>
+                <a:spcPct val="125000"/>
               </a:lnSpc>
               <a:spcBef>
                 <a:spcPts val="800"/>
@@ -5051,7 +5045,7 @@
           <a:p>
             <a:pPr algn="l">
               <a:lnSpc>
-                <a:spcPts val="1820"/>
+                <a:spcPct val="125000"/>
               </a:lnSpc>
               <a:spcBef>
                 <a:spcPts val="200"/>
@@ -5073,7 +5067,7 @@
           <a:p>
             <a:pPr algn="l">
               <a:lnSpc>
-                <a:spcPts val="2080"/>
+                <a:spcPct val="125000"/>
               </a:lnSpc>
               <a:spcBef>
                 <a:spcPts val="800"/>
@@ -5095,7 +5089,7 @@
           <a:p>
             <a:pPr algn="l">
               <a:lnSpc>
-                <a:spcPts val="1820"/>
+                <a:spcPct val="125000"/>
               </a:lnSpc>
               <a:spcBef>
                 <a:spcPts val="200"/>
@@ -5206,11 +5200,10 @@
             <a:spAutoFit/>
           </a:bodyPr>
           <a:lstStyle/>
-          <a:p/>
-          <a:p>
-            <a:pPr algn="l">
-              <a:lnSpc>
-                <a:spcPts val="2080"/>
+          <a:p>
+            <a:pPr algn="l">
+              <a:lnSpc>
+                <a:spcPct val="125000"/>
               </a:lnSpc>
               <a:spcBef>
                 <a:spcPts val="0"/>
@@ -5232,7 +5225,7 @@
           <a:p>
             <a:pPr algn="l">
               <a:lnSpc>
-                <a:spcPts val="2080"/>
+                <a:spcPct val="125000"/>
               </a:lnSpc>
               <a:spcBef>
                 <a:spcPts val="800"/>
@@ -5254,7 +5247,7 @@
           <a:p>
             <a:pPr algn="l">
               <a:lnSpc>
-                <a:spcPts val="1820"/>
+                <a:spcPct val="125000"/>
               </a:lnSpc>
               <a:spcBef>
                 <a:spcPts val="200"/>
@@ -5276,7 +5269,7 @@
           <a:p>
             <a:pPr algn="l">
               <a:lnSpc>
-                <a:spcPts val="2080"/>
+                <a:spcPct val="125000"/>
               </a:lnSpc>
               <a:spcBef>
                 <a:spcPts val="800"/>
@@ -5298,7 +5291,7 @@
           <a:p>
             <a:pPr algn="l">
               <a:lnSpc>
-                <a:spcPts val="1820"/>
+                <a:spcPct val="125000"/>
               </a:lnSpc>
               <a:spcBef>
                 <a:spcPts val="200"/>
@@ -5320,7 +5313,7 @@
           <a:p>
             <a:pPr algn="l">
               <a:lnSpc>
-                <a:spcPts val="1820"/>
+                <a:spcPct val="125000"/>
               </a:lnSpc>
               <a:spcBef>
                 <a:spcPts val="200"/>
@@ -5342,7 +5335,7 @@
           <a:p>
             <a:pPr algn="l">
               <a:lnSpc>
-                <a:spcPts val="2080"/>
+                <a:spcPct val="125000"/>
               </a:lnSpc>
               <a:spcBef>
                 <a:spcPts val="800"/>
@@ -5364,7 +5357,7 @@
           <a:p>
             <a:pPr algn="l">
               <a:lnSpc>
-                <a:spcPts val="1820"/>
+                <a:spcPct val="125000"/>
               </a:lnSpc>
               <a:spcBef>
                 <a:spcPts val="200"/>
@@ -5386,7 +5379,7 @@
           <a:p>
             <a:pPr algn="l">
               <a:lnSpc>
-                <a:spcPts val="2080"/>
+                <a:spcPct val="125000"/>
               </a:lnSpc>
               <a:spcBef>
                 <a:spcPts val="800"/>
@@ -5408,7 +5401,7 @@
           <a:p>
             <a:pPr algn="l">
               <a:lnSpc>
-                <a:spcPts val="1820"/>
+                <a:spcPct val="125000"/>
               </a:lnSpc>
               <a:spcBef>
                 <a:spcPts val="200"/>
@@ -5519,11 +5512,10 @@
             <a:spAutoFit/>
           </a:bodyPr>
           <a:lstStyle/>
-          <a:p/>
-          <a:p>
-            <a:pPr algn="l">
-              <a:lnSpc>
-                <a:spcPts val="2080"/>
+          <a:p>
+            <a:pPr algn="l">
+              <a:lnSpc>
+                <a:spcPct val="125000"/>
               </a:lnSpc>
               <a:spcBef>
                 <a:spcPts val="0"/>
@@ -5545,7 +5537,7 @@
           <a:p>
             <a:pPr algn="l">
               <a:lnSpc>
-                <a:spcPts val="2080"/>
+                <a:spcPct val="125000"/>
               </a:lnSpc>
               <a:spcBef>
                 <a:spcPts val="800"/>
@@ -5567,7 +5559,7 @@
           <a:p>
             <a:pPr algn="l">
               <a:lnSpc>
-                <a:spcPts val="1820"/>
+                <a:spcPct val="125000"/>
               </a:lnSpc>
               <a:spcBef>
                 <a:spcPts val="200"/>
@@ -5589,7 +5581,7 @@
           <a:p>
             <a:pPr algn="l">
               <a:lnSpc>
-                <a:spcPts val="2080"/>
+                <a:spcPct val="125000"/>
               </a:lnSpc>
               <a:spcBef>
                 <a:spcPts val="800"/>
@@ -5611,7 +5603,7 @@
           <a:p>
             <a:pPr algn="l">
               <a:lnSpc>
-                <a:spcPts val="1820"/>
+                <a:spcPct val="125000"/>
               </a:lnSpc>
               <a:spcBef>
                 <a:spcPts val="200"/>
@@ -5633,7 +5625,7 @@
           <a:p>
             <a:pPr algn="l">
               <a:lnSpc>
-                <a:spcPts val="1820"/>
+                <a:spcPct val="125000"/>
               </a:lnSpc>
               <a:spcBef>
                 <a:spcPts val="200"/>
@@ -5655,7 +5647,7 @@
           <a:p>
             <a:pPr algn="l">
               <a:lnSpc>
-                <a:spcPts val="1820"/>
+                <a:spcPct val="125000"/>
               </a:lnSpc>
               <a:spcBef>
                 <a:spcPts val="200"/>
@@ -5677,7 +5669,7 @@
           <a:p>
             <a:pPr algn="l">
               <a:lnSpc>
-                <a:spcPts val="2080"/>
+                <a:spcPct val="125000"/>
               </a:lnSpc>
               <a:spcBef>
                 <a:spcPts val="800"/>
@@ -5699,7 +5691,7 @@
           <a:p>
             <a:pPr algn="l">
               <a:lnSpc>
-                <a:spcPts val="1820"/>
+                <a:spcPct val="125000"/>
               </a:lnSpc>
               <a:spcBef>
                 <a:spcPts val="200"/>
@@ -5721,7 +5713,7 @@
           <a:p>
             <a:pPr algn="l">
               <a:lnSpc>
-                <a:spcPts val="2080"/>
+                <a:spcPct val="125000"/>
               </a:lnSpc>
               <a:spcBef>
                 <a:spcPts val="800"/>
@@ -5743,7 +5735,7 @@
           <a:p>
             <a:pPr algn="l">
               <a:lnSpc>
-                <a:spcPts val="1820"/>
+                <a:spcPct val="125000"/>
               </a:lnSpc>
               <a:spcBef>
                 <a:spcPts val="200"/>
@@ -5854,11 +5846,10 @@
             <a:spAutoFit/>
           </a:bodyPr>
           <a:lstStyle/>
-          <a:p/>
-          <a:p>
-            <a:pPr algn="l">
-              <a:lnSpc>
-                <a:spcPts val="2080"/>
+          <a:p>
+            <a:pPr algn="l">
+              <a:lnSpc>
+                <a:spcPct val="125000"/>
               </a:lnSpc>
               <a:spcBef>
                 <a:spcPts val="0"/>
@@ -5880,7 +5871,7 @@
           <a:p>
             <a:pPr algn="l">
               <a:lnSpc>
-                <a:spcPts val="2080"/>
+                <a:spcPct val="125000"/>
               </a:lnSpc>
               <a:spcBef>
                 <a:spcPts val="800"/>
@@ -5902,7 +5893,7 @@
           <a:p>
             <a:pPr algn="l">
               <a:lnSpc>
-                <a:spcPts val="1820"/>
+                <a:spcPct val="125000"/>
               </a:lnSpc>
               <a:spcBef>
                 <a:spcPts val="200"/>
@@ -5924,7 +5915,7 @@
           <a:p>
             <a:pPr algn="l">
               <a:lnSpc>
-                <a:spcPts val="2080"/>
+                <a:spcPct val="125000"/>
               </a:lnSpc>
               <a:spcBef>
                 <a:spcPts val="800"/>
@@ -5946,7 +5937,7 @@
           <a:p>
             <a:pPr algn="l">
               <a:lnSpc>
-                <a:spcPts val="1820"/>
+                <a:spcPct val="125000"/>
               </a:lnSpc>
               <a:spcBef>
                 <a:spcPts val="200"/>
@@ -5968,7 +5959,7 @@
           <a:p>
             <a:pPr algn="l">
               <a:lnSpc>
-                <a:spcPts val="1820"/>
+                <a:spcPct val="125000"/>
               </a:lnSpc>
               <a:spcBef>
                 <a:spcPts val="200"/>
@@ -5990,7 +5981,7 @@
           <a:p>
             <a:pPr algn="l">
               <a:lnSpc>
-                <a:spcPts val="2080"/>
+                <a:spcPct val="125000"/>
               </a:lnSpc>
               <a:spcBef>
                 <a:spcPts val="800"/>
@@ -6012,7 +6003,7 @@
           <a:p>
             <a:pPr algn="l">
               <a:lnSpc>
-                <a:spcPts val="1820"/>
+                <a:spcPct val="125000"/>
               </a:lnSpc>
               <a:spcBef>
                 <a:spcPts val="200"/>
@@ -6034,7 +6025,7 @@
           <a:p>
             <a:pPr algn="l">
               <a:lnSpc>
-                <a:spcPts val="2080"/>
+                <a:spcPct val="125000"/>
               </a:lnSpc>
               <a:spcBef>
                 <a:spcPts val="800"/>
@@ -6056,7 +6047,7 @@
           <a:p>
             <a:pPr algn="l">
               <a:lnSpc>
-                <a:spcPts val="1820"/>
+                <a:spcPct val="125000"/>
               </a:lnSpc>
               <a:spcBef>
                 <a:spcPts val="200"/>
@@ -6167,11 +6158,10 @@
             <a:spAutoFit/>
           </a:bodyPr>
           <a:lstStyle/>
-          <a:p/>
-          <a:p>
-            <a:pPr algn="l">
-              <a:lnSpc>
-                <a:spcPts val="2080"/>
+          <a:p>
+            <a:pPr algn="l">
+              <a:lnSpc>
+                <a:spcPct val="125000"/>
               </a:lnSpc>
               <a:spcBef>
                 <a:spcPts val="0"/>
@@ -6193,7 +6183,7 @@
           <a:p>
             <a:pPr algn="l">
               <a:lnSpc>
-                <a:spcPts val="2080"/>
+                <a:spcPct val="125000"/>
               </a:lnSpc>
               <a:spcBef>
                 <a:spcPts val="800"/>
@@ -6215,7 +6205,7 @@
           <a:p>
             <a:pPr algn="l">
               <a:lnSpc>
-                <a:spcPts val="1820"/>
+                <a:spcPct val="125000"/>
               </a:lnSpc>
               <a:spcBef>
                 <a:spcPts val="200"/>
@@ -6237,7 +6227,7 @@
           <a:p>
             <a:pPr algn="l">
               <a:lnSpc>
-                <a:spcPts val="2080"/>
+                <a:spcPct val="125000"/>
               </a:lnSpc>
               <a:spcBef>
                 <a:spcPts val="800"/>
@@ -6259,7 +6249,7 @@
           <a:p>
             <a:pPr algn="l">
               <a:lnSpc>
-                <a:spcPts val="1820"/>
+                <a:spcPct val="125000"/>
               </a:lnSpc>
               <a:spcBef>
                 <a:spcPts val="200"/>
@@ -6281,7 +6271,7 @@
           <a:p>
             <a:pPr algn="l">
               <a:lnSpc>
-                <a:spcPts val="1820"/>
+                <a:spcPct val="125000"/>
               </a:lnSpc>
               <a:spcBef>
                 <a:spcPts val="200"/>
@@ -6303,7 +6293,7 @@
           <a:p>
             <a:pPr algn="l">
               <a:lnSpc>
-                <a:spcPts val="2080"/>
+                <a:spcPct val="125000"/>
               </a:lnSpc>
               <a:spcBef>
                 <a:spcPts val="800"/>
@@ -6325,7 +6315,7 @@
           <a:p>
             <a:pPr algn="l">
               <a:lnSpc>
-                <a:spcPts val="1820"/>
+                <a:spcPct val="125000"/>
               </a:lnSpc>
               <a:spcBef>
                 <a:spcPts val="200"/>
@@ -6347,7 +6337,7 @@
           <a:p>
             <a:pPr algn="l">
               <a:lnSpc>
-                <a:spcPts val="2080"/>
+                <a:spcPct val="125000"/>
               </a:lnSpc>
               <a:spcBef>
                 <a:spcPts val="800"/>
@@ -6369,7 +6359,7 @@
           <a:p>
             <a:pPr algn="l">
               <a:lnSpc>
-                <a:spcPts val="1820"/>
+                <a:spcPct val="125000"/>
               </a:lnSpc>
               <a:spcBef>
                 <a:spcPts val="200"/>
@@ -6480,11 +6470,10 @@
             <a:spAutoFit/>
           </a:bodyPr>
           <a:lstStyle/>
-          <a:p/>
-          <a:p>
-            <a:pPr algn="l">
-              <a:lnSpc>
-                <a:spcPts val="2080"/>
+          <a:p>
+            <a:pPr algn="l">
+              <a:lnSpc>
+                <a:spcPct val="125000"/>
               </a:lnSpc>
               <a:spcBef>
                 <a:spcPts val="0"/>
@@ -6506,7 +6495,7 @@
           <a:p>
             <a:pPr algn="l">
               <a:lnSpc>
-                <a:spcPts val="2080"/>
+                <a:spcPct val="125000"/>
               </a:lnSpc>
               <a:spcBef>
                 <a:spcPts val="800"/>
@@ -6528,7 +6517,7 @@
           <a:p>
             <a:pPr algn="l">
               <a:lnSpc>
-                <a:spcPts val="1820"/>
+                <a:spcPct val="125000"/>
               </a:lnSpc>
               <a:spcBef>
                 <a:spcPts val="200"/>
@@ -6550,7 +6539,7 @@
           <a:p>
             <a:pPr algn="l">
               <a:lnSpc>
-                <a:spcPts val="2080"/>
+                <a:spcPct val="125000"/>
               </a:lnSpc>
               <a:spcBef>
                 <a:spcPts val="800"/>
@@ -6572,7 +6561,7 @@
           <a:p>
             <a:pPr algn="l">
               <a:lnSpc>
-                <a:spcPts val="1820"/>
+                <a:spcPct val="125000"/>
               </a:lnSpc>
               <a:spcBef>
                 <a:spcPts val="200"/>
@@ -6594,7 +6583,7 @@
           <a:p>
             <a:pPr algn="l">
               <a:lnSpc>
-                <a:spcPts val="1820"/>
+                <a:spcPct val="125000"/>
               </a:lnSpc>
               <a:spcBef>
                 <a:spcPts val="200"/>
@@ -6616,7 +6605,7 @@
           <a:p>
             <a:pPr algn="l">
               <a:lnSpc>
-                <a:spcPts val="1820"/>
+                <a:spcPct val="125000"/>
               </a:lnSpc>
               <a:spcBef>
                 <a:spcPts val="200"/>
@@ -6638,7 +6627,7 @@
           <a:p>
             <a:pPr algn="l">
               <a:lnSpc>
-                <a:spcPts val="1820"/>
+                <a:spcPct val="125000"/>
               </a:lnSpc>
               <a:spcBef>
                 <a:spcPts val="200"/>
@@ -6660,7 +6649,7 @@
           <a:p>
             <a:pPr algn="l">
               <a:lnSpc>
-                <a:spcPts val="1820"/>
+                <a:spcPct val="125000"/>
               </a:lnSpc>
               <a:spcBef>
                 <a:spcPts val="200"/>
@@ -6682,7 +6671,7 @@
           <a:p>
             <a:pPr algn="l">
               <a:lnSpc>
-                <a:spcPts val="2080"/>
+                <a:spcPct val="125000"/>
               </a:lnSpc>
               <a:spcBef>
                 <a:spcPts val="800"/>
@@ -6704,7 +6693,7 @@
           <a:p>
             <a:pPr algn="l">
               <a:lnSpc>
-                <a:spcPts val="1820"/>
+                <a:spcPct val="125000"/>
               </a:lnSpc>
               <a:spcBef>
                 <a:spcPts val="200"/>
@@ -6726,7 +6715,7 @@
           <a:p>
             <a:pPr algn="l">
               <a:lnSpc>
-                <a:spcPts val="2080"/>
+                <a:spcPct val="125000"/>
               </a:lnSpc>
               <a:spcBef>
                 <a:spcPts val="800"/>
@@ -6748,7 +6737,7 @@
           <a:p>
             <a:pPr algn="l">
               <a:lnSpc>
-                <a:spcPts val="1820"/>
+                <a:spcPct val="125000"/>
               </a:lnSpc>
               <a:spcBef>
                 <a:spcPts val="200"/>
@@ -6859,11 +6848,10 @@
             <a:spAutoFit/>
           </a:bodyPr>
           <a:lstStyle/>
-          <a:p/>
-          <a:p>
-            <a:pPr algn="l">
-              <a:lnSpc>
-                <a:spcPts val="2080"/>
+          <a:p>
+            <a:pPr algn="l">
+              <a:lnSpc>
+                <a:spcPct val="125000"/>
               </a:lnSpc>
               <a:spcBef>
                 <a:spcPts val="0"/>
@@ -6885,7 +6873,7 @@
           <a:p>
             <a:pPr algn="l">
               <a:lnSpc>
-                <a:spcPts val="2080"/>
+                <a:spcPct val="125000"/>
               </a:lnSpc>
               <a:spcBef>
                 <a:spcPts val="800"/>
@@ -6907,7 +6895,7 @@
           <a:p>
             <a:pPr algn="l">
               <a:lnSpc>
-                <a:spcPts val="1820"/>
+                <a:spcPct val="125000"/>
               </a:lnSpc>
               <a:spcBef>
                 <a:spcPts val="200"/>
@@ -6929,7 +6917,7 @@
           <a:p>
             <a:pPr algn="l">
               <a:lnSpc>
-                <a:spcPts val="2080"/>
+                <a:spcPct val="125000"/>
               </a:lnSpc>
               <a:spcBef>
                 <a:spcPts val="800"/>
@@ -6951,7 +6939,7 @@
           <a:p>
             <a:pPr algn="l">
               <a:lnSpc>
-                <a:spcPts val="1820"/>
+                <a:spcPct val="125000"/>
               </a:lnSpc>
               <a:spcBef>
                 <a:spcPts val="200"/>
@@ -6973,7 +6961,7 @@
           <a:p>
             <a:pPr algn="l">
               <a:lnSpc>
-                <a:spcPts val="1820"/>
+                <a:spcPct val="125000"/>
               </a:lnSpc>
               <a:spcBef>
                 <a:spcPts val="200"/>
@@ -6995,7 +6983,7 @@
           <a:p>
             <a:pPr algn="l">
               <a:lnSpc>
-                <a:spcPts val="2080"/>
+                <a:spcPct val="125000"/>
               </a:lnSpc>
               <a:spcBef>
                 <a:spcPts val="800"/>
@@ -7017,7 +7005,7 @@
           <a:p>
             <a:pPr algn="l">
               <a:lnSpc>
-                <a:spcPts val="1820"/>
+                <a:spcPct val="125000"/>
               </a:lnSpc>
               <a:spcBef>
                 <a:spcPts val="200"/>
@@ -7039,7 +7027,7 @@
           <a:p>
             <a:pPr algn="l">
               <a:lnSpc>
-                <a:spcPts val="2080"/>
+                <a:spcPct val="125000"/>
               </a:lnSpc>
               <a:spcBef>
                 <a:spcPts val="800"/>
@@ -7061,7 +7049,7 @@
           <a:p>
             <a:pPr algn="l">
               <a:lnSpc>
-                <a:spcPts val="1820"/>
+                <a:spcPct val="125000"/>
               </a:lnSpc>
               <a:spcBef>
                 <a:spcPts val="200"/>
@@ -7172,11 +7160,10 @@
             <a:spAutoFit/>
           </a:bodyPr>
           <a:lstStyle/>
-          <a:p/>
-          <a:p>
-            <a:pPr algn="l">
-              <a:lnSpc>
-                <a:spcPts val="2080"/>
+          <a:p>
+            <a:pPr algn="l">
+              <a:lnSpc>
+                <a:spcPct val="125000"/>
               </a:lnSpc>
               <a:spcBef>
                 <a:spcPts val="0"/>
@@ -7198,7 +7185,7 @@
           <a:p>
             <a:pPr algn="l">
               <a:lnSpc>
-                <a:spcPts val="2080"/>
+                <a:spcPct val="125000"/>
               </a:lnSpc>
               <a:spcBef>
                 <a:spcPts val="800"/>
@@ -7220,7 +7207,7 @@
           <a:p>
             <a:pPr algn="l">
               <a:lnSpc>
-                <a:spcPts val="1820"/>
+                <a:spcPct val="125000"/>
               </a:lnSpc>
               <a:spcBef>
                 <a:spcPts val="200"/>
@@ -7242,7 +7229,7 @@
           <a:p>
             <a:pPr algn="l">
               <a:lnSpc>
-                <a:spcPts val="2080"/>
+                <a:spcPct val="125000"/>
               </a:lnSpc>
               <a:spcBef>
                 <a:spcPts val="800"/>
@@ -7264,7 +7251,7 @@
           <a:p>
             <a:pPr algn="l">
               <a:lnSpc>
-                <a:spcPts val="1820"/>
+                <a:spcPct val="125000"/>
               </a:lnSpc>
               <a:spcBef>
                 <a:spcPts val="200"/>
@@ -7286,7 +7273,7 @@
           <a:p>
             <a:pPr algn="l">
               <a:lnSpc>
-                <a:spcPts val="1820"/>
+                <a:spcPct val="125000"/>
               </a:lnSpc>
               <a:spcBef>
                 <a:spcPts val="200"/>
@@ -7308,7 +7295,7 @@
           <a:p>
             <a:pPr algn="l">
               <a:lnSpc>
-                <a:spcPts val="2080"/>
+                <a:spcPct val="125000"/>
               </a:lnSpc>
               <a:spcBef>
                 <a:spcPts val="800"/>
@@ -7330,7 +7317,7 @@
           <a:p>
             <a:pPr algn="l">
               <a:lnSpc>
-                <a:spcPts val="1820"/>
+                <a:spcPct val="125000"/>
               </a:lnSpc>
               <a:spcBef>
                 <a:spcPts val="200"/>
@@ -7352,7 +7339,7 @@
           <a:p>
             <a:pPr algn="l">
               <a:lnSpc>
-                <a:spcPts val="2080"/>
+                <a:spcPct val="125000"/>
               </a:lnSpc>
               <a:spcBef>
                 <a:spcPts val="800"/>
@@ -7374,7 +7361,7 @@
           <a:p>
             <a:pPr algn="l">
               <a:lnSpc>
-                <a:spcPts val="1820"/>
+                <a:spcPct val="125000"/>
               </a:lnSpc>
               <a:spcBef>
                 <a:spcPts val="200"/>
@@ -7485,11 +7472,10 @@
             <a:spAutoFit/>
           </a:bodyPr>
           <a:lstStyle/>
-          <a:p/>
-          <a:p>
-            <a:pPr algn="l">
-              <a:lnSpc>
-                <a:spcPts val="2080"/>
+          <a:p>
+            <a:pPr algn="l">
+              <a:lnSpc>
+                <a:spcPct val="125000"/>
               </a:lnSpc>
               <a:spcBef>
                 <a:spcPts val="0"/>
@@ -7511,7 +7497,7 @@
           <a:p>
             <a:pPr algn="l">
               <a:lnSpc>
-                <a:spcPts val="2080"/>
+                <a:spcPct val="125000"/>
               </a:lnSpc>
               <a:spcBef>
                 <a:spcPts val="800"/>
@@ -7533,7 +7519,7 @@
           <a:p>
             <a:pPr algn="l">
               <a:lnSpc>
-                <a:spcPts val="1820"/>
+                <a:spcPct val="125000"/>
               </a:lnSpc>
               <a:spcBef>
                 <a:spcPts val="200"/>
@@ -7555,7 +7541,7 @@
           <a:p>
             <a:pPr algn="l">
               <a:lnSpc>
-                <a:spcPts val="2080"/>
+                <a:spcPct val="125000"/>
               </a:lnSpc>
               <a:spcBef>
                 <a:spcPts val="800"/>
@@ -7577,7 +7563,7 @@
           <a:p>
             <a:pPr algn="l">
               <a:lnSpc>
-                <a:spcPts val="1820"/>
+                <a:spcPct val="125000"/>
               </a:lnSpc>
               <a:spcBef>
                 <a:spcPts val="200"/>
@@ -7599,7 +7585,7 @@
           <a:p>
             <a:pPr algn="l">
               <a:lnSpc>
-                <a:spcPts val="2080"/>
+                <a:spcPct val="125000"/>
               </a:lnSpc>
               <a:spcBef>
                 <a:spcPts val="800"/>
@@ -7621,7 +7607,7 @@
           <a:p>
             <a:pPr algn="l">
               <a:lnSpc>
-                <a:spcPts val="1820"/>
+                <a:spcPct val="125000"/>
               </a:lnSpc>
               <a:spcBef>
                 <a:spcPts val="200"/>
@@ -7643,7 +7629,7 @@
           <a:p>
             <a:pPr algn="l">
               <a:lnSpc>
-                <a:spcPts val="2080"/>
+                <a:spcPct val="125000"/>
               </a:lnSpc>
               <a:spcBef>
                 <a:spcPts val="800"/>
@@ -7665,7 +7651,7 @@
           <a:p>
             <a:pPr algn="l">
               <a:lnSpc>
-                <a:spcPts val="1820"/>
+                <a:spcPct val="125000"/>
               </a:lnSpc>
               <a:spcBef>
                 <a:spcPts val="200"/>
@@ -7776,11 +7762,10 @@
             <a:spAutoFit/>
           </a:bodyPr>
           <a:lstStyle/>
-          <a:p/>
-          <a:p>
-            <a:pPr algn="l">
-              <a:lnSpc>
-                <a:spcPts val="2080"/>
+          <a:p>
+            <a:pPr algn="l">
+              <a:lnSpc>
+                <a:spcPct val="125000"/>
               </a:lnSpc>
               <a:spcBef>
                 <a:spcPts val="0"/>
@@ -7802,7 +7787,7 @@
           <a:p>
             <a:pPr algn="l">
               <a:lnSpc>
-                <a:spcPts val="2080"/>
+                <a:spcPct val="125000"/>
               </a:lnSpc>
               <a:spcBef>
                 <a:spcPts val="800"/>
@@ -7824,7 +7809,7 @@
           <a:p>
             <a:pPr algn="l">
               <a:lnSpc>
-                <a:spcPts val="1820"/>
+                <a:spcPct val="125000"/>
               </a:lnSpc>
               <a:spcBef>
                 <a:spcPts val="200"/>
@@ -7846,7 +7831,7 @@
           <a:p>
             <a:pPr algn="l">
               <a:lnSpc>
-                <a:spcPts val="2080"/>
+                <a:spcPct val="125000"/>
               </a:lnSpc>
               <a:spcBef>
                 <a:spcPts val="800"/>
@@ -7868,7 +7853,7 @@
           <a:p>
             <a:pPr algn="l">
               <a:lnSpc>
-                <a:spcPts val="1820"/>
+                <a:spcPct val="125000"/>
               </a:lnSpc>
               <a:spcBef>
                 <a:spcPts val="200"/>
@@ -7890,7 +7875,7 @@
           <a:p>
             <a:pPr algn="l">
               <a:lnSpc>
-                <a:spcPts val="1820"/>
+                <a:spcPct val="125000"/>
               </a:lnSpc>
               <a:spcBef>
                 <a:spcPts val="200"/>
@@ -7912,7 +7897,7 @@
           <a:p>
             <a:pPr algn="l">
               <a:lnSpc>
-                <a:spcPts val="1820"/>
+                <a:spcPct val="125000"/>
               </a:lnSpc>
               <a:spcBef>
                 <a:spcPts val="200"/>
@@ -7934,7 +7919,7 @@
           <a:p>
             <a:pPr algn="l">
               <a:lnSpc>
-                <a:spcPts val="1820"/>
+                <a:spcPct val="125000"/>
               </a:lnSpc>
               <a:spcBef>
                 <a:spcPts val="200"/>
@@ -7956,7 +7941,7 @@
           <a:p>
             <a:pPr algn="l">
               <a:lnSpc>
-                <a:spcPts val="2080"/>
+                <a:spcPct val="125000"/>
               </a:lnSpc>
               <a:spcBef>
                 <a:spcPts val="800"/>
@@ -7978,7 +7963,7 @@
           <a:p>
             <a:pPr algn="l">
               <a:lnSpc>
-                <a:spcPts val="1820"/>
+                <a:spcPct val="125000"/>
               </a:lnSpc>
               <a:spcBef>
                 <a:spcPts val="200"/>
@@ -8000,7 +7985,7 @@
           <a:p>
             <a:pPr algn="l">
               <a:lnSpc>
-                <a:spcPts val="2080"/>
+                <a:spcPct val="125000"/>
               </a:lnSpc>
               <a:spcBef>
                 <a:spcPts val="800"/>
@@ -8022,7 +8007,7 @@
           <a:p>
             <a:pPr algn="l">
               <a:lnSpc>
-                <a:spcPts val="1820"/>
+                <a:spcPct val="125000"/>
               </a:lnSpc>
               <a:spcBef>
                 <a:spcPts val="200"/>
@@ -8133,11 +8118,10 @@
             <a:spAutoFit/>
           </a:bodyPr>
           <a:lstStyle/>
-          <a:p/>
-          <a:p>
-            <a:pPr algn="l">
-              <a:lnSpc>
-                <a:spcPts val="2080"/>
+          <a:p>
+            <a:pPr algn="l">
+              <a:lnSpc>
+                <a:spcPct val="125000"/>
               </a:lnSpc>
               <a:spcBef>
                 <a:spcPts val="0"/>
@@ -8159,7 +8143,7 @@
           <a:p>
             <a:pPr algn="l">
               <a:lnSpc>
-                <a:spcPts val="2080"/>
+                <a:spcPct val="125000"/>
               </a:lnSpc>
               <a:spcBef>
                 <a:spcPts val="800"/>
@@ -8181,7 +8165,7 @@
           <a:p>
             <a:pPr algn="l">
               <a:lnSpc>
-                <a:spcPts val="1820"/>
+                <a:spcPct val="125000"/>
               </a:lnSpc>
               <a:spcBef>
                 <a:spcPts val="200"/>
@@ -8203,7 +8187,7 @@
           <a:p>
             <a:pPr algn="l">
               <a:lnSpc>
-                <a:spcPts val="2080"/>
+                <a:spcPct val="125000"/>
               </a:lnSpc>
               <a:spcBef>
                 <a:spcPts val="800"/>
@@ -8225,7 +8209,7 @@
           <a:p>
             <a:pPr algn="l">
               <a:lnSpc>
-                <a:spcPts val="1820"/>
+                <a:spcPct val="125000"/>
               </a:lnSpc>
               <a:spcBef>
                 <a:spcPts val="200"/>
@@ -8247,7 +8231,7 @@
           <a:p>
             <a:pPr algn="l">
               <a:lnSpc>
-                <a:spcPts val="1820"/>
+                <a:spcPct val="125000"/>
               </a:lnSpc>
               <a:spcBef>
                 <a:spcPts val="200"/>
@@ -8269,7 +8253,7 @@
           <a:p>
             <a:pPr algn="l">
               <a:lnSpc>
-                <a:spcPts val="2080"/>
+                <a:spcPct val="125000"/>
               </a:lnSpc>
               <a:spcBef>
                 <a:spcPts val="800"/>
@@ -8291,7 +8275,7 @@
           <a:p>
             <a:pPr algn="l">
               <a:lnSpc>
-                <a:spcPts val="1820"/>
+                <a:spcPct val="125000"/>
               </a:lnSpc>
               <a:spcBef>
                 <a:spcPts val="200"/>
@@ -8313,7 +8297,7 @@
           <a:p>
             <a:pPr algn="l">
               <a:lnSpc>
-                <a:spcPts val="2080"/>
+                <a:spcPct val="125000"/>
               </a:lnSpc>
               <a:spcBef>
                 <a:spcPts val="800"/>
@@ -8335,7 +8319,7 @@
           <a:p>
             <a:pPr algn="l">
               <a:lnSpc>
-                <a:spcPts val="1820"/>
+                <a:spcPct val="125000"/>
               </a:lnSpc>
               <a:spcBef>
                 <a:spcPts val="200"/>
@@ -8446,11 +8430,10 @@
             <a:spAutoFit/>
           </a:bodyPr>
           <a:lstStyle/>
-          <a:p/>
-          <a:p>
-            <a:pPr algn="l">
-              <a:lnSpc>
-                <a:spcPts val="2080"/>
+          <a:p>
+            <a:pPr algn="l">
+              <a:lnSpc>
+                <a:spcPct val="125000"/>
               </a:lnSpc>
               <a:spcBef>
                 <a:spcPts val="0"/>
@@ -8472,7 +8455,7 @@
           <a:p>
             <a:pPr algn="l">
               <a:lnSpc>
-                <a:spcPts val="2080"/>
+                <a:spcPct val="125000"/>
               </a:lnSpc>
               <a:spcBef>
                 <a:spcPts val="800"/>
@@ -8494,7 +8477,7 @@
           <a:p>
             <a:pPr algn="l">
               <a:lnSpc>
-                <a:spcPts val="1820"/>
+                <a:spcPct val="125000"/>
               </a:lnSpc>
               <a:spcBef>
                 <a:spcPts val="200"/>
@@ -8516,7 +8499,7 @@
           <a:p>
             <a:pPr algn="l">
               <a:lnSpc>
-                <a:spcPts val="2080"/>
+                <a:spcPct val="125000"/>
               </a:lnSpc>
               <a:spcBef>
                 <a:spcPts val="800"/>
@@ -8538,7 +8521,7 @@
           <a:p>
             <a:pPr algn="l">
               <a:lnSpc>
-                <a:spcPts val="1820"/>
+                <a:spcPct val="125000"/>
               </a:lnSpc>
               <a:spcBef>
                 <a:spcPts val="200"/>
@@ -8560,7 +8543,7 @@
           <a:p>
             <a:pPr algn="l">
               <a:lnSpc>
-                <a:spcPts val="1820"/>
+                <a:spcPct val="125000"/>
               </a:lnSpc>
               <a:spcBef>
                 <a:spcPts val="200"/>
@@ -8582,7 +8565,7 @@
           <a:p>
             <a:pPr algn="l">
               <a:lnSpc>
-                <a:spcPts val="1820"/>
+                <a:spcPct val="125000"/>
               </a:lnSpc>
               <a:spcBef>
                 <a:spcPts val="200"/>
@@ -8604,7 +8587,7 @@
           <a:p>
             <a:pPr algn="l">
               <a:lnSpc>
-                <a:spcPts val="1820"/>
+                <a:spcPct val="125000"/>
               </a:lnSpc>
               <a:spcBef>
                 <a:spcPts val="200"/>
@@ -8626,7 +8609,7 @@
           <a:p>
             <a:pPr algn="l">
               <a:lnSpc>
-                <a:spcPts val="1820"/>
+                <a:spcPct val="125000"/>
               </a:lnSpc>
               <a:spcBef>
                 <a:spcPts val="200"/>
@@ -8648,7 +8631,7 @@
           <a:p>
             <a:pPr algn="l">
               <a:lnSpc>
-                <a:spcPts val="1820"/>
+                <a:spcPct val="125000"/>
               </a:lnSpc>
               <a:spcBef>
                 <a:spcPts val="200"/>
@@ -8670,7 +8653,7 @@
           <a:p>
             <a:pPr algn="l">
               <a:lnSpc>
-                <a:spcPts val="1820"/>
+                <a:spcPct val="125000"/>
               </a:lnSpc>
               <a:spcBef>
                 <a:spcPts val="200"/>
@@ -8692,7 +8675,7 @@
           <a:p>
             <a:pPr algn="l">
               <a:lnSpc>
-                <a:spcPts val="2080"/>
+                <a:spcPct val="125000"/>
               </a:lnSpc>
               <a:spcBef>
                 <a:spcPts val="800"/>
@@ -8714,7 +8697,7 @@
           <a:p>
             <a:pPr algn="l">
               <a:lnSpc>
-                <a:spcPts val="1820"/>
+                <a:spcPct val="125000"/>
               </a:lnSpc>
               <a:spcBef>
                 <a:spcPts val="200"/>
@@ -8736,7 +8719,7 @@
           <a:p>
             <a:pPr algn="l">
               <a:lnSpc>
-                <a:spcPts val="2080"/>
+                <a:spcPct val="125000"/>
               </a:lnSpc>
               <a:spcBef>
                 <a:spcPts val="800"/>
@@ -8758,7 +8741,7 @@
           <a:p>
             <a:pPr algn="l">
               <a:lnSpc>
-                <a:spcPts val="1820"/>
+                <a:spcPct val="125000"/>
               </a:lnSpc>
               <a:spcBef>
                 <a:spcPts val="200"/>
@@ -8869,11 +8852,10 @@
             <a:spAutoFit/>
           </a:bodyPr>
           <a:lstStyle/>
-          <a:p/>
-          <a:p>
-            <a:pPr algn="l">
-              <a:lnSpc>
-                <a:spcPts val="2080"/>
+          <a:p>
+            <a:pPr algn="l">
+              <a:lnSpc>
+                <a:spcPct val="125000"/>
               </a:lnSpc>
               <a:spcBef>
                 <a:spcPts val="0"/>
@@ -8895,7 +8877,7 @@
           <a:p>
             <a:pPr algn="l">
               <a:lnSpc>
-                <a:spcPts val="2080"/>
+                <a:spcPct val="125000"/>
               </a:lnSpc>
               <a:spcBef>
                 <a:spcPts val="800"/>
@@ -8917,7 +8899,7 @@
           <a:p>
             <a:pPr algn="l">
               <a:lnSpc>
-                <a:spcPts val="1820"/>
+                <a:spcPct val="125000"/>
               </a:lnSpc>
               <a:spcBef>
                 <a:spcPts val="200"/>
@@ -8939,7 +8921,7 @@
           <a:p>
             <a:pPr algn="l">
               <a:lnSpc>
-                <a:spcPts val="2080"/>
+                <a:spcPct val="125000"/>
               </a:lnSpc>
               <a:spcBef>
                 <a:spcPts val="800"/>
@@ -8961,7 +8943,7 @@
           <a:p>
             <a:pPr algn="l">
               <a:lnSpc>
-                <a:spcPts val="1820"/>
+                <a:spcPct val="125000"/>
               </a:lnSpc>
               <a:spcBef>
                 <a:spcPts val="200"/>
@@ -8983,7 +8965,7 @@
           <a:p>
             <a:pPr algn="l">
               <a:lnSpc>
-                <a:spcPts val="1820"/>
+                <a:spcPct val="125000"/>
               </a:lnSpc>
               <a:spcBef>
                 <a:spcPts val="200"/>
@@ -9005,7 +8987,7 @@
           <a:p>
             <a:pPr algn="l">
               <a:lnSpc>
-                <a:spcPts val="2080"/>
+                <a:spcPct val="125000"/>
               </a:lnSpc>
               <a:spcBef>
                 <a:spcPts val="800"/>
@@ -9027,7 +9009,7 @@
           <a:p>
             <a:pPr algn="l">
               <a:lnSpc>
-                <a:spcPts val="1820"/>
+                <a:spcPct val="125000"/>
               </a:lnSpc>
               <a:spcBef>
                 <a:spcPts val="200"/>
@@ -9049,7 +9031,7 @@
           <a:p>
             <a:pPr algn="l">
               <a:lnSpc>
-                <a:spcPts val="2080"/>
+                <a:spcPct val="125000"/>
               </a:lnSpc>
               <a:spcBef>
                 <a:spcPts val="800"/>
@@ -9071,7 +9053,7 @@
           <a:p>
             <a:pPr algn="l">
               <a:lnSpc>
-                <a:spcPts val="1820"/>
+                <a:spcPct val="125000"/>
               </a:lnSpc>
               <a:spcBef>
                 <a:spcPts val="200"/>
@@ -9182,11 +9164,10 @@
             <a:spAutoFit/>
           </a:bodyPr>
           <a:lstStyle/>
-          <a:p/>
-          <a:p>
-            <a:pPr algn="l">
-              <a:lnSpc>
-                <a:spcPts val="2080"/>
+          <a:p>
+            <a:pPr algn="l">
+              <a:lnSpc>
+                <a:spcPct val="125000"/>
               </a:lnSpc>
               <a:spcBef>
                 <a:spcPts val="0"/>
@@ -9208,7 +9189,7 @@
           <a:p>
             <a:pPr algn="l">
               <a:lnSpc>
-                <a:spcPts val="2080"/>
+                <a:spcPct val="125000"/>
               </a:lnSpc>
               <a:spcBef>
                 <a:spcPts val="800"/>
@@ -9230,7 +9211,7 @@
           <a:p>
             <a:pPr algn="l">
               <a:lnSpc>
-                <a:spcPts val="1820"/>
+                <a:spcPct val="125000"/>
               </a:lnSpc>
               <a:spcBef>
                 <a:spcPts val="200"/>
@@ -9252,7 +9233,7 @@
           <a:p>
             <a:pPr algn="l">
               <a:lnSpc>
-                <a:spcPts val="2080"/>
+                <a:spcPct val="125000"/>
               </a:lnSpc>
               <a:spcBef>
                 <a:spcPts val="800"/>
@@ -9274,7 +9255,7 @@
           <a:p>
             <a:pPr algn="l">
               <a:lnSpc>
-                <a:spcPts val="1820"/>
+                <a:spcPct val="125000"/>
               </a:lnSpc>
               <a:spcBef>
                 <a:spcPts val="200"/>
@@ -9296,7 +9277,7 @@
           <a:p>
             <a:pPr algn="l">
               <a:lnSpc>
-                <a:spcPts val="2080"/>
+                <a:spcPct val="125000"/>
               </a:lnSpc>
               <a:spcBef>
                 <a:spcPts val="800"/>
@@ -9318,7 +9299,7 @@
           <a:p>
             <a:pPr algn="l">
               <a:lnSpc>
-                <a:spcPts val="1820"/>
+                <a:spcPct val="125000"/>
               </a:lnSpc>
               <a:spcBef>
                 <a:spcPts val="200"/>
@@ -9340,7 +9321,7 @@
           <a:p>
             <a:pPr algn="l">
               <a:lnSpc>
-                <a:spcPts val="2080"/>
+                <a:spcPct val="125000"/>
               </a:lnSpc>
               <a:spcBef>
                 <a:spcPts val="800"/>
@@ -9362,7 +9343,7 @@
           <a:p>
             <a:pPr algn="l">
               <a:lnSpc>
-                <a:spcPts val="1820"/>
+                <a:spcPct val="125000"/>
               </a:lnSpc>
               <a:spcBef>
                 <a:spcPts val="200"/>
@@ -9473,11 +9454,10 @@
             <a:spAutoFit/>
           </a:bodyPr>
           <a:lstStyle/>
-          <a:p/>
-          <a:p>
-            <a:pPr algn="l">
-              <a:lnSpc>
-                <a:spcPts val="2080"/>
+          <a:p>
+            <a:pPr algn="l">
+              <a:lnSpc>
+                <a:spcPct val="125000"/>
               </a:lnSpc>
               <a:spcBef>
                 <a:spcPts val="0"/>
@@ -9499,7 +9479,7 @@
           <a:p>
             <a:pPr algn="l">
               <a:lnSpc>
-                <a:spcPts val="2080"/>
+                <a:spcPct val="125000"/>
               </a:lnSpc>
               <a:spcBef>
                 <a:spcPts val="800"/>
@@ -9521,7 +9501,7 @@
           <a:p>
             <a:pPr algn="l">
               <a:lnSpc>
-                <a:spcPts val="1820"/>
+                <a:spcPct val="125000"/>
               </a:lnSpc>
               <a:spcBef>
                 <a:spcPts val="200"/>
@@ -9543,7 +9523,7 @@
           <a:p>
             <a:pPr algn="l">
               <a:lnSpc>
-                <a:spcPts val="2080"/>
+                <a:spcPct val="125000"/>
               </a:lnSpc>
               <a:spcBef>
                 <a:spcPts val="800"/>
@@ -9565,7 +9545,7 @@
           <a:p>
             <a:pPr algn="l">
               <a:lnSpc>
-                <a:spcPts val="1820"/>
+                <a:spcPct val="125000"/>
               </a:lnSpc>
               <a:spcBef>
                 <a:spcPts val="200"/>
@@ -9587,7 +9567,7 @@
           <a:p>
             <a:pPr algn="l">
               <a:lnSpc>
-                <a:spcPts val="1820"/>
+                <a:spcPct val="125000"/>
               </a:lnSpc>
               <a:spcBef>
                 <a:spcPts val="200"/>
@@ -9609,7 +9589,7 @@
           <a:p>
             <a:pPr algn="l">
               <a:lnSpc>
-                <a:spcPts val="2080"/>
+                <a:spcPct val="125000"/>
               </a:lnSpc>
               <a:spcBef>
                 <a:spcPts val="800"/>
@@ -9631,7 +9611,7 @@
           <a:p>
             <a:pPr algn="l">
               <a:lnSpc>
-                <a:spcPts val="1820"/>
+                <a:spcPct val="125000"/>
               </a:lnSpc>
               <a:spcBef>
                 <a:spcPts val="200"/>
@@ -9653,7 +9633,7 @@
           <a:p>
             <a:pPr algn="l">
               <a:lnSpc>
-                <a:spcPts val="2080"/>
+                <a:spcPct val="125000"/>
               </a:lnSpc>
               <a:spcBef>
                 <a:spcPts val="800"/>
@@ -9675,7 +9655,7 @@
           <a:p>
             <a:pPr algn="l">
               <a:lnSpc>
-                <a:spcPts val="1820"/>
+                <a:spcPct val="125000"/>
               </a:lnSpc>
               <a:spcBef>
                 <a:spcPts val="200"/>
@@ -9786,11 +9766,10 @@
             <a:spAutoFit/>
           </a:bodyPr>
           <a:lstStyle/>
-          <a:p/>
-          <a:p>
-            <a:pPr algn="l">
-              <a:lnSpc>
-                <a:spcPts val="2080"/>
+          <a:p>
+            <a:pPr algn="l">
+              <a:lnSpc>
+                <a:spcPct val="125000"/>
               </a:lnSpc>
               <a:spcBef>
                 <a:spcPts val="0"/>
@@ -9812,7 +9791,7 @@
           <a:p>
             <a:pPr algn="l">
               <a:lnSpc>
-                <a:spcPts val="2080"/>
+                <a:spcPct val="125000"/>
               </a:lnSpc>
               <a:spcBef>
                 <a:spcPts val="800"/>
@@ -9834,7 +9813,7 @@
           <a:p>
             <a:pPr algn="l">
               <a:lnSpc>
-                <a:spcPts val="1820"/>
+                <a:spcPct val="125000"/>
               </a:lnSpc>
               <a:spcBef>
                 <a:spcPts val="200"/>
@@ -9856,7 +9835,7 @@
           <a:p>
             <a:pPr algn="l">
               <a:lnSpc>
-                <a:spcPts val="2080"/>
+                <a:spcPct val="125000"/>
               </a:lnSpc>
               <a:spcBef>
                 <a:spcPts val="800"/>
@@ -9878,7 +9857,7 @@
           <a:p>
             <a:pPr algn="l">
               <a:lnSpc>
-                <a:spcPts val="1820"/>
+                <a:spcPct val="125000"/>
               </a:lnSpc>
               <a:spcBef>
                 <a:spcPts val="200"/>
@@ -9900,7 +9879,7 @@
           <a:p>
             <a:pPr algn="l">
               <a:lnSpc>
-                <a:spcPts val="1820"/>
+                <a:spcPct val="125000"/>
               </a:lnSpc>
               <a:spcBef>
                 <a:spcPts val="200"/>
@@ -9922,7 +9901,7 @@
           <a:p>
             <a:pPr algn="l">
               <a:lnSpc>
-                <a:spcPts val="2080"/>
+                <a:spcPct val="125000"/>
               </a:lnSpc>
               <a:spcBef>
                 <a:spcPts val="800"/>
@@ -9944,7 +9923,7 @@
           <a:p>
             <a:pPr algn="l">
               <a:lnSpc>
-                <a:spcPts val="1820"/>
+                <a:spcPct val="125000"/>
               </a:lnSpc>
               <a:spcBef>
                 <a:spcPts val="200"/>
@@ -9966,7 +9945,7 @@
           <a:p>
             <a:pPr algn="l">
               <a:lnSpc>
-                <a:spcPts val="2080"/>
+                <a:spcPct val="125000"/>
               </a:lnSpc>
               <a:spcBef>
                 <a:spcPts val="800"/>
@@ -9988,7 +9967,7 @@
           <a:p>
             <a:pPr algn="l">
               <a:lnSpc>
-                <a:spcPts val="1820"/>
+                <a:spcPct val="125000"/>
               </a:lnSpc>
               <a:spcBef>
                 <a:spcPts val="200"/>
@@ -10099,11 +10078,10 @@
             <a:spAutoFit/>
           </a:bodyPr>
           <a:lstStyle/>
-          <a:p/>
-          <a:p>
-            <a:pPr algn="l">
-              <a:lnSpc>
-                <a:spcPts val="2080"/>
+          <a:p>
+            <a:pPr algn="l">
+              <a:lnSpc>
+                <a:spcPct val="125000"/>
               </a:lnSpc>
               <a:spcBef>
                 <a:spcPts val="0"/>
@@ -10125,7 +10103,7 @@
           <a:p>
             <a:pPr algn="l">
               <a:lnSpc>
-                <a:spcPts val="2080"/>
+                <a:spcPct val="125000"/>
               </a:lnSpc>
               <a:spcBef>
                 <a:spcPts val="800"/>
@@ -10147,7 +10125,7 @@
           <a:p>
             <a:pPr algn="l">
               <a:lnSpc>
-                <a:spcPts val="1820"/>
+                <a:spcPct val="125000"/>
               </a:lnSpc>
               <a:spcBef>
                 <a:spcPts val="200"/>
@@ -10169,7 +10147,7 @@
           <a:p>
             <a:pPr algn="l">
               <a:lnSpc>
-                <a:spcPts val="2080"/>
+                <a:spcPct val="125000"/>
               </a:lnSpc>
               <a:spcBef>
                 <a:spcPts val="800"/>
@@ -10191,7 +10169,7 @@
           <a:p>
             <a:pPr algn="l">
               <a:lnSpc>
-                <a:spcPts val="1820"/>
+                <a:spcPct val="125000"/>
               </a:lnSpc>
               <a:spcBef>
                 <a:spcPts val="200"/>
@@ -10213,7 +10191,7 @@
           <a:p>
             <a:pPr algn="l">
               <a:lnSpc>
-                <a:spcPts val="1820"/>
+                <a:spcPct val="125000"/>
               </a:lnSpc>
               <a:spcBef>
                 <a:spcPts val="200"/>
@@ -10235,7 +10213,7 @@
           <a:p>
             <a:pPr algn="l">
               <a:lnSpc>
-                <a:spcPts val="2080"/>
+                <a:spcPct val="125000"/>
               </a:lnSpc>
               <a:spcBef>
                 <a:spcPts val="800"/>
@@ -10257,7 +10235,7 @@
           <a:p>
             <a:pPr algn="l">
               <a:lnSpc>
-                <a:spcPts val="1820"/>
+                <a:spcPct val="125000"/>
               </a:lnSpc>
               <a:spcBef>
                 <a:spcPts val="200"/>
@@ -10279,7 +10257,7 @@
           <a:p>
             <a:pPr algn="l">
               <a:lnSpc>
-                <a:spcPts val="2080"/>
+                <a:spcPct val="125000"/>
               </a:lnSpc>
               <a:spcBef>
                 <a:spcPts val="800"/>
@@ -10301,7 +10279,7 @@
           <a:p>
             <a:pPr algn="l">
               <a:lnSpc>
-                <a:spcPts val="1820"/>
+                <a:spcPct val="125000"/>
               </a:lnSpc>
               <a:spcBef>
                 <a:spcPts val="200"/>
@@ -10412,11 +10390,10 @@
             <a:spAutoFit/>
           </a:bodyPr>
           <a:lstStyle/>
-          <a:p/>
-          <a:p>
-            <a:pPr algn="l">
-              <a:lnSpc>
-                <a:spcPts val="2080"/>
+          <a:p>
+            <a:pPr algn="l">
+              <a:lnSpc>
+                <a:spcPct val="125000"/>
               </a:lnSpc>
               <a:spcBef>
                 <a:spcPts val="0"/>
@@ -10438,7 +10415,7 @@
           <a:p>
             <a:pPr algn="l">
               <a:lnSpc>
-                <a:spcPts val="2080"/>
+                <a:spcPct val="125000"/>
               </a:lnSpc>
               <a:spcBef>
                 <a:spcPts val="800"/>
@@ -10460,7 +10437,7 @@
           <a:p>
             <a:pPr algn="l">
               <a:lnSpc>
-                <a:spcPts val="1820"/>
+                <a:spcPct val="125000"/>
               </a:lnSpc>
               <a:spcBef>
                 <a:spcPts val="200"/>
@@ -10482,7 +10459,7 @@
           <a:p>
             <a:pPr algn="l">
               <a:lnSpc>
-                <a:spcPts val="2080"/>
+                <a:spcPct val="125000"/>
               </a:lnSpc>
               <a:spcBef>
                 <a:spcPts val="800"/>
@@ -10504,7 +10481,7 @@
           <a:p>
             <a:pPr algn="l">
               <a:lnSpc>
-                <a:spcPts val="1820"/>
+                <a:spcPct val="125000"/>
               </a:lnSpc>
               <a:spcBef>
                 <a:spcPts val="200"/>
@@ -10526,7 +10503,7 @@
           <a:p>
             <a:pPr algn="l">
               <a:lnSpc>
-                <a:spcPts val="2080"/>
+                <a:spcPct val="125000"/>
               </a:lnSpc>
               <a:spcBef>
                 <a:spcPts val="800"/>
@@ -10548,7 +10525,7 @@
           <a:p>
             <a:pPr algn="l">
               <a:lnSpc>
-                <a:spcPts val="1820"/>
+                <a:spcPct val="125000"/>
               </a:lnSpc>
               <a:spcBef>
                 <a:spcPts val="200"/>
@@ -10570,7 +10547,7 @@
           <a:p>
             <a:pPr algn="l">
               <a:lnSpc>
-                <a:spcPts val="2080"/>
+                <a:spcPct val="125000"/>
               </a:lnSpc>
               <a:spcBef>
                 <a:spcPts val="800"/>
@@ -10592,7 +10569,7 @@
           <a:p>
             <a:pPr algn="l">
               <a:lnSpc>
-                <a:spcPts val="1820"/>
+                <a:spcPct val="125000"/>
               </a:lnSpc>
               <a:spcBef>
                 <a:spcPts val="200"/>
@@ -10703,11 +10680,10 @@
             <a:spAutoFit/>
           </a:bodyPr>
           <a:lstStyle/>
-          <a:p/>
-          <a:p>
-            <a:pPr algn="l">
-              <a:lnSpc>
-                <a:spcPts val="2080"/>
+          <a:p>
+            <a:pPr algn="l">
+              <a:lnSpc>
+                <a:spcPct val="125000"/>
               </a:lnSpc>
               <a:spcBef>
                 <a:spcPts val="0"/>
@@ -10729,7 +10705,7 @@
           <a:p>
             <a:pPr algn="l">
               <a:lnSpc>
-                <a:spcPts val="2080"/>
+                <a:spcPct val="125000"/>
               </a:lnSpc>
               <a:spcBef>
                 <a:spcPts val="800"/>
@@ -10751,7 +10727,7 @@
           <a:p>
             <a:pPr algn="l">
               <a:lnSpc>
-                <a:spcPts val="1820"/>
+                <a:spcPct val="125000"/>
               </a:lnSpc>
               <a:spcBef>
                 <a:spcPts val="200"/>
@@ -10773,7 +10749,7 @@
           <a:p>
             <a:pPr algn="l">
               <a:lnSpc>
-                <a:spcPts val="2080"/>
+                <a:spcPct val="125000"/>
               </a:lnSpc>
               <a:spcBef>
                 <a:spcPts val="800"/>
@@ -10795,7 +10771,7 @@
           <a:p>
             <a:pPr algn="l">
               <a:lnSpc>
-                <a:spcPts val="1820"/>
+                <a:spcPct val="125000"/>
               </a:lnSpc>
               <a:spcBef>
                 <a:spcPts val="200"/>
@@ -10817,7 +10793,7 @@
           <a:p>
             <a:pPr algn="l">
               <a:lnSpc>
-                <a:spcPts val="1820"/>
+                <a:spcPct val="125000"/>
               </a:lnSpc>
               <a:spcBef>
                 <a:spcPts val="200"/>
@@ -10839,7 +10815,7 @@
           <a:p>
             <a:pPr algn="l">
               <a:lnSpc>
-                <a:spcPts val="1820"/>
+                <a:spcPct val="125000"/>
               </a:lnSpc>
               <a:spcBef>
                 <a:spcPts val="200"/>
@@ -10861,7 +10837,7 @@
           <a:p>
             <a:pPr algn="l">
               <a:lnSpc>
-                <a:spcPts val="2080"/>
+                <a:spcPct val="125000"/>
               </a:lnSpc>
               <a:spcBef>
                 <a:spcPts val="800"/>
@@ -10883,7 +10859,7 @@
           <a:p>
             <a:pPr algn="l">
               <a:lnSpc>
-                <a:spcPts val="1820"/>
+                <a:spcPct val="125000"/>
               </a:lnSpc>
               <a:spcBef>
                 <a:spcPts val="200"/>
@@ -10905,7 +10881,7 @@
           <a:p>
             <a:pPr algn="l">
               <a:lnSpc>
-                <a:spcPts val="2080"/>
+                <a:spcPct val="125000"/>
               </a:lnSpc>
               <a:spcBef>
                 <a:spcPts val="800"/>
@@ -10927,7 +10903,7 @@
           <a:p>
             <a:pPr algn="l">
               <a:lnSpc>
-                <a:spcPts val="1820"/>
+                <a:spcPct val="125000"/>
               </a:lnSpc>
               <a:spcBef>
                 <a:spcPts val="200"/>
@@ -11038,11 +11014,10 @@
             <a:spAutoFit/>
           </a:bodyPr>
           <a:lstStyle/>
-          <a:p/>
-          <a:p>
-            <a:pPr algn="l">
-              <a:lnSpc>
-                <a:spcPts val="2080"/>
+          <a:p>
+            <a:pPr algn="l">
+              <a:lnSpc>
+                <a:spcPct val="125000"/>
               </a:lnSpc>
               <a:spcBef>
                 <a:spcPts val="0"/>
@@ -11064,7 +11039,7 @@
           <a:p>
             <a:pPr algn="l">
               <a:lnSpc>
-                <a:spcPts val="2080"/>
+                <a:spcPct val="125000"/>
               </a:lnSpc>
               <a:spcBef>
                 <a:spcPts val="800"/>
@@ -11086,7 +11061,7 @@
           <a:p>
             <a:pPr algn="l">
               <a:lnSpc>
-                <a:spcPts val="1820"/>
+                <a:spcPct val="125000"/>
               </a:lnSpc>
               <a:spcBef>
                 <a:spcPts val="200"/>
@@ -11108,7 +11083,7 @@
           <a:p>
             <a:pPr algn="l">
               <a:lnSpc>
-                <a:spcPts val="2080"/>
+                <a:spcPct val="125000"/>
               </a:lnSpc>
               <a:spcBef>
                 <a:spcPts val="800"/>
@@ -11130,7 +11105,7 @@
           <a:p>
             <a:pPr algn="l">
               <a:lnSpc>
-                <a:spcPts val="1820"/>
+                <a:spcPct val="125000"/>
               </a:lnSpc>
               <a:spcBef>
                 <a:spcPts val="200"/>
@@ -11152,7 +11127,7 @@
           <a:p>
             <a:pPr algn="l">
               <a:lnSpc>
-                <a:spcPts val="2080"/>
+                <a:spcPct val="125000"/>
               </a:lnSpc>
               <a:spcBef>
                 <a:spcPts val="800"/>
@@ -11174,7 +11149,7 @@
           <a:p>
             <a:pPr algn="l">
               <a:lnSpc>
-                <a:spcPts val="1820"/>
+                <a:spcPct val="125000"/>
               </a:lnSpc>
               <a:spcBef>
                 <a:spcPts val="200"/>
@@ -11196,7 +11171,7 @@
           <a:p>
             <a:pPr algn="l">
               <a:lnSpc>
-                <a:spcPts val="2080"/>
+                <a:spcPct val="125000"/>
               </a:lnSpc>
               <a:spcBef>
                 <a:spcPts val="800"/>
@@ -11218,7 +11193,7 @@
           <a:p>
             <a:pPr algn="l">
               <a:lnSpc>
-                <a:spcPts val="1820"/>
+                <a:spcPct val="125000"/>
               </a:lnSpc>
               <a:spcBef>
                 <a:spcPts val="200"/>
@@ -11329,11 +11304,10 @@
             <a:spAutoFit/>
           </a:bodyPr>
           <a:lstStyle/>
-          <a:p/>
-          <a:p>
-            <a:pPr algn="l">
-              <a:lnSpc>
-                <a:spcPts val="2080"/>
+          <a:p>
+            <a:pPr algn="l">
+              <a:lnSpc>
+                <a:spcPct val="125000"/>
               </a:lnSpc>
               <a:spcBef>
                 <a:spcPts val="0"/>
@@ -11355,7 +11329,7 @@
           <a:p>
             <a:pPr algn="l">
               <a:lnSpc>
-                <a:spcPts val="2080"/>
+                <a:spcPct val="125000"/>
               </a:lnSpc>
               <a:spcBef>
                 <a:spcPts val="800"/>
@@ -11377,7 +11351,7 @@
           <a:p>
             <a:pPr algn="l">
               <a:lnSpc>
-                <a:spcPts val="1820"/>
+                <a:spcPct val="125000"/>
               </a:lnSpc>
               <a:spcBef>
                 <a:spcPts val="200"/>
@@ -11399,7 +11373,7 @@
           <a:p>
             <a:pPr algn="l">
               <a:lnSpc>
-                <a:spcPts val="2080"/>
+                <a:spcPct val="125000"/>
               </a:lnSpc>
               <a:spcBef>
                 <a:spcPts val="800"/>
@@ -11421,7 +11395,7 @@
           <a:p>
             <a:pPr algn="l">
               <a:lnSpc>
-                <a:spcPts val="1820"/>
+                <a:spcPct val="125000"/>
               </a:lnSpc>
               <a:spcBef>
                 <a:spcPts val="200"/>
@@ -11443,7 +11417,7 @@
           <a:p>
             <a:pPr algn="l">
               <a:lnSpc>
-                <a:spcPts val="1820"/>
+                <a:spcPct val="125000"/>
               </a:lnSpc>
               <a:spcBef>
                 <a:spcPts val="200"/>
@@ -11465,7 +11439,7 @@
           <a:p>
             <a:pPr algn="l">
               <a:lnSpc>
-                <a:spcPts val="2080"/>
+                <a:spcPct val="125000"/>
               </a:lnSpc>
               <a:spcBef>
                 <a:spcPts val="800"/>
@@ -11487,7 +11461,7 @@
           <a:p>
             <a:pPr algn="l">
               <a:lnSpc>
-                <a:spcPts val="1820"/>
+                <a:spcPct val="125000"/>
               </a:lnSpc>
               <a:spcBef>
                 <a:spcPts val="200"/>
@@ -11509,7 +11483,7 @@
           <a:p>
             <a:pPr algn="l">
               <a:lnSpc>
-                <a:spcPts val="2080"/>
+                <a:spcPct val="125000"/>
               </a:lnSpc>
               <a:spcBef>
                 <a:spcPts val="800"/>
@@ -11531,7 +11505,7 @@
           <a:p>
             <a:pPr algn="l">
               <a:lnSpc>
-                <a:spcPts val="1820"/>
+                <a:spcPct val="125000"/>
               </a:lnSpc>
               <a:spcBef>
                 <a:spcPts val="200"/>
@@ -11642,11 +11616,10 @@
             <a:spAutoFit/>
           </a:bodyPr>
           <a:lstStyle/>
-          <a:p/>
-          <a:p>
-            <a:pPr algn="l">
-              <a:lnSpc>
-                <a:spcPts val="2080"/>
+          <a:p>
+            <a:pPr algn="l">
+              <a:lnSpc>
+                <a:spcPct val="125000"/>
               </a:lnSpc>
               <a:spcBef>
                 <a:spcPts val="0"/>
@@ -11668,7 +11641,7 @@
           <a:p>
             <a:pPr algn="l">
               <a:lnSpc>
-                <a:spcPts val="2080"/>
+                <a:spcPct val="125000"/>
               </a:lnSpc>
               <a:spcBef>
                 <a:spcPts val="800"/>
@@ -11690,7 +11663,7 @@
           <a:p>
             <a:pPr algn="l">
               <a:lnSpc>
-                <a:spcPts val="1820"/>
+                <a:spcPct val="125000"/>
               </a:lnSpc>
               <a:spcBef>
                 <a:spcPts val="200"/>
@@ -11712,7 +11685,7 @@
           <a:p>
             <a:pPr algn="l">
               <a:lnSpc>
-                <a:spcPts val="2080"/>
+                <a:spcPct val="125000"/>
               </a:lnSpc>
               <a:spcBef>
                 <a:spcPts val="800"/>
@@ -11734,7 +11707,7 @@
           <a:p>
             <a:pPr algn="l">
               <a:lnSpc>
-                <a:spcPts val="1820"/>
+                <a:spcPct val="125000"/>
               </a:lnSpc>
               <a:spcBef>
                 <a:spcPts val="200"/>
@@ -11756,7 +11729,7 @@
           <a:p>
             <a:pPr algn="l">
               <a:lnSpc>
-                <a:spcPts val="2080"/>
+                <a:spcPct val="125000"/>
               </a:lnSpc>
               <a:spcBef>
                 <a:spcPts val="800"/>
@@ -11778,7 +11751,7 @@
           <a:p>
             <a:pPr algn="l">
               <a:lnSpc>
-                <a:spcPts val="1820"/>
+                <a:spcPct val="125000"/>
               </a:lnSpc>
               <a:spcBef>
                 <a:spcPts val="200"/>
@@ -11800,7 +11773,7 @@
           <a:p>
             <a:pPr algn="l">
               <a:lnSpc>
-                <a:spcPts val="2080"/>
+                <a:spcPct val="125000"/>
               </a:lnSpc>
               <a:spcBef>
                 <a:spcPts val="800"/>
@@ -11822,7 +11795,7 @@
           <a:p>
             <a:pPr algn="l">
               <a:lnSpc>
-                <a:spcPts val="1820"/>
+                <a:spcPct val="125000"/>
               </a:lnSpc>
               <a:spcBef>
                 <a:spcPts val="200"/>
@@ -11933,11 +11906,10 @@
             <a:spAutoFit/>
           </a:bodyPr>
           <a:lstStyle/>
-          <a:p/>
-          <a:p>
-            <a:pPr algn="l">
-              <a:lnSpc>
-                <a:spcPts val="2080"/>
+          <a:p>
+            <a:pPr algn="l">
+              <a:lnSpc>
+                <a:spcPct val="125000"/>
               </a:lnSpc>
               <a:spcBef>
                 <a:spcPts val="0"/>
@@ -11959,7 +11931,7 @@
           <a:p>
             <a:pPr algn="l">
               <a:lnSpc>
-                <a:spcPts val="2080"/>
+                <a:spcPct val="125000"/>
               </a:lnSpc>
               <a:spcBef>
                 <a:spcPts val="800"/>
@@ -11981,7 +11953,7 @@
           <a:p>
             <a:pPr algn="l">
               <a:lnSpc>
-                <a:spcPts val="1820"/>
+                <a:spcPct val="125000"/>
               </a:lnSpc>
               <a:spcBef>
                 <a:spcPts val="200"/>
@@ -12003,7 +11975,7 @@
           <a:p>
             <a:pPr algn="l">
               <a:lnSpc>
-                <a:spcPts val="2080"/>
+                <a:spcPct val="125000"/>
               </a:lnSpc>
               <a:spcBef>
                 <a:spcPts val="800"/>
@@ -12025,7 +11997,7 @@
           <a:p>
             <a:pPr algn="l">
               <a:lnSpc>
-                <a:spcPts val="1820"/>
+                <a:spcPct val="125000"/>
               </a:lnSpc>
               <a:spcBef>
                 <a:spcPts val="200"/>
@@ -12047,7 +12019,7 @@
           <a:p>
             <a:pPr algn="l">
               <a:lnSpc>
-                <a:spcPts val="1820"/>
+                <a:spcPct val="125000"/>
               </a:lnSpc>
               <a:spcBef>
                 <a:spcPts val="200"/>
@@ -12069,7 +12041,7 @@
           <a:p>
             <a:pPr algn="l">
               <a:lnSpc>
-                <a:spcPts val="1820"/>
+                <a:spcPct val="125000"/>
               </a:lnSpc>
               <a:spcBef>
                 <a:spcPts val="200"/>
@@ -12091,7 +12063,7 @@
           <a:p>
             <a:pPr algn="l">
               <a:lnSpc>
-                <a:spcPts val="1820"/>
+                <a:spcPct val="125000"/>
               </a:lnSpc>
               <a:spcBef>
                 <a:spcPts val="200"/>
@@ -12113,7 +12085,7 @@
           <a:p>
             <a:pPr algn="l">
               <a:lnSpc>
-                <a:spcPts val="2080"/>
+                <a:spcPct val="125000"/>
               </a:lnSpc>
               <a:spcBef>
                 <a:spcPts val="800"/>
@@ -12135,7 +12107,7 @@
           <a:p>
             <a:pPr algn="l">
               <a:lnSpc>
-                <a:spcPts val="1820"/>
+                <a:spcPct val="125000"/>
               </a:lnSpc>
               <a:spcBef>
                 <a:spcPts val="200"/>
@@ -12157,7 +12129,7 @@
           <a:p>
             <a:pPr algn="l">
               <a:lnSpc>
-                <a:spcPts val="2080"/>
+                <a:spcPct val="125000"/>
               </a:lnSpc>
               <a:spcBef>
                 <a:spcPts val="800"/>
@@ -12179,7 +12151,7 @@
           <a:p>
             <a:pPr algn="l">
               <a:lnSpc>
-                <a:spcPts val="1820"/>
+                <a:spcPct val="125000"/>
               </a:lnSpc>
               <a:spcBef>
                 <a:spcPts val="200"/>
@@ -12290,11 +12262,10 @@
             <a:spAutoFit/>
           </a:bodyPr>
           <a:lstStyle/>
-          <a:p/>
-          <a:p>
-            <a:pPr algn="l">
-              <a:lnSpc>
-                <a:spcPts val="2080"/>
+          <a:p>
+            <a:pPr algn="l">
+              <a:lnSpc>
+                <a:spcPct val="125000"/>
               </a:lnSpc>
               <a:spcBef>
                 <a:spcPts val="0"/>
@@ -12316,7 +12287,7 @@
           <a:p>
             <a:pPr algn="l">
               <a:lnSpc>
-                <a:spcPts val="2080"/>
+                <a:spcPct val="125000"/>
               </a:lnSpc>
               <a:spcBef>
                 <a:spcPts val="800"/>
@@ -12338,7 +12309,7 @@
           <a:p>
             <a:pPr algn="l">
               <a:lnSpc>
-                <a:spcPts val="1820"/>
+                <a:spcPct val="125000"/>
               </a:lnSpc>
               <a:spcBef>
                 <a:spcPts val="200"/>
@@ -12360,7 +12331,7 @@
           <a:p>
             <a:pPr algn="l">
               <a:lnSpc>
-                <a:spcPts val="2080"/>
+                <a:spcPct val="125000"/>
               </a:lnSpc>
               <a:spcBef>
                 <a:spcPts val="800"/>
@@ -12382,7 +12353,7 @@
           <a:p>
             <a:pPr algn="l">
               <a:lnSpc>
-                <a:spcPts val="1820"/>
+                <a:spcPct val="125000"/>
               </a:lnSpc>
               <a:spcBef>
                 <a:spcPts val="200"/>
@@ -12404,7 +12375,7 @@
           <a:p>
             <a:pPr algn="l">
               <a:lnSpc>
-                <a:spcPts val="2080"/>
+                <a:spcPct val="125000"/>
               </a:lnSpc>
               <a:spcBef>
                 <a:spcPts val="800"/>
@@ -12426,7 +12397,7 @@
           <a:p>
             <a:pPr algn="l">
               <a:lnSpc>
-                <a:spcPts val="1820"/>
+                <a:spcPct val="125000"/>
               </a:lnSpc>
               <a:spcBef>
                 <a:spcPts val="200"/>
@@ -12448,7 +12419,7 @@
           <a:p>
             <a:pPr algn="l">
               <a:lnSpc>
-                <a:spcPts val="2080"/>
+                <a:spcPct val="125000"/>
               </a:lnSpc>
               <a:spcBef>
                 <a:spcPts val="800"/>
@@ -12470,7 +12441,7 @@
           <a:p>
             <a:pPr algn="l">
               <a:lnSpc>
-                <a:spcPts val="1820"/>
+                <a:spcPct val="125000"/>
               </a:lnSpc>
               <a:spcBef>
                 <a:spcPts val="200"/>
@@ -12581,11 +12552,10 @@
             <a:spAutoFit/>
           </a:bodyPr>
           <a:lstStyle/>
-          <a:p/>
-          <a:p>
-            <a:pPr algn="l">
-              <a:lnSpc>
-                <a:spcPts val="2080"/>
+          <a:p>
+            <a:pPr algn="l">
+              <a:lnSpc>
+                <a:spcPct val="125000"/>
               </a:lnSpc>
               <a:spcBef>
                 <a:spcPts val="0"/>
@@ -12607,7 +12577,7 @@
           <a:p>
             <a:pPr algn="l">
               <a:lnSpc>
-                <a:spcPts val="2080"/>
+                <a:spcPct val="125000"/>
               </a:lnSpc>
               <a:spcBef>
                 <a:spcPts val="800"/>
@@ -12629,7 +12599,7 @@
           <a:p>
             <a:pPr algn="l">
               <a:lnSpc>
-                <a:spcPts val="1820"/>
+                <a:spcPct val="125000"/>
               </a:lnSpc>
               <a:spcBef>
                 <a:spcPts val="200"/>
@@ -12651,7 +12621,7 @@
           <a:p>
             <a:pPr algn="l">
               <a:lnSpc>
-                <a:spcPts val="2080"/>
+                <a:spcPct val="125000"/>
               </a:lnSpc>
               <a:spcBef>
                 <a:spcPts val="800"/>
@@ -12673,7 +12643,7 @@
           <a:p>
             <a:pPr algn="l">
               <a:lnSpc>
-                <a:spcPts val="1820"/>
+                <a:spcPct val="125000"/>
               </a:lnSpc>
               <a:spcBef>
                 <a:spcPts val="200"/>
@@ -12695,7 +12665,7 @@
           <a:p>
             <a:pPr algn="l">
               <a:lnSpc>
-                <a:spcPts val="1820"/>
+                <a:spcPct val="125000"/>
               </a:lnSpc>
               <a:spcBef>
                 <a:spcPts val="200"/>
@@ -12717,7 +12687,7 @@
           <a:p>
             <a:pPr algn="l">
               <a:lnSpc>
-                <a:spcPts val="2080"/>
+                <a:spcPct val="125000"/>
               </a:lnSpc>
               <a:spcBef>
                 <a:spcPts val="800"/>
@@ -12739,7 +12709,7 @@
           <a:p>
             <a:pPr algn="l">
               <a:lnSpc>
-                <a:spcPts val="1820"/>
+                <a:spcPct val="125000"/>
               </a:lnSpc>
               <a:spcBef>
                 <a:spcPts val="200"/>
@@ -12761,7 +12731,7 @@
           <a:p>
             <a:pPr algn="l">
               <a:lnSpc>
-                <a:spcPts val="2080"/>
+                <a:spcPct val="125000"/>
               </a:lnSpc>
               <a:spcBef>
                 <a:spcPts val="800"/>
@@ -12783,7 +12753,7 @@
           <a:p>
             <a:pPr algn="l">
               <a:lnSpc>
-                <a:spcPts val="1820"/>
+                <a:spcPct val="125000"/>
               </a:lnSpc>
               <a:spcBef>
                 <a:spcPts val="200"/>
@@ -12894,11 +12864,10 @@
             <a:spAutoFit/>
           </a:bodyPr>
           <a:lstStyle/>
-          <a:p/>
-          <a:p>
-            <a:pPr algn="l">
-              <a:lnSpc>
-                <a:spcPts val="2080"/>
+          <a:p>
+            <a:pPr algn="l">
+              <a:lnSpc>
+                <a:spcPct val="125000"/>
               </a:lnSpc>
               <a:spcBef>
                 <a:spcPts val="0"/>
@@ -12920,7 +12889,7 @@
           <a:p>
             <a:pPr algn="l">
               <a:lnSpc>
-                <a:spcPts val="2080"/>
+                <a:spcPct val="125000"/>
               </a:lnSpc>
               <a:spcBef>
                 <a:spcPts val="800"/>
@@ -12942,7 +12911,7 @@
           <a:p>
             <a:pPr algn="l">
               <a:lnSpc>
-                <a:spcPts val="1820"/>
+                <a:spcPct val="125000"/>
               </a:lnSpc>
               <a:spcBef>
                 <a:spcPts val="200"/>
@@ -12964,7 +12933,7 @@
           <a:p>
             <a:pPr algn="l">
               <a:lnSpc>
-                <a:spcPts val="2080"/>
+                <a:spcPct val="125000"/>
               </a:lnSpc>
               <a:spcBef>
                 <a:spcPts val="800"/>
@@ -12986,7 +12955,7 @@
           <a:p>
             <a:pPr algn="l">
               <a:lnSpc>
-                <a:spcPts val="1820"/>
+                <a:spcPct val="125000"/>
               </a:lnSpc>
               <a:spcBef>
                 <a:spcPts val="200"/>
@@ -13008,7 +12977,7 @@
           <a:p>
             <a:pPr algn="l">
               <a:lnSpc>
-                <a:spcPts val="1820"/>
+                <a:spcPct val="125000"/>
               </a:lnSpc>
               <a:spcBef>
                 <a:spcPts val="200"/>
@@ -13030,7 +12999,7 @@
           <a:p>
             <a:pPr algn="l">
               <a:lnSpc>
-                <a:spcPts val="2080"/>
+                <a:spcPct val="125000"/>
               </a:lnSpc>
               <a:spcBef>
                 <a:spcPts val="800"/>
@@ -13052,7 +13021,7 @@
           <a:p>
             <a:pPr algn="l">
               <a:lnSpc>
-                <a:spcPts val="1820"/>
+                <a:spcPct val="125000"/>
               </a:lnSpc>
               <a:spcBef>
                 <a:spcPts val="200"/>
@@ -13074,7 +13043,7 @@
           <a:p>
             <a:pPr algn="l">
               <a:lnSpc>
-                <a:spcPts val="2080"/>
+                <a:spcPct val="125000"/>
               </a:lnSpc>
               <a:spcBef>
                 <a:spcPts val="800"/>
@@ -13096,7 +13065,7 @@
           <a:p>
             <a:pPr algn="l">
               <a:lnSpc>
-                <a:spcPts val="1820"/>
+                <a:spcPct val="125000"/>
               </a:lnSpc>
               <a:spcBef>
                 <a:spcPts val="200"/>
@@ -13207,11 +13176,10 @@
             <a:spAutoFit/>
           </a:bodyPr>
           <a:lstStyle/>
-          <a:p/>
-          <a:p>
-            <a:pPr algn="l">
-              <a:lnSpc>
-                <a:spcPts val="2080"/>
+          <a:p>
+            <a:pPr algn="l">
+              <a:lnSpc>
+                <a:spcPct val="125000"/>
               </a:lnSpc>
               <a:spcBef>
                 <a:spcPts val="0"/>
@@ -13233,7 +13201,7 @@
           <a:p>
             <a:pPr algn="l">
               <a:lnSpc>
-                <a:spcPts val="2080"/>
+                <a:spcPct val="125000"/>
               </a:lnSpc>
               <a:spcBef>
                 <a:spcPts val="800"/>
@@ -13255,7 +13223,7 @@
           <a:p>
             <a:pPr algn="l">
               <a:lnSpc>
-                <a:spcPts val="1820"/>
+                <a:spcPct val="125000"/>
               </a:lnSpc>
               <a:spcBef>
                 <a:spcPts val="200"/>
@@ -13277,7 +13245,7 @@
           <a:p>
             <a:pPr algn="l">
               <a:lnSpc>
-                <a:spcPts val="2080"/>
+                <a:spcPct val="125000"/>
               </a:lnSpc>
               <a:spcBef>
                 <a:spcPts val="800"/>
@@ -13299,7 +13267,7 @@
           <a:p>
             <a:pPr algn="l">
               <a:lnSpc>
-                <a:spcPts val="1820"/>
+                <a:spcPct val="125000"/>
               </a:lnSpc>
               <a:spcBef>
                 <a:spcPts val="200"/>
@@ -13321,7 +13289,7 @@
           <a:p>
             <a:pPr algn="l">
               <a:lnSpc>
-                <a:spcPts val="1820"/>
+                <a:spcPct val="125000"/>
               </a:lnSpc>
               <a:spcBef>
                 <a:spcPts val="200"/>
@@ -13343,7 +13311,7 @@
           <a:p>
             <a:pPr algn="l">
               <a:lnSpc>
-                <a:spcPts val="1820"/>
+                <a:spcPct val="125000"/>
               </a:lnSpc>
               <a:spcBef>
                 <a:spcPts val="200"/>
@@ -13365,7 +13333,7 @@
           <a:p>
             <a:pPr algn="l">
               <a:lnSpc>
-                <a:spcPts val="1820"/>
+                <a:spcPct val="125000"/>
               </a:lnSpc>
               <a:spcBef>
                 <a:spcPts val="200"/>
@@ -13387,7 +13355,7 @@
           <a:p>
             <a:pPr algn="l">
               <a:lnSpc>
-                <a:spcPts val="1820"/>
+                <a:spcPct val="125000"/>
               </a:lnSpc>
               <a:spcBef>
                 <a:spcPts val="200"/>
@@ -13409,7 +13377,7 @@
           <a:p>
             <a:pPr algn="l">
               <a:lnSpc>
-                <a:spcPts val="1820"/>
+                <a:spcPct val="125000"/>
               </a:lnSpc>
               <a:spcBef>
                 <a:spcPts val="200"/>
@@ -13431,7 +13399,7 @@
           <a:p>
             <a:pPr algn="l">
               <a:lnSpc>
-                <a:spcPts val="2080"/>
+                <a:spcPct val="125000"/>
               </a:lnSpc>
               <a:spcBef>
                 <a:spcPts val="800"/>
@@ -13453,7 +13421,7 @@
           <a:p>
             <a:pPr algn="l">
               <a:lnSpc>
-                <a:spcPts val="1820"/>
+                <a:spcPct val="125000"/>
               </a:lnSpc>
               <a:spcBef>
                 <a:spcPts val="200"/>
@@ -13475,7 +13443,7 @@
           <a:p>
             <a:pPr algn="l">
               <a:lnSpc>
-                <a:spcPts val="2080"/>
+                <a:spcPct val="125000"/>
               </a:lnSpc>
               <a:spcBef>
                 <a:spcPts val="800"/>
@@ -13497,7 +13465,7 @@
           <a:p>
             <a:pPr algn="l">
               <a:lnSpc>
-                <a:spcPts val="1820"/>
+                <a:spcPct val="125000"/>
               </a:lnSpc>
               <a:spcBef>
                 <a:spcPts val="200"/>
@@ -13608,11 +13576,10 @@
             <a:spAutoFit/>
           </a:bodyPr>
           <a:lstStyle/>
-          <a:p/>
-          <a:p>
-            <a:pPr algn="l">
-              <a:lnSpc>
-                <a:spcPts val="2080"/>
+          <a:p>
+            <a:pPr algn="l">
+              <a:lnSpc>
+                <a:spcPct val="125000"/>
               </a:lnSpc>
               <a:spcBef>
                 <a:spcPts val="0"/>
@@ -13634,7 +13601,7 @@
           <a:p>
             <a:pPr algn="l">
               <a:lnSpc>
-                <a:spcPts val="2080"/>
+                <a:spcPct val="125000"/>
               </a:lnSpc>
               <a:spcBef>
                 <a:spcPts val="800"/>
@@ -13656,7 +13623,7 @@
           <a:p>
             <a:pPr algn="l">
               <a:lnSpc>
-                <a:spcPts val="1820"/>
+                <a:spcPct val="125000"/>
               </a:lnSpc>
               <a:spcBef>
                 <a:spcPts val="200"/>
@@ -13678,7 +13645,7 @@
           <a:p>
             <a:pPr algn="l">
               <a:lnSpc>
-                <a:spcPts val="2080"/>
+                <a:spcPct val="125000"/>
               </a:lnSpc>
               <a:spcBef>
                 <a:spcPts val="800"/>
@@ -13700,7 +13667,7 @@
           <a:p>
             <a:pPr algn="l">
               <a:lnSpc>
-                <a:spcPts val="1820"/>
+                <a:spcPct val="125000"/>
               </a:lnSpc>
               <a:spcBef>
                 <a:spcPts val="200"/>
@@ -13722,7 +13689,7 @@
           <a:p>
             <a:pPr algn="l">
               <a:lnSpc>
-                <a:spcPts val="2080"/>
+                <a:spcPct val="125000"/>
               </a:lnSpc>
               <a:spcBef>
                 <a:spcPts val="800"/>
@@ -13744,7 +13711,7 @@
           <a:p>
             <a:pPr algn="l">
               <a:lnSpc>
-                <a:spcPts val="1820"/>
+                <a:spcPct val="125000"/>
               </a:lnSpc>
               <a:spcBef>
                 <a:spcPts val="200"/>
@@ -13766,7 +13733,7 @@
           <a:p>
             <a:pPr algn="l">
               <a:lnSpc>
-                <a:spcPts val="2080"/>
+                <a:spcPct val="125000"/>
               </a:lnSpc>
               <a:spcBef>
                 <a:spcPts val="800"/>
@@ -13788,7 +13755,7 @@
           <a:p>
             <a:pPr algn="l">
               <a:lnSpc>
-                <a:spcPts val="1820"/>
+                <a:spcPct val="125000"/>
               </a:lnSpc>
               <a:spcBef>
                 <a:spcPts val="200"/>
@@ -13899,11 +13866,10 @@
             <a:spAutoFit/>
           </a:bodyPr>
           <a:lstStyle/>
-          <a:p/>
-          <a:p>
-            <a:pPr algn="l">
-              <a:lnSpc>
-                <a:spcPts val="2080"/>
+          <a:p>
+            <a:pPr algn="l">
+              <a:lnSpc>
+                <a:spcPct val="125000"/>
               </a:lnSpc>
               <a:spcBef>
                 <a:spcPts val="0"/>
@@ -13925,7 +13891,7 @@
           <a:p>
             <a:pPr algn="l">
               <a:lnSpc>
-                <a:spcPts val="2080"/>
+                <a:spcPct val="125000"/>
               </a:lnSpc>
               <a:spcBef>
                 <a:spcPts val="800"/>
@@ -13947,7 +13913,7 @@
           <a:p>
             <a:pPr algn="l">
               <a:lnSpc>
-                <a:spcPts val="1820"/>
+                <a:spcPct val="125000"/>
               </a:lnSpc>
               <a:spcBef>
                 <a:spcPts val="200"/>
@@ -13969,7 +13935,7 @@
           <a:p>
             <a:pPr algn="l">
               <a:lnSpc>
-                <a:spcPts val="2080"/>
+                <a:spcPct val="125000"/>
               </a:lnSpc>
               <a:spcBef>
                 <a:spcPts val="800"/>
@@ -13991,7 +13957,7 @@
           <a:p>
             <a:pPr algn="l">
               <a:lnSpc>
-                <a:spcPts val="1820"/>
+                <a:spcPct val="125000"/>
               </a:lnSpc>
               <a:spcBef>
                 <a:spcPts val="200"/>
@@ -14013,7 +13979,7 @@
           <a:p>
             <a:pPr algn="l">
               <a:lnSpc>
-                <a:spcPts val="1820"/>
+                <a:spcPct val="125000"/>
               </a:lnSpc>
               <a:spcBef>
                 <a:spcPts val="200"/>
@@ -14035,7 +14001,7 @@
           <a:p>
             <a:pPr algn="l">
               <a:lnSpc>
-                <a:spcPts val="2080"/>
+                <a:spcPct val="125000"/>
               </a:lnSpc>
               <a:spcBef>
                 <a:spcPts val="800"/>
@@ -14057,7 +14023,7 @@
           <a:p>
             <a:pPr algn="l">
               <a:lnSpc>
-                <a:spcPts val="1820"/>
+                <a:spcPct val="125000"/>
               </a:lnSpc>
               <a:spcBef>
                 <a:spcPts val="200"/>
@@ -14079,7 +14045,7 @@
           <a:p>
             <a:pPr algn="l">
               <a:lnSpc>
-                <a:spcPts val="2080"/>
+                <a:spcPct val="125000"/>
               </a:lnSpc>
               <a:spcBef>
                 <a:spcPts val="800"/>
@@ -14101,7 +14067,7 @@
           <a:p>
             <a:pPr algn="l">
               <a:lnSpc>
-                <a:spcPts val="1820"/>
+                <a:spcPct val="125000"/>
               </a:lnSpc>
               <a:spcBef>
                 <a:spcPts val="200"/>
@@ -14212,11 +14178,10 @@
             <a:spAutoFit/>
           </a:bodyPr>
           <a:lstStyle/>
-          <a:p/>
-          <a:p>
-            <a:pPr algn="l">
-              <a:lnSpc>
-                <a:spcPts val="2080"/>
+          <a:p>
+            <a:pPr algn="l">
+              <a:lnSpc>
+                <a:spcPct val="125000"/>
               </a:lnSpc>
               <a:spcBef>
                 <a:spcPts val="0"/>
@@ -14238,7 +14203,7 @@
           <a:p>
             <a:pPr algn="l">
               <a:lnSpc>
-                <a:spcPts val="2080"/>
+                <a:spcPct val="125000"/>
               </a:lnSpc>
               <a:spcBef>
                 <a:spcPts val="800"/>
@@ -14260,7 +14225,7 @@
           <a:p>
             <a:pPr algn="l">
               <a:lnSpc>
-                <a:spcPts val="1820"/>
+                <a:spcPct val="125000"/>
               </a:lnSpc>
               <a:spcBef>
                 <a:spcPts val="200"/>
@@ -14282,7 +14247,7 @@
           <a:p>
             <a:pPr algn="l">
               <a:lnSpc>
-                <a:spcPts val="2080"/>
+                <a:spcPct val="125000"/>
               </a:lnSpc>
               <a:spcBef>
                 <a:spcPts val="800"/>
@@ -14304,7 +14269,7 @@
           <a:p>
             <a:pPr algn="l">
               <a:lnSpc>
-                <a:spcPts val="1820"/>
+                <a:spcPct val="125000"/>
               </a:lnSpc>
               <a:spcBef>
                 <a:spcPts val="200"/>
@@ -14326,7 +14291,7 @@
           <a:p>
             <a:pPr algn="l">
               <a:lnSpc>
-                <a:spcPts val="1820"/>
+                <a:spcPct val="125000"/>
               </a:lnSpc>
               <a:spcBef>
                 <a:spcPts val="200"/>
@@ -14348,7 +14313,7 @@
           <a:p>
             <a:pPr algn="l">
               <a:lnSpc>
-                <a:spcPts val="2080"/>
+                <a:spcPct val="125000"/>
               </a:lnSpc>
               <a:spcBef>
                 <a:spcPts val="800"/>
@@ -14370,7 +14335,7 @@
           <a:p>
             <a:pPr algn="l">
               <a:lnSpc>
-                <a:spcPts val="1820"/>
+                <a:spcPct val="125000"/>
               </a:lnSpc>
               <a:spcBef>
                 <a:spcPts val="200"/>
@@ -14392,7 +14357,7 @@
           <a:p>
             <a:pPr algn="l">
               <a:lnSpc>
-                <a:spcPts val="2080"/>
+                <a:spcPct val="125000"/>
               </a:lnSpc>
               <a:spcBef>
                 <a:spcPts val="800"/>
@@ -14414,7 +14379,7 @@
           <a:p>
             <a:pPr algn="l">
               <a:lnSpc>
-                <a:spcPts val="1820"/>
+                <a:spcPct val="125000"/>
               </a:lnSpc>
               <a:spcBef>
                 <a:spcPts val="200"/>
@@ -14525,11 +14490,10 @@
             <a:spAutoFit/>
           </a:bodyPr>
           <a:lstStyle/>
-          <a:p/>
-          <a:p>
-            <a:pPr algn="l">
-              <a:lnSpc>
-                <a:spcPts val="2080"/>
+          <a:p>
+            <a:pPr algn="l">
+              <a:lnSpc>
+                <a:spcPct val="125000"/>
               </a:lnSpc>
               <a:spcBef>
                 <a:spcPts val="0"/>
@@ -14551,7 +14515,7 @@
           <a:p>
             <a:pPr algn="l">
               <a:lnSpc>
-                <a:spcPts val="2080"/>
+                <a:spcPct val="125000"/>
               </a:lnSpc>
               <a:spcBef>
                 <a:spcPts val="800"/>
@@ -14573,7 +14537,7 @@
           <a:p>
             <a:pPr algn="l">
               <a:lnSpc>
-                <a:spcPts val="1820"/>
+                <a:spcPct val="125000"/>
               </a:lnSpc>
               <a:spcBef>
                 <a:spcPts val="200"/>
@@ -14595,7 +14559,7 @@
           <a:p>
             <a:pPr algn="l">
               <a:lnSpc>
-                <a:spcPts val="2080"/>
+                <a:spcPct val="125000"/>
               </a:lnSpc>
               <a:spcBef>
                 <a:spcPts val="800"/>
@@ -14617,7 +14581,7 @@
           <a:p>
             <a:pPr algn="l">
               <a:lnSpc>
-                <a:spcPts val="1820"/>
+                <a:spcPct val="125000"/>
               </a:lnSpc>
               <a:spcBef>
                 <a:spcPts val="200"/>
@@ -14639,7 +14603,7 @@
           <a:p>
             <a:pPr algn="l">
               <a:lnSpc>
-                <a:spcPts val="1820"/>
+                <a:spcPct val="125000"/>
               </a:lnSpc>
               <a:spcBef>
                 <a:spcPts val="200"/>
@@ -14661,7 +14625,7 @@
           <a:p>
             <a:pPr algn="l">
               <a:lnSpc>
-                <a:spcPts val="2080"/>
+                <a:spcPct val="125000"/>
               </a:lnSpc>
               <a:spcBef>
                 <a:spcPts val="800"/>
@@ -14683,7 +14647,7 @@
           <a:p>
             <a:pPr algn="l">
               <a:lnSpc>
-                <a:spcPts val="1820"/>
+                <a:spcPct val="125000"/>
               </a:lnSpc>
               <a:spcBef>
                 <a:spcPts val="200"/>
@@ -14705,7 +14669,7 @@
           <a:p>
             <a:pPr algn="l">
               <a:lnSpc>
-                <a:spcPts val="2080"/>
+                <a:spcPct val="125000"/>
               </a:lnSpc>
               <a:spcBef>
                 <a:spcPts val="800"/>
@@ -14727,7 +14691,7 @@
           <a:p>
             <a:pPr algn="l">
               <a:lnSpc>
-                <a:spcPts val="1820"/>
+                <a:spcPct val="125000"/>
               </a:lnSpc>
               <a:spcBef>
                 <a:spcPts val="200"/>
@@ -14838,11 +14802,10 @@
             <a:spAutoFit/>
           </a:bodyPr>
           <a:lstStyle/>
-          <a:p/>
-          <a:p>
-            <a:pPr algn="l">
-              <a:lnSpc>
-                <a:spcPts val="2080"/>
+          <a:p>
+            <a:pPr algn="l">
+              <a:lnSpc>
+                <a:spcPct val="125000"/>
               </a:lnSpc>
               <a:spcBef>
                 <a:spcPts val="0"/>
@@ -14864,7 +14827,7 @@
           <a:p>
             <a:pPr algn="l">
               <a:lnSpc>
-                <a:spcPts val="2080"/>
+                <a:spcPct val="125000"/>
               </a:lnSpc>
               <a:spcBef>
                 <a:spcPts val="800"/>
@@ -14886,7 +14849,7 @@
           <a:p>
             <a:pPr algn="l">
               <a:lnSpc>
-                <a:spcPts val="1820"/>
+                <a:spcPct val="125000"/>
               </a:lnSpc>
               <a:spcBef>
                 <a:spcPts val="200"/>
@@ -14908,7 +14871,7 @@
           <a:p>
             <a:pPr algn="l">
               <a:lnSpc>
-                <a:spcPts val="2080"/>
+                <a:spcPct val="125000"/>
               </a:lnSpc>
               <a:spcBef>
                 <a:spcPts val="800"/>
@@ -14930,7 +14893,7 @@
           <a:p>
             <a:pPr algn="l">
               <a:lnSpc>
-                <a:spcPts val="1820"/>
+                <a:spcPct val="125000"/>
               </a:lnSpc>
               <a:spcBef>
                 <a:spcPts val="200"/>
@@ -14952,7 +14915,7 @@
           <a:p>
             <a:pPr algn="l">
               <a:lnSpc>
-                <a:spcPts val="2080"/>
+                <a:spcPct val="125000"/>
               </a:lnSpc>
               <a:spcBef>
                 <a:spcPts val="800"/>
@@ -14974,7 +14937,7 @@
           <a:p>
             <a:pPr algn="l">
               <a:lnSpc>
-                <a:spcPts val="1820"/>
+                <a:spcPct val="125000"/>
               </a:lnSpc>
               <a:spcBef>
                 <a:spcPts val="200"/>
@@ -14996,7 +14959,7 @@
           <a:p>
             <a:pPr algn="l">
               <a:lnSpc>
-                <a:spcPts val="2080"/>
+                <a:spcPct val="125000"/>
               </a:lnSpc>
               <a:spcBef>
                 <a:spcPts val="800"/>
@@ -15018,7 +14981,7 @@
           <a:p>
             <a:pPr algn="l">
               <a:lnSpc>
-                <a:spcPts val="1820"/>
+                <a:spcPct val="125000"/>
               </a:lnSpc>
               <a:spcBef>
                 <a:spcPts val="200"/>

--- a/ppts_output_v3/01_增值税风险指引.pptx
+++ b/ppts_output_v3/01_增值税风险指引.pptx
@@ -3337,7 +3337,7 @@
                 <a:spcPts val="0"/>
               </a:spcBef>
               <a:spcAft>
-                <a:spcPts val="600"/>
+                <a:spcPts val="0"/>
               </a:spcAft>
             </a:pPr>
             <a:r>
@@ -3356,10 +3356,10 @@
                 <a:spcPct val="125000"/>
               </a:lnSpc>
               <a:spcBef>
-                <a:spcPts val="800"/>
-              </a:spcBef>
-              <a:spcAft>
-                <a:spcPts val="300"/>
+                <a:spcPts val="0"/>
+              </a:spcBef>
+              <a:spcAft>
+                <a:spcPts val="0"/>
               </a:spcAft>
             </a:pPr>
             <a:r>
@@ -3378,10 +3378,10 @@
                 <a:spcPct val="125000"/>
               </a:lnSpc>
               <a:spcBef>
-                <a:spcPts val="200"/>
-              </a:spcBef>
-              <a:spcAft>
-                <a:spcPts val="200"/>
+                <a:spcPts val="0"/>
+              </a:spcBef>
+              <a:spcAft>
+                <a:spcPts val="0"/>
               </a:spcAft>
             </a:pPr>
             <a:r>
@@ -3400,10 +3400,10 @@
                 <a:spcPct val="125000"/>
               </a:lnSpc>
               <a:spcBef>
-                <a:spcPts val="800"/>
-              </a:spcBef>
-              <a:spcAft>
-                <a:spcPts val="300"/>
+                <a:spcPts val="0"/>
+              </a:spcBef>
+              <a:spcAft>
+                <a:spcPts val="0"/>
               </a:spcAft>
             </a:pPr>
             <a:r>
@@ -3422,10 +3422,10 @@
                 <a:spcPct val="125000"/>
               </a:lnSpc>
               <a:spcBef>
-                <a:spcPts val="200"/>
-              </a:spcBef>
-              <a:spcAft>
-                <a:spcPts val="200"/>
+                <a:spcPts val="0"/>
+              </a:spcBef>
+              <a:spcAft>
+                <a:spcPts val="0"/>
               </a:spcAft>
             </a:pPr>
             <a:r>
@@ -3444,10 +3444,10 @@
                 <a:spcPct val="125000"/>
               </a:lnSpc>
               <a:spcBef>
-                <a:spcPts val="200"/>
-              </a:spcBef>
-              <a:spcAft>
-                <a:spcPts val="200"/>
+                <a:spcPts val="0"/>
+              </a:spcBef>
+              <a:spcAft>
+                <a:spcPts val="0"/>
               </a:spcAft>
             </a:pPr>
             <a:r>
@@ -3466,10 +3466,10 @@
                 <a:spcPct val="125000"/>
               </a:lnSpc>
               <a:spcBef>
-                <a:spcPts val="800"/>
-              </a:spcBef>
-              <a:spcAft>
-                <a:spcPts val="300"/>
+                <a:spcPts val="0"/>
+              </a:spcBef>
+              <a:spcAft>
+                <a:spcPts val="0"/>
               </a:spcAft>
             </a:pPr>
             <a:r>
@@ -3488,10 +3488,10 @@
                 <a:spcPct val="125000"/>
               </a:lnSpc>
               <a:spcBef>
-                <a:spcPts val="200"/>
-              </a:spcBef>
-              <a:spcAft>
-                <a:spcPts val="200"/>
+                <a:spcPts val="0"/>
+              </a:spcBef>
+              <a:spcAft>
+                <a:spcPts val="0"/>
               </a:spcAft>
             </a:pPr>
             <a:r>
@@ -3510,10 +3510,10 @@
                 <a:spcPct val="125000"/>
               </a:lnSpc>
               <a:spcBef>
-                <a:spcPts val="800"/>
-              </a:spcBef>
-              <a:spcAft>
-                <a:spcPts val="300"/>
+                <a:spcPts val="0"/>
+              </a:spcBef>
+              <a:spcAft>
+                <a:spcPts val="0"/>
               </a:spcAft>
             </a:pPr>
             <a:r>
@@ -3532,10 +3532,10 @@
                 <a:spcPct val="125000"/>
               </a:lnSpc>
               <a:spcBef>
-                <a:spcPts val="200"/>
-              </a:spcBef>
-              <a:spcAft>
-                <a:spcPts val="200"/>
+                <a:spcPts val="0"/>
+              </a:spcBef>
+              <a:spcAft>
+                <a:spcPts val="0"/>
               </a:spcAft>
             </a:pPr>
             <a:r>
@@ -3649,7 +3649,7 @@
                 <a:spcPts val="0"/>
               </a:spcBef>
               <a:spcAft>
-                <a:spcPts val="600"/>
+                <a:spcPts val="0"/>
               </a:spcAft>
             </a:pPr>
             <a:r>
@@ -3668,10 +3668,10 @@
                 <a:spcPct val="125000"/>
               </a:lnSpc>
               <a:spcBef>
-                <a:spcPts val="800"/>
-              </a:spcBef>
-              <a:spcAft>
-                <a:spcPts val="300"/>
+                <a:spcPts val="0"/>
+              </a:spcBef>
+              <a:spcAft>
+                <a:spcPts val="0"/>
               </a:spcAft>
             </a:pPr>
             <a:r>
@@ -3690,10 +3690,10 @@
                 <a:spcPct val="125000"/>
               </a:lnSpc>
               <a:spcBef>
-                <a:spcPts val="200"/>
-              </a:spcBef>
-              <a:spcAft>
-                <a:spcPts val="200"/>
+                <a:spcPts val="0"/>
+              </a:spcBef>
+              <a:spcAft>
+                <a:spcPts val="0"/>
               </a:spcAft>
             </a:pPr>
             <a:r>
@@ -3712,10 +3712,10 @@
                 <a:spcPct val="125000"/>
               </a:lnSpc>
               <a:spcBef>
-                <a:spcPts val="800"/>
-              </a:spcBef>
-              <a:spcAft>
-                <a:spcPts val="300"/>
+                <a:spcPts val="0"/>
+              </a:spcBef>
+              <a:spcAft>
+                <a:spcPts val="0"/>
               </a:spcAft>
             </a:pPr>
             <a:r>
@@ -3734,10 +3734,10 @@
                 <a:spcPct val="125000"/>
               </a:lnSpc>
               <a:spcBef>
-                <a:spcPts val="200"/>
-              </a:spcBef>
-              <a:spcAft>
-                <a:spcPts val="200"/>
+                <a:spcPts val="0"/>
+              </a:spcBef>
+              <a:spcAft>
+                <a:spcPts val="0"/>
               </a:spcAft>
             </a:pPr>
             <a:r>
@@ -3756,10 +3756,10 @@
                 <a:spcPct val="125000"/>
               </a:lnSpc>
               <a:spcBef>
-                <a:spcPts val="800"/>
-              </a:spcBef>
-              <a:spcAft>
-                <a:spcPts val="300"/>
+                <a:spcPts val="0"/>
+              </a:spcBef>
+              <a:spcAft>
+                <a:spcPts val="0"/>
               </a:spcAft>
             </a:pPr>
             <a:r>
@@ -3778,10 +3778,10 @@
                 <a:spcPct val="125000"/>
               </a:lnSpc>
               <a:spcBef>
-                <a:spcPts val="200"/>
-              </a:spcBef>
-              <a:spcAft>
-                <a:spcPts val="200"/>
+                <a:spcPts val="0"/>
+              </a:spcBef>
+              <a:spcAft>
+                <a:spcPts val="0"/>
               </a:spcAft>
             </a:pPr>
             <a:r>
@@ -3800,10 +3800,10 @@
                 <a:spcPct val="125000"/>
               </a:lnSpc>
               <a:spcBef>
-                <a:spcPts val="800"/>
-              </a:spcBef>
-              <a:spcAft>
-                <a:spcPts val="300"/>
+                <a:spcPts val="0"/>
+              </a:spcBef>
+              <a:spcAft>
+                <a:spcPts val="0"/>
               </a:spcAft>
             </a:pPr>
             <a:r>
@@ -3822,10 +3822,10 @@
                 <a:spcPct val="125000"/>
               </a:lnSpc>
               <a:spcBef>
-                <a:spcPts val="200"/>
-              </a:spcBef>
-              <a:spcAft>
-                <a:spcPts val="200"/>
+                <a:spcPts val="0"/>
+              </a:spcBef>
+              <a:spcAft>
+                <a:spcPts val="0"/>
               </a:spcAft>
             </a:pPr>
             <a:r>
@@ -3939,7 +3939,7 @@
                 <a:spcPts val="0"/>
               </a:spcBef>
               <a:spcAft>
-                <a:spcPts val="600"/>
+                <a:spcPts val="0"/>
               </a:spcAft>
             </a:pPr>
             <a:r>
@@ -3958,10 +3958,10 @@
                 <a:spcPct val="125000"/>
               </a:lnSpc>
               <a:spcBef>
-                <a:spcPts val="800"/>
-              </a:spcBef>
-              <a:spcAft>
-                <a:spcPts val="300"/>
+                <a:spcPts val="0"/>
+              </a:spcBef>
+              <a:spcAft>
+                <a:spcPts val="0"/>
               </a:spcAft>
             </a:pPr>
             <a:r>
@@ -3980,10 +3980,10 @@
                 <a:spcPct val="125000"/>
               </a:lnSpc>
               <a:spcBef>
-                <a:spcPts val="200"/>
-              </a:spcBef>
-              <a:spcAft>
-                <a:spcPts val="200"/>
+                <a:spcPts val="0"/>
+              </a:spcBef>
+              <a:spcAft>
+                <a:spcPts val="0"/>
               </a:spcAft>
             </a:pPr>
             <a:r>
@@ -4002,10 +4002,10 @@
                 <a:spcPct val="125000"/>
               </a:lnSpc>
               <a:spcBef>
-                <a:spcPts val="800"/>
-              </a:spcBef>
-              <a:spcAft>
-                <a:spcPts val="300"/>
+                <a:spcPts val="0"/>
+              </a:spcBef>
+              <a:spcAft>
+                <a:spcPts val="0"/>
               </a:spcAft>
             </a:pPr>
             <a:r>
@@ -4024,10 +4024,10 @@
                 <a:spcPct val="125000"/>
               </a:lnSpc>
               <a:spcBef>
-                <a:spcPts val="200"/>
-              </a:spcBef>
-              <a:spcAft>
-                <a:spcPts val="200"/>
+                <a:spcPts val="0"/>
+              </a:spcBef>
+              <a:spcAft>
+                <a:spcPts val="0"/>
               </a:spcAft>
             </a:pPr>
             <a:r>
@@ -4046,10 +4046,10 @@
                 <a:spcPct val="125000"/>
               </a:lnSpc>
               <a:spcBef>
-                <a:spcPts val="200"/>
-              </a:spcBef>
-              <a:spcAft>
-                <a:spcPts val="200"/>
+                <a:spcPts val="0"/>
+              </a:spcBef>
+              <a:spcAft>
+                <a:spcPts val="0"/>
               </a:spcAft>
             </a:pPr>
             <a:r>
@@ -4068,10 +4068,10 @@
                 <a:spcPct val="125000"/>
               </a:lnSpc>
               <a:spcBef>
-                <a:spcPts val="200"/>
-              </a:spcBef>
-              <a:spcAft>
-                <a:spcPts val="200"/>
+                <a:spcPts val="0"/>
+              </a:spcBef>
+              <a:spcAft>
+                <a:spcPts val="0"/>
               </a:spcAft>
             </a:pPr>
             <a:r>
@@ -4090,10 +4090,10 @@
                 <a:spcPct val="125000"/>
               </a:lnSpc>
               <a:spcBef>
-                <a:spcPts val="800"/>
-              </a:spcBef>
-              <a:spcAft>
-                <a:spcPts val="300"/>
+                <a:spcPts val="0"/>
+              </a:spcBef>
+              <a:spcAft>
+                <a:spcPts val="0"/>
               </a:spcAft>
             </a:pPr>
             <a:r>
@@ -4112,10 +4112,10 @@
                 <a:spcPct val="125000"/>
               </a:lnSpc>
               <a:spcBef>
-                <a:spcPts val="200"/>
-              </a:spcBef>
-              <a:spcAft>
-                <a:spcPts val="200"/>
+                <a:spcPts val="0"/>
+              </a:spcBef>
+              <a:spcAft>
+                <a:spcPts val="0"/>
               </a:spcAft>
             </a:pPr>
             <a:r>
@@ -4134,10 +4134,10 @@
                 <a:spcPct val="125000"/>
               </a:lnSpc>
               <a:spcBef>
-                <a:spcPts val="800"/>
-              </a:spcBef>
-              <a:spcAft>
-                <a:spcPts val="300"/>
+                <a:spcPts val="0"/>
+              </a:spcBef>
+              <a:spcAft>
+                <a:spcPts val="0"/>
               </a:spcAft>
             </a:pPr>
             <a:r>
@@ -4156,10 +4156,10 @@
                 <a:spcPct val="125000"/>
               </a:lnSpc>
               <a:spcBef>
-                <a:spcPts val="200"/>
-              </a:spcBef>
-              <a:spcAft>
-                <a:spcPts val="200"/>
+                <a:spcPts val="0"/>
+              </a:spcBef>
+              <a:spcAft>
+                <a:spcPts val="0"/>
               </a:spcAft>
             </a:pPr>
             <a:r>
@@ -4273,7 +4273,7 @@
                 <a:spcPts val="0"/>
               </a:spcBef>
               <a:spcAft>
-                <a:spcPts val="600"/>
+                <a:spcPts val="0"/>
               </a:spcAft>
             </a:pPr>
             <a:r>
@@ -4292,10 +4292,10 @@
                 <a:spcPct val="125000"/>
               </a:lnSpc>
               <a:spcBef>
-                <a:spcPts val="800"/>
-              </a:spcBef>
-              <a:spcAft>
-                <a:spcPts val="300"/>
+                <a:spcPts val="0"/>
+              </a:spcBef>
+              <a:spcAft>
+                <a:spcPts val="0"/>
               </a:spcAft>
             </a:pPr>
             <a:r>
@@ -4314,10 +4314,10 @@
                 <a:spcPct val="125000"/>
               </a:lnSpc>
               <a:spcBef>
-                <a:spcPts val="200"/>
-              </a:spcBef>
-              <a:spcAft>
-                <a:spcPts val="200"/>
+                <a:spcPts val="0"/>
+              </a:spcBef>
+              <a:spcAft>
+                <a:spcPts val="0"/>
               </a:spcAft>
             </a:pPr>
             <a:r>
@@ -4336,10 +4336,10 @@
                 <a:spcPct val="125000"/>
               </a:lnSpc>
               <a:spcBef>
-                <a:spcPts val="800"/>
-              </a:spcBef>
-              <a:spcAft>
-                <a:spcPts val="300"/>
+                <a:spcPts val="0"/>
+              </a:spcBef>
+              <a:spcAft>
+                <a:spcPts val="0"/>
               </a:spcAft>
             </a:pPr>
             <a:r>
@@ -4358,10 +4358,10 @@
                 <a:spcPct val="125000"/>
               </a:lnSpc>
               <a:spcBef>
-                <a:spcPts val="200"/>
-              </a:spcBef>
-              <a:spcAft>
-                <a:spcPts val="200"/>
+                <a:spcPts val="0"/>
+              </a:spcBef>
+              <a:spcAft>
+                <a:spcPts val="0"/>
               </a:spcAft>
             </a:pPr>
             <a:r>
@@ -4380,10 +4380,10 @@
                 <a:spcPct val="125000"/>
               </a:lnSpc>
               <a:spcBef>
-                <a:spcPts val="200"/>
-              </a:spcBef>
-              <a:spcAft>
-                <a:spcPts val="200"/>
+                <a:spcPts val="0"/>
+              </a:spcBef>
+              <a:spcAft>
+                <a:spcPts val="0"/>
               </a:spcAft>
             </a:pPr>
             <a:r>
@@ -4402,10 +4402,10 @@
                 <a:spcPct val="125000"/>
               </a:lnSpc>
               <a:spcBef>
-                <a:spcPts val="800"/>
-              </a:spcBef>
-              <a:spcAft>
-                <a:spcPts val="300"/>
+                <a:spcPts val="0"/>
+              </a:spcBef>
+              <a:spcAft>
+                <a:spcPts val="0"/>
               </a:spcAft>
             </a:pPr>
             <a:r>
@@ -4424,10 +4424,10 @@
                 <a:spcPct val="125000"/>
               </a:lnSpc>
               <a:spcBef>
-                <a:spcPts val="200"/>
-              </a:spcBef>
-              <a:spcAft>
-                <a:spcPts val="200"/>
+                <a:spcPts val="0"/>
+              </a:spcBef>
+              <a:spcAft>
+                <a:spcPts val="0"/>
               </a:spcAft>
             </a:pPr>
             <a:r>
@@ -4446,10 +4446,10 @@
                 <a:spcPct val="125000"/>
               </a:lnSpc>
               <a:spcBef>
-                <a:spcPts val="800"/>
-              </a:spcBef>
-              <a:spcAft>
-                <a:spcPts val="300"/>
+                <a:spcPts val="0"/>
+              </a:spcBef>
+              <a:spcAft>
+                <a:spcPts val="0"/>
               </a:spcAft>
             </a:pPr>
             <a:r>
@@ -4468,10 +4468,10 @@
                 <a:spcPct val="125000"/>
               </a:lnSpc>
               <a:spcBef>
-                <a:spcPts val="200"/>
-              </a:spcBef>
-              <a:spcAft>
-                <a:spcPts val="200"/>
+                <a:spcPts val="0"/>
+              </a:spcBef>
+              <a:spcAft>
+                <a:spcPts val="0"/>
               </a:spcAft>
             </a:pPr>
             <a:r>
@@ -4585,7 +4585,7 @@
                 <a:spcPts val="0"/>
               </a:spcBef>
               <a:spcAft>
-                <a:spcPts val="600"/>
+                <a:spcPts val="0"/>
               </a:spcAft>
             </a:pPr>
             <a:r>
@@ -4604,10 +4604,10 @@
                 <a:spcPct val="125000"/>
               </a:lnSpc>
               <a:spcBef>
-                <a:spcPts val="800"/>
-              </a:spcBef>
-              <a:spcAft>
-                <a:spcPts val="300"/>
+                <a:spcPts val="0"/>
+              </a:spcBef>
+              <a:spcAft>
+                <a:spcPts val="0"/>
               </a:spcAft>
             </a:pPr>
             <a:r>
@@ -4626,10 +4626,10 @@
                 <a:spcPct val="125000"/>
               </a:lnSpc>
               <a:spcBef>
-                <a:spcPts val="200"/>
-              </a:spcBef>
-              <a:spcAft>
-                <a:spcPts val="200"/>
+                <a:spcPts val="0"/>
+              </a:spcBef>
+              <a:spcAft>
+                <a:spcPts val="0"/>
               </a:spcAft>
             </a:pPr>
             <a:r>
@@ -4648,10 +4648,10 @@
                 <a:spcPct val="125000"/>
               </a:lnSpc>
               <a:spcBef>
-                <a:spcPts val="800"/>
-              </a:spcBef>
-              <a:spcAft>
-                <a:spcPts val="300"/>
+                <a:spcPts val="0"/>
+              </a:spcBef>
+              <a:spcAft>
+                <a:spcPts val="0"/>
               </a:spcAft>
             </a:pPr>
             <a:r>
@@ -4670,10 +4670,10 @@
                 <a:spcPct val="125000"/>
               </a:lnSpc>
               <a:spcBef>
-                <a:spcPts val="200"/>
-              </a:spcBef>
-              <a:spcAft>
-                <a:spcPts val="200"/>
+                <a:spcPts val="0"/>
+              </a:spcBef>
+              <a:spcAft>
+                <a:spcPts val="0"/>
               </a:spcAft>
             </a:pPr>
             <a:r>
@@ -4692,10 +4692,10 @@
                 <a:spcPct val="125000"/>
               </a:lnSpc>
               <a:spcBef>
-                <a:spcPts val="200"/>
-              </a:spcBef>
-              <a:spcAft>
-                <a:spcPts val="200"/>
+                <a:spcPts val="0"/>
+              </a:spcBef>
+              <a:spcAft>
+                <a:spcPts val="0"/>
               </a:spcAft>
             </a:pPr>
             <a:r>
@@ -4714,10 +4714,10 @@
                 <a:spcPct val="125000"/>
               </a:lnSpc>
               <a:spcBef>
-                <a:spcPts val="200"/>
-              </a:spcBef>
-              <a:spcAft>
-                <a:spcPts val="200"/>
+                <a:spcPts val="0"/>
+              </a:spcBef>
+              <a:spcAft>
+                <a:spcPts val="0"/>
               </a:spcAft>
             </a:pPr>
             <a:r>
@@ -4736,10 +4736,10 @@
                 <a:spcPct val="125000"/>
               </a:lnSpc>
               <a:spcBef>
-                <a:spcPts val="800"/>
-              </a:spcBef>
-              <a:spcAft>
-                <a:spcPts val="300"/>
+                <a:spcPts val="0"/>
+              </a:spcBef>
+              <a:spcAft>
+                <a:spcPts val="0"/>
               </a:spcAft>
             </a:pPr>
             <a:r>
@@ -4758,10 +4758,10 @@
                 <a:spcPct val="125000"/>
               </a:lnSpc>
               <a:spcBef>
-                <a:spcPts val="200"/>
-              </a:spcBef>
-              <a:spcAft>
-                <a:spcPts val="200"/>
+                <a:spcPts val="0"/>
+              </a:spcBef>
+              <a:spcAft>
+                <a:spcPts val="0"/>
               </a:spcAft>
             </a:pPr>
             <a:r>
@@ -4780,10 +4780,10 @@
                 <a:spcPct val="125000"/>
               </a:lnSpc>
               <a:spcBef>
-                <a:spcPts val="800"/>
-              </a:spcBef>
-              <a:spcAft>
-                <a:spcPts val="300"/>
+                <a:spcPts val="0"/>
+              </a:spcBef>
+              <a:spcAft>
+                <a:spcPts val="0"/>
               </a:spcAft>
             </a:pPr>
             <a:r>
@@ -4802,10 +4802,10 @@
                 <a:spcPct val="125000"/>
               </a:lnSpc>
               <a:spcBef>
-                <a:spcPts val="200"/>
-              </a:spcBef>
-              <a:spcAft>
-                <a:spcPts val="200"/>
+                <a:spcPts val="0"/>
+              </a:spcBef>
+              <a:spcAft>
+                <a:spcPts val="0"/>
               </a:spcAft>
             </a:pPr>
             <a:r>
@@ -4919,7 +4919,7 @@
                 <a:spcPts val="0"/>
               </a:spcBef>
               <a:spcAft>
-                <a:spcPts val="600"/>
+                <a:spcPts val="0"/>
               </a:spcAft>
             </a:pPr>
             <a:r>
@@ -4938,10 +4938,10 @@
                 <a:spcPct val="125000"/>
               </a:lnSpc>
               <a:spcBef>
-                <a:spcPts val="800"/>
-              </a:spcBef>
-              <a:spcAft>
-                <a:spcPts val="300"/>
+                <a:spcPts val="0"/>
+              </a:spcBef>
+              <a:spcAft>
+                <a:spcPts val="0"/>
               </a:spcAft>
             </a:pPr>
             <a:r>
@@ -4960,10 +4960,10 @@
                 <a:spcPct val="125000"/>
               </a:lnSpc>
               <a:spcBef>
-                <a:spcPts val="200"/>
-              </a:spcBef>
-              <a:spcAft>
-                <a:spcPts val="200"/>
+                <a:spcPts val="0"/>
+              </a:spcBef>
+              <a:spcAft>
+                <a:spcPts val="0"/>
               </a:spcAft>
             </a:pPr>
             <a:r>
@@ -4982,10 +4982,10 @@
                 <a:spcPct val="125000"/>
               </a:lnSpc>
               <a:spcBef>
-                <a:spcPts val="800"/>
-              </a:spcBef>
-              <a:spcAft>
-                <a:spcPts val="300"/>
+                <a:spcPts val="0"/>
+              </a:spcBef>
+              <a:spcAft>
+                <a:spcPts val="0"/>
               </a:spcAft>
             </a:pPr>
             <a:r>
@@ -5004,10 +5004,10 @@
                 <a:spcPct val="125000"/>
               </a:lnSpc>
               <a:spcBef>
-                <a:spcPts val="200"/>
-              </a:spcBef>
-              <a:spcAft>
-                <a:spcPts val="200"/>
+                <a:spcPts val="0"/>
+              </a:spcBef>
+              <a:spcAft>
+                <a:spcPts val="0"/>
               </a:spcAft>
             </a:pPr>
             <a:r>
@@ -5026,10 +5026,10 @@
                 <a:spcPct val="125000"/>
               </a:lnSpc>
               <a:spcBef>
-                <a:spcPts val="800"/>
-              </a:spcBef>
-              <a:spcAft>
-                <a:spcPts val="300"/>
+                <a:spcPts val="0"/>
+              </a:spcBef>
+              <a:spcAft>
+                <a:spcPts val="0"/>
               </a:spcAft>
             </a:pPr>
             <a:r>
@@ -5048,10 +5048,10 @@
                 <a:spcPct val="125000"/>
               </a:lnSpc>
               <a:spcBef>
-                <a:spcPts val="200"/>
-              </a:spcBef>
-              <a:spcAft>
-                <a:spcPts val="200"/>
+                <a:spcPts val="0"/>
+              </a:spcBef>
+              <a:spcAft>
+                <a:spcPts val="0"/>
               </a:spcAft>
             </a:pPr>
             <a:r>
@@ -5070,10 +5070,10 @@
                 <a:spcPct val="125000"/>
               </a:lnSpc>
               <a:spcBef>
-                <a:spcPts val="800"/>
-              </a:spcBef>
-              <a:spcAft>
-                <a:spcPts val="300"/>
+                <a:spcPts val="0"/>
+              </a:spcBef>
+              <a:spcAft>
+                <a:spcPts val="0"/>
               </a:spcAft>
             </a:pPr>
             <a:r>
@@ -5092,10 +5092,10 @@
                 <a:spcPct val="125000"/>
               </a:lnSpc>
               <a:spcBef>
-                <a:spcPts val="200"/>
-              </a:spcBef>
-              <a:spcAft>
-                <a:spcPts val="200"/>
+                <a:spcPts val="0"/>
+              </a:spcBef>
+              <a:spcAft>
+                <a:spcPts val="0"/>
               </a:spcAft>
             </a:pPr>
             <a:r>
@@ -5209,7 +5209,7 @@
                 <a:spcPts val="0"/>
               </a:spcBef>
               <a:spcAft>
-                <a:spcPts val="600"/>
+                <a:spcPts val="0"/>
               </a:spcAft>
             </a:pPr>
             <a:r>
@@ -5228,10 +5228,10 @@
                 <a:spcPct val="125000"/>
               </a:lnSpc>
               <a:spcBef>
-                <a:spcPts val="800"/>
-              </a:spcBef>
-              <a:spcAft>
-                <a:spcPts val="300"/>
+                <a:spcPts val="0"/>
+              </a:spcBef>
+              <a:spcAft>
+                <a:spcPts val="0"/>
               </a:spcAft>
             </a:pPr>
             <a:r>
@@ -5250,10 +5250,10 @@
                 <a:spcPct val="125000"/>
               </a:lnSpc>
               <a:spcBef>
-                <a:spcPts val="200"/>
-              </a:spcBef>
-              <a:spcAft>
-                <a:spcPts val="200"/>
+                <a:spcPts val="0"/>
+              </a:spcBef>
+              <a:spcAft>
+                <a:spcPts val="0"/>
               </a:spcAft>
             </a:pPr>
             <a:r>
@@ -5272,10 +5272,10 @@
                 <a:spcPct val="125000"/>
               </a:lnSpc>
               <a:spcBef>
-                <a:spcPts val="800"/>
-              </a:spcBef>
-              <a:spcAft>
-                <a:spcPts val="300"/>
+                <a:spcPts val="0"/>
+              </a:spcBef>
+              <a:spcAft>
+                <a:spcPts val="0"/>
               </a:spcAft>
             </a:pPr>
             <a:r>
@@ -5294,10 +5294,10 @@
                 <a:spcPct val="125000"/>
               </a:lnSpc>
               <a:spcBef>
-                <a:spcPts val="200"/>
-              </a:spcBef>
-              <a:spcAft>
-                <a:spcPts val="200"/>
+                <a:spcPts val="0"/>
+              </a:spcBef>
+              <a:spcAft>
+                <a:spcPts val="0"/>
               </a:spcAft>
             </a:pPr>
             <a:r>
@@ -5316,10 +5316,10 @@
                 <a:spcPct val="125000"/>
               </a:lnSpc>
               <a:spcBef>
-                <a:spcPts val="200"/>
-              </a:spcBef>
-              <a:spcAft>
-                <a:spcPts val="200"/>
+                <a:spcPts val="0"/>
+              </a:spcBef>
+              <a:spcAft>
+                <a:spcPts val="0"/>
               </a:spcAft>
             </a:pPr>
             <a:r>
@@ -5338,10 +5338,10 @@
                 <a:spcPct val="125000"/>
               </a:lnSpc>
               <a:spcBef>
-                <a:spcPts val="800"/>
-              </a:spcBef>
-              <a:spcAft>
-                <a:spcPts val="300"/>
+                <a:spcPts val="0"/>
+              </a:spcBef>
+              <a:spcAft>
+                <a:spcPts val="0"/>
               </a:spcAft>
             </a:pPr>
             <a:r>
@@ -5360,10 +5360,10 @@
                 <a:spcPct val="125000"/>
               </a:lnSpc>
               <a:spcBef>
-                <a:spcPts val="200"/>
-              </a:spcBef>
-              <a:spcAft>
-                <a:spcPts val="200"/>
+                <a:spcPts val="0"/>
+              </a:spcBef>
+              <a:spcAft>
+                <a:spcPts val="0"/>
               </a:spcAft>
             </a:pPr>
             <a:r>
@@ -5382,10 +5382,10 @@
                 <a:spcPct val="125000"/>
               </a:lnSpc>
               <a:spcBef>
-                <a:spcPts val="800"/>
-              </a:spcBef>
-              <a:spcAft>
-                <a:spcPts val="300"/>
+                <a:spcPts val="0"/>
+              </a:spcBef>
+              <a:spcAft>
+                <a:spcPts val="0"/>
               </a:spcAft>
             </a:pPr>
             <a:r>
@@ -5404,10 +5404,10 @@
                 <a:spcPct val="125000"/>
               </a:lnSpc>
               <a:spcBef>
-                <a:spcPts val="200"/>
-              </a:spcBef>
-              <a:spcAft>
-                <a:spcPts val="200"/>
+                <a:spcPts val="0"/>
+              </a:spcBef>
+              <a:spcAft>
+                <a:spcPts val="0"/>
               </a:spcAft>
             </a:pPr>
             <a:r>
@@ -5521,7 +5521,7 @@
                 <a:spcPts val="0"/>
               </a:spcBef>
               <a:spcAft>
-                <a:spcPts val="600"/>
+                <a:spcPts val="0"/>
               </a:spcAft>
             </a:pPr>
             <a:r>
@@ -5540,10 +5540,10 @@
                 <a:spcPct val="125000"/>
               </a:lnSpc>
               <a:spcBef>
-                <a:spcPts val="800"/>
-              </a:spcBef>
-              <a:spcAft>
-                <a:spcPts val="300"/>
+                <a:spcPts val="0"/>
+              </a:spcBef>
+              <a:spcAft>
+                <a:spcPts val="0"/>
               </a:spcAft>
             </a:pPr>
             <a:r>
@@ -5562,10 +5562,10 @@
                 <a:spcPct val="125000"/>
               </a:lnSpc>
               <a:spcBef>
-                <a:spcPts val="200"/>
-              </a:spcBef>
-              <a:spcAft>
-                <a:spcPts val="200"/>
+                <a:spcPts val="0"/>
+              </a:spcBef>
+              <a:spcAft>
+                <a:spcPts val="0"/>
               </a:spcAft>
             </a:pPr>
             <a:r>
@@ -5584,10 +5584,10 @@
                 <a:spcPct val="125000"/>
               </a:lnSpc>
               <a:spcBef>
-                <a:spcPts val="800"/>
-              </a:spcBef>
-              <a:spcAft>
-                <a:spcPts val="300"/>
+                <a:spcPts val="0"/>
+              </a:spcBef>
+              <a:spcAft>
+                <a:spcPts val="0"/>
               </a:spcAft>
             </a:pPr>
             <a:r>
@@ -5606,10 +5606,10 @@
                 <a:spcPct val="125000"/>
               </a:lnSpc>
               <a:spcBef>
-                <a:spcPts val="200"/>
-              </a:spcBef>
-              <a:spcAft>
-                <a:spcPts val="200"/>
+                <a:spcPts val="0"/>
+              </a:spcBef>
+              <a:spcAft>
+                <a:spcPts val="0"/>
               </a:spcAft>
             </a:pPr>
             <a:r>
@@ -5628,10 +5628,10 @@
                 <a:spcPct val="125000"/>
               </a:lnSpc>
               <a:spcBef>
-                <a:spcPts val="200"/>
-              </a:spcBef>
-              <a:spcAft>
-                <a:spcPts val="200"/>
+                <a:spcPts val="0"/>
+              </a:spcBef>
+              <a:spcAft>
+                <a:spcPts val="0"/>
               </a:spcAft>
             </a:pPr>
             <a:r>
@@ -5650,10 +5650,10 @@
                 <a:spcPct val="125000"/>
               </a:lnSpc>
               <a:spcBef>
-                <a:spcPts val="200"/>
-              </a:spcBef>
-              <a:spcAft>
-                <a:spcPts val="200"/>
+                <a:spcPts val="0"/>
+              </a:spcBef>
+              <a:spcAft>
+                <a:spcPts val="0"/>
               </a:spcAft>
             </a:pPr>
             <a:r>
@@ -5672,10 +5672,10 @@
                 <a:spcPct val="125000"/>
               </a:lnSpc>
               <a:spcBef>
-                <a:spcPts val="800"/>
-              </a:spcBef>
-              <a:spcAft>
-                <a:spcPts val="300"/>
+                <a:spcPts val="0"/>
+              </a:spcBef>
+              <a:spcAft>
+                <a:spcPts val="0"/>
               </a:spcAft>
             </a:pPr>
             <a:r>
@@ -5694,10 +5694,10 @@
                 <a:spcPct val="125000"/>
               </a:lnSpc>
               <a:spcBef>
-                <a:spcPts val="200"/>
-              </a:spcBef>
-              <a:spcAft>
-                <a:spcPts val="200"/>
+                <a:spcPts val="0"/>
+              </a:spcBef>
+              <a:spcAft>
+                <a:spcPts val="0"/>
               </a:spcAft>
             </a:pPr>
             <a:r>
@@ -5716,10 +5716,10 @@
                 <a:spcPct val="125000"/>
               </a:lnSpc>
               <a:spcBef>
-                <a:spcPts val="800"/>
-              </a:spcBef>
-              <a:spcAft>
-                <a:spcPts val="300"/>
+                <a:spcPts val="0"/>
+              </a:spcBef>
+              <a:spcAft>
+                <a:spcPts val="0"/>
               </a:spcAft>
             </a:pPr>
             <a:r>
@@ -5738,10 +5738,10 @@
                 <a:spcPct val="125000"/>
               </a:lnSpc>
               <a:spcBef>
-                <a:spcPts val="200"/>
-              </a:spcBef>
-              <a:spcAft>
-                <a:spcPts val="200"/>
+                <a:spcPts val="0"/>
+              </a:spcBef>
+              <a:spcAft>
+                <a:spcPts val="0"/>
               </a:spcAft>
             </a:pPr>
             <a:r>
@@ -5855,7 +5855,7 @@
                 <a:spcPts val="0"/>
               </a:spcBef>
               <a:spcAft>
-                <a:spcPts val="600"/>
+                <a:spcPts val="0"/>
               </a:spcAft>
             </a:pPr>
             <a:r>
@@ -5874,10 +5874,10 @@
                 <a:spcPct val="125000"/>
               </a:lnSpc>
               <a:spcBef>
-                <a:spcPts val="800"/>
-              </a:spcBef>
-              <a:spcAft>
-                <a:spcPts val="300"/>
+                <a:spcPts val="0"/>
+              </a:spcBef>
+              <a:spcAft>
+                <a:spcPts val="0"/>
               </a:spcAft>
             </a:pPr>
             <a:r>
@@ -5896,10 +5896,10 @@
                 <a:spcPct val="125000"/>
               </a:lnSpc>
               <a:spcBef>
-                <a:spcPts val="200"/>
-              </a:spcBef>
-              <a:spcAft>
-                <a:spcPts val="200"/>
+                <a:spcPts val="0"/>
+              </a:spcBef>
+              <a:spcAft>
+                <a:spcPts val="0"/>
               </a:spcAft>
             </a:pPr>
             <a:r>
@@ -5918,10 +5918,10 @@
                 <a:spcPct val="125000"/>
               </a:lnSpc>
               <a:spcBef>
-                <a:spcPts val="800"/>
-              </a:spcBef>
-              <a:spcAft>
-                <a:spcPts val="300"/>
+                <a:spcPts val="0"/>
+              </a:spcBef>
+              <a:spcAft>
+                <a:spcPts val="0"/>
               </a:spcAft>
             </a:pPr>
             <a:r>
@@ -5940,10 +5940,10 @@
                 <a:spcPct val="125000"/>
               </a:lnSpc>
               <a:spcBef>
-                <a:spcPts val="200"/>
-              </a:spcBef>
-              <a:spcAft>
-                <a:spcPts val="200"/>
+                <a:spcPts val="0"/>
+              </a:spcBef>
+              <a:spcAft>
+                <a:spcPts val="0"/>
               </a:spcAft>
             </a:pPr>
             <a:r>
@@ -5962,10 +5962,10 @@
                 <a:spcPct val="125000"/>
               </a:lnSpc>
               <a:spcBef>
-                <a:spcPts val="200"/>
-              </a:spcBef>
-              <a:spcAft>
-                <a:spcPts val="200"/>
+                <a:spcPts val="0"/>
+              </a:spcBef>
+              <a:spcAft>
+                <a:spcPts val="0"/>
               </a:spcAft>
             </a:pPr>
             <a:r>
@@ -5984,10 +5984,10 @@
                 <a:spcPct val="125000"/>
               </a:lnSpc>
               <a:spcBef>
-                <a:spcPts val="800"/>
-              </a:spcBef>
-              <a:spcAft>
-                <a:spcPts val="300"/>
+                <a:spcPts val="0"/>
+              </a:spcBef>
+              <a:spcAft>
+                <a:spcPts val="0"/>
               </a:spcAft>
             </a:pPr>
             <a:r>
@@ -6006,10 +6006,10 @@
                 <a:spcPct val="125000"/>
               </a:lnSpc>
               <a:spcBef>
-                <a:spcPts val="200"/>
-              </a:spcBef>
-              <a:spcAft>
-                <a:spcPts val="200"/>
+                <a:spcPts val="0"/>
+              </a:spcBef>
+              <a:spcAft>
+                <a:spcPts val="0"/>
               </a:spcAft>
             </a:pPr>
             <a:r>
@@ -6028,10 +6028,10 @@
                 <a:spcPct val="125000"/>
               </a:lnSpc>
               <a:spcBef>
-                <a:spcPts val="800"/>
-              </a:spcBef>
-              <a:spcAft>
-                <a:spcPts val="300"/>
+                <a:spcPts val="0"/>
+              </a:spcBef>
+              <a:spcAft>
+                <a:spcPts val="0"/>
               </a:spcAft>
             </a:pPr>
             <a:r>
@@ -6050,10 +6050,10 @@
                 <a:spcPct val="125000"/>
               </a:lnSpc>
               <a:spcBef>
-                <a:spcPts val="200"/>
-              </a:spcBef>
-              <a:spcAft>
-                <a:spcPts val="200"/>
+                <a:spcPts val="0"/>
+              </a:spcBef>
+              <a:spcAft>
+                <a:spcPts val="0"/>
               </a:spcAft>
             </a:pPr>
             <a:r>
@@ -6167,7 +6167,7 @@
                 <a:spcPts val="0"/>
               </a:spcBef>
               <a:spcAft>
-                <a:spcPts val="600"/>
+                <a:spcPts val="0"/>
               </a:spcAft>
             </a:pPr>
             <a:r>
@@ -6186,10 +6186,10 @@
                 <a:spcPct val="125000"/>
               </a:lnSpc>
               <a:spcBef>
-                <a:spcPts val="800"/>
-              </a:spcBef>
-              <a:spcAft>
-                <a:spcPts val="300"/>
+                <a:spcPts val="0"/>
+              </a:spcBef>
+              <a:spcAft>
+                <a:spcPts val="0"/>
               </a:spcAft>
             </a:pPr>
             <a:r>
@@ -6208,10 +6208,10 @@
                 <a:spcPct val="125000"/>
               </a:lnSpc>
               <a:spcBef>
-                <a:spcPts val="200"/>
-              </a:spcBef>
-              <a:spcAft>
-                <a:spcPts val="200"/>
+                <a:spcPts val="0"/>
+              </a:spcBef>
+              <a:spcAft>
+                <a:spcPts val="0"/>
               </a:spcAft>
             </a:pPr>
             <a:r>
@@ -6230,10 +6230,10 @@
                 <a:spcPct val="125000"/>
               </a:lnSpc>
               <a:spcBef>
-                <a:spcPts val="800"/>
-              </a:spcBef>
-              <a:spcAft>
-                <a:spcPts val="300"/>
+                <a:spcPts val="0"/>
+              </a:spcBef>
+              <a:spcAft>
+                <a:spcPts val="0"/>
               </a:spcAft>
             </a:pPr>
             <a:r>
@@ -6252,10 +6252,10 @@
                 <a:spcPct val="125000"/>
               </a:lnSpc>
               <a:spcBef>
-                <a:spcPts val="200"/>
-              </a:spcBef>
-              <a:spcAft>
-                <a:spcPts val="200"/>
+                <a:spcPts val="0"/>
+              </a:spcBef>
+              <a:spcAft>
+                <a:spcPts val="0"/>
               </a:spcAft>
             </a:pPr>
             <a:r>
@@ -6274,10 +6274,10 @@
                 <a:spcPct val="125000"/>
               </a:lnSpc>
               <a:spcBef>
-                <a:spcPts val="200"/>
-              </a:spcBef>
-              <a:spcAft>
-                <a:spcPts val="200"/>
+                <a:spcPts val="0"/>
+              </a:spcBef>
+              <a:spcAft>
+                <a:spcPts val="0"/>
               </a:spcAft>
             </a:pPr>
             <a:r>
@@ -6296,10 +6296,10 @@
                 <a:spcPct val="125000"/>
               </a:lnSpc>
               <a:spcBef>
-                <a:spcPts val="800"/>
-              </a:spcBef>
-              <a:spcAft>
-                <a:spcPts val="300"/>
+                <a:spcPts val="0"/>
+              </a:spcBef>
+              <a:spcAft>
+                <a:spcPts val="0"/>
               </a:spcAft>
             </a:pPr>
             <a:r>
@@ -6318,10 +6318,10 @@
                 <a:spcPct val="125000"/>
               </a:lnSpc>
               <a:spcBef>
-                <a:spcPts val="200"/>
-              </a:spcBef>
-              <a:spcAft>
-                <a:spcPts val="200"/>
+                <a:spcPts val="0"/>
+              </a:spcBef>
+              <a:spcAft>
+                <a:spcPts val="0"/>
               </a:spcAft>
             </a:pPr>
             <a:r>
@@ -6340,10 +6340,10 @@
                 <a:spcPct val="125000"/>
               </a:lnSpc>
               <a:spcBef>
-                <a:spcPts val="800"/>
-              </a:spcBef>
-              <a:spcAft>
-                <a:spcPts val="300"/>
+                <a:spcPts val="0"/>
+              </a:spcBef>
+              <a:spcAft>
+                <a:spcPts val="0"/>
               </a:spcAft>
             </a:pPr>
             <a:r>
@@ -6362,10 +6362,10 @@
                 <a:spcPct val="125000"/>
               </a:lnSpc>
               <a:spcBef>
-                <a:spcPts val="200"/>
-              </a:spcBef>
-              <a:spcAft>
-                <a:spcPts val="200"/>
+                <a:spcPts val="0"/>
+              </a:spcBef>
+              <a:spcAft>
+                <a:spcPts val="0"/>
               </a:spcAft>
             </a:pPr>
             <a:r>
@@ -6479,7 +6479,7 @@
                 <a:spcPts val="0"/>
               </a:spcBef>
               <a:spcAft>
-                <a:spcPts val="600"/>
+                <a:spcPts val="0"/>
               </a:spcAft>
             </a:pPr>
             <a:r>
@@ -6498,10 +6498,10 @@
                 <a:spcPct val="125000"/>
               </a:lnSpc>
               <a:spcBef>
-                <a:spcPts val="800"/>
-              </a:spcBef>
-              <a:spcAft>
-                <a:spcPts val="300"/>
+                <a:spcPts val="0"/>
+              </a:spcBef>
+              <a:spcAft>
+                <a:spcPts val="0"/>
               </a:spcAft>
             </a:pPr>
             <a:r>
@@ -6520,10 +6520,10 @@
                 <a:spcPct val="125000"/>
               </a:lnSpc>
               <a:spcBef>
-                <a:spcPts val="200"/>
-              </a:spcBef>
-              <a:spcAft>
-                <a:spcPts val="200"/>
+                <a:spcPts val="0"/>
+              </a:spcBef>
+              <a:spcAft>
+                <a:spcPts val="0"/>
               </a:spcAft>
             </a:pPr>
             <a:r>
@@ -6542,10 +6542,10 @@
                 <a:spcPct val="125000"/>
               </a:lnSpc>
               <a:spcBef>
-                <a:spcPts val="800"/>
-              </a:spcBef>
-              <a:spcAft>
-                <a:spcPts val="300"/>
+                <a:spcPts val="0"/>
+              </a:spcBef>
+              <a:spcAft>
+                <a:spcPts val="0"/>
               </a:spcAft>
             </a:pPr>
             <a:r>
@@ -6564,10 +6564,10 @@
                 <a:spcPct val="125000"/>
               </a:lnSpc>
               <a:spcBef>
-                <a:spcPts val="200"/>
-              </a:spcBef>
-              <a:spcAft>
-                <a:spcPts val="200"/>
+                <a:spcPts val="0"/>
+              </a:spcBef>
+              <a:spcAft>
+                <a:spcPts val="0"/>
               </a:spcAft>
             </a:pPr>
             <a:r>
@@ -6586,10 +6586,10 @@
                 <a:spcPct val="125000"/>
               </a:lnSpc>
               <a:spcBef>
-                <a:spcPts val="200"/>
-              </a:spcBef>
-              <a:spcAft>
-                <a:spcPts val="200"/>
+                <a:spcPts val="0"/>
+              </a:spcBef>
+              <a:spcAft>
+                <a:spcPts val="0"/>
               </a:spcAft>
             </a:pPr>
             <a:r>
@@ -6608,10 +6608,10 @@
                 <a:spcPct val="125000"/>
               </a:lnSpc>
               <a:spcBef>
-                <a:spcPts val="200"/>
-              </a:spcBef>
-              <a:spcAft>
-                <a:spcPts val="200"/>
+                <a:spcPts val="0"/>
+              </a:spcBef>
+              <a:spcAft>
+                <a:spcPts val="0"/>
               </a:spcAft>
             </a:pPr>
             <a:r>
@@ -6630,10 +6630,10 @@
                 <a:spcPct val="125000"/>
               </a:lnSpc>
               <a:spcBef>
-                <a:spcPts val="200"/>
-              </a:spcBef>
-              <a:spcAft>
-                <a:spcPts val="200"/>
+                <a:spcPts val="0"/>
+              </a:spcBef>
+              <a:spcAft>
+                <a:spcPts val="0"/>
               </a:spcAft>
             </a:pPr>
             <a:r>
@@ -6652,10 +6652,10 @@
                 <a:spcPct val="125000"/>
               </a:lnSpc>
               <a:spcBef>
-                <a:spcPts val="200"/>
-              </a:spcBef>
-              <a:spcAft>
-                <a:spcPts val="200"/>
+                <a:spcPts val="0"/>
+              </a:spcBef>
+              <a:spcAft>
+                <a:spcPts val="0"/>
               </a:spcAft>
             </a:pPr>
             <a:r>
@@ -6674,10 +6674,10 @@
                 <a:spcPct val="125000"/>
               </a:lnSpc>
               <a:spcBef>
-                <a:spcPts val="800"/>
-              </a:spcBef>
-              <a:spcAft>
-                <a:spcPts val="300"/>
+                <a:spcPts val="0"/>
+              </a:spcBef>
+              <a:spcAft>
+                <a:spcPts val="0"/>
               </a:spcAft>
             </a:pPr>
             <a:r>
@@ -6696,10 +6696,10 @@
                 <a:spcPct val="125000"/>
               </a:lnSpc>
               <a:spcBef>
-                <a:spcPts val="200"/>
-              </a:spcBef>
-              <a:spcAft>
-                <a:spcPts val="200"/>
+                <a:spcPts val="0"/>
+              </a:spcBef>
+              <a:spcAft>
+                <a:spcPts val="0"/>
               </a:spcAft>
             </a:pPr>
             <a:r>
@@ -6718,10 +6718,10 @@
                 <a:spcPct val="125000"/>
               </a:lnSpc>
               <a:spcBef>
-                <a:spcPts val="800"/>
-              </a:spcBef>
-              <a:spcAft>
-                <a:spcPts val="300"/>
+                <a:spcPts val="0"/>
+              </a:spcBef>
+              <a:spcAft>
+                <a:spcPts val="0"/>
               </a:spcAft>
             </a:pPr>
             <a:r>
@@ -6740,10 +6740,10 @@
                 <a:spcPct val="125000"/>
               </a:lnSpc>
               <a:spcBef>
-                <a:spcPts val="200"/>
-              </a:spcBef>
-              <a:spcAft>
-                <a:spcPts val="200"/>
+                <a:spcPts val="0"/>
+              </a:spcBef>
+              <a:spcAft>
+                <a:spcPts val="0"/>
               </a:spcAft>
             </a:pPr>
             <a:r>
@@ -6857,7 +6857,7 @@
                 <a:spcPts val="0"/>
               </a:spcBef>
               <a:spcAft>
-                <a:spcPts val="600"/>
+                <a:spcPts val="0"/>
               </a:spcAft>
             </a:pPr>
             <a:r>
@@ -6876,10 +6876,10 @@
                 <a:spcPct val="125000"/>
               </a:lnSpc>
               <a:spcBef>
-                <a:spcPts val="800"/>
-              </a:spcBef>
-              <a:spcAft>
-                <a:spcPts val="300"/>
+                <a:spcPts val="0"/>
+              </a:spcBef>
+              <a:spcAft>
+                <a:spcPts val="0"/>
               </a:spcAft>
             </a:pPr>
             <a:r>
@@ -6898,10 +6898,10 @@
                 <a:spcPct val="125000"/>
               </a:lnSpc>
               <a:spcBef>
-                <a:spcPts val="200"/>
-              </a:spcBef>
-              <a:spcAft>
-                <a:spcPts val="200"/>
+                <a:spcPts val="0"/>
+              </a:spcBef>
+              <a:spcAft>
+                <a:spcPts val="0"/>
               </a:spcAft>
             </a:pPr>
             <a:r>
@@ -6920,10 +6920,10 @@
                 <a:spcPct val="125000"/>
               </a:lnSpc>
               <a:spcBef>
-                <a:spcPts val="800"/>
-              </a:spcBef>
-              <a:spcAft>
-                <a:spcPts val="300"/>
+                <a:spcPts val="0"/>
+              </a:spcBef>
+              <a:spcAft>
+                <a:spcPts val="0"/>
               </a:spcAft>
             </a:pPr>
             <a:r>
@@ -6942,10 +6942,10 @@
                 <a:spcPct val="125000"/>
               </a:lnSpc>
               <a:spcBef>
-                <a:spcPts val="200"/>
-              </a:spcBef>
-              <a:spcAft>
-                <a:spcPts val="200"/>
+                <a:spcPts val="0"/>
+              </a:spcBef>
+              <a:spcAft>
+                <a:spcPts val="0"/>
               </a:spcAft>
             </a:pPr>
             <a:r>
@@ -6964,10 +6964,10 @@
                 <a:spcPct val="125000"/>
               </a:lnSpc>
               <a:spcBef>
-                <a:spcPts val="200"/>
-              </a:spcBef>
-              <a:spcAft>
-                <a:spcPts val="200"/>
+                <a:spcPts val="0"/>
+              </a:spcBef>
+              <a:spcAft>
+                <a:spcPts val="0"/>
               </a:spcAft>
             </a:pPr>
             <a:r>
@@ -6986,10 +6986,10 @@
                 <a:spcPct val="125000"/>
               </a:lnSpc>
               <a:spcBef>
-                <a:spcPts val="800"/>
-              </a:spcBef>
-              <a:spcAft>
-                <a:spcPts val="300"/>
+                <a:spcPts val="0"/>
+              </a:spcBef>
+              <a:spcAft>
+                <a:spcPts val="0"/>
               </a:spcAft>
             </a:pPr>
             <a:r>
@@ -7008,10 +7008,10 @@
                 <a:spcPct val="125000"/>
               </a:lnSpc>
               <a:spcBef>
-                <a:spcPts val="200"/>
-              </a:spcBef>
-              <a:spcAft>
-                <a:spcPts val="200"/>
+                <a:spcPts val="0"/>
+              </a:spcBef>
+              <a:spcAft>
+                <a:spcPts val="0"/>
               </a:spcAft>
             </a:pPr>
             <a:r>
@@ -7030,10 +7030,10 @@
                 <a:spcPct val="125000"/>
               </a:lnSpc>
               <a:spcBef>
-                <a:spcPts val="800"/>
-              </a:spcBef>
-              <a:spcAft>
-                <a:spcPts val="300"/>
+                <a:spcPts val="0"/>
+              </a:spcBef>
+              <a:spcAft>
+                <a:spcPts val="0"/>
               </a:spcAft>
             </a:pPr>
             <a:r>
@@ -7052,10 +7052,10 @@
                 <a:spcPct val="125000"/>
               </a:lnSpc>
               <a:spcBef>
-                <a:spcPts val="200"/>
-              </a:spcBef>
-              <a:spcAft>
-                <a:spcPts val="200"/>
+                <a:spcPts val="0"/>
+              </a:spcBef>
+              <a:spcAft>
+                <a:spcPts val="0"/>
               </a:spcAft>
             </a:pPr>
             <a:r>
@@ -7169,7 +7169,7 @@
                 <a:spcPts val="0"/>
               </a:spcBef>
               <a:spcAft>
-                <a:spcPts val="600"/>
+                <a:spcPts val="0"/>
               </a:spcAft>
             </a:pPr>
             <a:r>
@@ -7188,10 +7188,10 @@
                 <a:spcPct val="125000"/>
               </a:lnSpc>
               <a:spcBef>
-                <a:spcPts val="800"/>
-              </a:spcBef>
-              <a:spcAft>
-                <a:spcPts val="300"/>
+                <a:spcPts val="0"/>
+              </a:spcBef>
+              <a:spcAft>
+                <a:spcPts val="0"/>
               </a:spcAft>
             </a:pPr>
             <a:r>
@@ -7210,10 +7210,10 @@
                 <a:spcPct val="125000"/>
               </a:lnSpc>
               <a:spcBef>
-                <a:spcPts val="200"/>
-              </a:spcBef>
-              <a:spcAft>
-                <a:spcPts val="200"/>
+                <a:spcPts val="0"/>
+              </a:spcBef>
+              <a:spcAft>
+                <a:spcPts val="0"/>
               </a:spcAft>
             </a:pPr>
             <a:r>
@@ -7232,10 +7232,10 @@
                 <a:spcPct val="125000"/>
               </a:lnSpc>
               <a:spcBef>
-                <a:spcPts val="800"/>
-              </a:spcBef>
-              <a:spcAft>
-                <a:spcPts val="300"/>
+                <a:spcPts val="0"/>
+              </a:spcBef>
+              <a:spcAft>
+                <a:spcPts val="0"/>
               </a:spcAft>
             </a:pPr>
             <a:r>
@@ -7254,10 +7254,10 @@
                 <a:spcPct val="125000"/>
               </a:lnSpc>
               <a:spcBef>
-                <a:spcPts val="200"/>
-              </a:spcBef>
-              <a:spcAft>
-                <a:spcPts val="200"/>
+                <a:spcPts val="0"/>
+              </a:spcBef>
+              <a:spcAft>
+                <a:spcPts val="0"/>
               </a:spcAft>
             </a:pPr>
             <a:r>
@@ -7276,10 +7276,10 @@
                 <a:spcPct val="125000"/>
               </a:lnSpc>
               <a:spcBef>
-                <a:spcPts val="200"/>
-              </a:spcBef>
-              <a:spcAft>
-                <a:spcPts val="200"/>
+                <a:spcPts val="0"/>
+              </a:spcBef>
+              <a:spcAft>
+                <a:spcPts val="0"/>
               </a:spcAft>
             </a:pPr>
             <a:r>
@@ -7298,10 +7298,10 @@
                 <a:spcPct val="125000"/>
               </a:lnSpc>
               <a:spcBef>
-                <a:spcPts val="800"/>
-              </a:spcBef>
-              <a:spcAft>
-                <a:spcPts val="300"/>
+                <a:spcPts val="0"/>
+              </a:spcBef>
+              <a:spcAft>
+                <a:spcPts val="0"/>
               </a:spcAft>
             </a:pPr>
             <a:r>
@@ -7320,10 +7320,10 @@
                 <a:spcPct val="125000"/>
               </a:lnSpc>
               <a:spcBef>
-                <a:spcPts val="200"/>
-              </a:spcBef>
-              <a:spcAft>
-                <a:spcPts val="200"/>
+                <a:spcPts val="0"/>
+              </a:spcBef>
+              <a:spcAft>
+                <a:spcPts val="0"/>
               </a:spcAft>
             </a:pPr>
             <a:r>
@@ -7342,10 +7342,10 @@
                 <a:spcPct val="125000"/>
               </a:lnSpc>
               <a:spcBef>
-                <a:spcPts val="800"/>
-              </a:spcBef>
-              <a:spcAft>
-                <a:spcPts val="300"/>
+                <a:spcPts val="0"/>
+              </a:spcBef>
+              <a:spcAft>
+                <a:spcPts val="0"/>
               </a:spcAft>
             </a:pPr>
             <a:r>
@@ -7364,10 +7364,10 @@
                 <a:spcPct val="125000"/>
               </a:lnSpc>
               <a:spcBef>
-                <a:spcPts val="200"/>
-              </a:spcBef>
-              <a:spcAft>
-                <a:spcPts val="200"/>
+                <a:spcPts val="0"/>
+              </a:spcBef>
+              <a:spcAft>
+                <a:spcPts val="0"/>
               </a:spcAft>
             </a:pPr>
             <a:r>
@@ -7481,7 +7481,7 @@
                 <a:spcPts val="0"/>
               </a:spcBef>
               <a:spcAft>
-                <a:spcPts val="600"/>
+                <a:spcPts val="0"/>
               </a:spcAft>
             </a:pPr>
             <a:r>
@@ -7500,10 +7500,10 @@
                 <a:spcPct val="125000"/>
               </a:lnSpc>
               <a:spcBef>
-                <a:spcPts val="800"/>
-              </a:spcBef>
-              <a:spcAft>
-                <a:spcPts val="300"/>
+                <a:spcPts val="0"/>
+              </a:spcBef>
+              <a:spcAft>
+                <a:spcPts val="0"/>
               </a:spcAft>
             </a:pPr>
             <a:r>
@@ -7522,10 +7522,10 @@
                 <a:spcPct val="125000"/>
               </a:lnSpc>
               <a:spcBef>
-                <a:spcPts val="200"/>
-              </a:spcBef>
-              <a:spcAft>
-                <a:spcPts val="200"/>
+                <a:spcPts val="0"/>
+              </a:spcBef>
+              <a:spcAft>
+                <a:spcPts val="0"/>
               </a:spcAft>
             </a:pPr>
             <a:r>
@@ -7544,10 +7544,10 @@
                 <a:spcPct val="125000"/>
               </a:lnSpc>
               <a:spcBef>
-                <a:spcPts val="800"/>
-              </a:spcBef>
-              <a:spcAft>
-                <a:spcPts val="300"/>
+                <a:spcPts val="0"/>
+              </a:spcBef>
+              <a:spcAft>
+                <a:spcPts val="0"/>
               </a:spcAft>
             </a:pPr>
             <a:r>
@@ -7566,10 +7566,10 @@
                 <a:spcPct val="125000"/>
               </a:lnSpc>
               <a:spcBef>
-                <a:spcPts val="200"/>
-              </a:spcBef>
-              <a:spcAft>
-                <a:spcPts val="200"/>
+                <a:spcPts val="0"/>
+              </a:spcBef>
+              <a:spcAft>
+                <a:spcPts val="0"/>
               </a:spcAft>
             </a:pPr>
             <a:r>
@@ -7588,10 +7588,10 @@
                 <a:spcPct val="125000"/>
               </a:lnSpc>
               <a:spcBef>
-                <a:spcPts val="800"/>
-              </a:spcBef>
-              <a:spcAft>
-                <a:spcPts val="300"/>
+                <a:spcPts val="0"/>
+              </a:spcBef>
+              <a:spcAft>
+                <a:spcPts val="0"/>
               </a:spcAft>
             </a:pPr>
             <a:r>
@@ -7610,10 +7610,10 @@
                 <a:spcPct val="125000"/>
               </a:lnSpc>
               <a:spcBef>
-                <a:spcPts val="200"/>
-              </a:spcBef>
-              <a:spcAft>
-                <a:spcPts val="200"/>
+                <a:spcPts val="0"/>
+              </a:spcBef>
+              <a:spcAft>
+                <a:spcPts val="0"/>
               </a:spcAft>
             </a:pPr>
             <a:r>
@@ -7632,10 +7632,10 @@
                 <a:spcPct val="125000"/>
               </a:lnSpc>
               <a:spcBef>
-                <a:spcPts val="800"/>
-              </a:spcBef>
-              <a:spcAft>
-                <a:spcPts val="300"/>
+                <a:spcPts val="0"/>
+              </a:spcBef>
+              <a:spcAft>
+                <a:spcPts val="0"/>
               </a:spcAft>
             </a:pPr>
             <a:r>
@@ -7654,10 +7654,10 @@
                 <a:spcPct val="125000"/>
               </a:lnSpc>
               <a:spcBef>
-                <a:spcPts val="200"/>
-              </a:spcBef>
-              <a:spcAft>
-                <a:spcPts val="200"/>
+                <a:spcPts val="0"/>
+              </a:spcBef>
+              <a:spcAft>
+                <a:spcPts val="0"/>
               </a:spcAft>
             </a:pPr>
             <a:r>
@@ -7771,7 +7771,7 @@
                 <a:spcPts val="0"/>
               </a:spcBef>
               <a:spcAft>
-                <a:spcPts val="600"/>
+                <a:spcPts val="0"/>
               </a:spcAft>
             </a:pPr>
             <a:r>
@@ -7790,10 +7790,10 @@
                 <a:spcPct val="125000"/>
               </a:lnSpc>
               <a:spcBef>
-                <a:spcPts val="800"/>
-              </a:spcBef>
-              <a:spcAft>
-                <a:spcPts val="300"/>
+                <a:spcPts val="0"/>
+              </a:spcBef>
+              <a:spcAft>
+                <a:spcPts val="0"/>
               </a:spcAft>
             </a:pPr>
             <a:r>
@@ -7812,10 +7812,10 @@
                 <a:spcPct val="125000"/>
               </a:lnSpc>
               <a:spcBef>
-                <a:spcPts val="200"/>
-              </a:spcBef>
-              <a:spcAft>
-                <a:spcPts val="200"/>
+                <a:spcPts val="0"/>
+              </a:spcBef>
+              <a:spcAft>
+                <a:spcPts val="0"/>
               </a:spcAft>
             </a:pPr>
             <a:r>
@@ -7834,10 +7834,10 @@
                 <a:spcPct val="125000"/>
               </a:lnSpc>
               <a:spcBef>
-                <a:spcPts val="800"/>
-              </a:spcBef>
-              <a:spcAft>
-                <a:spcPts val="300"/>
+                <a:spcPts val="0"/>
+              </a:spcBef>
+              <a:spcAft>
+                <a:spcPts val="0"/>
               </a:spcAft>
             </a:pPr>
             <a:r>
@@ -7856,10 +7856,10 @@
                 <a:spcPct val="125000"/>
               </a:lnSpc>
               <a:spcBef>
-                <a:spcPts val="200"/>
-              </a:spcBef>
-              <a:spcAft>
-                <a:spcPts val="200"/>
+                <a:spcPts val="0"/>
+              </a:spcBef>
+              <a:spcAft>
+                <a:spcPts val="0"/>
               </a:spcAft>
             </a:pPr>
             <a:r>
@@ -7878,10 +7878,10 @@
                 <a:spcPct val="125000"/>
               </a:lnSpc>
               <a:spcBef>
-                <a:spcPts val="200"/>
-              </a:spcBef>
-              <a:spcAft>
-                <a:spcPts val="200"/>
+                <a:spcPts val="0"/>
+              </a:spcBef>
+              <a:spcAft>
+                <a:spcPts val="0"/>
               </a:spcAft>
             </a:pPr>
             <a:r>
@@ -7900,10 +7900,10 @@
                 <a:spcPct val="125000"/>
               </a:lnSpc>
               <a:spcBef>
-                <a:spcPts val="200"/>
-              </a:spcBef>
-              <a:spcAft>
-                <a:spcPts val="200"/>
+                <a:spcPts val="0"/>
+              </a:spcBef>
+              <a:spcAft>
+                <a:spcPts val="0"/>
               </a:spcAft>
             </a:pPr>
             <a:r>
@@ -7922,10 +7922,10 @@
                 <a:spcPct val="125000"/>
               </a:lnSpc>
               <a:spcBef>
-                <a:spcPts val="200"/>
-              </a:spcBef>
-              <a:spcAft>
-                <a:spcPts val="200"/>
+                <a:spcPts val="0"/>
+              </a:spcBef>
+              <a:spcAft>
+                <a:spcPts val="0"/>
               </a:spcAft>
             </a:pPr>
             <a:r>
@@ -7944,10 +7944,10 @@
                 <a:spcPct val="125000"/>
               </a:lnSpc>
               <a:spcBef>
-                <a:spcPts val="800"/>
-              </a:spcBef>
-              <a:spcAft>
-                <a:spcPts val="300"/>
+                <a:spcPts val="0"/>
+              </a:spcBef>
+              <a:spcAft>
+                <a:spcPts val="0"/>
               </a:spcAft>
             </a:pPr>
             <a:r>
@@ -7966,10 +7966,10 @@
                 <a:spcPct val="125000"/>
               </a:lnSpc>
               <a:spcBef>
-                <a:spcPts val="200"/>
-              </a:spcBef>
-              <a:spcAft>
-                <a:spcPts val="200"/>
+                <a:spcPts val="0"/>
+              </a:spcBef>
+              <a:spcAft>
+                <a:spcPts val="0"/>
               </a:spcAft>
             </a:pPr>
             <a:r>
@@ -7988,10 +7988,10 @@
                 <a:spcPct val="125000"/>
               </a:lnSpc>
               <a:spcBef>
-                <a:spcPts val="800"/>
-              </a:spcBef>
-              <a:spcAft>
-                <a:spcPts val="300"/>
+                <a:spcPts val="0"/>
+              </a:spcBef>
+              <a:spcAft>
+                <a:spcPts val="0"/>
               </a:spcAft>
             </a:pPr>
             <a:r>
@@ -8010,10 +8010,10 @@
                 <a:spcPct val="125000"/>
               </a:lnSpc>
               <a:spcBef>
-                <a:spcPts val="200"/>
-              </a:spcBef>
-              <a:spcAft>
-                <a:spcPts val="200"/>
+                <a:spcPts val="0"/>
+              </a:spcBef>
+              <a:spcAft>
+                <a:spcPts val="0"/>
               </a:spcAft>
             </a:pPr>
             <a:r>
@@ -8127,7 +8127,7 @@
                 <a:spcPts val="0"/>
               </a:spcBef>
               <a:spcAft>
-                <a:spcPts val="600"/>
+                <a:spcPts val="0"/>
               </a:spcAft>
             </a:pPr>
             <a:r>
@@ -8146,10 +8146,10 @@
                 <a:spcPct val="125000"/>
               </a:lnSpc>
               <a:spcBef>
-                <a:spcPts val="800"/>
-              </a:spcBef>
-              <a:spcAft>
-                <a:spcPts val="300"/>
+                <a:spcPts val="0"/>
+              </a:spcBef>
+              <a:spcAft>
+                <a:spcPts val="0"/>
               </a:spcAft>
             </a:pPr>
             <a:r>
@@ -8168,10 +8168,10 @@
                 <a:spcPct val="125000"/>
               </a:lnSpc>
               <a:spcBef>
-                <a:spcPts val="200"/>
-              </a:spcBef>
-              <a:spcAft>
-                <a:spcPts val="200"/>
+                <a:spcPts val="0"/>
+              </a:spcBef>
+              <a:spcAft>
+                <a:spcPts val="0"/>
               </a:spcAft>
             </a:pPr>
             <a:r>
@@ -8190,10 +8190,10 @@
                 <a:spcPct val="125000"/>
               </a:lnSpc>
               <a:spcBef>
-                <a:spcPts val="800"/>
-              </a:spcBef>
-              <a:spcAft>
-                <a:spcPts val="300"/>
+                <a:spcPts val="0"/>
+              </a:spcBef>
+              <a:spcAft>
+                <a:spcPts val="0"/>
               </a:spcAft>
             </a:pPr>
             <a:r>
@@ -8212,10 +8212,10 @@
                 <a:spcPct val="125000"/>
               </a:lnSpc>
               <a:spcBef>
-                <a:spcPts val="200"/>
-              </a:spcBef>
-              <a:spcAft>
-                <a:spcPts val="200"/>
+                <a:spcPts val="0"/>
+              </a:spcBef>
+              <a:spcAft>
+                <a:spcPts val="0"/>
               </a:spcAft>
             </a:pPr>
             <a:r>
@@ -8234,10 +8234,10 @@
                 <a:spcPct val="125000"/>
               </a:lnSpc>
               <a:spcBef>
-                <a:spcPts val="200"/>
-              </a:spcBef>
-              <a:spcAft>
-                <a:spcPts val="200"/>
+                <a:spcPts val="0"/>
+              </a:spcBef>
+              <a:spcAft>
+                <a:spcPts val="0"/>
               </a:spcAft>
             </a:pPr>
             <a:r>
@@ -8256,10 +8256,10 @@
                 <a:spcPct val="125000"/>
               </a:lnSpc>
               <a:spcBef>
-                <a:spcPts val="800"/>
-              </a:spcBef>
-              <a:spcAft>
-                <a:spcPts val="300"/>
+                <a:spcPts val="0"/>
+              </a:spcBef>
+              <a:spcAft>
+                <a:spcPts val="0"/>
               </a:spcAft>
             </a:pPr>
             <a:r>
@@ -8278,10 +8278,10 @@
                 <a:spcPct val="125000"/>
               </a:lnSpc>
               <a:spcBef>
-                <a:spcPts val="200"/>
-              </a:spcBef>
-              <a:spcAft>
-                <a:spcPts val="200"/>
+                <a:spcPts val="0"/>
+              </a:spcBef>
+              <a:spcAft>
+                <a:spcPts val="0"/>
               </a:spcAft>
             </a:pPr>
             <a:r>
@@ -8300,10 +8300,10 @@
                 <a:spcPct val="125000"/>
               </a:lnSpc>
               <a:spcBef>
-                <a:spcPts val="800"/>
-              </a:spcBef>
-              <a:spcAft>
-                <a:spcPts val="300"/>
+                <a:spcPts val="0"/>
+              </a:spcBef>
+              <a:spcAft>
+                <a:spcPts val="0"/>
               </a:spcAft>
             </a:pPr>
             <a:r>
@@ -8322,10 +8322,10 @@
                 <a:spcPct val="125000"/>
               </a:lnSpc>
               <a:spcBef>
-                <a:spcPts val="200"/>
-              </a:spcBef>
-              <a:spcAft>
-                <a:spcPts val="200"/>
+                <a:spcPts val="0"/>
+              </a:spcBef>
+              <a:spcAft>
+                <a:spcPts val="0"/>
               </a:spcAft>
             </a:pPr>
             <a:r>
@@ -8439,7 +8439,7 @@
                 <a:spcPts val="0"/>
               </a:spcBef>
               <a:spcAft>
-                <a:spcPts val="600"/>
+                <a:spcPts val="0"/>
               </a:spcAft>
             </a:pPr>
             <a:r>
@@ -8458,10 +8458,10 @@
                 <a:spcPct val="125000"/>
               </a:lnSpc>
               <a:spcBef>
-                <a:spcPts val="800"/>
-              </a:spcBef>
-              <a:spcAft>
-                <a:spcPts val="300"/>
+                <a:spcPts val="0"/>
+              </a:spcBef>
+              <a:spcAft>
+                <a:spcPts val="0"/>
               </a:spcAft>
             </a:pPr>
             <a:r>
@@ -8480,10 +8480,10 @@
                 <a:spcPct val="125000"/>
               </a:lnSpc>
               <a:spcBef>
-                <a:spcPts val="200"/>
-              </a:spcBef>
-              <a:spcAft>
-                <a:spcPts val="200"/>
+                <a:spcPts val="0"/>
+              </a:spcBef>
+              <a:spcAft>
+                <a:spcPts val="0"/>
               </a:spcAft>
             </a:pPr>
             <a:r>
@@ -8502,10 +8502,10 @@
                 <a:spcPct val="125000"/>
               </a:lnSpc>
               <a:spcBef>
-                <a:spcPts val="800"/>
-              </a:spcBef>
-              <a:spcAft>
-                <a:spcPts val="300"/>
+                <a:spcPts val="0"/>
+              </a:spcBef>
+              <a:spcAft>
+                <a:spcPts val="0"/>
               </a:spcAft>
             </a:pPr>
             <a:r>
@@ -8524,10 +8524,10 @@
                 <a:spcPct val="125000"/>
               </a:lnSpc>
               <a:spcBef>
-                <a:spcPts val="200"/>
-              </a:spcBef>
-              <a:spcAft>
-                <a:spcPts val="200"/>
+                <a:spcPts val="0"/>
+              </a:spcBef>
+              <a:spcAft>
+                <a:spcPts val="0"/>
               </a:spcAft>
             </a:pPr>
             <a:r>
@@ -8546,10 +8546,10 @@
                 <a:spcPct val="125000"/>
               </a:lnSpc>
               <a:spcBef>
-                <a:spcPts val="200"/>
-              </a:spcBef>
-              <a:spcAft>
-                <a:spcPts val="200"/>
+                <a:spcPts val="0"/>
+              </a:spcBef>
+              <a:spcAft>
+                <a:spcPts val="0"/>
               </a:spcAft>
             </a:pPr>
             <a:r>
@@ -8568,10 +8568,10 @@
                 <a:spcPct val="125000"/>
               </a:lnSpc>
               <a:spcBef>
-                <a:spcPts val="200"/>
-              </a:spcBef>
-              <a:spcAft>
-                <a:spcPts val="200"/>
+                <a:spcPts val="0"/>
+              </a:spcBef>
+              <a:spcAft>
+                <a:spcPts val="0"/>
               </a:spcAft>
             </a:pPr>
             <a:r>
@@ -8590,10 +8590,10 @@
                 <a:spcPct val="125000"/>
               </a:lnSpc>
               <a:spcBef>
-                <a:spcPts val="200"/>
-              </a:spcBef>
-              <a:spcAft>
-                <a:spcPts val="200"/>
+                <a:spcPts val="0"/>
+              </a:spcBef>
+              <a:spcAft>
+                <a:spcPts val="0"/>
               </a:spcAft>
             </a:pPr>
             <a:r>
@@ -8612,10 +8612,10 @@
                 <a:spcPct val="125000"/>
               </a:lnSpc>
               <a:spcBef>
-                <a:spcPts val="200"/>
-              </a:spcBef>
-              <a:spcAft>
-                <a:spcPts val="200"/>
+                <a:spcPts val="0"/>
+              </a:spcBef>
+              <a:spcAft>
+                <a:spcPts val="0"/>
               </a:spcAft>
             </a:pPr>
             <a:r>
@@ -8634,10 +8634,10 @@
                 <a:spcPct val="125000"/>
               </a:lnSpc>
               <a:spcBef>
-                <a:spcPts val="200"/>
-              </a:spcBef>
-              <a:spcAft>
-                <a:spcPts val="200"/>
+                <a:spcPts val="0"/>
+              </a:spcBef>
+              <a:spcAft>
+                <a:spcPts val="0"/>
               </a:spcAft>
             </a:pPr>
             <a:r>
@@ -8656,10 +8656,10 @@
                 <a:spcPct val="125000"/>
               </a:lnSpc>
               <a:spcBef>
-                <a:spcPts val="200"/>
-              </a:spcBef>
-              <a:spcAft>
-                <a:spcPts val="200"/>
+                <a:spcPts val="0"/>
+              </a:spcBef>
+              <a:spcAft>
+                <a:spcPts val="0"/>
               </a:spcAft>
             </a:pPr>
             <a:r>
@@ -8678,10 +8678,10 @@
                 <a:spcPct val="125000"/>
               </a:lnSpc>
               <a:spcBef>
-                <a:spcPts val="800"/>
-              </a:spcBef>
-              <a:spcAft>
-                <a:spcPts val="300"/>
+                <a:spcPts val="0"/>
+              </a:spcBef>
+              <a:spcAft>
+                <a:spcPts val="0"/>
               </a:spcAft>
             </a:pPr>
             <a:r>
@@ -8700,10 +8700,10 @@
                 <a:spcPct val="125000"/>
               </a:lnSpc>
               <a:spcBef>
-                <a:spcPts val="200"/>
-              </a:spcBef>
-              <a:spcAft>
-                <a:spcPts val="200"/>
+                <a:spcPts val="0"/>
+              </a:spcBef>
+              <a:spcAft>
+                <a:spcPts val="0"/>
               </a:spcAft>
             </a:pPr>
             <a:r>
@@ -8722,10 +8722,10 @@
                 <a:spcPct val="125000"/>
               </a:lnSpc>
               <a:spcBef>
-                <a:spcPts val="800"/>
-              </a:spcBef>
-              <a:spcAft>
-                <a:spcPts val="300"/>
+                <a:spcPts val="0"/>
+              </a:spcBef>
+              <a:spcAft>
+                <a:spcPts val="0"/>
               </a:spcAft>
             </a:pPr>
             <a:r>
@@ -8744,10 +8744,10 @@
                 <a:spcPct val="125000"/>
               </a:lnSpc>
               <a:spcBef>
-                <a:spcPts val="200"/>
-              </a:spcBef>
-              <a:spcAft>
-                <a:spcPts val="200"/>
+                <a:spcPts val="0"/>
+              </a:spcBef>
+              <a:spcAft>
+                <a:spcPts val="0"/>
               </a:spcAft>
             </a:pPr>
             <a:r>
@@ -8861,7 +8861,7 @@
                 <a:spcPts val="0"/>
               </a:spcBef>
               <a:spcAft>
-                <a:spcPts val="600"/>
+                <a:spcPts val="0"/>
               </a:spcAft>
             </a:pPr>
             <a:r>
@@ -8880,10 +8880,10 @@
                 <a:spcPct val="125000"/>
               </a:lnSpc>
               <a:spcBef>
-                <a:spcPts val="800"/>
-              </a:spcBef>
-              <a:spcAft>
-                <a:spcPts val="300"/>
+                <a:spcPts val="0"/>
+              </a:spcBef>
+              <a:spcAft>
+                <a:spcPts val="0"/>
               </a:spcAft>
             </a:pPr>
             <a:r>
@@ -8902,10 +8902,10 @@
                 <a:spcPct val="125000"/>
               </a:lnSpc>
               <a:spcBef>
-                <a:spcPts val="200"/>
-              </a:spcBef>
-              <a:spcAft>
-                <a:spcPts val="200"/>
+                <a:spcPts val="0"/>
+              </a:spcBef>
+              <a:spcAft>
+                <a:spcPts val="0"/>
               </a:spcAft>
             </a:pPr>
             <a:r>
@@ -8924,10 +8924,10 @@
                 <a:spcPct val="125000"/>
               </a:lnSpc>
               <a:spcBef>
-                <a:spcPts val="800"/>
-              </a:spcBef>
-              <a:spcAft>
-                <a:spcPts val="300"/>
+                <a:spcPts val="0"/>
+              </a:spcBef>
+              <a:spcAft>
+                <a:spcPts val="0"/>
               </a:spcAft>
             </a:pPr>
             <a:r>
@@ -8946,10 +8946,10 @@
                 <a:spcPct val="125000"/>
               </a:lnSpc>
               <a:spcBef>
-                <a:spcPts val="200"/>
-              </a:spcBef>
-              <a:spcAft>
-                <a:spcPts val="200"/>
+                <a:spcPts val="0"/>
+              </a:spcBef>
+              <a:spcAft>
+                <a:spcPts val="0"/>
               </a:spcAft>
             </a:pPr>
             <a:r>
@@ -8968,10 +8968,10 @@
                 <a:spcPct val="125000"/>
               </a:lnSpc>
               <a:spcBef>
-                <a:spcPts val="200"/>
-              </a:spcBef>
-              <a:spcAft>
-                <a:spcPts val="200"/>
+                <a:spcPts val="0"/>
+              </a:spcBef>
+              <a:spcAft>
+                <a:spcPts val="0"/>
               </a:spcAft>
             </a:pPr>
             <a:r>
@@ -8990,10 +8990,10 @@
                 <a:spcPct val="125000"/>
               </a:lnSpc>
               <a:spcBef>
-                <a:spcPts val="800"/>
-              </a:spcBef>
-              <a:spcAft>
-                <a:spcPts val="300"/>
+                <a:spcPts val="0"/>
+              </a:spcBef>
+              <a:spcAft>
+                <a:spcPts val="0"/>
               </a:spcAft>
             </a:pPr>
             <a:r>
@@ -9012,10 +9012,10 @@
                 <a:spcPct val="125000"/>
               </a:lnSpc>
               <a:spcBef>
-                <a:spcPts val="200"/>
-              </a:spcBef>
-              <a:spcAft>
-                <a:spcPts val="200"/>
+                <a:spcPts val="0"/>
+              </a:spcBef>
+              <a:spcAft>
+                <a:spcPts val="0"/>
               </a:spcAft>
             </a:pPr>
             <a:r>
@@ -9034,10 +9034,10 @@
                 <a:spcPct val="125000"/>
               </a:lnSpc>
               <a:spcBef>
-                <a:spcPts val="800"/>
-              </a:spcBef>
-              <a:spcAft>
-                <a:spcPts val="300"/>
+                <a:spcPts val="0"/>
+              </a:spcBef>
+              <a:spcAft>
+                <a:spcPts val="0"/>
               </a:spcAft>
             </a:pPr>
             <a:r>
@@ -9056,10 +9056,10 @@
                 <a:spcPct val="125000"/>
               </a:lnSpc>
               <a:spcBef>
-                <a:spcPts val="200"/>
-              </a:spcBef>
-              <a:spcAft>
-                <a:spcPts val="200"/>
+                <a:spcPts val="0"/>
+              </a:spcBef>
+              <a:spcAft>
+                <a:spcPts val="0"/>
               </a:spcAft>
             </a:pPr>
             <a:r>
@@ -9173,7 +9173,7 @@
                 <a:spcPts val="0"/>
               </a:spcBef>
               <a:spcAft>
-                <a:spcPts val="600"/>
+                <a:spcPts val="0"/>
               </a:spcAft>
             </a:pPr>
             <a:r>
@@ -9192,10 +9192,10 @@
                 <a:spcPct val="125000"/>
               </a:lnSpc>
               <a:spcBef>
-                <a:spcPts val="800"/>
-              </a:spcBef>
-              <a:spcAft>
-                <a:spcPts val="300"/>
+                <a:spcPts val="0"/>
+              </a:spcBef>
+              <a:spcAft>
+                <a:spcPts val="0"/>
               </a:spcAft>
             </a:pPr>
             <a:r>
@@ -9214,10 +9214,10 @@
                 <a:spcPct val="125000"/>
               </a:lnSpc>
               <a:spcBef>
-                <a:spcPts val="200"/>
-              </a:spcBef>
-              <a:spcAft>
-                <a:spcPts val="200"/>
+                <a:spcPts val="0"/>
+              </a:spcBef>
+              <a:spcAft>
+                <a:spcPts val="0"/>
               </a:spcAft>
             </a:pPr>
             <a:r>
@@ -9236,10 +9236,10 @@
                 <a:spcPct val="125000"/>
               </a:lnSpc>
               <a:spcBef>
-                <a:spcPts val="800"/>
-              </a:spcBef>
-              <a:spcAft>
-                <a:spcPts val="300"/>
+                <a:spcPts val="0"/>
+              </a:spcBef>
+              <a:spcAft>
+                <a:spcPts val="0"/>
               </a:spcAft>
             </a:pPr>
             <a:r>
@@ -9258,10 +9258,10 @@
                 <a:spcPct val="125000"/>
               </a:lnSpc>
               <a:spcBef>
-                <a:spcPts val="200"/>
-              </a:spcBef>
-              <a:spcAft>
-                <a:spcPts val="200"/>
+                <a:spcPts val="0"/>
+              </a:spcBef>
+              <a:spcAft>
+                <a:spcPts val="0"/>
               </a:spcAft>
             </a:pPr>
             <a:r>
@@ -9280,10 +9280,10 @@
                 <a:spcPct val="125000"/>
               </a:lnSpc>
               <a:spcBef>
-                <a:spcPts val="800"/>
-              </a:spcBef>
-              <a:spcAft>
-                <a:spcPts val="300"/>
+                <a:spcPts val="0"/>
+              </a:spcBef>
+              <a:spcAft>
+                <a:spcPts val="0"/>
               </a:spcAft>
             </a:pPr>
             <a:r>
@@ -9302,10 +9302,10 @@
                 <a:spcPct val="125000"/>
               </a:lnSpc>
               <a:spcBef>
-                <a:spcPts val="200"/>
-              </a:spcBef>
-              <a:spcAft>
-                <a:spcPts val="200"/>
+                <a:spcPts val="0"/>
+              </a:spcBef>
+              <a:spcAft>
+                <a:spcPts val="0"/>
               </a:spcAft>
             </a:pPr>
             <a:r>
@@ -9324,10 +9324,10 @@
                 <a:spcPct val="125000"/>
               </a:lnSpc>
               <a:spcBef>
-                <a:spcPts val="800"/>
-              </a:spcBef>
-              <a:spcAft>
-                <a:spcPts val="300"/>
+                <a:spcPts val="0"/>
+              </a:spcBef>
+              <a:spcAft>
+                <a:spcPts val="0"/>
               </a:spcAft>
             </a:pPr>
             <a:r>
@@ -9346,10 +9346,10 @@
                 <a:spcPct val="125000"/>
               </a:lnSpc>
               <a:spcBef>
-                <a:spcPts val="200"/>
-              </a:spcBef>
-              <a:spcAft>
-                <a:spcPts val="200"/>
+                <a:spcPts val="0"/>
+              </a:spcBef>
+              <a:spcAft>
+                <a:spcPts val="0"/>
               </a:spcAft>
             </a:pPr>
             <a:r>
@@ -9463,7 +9463,7 @@
                 <a:spcPts val="0"/>
               </a:spcBef>
               <a:spcAft>
-                <a:spcPts val="600"/>
+                <a:spcPts val="0"/>
               </a:spcAft>
             </a:pPr>
             <a:r>
@@ -9482,10 +9482,10 @@
                 <a:spcPct val="125000"/>
               </a:lnSpc>
               <a:spcBef>
-                <a:spcPts val="800"/>
-              </a:spcBef>
-              <a:spcAft>
-                <a:spcPts val="300"/>
+                <a:spcPts val="0"/>
+              </a:spcBef>
+              <a:spcAft>
+                <a:spcPts val="0"/>
               </a:spcAft>
             </a:pPr>
             <a:r>
@@ -9504,10 +9504,10 @@
                 <a:spcPct val="125000"/>
               </a:lnSpc>
               <a:spcBef>
-                <a:spcPts val="200"/>
-              </a:spcBef>
-              <a:spcAft>
-                <a:spcPts val="200"/>
+                <a:spcPts val="0"/>
+              </a:spcBef>
+              <a:spcAft>
+                <a:spcPts val="0"/>
               </a:spcAft>
             </a:pPr>
             <a:r>
@@ -9526,10 +9526,10 @@
                 <a:spcPct val="125000"/>
               </a:lnSpc>
               <a:spcBef>
-                <a:spcPts val="800"/>
-              </a:spcBef>
-              <a:spcAft>
-                <a:spcPts val="300"/>
+                <a:spcPts val="0"/>
+              </a:spcBef>
+              <a:spcAft>
+                <a:spcPts val="0"/>
               </a:spcAft>
             </a:pPr>
             <a:r>
@@ -9548,10 +9548,10 @@
                 <a:spcPct val="125000"/>
               </a:lnSpc>
               <a:spcBef>
-                <a:spcPts val="200"/>
-              </a:spcBef>
-              <a:spcAft>
-                <a:spcPts val="200"/>
+                <a:spcPts val="0"/>
+              </a:spcBef>
+              <a:spcAft>
+                <a:spcPts val="0"/>
               </a:spcAft>
             </a:pPr>
             <a:r>
@@ -9570,10 +9570,10 @@
                 <a:spcPct val="125000"/>
               </a:lnSpc>
               <a:spcBef>
-                <a:spcPts val="200"/>
-              </a:spcBef>
-              <a:spcAft>
-                <a:spcPts val="200"/>
+                <a:spcPts val="0"/>
+              </a:spcBef>
+              <a:spcAft>
+                <a:spcPts val="0"/>
               </a:spcAft>
             </a:pPr>
             <a:r>
@@ -9592,10 +9592,10 @@
                 <a:spcPct val="125000"/>
               </a:lnSpc>
               <a:spcBef>
-                <a:spcPts val="800"/>
-              </a:spcBef>
-              <a:spcAft>
-                <a:spcPts val="300"/>
+                <a:spcPts val="0"/>
+              </a:spcBef>
+              <a:spcAft>
+                <a:spcPts val="0"/>
               </a:spcAft>
             </a:pPr>
             <a:r>
@@ -9614,10 +9614,10 @@
                 <a:spcPct val="125000"/>
               </a:lnSpc>
               <a:spcBef>
-                <a:spcPts val="200"/>
-              </a:spcBef>
-              <a:spcAft>
-                <a:spcPts val="200"/>
+                <a:spcPts val="0"/>
+              </a:spcBef>
+              <a:spcAft>
+                <a:spcPts val="0"/>
               </a:spcAft>
             </a:pPr>
             <a:r>
@@ -9636,10 +9636,10 @@
                 <a:spcPct val="125000"/>
               </a:lnSpc>
               <a:spcBef>
-                <a:spcPts val="800"/>
-              </a:spcBef>
-              <a:spcAft>
-                <a:spcPts val="300"/>
+                <a:spcPts val="0"/>
+              </a:spcBef>
+              <a:spcAft>
+                <a:spcPts val="0"/>
               </a:spcAft>
             </a:pPr>
             <a:r>
@@ -9658,10 +9658,10 @@
                 <a:spcPct val="125000"/>
               </a:lnSpc>
               <a:spcBef>
-                <a:spcPts val="200"/>
-              </a:spcBef>
-              <a:spcAft>
-                <a:spcPts val="200"/>
+                <a:spcPts val="0"/>
+              </a:spcBef>
+              <a:spcAft>
+                <a:spcPts val="0"/>
               </a:spcAft>
             </a:pPr>
             <a:r>
@@ -9775,7 +9775,7 @@
                 <a:spcPts val="0"/>
               </a:spcBef>
               <a:spcAft>
-                <a:spcPts val="600"/>
+                <a:spcPts val="0"/>
               </a:spcAft>
             </a:pPr>
             <a:r>
@@ -9794,10 +9794,10 @@
                 <a:spcPct val="125000"/>
               </a:lnSpc>
               <a:spcBef>
-                <a:spcPts val="800"/>
-              </a:spcBef>
-              <a:spcAft>
-                <a:spcPts val="300"/>
+                <a:spcPts val="0"/>
+              </a:spcBef>
+              <a:spcAft>
+                <a:spcPts val="0"/>
               </a:spcAft>
             </a:pPr>
             <a:r>
@@ -9816,10 +9816,10 @@
                 <a:spcPct val="125000"/>
               </a:lnSpc>
               <a:spcBef>
-                <a:spcPts val="200"/>
-              </a:spcBef>
-              <a:spcAft>
-                <a:spcPts val="200"/>
+                <a:spcPts val="0"/>
+              </a:spcBef>
+              <a:spcAft>
+                <a:spcPts val="0"/>
               </a:spcAft>
             </a:pPr>
             <a:r>
@@ -9838,10 +9838,10 @@
                 <a:spcPct val="125000"/>
               </a:lnSpc>
               <a:spcBef>
-                <a:spcPts val="800"/>
-              </a:spcBef>
-              <a:spcAft>
-                <a:spcPts val="300"/>
+                <a:spcPts val="0"/>
+              </a:spcBef>
+              <a:spcAft>
+                <a:spcPts val="0"/>
               </a:spcAft>
             </a:pPr>
             <a:r>
@@ -9860,10 +9860,10 @@
                 <a:spcPct val="125000"/>
               </a:lnSpc>
               <a:spcBef>
-                <a:spcPts val="200"/>
-              </a:spcBef>
-              <a:spcAft>
-                <a:spcPts val="200"/>
+                <a:spcPts val="0"/>
+              </a:spcBef>
+              <a:spcAft>
+                <a:spcPts val="0"/>
               </a:spcAft>
             </a:pPr>
             <a:r>
@@ -9882,10 +9882,10 @@
                 <a:spcPct val="125000"/>
               </a:lnSpc>
               <a:spcBef>
-                <a:spcPts val="200"/>
-              </a:spcBef>
-              <a:spcAft>
-                <a:spcPts val="200"/>
+                <a:spcPts val="0"/>
+              </a:spcBef>
+              <a:spcAft>
+                <a:spcPts val="0"/>
               </a:spcAft>
             </a:pPr>
             <a:r>
@@ -9904,10 +9904,10 @@
                 <a:spcPct val="125000"/>
               </a:lnSpc>
               <a:spcBef>
-                <a:spcPts val="800"/>
-              </a:spcBef>
-              <a:spcAft>
-                <a:spcPts val="300"/>
+                <a:spcPts val="0"/>
+              </a:spcBef>
+              <a:spcAft>
+                <a:spcPts val="0"/>
               </a:spcAft>
             </a:pPr>
             <a:r>
@@ -9926,10 +9926,10 @@
                 <a:spcPct val="125000"/>
               </a:lnSpc>
               <a:spcBef>
-                <a:spcPts val="200"/>
-              </a:spcBef>
-              <a:spcAft>
-                <a:spcPts val="200"/>
+                <a:spcPts val="0"/>
+              </a:spcBef>
+              <a:spcAft>
+                <a:spcPts val="0"/>
               </a:spcAft>
             </a:pPr>
             <a:r>
@@ -9948,10 +9948,10 @@
                 <a:spcPct val="125000"/>
               </a:lnSpc>
               <a:spcBef>
-                <a:spcPts val="800"/>
-              </a:spcBef>
-              <a:spcAft>
-                <a:spcPts val="300"/>
+                <a:spcPts val="0"/>
+              </a:spcBef>
+              <a:spcAft>
+                <a:spcPts val="0"/>
               </a:spcAft>
             </a:pPr>
             <a:r>
@@ -9970,10 +9970,10 @@
                 <a:spcPct val="125000"/>
               </a:lnSpc>
               <a:spcBef>
-                <a:spcPts val="200"/>
-              </a:spcBef>
-              <a:spcAft>
-                <a:spcPts val="200"/>
+                <a:spcPts val="0"/>
+              </a:spcBef>
+              <a:spcAft>
+                <a:spcPts val="0"/>
               </a:spcAft>
             </a:pPr>
             <a:r>
@@ -10087,7 +10087,7 @@
                 <a:spcPts val="0"/>
               </a:spcBef>
               <a:spcAft>
-                <a:spcPts val="600"/>
+                <a:spcPts val="0"/>
               </a:spcAft>
             </a:pPr>
             <a:r>
@@ -10106,10 +10106,10 @@
                 <a:spcPct val="125000"/>
               </a:lnSpc>
               <a:spcBef>
-                <a:spcPts val="800"/>
-              </a:spcBef>
-              <a:spcAft>
-                <a:spcPts val="300"/>
+                <a:spcPts val="0"/>
+              </a:spcBef>
+              <a:spcAft>
+                <a:spcPts val="0"/>
               </a:spcAft>
             </a:pPr>
             <a:r>
@@ -10128,10 +10128,10 @@
                 <a:spcPct val="125000"/>
               </a:lnSpc>
               <a:spcBef>
-                <a:spcPts val="200"/>
-              </a:spcBef>
-              <a:spcAft>
-                <a:spcPts val="200"/>
+                <a:spcPts val="0"/>
+              </a:spcBef>
+              <a:spcAft>
+                <a:spcPts val="0"/>
               </a:spcAft>
             </a:pPr>
             <a:r>
@@ -10150,10 +10150,10 @@
                 <a:spcPct val="125000"/>
               </a:lnSpc>
               <a:spcBef>
-                <a:spcPts val="800"/>
-              </a:spcBef>
-              <a:spcAft>
-                <a:spcPts val="300"/>
+                <a:spcPts val="0"/>
+              </a:spcBef>
+              <a:spcAft>
+                <a:spcPts val="0"/>
               </a:spcAft>
             </a:pPr>
             <a:r>
@@ -10172,10 +10172,10 @@
                 <a:spcPct val="125000"/>
               </a:lnSpc>
               <a:spcBef>
-                <a:spcPts val="200"/>
-              </a:spcBef>
-              <a:spcAft>
-                <a:spcPts val="200"/>
+                <a:spcPts val="0"/>
+              </a:spcBef>
+              <a:spcAft>
+                <a:spcPts val="0"/>
               </a:spcAft>
             </a:pPr>
             <a:r>
@@ -10194,10 +10194,10 @@
                 <a:spcPct val="125000"/>
               </a:lnSpc>
               <a:spcBef>
-                <a:spcPts val="200"/>
-              </a:spcBef>
-              <a:spcAft>
-                <a:spcPts val="200"/>
+                <a:spcPts val="0"/>
+              </a:spcBef>
+              <a:spcAft>
+                <a:spcPts val="0"/>
               </a:spcAft>
             </a:pPr>
             <a:r>
@@ -10216,10 +10216,10 @@
                 <a:spcPct val="125000"/>
               </a:lnSpc>
               <a:spcBef>
-                <a:spcPts val="800"/>
-              </a:spcBef>
-              <a:spcAft>
-                <a:spcPts val="300"/>
+                <a:spcPts val="0"/>
+              </a:spcBef>
+              <a:spcAft>
+                <a:spcPts val="0"/>
               </a:spcAft>
             </a:pPr>
             <a:r>
@@ -10238,10 +10238,10 @@
                 <a:spcPct val="125000"/>
               </a:lnSpc>
               <a:spcBef>
-                <a:spcPts val="200"/>
-              </a:spcBef>
-              <a:spcAft>
-                <a:spcPts val="200"/>
+                <a:spcPts val="0"/>
+              </a:spcBef>
+              <a:spcAft>
+                <a:spcPts val="0"/>
               </a:spcAft>
             </a:pPr>
             <a:r>
@@ -10260,10 +10260,10 @@
                 <a:spcPct val="125000"/>
               </a:lnSpc>
               <a:spcBef>
-                <a:spcPts val="800"/>
-              </a:spcBef>
-              <a:spcAft>
-                <a:spcPts val="300"/>
+                <a:spcPts val="0"/>
+              </a:spcBef>
+              <a:spcAft>
+                <a:spcPts val="0"/>
               </a:spcAft>
             </a:pPr>
             <a:r>
@@ -10282,10 +10282,10 @@
                 <a:spcPct val="125000"/>
               </a:lnSpc>
               <a:spcBef>
-                <a:spcPts val="200"/>
-              </a:spcBef>
-              <a:spcAft>
-                <a:spcPts val="200"/>
+                <a:spcPts val="0"/>
+              </a:spcBef>
+              <a:spcAft>
+                <a:spcPts val="0"/>
               </a:spcAft>
             </a:pPr>
             <a:r>
@@ -10399,7 +10399,7 @@
                 <a:spcPts val="0"/>
               </a:spcBef>
               <a:spcAft>
-                <a:spcPts val="600"/>
+                <a:spcPts val="0"/>
               </a:spcAft>
             </a:pPr>
             <a:r>
@@ -10418,10 +10418,10 @@
                 <a:spcPct val="125000"/>
               </a:lnSpc>
               <a:spcBef>
-                <a:spcPts val="800"/>
-              </a:spcBef>
-              <a:spcAft>
-                <a:spcPts val="300"/>
+                <a:spcPts val="0"/>
+              </a:spcBef>
+              <a:spcAft>
+                <a:spcPts val="0"/>
               </a:spcAft>
             </a:pPr>
             <a:r>
@@ -10440,10 +10440,10 @@
                 <a:spcPct val="125000"/>
               </a:lnSpc>
               <a:spcBef>
-                <a:spcPts val="200"/>
-              </a:spcBef>
-              <a:spcAft>
-                <a:spcPts val="200"/>
+                <a:spcPts val="0"/>
+              </a:spcBef>
+              <a:spcAft>
+                <a:spcPts val="0"/>
               </a:spcAft>
             </a:pPr>
             <a:r>
@@ -10462,10 +10462,10 @@
                 <a:spcPct val="125000"/>
               </a:lnSpc>
               <a:spcBef>
-                <a:spcPts val="800"/>
-              </a:spcBef>
-              <a:spcAft>
-                <a:spcPts val="300"/>
+                <a:spcPts val="0"/>
+              </a:spcBef>
+              <a:spcAft>
+                <a:spcPts val="0"/>
               </a:spcAft>
             </a:pPr>
             <a:r>
@@ -10484,10 +10484,10 @@
                 <a:spcPct val="125000"/>
               </a:lnSpc>
               <a:spcBef>
-                <a:spcPts val="200"/>
-              </a:spcBef>
-              <a:spcAft>
-                <a:spcPts val="200"/>
+                <a:spcPts val="0"/>
+              </a:spcBef>
+              <a:spcAft>
+                <a:spcPts val="0"/>
               </a:spcAft>
             </a:pPr>
             <a:r>
@@ -10506,10 +10506,10 @@
                 <a:spcPct val="125000"/>
               </a:lnSpc>
               <a:spcBef>
-                <a:spcPts val="800"/>
-              </a:spcBef>
-              <a:spcAft>
-                <a:spcPts val="300"/>
+                <a:spcPts val="0"/>
+              </a:spcBef>
+              <a:spcAft>
+                <a:spcPts val="0"/>
               </a:spcAft>
             </a:pPr>
             <a:r>
@@ -10528,10 +10528,10 @@
                 <a:spcPct val="125000"/>
               </a:lnSpc>
               <a:spcBef>
-                <a:spcPts val="200"/>
-              </a:spcBef>
-              <a:spcAft>
-                <a:spcPts val="200"/>
+                <a:spcPts val="0"/>
+              </a:spcBef>
+              <a:spcAft>
+                <a:spcPts val="0"/>
               </a:spcAft>
             </a:pPr>
             <a:r>
@@ -10550,10 +10550,10 @@
                 <a:spcPct val="125000"/>
               </a:lnSpc>
               <a:spcBef>
-                <a:spcPts val="800"/>
-              </a:spcBef>
-              <a:spcAft>
-                <a:spcPts val="300"/>
+                <a:spcPts val="0"/>
+              </a:spcBef>
+              <a:spcAft>
+                <a:spcPts val="0"/>
               </a:spcAft>
             </a:pPr>
             <a:r>
@@ -10572,10 +10572,10 @@
                 <a:spcPct val="125000"/>
               </a:lnSpc>
               <a:spcBef>
-                <a:spcPts val="200"/>
-              </a:spcBef>
-              <a:spcAft>
-                <a:spcPts val="200"/>
+                <a:spcPts val="0"/>
+              </a:spcBef>
+              <a:spcAft>
+                <a:spcPts val="0"/>
               </a:spcAft>
             </a:pPr>
             <a:r>
@@ -10689,7 +10689,7 @@
                 <a:spcPts val="0"/>
               </a:spcBef>
               <a:spcAft>
-                <a:spcPts val="600"/>
+                <a:spcPts val="0"/>
               </a:spcAft>
             </a:pPr>
             <a:r>
@@ -10708,10 +10708,10 @@
                 <a:spcPct val="125000"/>
               </a:lnSpc>
               <a:spcBef>
-                <a:spcPts val="800"/>
-              </a:spcBef>
-              <a:spcAft>
-                <a:spcPts val="300"/>
+                <a:spcPts val="0"/>
+              </a:spcBef>
+              <a:spcAft>
+                <a:spcPts val="0"/>
               </a:spcAft>
             </a:pPr>
             <a:r>
@@ -10730,10 +10730,10 @@
                 <a:spcPct val="125000"/>
               </a:lnSpc>
               <a:spcBef>
-                <a:spcPts val="200"/>
-              </a:spcBef>
-              <a:spcAft>
-                <a:spcPts val="200"/>
+                <a:spcPts val="0"/>
+              </a:spcBef>
+              <a:spcAft>
+                <a:spcPts val="0"/>
               </a:spcAft>
             </a:pPr>
             <a:r>
@@ -10752,10 +10752,10 @@
                 <a:spcPct val="125000"/>
               </a:lnSpc>
               <a:spcBef>
-                <a:spcPts val="800"/>
-              </a:spcBef>
-              <a:spcAft>
-                <a:spcPts val="300"/>
+                <a:spcPts val="0"/>
+              </a:spcBef>
+              <a:spcAft>
+                <a:spcPts val="0"/>
               </a:spcAft>
             </a:pPr>
             <a:r>
@@ -10774,10 +10774,10 @@
                 <a:spcPct val="125000"/>
               </a:lnSpc>
               <a:spcBef>
-                <a:spcPts val="200"/>
-              </a:spcBef>
-              <a:spcAft>
-                <a:spcPts val="200"/>
+                <a:spcPts val="0"/>
+              </a:spcBef>
+              <a:spcAft>
+                <a:spcPts val="0"/>
               </a:spcAft>
             </a:pPr>
             <a:r>
@@ -10796,10 +10796,10 @@
                 <a:spcPct val="125000"/>
               </a:lnSpc>
               <a:spcBef>
-                <a:spcPts val="200"/>
-              </a:spcBef>
-              <a:spcAft>
-                <a:spcPts val="200"/>
+                <a:spcPts val="0"/>
+              </a:spcBef>
+              <a:spcAft>
+                <a:spcPts val="0"/>
               </a:spcAft>
             </a:pPr>
             <a:r>
@@ -10818,10 +10818,10 @@
                 <a:spcPct val="125000"/>
               </a:lnSpc>
               <a:spcBef>
-                <a:spcPts val="200"/>
-              </a:spcBef>
-              <a:spcAft>
-                <a:spcPts val="200"/>
+                <a:spcPts val="0"/>
+              </a:spcBef>
+              <a:spcAft>
+                <a:spcPts val="0"/>
               </a:spcAft>
             </a:pPr>
             <a:r>
@@ -10840,10 +10840,10 @@
                 <a:spcPct val="125000"/>
               </a:lnSpc>
               <a:spcBef>
-                <a:spcPts val="800"/>
-              </a:spcBef>
-              <a:spcAft>
-                <a:spcPts val="300"/>
+                <a:spcPts val="0"/>
+              </a:spcBef>
+              <a:spcAft>
+                <a:spcPts val="0"/>
               </a:spcAft>
             </a:pPr>
             <a:r>
@@ -10862,10 +10862,10 @@
                 <a:spcPct val="125000"/>
               </a:lnSpc>
               <a:spcBef>
-                <a:spcPts val="200"/>
-              </a:spcBef>
-              <a:spcAft>
-                <a:spcPts val="200"/>
+                <a:spcPts val="0"/>
+              </a:spcBef>
+              <a:spcAft>
+                <a:spcPts val="0"/>
               </a:spcAft>
             </a:pPr>
             <a:r>
@@ -10884,10 +10884,10 @@
                 <a:spcPct val="125000"/>
               </a:lnSpc>
               <a:spcBef>
-                <a:spcPts val="800"/>
-              </a:spcBef>
-              <a:spcAft>
-                <a:spcPts val="300"/>
+                <a:spcPts val="0"/>
+              </a:spcBef>
+              <a:spcAft>
+                <a:spcPts val="0"/>
               </a:spcAft>
             </a:pPr>
             <a:r>
@@ -10906,10 +10906,10 @@
                 <a:spcPct val="125000"/>
               </a:lnSpc>
               <a:spcBef>
-                <a:spcPts val="200"/>
-              </a:spcBef>
-              <a:spcAft>
-                <a:spcPts val="200"/>
+                <a:spcPts val="0"/>
+              </a:spcBef>
+              <a:spcAft>
+                <a:spcPts val="0"/>
               </a:spcAft>
             </a:pPr>
             <a:r>
@@ -11023,7 +11023,7 @@
                 <a:spcPts val="0"/>
               </a:spcBef>
               <a:spcAft>
-                <a:spcPts val="600"/>
+                <a:spcPts val="0"/>
               </a:spcAft>
             </a:pPr>
             <a:r>
@@ -11042,10 +11042,10 @@
                 <a:spcPct val="125000"/>
               </a:lnSpc>
               <a:spcBef>
-                <a:spcPts val="800"/>
-              </a:spcBef>
-              <a:spcAft>
-                <a:spcPts val="300"/>
+                <a:spcPts val="0"/>
+              </a:spcBef>
+              <a:spcAft>
+                <a:spcPts val="0"/>
               </a:spcAft>
             </a:pPr>
             <a:r>
@@ -11064,10 +11064,10 @@
                 <a:spcPct val="125000"/>
               </a:lnSpc>
               <a:spcBef>
-                <a:spcPts val="200"/>
-              </a:spcBef>
-              <a:spcAft>
-                <a:spcPts val="200"/>
+                <a:spcPts val="0"/>
+              </a:spcBef>
+              <a:spcAft>
+                <a:spcPts val="0"/>
               </a:spcAft>
             </a:pPr>
             <a:r>
@@ -11086,10 +11086,10 @@
                 <a:spcPct val="125000"/>
               </a:lnSpc>
               <a:spcBef>
-                <a:spcPts val="800"/>
-              </a:spcBef>
-              <a:spcAft>
-                <a:spcPts val="300"/>
+                <a:spcPts val="0"/>
+              </a:spcBef>
+              <a:spcAft>
+                <a:spcPts val="0"/>
               </a:spcAft>
             </a:pPr>
             <a:r>
@@ -11108,10 +11108,10 @@
                 <a:spcPct val="125000"/>
               </a:lnSpc>
               <a:spcBef>
-                <a:spcPts val="200"/>
-              </a:spcBef>
-              <a:spcAft>
-                <a:spcPts val="200"/>
+                <a:spcPts val="0"/>
+              </a:spcBef>
+              <a:spcAft>
+                <a:spcPts val="0"/>
               </a:spcAft>
             </a:pPr>
             <a:r>
@@ -11130,10 +11130,10 @@
                 <a:spcPct val="125000"/>
               </a:lnSpc>
               <a:spcBef>
-                <a:spcPts val="800"/>
-              </a:spcBef>
-              <a:spcAft>
-                <a:spcPts val="300"/>
+                <a:spcPts val="0"/>
+              </a:spcBef>
+              <a:spcAft>
+                <a:spcPts val="0"/>
               </a:spcAft>
             </a:pPr>
             <a:r>
@@ -11152,10 +11152,10 @@
                 <a:spcPct val="125000"/>
               </a:lnSpc>
               <a:spcBef>
-                <a:spcPts val="200"/>
-              </a:spcBef>
-              <a:spcAft>
-                <a:spcPts val="200"/>
+                <a:spcPts val="0"/>
+              </a:spcBef>
+              <a:spcAft>
+                <a:spcPts val="0"/>
               </a:spcAft>
             </a:pPr>
             <a:r>
@@ -11174,10 +11174,10 @@
                 <a:spcPct val="125000"/>
               </a:lnSpc>
               <a:spcBef>
-                <a:spcPts val="800"/>
-              </a:spcBef>
-              <a:spcAft>
-                <a:spcPts val="300"/>
+                <a:spcPts val="0"/>
+              </a:spcBef>
+              <a:spcAft>
+                <a:spcPts val="0"/>
               </a:spcAft>
             </a:pPr>
             <a:r>
@@ -11196,10 +11196,10 @@
                 <a:spcPct val="125000"/>
               </a:lnSpc>
               <a:spcBef>
-                <a:spcPts val="200"/>
-              </a:spcBef>
-              <a:spcAft>
-                <a:spcPts val="200"/>
+                <a:spcPts val="0"/>
+              </a:spcBef>
+              <a:spcAft>
+                <a:spcPts val="0"/>
               </a:spcAft>
             </a:pPr>
             <a:r>
@@ -11313,7 +11313,7 @@
                 <a:spcPts val="0"/>
               </a:spcBef>
               <a:spcAft>
-                <a:spcPts val="600"/>
+                <a:spcPts val="0"/>
               </a:spcAft>
             </a:pPr>
             <a:r>
@@ -11332,10 +11332,10 @@
                 <a:spcPct val="125000"/>
               </a:lnSpc>
               <a:spcBef>
-                <a:spcPts val="800"/>
-              </a:spcBef>
-              <a:spcAft>
-                <a:spcPts val="300"/>
+                <a:spcPts val="0"/>
+              </a:spcBef>
+              <a:spcAft>
+                <a:spcPts val="0"/>
               </a:spcAft>
             </a:pPr>
             <a:r>
@@ -11354,10 +11354,10 @@
                 <a:spcPct val="125000"/>
               </a:lnSpc>
               <a:spcBef>
-                <a:spcPts val="200"/>
-              </a:spcBef>
-              <a:spcAft>
-                <a:spcPts val="200"/>
+                <a:spcPts val="0"/>
+              </a:spcBef>
+              <a:spcAft>
+                <a:spcPts val="0"/>
               </a:spcAft>
             </a:pPr>
             <a:r>
@@ -11376,10 +11376,10 @@
                 <a:spcPct val="125000"/>
               </a:lnSpc>
               <a:spcBef>
-                <a:spcPts val="800"/>
-              </a:spcBef>
-              <a:spcAft>
-                <a:spcPts val="300"/>
+                <a:spcPts val="0"/>
+              </a:spcBef>
+              <a:spcAft>
+                <a:spcPts val="0"/>
               </a:spcAft>
             </a:pPr>
             <a:r>
@@ -11398,10 +11398,10 @@
                 <a:spcPct val="125000"/>
               </a:lnSpc>
               <a:spcBef>
-                <a:spcPts val="200"/>
-              </a:spcBef>
-              <a:spcAft>
-                <a:spcPts val="200"/>
+                <a:spcPts val="0"/>
+              </a:spcBef>
+              <a:spcAft>
+                <a:spcPts val="0"/>
               </a:spcAft>
             </a:pPr>
             <a:r>
@@ -11420,10 +11420,10 @@
                 <a:spcPct val="125000"/>
               </a:lnSpc>
               <a:spcBef>
-                <a:spcPts val="200"/>
-              </a:spcBef>
-              <a:spcAft>
-                <a:spcPts val="200"/>
+                <a:spcPts val="0"/>
+              </a:spcBef>
+              <a:spcAft>
+                <a:spcPts val="0"/>
               </a:spcAft>
             </a:pPr>
             <a:r>
@@ -11442,10 +11442,10 @@
                 <a:spcPct val="125000"/>
               </a:lnSpc>
               <a:spcBef>
-                <a:spcPts val="800"/>
-              </a:spcBef>
-              <a:spcAft>
-                <a:spcPts val="300"/>
+                <a:spcPts val="0"/>
+              </a:spcBef>
+              <a:spcAft>
+                <a:spcPts val="0"/>
               </a:spcAft>
             </a:pPr>
             <a:r>
@@ -11464,10 +11464,10 @@
                 <a:spcPct val="125000"/>
               </a:lnSpc>
               <a:spcBef>
-                <a:spcPts val="200"/>
-              </a:spcBef>
-              <a:spcAft>
-                <a:spcPts val="200"/>
+                <a:spcPts val="0"/>
+              </a:spcBef>
+              <a:spcAft>
+                <a:spcPts val="0"/>
               </a:spcAft>
             </a:pPr>
             <a:r>
@@ -11486,10 +11486,10 @@
                 <a:spcPct val="125000"/>
               </a:lnSpc>
               <a:spcBef>
-                <a:spcPts val="800"/>
-              </a:spcBef>
-              <a:spcAft>
-                <a:spcPts val="300"/>
+                <a:spcPts val="0"/>
+              </a:spcBef>
+              <a:spcAft>
+                <a:spcPts val="0"/>
               </a:spcAft>
             </a:pPr>
             <a:r>
@@ -11508,10 +11508,10 @@
                 <a:spcPct val="125000"/>
               </a:lnSpc>
               <a:spcBef>
-                <a:spcPts val="200"/>
-              </a:spcBef>
-              <a:spcAft>
-                <a:spcPts val="200"/>
+                <a:spcPts val="0"/>
+              </a:spcBef>
+              <a:spcAft>
+                <a:spcPts val="0"/>
               </a:spcAft>
             </a:pPr>
             <a:r>
@@ -11625,7 +11625,7 @@
                 <a:spcPts val="0"/>
               </a:spcBef>
               <a:spcAft>
-                <a:spcPts val="600"/>
+                <a:spcPts val="0"/>
               </a:spcAft>
             </a:pPr>
             <a:r>
@@ -11644,10 +11644,10 @@
                 <a:spcPct val="125000"/>
               </a:lnSpc>
               <a:spcBef>
-                <a:spcPts val="800"/>
-              </a:spcBef>
-              <a:spcAft>
-                <a:spcPts val="300"/>
+                <a:spcPts val="0"/>
+              </a:spcBef>
+              <a:spcAft>
+                <a:spcPts val="0"/>
               </a:spcAft>
             </a:pPr>
             <a:r>
@@ -11666,10 +11666,10 @@
                 <a:spcPct val="125000"/>
               </a:lnSpc>
               <a:spcBef>
-                <a:spcPts val="200"/>
-              </a:spcBef>
-              <a:spcAft>
-                <a:spcPts val="200"/>
+                <a:spcPts val="0"/>
+              </a:spcBef>
+              <a:spcAft>
+                <a:spcPts val="0"/>
               </a:spcAft>
             </a:pPr>
             <a:r>
@@ -11688,10 +11688,10 @@
                 <a:spcPct val="125000"/>
               </a:lnSpc>
               <a:spcBef>
-                <a:spcPts val="800"/>
-              </a:spcBef>
-              <a:spcAft>
-                <a:spcPts val="300"/>
+                <a:spcPts val="0"/>
+              </a:spcBef>
+              <a:spcAft>
+                <a:spcPts val="0"/>
               </a:spcAft>
             </a:pPr>
             <a:r>
@@ -11710,10 +11710,10 @@
                 <a:spcPct val="125000"/>
               </a:lnSpc>
               <a:spcBef>
-                <a:spcPts val="200"/>
-              </a:spcBef>
-              <a:spcAft>
-                <a:spcPts val="200"/>
+                <a:spcPts val="0"/>
+              </a:spcBef>
+              <a:spcAft>
+                <a:spcPts val="0"/>
               </a:spcAft>
             </a:pPr>
             <a:r>
@@ -11732,10 +11732,10 @@
                 <a:spcPct val="125000"/>
               </a:lnSpc>
               <a:spcBef>
-                <a:spcPts val="800"/>
-              </a:spcBef>
-              <a:spcAft>
-                <a:spcPts val="300"/>
+                <a:spcPts val="0"/>
+              </a:spcBef>
+              <a:spcAft>
+                <a:spcPts val="0"/>
               </a:spcAft>
             </a:pPr>
             <a:r>
@@ -11754,10 +11754,10 @@
                 <a:spcPct val="125000"/>
               </a:lnSpc>
               <a:spcBef>
-                <a:spcPts val="200"/>
-              </a:spcBef>
-              <a:spcAft>
-                <a:spcPts val="200"/>
+                <a:spcPts val="0"/>
+              </a:spcBef>
+              <a:spcAft>
+                <a:spcPts val="0"/>
               </a:spcAft>
             </a:pPr>
             <a:r>
@@ -11776,10 +11776,10 @@
                 <a:spcPct val="125000"/>
               </a:lnSpc>
               <a:spcBef>
-                <a:spcPts val="800"/>
-              </a:spcBef>
-              <a:spcAft>
-                <a:spcPts val="300"/>
+                <a:spcPts val="0"/>
+              </a:spcBef>
+              <a:spcAft>
+                <a:spcPts val="0"/>
               </a:spcAft>
             </a:pPr>
             <a:r>
@@ -11798,10 +11798,10 @@
                 <a:spcPct val="125000"/>
               </a:lnSpc>
               <a:spcBef>
-                <a:spcPts val="200"/>
-              </a:spcBef>
-              <a:spcAft>
-                <a:spcPts val="200"/>
+                <a:spcPts val="0"/>
+              </a:spcBef>
+              <a:spcAft>
+                <a:spcPts val="0"/>
               </a:spcAft>
             </a:pPr>
             <a:r>
@@ -11915,7 +11915,7 @@
                 <a:spcPts val="0"/>
               </a:spcBef>
               <a:spcAft>
-                <a:spcPts val="600"/>
+                <a:spcPts val="0"/>
               </a:spcAft>
             </a:pPr>
             <a:r>
@@ -11934,10 +11934,10 @@
                 <a:spcPct val="125000"/>
               </a:lnSpc>
               <a:spcBef>
-                <a:spcPts val="800"/>
-              </a:spcBef>
-              <a:spcAft>
-                <a:spcPts val="300"/>
+                <a:spcPts val="0"/>
+              </a:spcBef>
+              <a:spcAft>
+                <a:spcPts val="0"/>
               </a:spcAft>
             </a:pPr>
             <a:r>
@@ -11956,10 +11956,10 @@
                 <a:spcPct val="125000"/>
               </a:lnSpc>
               <a:spcBef>
-                <a:spcPts val="200"/>
-              </a:spcBef>
-              <a:spcAft>
-                <a:spcPts val="200"/>
+                <a:spcPts val="0"/>
+              </a:spcBef>
+              <a:spcAft>
+                <a:spcPts val="0"/>
               </a:spcAft>
             </a:pPr>
             <a:r>
@@ -11978,10 +11978,10 @@
                 <a:spcPct val="125000"/>
               </a:lnSpc>
               <a:spcBef>
-                <a:spcPts val="800"/>
-              </a:spcBef>
-              <a:spcAft>
-                <a:spcPts val="300"/>
+                <a:spcPts val="0"/>
+              </a:spcBef>
+              <a:spcAft>
+                <a:spcPts val="0"/>
               </a:spcAft>
             </a:pPr>
             <a:r>
@@ -12000,10 +12000,10 @@
                 <a:spcPct val="125000"/>
               </a:lnSpc>
               <a:spcBef>
-                <a:spcPts val="200"/>
-              </a:spcBef>
-              <a:spcAft>
-                <a:spcPts val="200"/>
+                <a:spcPts val="0"/>
+              </a:spcBef>
+              <a:spcAft>
+                <a:spcPts val="0"/>
               </a:spcAft>
             </a:pPr>
             <a:r>
@@ -12022,10 +12022,10 @@
                 <a:spcPct val="125000"/>
               </a:lnSpc>
               <a:spcBef>
-                <a:spcPts val="200"/>
-              </a:spcBef>
-              <a:spcAft>
-                <a:spcPts val="200"/>
+                <a:spcPts val="0"/>
+              </a:spcBef>
+              <a:spcAft>
+                <a:spcPts val="0"/>
               </a:spcAft>
             </a:pPr>
             <a:r>
@@ -12044,10 +12044,10 @@
                 <a:spcPct val="125000"/>
               </a:lnSpc>
               <a:spcBef>
-                <a:spcPts val="200"/>
-              </a:spcBef>
-              <a:spcAft>
-                <a:spcPts val="200"/>
+                <a:spcPts val="0"/>
+              </a:spcBef>
+              <a:spcAft>
+                <a:spcPts val="0"/>
               </a:spcAft>
             </a:pPr>
             <a:r>
@@ -12066,10 +12066,10 @@
                 <a:spcPct val="125000"/>
               </a:lnSpc>
               <a:spcBef>
-                <a:spcPts val="200"/>
-              </a:spcBef>
-              <a:spcAft>
-                <a:spcPts val="200"/>
+                <a:spcPts val="0"/>
+              </a:spcBef>
+              <a:spcAft>
+                <a:spcPts val="0"/>
               </a:spcAft>
             </a:pPr>
             <a:r>
@@ -12088,10 +12088,10 @@
                 <a:spcPct val="125000"/>
               </a:lnSpc>
               <a:spcBef>
-                <a:spcPts val="800"/>
-              </a:spcBef>
-              <a:spcAft>
-                <a:spcPts val="300"/>
+                <a:spcPts val="0"/>
+              </a:spcBef>
+              <a:spcAft>
+                <a:spcPts val="0"/>
               </a:spcAft>
             </a:pPr>
             <a:r>
@@ -12110,10 +12110,10 @@
                 <a:spcPct val="125000"/>
               </a:lnSpc>
               <a:spcBef>
-                <a:spcPts val="200"/>
-              </a:spcBef>
-              <a:spcAft>
-                <a:spcPts val="200"/>
+                <a:spcPts val="0"/>
+              </a:spcBef>
+              <a:spcAft>
+                <a:spcPts val="0"/>
               </a:spcAft>
             </a:pPr>
             <a:r>
@@ -12132,10 +12132,10 @@
                 <a:spcPct val="125000"/>
               </a:lnSpc>
               <a:spcBef>
-                <a:spcPts val="800"/>
-              </a:spcBef>
-              <a:spcAft>
-                <a:spcPts val="300"/>
+                <a:spcPts val="0"/>
+              </a:spcBef>
+              <a:spcAft>
+                <a:spcPts val="0"/>
               </a:spcAft>
             </a:pPr>
             <a:r>
@@ -12154,10 +12154,10 @@
                 <a:spcPct val="125000"/>
               </a:lnSpc>
               <a:spcBef>
-                <a:spcPts val="200"/>
-              </a:spcBef>
-              <a:spcAft>
-                <a:spcPts val="200"/>
+                <a:spcPts val="0"/>
+              </a:spcBef>
+              <a:spcAft>
+                <a:spcPts val="0"/>
               </a:spcAft>
             </a:pPr>
             <a:r>
@@ -12271,7 +12271,7 @@
                 <a:spcPts val="0"/>
               </a:spcBef>
               <a:spcAft>
-                <a:spcPts val="600"/>
+                <a:spcPts val="0"/>
               </a:spcAft>
             </a:pPr>
             <a:r>
@@ -12290,10 +12290,10 @@
                 <a:spcPct val="125000"/>
               </a:lnSpc>
               <a:spcBef>
-                <a:spcPts val="800"/>
-              </a:spcBef>
-              <a:spcAft>
-                <a:spcPts val="300"/>
+                <a:spcPts val="0"/>
+              </a:spcBef>
+              <a:spcAft>
+                <a:spcPts val="0"/>
               </a:spcAft>
             </a:pPr>
             <a:r>
@@ -12312,10 +12312,10 @@
                 <a:spcPct val="125000"/>
               </a:lnSpc>
               <a:spcBef>
-                <a:spcPts val="200"/>
-              </a:spcBef>
-              <a:spcAft>
-                <a:spcPts val="200"/>
+                <a:spcPts val="0"/>
+              </a:spcBef>
+              <a:spcAft>
+                <a:spcPts val="0"/>
               </a:spcAft>
             </a:pPr>
             <a:r>
@@ -12334,10 +12334,10 @@
                 <a:spcPct val="125000"/>
               </a:lnSpc>
               <a:spcBef>
-                <a:spcPts val="800"/>
-              </a:spcBef>
-              <a:spcAft>
-                <a:spcPts val="300"/>
+                <a:spcPts val="0"/>
+              </a:spcBef>
+              <a:spcAft>
+                <a:spcPts val="0"/>
               </a:spcAft>
             </a:pPr>
             <a:r>
@@ -12356,10 +12356,10 @@
                 <a:spcPct val="125000"/>
               </a:lnSpc>
               <a:spcBef>
-                <a:spcPts val="200"/>
-              </a:spcBef>
-              <a:spcAft>
-                <a:spcPts val="200"/>
+                <a:spcPts val="0"/>
+              </a:spcBef>
+              <a:spcAft>
+                <a:spcPts val="0"/>
               </a:spcAft>
             </a:pPr>
             <a:r>
@@ -12378,10 +12378,10 @@
                 <a:spcPct val="125000"/>
               </a:lnSpc>
               <a:spcBef>
-                <a:spcPts val="800"/>
-              </a:spcBef>
-              <a:spcAft>
-                <a:spcPts val="300"/>
+                <a:spcPts val="0"/>
+              </a:spcBef>
+              <a:spcAft>
+                <a:spcPts val="0"/>
               </a:spcAft>
             </a:pPr>
             <a:r>
@@ -12400,10 +12400,10 @@
                 <a:spcPct val="125000"/>
               </a:lnSpc>
               <a:spcBef>
-                <a:spcPts val="200"/>
-              </a:spcBef>
-              <a:spcAft>
-                <a:spcPts val="200"/>
+                <a:spcPts val="0"/>
+              </a:spcBef>
+              <a:spcAft>
+                <a:spcPts val="0"/>
               </a:spcAft>
             </a:pPr>
             <a:r>
@@ -12422,10 +12422,10 @@
                 <a:spcPct val="125000"/>
               </a:lnSpc>
               <a:spcBef>
-                <a:spcPts val="800"/>
-              </a:spcBef>
-              <a:spcAft>
-                <a:spcPts val="300"/>
+                <a:spcPts val="0"/>
+              </a:spcBef>
+              <a:spcAft>
+                <a:spcPts val="0"/>
               </a:spcAft>
             </a:pPr>
             <a:r>
@@ -12444,10 +12444,10 @@
                 <a:spcPct val="125000"/>
               </a:lnSpc>
               <a:spcBef>
-                <a:spcPts val="200"/>
-              </a:spcBef>
-              <a:spcAft>
-                <a:spcPts val="200"/>
+                <a:spcPts val="0"/>
+              </a:spcBef>
+              <a:spcAft>
+                <a:spcPts val="0"/>
               </a:spcAft>
             </a:pPr>
             <a:r>
@@ -12561,7 +12561,7 @@
                 <a:spcPts val="0"/>
               </a:spcBef>
               <a:spcAft>
-                <a:spcPts val="600"/>
+                <a:spcPts val="0"/>
               </a:spcAft>
             </a:pPr>
             <a:r>
@@ -12580,10 +12580,10 @@
                 <a:spcPct val="125000"/>
               </a:lnSpc>
               <a:spcBef>
-                <a:spcPts val="800"/>
-              </a:spcBef>
-              <a:spcAft>
-                <a:spcPts val="300"/>
+                <a:spcPts val="0"/>
+              </a:spcBef>
+              <a:spcAft>
+                <a:spcPts val="0"/>
               </a:spcAft>
             </a:pPr>
             <a:r>
@@ -12602,10 +12602,10 @@
                 <a:spcPct val="125000"/>
               </a:lnSpc>
               <a:spcBef>
-                <a:spcPts val="200"/>
-              </a:spcBef>
-              <a:spcAft>
-                <a:spcPts val="200"/>
+                <a:spcPts val="0"/>
+              </a:spcBef>
+              <a:spcAft>
+                <a:spcPts val="0"/>
               </a:spcAft>
             </a:pPr>
             <a:r>
@@ -12624,10 +12624,10 @@
                 <a:spcPct val="125000"/>
               </a:lnSpc>
               <a:spcBef>
-                <a:spcPts val="800"/>
-              </a:spcBef>
-              <a:spcAft>
-                <a:spcPts val="300"/>
+                <a:spcPts val="0"/>
+              </a:spcBef>
+              <a:spcAft>
+                <a:spcPts val="0"/>
               </a:spcAft>
             </a:pPr>
             <a:r>
@@ -12646,10 +12646,10 @@
                 <a:spcPct val="125000"/>
               </a:lnSpc>
               <a:spcBef>
-                <a:spcPts val="200"/>
-              </a:spcBef>
-              <a:spcAft>
-                <a:spcPts val="200"/>
+                <a:spcPts val="0"/>
+              </a:spcBef>
+              <a:spcAft>
+                <a:spcPts val="0"/>
               </a:spcAft>
             </a:pPr>
             <a:r>
@@ -12668,10 +12668,10 @@
                 <a:spcPct val="125000"/>
               </a:lnSpc>
               <a:spcBef>
-                <a:spcPts val="200"/>
-              </a:spcBef>
-              <a:spcAft>
-                <a:spcPts val="200"/>
+                <a:spcPts val="0"/>
+              </a:spcBef>
+              <a:spcAft>
+                <a:spcPts val="0"/>
               </a:spcAft>
             </a:pPr>
             <a:r>
@@ -12690,10 +12690,10 @@
                 <a:spcPct val="125000"/>
               </a:lnSpc>
               <a:spcBef>
-                <a:spcPts val="800"/>
-              </a:spcBef>
-              <a:spcAft>
-                <a:spcPts val="300"/>
+                <a:spcPts val="0"/>
+              </a:spcBef>
+              <a:spcAft>
+                <a:spcPts val="0"/>
               </a:spcAft>
             </a:pPr>
             <a:r>
@@ -12712,10 +12712,10 @@
                 <a:spcPct val="125000"/>
               </a:lnSpc>
               <a:spcBef>
-                <a:spcPts val="200"/>
-              </a:spcBef>
-              <a:spcAft>
-                <a:spcPts val="200"/>
+                <a:spcPts val="0"/>
+              </a:spcBef>
+              <a:spcAft>
+                <a:spcPts val="0"/>
               </a:spcAft>
             </a:pPr>
             <a:r>
@@ -12734,10 +12734,10 @@
                 <a:spcPct val="125000"/>
               </a:lnSpc>
               <a:spcBef>
-                <a:spcPts val="800"/>
-              </a:spcBef>
-              <a:spcAft>
-                <a:spcPts val="300"/>
+                <a:spcPts val="0"/>
+              </a:spcBef>
+              <a:spcAft>
+                <a:spcPts val="0"/>
               </a:spcAft>
             </a:pPr>
             <a:r>
@@ -12756,10 +12756,10 @@
                 <a:spcPct val="125000"/>
               </a:lnSpc>
               <a:spcBef>
-                <a:spcPts val="200"/>
-              </a:spcBef>
-              <a:spcAft>
-                <a:spcPts val="200"/>
+                <a:spcPts val="0"/>
+              </a:spcBef>
+              <a:spcAft>
+                <a:spcPts val="0"/>
               </a:spcAft>
             </a:pPr>
             <a:r>
@@ -12873,7 +12873,7 @@
                 <a:spcPts val="0"/>
               </a:spcBef>
               <a:spcAft>
-                <a:spcPts val="600"/>
+                <a:spcPts val="0"/>
               </a:spcAft>
             </a:pPr>
             <a:r>
@@ -12892,10 +12892,10 @@
                 <a:spcPct val="125000"/>
               </a:lnSpc>
               <a:spcBef>
-                <a:spcPts val="800"/>
-              </a:spcBef>
-              <a:spcAft>
-                <a:spcPts val="300"/>
+                <a:spcPts val="0"/>
+              </a:spcBef>
+              <a:spcAft>
+                <a:spcPts val="0"/>
               </a:spcAft>
             </a:pPr>
             <a:r>
@@ -12914,10 +12914,10 @@
                 <a:spcPct val="125000"/>
               </a:lnSpc>
               <a:spcBef>
-                <a:spcPts val="200"/>
-              </a:spcBef>
-              <a:spcAft>
-                <a:spcPts val="200"/>
+                <a:spcPts val="0"/>
+              </a:spcBef>
+              <a:spcAft>
+                <a:spcPts val="0"/>
               </a:spcAft>
             </a:pPr>
             <a:r>
@@ -12936,10 +12936,10 @@
                 <a:spcPct val="125000"/>
               </a:lnSpc>
               <a:spcBef>
-                <a:spcPts val="800"/>
-              </a:spcBef>
-              <a:spcAft>
-                <a:spcPts val="300"/>
+                <a:spcPts val="0"/>
+              </a:spcBef>
+              <a:spcAft>
+                <a:spcPts val="0"/>
               </a:spcAft>
             </a:pPr>
             <a:r>
@@ -12958,10 +12958,10 @@
                 <a:spcPct val="125000"/>
               </a:lnSpc>
               <a:spcBef>
-                <a:spcPts val="200"/>
-              </a:spcBef>
-              <a:spcAft>
-                <a:spcPts val="200"/>
+                <a:spcPts val="0"/>
+              </a:spcBef>
+              <a:spcAft>
+                <a:spcPts val="0"/>
               </a:spcAft>
             </a:pPr>
             <a:r>
@@ -12980,10 +12980,10 @@
                 <a:spcPct val="125000"/>
               </a:lnSpc>
               <a:spcBef>
-                <a:spcPts val="200"/>
-              </a:spcBef>
-              <a:spcAft>
-                <a:spcPts val="200"/>
+                <a:spcPts val="0"/>
+              </a:spcBef>
+              <a:spcAft>
+                <a:spcPts val="0"/>
               </a:spcAft>
             </a:pPr>
             <a:r>
@@ -13002,10 +13002,10 @@
                 <a:spcPct val="125000"/>
               </a:lnSpc>
               <a:spcBef>
-                <a:spcPts val="800"/>
-              </a:spcBef>
-              <a:spcAft>
-                <a:spcPts val="300"/>
+                <a:spcPts val="0"/>
+              </a:spcBef>
+              <a:spcAft>
+                <a:spcPts val="0"/>
               </a:spcAft>
             </a:pPr>
             <a:r>
@@ -13024,10 +13024,10 @@
                 <a:spcPct val="125000"/>
               </a:lnSpc>
               <a:spcBef>
-                <a:spcPts val="200"/>
-              </a:spcBef>
-              <a:spcAft>
-                <a:spcPts val="200"/>
+                <a:spcPts val="0"/>
+              </a:spcBef>
+              <a:spcAft>
+                <a:spcPts val="0"/>
               </a:spcAft>
             </a:pPr>
             <a:r>
@@ -13046,10 +13046,10 @@
                 <a:spcPct val="125000"/>
               </a:lnSpc>
               <a:spcBef>
-                <a:spcPts val="800"/>
-              </a:spcBef>
-              <a:spcAft>
-                <a:spcPts val="300"/>
+                <a:spcPts val="0"/>
+              </a:spcBef>
+              <a:spcAft>
+                <a:spcPts val="0"/>
               </a:spcAft>
             </a:pPr>
             <a:r>
@@ -13068,10 +13068,10 @@
                 <a:spcPct val="125000"/>
               </a:lnSpc>
               <a:spcBef>
-                <a:spcPts val="200"/>
-              </a:spcBef>
-              <a:spcAft>
-                <a:spcPts val="200"/>
+                <a:spcPts val="0"/>
+              </a:spcBef>
+              <a:spcAft>
+                <a:spcPts val="0"/>
               </a:spcAft>
             </a:pPr>
             <a:r>
@@ -13185,7 +13185,7 @@
                 <a:spcPts val="0"/>
               </a:spcBef>
               <a:spcAft>
-                <a:spcPts val="600"/>
+                <a:spcPts val="0"/>
               </a:spcAft>
             </a:pPr>
             <a:r>
@@ -13204,10 +13204,10 @@
                 <a:spcPct val="125000"/>
               </a:lnSpc>
               <a:spcBef>
-                <a:spcPts val="800"/>
-              </a:spcBef>
-              <a:spcAft>
-                <a:spcPts val="300"/>
+                <a:spcPts val="0"/>
+              </a:spcBef>
+              <a:spcAft>
+                <a:spcPts val="0"/>
               </a:spcAft>
             </a:pPr>
             <a:r>
@@ -13226,10 +13226,10 @@
                 <a:spcPct val="125000"/>
               </a:lnSpc>
               <a:spcBef>
-                <a:spcPts val="200"/>
-              </a:spcBef>
-              <a:spcAft>
-                <a:spcPts val="200"/>
+                <a:spcPts val="0"/>
+              </a:spcBef>
+              <a:spcAft>
+                <a:spcPts val="0"/>
               </a:spcAft>
             </a:pPr>
             <a:r>
@@ -13248,10 +13248,10 @@
                 <a:spcPct val="125000"/>
               </a:lnSpc>
               <a:spcBef>
-                <a:spcPts val="800"/>
-              </a:spcBef>
-              <a:spcAft>
-                <a:spcPts val="300"/>
+                <a:spcPts val="0"/>
+              </a:spcBef>
+              <a:spcAft>
+                <a:spcPts val="0"/>
               </a:spcAft>
             </a:pPr>
             <a:r>
@@ -13270,10 +13270,10 @@
                 <a:spcPct val="125000"/>
               </a:lnSpc>
               <a:spcBef>
-                <a:spcPts val="200"/>
-              </a:spcBef>
-              <a:spcAft>
-                <a:spcPts val="200"/>
+                <a:spcPts val="0"/>
+              </a:spcBef>
+              <a:spcAft>
+                <a:spcPts val="0"/>
               </a:spcAft>
             </a:pPr>
             <a:r>
@@ -13292,10 +13292,10 @@
                 <a:spcPct val="125000"/>
               </a:lnSpc>
               <a:spcBef>
-                <a:spcPts val="200"/>
-              </a:spcBef>
-              <a:spcAft>
-                <a:spcPts val="200"/>
+                <a:spcPts val="0"/>
+              </a:spcBef>
+              <a:spcAft>
+                <a:spcPts val="0"/>
               </a:spcAft>
             </a:pPr>
             <a:r>
@@ -13314,10 +13314,10 @@
                 <a:spcPct val="125000"/>
               </a:lnSpc>
               <a:spcBef>
-                <a:spcPts val="200"/>
-              </a:spcBef>
-              <a:spcAft>
-                <a:spcPts val="200"/>
+                <a:spcPts val="0"/>
+              </a:spcBef>
+              <a:spcAft>
+                <a:spcPts val="0"/>
               </a:spcAft>
             </a:pPr>
             <a:r>
@@ -13336,10 +13336,10 @@
                 <a:spcPct val="125000"/>
               </a:lnSpc>
               <a:spcBef>
-                <a:spcPts val="200"/>
-              </a:spcBef>
-              <a:spcAft>
-                <a:spcPts val="200"/>
+                <a:spcPts val="0"/>
+              </a:spcBef>
+              <a:spcAft>
+                <a:spcPts val="0"/>
               </a:spcAft>
             </a:pPr>
             <a:r>
@@ -13358,10 +13358,10 @@
                 <a:spcPct val="125000"/>
               </a:lnSpc>
               <a:spcBef>
-                <a:spcPts val="200"/>
-              </a:spcBef>
-              <a:spcAft>
-                <a:spcPts val="200"/>
+                <a:spcPts val="0"/>
+              </a:spcBef>
+              <a:spcAft>
+                <a:spcPts val="0"/>
               </a:spcAft>
             </a:pPr>
             <a:r>
@@ -13380,10 +13380,10 @@
                 <a:spcPct val="125000"/>
               </a:lnSpc>
               <a:spcBef>
-                <a:spcPts val="200"/>
-              </a:spcBef>
-              <a:spcAft>
-                <a:spcPts val="200"/>
+                <a:spcPts val="0"/>
+              </a:spcBef>
+              <a:spcAft>
+                <a:spcPts val="0"/>
               </a:spcAft>
             </a:pPr>
             <a:r>
@@ -13402,10 +13402,10 @@
                 <a:spcPct val="125000"/>
               </a:lnSpc>
               <a:spcBef>
-                <a:spcPts val="800"/>
-              </a:spcBef>
-              <a:spcAft>
-                <a:spcPts val="300"/>
+                <a:spcPts val="0"/>
+              </a:spcBef>
+              <a:spcAft>
+                <a:spcPts val="0"/>
               </a:spcAft>
             </a:pPr>
             <a:r>
@@ -13424,10 +13424,10 @@
                 <a:spcPct val="125000"/>
               </a:lnSpc>
               <a:spcBef>
-                <a:spcPts val="200"/>
-              </a:spcBef>
-              <a:spcAft>
-                <a:spcPts val="200"/>
+                <a:spcPts val="0"/>
+              </a:spcBef>
+              <a:spcAft>
+                <a:spcPts val="0"/>
               </a:spcAft>
             </a:pPr>
             <a:r>
@@ -13446,10 +13446,10 @@
                 <a:spcPct val="125000"/>
               </a:lnSpc>
               <a:spcBef>
-                <a:spcPts val="800"/>
-              </a:spcBef>
-              <a:spcAft>
-                <a:spcPts val="300"/>
+                <a:spcPts val="0"/>
+              </a:spcBef>
+              <a:spcAft>
+                <a:spcPts val="0"/>
               </a:spcAft>
             </a:pPr>
             <a:r>
@@ -13468,10 +13468,10 @@
                 <a:spcPct val="125000"/>
               </a:lnSpc>
               <a:spcBef>
-                <a:spcPts val="200"/>
-              </a:spcBef>
-              <a:spcAft>
-                <a:spcPts val="200"/>
+                <a:spcPts val="0"/>
+              </a:spcBef>
+              <a:spcAft>
+                <a:spcPts val="0"/>
               </a:spcAft>
             </a:pPr>
             <a:r>
@@ -13585,7 +13585,7 @@
                 <a:spcPts val="0"/>
               </a:spcBef>
               <a:spcAft>
-                <a:spcPts val="600"/>
+                <a:spcPts val="0"/>
               </a:spcAft>
             </a:pPr>
             <a:r>
@@ -13604,10 +13604,10 @@
                 <a:spcPct val="125000"/>
               </a:lnSpc>
               <a:spcBef>
-                <a:spcPts val="800"/>
-              </a:spcBef>
-              <a:spcAft>
-                <a:spcPts val="300"/>
+                <a:spcPts val="0"/>
+              </a:spcBef>
+              <a:spcAft>
+                <a:spcPts val="0"/>
               </a:spcAft>
             </a:pPr>
             <a:r>
@@ -13626,10 +13626,10 @@
                 <a:spcPct val="125000"/>
               </a:lnSpc>
               <a:spcBef>
-                <a:spcPts val="200"/>
-              </a:spcBef>
-              <a:spcAft>
-                <a:spcPts val="200"/>
+                <a:spcPts val="0"/>
+              </a:spcBef>
+              <a:spcAft>
+                <a:spcPts val="0"/>
               </a:spcAft>
             </a:pPr>
             <a:r>
@@ -13648,10 +13648,10 @@
                 <a:spcPct val="125000"/>
               </a:lnSpc>
               <a:spcBef>
-                <a:spcPts val="800"/>
-              </a:spcBef>
-              <a:spcAft>
-                <a:spcPts val="300"/>
+                <a:spcPts val="0"/>
+              </a:spcBef>
+              <a:spcAft>
+                <a:spcPts val="0"/>
               </a:spcAft>
             </a:pPr>
             <a:r>
@@ -13670,10 +13670,10 @@
                 <a:spcPct val="125000"/>
               </a:lnSpc>
               <a:spcBef>
-                <a:spcPts val="200"/>
-              </a:spcBef>
-              <a:spcAft>
-                <a:spcPts val="200"/>
+                <a:spcPts val="0"/>
+              </a:spcBef>
+              <a:spcAft>
+                <a:spcPts val="0"/>
               </a:spcAft>
             </a:pPr>
             <a:r>
@@ -13692,10 +13692,10 @@
                 <a:spcPct val="125000"/>
               </a:lnSpc>
               <a:spcBef>
-                <a:spcPts val="800"/>
-              </a:spcBef>
-              <a:spcAft>
-                <a:spcPts val="300"/>
+                <a:spcPts val="0"/>
+              </a:spcBef>
+              <a:spcAft>
+                <a:spcPts val="0"/>
               </a:spcAft>
             </a:pPr>
             <a:r>
@@ -13714,10 +13714,10 @@
                 <a:spcPct val="125000"/>
               </a:lnSpc>
               <a:spcBef>
-                <a:spcPts val="200"/>
-              </a:spcBef>
-              <a:spcAft>
-                <a:spcPts val="200"/>
+                <a:spcPts val="0"/>
+              </a:spcBef>
+              <a:spcAft>
+                <a:spcPts val="0"/>
               </a:spcAft>
             </a:pPr>
             <a:r>
@@ -13736,10 +13736,10 @@
                 <a:spcPct val="125000"/>
               </a:lnSpc>
               <a:spcBef>
-                <a:spcPts val="800"/>
-              </a:spcBef>
-              <a:spcAft>
-                <a:spcPts val="300"/>
+                <a:spcPts val="0"/>
+              </a:spcBef>
+              <a:spcAft>
+                <a:spcPts val="0"/>
               </a:spcAft>
             </a:pPr>
             <a:r>
@@ -13758,10 +13758,10 @@
                 <a:spcPct val="125000"/>
               </a:lnSpc>
               <a:spcBef>
-                <a:spcPts val="200"/>
-              </a:spcBef>
-              <a:spcAft>
-                <a:spcPts val="200"/>
+                <a:spcPts val="0"/>
+              </a:spcBef>
+              <a:spcAft>
+                <a:spcPts val="0"/>
               </a:spcAft>
             </a:pPr>
             <a:r>
@@ -13875,7 +13875,7 @@
                 <a:spcPts val="0"/>
               </a:spcBef>
               <a:spcAft>
-                <a:spcPts val="600"/>
+                <a:spcPts val="0"/>
               </a:spcAft>
             </a:pPr>
             <a:r>
@@ -13894,10 +13894,10 @@
                 <a:spcPct val="125000"/>
               </a:lnSpc>
               <a:spcBef>
-                <a:spcPts val="800"/>
-              </a:spcBef>
-              <a:spcAft>
-                <a:spcPts val="300"/>
+                <a:spcPts val="0"/>
+              </a:spcBef>
+              <a:spcAft>
+                <a:spcPts val="0"/>
               </a:spcAft>
             </a:pPr>
             <a:r>
@@ -13916,10 +13916,10 @@
                 <a:spcPct val="125000"/>
               </a:lnSpc>
               <a:spcBef>
-                <a:spcPts val="200"/>
-              </a:spcBef>
-              <a:spcAft>
-                <a:spcPts val="200"/>
+                <a:spcPts val="0"/>
+              </a:spcBef>
+              <a:spcAft>
+                <a:spcPts val="0"/>
               </a:spcAft>
             </a:pPr>
             <a:r>
@@ -13938,10 +13938,10 @@
                 <a:spcPct val="125000"/>
               </a:lnSpc>
               <a:spcBef>
-                <a:spcPts val="800"/>
-              </a:spcBef>
-              <a:spcAft>
-                <a:spcPts val="300"/>
+                <a:spcPts val="0"/>
+              </a:spcBef>
+              <a:spcAft>
+                <a:spcPts val="0"/>
               </a:spcAft>
             </a:pPr>
             <a:r>
@@ -13960,10 +13960,10 @@
                 <a:spcPct val="125000"/>
               </a:lnSpc>
               <a:spcBef>
-                <a:spcPts val="200"/>
-              </a:spcBef>
-              <a:spcAft>
-                <a:spcPts val="200"/>
+                <a:spcPts val="0"/>
+              </a:spcBef>
+              <a:spcAft>
+                <a:spcPts val="0"/>
               </a:spcAft>
             </a:pPr>
             <a:r>
@@ -13982,10 +13982,10 @@
                 <a:spcPct val="125000"/>
               </a:lnSpc>
               <a:spcBef>
-                <a:spcPts val="200"/>
-              </a:spcBef>
-              <a:spcAft>
-                <a:spcPts val="200"/>
+                <a:spcPts val="0"/>
+              </a:spcBef>
+              <a:spcAft>
+                <a:spcPts val="0"/>
               </a:spcAft>
             </a:pPr>
             <a:r>
@@ -14004,10 +14004,10 @@
                 <a:spcPct val="125000"/>
               </a:lnSpc>
               <a:spcBef>
-                <a:spcPts val="800"/>
-              </a:spcBef>
-              <a:spcAft>
-                <a:spcPts val="300"/>
+                <a:spcPts val="0"/>
+              </a:spcBef>
+              <a:spcAft>
+                <a:spcPts val="0"/>
               </a:spcAft>
             </a:pPr>
             <a:r>
@@ -14026,10 +14026,10 @@
                 <a:spcPct val="125000"/>
               </a:lnSpc>
               <a:spcBef>
-                <a:spcPts val="200"/>
-              </a:spcBef>
-              <a:spcAft>
-                <a:spcPts val="200"/>
+                <a:spcPts val="0"/>
+              </a:spcBef>
+              <a:spcAft>
+                <a:spcPts val="0"/>
               </a:spcAft>
             </a:pPr>
             <a:r>
@@ -14048,10 +14048,10 @@
                 <a:spcPct val="125000"/>
               </a:lnSpc>
               <a:spcBef>
-                <a:spcPts val="800"/>
-              </a:spcBef>
-              <a:spcAft>
-                <a:spcPts val="300"/>
+                <a:spcPts val="0"/>
+              </a:spcBef>
+              <a:spcAft>
+                <a:spcPts val="0"/>
               </a:spcAft>
             </a:pPr>
             <a:r>
@@ -14070,10 +14070,10 @@
                 <a:spcPct val="125000"/>
               </a:lnSpc>
               <a:spcBef>
-                <a:spcPts val="200"/>
-              </a:spcBef>
-              <a:spcAft>
-                <a:spcPts val="200"/>
+                <a:spcPts val="0"/>
+              </a:spcBef>
+              <a:spcAft>
+                <a:spcPts val="0"/>
               </a:spcAft>
             </a:pPr>
             <a:r>
@@ -14187,7 +14187,7 @@
                 <a:spcPts val="0"/>
               </a:spcBef>
               <a:spcAft>
-                <a:spcPts val="600"/>
+                <a:spcPts val="0"/>
               </a:spcAft>
             </a:pPr>
             <a:r>
@@ -14206,10 +14206,10 @@
                 <a:spcPct val="125000"/>
               </a:lnSpc>
               <a:spcBef>
-                <a:spcPts val="800"/>
-              </a:spcBef>
-              <a:spcAft>
-                <a:spcPts val="300"/>
+                <a:spcPts val="0"/>
+              </a:spcBef>
+              <a:spcAft>
+                <a:spcPts val="0"/>
               </a:spcAft>
             </a:pPr>
             <a:r>
@@ -14228,10 +14228,10 @@
                 <a:spcPct val="125000"/>
               </a:lnSpc>
               <a:spcBef>
-                <a:spcPts val="200"/>
-              </a:spcBef>
-              <a:spcAft>
-                <a:spcPts val="200"/>
+                <a:spcPts val="0"/>
+              </a:spcBef>
+              <a:spcAft>
+                <a:spcPts val="0"/>
               </a:spcAft>
             </a:pPr>
             <a:r>
@@ -14250,10 +14250,10 @@
                 <a:spcPct val="125000"/>
               </a:lnSpc>
               <a:spcBef>
-                <a:spcPts val="800"/>
-              </a:spcBef>
-              <a:spcAft>
-                <a:spcPts val="300"/>
+                <a:spcPts val="0"/>
+              </a:spcBef>
+              <a:spcAft>
+                <a:spcPts val="0"/>
               </a:spcAft>
             </a:pPr>
             <a:r>
@@ -14272,10 +14272,10 @@
                 <a:spcPct val="125000"/>
               </a:lnSpc>
               <a:spcBef>
-                <a:spcPts val="200"/>
-              </a:spcBef>
-              <a:spcAft>
-                <a:spcPts val="200"/>
+                <a:spcPts val="0"/>
+              </a:spcBef>
+              <a:spcAft>
+                <a:spcPts val="0"/>
               </a:spcAft>
             </a:pPr>
             <a:r>
@@ -14294,10 +14294,10 @@
                 <a:spcPct val="125000"/>
               </a:lnSpc>
               <a:spcBef>
-                <a:spcPts val="200"/>
-              </a:spcBef>
-              <a:spcAft>
-                <a:spcPts val="200"/>
+                <a:spcPts val="0"/>
+              </a:spcBef>
+              <a:spcAft>
+                <a:spcPts val="0"/>
               </a:spcAft>
             </a:pPr>
             <a:r>
@@ -14316,10 +14316,10 @@
                 <a:spcPct val="125000"/>
               </a:lnSpc>
               <a:spcBef>
-                <a:spcPts val="800"/>
-              </a:spcBef>
-              <a:spcAft>
-                <a:spcPts val="300"/>
+                <a:spcPts val="0"/>
+              </a:spcBef>
+              <a:spcAft>
+                <a:spcPts val="0"/>
               </a:spcAft>
             </a:pPr>
             <a:r>
@@ -14338,10 +14338,10 @@
                 <a:spcPct val="125000"/>
               </a:lnSpc>
               <a:spcBef>
-                <a:spcPts val="200"/>
-              </a:spcBef>
-              <a:spcAft>
-                <a:spcPts val="200"/>
+                <a:spcPts val="0"/>
+              </a:spcBef>
+              <a:spcAft>
+                <a:spcPts val="0"/>
               </a:spcAft>
             </a:pPr>
             <a:r>
@@ -14360,10 +14360,10 @@
                 <a:spcPct val="125000"/>
               </a:lnSpc>
               <a:spcBef>
-                <a:spcPts val="800"/>
-              </a:spcBef>
-              <a:spcAft>
-                <a:spcPts val="300"/>
+                <a:spcPts val="0"/>
+              </a:spcBef>
+              <a:spcAft>
+                <a:spcPts val="0"/>
               </a:spcAft>
             </a:pPr>
             <a:r>
@@ -14382,10 +14382,10 @@
                 <a:spcPct val="125000"/>
               </a:lnSpc>
               <a:spcBef>
-                <a:spcPts val="200"/>
-              </a:spcBef>
-              <a:spcAft>
-                <a:spcPts val="200"/>
+                <a:spcPts val="0"/>
+              </a:spcBef>
+              <a:spcAft>
+                <a:spcPts val="0"/>
               </a:spcAft>
             </a:pPr>
             <a:r>
@@ -14499,7 +14499,7 @@
                 <a:spcPts val="0"/>
               </a:spcBef>
               <a:spcAft>
-                <a:spcPts val="600"/>
+                <a:spcPts val="0"/>
               </a:spcAft>
             </a:pPr>
             <a:r>
@@ -14518,10 +14518,10 @@
                 <a:spcPct val="125000"/>
               </a:lnSpc>
               <a:spcBef>
-                <a:spcPts val="800"/>
-              </a:spcBef>
-              <a:spcAft>
-                <a:spcPts val="300"/>
+                <a:spcPts val="0"/>
+              </a:spcBef>
+              <a:spcAft>
+                <a:spcPts val="0"/>
               </a:spcAft>
             </a:pPr>
             <a:r>
@@ -14540,10 +14540,10 @@
                 <a:spcPct val="125000"/>
               </a:lnSpc>
               <a:spcBef>
-                <a:spcPts val="200"/>
-              </a:spcBef>
-              <a:spcAft>
-                <a:spcPts val="200"/>
+                <a:spcPts val="0"/>
+              </a:spcBef>
+              <a:spcAft>
+                <a:spcPts val="0"/>
               </a:spcAft>
             </a:pPr>
             <a:r>
@@ -14562,10 +14562,10 @@
                 <a:spcPct val="125000"/>
               </a:lnSpc>
               <a:spcBef>
-                <a:spcPts val="800"/>
-              </a:spcBef>
-              <a:spcAft>
-                <a:spcPts val="300"/>
+                <a:spcPts val="0"/>
+              </a:spcBef>
+              <a:spcAft>
+                <a:spcPts val="0"/>
               </a:spcAft>
             </a:pPr>
             <a:r>
@@ -14584,10 +14584,10 @@
                 <a:spcPct val="125000"/>
               </a:lnSpc>
               <a:spcBef>
-                <a:spcPts val="200"/>
-              </a:spcBef>
-              <a:spcAft>
-                <a:spcPts val="200"/>
+                <a:spcPts val="0"/>
+              </a:spcBef>
+              <a:spcAft>
+                <a:spcPts val="0"/>
               </a:spcAft>
             </a:pPr>
             <a:r>
@@ -14606,10 +14606,10 @@
                 <a:spcPct val="125000"/>
               </a:lnSpc>
               <a:spcBef>
-                <a:spcPts val="200"/>
-              </a:spcBef>
-              <a:spcAft>
-                <a:spcPts val="200"/>
+                <a:spcPts val="0"/>
+              </a:spcBef>
+              <a:spcAft>
+                <a:spcPts val="0"/>
               </a:spcAft>
             </a:pPr>
             <a:r>
@@ -14628,10 +14628,10 @@
                 <a:spcPct val="125000"/>
               </a:lnSpc>
               <a:spcBef>
-                <a:spcPts val="800"/>
-              </a:spcBef>
-              <a:spcAft>
-                <a:spcPts val="300"/>
+                <a:spcPts val="0"/>
+              </a:spcBef>
+              <a:spcAft>
+                <a:spcPts val="0"/>
               </a:spcAft>
             </a:pPr>
             <a:r>
@@ -14650,10 +14650,10 @@
                 <a:spcPct val="125000"/>
               </a:lnSpc>
               <a:spcBef>
-                <a:spcPts val="200"/>
-              </a:spcBef>
-              <a:spcAft>
-                <a:spcPts val="200"/>
+                <a:spcPts val="0"/>
+              </a:spcBef>
+              <a:spcAft>
+                <a:spcPts val="0"/>
               </a:spcAft>
             </a:pPr>
             <a:r>
@@ -14672,10 +14672,10 @@
                 <a:spcPct val="125000"/>
               </a:lnSpc>
               <a:spcBef>
-                <a:spcPts val="800"/>
-              </a:spcBef>
-              <a:spcAft>
-                <a:spcPts val="300"/>
+                <a:spcPts val="0"/>
+              </a:spcBef>
+              <a:spcAft>
+                <a:spcPts val="0"/>
               </a:spcAft>
             </a:pPr>
             <a:r>
@@ -14694,10 +14694,10 @@
                 <a:spcPct val="125000"/>
               </a:lnSpc>
               <a:spcBef>
-                <a:spcPts val="200"/>
-              </a:spcBef>
-              <a:spcAft>
-                <a:spcPts val="200"/>
+                <a:spcPts val="0"/>
+              </a:spcBef>
+              <a:spcAft>
+                <a:spcPts val="0"/>
               </a:spcAft>
             </a:pPr>
             <a:r>
@@ -14811,7 +14811,7 @@
                 <a:spcPts val="0"/>
               </a:spcBef>
               <a:spcAft>
-                <a:spcPts val="600"/>
+                <a:spcPts val="0"/>
               </a:spcAft>
             </a:pPr>
             <a:r>
@@ -14830,10 +14830,10 @@
                 <a:spcPct val="125000"/>
               </a:lnSpc>
               <a:spcBef>
-                <a:spcPts val="800"/>
-              </a:spcBef>
-              <a:spcAft>
-                <a:spcPts val="300"/>
+                <a:spcPts val="0"/>
+              </a:spcBef>
+              <a:spcAft>
+                <a:spcPts val="0"/>
               </a:spcAft>
             </a:pPr>
             <a:r>
@@ -14852,10 +14852,10 @@
                 <a:spcPct val="125000"/>
               </a:lnSpc>
               <a:spcBef>
-                <a:spcPts val="200"/>
-              </a:spcBef>
-              <a:spcAft>
-                <a:spcPts val="200"/>
+                <a:spcPts val="0"/>
+              </a:spcBef>
+              <a:spcAft>
+                <a:spcPts val="0"/>
               </a:spcAft>
             </a:pPr>
             <a:r>
@@ -14874,10 +14874,10 @@
                 <a:spcPct val="125000"/>
               </a:lnSpc>
               <a:spcBef>
-                <a:spcPts val="800"/>
-              </a:spcBef>
-              <a:spcAft>
-                <a:spcPts val="300"/>
+                <a:spcPts val="0"/>
+              </a:spcBef>
+              <a:spcAft>
+                <a:spcPts val="0"/>
               </a:spcAft>
             </a:pPr>
             <a:r>
@@ -14896,10 +14896,10 @@
                 <a:spcPct val="125000"/>
               </a:lnSpc>
               <a:spcBef>
-                <a:spcPts val="200"/>
-              </a:spcBef>
-              <a:spcAft>
-                <a:spcPts val="200"/>
+                <a:spcPts val="0"/>
+              </a:spcBef>
+              <a:spcAft>
+                <a:spcPts val="0"/>
               </a:spcAft>
             </a:pPr>
             <a:r>
@@ -14918,10 +14918,10 @@
                 <a:spcPct val="125000"/>
               </a:lnSpc>
               <a:spcBef>
-                <a:spcPts val="800"/>
-              </a:spcBef>
-              <a:spcAft>
-                <a:spcPts val="300"/>
+                <a:spcPts val="0"/>
+              </a:spcBef>
+              <a:spcAft>
+                <a:spcPts val="0"/>
               </a:spcAft>
             </a:pPr>
             <a:r>
@@ -14940,10 +14940,10 @@
                 <a:spcPct val="125000"/>
               </a:lnSpc>
               <a:spcBef>
-                <a:spcPts val="200"/>
-              </a:spcBef>
-              <a:spcAft>
-                <a:spcPts val="200"/>
+                <a:spcPts val="0"/>
+              </a:spcBef>
+              <a:spcAft>
+                <a:spcPts val="0"/>
               </a:spcAft>
             </a:pPr>
             <a:r>
@@ -14962,10 +14962,10 @@
                 <a:spcPct val="125000"/>
               </a:lnSpc>
               <a:spcBef>
-                <a:spcPts val="800"/>
-              </a:spcBef>
-              <a:spcAft>
-                <a:spcPts val="300"/>
+                <a:spcPts val="0"/>
+              </a:spcBef>
+              <a:spcAft>
+                <a:spcPts val="0"/>
               </a:spcAft>
             </a:pPr>
             <a:r>
@@ -14984,10 +14984,10 @@
                 <a:spcPct val="125000"/>
               </a:lnSpc>
               <a:spcBef>
-                <a:spcPts val="200"/>
-              </a:spcBef>
-              <a:spcAft>
-                <a:spcPts val="200"/>
+                <a:spcPts val="0"/>
+              </a:spcBef>
+              <a:spcAft>
+                <a:spcPts val="0"/>
               </a:spcAft>
             </a:pPr>
             <a:r>

--- a/ppts_output_v3/01_增值税风险指引.pptx
+++ b/ppts_output_v3/01_增值税风险指引.pptx
@@ -3295,7 +3295,7 @@
           <a:bodyPr rtlCol="0" anchor="ctr" wrap="square" lIns="365760"/>
           <a:lstStyle/>
           <a:p>
-            <a:pPr algn="l"/>
+            <a:pPr algn="just"/>
             <a:r>
               <a:rPr sz="1500" b="1">
                 <a:solidFill>
@@ -3329,7 +3329,7 @@
           </a:bodyPr>
           <a:lstStyle/>
           <a:p>
-            <a:pPr algn="l">
+            <a:pPr algn="just">
               <a:lnSpc>
                 <a:spcPct val="125000"/>
               </a:lnSpc>
@@ -3351,7 +3351,7 @@
             </a:r>
           </a:p>
           <a:p>
-            <a:pPr algn="l">
+            <a:pPr algn="just">
               <a:lnSpc>
                 <a:spcPct val="125000"/>
               </a:lnSpc>
@@ -3373,7 +3373,7 @@
             </a:r>
           </a:p>
           <a:p>
-            <a:pPr algn="l">
+            <a:pPr algn="just">
               <a:lnSpc>
                 <a:spcPct val="125000"/>
               </a:lnSpc>
@@ -3395,7 +3395,7 @@
             </a:r>
           </a:p>
           <a:p>
-            <a:pPr algn="l">
+            <a:pPr algn="just">
               <a:lnSpc>
                 <a:spcPct val="125000"/>
               </a:lnSpc>
@@ -3417,7 +3417,7 @@
             </a:r>
           </a:p>
           <a:p>
-            <a:pPr algn="l">
+            <a:pPr algn="just">
               <a:lnSpc>
                 <a:spcPct val="125000"/>
               </a:lnSpc>
@@ -3439,7 +3439,7 @@
             </a:r>
           </a:p>
           <a:p>
-            <a:pPr algn="l">
+            <a:pPr algn="just">
               <a:lnSpc>
                 <a:spcPct val="125000"/>
               </a:lnSpc>
@@ -3461,7 +3461,7 @@
             </a:r>
           </a:p>
           <a:p>
-            <a:pPr algn="l">
+            <a:pPr algn="just">
               <a:lnSpc>
                 <a:spcPct val="125000"/>
               </a:lnSpc>
@@ -3483,7 +3483,7 @@
             </a:r>
           </a:p>
           <a:p>
-            <a:pPr algn="l">
+            <a:pPr algn="just">
               <a:lnSpc>
                 <a:spcPct val="125000"/>
               </a:lnSpc>
@@ -3505,7 +3505,7 @@
             </a:r>
           </a:p>
           <a:p>
-            <a:pPr algn="l">
+            <a:pPr algn="just">
               <a:lnSpc>
                 <a:spcPct val="125000"/>
               </a:lnSpc>
@@ -3527,7 +3527,7 @@
             </a:r>
           </a:p>
           <a:p>
-            <a:pPr algn="l">
+            <a:pPr algn="just">
               <a:lnSpc>
                 <a:spcPct val="125000"/>
               </a:lnSpc>
@@ -3607,7 +3607,7 @@
           <a:bodyPr rtlCol="0" anchor="ctr" wrap="square" lIns="365760"/>
           <a:lstStyle/>
           <a:p>
-            <a:pPr algn="l"/>
+            <a:pPr algn="just"/>
             <a:r>
               <a:rPr sz="1500" b="1">
                 <a:solidFill>
@@ -3641,7 +3641,7 @@
           </a:bodyPr>
           <a:lstStyle/>
           <a:p>
-            <a:pPr algn="l">
+            <a:pPr algn="just">
               <a:lnSpc>
                 <a:spcPct val="125000"/>
               </a:lnSpc>
@@ -3663,7 +3663,7 @@
             </a:r>
           </a:p>
           <a:p>
-            <a:pPr algn="l">
+            <a:pPr algn="just">
               <a:lnSpc>
                 <a:spcPct val="125000"/>
               </a:lnSpc>
@@ -3685,7 +3685,7 @@
             </a:r>
           </a:p>
           <a:p>
-            <a:pPr algn="l">
+            <a:pPr algn="just">
               <a:lnSpc>
                 <a:spcPct val="125000"/>
               </a:lnSpc>
@@ -3707,7 +3707,7 @@
             </a:r>
           </a:p>
           <a:p>
-            <a:pPr algn="l">
+            <a:pPr algn="just">
               <a:lnSpc>
                 <a:spcPct val="125000"/>
               </a:lnSpc>
@@ -3729,7 +3729,7 @@
             </a:r>
           </a:p>
           <a:p>
-            <a:pPr algn="l">
+            <a:pPr algn="just">
               <a:lnSpc>
                 <a:spcPct val="125000"/>
               </a:lnSpc>
@@ -3751,7 +3751,7 @@
             </a:r>
           </a:p>
           <a:p>
-            <a:pPr algn="l">
+            <a:pPr algn="just">
               <a:lnSpc>
                 <a:spcPct val="125000"/>
               </a:lnSpc>
@@ -3773,7 +3773,7 @@
             </a:r>
           </a:p>
           <a:p>
-            <a:pPr algn="l">
+            <a:pPr algn="just">
               <a:lnSpc>
                 <a:spcPct val="125000"/>
               </a:lnSpc>
@@ -3795,7 +3795,7 @@
             </a:r>
           </a:p>
           <a:p>
-            <a:pPr algn="l">
+            <a:pPr algn="just">
               <a:lnSpc>
                 <a:spcPct val="125000"/>
               </a:lnSpc>
@@ -3817,7 +3817,7 @@
             </a:r>
           </a:p>
           <a:p>
-            <a:pPr algn="l">
+            <a:pPr algn="just">
               <a:lnSpc>
                 <a:spcPct val="125000"/>
               </a:lnSpc>
@@ -3897,7 +3897,7 @@
           <a:bodyPr rtlCol="0" anchor="ctr" wrap="square" lIns="365760"/>
           <a:lstStyle/>
           <a:p>
-            <a:pPr algn="l"/>
+            <a:pPr algn="just"/>
             <a:r>
               <a:rPr sz="1500" b="1">
                 <a:solidFill>
@@ -3931,7 +3931,7 @@
           </a:bodyPr>
           <a:lstStyle/>
           <a:p>
-            <a:pPr algn="l">
+            <a:pPr algn="just">
               <a:lnSpc>
                 <a:spcPct val="125000"/>
               </a:lnSpc>
@@ -3953,7 +3953,7 @@
             </a:r>
           </a:p>
           <a:p>
-            <a:pPr algn="l">
+            <a:pPr algn="just">
               <a:lnSpc>
                 <a:spcPct val="125000"/>
               </a:lnSpc>
@@ -3975,7 +3975,7 @@
             </a:r>
           </a:p>
           <a:p>
-            <a:pPr algn="l">
+            <a:pPr algn="just">
               <a:lnSpc>
                 <a:spcPct val="125000"/>
               </a:lnSpc>
@@ -3997,7 +3997,7 @@
             </a:r>
           </a:p>
           <a:p>
-            <a:pPr algn="l">
+            <a:pPr algn="just">
               <a:lnSpc>
                 <a:spcPct val="125000"/>
               </a:lnSpc>
@@ -4019,7 +4019,7 @@
             </a:r>
           </a:p>
           <a:p>
-            <a:pPr algn="l">
+            <a:pPr algn="just">
               <a:lnSpc>
                 <a:spcPct val="125000"/>
               </a:lnSpc>
@@ -4041,7 +4041,7 @@
             </a:r>
           </a:p>
           <a:p>
-            <a:pPr algn="l">
+            <a:pPr algn="just">
               <a:lnSpc>
                 <a:spcPct val="125000"/>
               </a:lnSpc>
@@ -4063,7 +4063,7 @@
             </a:r>
           </a:p>
           <a:p>
-            <a:pPr algn="l">
+            <a:pPr algn="just">
               <a:lnSpc>
                 <a:spcPct val="125000"/>
               </a:lnSpc>
@@ -4085,7 +4085,7 @@
             </a:r>
           </a:p>
           <a:p>
-            <a:pPr algn="l">
+            <a:pPr algn="just">
               <a:lnSpc>
                 <a:spcPct val="125000"/>
               </a:lnSpc>
@@ -4107,7 +4107,7 @@
             </a:r>
           </a:p>
           <a:p>
-            <a:pPr algn="l">
+            <a:pPr algn="just">
               <a:lnSpc>
                 <a:spcPct val="125000"/>
               </a:lnSpc>
@@ -4129,7 +4129,7 @@
             </a:r>
           </a:p>
           <a:p>
-            <a:pPr algn="l">
+            <a:pPr algn="just">
               <a:lnSpc>
                 <a:spcPct val="125000"/>
               </a:lnSpc>
@@ -4151,7 +4151,7 @@
             </a:r>
           </a:p>
           <a:p>
-            <a:pPr algn="l">
+            <a:pPr algn="just">
               <a:lnSpc>
                 <a:spcPct val="125000"/>
               </a:lnSpc>
@@ -4231,7 +4231,7 @@
           <a:bodyPr rtlCol="0" anchor="ctr" wrap="square" lIns="365760"/>
           <a:lstStyle/>
           <a:p>
-            <a:pPr algn="l"/>
+            <a:pPr algn="just"/>
             <a:r>
               <a:rPr sz="1500" b="1">
                 <a:solidFill>
@@ -4265,7 +4265,7 @@
           </a:bodyPr>
           <a:lstStyle/>
           <a:p>
-            <a:pPr algn="l">
+            <a:pPr algn="just">
               <a:lnSpc>
                 <a:spcPct val="125000"/>
               </a:lnSpc>
@@ -4287,7 +4287,7 @@
             </a:r>
           </a:p>
           <a:p>
-            <a:pPr algn="l">
+            <a:pPr algn="just">
               <a:lnSpc>
                 <a:spcPct val="125000"/>
               </a:lnSpc>
@@ -4309,7 +4309,7 @@
             </a:r>
           </a:p>
           <a:p>
-            <a:pPr algn="l">
+            <a:pPr algn="just">
               <a:lnSpc>
                 <a:spcPct val="125000"/>
               </a:lnSpc>
@@ -4331,7 +4331,7 @@
             </a:r>
           </a:p>
           <a:p>
-            <a:pPr algn="l">
+            <a:pPr algn="just">
               <a:lnSpc>
                 <a:spcPct val="125000"/>
               </a:lnSpc>
@@ -4353,7 +4353,7 @@
             </a:r>
           </a:p>
           <a:p>
-            <a:pPr algn="l">
+            <a:pPr algn="just">
               <a:lnSpc>
                 <a:spcPct val="125000"/>
               </a:lnSpc>
@@ -4375,7 +4375,7 @@
             </a:r>
           </a:p>
           <a:p>
-            <a:pPr algn="l">
+            <a:pPr algn="just">
               <a:lnSpc>
                 <a:spcPct val="125000"/>
               </a:lnSpc>
@@ -4397,7 +4397,7 @@
             </a:r>
           </a:p>
           <a:p>
-            <a:pPr algn="l">
+            <a:pPr algn="just">
               <a:lnSpc>
                 <a:spcPct val="125000"/>
               </a:lnSpc>
@@ -4419,7 +4419,7 @@
             </a:r>
           </a:p>
           <a:p>
-            <a:pPr algn="l">
+            <a:pPr algn="just">
               <a:lnSpc>
                 <a:spcPct val="125000"/>
               </a:lnSpc>
@@ -4441,7 +4441,7 @@
             </a:r>
           </a:p>
           <a:p>
-            <a:pPr algn="l">
+            <a:pPr algn="just">
               <a:lnSpc>
                 <a:spcPct val="125000"/>
               </a:lnSpc>
@@ -4463,7 +4463,7 @@
             </a:r>
           </a:p>
           <a:p>
-            <a:pPr algn="l">
+            <a:pPr algn="just">
               <a:lnSpc>
                 <a:spcPct val="125000"/>
               </a:lnSpc>
@@ -4543,7 +4543,7 @@
           <a:bodyPr rtlCol="0" anchor="ctr" wrap="square" lIns="365760"/>
           <a:lstStyle/>
           <a:p>
-            <a:pPr algn="l"/>
+            <a:pPr algn="just"/>
             <a:r>
               <a:rPr sz="1500" b="1">
                 <a:solidFill>
@@ -4577,7 +4577,7 @@
           </a:bodyPr>
           <a:lstStyle/>
           <a:p>
-            <a:pPr algn="l">
+            <a:pPr algn="just">
               <a:lnSpc>
                 <a:spcPct val="125000"/>
               </a:lnSpc>
@@ -4599,7 +4599,7 @@
             </a:r>
           </a:p>
           <a:p>
-            <a:pPr algn="l">
+            <a:pPr algn="just">
               <a:lnSpc>
                 <a:spcPct val="125000"/>
               </a:lnSpc>
@@ -4621,7 +4621,7 @@
             </a:r>
           </a:p>
           <a:p>
-            <a:pPr algn="l">
+            <a:pPr algn="just">
               <a:lnSpc>
                 <a:spcPct val="125000"/>
               </a:lnSpc>
@@ -4643,7 +4643,7 @@
             </a:r>
           </a:p>
           <a:p>
-            <a:pPr algn="l">
+            <a:pPr algn="just">
               <a:lnSpc>
                 <a:spcPct val="125000"/>
               </a:lnSpc>
@@ -4665,7 +4665,7 @@
             </a:r>
           </a:p>
           <a:p>
-            <a:pPr algn="l">
+            <a:pPr algn="just">
               <a:lnSpc>
                 <a:spcPct val="125000"/>
               </a:lnSpc>
@@ -4687,7 +4687,7 @@
             </a:r>
           </a:p>
           <a:p>
-            <a:pPr algn="l">
+            <a:pPr algn="just">
               <a:lnSpc>
                 <a:spcPct val="125000"/>
               </a:lnSpc>
@@ -4709,7 +4709,7 @@
             </a:r>
           </a:p>
           <a:p>
-            <a:pPr algn="l">
+            <a:pPr algn="just">
               <a:lnSpc>
                 <a:spcPct val="125000"/>
               </a:lnSpc>
@@ -4731,7 +4731,7 @@
             </a:r>
           </a:p>
           <a:p>
-            <a:pPr algn="l">
+            <a:pPr algn="just">
               <a:lnSpc>
                 <a:spcPct val="125000"/>
               </a:lnSpc>
@@ -4753,7 +4753,7 @@
             </a:r>
           </a:p>
           <a:p>
-            <a:pPr algn="l">
+            <a:pPr algn="just">
               <a:lnSpc>
                 <a:spcPct val="125000"/>
               </a:lnSpc>
@@ -4775,7 +4775,7 @@
             </a:r>
           </a:p>
           <a:p>
-            <a:pPr algn="l">
+            <a:pPr algn="just">
               <a:lnSpc>
                 <a:spcPct val="125000"/>
               </a:lnSpc>
@@ -4797,7 +4797,7 @@
             </a:r>
           </a:p>
           <a:p>
-            <a:pPr algn="l">
+            <a:pPr algn="just">
               <a:lnSpc>
                 <a:spcPct val="125000"/>
               </a:lnSpc>
@@ -4877,7 +4877,7 @@
           <a:bodyPr rtlCol="0" anchor="ctr" wrap="square" lIns="365760"/>
           <a:lstStyle/>
           <a:p>
-            <a:pPr algn="l"/>
+            <a:pPr algn="just"/>
             <a:r>
               <a:rPr sz="1500" b="1">
                 <a:solidFill>
@@ -4911,7 +4911,7 @@
           </a:bodyPr>
           <a:lstStyle/>
           <a:p>
-            <a:pPr algn="l">
+            <a:pPr algn="just">
               <a:lnSpc>
                 <a:spcPct val="125000"/>
               </a:lnSpc>
@@ -4933,7 +4933,7 @@
             </a:r>
           </a:p>
           <a:p>
-            <a:pPr algn="l">
+            <a:pPr algn="just">
               <a:lnSpc>
                 <a:spcPct val="125000"/>
               </a:lnSpc>
@@ -4955,7 +4955,7 @@
             </a:r>
           </a:p>
           <a:p>
-            <a:pPr algn="l">
+            <a:pPr algn="just">
               <a:lnSpc>
                 <a:spcPct val="125000"/>
               </a:lnSpc>
@@ -4977,7 +4977,7 @@
             </a:r>
           </a:p>
           <a:p>
-            <a:pPr algn="l">
+            <a:pPr algn="just">
               <a:lnSpc>
                 <a:spcPct val="125000"/>
               </a:lnSpc>
@@ -4999,7 +4999,7 @@
             </a:r>
           </a:p>
           <a:p>
-            <a:pPr algn="l">
+            <a:pPr algn="just">
               <a:lnSpc>
                 <a:spcPct val="125000"/>
               </a:lnSpc>
@@ -5021,7 +5021,7 @@
             </a:r>
           </a:p>
           <a:p>
-            <a:pPr algn="l">
+            <a:pPr algn="just">
               <a:lnSpc>
                 <a:spcPct val="125000"/>
               </a:lnSpc>
@@ -5043,7 +5043,7 @@
             </a:r>
           </a:p>
           <a:p>
-            <a:pPr algn="l">
+            <a:pPr algn="just">
               <a:lnSpc>
                 <a:spcPct val="125000"/>
               </a:lnSpc>
@@ -5065,7 +5065,7 @@
             </a:r>
           </a:p>
           <a:p>
-            <a:pPr algn="l">
+            <a:pPr algn="just">
               <a:lnSpc>
                 <a:spcPct val="125000"/>
               </a:lnSpc>
@@ -5087,7 +5087,7 @@
             </a:r>
           </a:p>
           <a:p>
-            <a:pPr algn="l">
+            <a:pPr algn="just">
               <a:lnSpc>
                 <a:spcPct val="125000"/>
               </a:lnSpc>
@@ -5167,7 +5167,7 @@
           <a:bodyPr rtlCol="0" anchor="ctr" wrap="square" lIns="365760"/>
           <a:lstStyle/>
           <a:p>
-            <a:pPr algn="l"/>
+            <a:pPr algn="just"/>
             <a:r>
               <a:rPr sz="1500" b="1">
                 <a:solidFill>
@@ -5201,7 +5201,7 @@
           </a:bodyPr>
           <a:lstStyle/>
           <a:p>
-            <a:pPr algn="l">
+            <a:pPr algn="just">
               <a:lnSpc>
                 <a:spcPct val="125000"/>
               </a:lnSpc>
@@ -5223,7 +5223,7 @@
             </a:r>
           </a:p>
           <a:p>
-            <a:pPr algn="l">
+            <a:pPr algn="just">
               <a:lnSpc>
                 <a:spcPct val="125000"/>
               </a:lnSpc>
@@ -5245,7 +5245,7 @@
             </a:r>
           </a:p>
           <a:p>
-            <a:pPr algn="l">
+            <a:pPr algn="just">
               <a:lnSpc>
                 <a:spcPct val="125000"/>
               </a:lnSpc>
@@ -5267,7 +5267,7 @@
             </a:r>
           </a:p>
           <a:p>
-            <a:pPr algn="l">
+            <a:pPr algn="just">
               <a:lnSpc>
                 <a:spcPct val="125000"/>
               </a:lnSpc>
@@ -5289,7 +5289,7 @@
             </a:r>
           </a:p>
           <a:p>
-            <a:pPr algn="l">
+            <a:pPr algn="just">
               <a:lnSpc>
                 <a:spcPct val="125000"/>
               </a:lnSpc>
@@ -5311,7 +5311,7 @@
             </a:r>
           </a:p>
           <a:p>
-            <a:pPr algn="l">
+            <a:pPr algn="just">
               <a:lnSpc>
                 <a:spcPct val="125000"/>
               </a:lnSpc>
@@ -5333,7 +5333,7 @@
             </a:r>
           </a:p>
           <a:p>
-            <a:pPr algn="l">
+            <a:pPr algn="just">
               <a:lnSpc>
                 <a:spcPct val="125000"/>
               </a:lnSpc>
@@ -5355,7 +5355,7 @@
             </a:r>
           </a:p>
           <a:p>
-            <a:pPr algn="l">
+            <a:pPr algn="just">
               <a:lnSpc>
                 <a:spcPct val="125000"/>
               </a:lnSpc>
@@ -5377,7 +5377,7 @@
             </a:r>
           </a:p>
           <a:p>
-            <a:pPr algn="l">
+            <a:pPr algn="just">
               <a:lnSpc>
                 <a:spcPct val="125000"/>
               </a:lnSpc>
@@ -5399,7 +5399,7 @@
             </a:r>
           </a:p>
           <a:p>
-            <a:pPr algn="l">
+            <a:pPr algn="just">
               <a:lnSpc>
                 <a:spcPct val="125000"/>
               </a:lnSpc>
@@ -5479,7 +5479,7 @@
           <a:bodyPr rtlCol="0" anchor="ctr" wrap="square" lIns="365760"/>
           <a:lstStyle/>
           <a:p>
-            <a:pPr algn="l"/>
+            <a:pPr algn="just"/>
             <a:r>
               <a:rPr sz="1500" b="1">
                 <a:solidFill>
@@ -5513,7 +5513,7 @@
           </a:bodyPr>
           <a:lstStyle/>
           <a:p>
-            <a:pPr algn="l">
+            <a:pPr algn="just">
               <a:lnSpc>
                 <a:spcPct val="125000"/>
               </a:lnSpc>
@@ -5535,7 +5535,7 @@
             </a:r>
           </a:p>
           <a:p>
-            <a:pPr algn="l">
+            <a:pPr algn="just">
               <a:lnSpc>
                 <a:spcPct val="125000"/>
               </a:lnSpc>
@@ -5557,7 +5557,7 @@
             </a:r>
           </a:p>
           <a:p>
-            <a:pPr algn="l">
+            <a:pPr algn="just">
               <a:lnSpc>
                 <a:spcPct val="125000"/>
               </a:lnSpc>
@@ -5579,7 +5579,7 @@
             </a:r>
           </a:p>
           <a:p>
-            <a:pPr algn="l">
+            <a:pPr algn="just">
               <a:lnSpc>
                 <a:spcPct val="125000"/>
               </a:lnSpc>
@@ -5601,7 +5601,7 @@
             </a:r>
           </a:p>
           <a:p>
-            <a:pPr algn="l">
+            <a:pPr algn="just">
               <a:lnSpc>
                 <a:spcPct val="125000"/>
               </a:lnSpc>
@@ -5623,7 +5623,7 @@
             </a:r>
           </a:p>
           <a:p>
-            <a:pPr algn="l">
+            <a:pPr algn="just">
               <a:lnSpc>
                 <a:spcPct val="125000"/>
               </a:lnSpc>
@@ -5645,7 +5645,7 @@
             </a:r>
           </a:p>
           <a:p>
-            <a:pPr algn="l">
+            <a:pPr algn="just">
               <a:lnSpc>
                 <a:spcPct val="125000"/>
               </a:lnSpc>
@@ -5667,7 +5667,7 @@
             </a:r>
           </a:p>
           <a:p>
-            <a:pPr algn="l">
+            <a:pPr algn="just">
               <a:lnSpc>
                 <a:spcPct val="125000"/>
               </a:lnSpc>
@@ -5689,7 +5689,7 @@
             </a:r>
           </a:p>
           <a:p>
-            <a:pPr algn="l">
+            <a:pPr algn="just">
               <a:lnSpc>
                 <a:spcPct val="125000"/>
               </a:lnSpc>
@@ -5711,7 +5711,7 @@
             </a:r>
           </a:p>
           <a:p>
-            <a:pPr algn="l">
+            <a:pPr algn="just">
               <a:lnSpc>
                 <a:spcPct val="125000"/>
               </a:lnSpc>
@@ -5733,7 +5733,7 @@
             </a:r>
           </a:p>
           <a:p>
-            <a:pPr algn="l">
+            <a:pPr algn="just">
               <a:lnSpc>
                 <a:spcPct val="125000"/>
               </a:lnSpc>
@@ -5813,7 +5813,7 @@
           <a:bodyPr rtlCol="0" anchor="ctr" wrap="square" lIns="365760"/>
           <a:lstStyle/>
           <a:p>
-            <a:pPr algn="l"/>
+            <a:pPr algn="just"/>
             <a:r>
               <a:rPr sz="1500" b="1">
                 <a:solidFill>
@@ -5847,7 +5847,7 @@
           </a:bodyPr>
           <a:lstStyle/>
           <a:p>
-            <a:pPr algn="l">
+            <a:pPr algn="just">
               <a:lnSpc>
                 <a:spcPct val="125000"/>
               </a:lnSpc>
@@ -5869,7 +5869,7 @@
             </a:r>
           </a:p>
           <a:p>
-            <a:pPr algn="l">
+            <a:pPr algn="just">
               <a:lnSpc>
                 <a:spcPct val="125000"/>
               </a:lnSpc>
@@ -5891,7 +5891,7 @@
             </a:r>
           </a:p>
           <a:p>
-            <a:pPr algn="l">
+            <a:pPr algn="just">
               <a:lnSpc>
                 <a:spcPct val="125000"/>
               </a:lnSpc>
@@ -5913,7 +5913,7 @@
             </a:r>
           </a:p>
           <a:p>
-            <a:pPr algn="l">
+            <a:pPr algn="just">
               <a:lnSpc>
                 <a:spcPct val="125000"/>
               </a:lnSpc>
@@ -5935,7 +5935,7 @@
             </a:r>
           </a:p>
           <a:p>
-            <a:pPr algn="l">
+            <a:pPr algn="just">
               <a:lnSpc>
                 <a:spcPct val="125000"/>
               </a:lnSpc>
@@ -5957,7 +5957,7 @@
             </a:r>
           </a:p>
           <a:p>
-            <a:pPr algn="l">
+            <a:pPr algn="just">
               <a:lnSpc>
                 <a:spcPct val="125000"/>
               </a:lnSpc>
@@ -5979,7 +5979,7 @@
             </a:r>
           </a:p>
           <a:p>
-            <a:pPr algn="l">
+            <a:pPr algn="just">
               <a:lnSpc>
                 <a:spcPct val="125000"/>
               </a:lnSpc>
@@ -6001,7 +6001,7 @@
             </a:r>
           </a:p>
           <a:p>
-            <a:pPr algn="l">
+            <a:pPr algn="just">
               <a:lnSpc>
                 <a:spcPct val="125000"/>
               </a:lnSpc>
@@ -6023,7 +6023,7 @@
             </a:r>
           </a:p>
           <a:p>
-            <a:pPr algn="l">
+            <a:pPr algn="just">
               <a:lnSpc>
                 <a:spcPct val="125000"/>
               </a:lnSpc>
@@ -6045,7 +6045,7 @@
             </a:r>
           </a:p>
           <a:p>
-            <a:pPr algn="l">
+            <a:pPr algn="just">
               <a:lnSpc>
                 <a:spcPct val="125000"/>
               </a:lnSpc>
@@ -6125,7 +6125,7 @@
           <a:bodyPr rtlCol="0" anchor="ctr" wrap="square" lIns="365760"/>
           <a:lstStyle/>
           <a:p>
-            <a:pPr algn="l"/>
+            <a:pPr algn="just"/>
             <a:r>
               <a:rPr sz="1500" b="1">
                 <a:solidFill>
@@ -6159,7 +6159,7 @@
           </a:bodyPr>
           <a:lstStyle/>
           <a:p>
-            <a:pPr algn="l">
+            <a:pPr algn="just">
               <a:lnSpc>
                 <a:spcPct val="125000"/>
               </a:lnSpc>
@@ -6181,7 +6181,7 @@
             </a:r>
           </a:p>
           <a:p>
-            <a:pPr algn="l">
+            <a:pPr algn="just">
               <a:lnSpc>
                 <a:spcPct val="125000"/>
               </a:lnSpc>
@@ -6203,7 +6203,7 @@
             </a:r>
           </a:p>
           <a:p>
-            <a:pPr algn="l">
+            <a:pPr algn="just">
               <a:lnSpc>
                 <a:spcPct val="125000"/>
               </a:lnSpc>
@@ -6225,7 +6225,7 @@
             </a:r>
           </a:p>
           <a:p>
-            <a:pPr algn="l">
+            <a:pPr algn="just">
               <a:lnSpc>
                 <a:spcPct val="125000"/>
               </a:lnSpc>
@@ -6247,7 +6247,7 @@
             </a:r>
           </a:p>
           <a:p>
-            <a:pPr algn="l">
+            <a:pPr algn="just">
               <a:lnSpc>
                 <a:spcPct val="125000"/>
               </a:lnSpc>
@@ -6269,7 +6269,7 @@
             </a:r>
           </a:p>
           <a:p>
-            <a:pPr algn="l">
+            <a:pPr algn="just">
               <a:lnSpc>
                 <a:spcPct val="125000"/>
               </a:lnSpc>
@@ -6291,7 +6291,7 @@
             </a:r>
           </a:p>
           <a:p>
-            <a:pPr algn="l">
+            <a:pPr algn="just">
               <a:lnSpc>
                 <a:spcPct val="125000"/>
               </a:lnSpc>
@@ -6313,7 +6313,7 @@
             </a:r>
           </a:p>
           <a:p>
-            <a:pPr algn="l">
+            <a:pPr algn="just">
               <a:lnSpc>
                 <a:spcPct val="125000"/>
               </a:lnSpc>
@@ -6335,7 +6335,7 @@
             </a:r>
           </a:p>
           <a:p>
-            <a:pPr algn="l">
+            <a:pPr algn="just">
               <a:lnSpc>
                 <a:spcPct val="125000"/>
               </a:lnSpc>
@@ -6357,7 +6357,7 @@
             </a:r>
           </a:p>
           <a:p>
-            <a:pPr algn="l">
+            <a:pPr algn="just">
               <a:lnSpc>
                 <a:spcPct val="125000"/>
               </a:lnSpc>
@@ -6437,7 +6437,7 @@
           <a:bodyPr rtlCol="0" anchor="ctr" wrap="square" lIns="365760"/>
           <a:lstStyle/>
           <a:p>
-            <a:pPr algn="l"/>
+            <a:pPr algn="just"/>
             <a:r>
               <a:rPr sz="1500" b="1">
                 <a:solidFill>
@@ -6471,7 +6471,7 @@
           </a:bodyPr>
           <a:lstStyle/>
           <a:p>
-            <a:pPr algn="l">
+            <a:pPr algn="just">
               <a:lnSpc>
                 <a:spcPct val="125000"/>
               </a:lnSpc>
@@ -6493,7 +6493,7 @@
             </a:r>
           </a:p>
           <a:p>
-            <a:pPr algn="l">
+            <a:pPr algn="just">
               <a:lnSpc>
                 <a:spcPct val="125000"/>
               </a:lnSpc>
@@ -6515,7 +6515,7 @@
             </a:r>
           </a:p>
           <a:p>
-            <a:pPr algn="l">
+            <a:pPr algn="just">
               <a:lnSpc>
                 <a:spcPct val="125000"/>
               </a:lnSpc>
@@ -6537,7 +6537,7 @@
             </a:r>
           </a:p>
           <a:p>
-            <a:pPr algn="l">
+            <a:pPr algn="just">
               <a:lnSpc>
                 <a:spcPct val="125000"/>
               </a:lnSpc>
@@ -6559,7 +6559,7 @@
             </a:r>
           </a:p>
           <a:p>
-            <a:pPr algn="l">
+            <a:pPr algn="just">
               <a:lnSpc>
                 <a:spcPct val="125000"/>
               </a:lnSpc>
@@ -6581,7 +6581,7 @@
             </a:r>
           </a:p>
           <a:p>
-            <a:pPr algn="l">
+            <a:pPr algn="just">
               <a:lnSpc>
                 <a:spcPct val="125000"/>
               </a:lnSpc>
@@ -6603,7 +6603,7 @@
             </a:r>
           </a:p>
           <a:p>
-            <a:pPr algn="l">
+            <a:pPr algn="just">
               <a:lnSpc>
                 <a:spcPct val="125000"/>
               </a:lnSpc>
@@ -6625,7 +6625,7 @@
             </a:r>
           </a:p>
           <a:p>
-            <a:pPr algn="l">
+            <a:pPr algn="just">
               <a:lnSpc>
                 <a:spcPct val="125000"/>
               </a:lnSpc>
@@ -6647,7 +6647,7 @@
             </a:r>
           </a:p>
           <a:p>
-            <a:pPr algn="l">
+            <a:pPr algn="just">
               <a:lnSpc>
                 <a:spcPct val="125000"/>
               </a:lnSpc>
@@ -6669,7 +6669,7 @@
             </a:r>
           </a:p>
           <a:p>
-            <a:pPr algn="l">
+            <a:pPr algn="just">
               <a:lnSpc>
                 <a:spcPct val="125000"/>
               </a:lnSpc>
@@ -6691,7 +6691,7 @@
             </a:r>
           </a:p>
           <a:p>
-            <a:pPr algn="l">
+            <a:pPr algn="just">
               <a:lnSpc>
                 <a:spcPct val="125000"/>
               </a:lnSpc>
@@ -6713,7 +6713,7 @@
             </a:r>
           </a:p>
           <a:p>
-            <a:pPr algn="l">
+            <a:pPr algn="just">
               <a:lnSpc>
                 <a:spcPct val="125000"/>
               </a:lnSpc>
@@ -6735,7 +6735,7 @@
             </a:r>
           </a:p>
           <a:p>
-            <a:pPr algn="l">
+            <a:pPr algn="just">
               <a:lnSpc>
                 <a:spcPct val="125000"/>
               </a:lnSpc>
@@ -6815,7 +6815,7 @@
           <a:bodyPr rtlCol="0" anchor="ctr" wrap="square" lIns="365760"/>
           <a:lstStyle/>
           <a:p>
-            <a:pPr algn="l"/>
+            <a:pPr algn="just"/>
             <a:r>
               <a:rPr sz="1500" b="1">
                 <a:solidFill>
@@ -6849,7 +6849,7 @@
           </a:bodyPr>
           <a:lstStyle/>
           <a:p>
-            <a:pPr algn="l">
+            <a:pPr algn="just">
               <a:lnSpc>
                 <a:spcPct val="125000"/>
               </a:lnSpc>
@@ -6871,7 +6871,7 @@
             </a:r>
           </a:p>
           <a:p>
-            <a:pPr algn="l">
+            <a:pPr algn="just">
               <a:lnSpc>
                 <a:spcPct val="125000"/>
               </a:lnSpc>
@@ -6893,7 +6893,7 @@
             </a:r>
           </a:p>
           <a:p>
-            <a:pPr algn="l">
+            <a:pPr algn="just">
               <a:lnSpc>
                 <a:spcPct val="125000"/>
               </a:lnSpc>
@@ -6915,7 +6915,7 @@
             </a:r>
           </a:p>
           <a:p>
-            <a:pPr algn="l">
+            <a:pPr algn="just">
               <a:lnSpc>
                 <a:spcPct val="125000"/>
               </a:lnSpc>
@@ -6937,7 +6937,7 @@
             </a:r>
           </a:p>
           <a:p>
-            <a:pPr algn="l">
+            <a:pPr algn="just">
               <a:lnSpc>
                 <a:spcPct val="125000"/>
               </a:lnSpc>
@@ -6959,7 +6959,7 @@
             </a:r>
           </a:p>
           <a:p>
-            <a:pPr algn="l">
+            <a:pPr algn="just">
               <a:lnSpc>
                 <a:spcPct val="125000"/>
               </a:lnSpc>
@@ -6981,7 +6981,7 @@
             </a:r>
           </a:p>
           <a:p>
-            <a:pPr algn="l">
+            <a:pPr algn="just">
               <a:lnSpc>
                 <a:spcPct val="125000"/>
               </a:lnSpc>
@@ -7003,7 +7003,7 @@
             </a:r>
           </a:p>
           <a:p>
-            <a:pPr algn="l">
+            <a:pPr algn="just">
               <a:lnSpc>
                 <a:spcPct val="125000"/>
               </a:lnSpc>
@@ -7025,7 +7025,7 @@
             </a:r>
           </a:p>
           <a:p>
-            <a:pPr algn="l">
+            <a:pPr algn="just">
               <a:lnSpc>
                 <a:spcPct val="125000"/>
               </a:lnSpc>
@@ -7047,7 +7047,7 @@
             </a:r>
           </a:p>
           <a:p>
-            <a:pPr algn="l">
+            <a:pPr algn="just">
               <a:lnSpc>
                 <a:spcPct val="125000"/>
               </a:lnSpc>
@@ -7127,7 +7127,7 @@
           <a:bodyPr rtlCol="0" anchor="ctr" wrap="square" lIns="365760"/>
           <a:lstStyle/>
           <a:p>
-            <a:pPr algn="l"/>
+            <a:pPr algn="just"/>
             <a:r>
               <a:rPr sz="1500" b="1">
                 <a:solidFill>
@@ -7161,7 +7161,7 @@
           </a:bodyPr>
           <a:lstStyle/>
           <a:p>
-            <a:pPr algn="l">
+            <a:pPr algn="just">
               <a:lnSpc>
                 <a:spcPct val="125000"/>
               </a:lnSpc>
@@ -7183,7 +7183,7 @@
             </a:r>
           </a:p>
           <a:p>
-            <a:pPr algn="l">
+            <a:pPr algn="just">
               <a:lnSpc>
                 <a:spcPct val="125000"/>
               </a:lnSpc>
@@ -7205,7 +7205,7 @@
             </a:r>
           </a:p>
           <a:p>
-            <a:pPr algn="l">
+            <a:pPr algn="just">
               <a:lnSpc>
                 <a:spcPct val="125000"/>
               </a:lnSpc>
@@ -7227,7 +7227,7 @@
             </a:r>
           </a:p>
           <a:p>
-            <a:pPr algn="l">
+            <a:pPr algn="just">
               <a:lnSpc>
                 <a:spcPct val="125000"/>
               </a:lnSpc>
@@ -7249,7 +7249,7 @@
             </a:r>
           </a:p>
           <a:p>
-            <a:pPr algn="l">
+            <a:pPr algn="just">
               <a:lnSpc>
                 <a:spcPct val="125000"/>
               </a:lnSpc>
@@ -7271,7 +7271,7 @@
             </a:r>
           </a:p>
           <a:p>
-            <a:pPr algn="l">
+            <a:pPr algn="just">
               <a:lnSpc>
                 <a:spcPct val="125000"/>
               </a:lnSpc>
@@ -7293,7 +7293,7 @@
             </a:r>
           </a:p>
           <a:p>
-            <a:pPr algn="l">
+            <a:pPr algn="just">
               <a:lnSpc>
                 <a:spcPct val="125000"/>
               </a:lnSpc>
@@ -7315,7 +7315,7 @@
             </a:r>
           </a:p>
           <a:p>
-            <a:pPr algn="l">
+            <a:pPr algn="just">
               <a:lnSpc>
                 <a:spcPct val="125000"/>
               </a:lnSpc>
@@ -7337,7 +7337,7 @@
             </a:r>
           </a:p>
           <a:p>
-            <a:pPr algn="l">
+            <a:pPr algn="just">
               <a:lnSpc>
                 <a:spcPct val="125000"/>
               </a:lnSpc>
@@ -7359,7 +7359,7 @@
             </a:r>
           </a:p>
           <a:p>
-            <a:pPr algn="l">
+            <a:pPr algn="just">
               <a:lnSpc>
                 <a:spcPct val="125000"/>
               </a:lnSpc>
@@ -7439,7 +7439,7 @@
           <a:bodyPr rtlCol="0" anchor="ctr" wrap="square" lIns="365760"/>
           <a:lstStyle/>
           <a:p>
-            <a:pPr algn="l"/>
+            <a:pPr algn="just"/>
             <a:r>
               <a:rPr sz="1500" b="1">
                 <a:solidFill>
@@ -7473,7 +7473,7 @@
           </a:bodyPr>
           <a:lstStyle/>
           <a:p>
-            <a:pPr algn="l">
+            <a:pPr algn="just">
               <a:lnSpc>
                 <a:spcPct val="125000"/>
               </a:lnSpc>
@@ -7495,7 +7495,7 @@
             </a:r>
           </a:p>
           <a:p>
-            <a:pPr algn="l">
+            <a:pPr algn="just">
               <a:lnSpc>
                 <a:spcPct val="125000"/>
               </a:lnSpc>
@@ -7517,7 +7517,7 @@
             </a:r>
           </a:p>
           <a:p>
-            <a:pPr algn="l">
+            <a:pPr algn="just">
               <a:lnSpc>
                 <a:spcPct val="125000"/>
               </a:lnSpc>
@@ -7539,7 +7539,7 @@
             </a:r>
           </a:p>
           <a:p>
-            <a:pPr algn="l">
+            <a:pPr algn="just">
               <a:lnSpc>
                 <a:spcPct val="125000"/>
               </a:lnSpc>
@@ -7561,7 +7561,7 @@
             </a:r>
           </a:p>
           <a:p>
-            <a:pPr algn="l">
+            <a:pPr algn="just">
               <a:lnSpc>
                 <a:spcPct val="125000"/>
               </a:lnSpc>
@@ -7583,7 +7583,7 @@
             </a:r>
           </a:p>
           <a:p>
-            <a:pPr algn="l">
+            <a:pPr algn="just">
               <a:lnSpc>
                 <a:spcPct val="125000"/>
               </a:lnSpc>
@@ -7605,7 +7605,7 @@
             </a:r>
           </a:p>
           <a:p>
-            <a:pPr algn="l">
+            <a:pPr algn="just">
               <a:lnSpc>
                 <a:spcPct val="125000"/>
               </a:lnSpc>
@@ -7627,7 +7627,7 @@
             </a:r>
           </a:p>
           <a:p>
-            <a:pPr algn="l">
+            <a:pPr algn="just">
               <a:lnSpc>
                 <a:spcPct val="125000"/>
               </a:lnSpc>
@@ -7649,7 +7649,7 @@
             </a:r>
           </a:p>
           <a:p>
-            <a:pPr algn="l">
+            <a:pPr algn="just">
               <a:lnSpc>
                 <a:spcPct val="125000"/>
               </a:lnSpc>
@@ -7729,7 +7729,7 @@
           <a:bodyPr rtlCol="0" anchor="ctr" wrap="square" lIns="365760"/>
           <a:lstStyle/>
           <a:p>
-            <a:pPr algn="l"/>
+            <a:pPr algn="just"/>
             <a:r>
               <a:rPr sz="1500" b="1">
                 <a:solidFill>
@@ -7763,7 +7763,7 @@
           </a:bodyPr>
           <a:lstStyle/>
           <a:p>
-            <a:pPr algn="l">
+            <a:pPr algn="just">
               <a:lnSpc>
                 <a:spcPct val="125000"/>
               </a:lnSpc>
@@ -7785,7 +7785,7 @@
             </a:r>
           </a:p>
           <a:p>
-            <a:pPr algn="l">
+            <a:pPr algn="just">
               <a:lnSpc>
                 <a:spcPct val="125000"/>
               </a:lnSpc>
@@ -7807,7 +7807,7 @@
             </a:r>
           </a:p>
           <a:p>
-            <a:pPr algn="l">
+            <a:pPr algn="just">
               <a:lnSpc>
                 <a:spcPct val="125000"/>
               </a:lnSpc>
@@ -7829,7 +7829,7 @@
             </a:r>
           </a:p>
           <a:p>
-            <a:pPr algn="l">
+            <a:pPr algn="just">
               <a:lnSpc>
                 <a:spcPct val="125000"/>
               </a:lnSpc>
@@ -7851,7 +7851,7 @@
             </a:r>
           </a:p>
           <a:p>
-            <a:pPr algn="l">
+            <a:pPr algn="just">
               <a:lnSpc>
                 <a:spcPct val="125000"/>
               </a:lnSpc>
@@ -7873,7 +7873,7 @@
             </a:r>
           </a:p>
           <a:p>
-            <a:pPr algn="l">
+            <a:pPr algn="just">
               <a:lnSpc>
                 <a:spcPct val="125000"/>
               </a:lnSpc>
@@ -7895,7 +7895,7 @@
             </a:r>
           </a:p>
           <a:p>
-            <a:pPr algn="l">
+            <a:pPr algn="just">
               <a:lnSpc>
                 <a:spcPct val="125000"/>
               </a:lnSpc>
@@ -7917,7 +7917,7 @@
             </a:r>
           </a:p>
           <a:p>
-            <a:pPr algn="l">
+            <a:pPr algn="just">
               <a:lnSpc>
                 <a:spcPct val="125000"/>
               </a:lnSpc>
@@ -7939,7 +7939,7 @@
             </a:r>
           </a:p>
           <a:p>
-            <a:pPr algn="l">
+            <a:pPr algn="just">
               <a:lnSpc>
                 <a:spcPct val="125000"/>
               </a:lnSpc>
@@ -7961,7 +7961,7 @@
             </a:r>
           </a:p>
           <a:p>
-            <a:pPr algn="l">
+            <a:pPr algn="just">
               <a:lnSpc>
                 <a:spcPct val="125000"/>
               </a:lnSpc>
@@ -7983,7 +7983,7 @@
             </a:r>
           </a:p>
           <a:p>
-            <a:pPr algn="l">
+            <a:pPr algn="just">
               <a:lnSpc>
                 <a:spcPct val="125000"/>
               </a:lnSpc>
@@ -8005,7 +8005,7 @@
             </a:r>
           </a:p>
           <a:p>
-            <a:pPr algn="l">
+            <a:pPr algn="just">
               <a:lnSpc>
                 <a:spcPct val="125000"/>
               </a:lnSpc>
@@ -8085,7 +8085,7 @@
           <a:bodyPr rtlCol="0" anchor="ctr" wrap="square" lIns="365760"/>
           <a:lstStyle/>
           <a:p>
-            <a:pPr algn="l"/>
+            <a:pPr algn="just"/>
             <a:r>
               <a:rPr sz="1500" b="1">
                 <a:solidFill>
@@ -8119,7 +8119,7 @@
           </a:bodyPr>
           <a:lstStyle/>
           <a:p>
-            <a:pPr algn="l">
+            <a:pPr algn="just">
               <a:lnSpc>
                 <a:spcPct val="125000"/>
               </a:lnSpc>
@@ -8141,7 +8141,7 @@
             </a:r>
           </a:p>
           <a:p>
-            <a:pPr algn="l">
+            <a:pPr algn="just">
               <a:lnSpc>
                 <a:spcPct val="125000"/>
               </a:lnSpc>
@@ -8163,7 +8163,7 @@
             </a:r>
           </a:p>
           <a:p>
-            <a:pPr algn="l">
+            <a:pPr algn="just">
               <a:lnSpc>
                 <a:spcPct val="125000"/>
               </a:lnSpc>
@@ -8185,7 +8185,7 @@
             </a:r>
           </a:p>
           <a:p>
-            <a:pPr algn="l">
+            <a:pPr algn="just">
               <a:lnSpc>
                 <a:spcPct val="125000"/>
               </a:lnSpc>
@@ -8207,7 +8207,7 @@
             </a:r>
           </a:p>
           <a:p>
-            <a:pPr algn="l">
+            <a:pPr algn="just">
               <a:lnSpc>
                 <a:spcPct val="125000"/>
               </a:lnSpc>
@@ -8229,7 +8229,7 @@
             </a:r>
           </a:p>
           <a:p>
-            <a:pPr algn="l">
+            <a:pPr algn="just">
               <a:lnSpc>
                 <a:spcPct val="125000"/>
               </a:lnSpc>
@@ -8251,7 +8251,7 @@
             </a:r>
           </a:p>
           <a:p>
-            <a:pPr algn="l">
+            <a:pPr algn="just">
               <a:lnSpc>
                 <a:spcPct val="125000"/>
               </a:lnSpc>
@@ -8273,7 +8273,7 @@
             </a:r>
           </a:p>
           <a:p>
-            <a:pPr algn="l">
+            <a:pPr algn="just">
               <a:lnSpc>
                 <a:spcPct val="125000"/>
               </a:lnSpc>
@@ -8295,7 +8295,7 @@
             </a:r>
           </a:p>
           <a:p>
-            <a:pPr algn="l">
+            <a:pPr algn="just">
               <a:lnSpc>
                 <a:spcPct val="125000"/>
               </a:lnSpc>
@@ -8317,7 +8317,7 @@
             </a:r>
           </a:p>
           <a:p>
-            <a:pPr algn="l">
+            <a:pPr algn="just">
               <a:lnSpc>
                 <a:spcPct val="125000"/>
               </a:lnSpc>
@@ -8397,7 +8397,7 @@
           <a:bodyPr rtlCol="0" anchor="ctr" wrap="square" lIns="365760"/>
           <a:lstStyle/>
           <a:p>
-            <a:pPr algn="l"/>
+            <a:pPr algn="just"/>
             <a:r>
               <a:rPr sz="1500" b="1">
                 <a:solidFill>
@@ -8431,7 +8431,7 @@
           </a:bodyPr>
           <a:lstStyle/>
           <a:p>
-            <a:pPr algn="l">
+            <a:pPr algn="just">
               <a:lnSpc>
                 <a:spcPct val="125000"/>
               </a:lnSpc>
@@ -8453,7 +8453,7 @@
             </a:r>
           </a:p>
           <a:p>
-            <a:pPr algn="l">
+            <a:pPr algn="just">
               <a:lnSpc>
                 <a:spcPct val="125000"/>
               </a:lnSpc>
@@ -8475,7 +8475,7 @@
             </a:r>
           </a:p>
           <a:p>
-            <a:pPr algn="l">
+            <a:pPr algn="just">
               <a:lnSpc>
                 <a:spcPct val="125000"/>
               </a:lnSpc>
@@ -8497,7 +8497,7 @@
             </a:r>
           </a:p>
           <a:p>
-            <a:pPr algn="l">
+            <a:pPr algn="just">
               <a:lnSpc>
                 <a:spcPct val="125000"/>
               </a:lnSpc>
@@ -8519,7 +8519,7 @@
             </a:r>
           </a:p>
           <a:p>
-            <a:pPr algn="l">
+            <a:pPr algn="just">
               <a:lnSpc>
                 <a:spcPct val="125000"/>
               </a:lnSpc>
@@ -8541,7 +8541,7 @@
             </a:r>
           </a:p>
           <a:p>
-            <a:pPr algn="l">
+            <a:pPr algn="just">
               <a:lnSpc>
                 <a:spcPct val="125000"/>
               </a:lnSpc>
@@ -8563,7 +8563,7 @@
             </a:r>
           </a:p>
           <a:p>
-            <a:pPr algn="l">
+            <a:pPr algn="just">
               <a:lnSpc>
                 <a:spcPct val="125000"/>
               </a:lnSpc>
@@ -8585,7 +8585,7 @@
             </a:r>
           </a:p>
           <a:p>
-            <a:pPr algn="l">
+            <a:pPr algn="just">
               <a:lnSpc>
                 <a:spcPct val="125000"/>
               </a:lnSpc>
@@ -8607,7 +8607,7 @@
             </a:r>
           </a:p>
           <a:p>
-            <a:pPr algn="l">
+            <a:pPr algn="just">
               <a:lnSpc>
                 <a:spcPct val="125000"/>
               </a:lnSpc>
@@ -8629,7 +8629,7 @@
             </a:r>
           </a:p>
           <a:p>
-            <a:pPr algn="l">
+            <a:pPr algn="just">
               <a:lnSpc>
                 <a:spcPct val="125000"/>
               </a:lnSpc>
@@ -8651,7 +8651,7 @@
             </a:r>
           </a:p>
           <a:p>
-            <a:pPr algn="l">
+            <a:pPr algn="just">
               <a:lnSpc>
                 <a:spcPct val="125000"/>
               </a:lnSpc>
@@ -8673,7 +8673,7 @@
             </a:r>
           </a:p>
           <a:p>
-            <a:pPr algn="l">
+            <a:pPr algn="just">
               <a:lnSpc>
                 <a:spcPct val="125000"/>
               </a:lnSpc>
@@ -8695,7 +8695,7 @@
             </a:r>
           </a:p>
           <a:p>
-            <a:pPr algn="l">
+            <a:pPr algn="just">
               <a:lnSpc>
                 <a:spcPct val="125000"/>
               </a:lnSpc>
@@ -8717,7 +8717,7 @@
             </a:r>
           </a:p>
           <a:p>
-            <a:pPr algn="l">
+            <a:pPr algn="just">
               <a:lnSpc>
                 <a:spcPct val="125000"/>
               </a:lnSpc>
@@ -8739,7 +8739,7 @@
             </a:r>
           </a:p>
           <a:p>
-            <a:pPr algn="l">
+            <a:pPr algn="just">
               <a:lnSpc>
                 <a:spcPct val="125000"/>
               </a:lnSpc>
@@ -8819,7 +8819,7 @@
           <a:bodyPr rtlCol="0" anchor="ctr" wrap="square" lIns="365760"/>
           <a:lstStyle/>
           <a:p>
-            <a:pPr algn="l"/>
+            <a:pPr algn="just"/>
             <a:r>
               <a:rPr sz="1500" b="1">
                 <a:solidFill>
@@ -8853,7 +8853,7 @@
           </a:bodyPr>
           <a:lstStyle/>
           <a:p>
-            <a:pPr algn="l">
+            <a:pPr algn="just">
               <a:lnSpc>
                 <a:spcPct val="125000"/>
               </a:lnSpc>
@@ -8875,7 +8875,7 @@
             </a:r>
           </a:p>
           <a:p>
-            <a:pPr algn="l">
+            <a:pPr algn="just">
               <a:lnSpc>
                 <a:spcPct val="125000"/>
               </a:lnSpc>
@@ -8897,7 +8897,7 @@
             </a:r>
           </a:p>
           <a:p>
-            <a:pPr algn="l">
+            <a:pPr algn="just">
               <a:lnSpc>
                 <a:spcPct val="125000"/>
               </a:lnSpc>
@@ -8919,7 +8919,7 @@
             </a:r>
           </a:p>
           <a:p>
-            <a:pPr algn="l">
+            <a:pPr algn="just">
               <a:lnSpc>
                 <a:spcPct val="125000"/>
               </a:lnSpc>
@@ -8941,7 +8941,7 @@
             </a:r>
           </a:p>
           <a:p>
-            <a:pPr algn="l">
+            <a:pPr algn="just">
               <a:lnSpc>
                 <a:spcPct val="125000"/>
               </a:lnSpc>
@@ -8963,7 +8963,7 @@
             </a:r>
           </a:p>
           <a:p>
-            <a:pPr algn="l">
+            <a:pPr algn="just">
               <a:lnSpc>
                 <a:spcPct val="125000"/>
               </a:lnSpc>
@@ -8985,7 +8985,7 @@
             </a:r>
           </a:p>
           <a:p>
-            <a:pPr algn="l">
+            <a:pPr algn="just">
               <a:lnSpc>
                 <a:spcPct val="125000"/>
               </a:lnSpc>
@@ -9007,7 +9007,7 @@
             </a:r>
           </a:p>
           <a:p>
-            <a:pPr algn="l">
+            <a:pPr algn="just">
               <a:lnSpc>
                 <a:spcPct val="125000"/>
               </a:lnSpc>
@@ -9029,7 +9029,7 @@
             </a:r>
           </a:p>
           <a:p>
-            <a:pPr algn="l">
+            <a:pPr algn="just">
               <a:lnSpc>
                 <a:spcPct val="125000"/>
               </a:lnSpc>
@@ -9051,7 +9051,7 @@
             </a:r>
           </a:p>
           <a:p>
-            <a:pPr algn="l">
+            <a:pPr algn="just">
               <a:lnSpc>
                 <a:spcPct val="125000"/>
               </a:lnSpc>
@@ -9131,7 +9131,7 @@
           <a:bodyPr rtlCol="0" anchor="ctr" wrap="square" lIns="365760"/>
           <a:lstStyle/>
           <a:p>
-            <a:pPr algn="l"/>
+            <a:pPr algn="just"/>
             <a:r>
               <a:rPr sz="1500" b="1">
                 <a:solidFill>
@@ -9165,7 +9165,7 @@
           </a:bodyPr>
           <a:lstStyle/>
           <a:p>
-            <a:pPr algn="l">
+            <a:pPr algn="just">
               <a:lnSpc>
                 <a:spcPct val="125000"/>
               </a:lnSpc>
@@ -9187,7 +9187,7 @@
             </a:r>
           </a:p>
           <a:p>
-            <a:pPr algn="l">
+            <a:pPr algn="just">
               <a:lnSpc>
                 <a:spcPct val="125000"/>
               </a:lnSpc>
@@ -9209,7 +9209,7 @@
             </a:r>
           </a:p>
           <a:p>
-            <a:pPr algn="l">
+            <a:pPr algn="just">
               <a:lnSpc>
                 <a:spcPct val="125000"/>
               </a:lnSpc>
@@ -9231,7 +9231,7 @@
             </a:r>
           </a:p>
           <a:p>
-            <a:pPr algn="l">
+            <a:pPr algn="just">
               <a:lnSpc>
                 <a:spcPct val="125000"/>
               </a:lnSpc>
@@ -9253,7 +9253,7 @@
             </a:r>
           </a:p>
           <a:p>
-            <a:pPr algn="l">
+            <a:pPr algn="just">
               <a:lnSpc>
                 <a:spcPct val="125000"/>
               </a:lnSpc>
@@ -9275,7 +9275,7 @@
             </a:r>
           </a:p>
           <a:p>
-            <a:pPr algn="l">
+            <a:pPr algn="just">
               <a:lnSpc>
                 <a:spcPct val="125000"/>
               </a:lnSpc>
@@ -9297,7 +9297,7 @@
             </a:r>
           </a:p>
           <a:p>
-            <a:pPr algn="l">
+            <a:pPr algn="just">
               <a:lnSpc>
                 <a:spcPct val="125000"/>
               </a:lnSpc>
@@ -9319,7 +9319,7 @@
             </a:r>
           </a:p>
           <a:p>
-            <a:pPr algn="l">
+            <a:pPr algn="just">
               <a:lnSpc>
                 <a:spcPct val="125000"/>
               </a:lnSpc>
@@ -9341,7 +9341,7 @@
             </a:r>
           </a:p>
           <a:p>
-            <a:pPr algn="l">
+            <a:pPr algn="just">
               <a:lnSpc>
                 <a:spcPct val="125000"/>
               </a:lnSpc>
@@ -9421,7 +9421,7 @@
           <a:bodyPr rtlCol="0" anchor="ctr" wrap="square" lIns="365760"/>
           <a:lstStyle/>
           <a:p>
-            <a:pPr algn="l"/>
+            <a:pPr algn="just"/>
             <a:r>
               <a:rPr sz="1500" b="1">
                 <a:solidFill>
@@ -9455,7 +9455,7 @@
           </a:bodyPr>
           <a:lstStyle/>
           <a:p>
-            <a:pPr algn="l">
+            <a:pPr algn="just">
               <a:lnSpc>
                 <a:spcPct val="125000"/>
               </a:lnSpc>
@@ -9477,7 +9477,7 @@
             </a:r>
           </a:p>
           <a:p>
-            <a:pPr algn="l">
+            <a:pPr algn="just">
               <a:lnSpc>
                 <a:spcPct val="125000"/>
               </a:lnSpc>
@@ -9499,7 +9499,7 @@
             </a:r>
           </a:p>
           <a:p>
-            <a:pPr algn="l">
+            <a:pPr algn="just">
               <a:lnSpc>
                 <a:spcPct val="125000"/>
               </a:lnSpc>
@@ -9521,7 +9521,7 @@
             </a:r>
           </a:p>
           <a:p>
-            <a:pPr algn="l">
+            <a:pPr algn="just">
               <a:lnSpc>
                 <a:spcPct val="125000"/>
               </a:lnSpc>
@@ -9543,7 +9543,7 @@
             </a:r>
           </a:p>
           <a:p>
-            <a:pPr algn="l">
+            <a:pPr algn="just">
               <a:lnSpc>
                 <a:spcPct val="125000"/>
               </a:lnSpc>
@@ -9565,7 +9565,7 @@
             </a:r>
           </a:p>
           <a:p>
-            <a:pPr algn="l">
+            <a:pPr algn="just">
               <a:lnSpc>
                 <a:spcPct val="125000"/>
               </a:lnSpc>
@@ -9587,7 +9587,7 @@
             </a:r>
           </a:p>
           <a:p>
-            <a:pPr algn="l">
+            <a:pPr algn="just">
               <a:lnSpc>
                 <a:spcPct val="125000"/>
               </a:lnSpc>
@@ -9609,7 +9609,7 @@
             </a:r>
           </a:p>
           <a:p>
-            <a:pPr algn="l">
+            <a:pPr algn="just">
               <a:lnSpc>
                 <a:spcPct val="125000"/>
               </a:lnSpc>
@@ -9631,7 +9631,7 @@
             </a:r>
           </a:p>
           <a:p>
-            <a:pPr algn="l">
+            <a:pPr algn="just">
               <a:lnSpc>
                 <a:spcPct val="125000"/>
               </a:lnSpc>
@@ -9653,7 +9653,7 @@
             </a:r>
           </a:p>
           <a:p>
-            <a:pPr algn="l">
+            <a:pPr algn="just">
               <a:lnSpc>
                 <a:spcPct val="125000"/>
               </a:lnSpc>
@@ -9733,7 +9733,7 @@
           <a:bodyPr rtlCol="0" anchor="ctr" wrap="square" lIns="365760"/>
           <a:lstStyle/>
           <a:p>
-            <a:pPr algn="l"/>
+            <a:pPr algn="just"/>
             <a:r>
               <a:rPr sz="1500" b="1">
                 <a:solidFill>
@@ -9767,7 +9767,7 @@
           </a:bodyPr>
           <a:lstStyle/>
           <a:p>
-            <a:pPr algn="l">
+            <a:pPr algn="just">
               <a:lnSpc>
                 <a:spcPct val="125000"/>
               </a:lnSpc>
@@ -9789,7 +9789,7 @@
             </a:r>
           </a:p>
           <a:p>
-            <a:pPr algn="l">
+            <a:pPr algn="just">
               <a:lnSpc>
                 <a:spcPct val="125000"/>
               </a:lnSpc>
@@ -9811,7 +9811,7 @@
             </a:r>
           </a:p>
           <a:p>
-            <a:pPr algn="l">
+            <a:pPr algn="just">
               <a:lnSpc>
                 <a:spcPct val="125000"/>
               </a:lnSpc>
@@ -9833,7 +9833,7 @@
             </a:r>
           </a:p>
           <a:p>
-            <a:pPr algn="l">
+            <a:pPr algn="just">
               <a:lnSpc>
                 <a:spcPct val="125000"/>
               </a:lnSpc>
@@ -9855,7 +9855,7 @@
             </a:r>
           </a:p>
           <a:p>
-            <a:pPr algn="l">
+            <a:pPr algn="just">
               <a:lnSpc>
                 <a:spcPct val="125000"/>
               </a:lnSpc>
@@ -9877,7 +9877,7 @@
             </a:r>
           </a:p>
           <a:p>
-            <a:pPr algn="l">
+            <a:pPr algn="just">
               <a:lnSpc>
                 <a:spcPct val="125000"/>
               </a:lnSpc>
@@ -9899,7 +9899,7 @@
             </a:r>
           </a:p>
           <a:p>
-            <a:pPr algn="l">
+            <a:pPr algn="just">
               <a:lnSpc>
                 <a:spcPct val="125000"/>
               </a:lnSpc>
@@ -9921,7 +9921,7 @@
             </a:r>
           </a:p>
           <a:p>
-            <a:pPr algn="l">
+            <a:pPr algn="just">
               <a:lnSpc>
                 <a:spcPct val="125000"/>
               </a:lnSpc>
@@ -9943,7 +9943,7 @@
             </a:r>
           </a:p>
           <a:p>
-            <a:pPr algn="l">
+            <a:pPr algn="just">
               <a:lnSpc>
                 <a:spcPct val="125000"/>
               </a:lnSpc>
@@ -9965,7 +9965,7 @@
             </a:r>
           </a:p>
           <a:p>
-            <a:pPr algn="l">
+            <a:pPr algn="just">
               <a:lnSpc>
                 <a:spcPct val="125000"/>
               </a:lnSpc>
@@ -10045,7 +10045,7 @@
           <a:bodyPr rtlCol="0" anchor="ctr" wrap="square" lIns="365760"/>
           <a:lstStyle/>
           <a:p>
-            <a:pPr algn="l"/>
+            <a:pPr algn="just"/>
             <a:r>
               <a:rPr sz="1500" b="1">
                 <a:solidFill>
@@ -10079,7 +10079,7 @@
           </a:bodyPr>
           <a:lstStyle/>
           <a:p>
-            <a:pPr algn="l">
+            <a:pPr algn="just">
               <a:lnSpc>
                 <a:spcPct val="125000"/>
               </a:lnSpc>
@@ -10101,7 +10101,7 @@
             </a:r>
           </a:p>
           <a:p>
-            <a:pPr algn="l">
+            <a:pPr algn="just">
               <a:lnSpc>
                 <a:spcPct val="125000"/>
               </a:lnSpc>
@@ -10123,7 +10123,7 @@
             </a:r>
           </a:p>
           <a:p>
-            <a:pPr algn="l">
+            <a:pPr algn="just">
               <a:lnSpc>
                 <a:spcPct val="125000"/>
               </a:lnSpc>
@@ -10145,7 +10145,7 @@
             </a:r>
           </a:p>
           <a:p>
-            <a:pPr algn="l">
+            <a:pPr algn="just">
               <a:lnSpc>
                 <a:spcPct val="125000"/>
               </a:lnSpc>
@@ -10167,7 +10167,7 @@
             </a:r>
           </a:p>
           <a:p>
-            <a:pPr algn="l">
+            <a:pPr algn="just">
               <a:lnSpc>
                 <a:spcPct val="125000"/>
               </a:lnSpc>
@@ -10189,7 +10189,7 @@
             </a:r>
           </a:p>
           <a:p>
-            <a:pPr algn="l">
+            <a:pPr algn="just">
               <a:lnSpc>
                 <a:spcPct val="125000"/>
               </a:lnSpc>
@@ -10211,7 +10211,7 @@
             </a:r>
           </a:p>
           <a:p>
-            <a:pPr algn="l">
+            <a:pPr algn="just">
               <a:lnSpc>
                 <a:spcPct val="125000"/>
               </a:lnSpc>
@@ -10233,7 +10233,7 @@
             </a:r>
           </a:p>
           <a:p>
-            <a:pPr algn="l">
+            <a:pPr algn="just">
               <a:lnSpc>
                 <a:spcPct val="125000"/>
               </a:lnSpc>
@@ -10255,7 +10255,7 @@
             </a:r>
           </a:p>
           <a:p>
-            <a:pPr algn="l">
+            <a:pPr algn="just">
               <a:lnSpc>
                 <a:spcPct val="125000"/>
               </a:lnSpc>
@@ -10277,7 +10277,7 @@
             </a:r>
           </a:p>
           <a:p>
-            <a:pPr algn="l">
+            <a:pPr algn="just">
               <a:lnSpc>
                 <a:spcPct val="125000"/>
               </a:lnSpc>
@@ -10357,7 +10357,7 @@
           <a:bodyPr rtlCol="0" anchor="ctr" wrap="square" lIns="365760"/>
           <a:lstStyle/>
           <a:p>
-            <a:pPr algn="l"/>
+            <a:pPr algn="just"/>
             <a:r>
               <a:rPr sz="1500" b="1">
                 <a:solidFill>
@@ -10391,7 +10391,7 @@
           </a:bodyPr>
           <a:lstStyle/>
           <a:p>
-            <a:pPr algn="l">
+            <a:pPr algn="just">
               <a:lnSpc>
                 <a:spcPct val="125000"/>
               </a:lnSpc>
@@ -10413,7 +10413,7 @@
             </a:r>
           </a:p>
           <a:p>
-            <a:pPr algn="l">
+            <a:pPr algn="just">
               <a:lnSpc>
                 <a:spcPct val="125000"/>
               </a:lnSpc>
@@ -10435,7 +10435,7 @@
             </a:r>
           </a:p>
           <a:p>
-            <a:pPr algn="l">
+            <a:pPr algn="just">
               <a:lnSpc>
                 <a:spcPct val="125000"/>
               </a:lnSpc>
@@ -10457,7 +10457,7 @@
             </a:r>
           </a:p>
           <a:p>
-            <a:pPr algn="l">
+            <a:pPr algn="just">
               <a:lnSpc>
                 <a:spcPct val="125000"/>
               </a:lnSpc>
@@ -10479,7 +10479,7 @@
             </a:r>
           </a:p>
           <a:p>
-            <a:pPr algn="l">
+            <a:pPr algn="just">
               <a:lnSpc>
                 <a:spcPct val="125000"/>
               </a:lnSpc>
@@ -10501,7 +10501,7 @@
             </a:r>
           </a:p>
           <a:p>
-            <a:pPr algn="l">
+            <a:pPr algn="just">
               <a:lnSpc>
                 <a:spcPct val="125000"/>
               </a:lnSpc>
@@ -10523,7 +10523,7 @@
             </a:r>
           </a:p>
           <a:p>
-            <a:pPr algn="l">
+            <a:pPr algn="just">
               <a:lnSpc>
                 <a:spcPct val="125000"/>
               </a:lnSpc>
@@ -10545,7 +10545,7 @@
             </a:r>
           </a:p>
           <a:p>
-            <a:pPr algn="l">
+            <a:pPr algn="just">
               <a:lnSpc>
                 <a:spcPct val="125000"/>
               </a:lnSpc>
@@ -10567,7 +10567,7 @@
             </a:r>
           </a:p>
           <a:p>
-            <a:pPr algn="l">
+            <a:pPr algn="just">
               <a:lnSpc>
                 <a:spcPct val="125000"/>
               </a:lnSpc>
@@ -10647,7 +10647,7 @@
           <a:bodyPr rtlCol="0" anchor="ctr" wrap="square" lIns="365760"/>
           <a:lstStyle/>
           <a:p>
-            <a:pPr algn="l"/>
+            <a:pPr algn="just"/>
             <a:r>
               <a:rPr sz="1500" b="1">
                 <a:solidFill>
@@ -10681,7 +10681,7 @@
           </a:bodyPr>
           <a:lstStyle/>
           <a:p>
-            <a:pPr algn="l">
+            <a:pPr algn="just">
               <a:lnSpc>
                 <a:spcPct val="125000"/>
               </a:lnSpc>
@@ -10703,7 +10703,7 @@
             </a:r>
           </a:p>
           <a:p>
-            <a:pPr algn="l">
+            <a:pPr algn="just">
               <a:lnSpc>
                 <a:spcPct val="125000"/>
               </a:lnSpc>
@@ -10725,7 +10725,7 @@
             </a:r>
           </a:p>
           <a:p>
-            <a:pPr algn="l">
+            <a:pPr algn="just">
               <a:lnSpc>
                 <a:spcPct val="125000"/>
               </a:lnSpc>
@@ -10747,7 +10747,7 @@
             </a:r>
           </a:p>
           <a:p>
-            <a:pPr algn="l">
+            <a:pPr algn="just">
               <a:lnSpc>
                 <a:spcPct val="125000"/>
               </a:lnSpc>
@@ -10769,7 +10769,7 @@
             </a:r>
           </a:p>
           <a:p>
-            <a:pPr algn="l">
+            <a:pPr algn="just">
               <a:lnSpc>
                 <a:spcPct val="125000"/>
               </a:lnSpc>
@@ -10791,7 +10791,7 @@
             </a:r>
           </a:p>
           <a:p>
-            <a:pPr algn="l">
+            <a:pPr algn="just">
               <a:lnSpc>
                 <a:spcPct val="125000"/>
               </a:lnSpc>
@@ -10813,7 +10813,7 @@
             </a:r>
           </a:p>
           <a:p>
-            <a:pPr algn="l">
+            <a:pPr algn="just">
               <a:lnSpc>
                 <a:spcPct val="125000"/>
               </a:lnSpc>
@@ -10835,7 +10835,7 @@
             </a:r>
           </a:p>
           <a:p>
-            <a:pPr algn="l">
+            <a:pPr algn="just">
               <a:lnSpc>
                 <a:spcPct val="125000"/>
               </a:lnSpc>
@@ -10857,7 +10857,7 @@
             </a:r>
           </a:p>
           <a:p>
-            <a:pPr algn="l">
+            <a:pPr algn="just">
               <a:lnSpc>
                 <a:spcPct val="125000"/>
               </a:lnSpc>
@@ -10879,7 +10879,7 @@
             </a:r>
           </a:p>
           <a:p>
-            <a:pPr algn="l">
+            <a:pPr algn="just">
               <a:lnSpc>
                 <a:spcPct val="125000"/>
               </a:lnSpc>
@@ -10901,7 +10901,7 @@
             </a:r>
           </a:p>
           <a:p>
-            <a:pPr algn="l">
+            <a:pPr algn="just">
               <a:lnSpc>
                 <a:spcPct val="125000"/>
               </a:lnSpc>
@@ -10981,7 +10981,7 @@
           <a:bodyPr rtlCol="0" anchor="ctr" wrap="square" lIns="365760"/>
           <a:lstStyle/>
           <a:p>
-            <a:pPr algn="l"/>
+            <a:pPr algn="just"/>
             <a:r>
               <a:rPr sz="1500" b="1">
                 <a:solidFill>
@@ -11015,7 +11015,7 @@
           </a:bodyPr>
           <a:lstStyle/>
           <a:p>
-            <a:pPr algn="l">
+            <a:pPr algn="just">
               <a:lnSpc>
                 <a:spcPct val="125000"/>
               </a:lnSpc>
@@ -11037,7 +11037,7 @@
             </a:r>
           </a:p>
           <a:p>
-            <a:pPr algn="l">
+            <a:pPr algn="just">
               <a:lnSpc>
                 <a:spcPct val="125000"/>
               </a:lnSpc>
@@ -11059,7 +11059,7 @@
             </a:r>
           </a:p>
           <a:p>
-            <a:pPr algn="l">
+            <a:pPr algn="just">
               <a:lnSpc>
                 <a:spcPct val="125000"/>
               </a:lnSpc>
@@ -11081,7 +11081,7 @@
             </a:r>
           </a:p>
           <a:p>
-            <a:pPr algn="l">
+            <a:pPr algn="just">
               <a:lnSpc>
                 <a:spcPct val="125000"/>
               </a:lnSpc>
@@ -11103,7 +11103,7 @@
             </a:r>
           </a:p>
           <a:p>
-            <a:pPr algn="l">
+            <a:pPr algn="just">
               <a:lnSpc>
                 <a:spcPct val="125000"/>
               </a:lnSpc>
@@ -11125,7 +11125,7 @@
             </a:r>
           </a:p>
           <a:p>
-            <a:pPr algn="l">
+            <a:pPr algn="just">
               <a:lnSpc>
                 <a:spcPct val="125000"/>
               </a:lnSpc>
@@ -11147,7 +11147,7 @@
             </a:r>
           </a:p>
           <a:p>
-            <a:pPr algn="l">
+            <a:pPr algn="just">
               <a:lnSpc>
                 <a:spcPct val="125000"/>
               </a:lnSpc>
@@ -11169,7 +11169,7 @@
             </a:r>
           </a:p>
           <a:p>
-            <a:pPr algn="l">
+            <a:pPr algn="just">
               <a:lnSpc>
                 <a:spcPct val="125000"/>
               </a:lnSpc>
@@ -11191,7 +11191,7 @@
             </a:r>
           </a:p>
           <a:p>
-            <a:pPr algn="l">
+            <a:pPr algn="just">
               <a:lnSpc>
                 <a:spcPct val="125000"/>
               </a:lnSpc>
@@ -11271,7 +11271,7 @@
           <a:bodyPr rtlCol="0" anchor="ctr" wrap="square" lIns="365760"/>
           <a:lstStyle/>
           <a:p>
-            <a:pPr algn="l"/>
+            <a:pPr algn="just"/>
             <a:r>
               <a:rPr sz="1500" b="1">
                 <a:solidFill>
@@ -11305,7 +11305,7 @@
           </a:bodyPr>
           <a:lstStyle/>
           <a:p>
-            <a:pPr algn="l">
+            <a:pPr algn="just">
               <a:lnSpc>
                 <a:spcPct val="125000"/>
               </a:lnSpc>
@@ -11327,7 +11327,7 @@
             </a:r>
           </a:p>
           <a:p>
-            <a:pPr algn="l">
+            <a:pPr algn="just">
               <a:lnSpc>
                 <a:spcPct val="125000"/>
               </a:lnSpc>
@@ -11349,7 +11349,7 @@
             </a:r>
           </a:p>
           <a:p>
-            <a:pPr algn="l">
+            <a:pPr algn="just">
               <a:lnSpc>
                 <a:spcPct val="125000"/>
               </a:lnSpc>
@@ -11371,7 +11371,7 @@
             </a:r>
           </a:p>
           <a:p>
-            <a:pPr algn="l">
+            <a:pPr algn="just">
               <a:lnSpc>
                 <a:spcPct val="125000"/>
               </a:lnSpc>
@@ -11393,7 +11393,7 @@
             </a:r>
           </a:p>
           <a:p>
-            <a:pPr algn="l">
+            <a:pPr algn="just">
               <a:lnSpc>
                 <a:spcPct val="125000"/>
               </a:lnSpc>
@@ -11415,7 +11415,7 @@
             </a:r>
           </a:p>
           <a:p>
-            <a:pPr algn="l">
+            <a:pPr algn="just">
               <a:lnSpc>
                 <a:spcPct val="125000"/>
               </a:lnSpc>
@@ -11437,7 +11437,7 @@
             </a:r>
           </a:p>
           <a:p>
-            <a:pPr algn="l">
+            <a:pPr algn="just">
               <a:lnSpc>
                 <a:spcPct val="125000"/>
               </a:lnSpc>
@@ -11459,7 +11459,7 @@
             </a:r>
           </a:p>
           <a:p>
-            <a:pPr algn="l">
+            <a:pPr algn="just">
               <a:lnSpc>
                 <a:spcPct val="125000"/>
               </a:lnSpc>
@@ -11481,7 +11481,7 @@
             </a:r>
           </a:p>
           <a:p>
-            <a:pPr algn="l">
+            <a:pPr algn="just">
               <a:lnSpc>
                 <a:spcPct val="125000"/>
               </a:lnSpc>
@@ -11503,7 +11503,7 @@
             </a:r>
           </a:p>
           <a:p>
-            <a:pPr algn="l">
+            <a:pPr algn="just">
               <a:lnSpc>
                 <a:spcPct val="125000"/>
               </a:lnSpc>
@@ -11583,7 +11583,7 @@
           <a:bodyPr rtlCol="0" anchor="ctr" wrap="square" lIns="365760"/>
           <a:lstStyle/>
           <a:p>
-            <a:pPr algn="l"/>
+            <a:pPr algn="just"/>
             <a:r>
               <a:rPr sz="1500" b="1">
                 <a:solidFill>
@@ -11617,7 +11617,7 @@
           </a:bodyPr>
           <a:lstStyle/>
           <a:p>
-            <a:pPr algn="l">
+            <a:pPr algn="just">
               <a:lnSpc>
                 <a:spcPct val="125000"/>
               </a:lnSpc>
@@ -11639,7 +11639,7 @@
             </a:r>
           </a:p>
           <a:p>
-            <a:pPr algn="l">
+            <a:pPr algn="just">
               <a:lnSpc>
                 <a:spcPct val="125000"/>
               </a:lnSpc>
@@ -11661,7 +11661,7 @@
             </a:r>
           </a:p>
           <a:p>
-            <a:pPr algn="l">
+            <a:pPr algn="just">
               <a:lnSpc>
                 <a:spcPct val="125000"/>
               </a:lnSpc>
@@ -11683,7 +11683,7 @@
             </a:r>
           </a:p>
           <a:p>
-            <a:pPr algn="l">
+            <a:pPr algn="just">
               <a:lnSpc>
                 <a:spcPct val="125000"/>
               </a:lnSpc>
@@ -11705,7 +11705,7 @@
             </a:r>
           </a:p>
           <a:p>
-            <a:pPr algn="l">
+            <a:pPr algn="just">
               <a:lnSpc>
                 <a:spcPct val="125000"/>
               </a:lnSpc>
@@ -11727,7 +11727,7 @@
             </a:r>
           </a:p>
           <a:p>
-            <a:pPr algn="l">
+            <a:pPr algn="just">
               <a:lnSpc>
                 <a:spcPct val="125000"/>
               </a:lnSpc>
@@ -11749,7 +11749,7 @@
             </a:r>
           </a:p>
           <a:p>
-            <a:pPr algn="l">
+            <a:pPr algn="just">
               <a:lnSpc>
                 <a:spcPct val="125000"/>
               </a:lnSpc>
@@ -11771,7 +11771,7 @@
             </a:r>
           </a:p>
           <a:p>
-            <a:pPr algn="l">
+            <a:pPr algn="just">
               <a:lnSpc>
                 <a:spcPct val="125000"/>
               </a:lnSpc>
@@ -11793,7 +11793,7 @@
             </a:r>
           </a:p>
           <a:p>
-            <a:pPr algn="l">
+            <a:pPr algn="just">
               <a:lnSpc>
                 <a:spcPct val="125000"/>
               </a:lnSpc>
@@ -11873,7 +11873,7 @@
           <a:bodyPr rtlCol="0" anchor="ctr" wrap="square" lIns="365760"/>
           <a:lstStyle/>
           <a:p>
-            <a:pPr algn="l"/>
+            <a:pPr algn="just"/>
             <a:r>
               <a:rPr sz="1500" b="1">
                 <a:solidFill>
@@ -11907,7 +11907,7 @@
           </a:bodyPr>
           <a:lstStyle/>
           <a:p>
-            <a:pPr algn="l">
+            <a:pPr algn="just">
               <a:lnSpc>
                 <a:spcPct val="125000"/>
               </a:lnSpc>
@@ -11929,7 +11929,7 @@
             </a:r>
           </a:p>
           <a:p>
-            <a:pPr algn="l">
+            <a:pPr algn="just">
               <a:lnSpc>
                 <a:spcPct val="125000"/>
               </a:lnSpc>
@@ -11951,7 +11951,7 @@
             </a:r>
           </a:p>
           <a:p>
-            <a:pPr algn="l">
+            <a:pPr algn="just">
               <a:lnSpc>
                 <a:spcPct val="125000"/>
               </a:lnSpc>
@@ -11973,7 +11973,7 @@
             </a:r>
           </a:p>
           <a:p>
-            <a:pPr algn="l">
+            <a:pPr algn="just">
               <a:lnSpc>
                 <a:spcPct val="125000"/>
               </a:lnSpc>
@@ -11995,7 +11995,7 @@
             </a:r>
           </a:p>
           <a:p>
-            <a:pPr algn="l">
+            <a:pPr algn="just">
               <a:lnSpc>
                 <a:spcPct val="125000"/>
               </a:lnSpc>
@@ -12017,7 +12017,7 @@
             </a:r>
           </a:p>
           <a:p>
-            <a:pPr algn="l">
+            <a:pPr algn="just">
               <a:lnSpc>
                 <a:spcPct val="125000"/>
               </a:lnSpc>
@@ -12039,7 +12039,7 @@
             </a:r>
           </a:p>
           <a:p>
-            <a:pPr algn="l">
+            <a:pPr algn="just">
               <a:lnSpc>
                 <a:spcPct val="125000"/>
               </a:lnSpc>
@@ -12061,7 +12061,7 @@
             </a:r>
           </a:p>
           <a:p>
-            <a:pPr algn="l">
+            <a:pPr algn="just">
               <a:lnSpc>
                 <a:spcPct val="125000"/>
               </a:lnSpc>
@@ -12083,7 +12083,7 @@
             </a:r>
           </a:p>
           <a:p>
-            <a:pPr algn="l">
+            <a:pPr algn="just">
               <a:lnSpc>
                 <a:spcPct val="125000"/>
               </a:lnSpc>
@@ -12105,7 +12105,7 @@
             </a:r>
           </a:p>
           <a:p>
-            <a:pPr algn="l">
+            <a:pPr algn="just">
               <a:lnSpc>
                 <a:spcPct val="125000"/>
               </a:lnSpc>
@@ -12127,7 +12127,7 @@
             </a:r>
           </a:p>
           <a:p>
-            <a:pPr algn="l">
+            <a:pPr algn="just">
               <a:lnSpc>
                 <a:spcPct val="125000"/>
               </a:lnSpc>
@@ -12149,7 +12149,7 @@
             </a:r>
           </a:p>
           <a:p>
-            <a:pPr algn="l">
+            <a:pPr algn="just">
               <a:lnSpc>
                 <a:spcPct val="125000"/>
               </a:lnSpc>
@@ -12229,7 +12229,7 @@
           <a:bodyPr rtlCol="0" anchor="ctr" wrap="square" lIns="365760"/>
           <a:lstStyle/>
           <a:p>
-            <a:pPr algn="l"/>
+            <a:pPr algn="just"/>
             <a:r>
               <a:rPr sz="1500" b="1">
                 <a:solidFill>
@@ -12263,7 +12263,7 @@
           </a:bodyPr>
           <a:lstStyle/>
           <a:p>
-            <a:pPr algn="l">
+            <a:pPr algn="just">
               <a:lnSpc>
                 <a:spcPct val="125000"/>
               </a:lnSpc>
@@ -12285,7 +12285,7 @@
             </a:r>
           </a:p>
           <a:p>
-            <a:pPr algn="l">
+            <a:pPr algn="just">
               <a:lnSpc>
                 <a:spcPct val="125000"/>
               </a:lnSpc>
@@ -12307,7 +12307,7 @@
             </a:r>
           </a:p>
           <a:p>
-            <a:pPr algn="l">
+            <a:pPr algn="just">
               <a:lnSpc>
                 <a:spcPct val="125000"/>
               </a:lnSpc>
@@ -12329,7 +12329,7 @@
             </a:r>
           </a:p>
           <a:p>
-            <a:pPr algn="l">
+            <a:pPr algn="just">
               <a:lnSpc>
                 <a:spcPct val="125000"/>
               </a:lnSpc>
@@ -12351,7 +12351,7 @@
             </a:r>
           </a:p>
           <a:p>
-            <a:pPr algn="l">
+            <a:pPr algn="just">
               <a:lnSpc>
                 <a:spcPct val="125000"/>
               </a:lnSpc>
@@ -12373,7 +12373,7 @@
             </a:r>
           </a:p>
           <a:p>
-            <a:pPr algn="l">
+            <a:pPr algn="just">
               <a:lnSpc>
                 <a:spcPct val="125000"/>
               </a:lnSpc>
@@ -12395,7 +12395,7 @@
             </a:r>
           </a:p>
           <a:p>
-            <a:pPr algn="l">
+            <a:pPr algn="just">
               <a:lnSpc>
                 <a:spcPct val="125000"/>
               </a:lnSpc>
@@ -12417,7 +12417,7 @@
             </a:r>
           </a:p>
           <a:p>
-            <a:pPr algn="l">
+            <a:pPr algn="just">
               <a:lnSpc>
                 <a:spcPct val="125000"/>
               </a:lnSpc>
@@ -12439,7 +12439,7 @@
             </a:r>
           </a:p>
           <a:p>
-            <a:pPr algn="l">
+            <a:pPr algn="just">
               <a:lnSpc>
                 <a:spcPct val="125000"/>
               </a:lnSpc>
@@ -12519,7 +12519,7 @@
           <a:bodyPr rtlCol="0" anchor="ctr" wrap="square" lIns="365760"/>
           <a:lstStyle/>
           <a:p>
-            <a:pPr algn="l"/>
+            <a:pPr algn="just"/>
             <a:r>
               <a:rPr sz="1500" b="1">
                 <a:solidFill>
@@ -12553,7 +12553,7 @@
           </a:bodyPr>
           <a:lstStyle/>
           <a:p>
-            <a:pPr algn="l">
+            <a:pPr algn="just">
               <a:lnSpc>
                 <a:spcPct val="125000"/>
               </a:lnSpc>
@@ -12575,7 +12575,7 @@
             </a:r>
           </a:p>
           <a:p>
-            <a:pPr algn="l">
+            <a:pPr algn="just">
               <a:lnSpc>
                 <a:spcPct val="125000"/>
               </a:lnSpc>
@@ -12597,7 +12597,7 @@
             </a:r>
           </a:p>
           <a:p>
-            <a:pPr algn="l">
+            <a:pPr algn="just">
               <a:lnSpc>
                 <a:spcPct val="125000"/>
               </a:lnSpc>
@@ -12619,7 +12619,7 @@
             </a:r>
           </a:p>
           <a:p>
-            <a:pPr algn="l">
+            <a:pPr algn="just">
               <a:lnSpc>
                 <a:spcPct val="125000"/>
               </a:lnSpc>
@@ -12641,7 +12641,7 @@
             </a:r>
           </a:p>
           <a:p>
-            <a:pPr algn="l">
+            <a:pPr algn="just">
               <a:lnSpc>
                 <a:spcPct val="125000"/>
               </a:lnSpc>
@@ -12663,7 +12663,7 @@
             </a:r>
           </a:p>
           <a:p>
-            <a:pPr algn="l">
+            <a:pPr algn="just">
               <a:lnSpc>
                 <a:spcPct val="125000"/>
               </a:lnSpc>
@@ -12685,7 +12685,7 @@
             </a:r>
           </a:p>
           <a:p>
-            <a:pPr algn="l">
+            <a:pPr algn="just">
               <a:lnSpc>
                 <a:spcPct val="125000"/>
               </a:lnSpc>
@@ -12707,7 +12707,7 @@
             </a:r>
           </a:p>
           <a:p>
-            <a:pPr algn="l">
+            <a:pPr algn="just">
               <a:lnSpc>
                 <a:spcPct val="125000"/>
               </a:lnSpc>
@@ -12729,7 +12729,7 @@
             </a:r>
           </a:p>
           <a:p>
-            <a:pPr algn="l">
+            <a:pPr algn="just">
               <a:lnSpc>
                 <a:spcPct val="125000"/>
               </a:lnSpc>
@@ -12751,7 +12751,7 @@
             </a:r>
           </a:p>
           <a:p>
-            <a:pPr algn="l">
+            <a:pPr algn="just">
               <a:lnSpc>
                 <a:spcPct val="125000"/>
               </a:lnSpc>
@@ -12831,7 +12831,7 @@
           <a:bodyPr rtlCol="0" anchor="ctr" wrap="square" lIns="365760"/>
           <a:lstStyle/>
           <a:p>
-            <a:pPr algn="l"/>
+            <a:pPr algn="just"/>
             <a:r>
               <a:rPr sz="1500" b="1">
                 <a:solidFill>
@@ -12865,7 +12865,7 @@
           </a:bodyPr>
           <a:lstStyle/>
           <a:p>
-            <a:pPr algn="l">
+            <a:pPr algn="just">
               <a:lnSpc>
                 <a:spcPct val="125000"/>
               </a:lnSpc>
@@ -12887,7 +12887,7 @@
             </a:r>
           </a:p>
           <a:p>
-            <a:pPr algn="l">
+            <a:pPr algn="just">
               <a:lnSpc>
                 <a:spcPct val="125000"/>
               </a:lnSpc>
@@ -12909,7 +12909,7 @@
             </a:r>
           </a:p>
           <a:p>
-            <a:pPr algn="l">
+            <a:pPr algn="just">
               <a:lnSpc>
                 <a:spcPct val="125000"/>
               </a:lnSpc>
@@ -12931,7 +12931,7 @@
             </a:r>
           </a:p>
           <a:p>
-            <a:pPr algn="l">
+            <a:pPr algn="just">
               <a:lnSpc>
                 <a:spcPct val="125000"/>
               </a:lnSpc>
@@ -12953,7 +12953,7 @@
             </a:r>
           </a:p>
           <a:p>
-            <a:pPr algn="l">
+            <a:pPr algn="just">
               <a:lnSpc>
                 <a:spcPct val="125000"/>
               </a:lnSpc>
@@ -12975,7 +12975,7 @@
             </a:r>
           </a:p>
           <a:p>
-            <a:pPr algn="l">
+            <a:pPr algn="just">
               <a:lnSpc>
                 <a:spcPct val="125000"/>
               </a:lnSpc>
@@ -12997,7 +12997,7 @@
             </a:r>
           </a:p>
           <a:p>
-            <a:pPr algn="l">
+            <a:pPr algn="just">
               <a:lnSpc>
                 <a:spcPct val="125000"/>
               </a:lnSpc>
@@ -13019,7 +13019,7 @@
             </a:r>
           </a:p>
           <a:p>
-            <a:pPr algn="l">
+            <a:pPr algn="just">
               <a:lnSpc>
                 <a:spcPct val="125000"/>
               </a:lnSpc>
@@ -13041,7 +13041,7 @@
             </a:r>
           </a:p>
           <a:p>
-            <a:pPr algn="l">
+            <a:pPr algn="just">
               <a:lnSpc>
                 <a:spcPct val="125000"/>
               </a:lnSpc>
@@ -13063,7 +13063,7 @@
             </a:r>
           </a:p>
           <a:p>
-            <a:pPr algn="l">
+            <a:pPr algn="just">
               <a:lnSpc>
                 <a:spcPct val="125000"/>
               </a:lnSpc>
@@ -13143,7 +13143,7 @@
           <a:bodyPr rtlCol="0" anchor="ctr" wrap="square" lIns="365760"/>
           <a:lstStyle/>
           <a:p>
-            <a:pPr algn="l"/>
+            <a:pPr algn="just"/>
             <a:r>
               <a:rPr sz="1500" b="1">
                 <a:solidFill>
@@ -13177,7 +13177,7 @@
           </a:bodyPr>
           <a:lstStyle/>
           <a:p>
-            <a:pPr algn="l">
+            <a:pPr algn="just">
               <a:lnSpc>
                 <a:spcPct val="125000"/>
               </a:lnSpc>
@@ -13199,7 +13199,7 @@
             </a:r>
           </a:p>
           <a:p>
-            <a:pPr algn="l">
+            <a:pPr algn="just">
               <a:lnSpc>
                 <a:spcPct val="125000"/>
               </a:lnSpc>
@@ -13221,7 +13221,7 @@
             </a:r>
           </a:p>
           <a:p>
-            <a:pPr algn="l">
+            <a:pPr algn="just">
               <a:lnSpc>
                 <a:spcPct val="125000"/>
               </a:lnSpc>
@@ -13243,7 +13243,7 @@
             </a:r>
           </a:p>
           <a:p>
-            <a:pPr algn="l">
+            <a:pPr algn="just">
               <a:lnSpc>
                 <a:spcPct val="125000"/>
               </a:lnSpc>
@@ -13265,7 +13265,7 @@
             </a:r>
           </a:p>
           <a:p>
-            <a:pPr algn="l">
+            <a:pPr algn="just">
               <a:lnSpc>
                 <a:spcPct val="125000"/>
               </a:lnSpc>
@@ -13287,7 +13287,7 @@
             </a:r>
           </a:p>
           <a:p>
-            <a:pPr algn="l">
+            <a:pPr algn="just">
               <a:lnSpc>
                 <a:spcPct val="125000"/>
               </a:lnSpc>
@@ -13309,7 +13309,7 @@
             </a:r>
           </a:p>
           <a:p>
-            <a:pPr algn="l">
+            <a:pPr algn="just">
               <a:lnSpc>
                 <a:spcPct val="125000"/>
               </a:lnSpc>
@@ -13331,7 +13331,7 @@
             </a:r>
           </a:p>
           <a:p>
-            <a:pPr algn="l">
+            <a:pPr algn="just">
               <a:lnSpc>
                 <a:spcPct val="125000"/>
               </a:lnSpc>
@@ -13353,7 +13353,7 @@
             </a:r>
           </a:p>
           <a:p>
-            <a:pPr algn="l">
+            <a:pPr algn="just">
               <a:lnSpc>
                 <a:spcPct val="125000"/>
               </a:lnSpc>
@@ -13375,7 +13375,7 @@
             </a:r>
           </a:p>
           <a:p>
-            <a:pPr algn="l">
+            <a:pPr algn="just">
               <a:lnSpc>
                 <a:spcPct val="125000"/>
               </a:lnSpc>
@@ -13397,7 +13397,7 @@
             </a:r>
           </a:p>
           <a:p>
-            <a:pPr algn="l">
+            <a:pPr algn="just">
               <a:lnSpc>
                 <a:spcPct val="125000"/>
               </a:lnSpc>
@@ -13419,7 +13419,7 @@
             </a:r>
           </a:p>
           <a:p>
-            <a:pPr algn="l">
+            <a:pPr algn="just">
               <a:lnSpc>
                 <a:spcPct val="125000"/>
               </a:lnSpc>
@@ -13441,7 +13441,7 @@
             </a:r>
           </a:p>
           <a:p>
-            <a:pPr algn="l">
+            <a:pPr algn="just">
               <a:lnSpc>
                 <a:spcPct val="125000"/>
               </a:lnSpc>
@@ -13463,7 +13463,7 @@
             </a:r>
           </a:p>
           <a:p>
-            <a:pPr algn="l">
+            <a:pPr algn="just">
               <a:lnSpc>
                 <a:spcPct val="125000"/>
               </a:lnSpc>
@@ -13543,7 +13543,7 @@
           <a:bodyPr rtlCol="0" anchor="ctr" wrap="square" lIns="365760"/>
           <a:lstStyle/>
           <a:p>
-            <a:pPr algn="l"/>
+            <a:pPr algn="just"/>
             <a:r>
               <a:rPr sz="1500" b="1">
                 <a:solidFill>
@@ -13577,7 +13577,7 @@
           </a:bodyPr>
           <a:lstStyle/>
           <a:p>
-            <a:pPr algn="l">
+            <a:pPr algn="just">
               <a:lnSpc>
                 <a:spcPct val="125000"/>
               </a:lnSpc>
@@ -13599,7 +13599,7 @@
             </a:r>
           </a:p>
           <a:p>
-            <a:pPr algn="l">
+            <a:pPr algn="just">
               <a:lnSpc>
                 <a:spcPct val="125000"/>
               </a:lnSpc>
@@ -13621,7 +13621,7 @@
             </a:r>
           </a:p>
           <a:p>
-            <a:pPr algn="l">
+            <a:pPr algn="just">
               <a:lnSpc>
                 <a:spcPct val="125000"/>
               </a:lnSpc>
@@ -13643,7 +13643,7 @@
             </a:r>
           </a:p>
           <a:p>
-            <a:pPr algn="l">
+            <a:pPr algn="just">
               <a:lnSpc>
                 <a:spcPct val="125000"/>
               </a:lnSpc>
@@ -13665,7 +13665,7 @@
             </a:r>
           </a:p>
           <a:p>
-            <a:pPr algn="l">
+            <a:pPr algn="just">
               <a:lnSpc>
                 <a:spcPct val="125000"/>
               </a:lnSpc>
@@ -13687,7 +13687,7 @@
             </a:r>
           </a:p>
           <a:p>
-            <a:pPr algn="l">
+            <a:pPr algn="just">
               <a:lnSpc>
                 <a:spcPct val="125000"/>
               </a:lnSpc>
@@ -13709,7 +13709,7 @@
             </a:r>
           </a:p>
           <a:p>
-            <a:pPr algn="l">
+            <a:pPr algn="just">
               <a:lnSpc>
                 <a:spcPct val="125000"/>
               </a:lnSpc>
@@ -13731,7 +13731,7 @@
             </a:r>
           </a:p>
           <a:p>
-            <a:pPr algn="l">
+            <a:pPr algn="just">
               <a:lnSpc>
                 <a:spcPct val="125000"/>
               </a:lnSpc>
@@ -13753,7 +13753,7 @@
             </a:r>
           </a:p>
           <a:p>
-            <a:pPr algn="l">
+            <a:pPr algn="just">
               <a:lnSpc>
                 <a:spcPct val="125000"/>
               </a:lnSpc>
@@ -13833,7 +13833,7 @@
           <a:bodyPr rtlCol="0" anchor="ctr" wrap="square" lIns="365760"/>
           <a:lstStyle/>
           <a:p>
-            <a:pPr algn="l"/>
+            <a:pPr algn="just"/>
             <a:r>
               <a:rPr sz="1500" b="1">
                 <a:solidFill>
@@ -13867,7 +13867,7 @@
           </a:bodyPr>
           <a:lstStyle/>
           <a:p>
-            <a:pPr algn="l">
+            <a:pPr algn="just">
               <a:lnSpc>
                 <a:spcPct val="125000"/>
               </a:lnSpc>
@@ -13889,7 +13889,7 @@
             </a:r>
           </a:p>
           <a:p>
-            <a:pPr algn="l">
+            <a:pPr algn="just">
               <a:lnSpc>
                 <a:spcPct val="125000"/>
               </a:lnSpc>
@@ -13911,7 +13911,7 @@
             </a:r>
           </a:p>
           <a:p>
-            <a:pPr algn="l">
+            <a:pPr algn="just">
               <a:lnSpc>
                 <a:spcPct val="125000"/>
               </a:lnSpc>
@@ -13933,7 +13933,7 @@
             </a:r>
           </a:p>
           <a:p>
-            <a:pPr algn="l">
+            <a:pPr algn="just">
               <a:lnSpc>
                 <a:spcPct val="125000"/>
               </a:lnSpc>
@@ -13955,7 +13955,7 @@
             </a:r>
           </a:p>
           <a:p>
-            <a:pPr algn="l">
+            <a:pPr algn="just">
               <a:lnSpc>
                 <a:spcPct val="125000"/>
               </a:lnSpc>
@@ -13977,7 +13977,7 @@
             </a:r>
           </a:p>
           <a:p>
-            <a:pPr algn="l">
+            <a:pPr algn="just">
               <a:lnSpc>
                 <a:spcPct val="125000"/>
               </a:lnSpc>
@@ -13999,7 +13999,7 @@
             </a:r>
           </a:p>
           <a:p>
-            <a:pPr algn="l">
+            <a:pPr algn="just">
               <a:lnSpc>
                 <a:spcPct val="125000"/>
               </a:lnSpc>
@@ -14021,7 +14021,7 @@
             </a:r>
           </a:p>
           <a:p>
-            <a:pPr algn="l">
+            <a:pPr algn="just">
               <a:lnSpc>
                 <a:spcPct val="125000"/>
               </a:lnSpc>
@@ -14043,7 +14043,7 @@
             </a:r>
           </a:p>
           <a:p>
-            <a:pPr algn="l">
+            <a:pPr algn="just">
               <a:lnSpc>
                 <a:spcPct val="125000"/>
               </a:lnSpc>
@@ -14065,7 +14065,7 @@
             </a:r>
           </a:p>
           <a:p>
-            <a:pPr algn="l">
+            <a:pPr algn="just">
               <a:lnSpc>
                 <a:spcPct val="125000"/>
               </a:lnSpc>
@@ -14145,7 +14145,7 @@
           <a:bodyPr rtlCol="0" anchor="ctr" wrap="square" lIns="365760"/>
           <a:lstStyle/>
           <a:p>
-            <a:pPr algn="l"/>
+            <a:pPr algn="just"/>
             <a:r>
               <a:rPr sz="1500" b="1">
                 <a:solidFill>
@@ -14179,7 +14179,7 @@
           </a:bodyPr>
           <a:lstStyle/>
           <a:p>
-            <a:pPr algn="l">
+            <a:pPr algn="just">
               <a:lnSpc>
                 <a:spcPct val="125000"/>
               </a:lnSpc>
@@ -14201,7 +14201,7 @@
             </a:r>
           </a:p>
           <a:p>
-            <a:pPr algn="l">
+            <a:pPr algn="just">
               <a:lnSpc>
                 <a:spcPct val="125000"/>
               </a:lnSpc>
@@ -14223,7 +14223,7 @@
             </a:r>
           </a:p>
           <a:p>
-            <a:pPr algn="l">
+            <a:pPr algn="just">
               <a:lnSpc>
                 <a:spcPct val="125000"/>
               </a:lnSpc>
@@ -14245,7 +14245,7 @@
             </a:r>
           </a:p>
           <a:p>
-            <a:pPr algn="l">
+            <a:pPr algn="just">
               <a:lnSpc>
                 <a:spcPct val="125000"/>
               </a:lnSpc>
@@ -14267,7 +14267,7 @@
             </a:r>
           </a:p>
           <a:p>
-            <a:pPr algn="l">
+            <a:pPr algn="just">
               <a:lnSpc>
                 <a:spcPct val="125000"/>
               </a:lnSpc>
@@ -14289,7 +14289,7 @@
             </a:r>
           </a:p>
           <a:p>
-            <a:pPr algn="l">
+            <a:pPr algn="just">
               <a:lnSpc>
                 <a:spcPct val="125000"/>
               </a:lnSpc>
@@ -14311,7 +14311,7 @@
             </a:r>
           </a:p>
           <a:p>
-            <a:pPr algn="l">
+            <a:pPr algn="just">
               <a:lnSpc>
                 <a:spcPct val="125000"/>
               </a:lnSpc>
@@ -14333,7 +14333,7 @@
             </a:r>
           </a:p>
           <a:p>
-            <a:pPr algn="l">
+            <a:pPr algn="just">
               <a:lnSpc>
                 <a:spcPct val="125000"/>
               </a:lnSpc>
@@ -14355,7 +14355,7 @@
             </a:r>
           </a:p>
           <a:p>
-            <a:pPr algn="l">
+            <a:pPr algn="just">
               <a:lnSpc>
                 <a:spcPct val="125000"/>
               </a:lnSpc>
@@ -14377,7 +14377,7 @@
             </a:r>
           </a:p>
           <a:p>
-            <a:pPr algn="l">
+            <a:pPr algn="just">
               <a:lnSpc>
                 <a:spcPct val="125000"/>
               </a:lnSpc>
@@ -14457,7 +14457,7 @@
           <a:bodyPr rtlCol="0" anchor="ctr" wrap="square" lIns="365760"/>
           <a:lstStyle/>
           <a:p>
-            <a:pPr algn="l"/>
+            <a:pPr algn="just"/>
             <a:r>
               <a:rPr sz="1500" b="1">
                 <a:solidFill>
@@ -14491,7 +14491,7 @@
           </a:bodyPr>
           <a:lstStyle/>
           <a:p>
-            <a:pPr algn="l">
+            <a:pPr algn="just">
               <a:lnSpc>
                 <a:spcPct val="125000"/>
               </a:lnSpc>
@@ -14513,7 +14513,7 @@
             </a:r>
           </a:p>
           <a:p>
-            <a:pPr algn="l">
+            <a:pPr algn="just">
               <a:lnSpc>
                 <a:spcPct val="125000"/>
               </a:lnSpc>
@@ -14535,7 +14535,7 @@
             </a:r>
           </a:p>
           <a:p>
-            <a:pPr algn="l">
+            <a:pPr algn="just">
               <a:lnSpc>
                 <a:spcPct val="125000"/>
               </a:lnSpc>
@@ -14557,7 +14557,7 @@
             </a:r>
           </a:p>
           <a:p>
-            <a:pPr algn="l">
+            <a:pPr algn="just">
               <a:lnSpc>
                 <a:spcPct val="125000"/>
               </a:lnSpc>
@@ -14579,7 +14579,7 @@
             </a:r>
           </a:p>
           <a:p>
-            <a:pPr algn="l">
+            <a:pPr algn="just">
               <a:lnSpc>
                 <a:spcPct val="125000"/>
               </a:lnSpc>
@@ -14601,7 +14601,7 @@
             </a:r>
           </a:p>
           <a:p>
-            <a:pPr algn="l">
+            <a:pPr algn="just">
               <a:lnSpc>
                 <a:spcPct val="125000"/>
               </a:lnSpc>
@@ -14623,7 +14623,7 @@
             </a:r>
           </a:p>
           <a:p>
-            <a:pPr algn="l">
+            <a:pPr algn="just">
               <a:lnSpc>
                 <a:spcPct val="125000"/>
               </a:lnSpc>
@@ -14645,7 +14645,7 @@
             </a:r>
           </a:p>
           <a:p>
-            <a:pPr algn="l">
+            <a:pPr algn="just">
               <a:lnSpc>
                 <a:spcPct val="125000"/>
               </a:lnSpc>
@@ -14667,7 +14667,7 @@
             </a:r>
           </a:p>
           <a:p>
-            <a:pPr algn="l">
+            <a:pPr algn="just">
               <a:lnSpc>
                 <a:spcPct val="125000"/>
               </a:lnSpc>
@@ -14689,7 +14689,7 @@
             </a:r>
           </a:p>
           <a:p>
-            <a:pPr algn="l">
+            <a:pPr algn="just">
               <a:lnSpc>
                 <a:spcPct val="125000"/>
               </a:lnSpc>
@@ -14769,7 +14769,7 @@
           <a:bodyPr rtlCol="0" anchor="ctr" wrap="square" lIns="365760"/>
           <a:lstStyle/>
           <a:p>
-            <a:pPr algn="l"/>
+            <a:pPr algn="just"/>
             <a:r>
               <a:rPr sz="1500" b="1">
                 <a:solidFill>
@@ -14803,7 +14803,7 @@
           </a:bodyPr>
           <a:lstStyle/>
           <a:p>
-            <a:pPr algn="l">
+            <a:pPr algn="just">
               <a:lnSpc>
                 <a:spcPct val="125000"/>
               </a:lnSpc>
@@ -14825,7 +14825,7 @@
             </a:r>
           </a:p>
           <a:p>
-            <a:pPr algn="l">
+            <a:pPr algn="just">
               <a:lnSpc>
                 <a:spcPct val="125000"/>
               </a:lnSpc>
@@ -14847,7 +14847,7 @@
             </a:r>
           </a:p>
           <a:p>
-            <a:pPr algn="l">
+            <a:pPr algn="just">
               <a:lnSpc>
                 <a:spcPct val="125000"/>
               </a:lnSpc>
@@ -14869,7 +14869,7 @@
             </a:r>
           </a:p>
           <a:p>
-            <a:pPr algn="l">
+            <a:pPr algn="just">
               <a:lnSpc>
                 <a:spcPct val="125000"/>
               </a:lnSpc>
@@ -14891,7 +14891,7 @@
             </a:r>
           </a:p>
           <a:p>
-            <a:pPr algn="l">
+            <a:pPr algn="just">
               <a:lnSpc>
                 <a:spcPct val="125000"/>
               </a:lnSpc>
@@ -14913,7 +14913,7 @@
             </a:r>
           </a:p>
           <a:p>
-            <a:pPr algn="l">
+            <a:pPr algn="just">
               <a:lnSpc>
                 <a:spcPct val="125000"/>
               </a:lnSpc>
@@ -14935,7 +14935,7 @@
             </a:r>
           </a:p>
           <a:p>
-            <a:pPr algn="l">
+            <a:pPr algn="just">
               <a:lnSpc>
                 <a:spcPct val="125000"/>
               </a:lnSpc>
@@ -14957,7 +14957,7 @@
             </a:r>
           </a:p>
           <a:p>
-            <a:pPr algn="l">
+            <a:pPr algn="just">
               <a:lnSpc>
                 <a:spcPct val="125000"/>
               </a:lnSpc>
@@ -14979,7 +14979,7 @@
             </a:r>
           </a:p>
           <a:p>
-            <a:pPr algn="l">
+            <a:pPr algn="just">
               <a:lnSpc>
                 <a:spcPct val="125000"/>
               </a:lnSpc>

--- a/ppts_output_v3/01_增值税风险指引.pptx
+++ b/ppts_output_v3/01_增值税风险指引.pptx
@@ -3331,7 +3331,7 @@
           <a:p>
             <a:pPr algn="just">
               <a:lnSpc>
-                <a:spcPct val="125000"/>
+                <a:spcPct val="110000"/>
               </a:lnSpc>
               <a:spcBef>
                 <a:spcPts val="0"/>
@@ -3353,7 +3353,7 @@
           <a:p>
             <a:pPr algn="just">
               <a:lnSpc>
-                <a:spcPct val="125000"/>
+                <a:spcPct val="110000"/>
               </a:lnSpc>
               <a:spcBef>
                 <a:spcPts val="0"/>
@@ -3375,7 +3375,7 @@
           <a:p>
             <a:pPr algn="just">
               <a:lnSpc>
-                <a:spcPct val="125000"/>
+                <a:spcPct val="110000"/>
               </a:lnSpc>
               <a:spcBef>
                 <a:spcPts val="0"/>
@@ -3397,7 +3397,7 @@
           <a:p>
             <a:pPr algn="just">
               <a:lnSpc>
-                <a:spcPct val="125000"/>
+                <a:spcPct val="110000"/>
               </a:lnSpc>
               <a:spcBef>
                 <a:spcPts val="0"/>
@@ -3419,7 +3419,7 @@
           <a:p>
             <a:pPr algn="just">
               <a:lnSpc>
-                <a:spcPct val="125000"/>
+                <a:spcPct val="110000"/>
               </a:lnSpc>
               <a:spcBef>
                 <a:spcPts val="0"/>
@@ -3441,7 +3441,7 @@
           <a:p>
             <a:pPr algn="just">
               <a:lnSpc>
-                <a:spcPct val="125000"/>
+                <a:spcPct val="110000"/>
               </a:lnSpc>
               <a:spcBef>
                 <a:spcPts val="0"/>
@@ -3463,7 +3463,7 @@
           <a:p>
             <a:pPr algn="just">
               <a:lnSpc>
-                <a:spcPct val="125000"/>
+                <a:spcPct val="110000"/>
               </a:lnSpc>
               <a:spcBef>
                 <a:spcPts val="0"/>
@@ -3485,7 +3485,7 @@
           <a:p>
             <a:pPr algn="just">
               <a:lnSpc>
-                <a:spcPct val="125000"/>
+                <a:spcPct val="110000"/>
               </a:lnSpc>
               <a:spcBef>
                 <a:spcPts val="0"/>
@@ -3507,7 +3507,7 @@
           <a:p>
             <a:pPr algn="just">
               <a:lnSpc>
-                <a:spcPct val="125000"/>
+                <a:spcPct val="110000"/>
               </a:lnSpc>
               <a:spcBef>
                 <a:spcPts val="0"/>
@@ -3529,7 +3529,7 @@
           <a:p>
             <a:pPr algn="just">
               <a:lnSpc>
-                <a:spcPct val="125000"/>
+                <a:spcPct val="110000"/>
               </a:lnSpc>
               <a:spcBef>
                 <a:spcPts val="0"/>
@@ -3643,7 +3643,7 @@
           <a:p>
             <a:pPr algn="just">
               <a:lnSpc>
-                <a:spcPct val="125000"/>
+                <a:spcPct val="110000"/>
               </a:lnSpc>
               <a:spcBef>
                 <a:spcPts val="0"/>
@@ -3665,7 +3665,7 @@
           <a:p>
             <a:pPr algn="just">
               <a:lnSpc>
-                <a:spcPct val="125000"/>
+                <a:spcPct val="110000"/>
               </a:lnSpc>
               <a:spcBef>
                 <a:spcPts val="0"/>
@@ -3687,7 +3687,7 @@
           <a:p>
             <a:pPr algn="just">
               <a:lnSpc>
-                <a:spcPct val="125000"/>
+                <a:spcPct val="110000"/>
               </a:lnSpc>
               <a:spcBef>
                 <a:spcPts val="0"/>
@@ -3709,7 +3709,7 @@
           <a:p>
             <a:pPr algn="just">
               <a:lnSpc>
-                <a:spcPct val="125000"/>
+                <a:spcPct val="110000"/>
               </a:lnSpc>
               <a:spcBef>
                 <a:spcPts val="0"/>
@@ -3731,7 +3731,7 @@
           <a:p>
             <a:pPr algn="just">
               <a:lnSpc>
-                <a:spcPct val="125000"/>
+                <a:spcPct val="110000"/>
               </a:lnSpc>
               <a:spcBef>
                 <a:spcPts val="0"/>
@@ -3753,7 +3753,7 @@
           <a:p>
             <a:pPr algn="just">
               <a:lnSpc>
-                <a:spcPct val="125000"/>
+                <a:spcPct val="110000"/>
               </a:lnSpc>
               <a:spcBef>
                 <a:spcPts val="0"/>
@@ -3775,7 +3775,7 @@
           <a:p>
             <a:pPr algn="just">
               <a:lnSpc>
-                <a:spcPct val="125000"/>
+                <a:spcPct val="110000"/>
               </a:lnSpc>
               <a:spcBef>
                 <a:spcPts val="0"/>
@@ -3797,7 +3797,7 @@
           <a:p>
             <a:pPr algn="just">
               <a:lnSpc>
-                <a:spcPct val="125000"/>
+                <a:spcPct val="110000"/>
               </a:lnSpc>
               <a:spcBef>
                 <a:spcPts val="0"/>
@@ -3819,7 +3819,7 @@
           <a:p>
             <a:pPr algn="just">
               <a:lnSpc>
-                <a:spcPct val="125000"/>
+                <a:spcPct val="110000"/>
               </a:lnSpc>
               <a:spcBef>
                 <a:spcPts val="0"/>
@@ -3933,7 +3933,7 @@
           <a:p>
             <a:pPr algn="just">
               <a:lnSpc>
-                <a:spcPct val="125000"/>
+                <a:spcPct val="110000"/>
               </a:lnSpc>
               <a:spcBef>
                 <a:spcPts val="0"/>
@@ -3955,7 +3955,7 @@
           <a:p>
             <a:pPr algn="just">
               <a:lnSpc>
-                <a:spcPct val="125000"/>
+                <a:spcPct val="110000"/>
               </a:lnSpc>
               <a:spcBef>
                 <a:spcPts val="0"/>
@@ -3977,7 +3977,7 @@
           <a:p>
             <a:pPr algn="just">
               <a:lnSpc>
-                <a:spcPct val="125000"/>
+                <a:spcPct val="110000"/>
               </a:lnSpc>
               <a:spcBef>
                 <a:spcPts val="0"/>
@@ -3999,7 +3999,7 @@
           <a:p>
             <a:pPr algn="just">
               <a:lnSpc>
-                <a:spcPct val="125000"/>
+                <a:spcPct val="110000"/>
               </a:lnSpc>
               <a:spcBef>
                 <a:spcPts val="0"/>
@@ -4021,7 +4021,7 @@
           <a:p>
             <a:pPr algn="just">
               <a:lnSpc>
-                <a:spcPct val="125000"/>
+                <a:spcPct val="110000"/>
               </a:lnSpc>
               <a:spcBef>
                 <a:spcPts val="0"/>
@@ -4043,7 +4043,7 @@
           <a:p>
             <a:pPr algn="just">
               <a:lnSpc>
-                <a:spcPct val="125000"/>
+                <a:spcPct val="110000"/>
               </a:lnSpc>
               <a:spcBef>
                 <a:spcPts val="0"/>
@@ -4065,7 +4065,7 @@
           <a:p>
             <a:pPr algn="just">
               <a:lnSpc>
-                <a:spcPct val="125000"/>
+                <a:spcPct val="110000"/>
               </a:lnSpc>
               <a:spcBef>
                 <a:spcPts val="0"/>
@@ -4087,7 +4087,7 @@
           <a:p>
             <a:pPr algn="just">
               <a:lnSpc>
-                <a:spcPct val="125000"/>
+                <a:spcPct val="110000"/>
               </a:lnSpc>
               <a:spcBef>
                 <a:spcPts val="0"/>
@@ -4109,7 +4109,7 @@
           <a:p>
             <a:pPr algn="just">
               <a:lnSpc>
-                <a:spcPct val="125000"/>
+                <a:spcPct val="110000"/>
               </a:lnSpc>
               <a:spcBef>
                 <a:spcPts val="0"/>
@@ -4131,7 +4131,7 @@
           <a:p>
             <a:pPr algn="just">
               <a:lnSpc>
-                <a:spcPct val="125000"/>
+                <a:spcPct val="110000"/>
               </a:lnSpc>
               <a:spcBef>
                 <a:spcPts val="0"/>
@@ -4153,7 +4153,7 @@
           <a:p>
             <a:pPr algn="just">
               <a:lnSpc>
-                <a:spcPct val="125000"/>
+                <a:spcPct val="110000"/>
               </a:lnSpc>
               <a:spcBef>
                 <a:spcPts val="0"/>
@@ -4267,7 +4267,7 @@
           <a:p>
             <a:pPr algn="just">
               <a:lnSpc>
-                <a:spcPct val="125000"/>
+                <a:spcPct val="110000"/>
               </a:lnSpc>
               <a:spcBef>
                 <a:spcPts val="0"/>
@@ -4289,7 +4289,7 @@
           <a:p>
             <a:pPr algn="just">
               <a:lnSpc>
-                <a:spcPct val="125000"/>
+                <a:spcPct val="110000"/>
               </a:lnSpc>
               <a:spcBef>
                 <a:spcPts val="0"/>
@@ -4311,7 +4311,7 @@
           <a:p>
             <a:pPr algn="just">
               <a:lnSpc>
-                <a:spcPct val="125000"/>
+                <a:spcPct val="110000"/>
               </a:lnSpc>
               <a:spcBef>
                 <a:spcPts val="0"/>
@@ -4333,7 +4333,7 @@
           <a:p>
             <a:pPr algn="just">
               <a:lnSpc>
-                <a:spcPct val="125000"/>
+                <a:spcPct val="110000"/>
               </a:lnSpc>
               <a:spcBef>
                 <a:spcPts val="0"/>
@@ -4355,7 +4355,7 @@
           <a:p>
             <a:pPr algn="just">
               <a:lnSpc>
-                <a:spcPct val="125000"/>
+                <a:spcPct val="110000"/>
               </a:lnSpc>
               <a:spcBef>
                 <a:spcPts val="0"/>
@@ -4377,7 +4377,7 @@
           <a:p>
             <a:pPr algn="just">
               <a:lnSpc>
-                <a:spcPct val="125000"/>
+                <a:spcPct val="110000"/>
               </a:lnSpc>
               <a:spcBef>
                 <a:spcPts val="0"/>
@@ -4399,7 +4399,7 @@
           <a:p>
             <a:pPr algn="just">
               <a:lnSpc>
-                <a:spcPct val="125000"/>
+                <a:spcPct val="110000"/>
               </a:lnSpc>
               <a:spcBef>
                 <a:spcPts val="0"/>
@@ -4421,7 +4421,7 @@
           <a:p>
             <a:pPr algn="just">
               <a:lnSpc>
-                <a:spcPct val="125000"/>
+                <a:spcPct val="110000"/>
               </a:lnSpc>
               <a:spcBef>
                 <a:spcPts val="0"/>
@@ -4443,7 +4443,7 @@
           <a:p>
             <a:pPr algn="just">
               <a:lnSpc>
-                <a:spcPct val="125000"/>
+                <a:spcPct val="110000"/>
               </a:lnSpc>
               <a:spcBef>
                 <a:spcPts val="0"/>
@@ -4465,7 +4465,7 @@
           <a:p>
             <a:pPr algn="just">
               <a:lnSpc>
-                <a:spcPct val="125000"/>
+                <a:spcPct val="110000"/>
               </a:lnSpc>
               <a:spcBef>
                 <a:spcPts val="0"/>
@@ -4579,7 +4579,7 @@
           <a:p>
             <a:pPr algn="just">
               <a:lnSpc>
-                <a:spcPct val="125000"/>
+                <a:spcPct val="110000"/>
               </a:lnSpc>
               <a:spcBef>
                 <a:spcPts val="0"/>
@@ -4601,7 +4601,7 @@
           <a:p>
             <a:pPr algn="just">
               <a:lnSpc>
-                <a:spcPct val="125000"/>
+                <a:spcPct val="110000"/>
               </a:lnSpc>
               <a:spcBef>
                 <a:spcPts val="0"/>
@@ -4623,7 +4623,7 @@
           <a:p>
             <a:pPr algn="just">
               <a:lnSpc>
-                <a:spcPct val="125000"/>
+                <a:spcPct val="110000"/>
               </a:lnSpc>
               <a:spcBef>
                 <a:spcPts val="0"/>
@@ -4645,7 +4645,7 @@
           <a:p>
             <a:pPr algn="just">
               <a:lnSpc>
-                <a:spcPct val="125000"/>
+                <a:spcPct val="110000"/>
               </a:lnSpc>
               <a:spcBef>
                 <a:spcPts val="0"/>
@@ -4667,7 +4667,7 @@
           <a:p>
             <a:pPr algn="just">
               <a:lnSpc>
-                <a:spcPct val="125000"/>
+                <a:spcPct val="110000"/>
               </a:lnSpc>
               <a:spcBef>
                 <a:spcPts val="0"/>
@@ -4689,7 +4689,7 @@
           <a:p>
             <a:pPr algn="just">
               <a:lnSpc>
-                <a:spcPct val="125000"/>
+                <a:spcPct val="110000"/>
               </a:lnSpc>
               <a:spcBef>
                 <a:spcPts val="0"/>
@@ -4711,7 +4711,7 @@
           <a:p>
             <a:pPr algn="just">
               <a:lnSpc>
-                <a:spcPct val="125000"/>
+                <a:spcPct val="110000"/>
               </a:lnSpc>
               <a:spcBef>
                 <a:spcPts val="0"/>
@@ -4733,7 +4733,7 @@
           <a:p>
             <a:pPr algn="just">
               <a:lnSpc>
-                <a:spcPct val="125000"/>
+                <a:spcPct val="110000"/>
               </a:lnSpc>
               <a:spcBef>
                 <a:spcPts val="0"/>
@@ -4755,7 +4755,7 @@
           <a:p>
             <a:pPr algn="just">
               <a:lnSpc>
-                <a:spcPct val="125000"/>
+                <a:spcPct val="110000"/>
               </a:lnSpc>
               <a:spcBef>
                 <a:spcPts val="0"/>
@@ -4777,7 +4777,7 @@
           <a:p>
             <a:pPr algn="just">
               <a:lnSpc>
-                <a:spcPct val="125000"/>
+                <a:spcPct val="110000"/>
               </a:lnSpc>
               <a:spcBef>
                 <a:spcPts val="0"/>
@@ -4799,7 +4799,7 @@
           <a:p>
             <a:pPr algn="just">
               <a:lnSpc>
-                <a:spcPct val="125000"/>
+                <a:spcPct val="110000"/>
               </a:lnSpc>
               <a:spcBef>
                 <a:spcPts val="0"/>
@@ -4913,7 +4913,7 @@
           <a:p>
             <a:pPr algn="just">
               <a:lnSpc>
-                <a:spcPct val="125000"/>
+                <a:spcPct val="110000"/>
               </a:lnSpc>
               <a:spcBef>
                 <a:spcPts val="0"/>
@@ -4935,7 +4935,7 @@
           <a:p>
             <a:pPr algn="just">
               <a:lnSpc>
-                <a:spcPct val="125000"/>
+                <a:spcPct val="110000"/>
               </a:lnSpc>
               <a:spcBef>
                 <a:spcPts val="0"/>
@@ -4957,7 +4957,7 @@
           <a:p>
             <a:pPr algn="just">
               <a:lnSpc>
-                <a:spcPct val="125000"/>
+                <a:spcPct val="110000"/>
               </a:lnSpc>
               <a:spcBef>
                 <a:spcPts val="0"/>
@@ -4979,7 +4979,7 @@
           <a:p>
             <a:pPr algn="just">
               <a:lnSpc>
-                <a:spcPct val="125000"/>
+                <a:spcPct val="110000"/>
               </a:lnSpc>
               <a:spcBef>
                 <a:spcPts val="0"/>
@@ -5001,7 +5001,7 @@
           <a:p>
             <a:pPr algn="just">
               <a:lnSpc>
-                <a:spcPct val="125000"/>
+                <a:spcPct val="110000"/>
               </a:lnSpc>
               <a:spcBef>
                 <a:spcPts val="0"/>
@@ -5023,7 +5023,7 @@
           <a:p>
             <a:pPr algn="just">
               <a:lnSpc>
-                <a:spcPct val="125000"/>
+                <a:spcPct val="110000"/>
               </a:lnSpc>
               <a:spcBef>
                 <a:spcPts val="0"/>
@@ -5045,7 +5045,7 @@
           <a:p>
             <a:pPr algn="just">
               <a:lnSpc>
-                <a:spcPct val="125000"/>
+                <a:spcPct val="110000"/>
               </a:lnSpc>
               <a:spcBef>
                 <a:spcPts val="0"/>
@@ -5067,7 +5067,7 @@
           <a:p>
             <a:pPr algn="just">
               <a:lnSpc>
-                <a:spcPct val="125000"/>
+                <a:spcPct val="110000"/>
               </a:lnSpc>
               <a:spcBef>
                 <a:spcPts val="0"/>
@@ -5089,7 +5089,7 @@
           <a:p>
             <a:pPr algn="just">
               <a:lnSpc>
-                <a:spcPct val="125000"/>
+                <a:spcPct val="110000"/>
               </a:lnSpc>
               <a:spcBef>
                 <a:spcPts val="0"/>
@@ -5203,7 +5203,7 @@
           <a:p>
             <a:pPr algn="just">
               <a:lnSpc>
-                <a:spcPct val="125000"/>
+                <a:spcPct val="110000"/>
               </a:lnSpc>
               <a:spcBef>
                 <a:spcPts val="0"/>
@@ -5225,7 +5225,7 @@
           <a:p>
             <a:pPr algn="just">
               <a:lnSpc>
-                <a:spcPct val="125000"/>
+                <a:spcPct val="110000"/>
               </a:lnSpc>
               <a:spcBef>
                 <a:spcPts val="0"/>
@@ -5247,7 +5247,7 @@
           <a:p>
             <a:pPr algn="just">
               <a:lnSpc>
-                <a:spcPct val="125000"/>
+                <a:spcPct val="110000"/>
               </a:lnSpc>
               <a:spcBef>
                 <a:spcPts val="0"/>
@@ -5269,7 +5269,7 @@
           <a:p>
             <a:pPr algn="just">
               <a:lnSpc>
-                <a:spcPct val="125000"/>
+                <a:spcPct val="110000"/>
               </a:lnSpc>
               <a:spcBef>
                 <a:spcPts val="0"/>
@@ -5291,7 +5291,7 @@
           <a:p>
             <a:pPr algn="just">
               <a:lnSpc>
-                <a:spcPct val="125000"/>
+                <a:spcPct val="110000"/>
               </a:lnSpc>
               <a:spcBef>
                 <a:spcPts val="0"/>
@@ -5313,7 +5313,7 @@
           <a:p>
             <a:pPr algn="just">
               <a:lnSpc>
-                <a:spcPct val="125000"/>
+                <a:spcPct val="110000"/>
               </a:lnSpc>
               <a:spcBef>
                 <a:spcPts val="0"/>
@@ -5335,7 +5335,7 @@
           <a:p>
             <a:pPr algn="just">
               <a:lnSpc>
-                <a:spcPct val="125000"/>
+                <a:spcPct val="110000"/>
               </a:lnSpc>
               <a:spcBef>
                 <a:spcPts val="0"/>
@@ -5357,7 +5357,7 @@
           <a:p>
             <a:pPr algn="just">
               <a:lnSpc>
-                <a:spcPct val="125000"/>
+                <a:spcPct val="110000"/>
               </a:lnSpc>
               <a:spcBef>
                 <a:spcPts val="0"/>
@@ -5379,7 +5379,7 @@
           <a:p>
             <a:pPr algn="just">
               <a:lnSpc>
-                <a:spcPct val="125000"/>
+                <a:spcPct val="110000"/>
               </a:lnSpc>
               <a:spcBef>
                 <a:spcPts val="0"/>
@@ -5401,7 +5401,7 @@
           <a:p>
             <a:pPr algn="just">
               <a:lnSpc>
-                <a:spcPct val="125000"/>
+                <a:spcPct val="110000"/>
               </a:lnSpc>
               <a:spcBef>
                 <a:spcPts val="0"/>
@@ -5515,7 +5515,7 @@
           <a:p>
             <a:pPr algn="just">
               <a:lnSpc>
-                <a:spcPct val="125000"/>
+                <a:spcPct val="110000"/>
               </a:lnSpc>
               <a:spcBef>
                 <a:spcPts val="0"/>
@@ -5537,7 +5537,7 @@
           <a:p>
             <a:pPr algn="just">
               <a:lnSpc>
-                <a:spcPct val="125000"/>
+                <a:spcPct val="110000"/>
               </a:lnSpc>
               <a:spcBef>
                 <a:spcPts val="0"/>
@@ -5559,7 +5559,7 @@
           <a:p>
             <a:pPr algn="just">
               <a:lnSpc>
-                <a:spcPct val="125000"/>
+                <a:spcPct val="110000"/>
               </a:lnSpc>
               <a:spcBef>
                 <a:spcPts val="0"/>
@@ -5581,7 +5581,7 @@
           <a:p>
             <a:pPr algn="just">
               <a:lnSpc>
-                <a:spcPct val="125000"/>
+                <a:spcPct val="110000"/>
               </a:lnSpc>
               <a:spcBef>
                 <a:spcPts val="0"/>
@@ -5603,7 +5603,7 @@
           <a:p>
             <a:pPr algn="just">
               <a:lnSpc>
-                <a:spcPct val="125000"/>
+                <a:spcPct val="110000"/>
               </a:lnSpc>
               <a:spcBef>
                 <a:spcPts val="0"/>
@@ -5625,7 +5625,7 @@
           <a:p>
             <a:pPr algn="just">
               <a:lnSpc>
-                <a:spcPct val="125000"/>
+                <a:spcPct val="110000"/>
               </a:lnSpc>
               <a:spcBef>
                 <a:spcPts val="0"/>
@@ -5647,7 +5647,7 @@
           <a:p>
             <a:pPr algn="just">
               <a:lnSpc>
-                <a:spcPct val="125000"/>
+                <a:spcPct val="110000"/>
               </a:lnSpc>
               <a:spcBef>
                 <a:spcPts val="0"/>
@@ -5669,7 +5669,7 @@
           <a:p>
             <a:pPr algn="just">
               <a:lnSpc>
-                <a:spcPct val="125000"/>
+                <a:spcPct val="110000"/>
               </a:lnSpc>
               <a:spcBef>
                 <a:spcPts val="0"/>
@@ -5691,7 +5691,7 @@
           <a:p>
             <a:pPr algn="just">
               <a:lnSpc>
-                <a:spcPct val="125000"/>
+                <a:spcPct val="110000"/>
               </a:lnSpc>
               <a:spcBef>
                 <a:spcPts val="0"/>
@@ -5713,7 +5713,7 @@
           <a:p>
             <a:pPr algn="just">
               <a:lnSpc>
-                <a:spcPct val="125000"/>
+                <a:spcPct val="110000"/>
               </a:lnSpc>
               <a:spcBef>
                 <a:spcPts val="0"/>
@@ -5735,7 +5735,7 @@
           <a:p>
             <a:pPr algn="just">
               <a:lnSpc>
-                <a:spcPct val="125000"/>
+                <a:spcPct val="110000"/>
               </a:lnSpc>
               <a:spcBef>
                 <a:spcPts val="0"/>
@@ -5849,7 +5849,7 @@
           <a:p>
             <a:pPr algn="just">
               <a:lnSpc>
-                <a:spcPct val="125000"/>
+                <a:spcPct val="110000"/>
               </a:lnSpc>
               <a:spcBef>
                 <a:spcPts val="0"/>
@@ -5871,7 +5871,7 @@
           <a:p>
             <a:pPr algn="just">
               <a:lnSpc>
-                <a:spcPct val="125000"/>
+                <a:spcPct val="110000"/>
               </a:lnSpc>
               <a:spcBef>
                 <a:spcPts val="0"/>
@@ -5893,7 +5893,7 @@
           <a:p>
             <a:pPr algn="just">
               <a:lnSpc>
-                <a:spcPct val="125000"/>
+                <a:spcPct val="110000"/>
               </a:lnSpc>
               <a:spcBef>
                 <a:spcPts val="0"/>
@@ -5915,7 +5915,7 @@
           <a:p>
             <a:pPr algn="just">
               <a:lnSpc>
-                <a:spcPct val="125000"/>
+                <a:spcPct val="110000"/>
               </a:lnSpc>
               <a:spcBef>
                 <a:spcPts val="0"/>
@@ -5937,7 +5937,7 @@
           <a:p>
             <a:pPr algn="just">
               <a:lnSpc>
-                <a:spcPct val="125000"/>
+                <a:spcPct val="110000"/>
               </a:lnSpc>
               <a:spcBef>
                 <a:spcPts val="0"/>
@@ -5959,7 +5959,7 @@
           <a:p>
             <a:pPr algn="just">
               <a:lnSpc>
-                <a:spcPct val="125000"/>
+                <a:spcPct val="110000"/>
               </a:lnSpc>
               <a:spcBef>
                 <a:spcPts val="0"/>
@@ -5981,7 +5981,7 @@
           <a:p>
             <a:pPr algn="just">
               <a:lnSpc>
-                <a:spcPct val="125000"/>
+                <a:spcPct val="110000"/>
               </a:lnSpc>
               <a:spcBef>
                 <a:spcPts val="0"/>
@@ -6003,7 +6003,7 @@
           <a:p>
             <a:pPr algn="just">
               <a:lnSpc>
-                <a:spcPct val="125000"/>
+                <a:spcPct val="110000"/>
               </a:lnSpc>
               <a:spcBef>
                 <a:spcPts val="0"/>
@@ -6025,7 +6025,7 @@
           <a:p>
             <a:pPr algn="just">
               <a:lnSpc>
-                <a:spcPct val="125000"/>
+                <a:spcPct val="110000"/>
               </a:lnSpc>
               <a:spcBef>
                 <a:spcPts val="0"/>
@@ -6047,7 +6047,7 @@
           <a:p>
             <a:pPr algn="just">
               <a:lnSpc>
-                <a:spcPct val="125000"/>
+                <a:spcPct val="110000"/>
               </a:lnSpc>
               <a:spcBef>
                 <a:spcPts val="0"/>
@@ -6161,7 +6161,7 @@
           <a:p>
             <a:pPr algn="just">
               <a:lnSpc>
-                <a:spcPct val="125000"/>
+                <a:spcPct val="110000"/>
               </a:lnSpc>
               <a:spcBef>
                 <a:spcPts val="0"/>
@@ -6183,7 +6183,7 @@
           <a:p>
             <a:pPr algn="just">
               <a:lnSpc>
-                <a:spcPct val="125000"/>
+                <a:spcPct val="110000"/>
               </a:lnSpc>
               <a:spcBef>
                 <a:spcPts val="0"/>
@@ -6205,7 +6205,7 @@
           <a:p>
             <a:pPr algn="just">
               <a:lnSpc>
-                <a:spcPct val="125000"/>
+                <a:spcPct val="110000"/>
               </a:lnSpc>
               <a:spcBef>
                 <a:spcPts val="0"/>
@@ -6227,7 +6227,7 @@
           <a:p>
             <a:pPr algn="just">
               <a:lnSpc>
-                <a:spcPct val="125000"/>
+                <a:spcPct val="110000"/>
               </a:lnSpc>
               <a:spcBef>
                 <a:spcPts val="0"/>
@@ -6249,7 +6249,7 @@
           <a:p>
             <a:pPr algn="just">
               <a:lnSpc>
-                <a:spcPct val="125000"/>
+                <a:spcPct val="110000"/>
               </a:lnSpc>
               <a:spcBef>
                 <a:spcPts val="0"/>
@@ -6271,7 +6271,7 @@
           <a:p>
             <a:pPr algn="just">
               <a:lnSpc>
-                <a:spcPct val="125000"/>
+                <a:spcPct val="110000"/>
               </a:lnSpc>
               <a:spcBef>
                 <a:spcPts val="0"/>
@@ -6293,7 +6293,7 @@
           <a:p>
             <a:pPr algn="just">
               <a:lnSpc>
-                <a:spcPct val="125000"/>
+                <a:spcPct val="110000"/>
               </a:lnSpc>
               <a:spcBef>
                 <a:spcPts val="0"/>
@@ -6315,7 +6315,7 @@
           <a:p>
             <a:pPr algn="just">
               <a:lnSpc>
-                <a:spcPct val="125000"/>
+                <a:spcPct val="110000"/>
               </a:lnSpc>
               <a:spcBef>
                 <a:spcPts val="0"/>
@@ -6337,7 +6337,7 @@
           <a:p>
             <a:pPr algn="just">
               <a:lnSpc>
-                <a:spcPct val="125000"/>
+                <a:spcPct val="110000"/>
               </a:lnSpc>
               <a:spcBef>
                 <a:spcPts val="0"/>
@@ -6359,7 +6359,7 @@
           <a:p>
             <a:pPr algn="just">
               <a:lnSpc>
-                <a:spcPct val="125000"/>
+                <a:spcPct val="110000"/>
               </a:lnSpc>
               <a:spcBef>
                 <a:spcPts val="0"/>
@@ -6473,7 +6473,7 @@
           <a:p>
             <a:pPr algn="just">
               <a:lnSpc>
-                <a:spcPct val="125000"/>
+                <a:spcPct val="110000"/>
               </a:lnSpc>
               <a:spcBef>
                 <a:spcPts val="0"/>
@@ -6495,7 +6495,7 @@
           <a:p>
             <a:pPr algn="just">
               <a:lnSpc>
-                <a:spcPct val="125000"/>
+                <a:spcPct val="110000"/>
               </a:lnSpc>
               <a:spcBef>
                 <a:spcPts val="0"/>
@@ -6517,7 +6517,7 @@
           <a:p>
             <a:pPr algn="just">
               <a:lnSpc>
-                <a:spcPct val="125000"/>
+                <a:spcPct val="110000"/>
               </a:lnSpc>
               <a:spcBef>
                 <a:spcPts val="0"/>
@@ -6539,7 +6539,7 @@
           <a:p>
             <a:pPr algn="just">
               <a:lnSpc>
-                <a:spcPct val="125000"/>
+                <a:spcPct val="110000"/>
               </a:lnSpc>
               <a:spcBef>
                 <a:spcPts val="0"/>
@@ -6561,7 +6561,7 @@
           <a:p>
             <a:pPr algn="just">
               <a:lnSpc>
-                <a:spcPct val="125000"/>
+                <a:spcPct val="110000"/>
               </a:lnSpc>
               <a:spcBef>
                 <a:spcPts val="0"/>
@@ -6583,7 +6583,7 @@
           <a:p>
             <a:pPr algn="just">
               <a:lnSpc>
-                <a:spcPct val="125000"/>
+                <a:spcPct val="110000"/>
               </a:lnSpc>
               <a:spcBef>
                 <a:spcPts val="0"/>
@@ -6605,7 +6605,7 @@
           <a:p>
             <a:pPr algn="just">
               <a:lnSpc>
-                <a:spcPct val="125000"/>
+                <a:spcPct val="110000"/>
               </a:lnSpc>
               <a:spcBef>
                 <a:spcPts val="0"/>
@@ -6627,7 +6627,7 @@
           <a:p>
             <a:pPr algn="just">
               <a:lnSpc>
-                <a:spcPct val="125000"/>
+                <a:spcPct val="110000"/>
               </a:lnSpc>
               <a:spcBef>
                 <a:spcPts val="0"/>
@@ -6649,7 +6649,7 @@
           <a:p>
             <a:pPr algn="just">
               <a:lnSpc>
-                <a:spcPct val="125000"/>
+                <a:spcPct val="110000"/>
               </a:lnSpc>
               <a:spcBef>
                 <a:spcPts val="0"/>
@@ -6671,7 +6671,7 @@
           <a:p>
             <a:pPr algn="just">
               <a:lnSpc>
-                <a:spcPct val="125000"/>
+                <a:spcPct val="110000"/>
               </a:lnSpc>
               <a:spcBef>
                 <a:spcPts val="0"/>
@@ -6693,7 +6693,7 @@
           <a:p>
             <a:pPr algn="just">
               <a:lnSpc>
-                <a:spcPct val="125000"/>
+                <a:spcPct val="110000"/>
               </a:lnSpc>
               <a:spcBef>
                 <a:spcPts val="0"/>
@@ -6715,7 +6715,7 @@
           <a:p>
             <a:pPr algn="just">
               <a:lnSpc>
-                <a:spcPct val="125000"/>
+                <a:spcPct val="110000"/>
               </a:lnSpc>
               <a:spcBef>
                 <a:spcPts val="0"/>
@@ -6737,7 +6737,7 @@
           <a:p>
             <a:pPr algn="just">
               <a:lnSpc>
-                <a:spcPct val="125000"/>
+                <a:spcPct val="110000"/>
               </a:lnSpc>
               <a:spcBef>
                 <a:spcPts val="0"/>
@@ -6851,7 +6851,7 @@
           <a:p>
             <a:pPr algn="just">
               <a:lnSpc>
-                <a:spcPct val="125000"/>
+                <a:spcPct val="110000"/>
               </a:lnSpc>
               <a:spcBef>
                 <a:spcPts val="0"/>
@@ -6873,7 +6873,7 @@
           <a:p>
             <a:pPr algn="just">
               <a:lnSpc>
-                <a:spcPct val="125000"/>
+                <a:spcPct val="110000"/>
               </a:lnSpc>
               <a:spcBef>
                 <a:spcPts val="0"/>
@@ -6895,7 +6895,7 @@
           <a:p>
             <a:pPr algn="just">
               <a:lnSpc>
-                <a:spcPct val="125000"/>
+                <a:spcPct val="110000"/>
               </a:lnSpc>
               <a:spcBef>
                 <a:spcPts val="0"/>
@@ -6917,7 +6917,7 @@
           <a:p>
             <a:pPr algn="just">
               <a:lnSpc>
-                <a:spcPct val="125000"/>
+                <a:spcPct val="110000"/>
               </a:lnSpc>
               <a:spcBef>
                 <a:spcPts val="0"/>
@@ -6939,7 +6939,7 @@
           <a:p>
             <a:pPr algn="just">
               <a:lnSpc>
-                <a:spcPct val="125000"/>
+                <a:spcPct val="110000"/>
               </a:lnSpc>
               <a:spcBef>
                 <a:spcPts val="0"/>
@@ -6961,7 +6961,7 @@
           <a:p>
             <a:pPr algn="just">
               <a:lnSpc>
-                <a:spcPct val="125000"/>
+                <a:spcPct val="110000"/>
               </a:lnSpc>
               <a:spcBef>
                 <a:spcPts val="0"/>
@@ -6983,7 +6983,7 @@
           <a:p>
             <a:pPr algn="just">
               <a:lnSpc>
-                <a:spcPct val="125000"/>
+                <a:spcPct val="110000"/>
               </a:lnSpc>
               <a:spcBef>
                 <a:spcPts val="0"/>
@@ -7005,7 +7005,7 @@
           <a:p>
             <a:pPr algn="just">
               <a:lnSpc>
-                <a:spcPct val="125000"/>
+                <a:spcPct val="110000"/>
               </a:lnSpc>
               <a:spcBef>
                 <a:spcPts val="0"/>
@@ -7027,7 +7027,7 @@
           <a:p>
             <a:pPr algn="just">
               <a:lnSpc>
-                <a:spcPct val="125000"/>
+                <a:spcPct val="110000"/>
               </a:lnSpc>
               <a:spcBef>
                 <a:spcPts val="0"/>
@@ -7049,7 +7049,7 @@
           <a:p>
             <a:pPr algn="just">
               <a:lnSpc>
-                <a:spcPct val="125000"/>
+                <a:spcPct val="110000"/>
               </a:lnSpc>
               <a:spcBef>
                 <a:spcPts val="0"/>
@@ -7163,7 +7163,7 @@
           <a:p>
             <a:pPr algn="just">
               <a:lnSpc>
-                <a:spcPct val="125000"/>
+                <a:spcPct val="110000"/>
               </a:lnSpc>
               <a:spcBef>
                 <a:spcPts val="0"/>
@@ -7185,7 +7185,7 @@
           <a:p>
             <a:pPr algn="just">
               <a:lnSpc>
-                <a:spcPct val="125000"/>
+                <a:spcPct val="110000"/>
               </a:lnSpc>
               <a:spcBef>
                 <a:spcPts val="0"/>
@@ -7207,7 +7207,7 @@
           <a:p>
             <a:pPr algn="just">
               <a:lnSpc>
-                <a:spcPct val="125000"/>
+                <a:spcPct val="110000"/>
               </a:lnSpc>
               <a:spcBef>
                 <a:spcPts val="0"/>
@@ -7229,7 +7229,7 @@
           <a:p>
             <a:pPr algn="just">
               <a:lnSpc>
-                <a:spcPct val="125000"/>
+                <a:spcPct val="110000"/>
               </a:lnSpc>
               <a:spcBef>
                 <a:spcPts val="0"/>
@@ -7251,7 +7251,7 @@
           <a:p>
             <a:pPr algn="just">
               <a:lnSpc>
-                <a:spcPct val="125000"/>
+                <a:spcPct val="110000"/>
               </a:lnSpc>
               <a:spcBef>
                 <a:spcPts val="0"/>
@@ -7273,7 +7273,7 @@
           <a:p>
             <a:pPr algn="just">
               <a:lnSpc>
-                <a:spcPct val="125000"/>
+                <a:spcPct val="110000"/>
               </a:lnSpc>
               <a:spcBef>
                 <a:spcPts val="0"/>
@@ -7295,7 +7295,7 @@
           <a:p>
             <a:pPr algn="just">
               <a:lnSpc>
-                <a:spcPct val="125000"/>
+                <a:spcPct val="110000"/>
               </a:lnSpc>
               <a:spcBef>
                 <a:spcPts val="0"/>
@@ -7317,7 +7317,7 @@
           <a:p>
             <a:pPr algn="just">
               <a:lnSpc>
-                <a:spcPct val="125000"/>
+                <a:spcPct val="110000"/>
               </a:lnSpc>
               <a:spcBef>
                 <a:spcPts val="0"/>
@@ -7339,7 +7339,7 @@
           <a:p>
             <a:pPr algn="just">
               <a:lnSpc>
-                <a:spcPct val="125000"/>
+                <a:spcPct val="110000"/>
               </a:lnSpc>
               <a:spcBef>
                 <a:spcPts val="0"/>
@@ -7361,7 +7361,7 @@
           <a:p>
             <a:pPr algn="just">
               <a:lnSpc>
-                <a:spcPct val="125000"/>
+                <a:spcPct val="110000"/>
               </a:lnSpc>
               <a:spcBef>
                 <a:spcPts val="0"/>
@@ -7475,7 +7475,7 @@
           <a:p>
             <a:pPr algn="just">
               <a:lnSpc>
-                <a:spcPct val="125000"/>
+                <a:spcPct val="110000"/>
               </a:lnSpc>
               <a:spcBef>
                 <a:spcPts val="0"/>
@@ -7497,7 +7497,7 @@
           <a:p>
             <a:pPr algn="just">
               <a:lnSpc>
-                <a:spcPct val="125000"/>
+                <a:spcPct val="110000"/>
               </a:lnSpc>
               <a:spcBef>
                 <a:spcPts val="0"/>
@@ -7519,7 +7519,7 @@
           <a:p>
             <a:pPr algn="just">
               <a:lnSpc>
-                <a:spcPct val="125000"/>
+                <a:spcPct val="110000"/>
               </a:lnSpc>
               <a:spcBef>
                 <a:spcPts val="0"/>
@@ -7541,7 +7541,7 @@
           <a:p>
             <a:pPr algn="just">
               <a:lnSpc>
-                <a:spcPct val="125000"/>
+                <a:spcPct val="110000"/>
               </a:lnSpc>
               <a:spcBef>
                 <a:spcPts val="0"/>
@@ -7563,7 +7563,7 @@
           <a:p>
             <a:pPr algn="just">
               <a:lnSpc>
-                <a:spcPct val="125000"/>
+                <a:spcPct val="110000"/>
               </a:lnSpc>
               <a:spcBef>
                 <a:spcPts val="0"/>
@@ -7585,7 +7585,7 @@
           <a:p>
             <a:pPr algn="just">
               <a:lnSpc>
-                <a:spcPct val="125000"/>
+                <a:spcPct val="110000"/>
               </a:lnSpc>
               <a:spcBef>
                 <a:spcPts val="0"/>
@@ -7607,7 +7607,7 @@
           <a:p>
             <a:pPr algn="just">
               <a:lnSpc>
-                <a:spcPct val="125000"/>
+                <a:spcPct val="110000"/>
               </a:lnSpc>
               <a:spcBef>
                 <a:spcPts val="0"/>
@@ -7629,7 +7629,7 @@
           <a:p>
             <a:pPr algn="just">
               <a:lnSpc>
-                <a:spcPct val="125000"/>
+                <a:spcPct val="110000"/>
               </a:lnSpc>
               <a:spcBef>
                 <a:spcPts val="0"/>
@@ -7651,7 +7651,7 @@
           <a:p>
             <a:pPr algn="just">
               <a:lnSpc>
-                <a:spcPct val="125000"/>
+                <a:spcPct val="110000"/>
               </a:lnSpc>
               <a:spcBef>
                 <a:spcPts val="0"/>
@@ -7765,7 +7765,7 @@
           <a:p>
             <a:pPr algn="just">
               <a:lnSpc>
-                <a:spcPct val="125000"/>
+                <a:spcPct val="110000"/>
               </a:lnSpc>
               <a:spcBef>
                 <a:spcPts val="0"/>
@@ -7787,7 +7787,7 @@
           <a:p>
             <a:pPr algn="just">
               <a:lnSpc>
-                <a:spcPct val="125000"/>
+                <a:spcPct val="110000"/>
               </a:lnSpc>
               <a:spcBef>
                 <a:spcPts val="0"/>
@@ -7809,7 +7809,7 @@
           <a:p>
             <a:pPr algn="just">
               <a:lnSpc>
-                <a:spcPct val="125000"/>
+                <a:spcPct val="110000"/>
               </a:lnSpc>
               <a:spcBef>
                 <a:spcPts val="0"/>
@@ -7831,7 +7831,7 @@
           <a:p>
             <a:pPr algn="just">
               <a:lnSpc>
-                <a:spcPct val="125000"/>
+                <a:spcPct val="110000"/>
               </a:lnSpc>
               <a:spcBef>
                 <a:spcPts val="0"/>
@@ -7853,7 +7853,7 @@
           <a:p>
             <a:pPr algn="just">
               <a:lnSpc>
-                <a:spcPct val="125000"/>
+                <a:spcPct val="110000"/>
               </a:lnSpc>
               <a:spcBef>
                 <a:spcPts val="0"/>
@@ -7875,7 +7875,7 @@
           <a:p>
             <a:pPr algn="just">
               <a:lnSpc>
-                <a:spcPct val="125000"/>
+                <a:spcPct val="110000"/>
               </a:lnSpc>
               <a:spcBef>
                 <a:spcPts val="0"/>
@@ -7897,7 +7897,7 @@
           <a:p>
             <a:pPr algn="just">
               <a:lnSpc>
-                <a:spcPct val="125000"/>
+                <a:spcPct val="110000"/>
               </a:lnSpc>
               <a:spcBef>
                 <a:spcPts val="0"/>
@@ -7919,7 +7919,7 @@
           <a:p>
             <a:pPr algn="just">
               <a:lnSpc>
-                <a:spcPct val="125000"/>
+                <a:spcPct val="110000"/>
               </a:lnSpc>
               <a:spcBef>
                 <a:spcPts val="0"/>
@@ -7941,7 +7941,7 @@
           <a:p>
             <a:pPr algn="just">
               <a:lnSpc>
-                <a:spcPct val="125000"/>
+                <a:spcPct val="110000"/>
               </a:lnSpc>
               <a:spcBef>
                 <a:spcPts val="0"/>
@@ -7963,7 +7963,7 @@
           <a:p>
             <a:pPr algn="just">
               <a:lnSpc>
-                <a:spcPct val="125000"/>
+                <a:spcPct val="110000"/>
               </a:lnSpc>
               <a:spcBef>
                 <a:spcPts val="0"/>
@@ -7985,7 +7985,7 @@
           <a:p>
             <a:pPr algn="just">
               <a:lnSpc>
-                <a:spcPct val="125000"/>
+                <a:spcPct val="110000"/>
               </a:lnSpc>
               <a:spcBef>
                 <a:spcPts val="0"/>
@@ -8007,7 +8007,7 @@
           <a:p>
             <a:pPr algn="just">
               <a:lnSpc>
-                <a:spcPct val="125000"/>
+                <a:spcPct val="110000"/>
               </a:lnSpc>
               <a:spcBef>
                 <a:spcPts val="0"/>
@@ -8121,7 +8121,7 @@
           <a:p>
             <a:pPr algn="just">
               <a:lnSpc>
-                <a:spcPct val="125000"/>
+                <a:spcPct val="110000"/>
               </a:lnSpc>
               <a:spcBef>
                 <a:spcPts val="0"/>
@@ -8143,7 +8143,7 @@
           <a:p>
             <a:pPr algn="just">
               <a:lnSpc>
-                <a:spcPct val="125000"/>
+                <a:spcPct val="110000"/>
               </a:lnSpc>
               <a:spcBef>
                 <a:spcPts val="0"/>
@@ -8165,7 +8165,7 @@
           <a:p>
             <a:pPr algn="just">
               <a:lnSpc>
-                <a:spcPct val="125000"/>
+                <a:spcPct val="110000"/>
               </a:lnSpc>
               <a:spcBef>
                 <a:spcPts val="0"/>
@@ -8187,7 +8187,7 @@
           <a:p>
             <a:pPr algn="just">
               <a:lnSpc>
-                <a:spcPct val="125000"/>
+                <a:spcPct val="110000"/>
               </a:lnSpc>
               <a:spcBef>
                 <a:spcPts val="0"/>
@@ -8209,7 +8209,7 @@
           <a:p>
             <a:pPr algn="just">
               <a:lnSpc>
-                <a:spcPct val="125000"/>
+                <a:spcPct val="110000"/>
               </a:lnSpc>
               <a:spcBef>
                 <a:spcPts val="0"/>
@@ -8231,7 +8231,7 @@
           <a:p>
             <a:pPr algn="just">
               <a:lnSpc>
-                <a:spcPct val="125000"/>
+                <a:spcPct val="110000"/>
               </a:lnSpc>
               <a:spcBef>
                 <a:spcPts val="0"/>
@@ -8253,7 +8253,7 @@
           <a:p>
             <a:pPr algn="just">
               <a:lnSpc>
-                <a:spcPct val="125000"/>
+                <a:spcPct val="110000"/>
               </a:lnSpc>
               <a:spcBef>
                 <a:spcPts val="0"/>
@@ -8275,7 +8275,7 @@
           <a:p>
             <a:pPr algn="just">
               <a:lnSpc>
-                <a:spcPct val="125000"/>
+                <a:spcPct val="110000"/>
               </a:lnSpc>
               <a:spcBef>
                 <a:spcPts val="0"/>
@@ -8297,7 +8297,7 @@
           <a:p>
             <a:pPr algn="just">
               <a:lnSpc>
-                <a:spcPct val="125000"/>
+                <a:spcPct val="110000"/>
               </a:lnSpc>
               <a:spcBef>
                 <a:spcPts val="0"/>
@@ -8319,7 +8319,7 @@
           <a:p>
             <a:pPr algn="just">
               <a:lnSpc>
-                <a:spcPct val="125000"/>
+                <a:spcPct val="110000"/>
               </a:lnSpc>
               <a:spcBef>
                 <a:spcPts val="0"/>
@@ -8433,7 +8433,7 @@
           <a:p>
             <a:pPr algn="just">
               <a:lnSpc>
-                <a:spcPct val="125000"/>
+                <a:spcPct val="110000"/>
               </a:lnSpc>
               <a:spcBef>
                 <a:spcPts val="0"/>
@@ -8455,7 +8455,7 @@
           <a:p>
             <a:pPr algn="just">
               <a:lnSpc>
-                <a:spcPct val="125000"/>
+                <a:spcPct val="110000"/>
               </a:lnSpc>
               <a:spcBef>
                 <a:spcPts val="0"/>
@@ -8477,7 +8477,7 @@
           <a:p>
             <a:pPr algn="just">
               <a:lnSpc>
-                <a:spcPct val="125000"/>
+                <a:spcPct val="110000"/>
               </a:lnSpc>
               <a:spcBef>
                 <a:spcPts val="0"/>
@@ -8499,7 +8499,7 @@
           <a:p>
             <a:pPr algn="just">
               <a:lnSpc>
-                <a:spcPct val="125000"/>
+                <a:spcPct val="110000"/>
               </a:lnSpc>
               <a:spcBef>
                 <a:spcPts val="0"/>
@@ -8521,7 +8521,7 @@
           <a:p>
             <a:pPr algn="just">
               <a:lnSpc>
-                <a:spcPct val="125000"/>
+                <a:spcPct val="110000"/>
               </a:lnSpc>
               <a:spcBef>
                 <a:spcPts val="0"/>
@@ -8543,7 +8543,7 @@
           <a:p>
             <a:pPr algn="just">
               <a:lnSpc>
-                <a:spcPct val="125000"/>
+                <a:spcPct val="110000"/>
               </a:lnSpc>
               <a:spcBef>
                 <a:spcPts val="0"/>
@@ -8565,7 +8565,7 @@
           <a:p>
             <a:pPr algn="just">
               <a:lnSpc>
-                <a:spcPct val="125000"/>
+                <a:spcPct val="110000"/>
               </a:lnSpc>
               <a:spcBef>
                 <a:spcPts val="0"/>
@@ -8587,7 +8587,7 @@
           <a:p>
             <a:pPr algn="just">
               <a:lnSpc>
-                <a:spcPct val="125000"/>
+                <a:spcPct val="110000"/>
               </a:lnSpc>
               <a:spcBef>
                 <a:spcPts val="0"/>
@@ -8609,7 +8609,7 @@
           <a:p>
             <a:pPr algn="just">
               <a:lnSpc>
-                <a:spcPct val="125000"/>
+                <a:spcPct val="110000"/>
               </a:lnSpc>
               <a:spcBef>
                 <a:spcPts val="0"/>
@@ -8631,7 +8631,7 @@
           <a:p>
             <a:pPr algn="just">
               <a:lnSpc>
-                <a:spcPct val="125000"/>
+                <a:spcPct val="110000"/>
               </a:lnSpc>
               <a:spcBef>
                 <a:spcPts val="0"/>
@@ -8653,7 +8653,7 @@
           <a:p>
             <a:pPr algn="just">
               <a:lnSpc>
-                <a:spcPct val="125000"/>
+                <a:spcPct val="110000"/>
               </a:lnSpc>
               <a:spcBef>
                 <a:spcPts val="0"/>
@@ -8675,7 +8675,7 @@
           <a:p>
             <a:pPr algn="just">
               <a:lnSpc>
-                <a:spcPct val="125000"/>
+                <a:spcPct val="110000"/>
               </a:lnSpc>
               <a:spcBef>
                 <a:spcPts val="0"/>
@@ -8697,7 +8697,7 @@
           <a:p>
             <a:pPr algn="just">
               <a:lnSpc>
-                <a:spcPct val="125000"/>
+                <a:spcPct val="110000"/>
               </a:lnSpc>
               <a:spcBef>
                 <a:spcPts val="0"/>
@@ -8719,7 +8719,7 @@
           <a:p>
             <a:pPr algn="just">
               <a:lnSpc>
-                <a:spcPct val="125000"/>
+                <a:spcPct val="110000"/>
               </a:lnSpc>
               <a:spcBef>
                 <a:spcPts val="0"/>
@@ -8741,7 +8741,7 @@
           <a:p>
             <a:pPr algn="just">
               <a:lnSpc>
-                <a:spcPct val="125000"/>
+                <a:spcPct val="110000"/>
               </a:lnSpc>
               <a:spcBef>
                 <a:spcPts val="0"/>
@@ -8855,7 +8855,7 @@
           <a:p>
             <a:pPr algn="just">
               <a:lnSpc>
-                <a:spcPct val="125000"/>
+                <a:spcPct val="110000"/>
               </a:lnSpc>
               <a:spcBef>
                 <a:spcPts val="0"/>
@@ -8877,7 +8877,7 @@
           <a:p>
             <a:pPr algn="just">
               <a:lnSpc>
-                <a:spcPct val="125000"/>
+                <a:spcPct val="110000"/>
               </a:lnSpc>
               <a:spcBef>
                 <a:spcPts val="0"/>
@@ -8899,7 +8899,7 @@
           <a:p>
             <a:pPr algn="just">
               <a:lnSpc>
-                <a:spcPct val="125000"/>
+                <a:spcPct val="110000"/>
               </a:lnSpc>
               <a:spcBef>
                 <a:spcPts val="0"/>
@@ -8921,7 +8921,7 @@
           <a:p>
             <a:pPr algn="just">
               <a:lnSpc>
-                <a:spcPct val="125000"/>
+                <a:spcPct val="110000"/>
               </a:lnSpc>
               <a:spcBef>
                 <a:spcPts val="0"/>
@@ -8943,7 +8943,7 @@
           <a:p>
             <a:pPr algn="just">
               <a:lnSpc>
-                <a:spcPct val="125000"/>
+                <a:spcPct val="110000"/>
               </a:lnSpc>
               <a:spcBef>
                 <a:spcPts val="0"/>
@@ -8965,7 +8965,7 @@
           <a:p>
             <a:pPr algn="just">
               <a:lnSpc>
-                <a:spcPct val="125000"/>
+                <a:spcPct val="110000"/>
               </a:lnSpc>
               <a:spcBef>
                 <a:spcPts val="0"/>
@@ -8987,7 +8987,7 @@
           <a:p>
             <a:pPr algn="just">
               <a:lnSpc>
-                <a:spcPct val="125000"/>
+                <a:spcPct val="110000"/>
               </a:lnSpc>
               <a:spcBef>
                 <a:spcPts val="0"/>
@@ -9009,7 +9009,7 @@
           <a:p>
             <a:pPr algn="just">
               <a:lnSpc>
-                <a:spcPct val="125000"/>
+                <a:spcPct val="110000"/>
               </a:lnSpc>
               <a:spcBef>
                 <a:spcPts val="0"/>
@@ -9031,7 +9031,7 @@
           <a:p>
             <a:pPr algn="just">
               <a:lnSpc>
-                <a:spcPct val="125000"/>
+                <a:spcPct val="110000"/>
               </a:lnSpc>
               <a:spcBef>
                 <a:spcPts val="0"/>
@@ -9053,7 +9053,7 @@
           <a:p>
             <a:pPr algn="just">
               <a:lnSpc>
-                <a:spcPct val="125000"/>
+                <a:spcPct val="110000"/>
               </a:lnSpc>
               <a:spcBef>
                 <a:spcPts val="0"/>
@@ -9167,7 +9167,7 @@
           <a:p>
             <a:pPr algn="just">
               <a:lnSpc>
-                <a:spcPct val="125000"/>
+                <a:spcPct val="110000"/>
               </a:lnSpc>
               <a:spcBef>
                 <a:spcPts val="0"/>
@@ -9189,7 +9189,7 @@
           <a:p>
             <a:pPr algn="just">
               <a:lnSpc>
-                <a:spcPct val="125000"/>
+                <a:spcPct val="110000"/>
               </a:lnSpc>
               <a:spcBef>
                 <a:spcPts val="0"/>
@@ -9211,7 +9211,7 @@
           <a:p>
             <a:pPr algn="just">
               <a:lnSpc>
-                <a:spcPct val="125000"/>
+                <a:spcPct val="110000"/>
               </a:lnSpc>
               <a:spcBef>
                 <a:spcPts val="0"/>
@@ -9233,7 +9233,7 @@
           <a:p>
             <a:pPr algn="just">
               <a:lnSpc>
-                <a:spcPct val="125000"/>
+                <a:spcPct val="110000"/>
               </a:lnSpc>
               <a:spcBef>
                 <a:spcPts val="0"/>
@@ -9255,7 +9255,7 @@
           <a:p>
             <a:pPr algn="just">
               <a:lnSpc>
-                <a:spcPct val="125000"/>
+                <a:spcPct val="110000"/>
               </a:lnSpc>
               <a:spcBef>
                 <a:spcPts val="0"/>
@@ -9277,7 +9277,7 @@
           <a:p>
             <a:pPr algn="just">
               <a:lnSpc>
-                <a:spcPct val="125000"/>
+                <a:spcPct val="110000"/>
               </a:lnSpc>
               <a:spcBef>
                 <a:spcPts val="0"/>
@@ -9299,7 +9299,7 @@
           <a:p>
             <a:pPr algn="just">
               <a:lnSpc>
-                <a:spcPct val="125000"/>
+                <a:spcPct val="110000"/>
               </a:lnSpc>
               <a:spcBef>
                 <a:spcPts val="0"/>
@@ -9321,7 +9321,7 @@
           <a:p>
             <a:pPr algn="just">
               <a:lnSpc>
-                <a:spcPct val="125000"/>
+                <a:spcPct val="110000"/>
               </a:lnSpc>
               <a:spcBef>
                 <a:spcPts val="0"/>
@@ -9343,7 +9343,7 @@
           <a:p>
             <a:pPr algn="just">
               <a:lnSpc>
-                <a:spcPct val="125000"/>
+                <a:spcPct val="110000"/>
               </a:lnSpc>
               <a:spcBef>
                 <a:spcPts val="0"/>
@@ -9457,7 +9457,7 @@
           <a:p>
             <a:pPr algn="just">
               <a:lnSpc>
-                <a:spcPct val="125000"/>
+                <a:spcPct val="110000"/>
               </a:lnSpc>
               <a:spcBef>
                 <a:spcPts val="0"/>
@@ -9479,7 +9479,7 @@
           <a:p>
             <a:pPr algn="just">
               <a:lnSpc>
-                <a:spcPct val="125000"/>
+                <a:spcPct val="110000"/>
               </a:lnSpc>
               <a:spcBef>
                 <a:spcPts val="0"/>
@@ -9501,7 +9501,7 @@
           <a:p>
             <a:pPr algn="just">
               <a:lnSpc>
-                <a:spcPct val="125000"/>
+                <a:spcPct val="110000"/>
               </a:lnSpc>
               <a:spcBef>
                 <a:spcPts val="0"/>
@@ -9523,7 +9523,7 @@
           <a:p>
             <a:pPr algn="just">
               <a:lnSpc>
-                <a:spcPct val="125000"/>
+                <a:spcPct val="110000"/>
               </a:lnSpc>
               <a:spcBef>
                 <a:spcPts val="0"/>
@@ -9545,7 +9545,7 @@
           <a:p>
             <a:pPr algn="just">
               <a:lnSpc>
-                <a:spcPct val="125000"/>
+                <a:spcPct val="110000"/>
               </a:lnSpc>
               <a:spcBef>
                 <a:spcPts val="0"/>
@@ -9567,7 +9567,7 @@
           <a:p>
             <a:pPr algn="just">
               <a:lnSpc>
-                <a:spcPct val="125000"/>
+                <a:spcPct val="110000"/>
               </a:lnSpc>
               <a:spcBef>
                 <a:spcPts val="0"/>
@@ -9589,7 +9589,7 @@
           <a:p>
             <a:pPr algn="just">
               <a:lnSpc>
-                <a:spcPct val="125000"/>
+                <a:spcPct val="110000"/>
               </a:lnSpc>
               <a:spcBef>
                 <a:spcPts val="0"/>
@@ -9611,7 +9611,7 @@
           <a:p>
             <a:pPr algn="just">
               <a:lnSpc>
-                <a:spcPct val="125000"/>
+                <a:spcPct val="110000"/>
               </a:lnSpc>
               <a:spcBef>
                 <a:spcPts val="0"/>
@@ -9633,7 +9633,7 @@
           <a:p>
             <a:pPr algn="just">
               <a:lnSpc>
-                <a:spcPct val="125000"/>
+                <a:spcPct val="110000"/>
               </a:lnSpc>
               <a:spcBef>
                 <a:spcPts val="0"/>
@@ -9655,7 +9655,7 @@
           <a:p>
             <a:pPr algn="just">
               <a:lnSpc>
-                <a:spcPct val="125000"/>
+                <a:spcPct val="110000"/>
               </a:lnSpc>
               <a:spcBef>
                 <a:spcPts val="0"/>
@@ -9769,7 +9769,7 @@
           <a:p>
             <a:pPr algn="just">
               <a:lnSpc>
-                <a:spcPct val="125000"/>
+                <a:spcPct val="110000"/>
               </a:lnSpc>
               <a:spcBef>
                 <a:spcPts val="0"/>
@@ -9791,7 +9791,7 @@
           <a:p>
             <a:pPr algn="just">
               <a:lnSpc>
-                <a:spcPct val="125000"/>
+                <a:spcPct val="110000"/>
               </a:lnSpc>
               <a:spcBef>
                 <a:spcPts val="0"/>
@@ -9813,7 +9813,7 @@
           <a:p>
             <a:pPr algn="just">
               <a:lnSpc>
-                <a:spcPct val="125000"/>
+                <a:spcPct val="110000"/>
               </a:lnSpc>
               <a:spcBef>
                 <a:spcPts val="0"/>
@@ -9835,7 +9835,7 @@
           <a:p>
             <a:pPr algn="just">
               <a:lnSpc>
-                <a:spcPct val="125000"/>
+                <a:spcPct val="110000"/>
               </a:lnSpc>
               <a:spcBef>
                 <a:spcPts val="0"/>
@@ -9857,7 +9857,7 @@
           <a:p>
             <a:pPr algn="just">
               <a:lnSpc>
-                <a:spcPct val="125000"/>
+                <a:spcPct val="110000"/>
               </a:lnSpc>
               <a:spcBef>
                 <a:spcPts val="0"/>
@@ -9879,7 +9879,7 @@
           <a:p>
             <a:pPr algn="just">
               <a:lnSpc>
-                <a:spcPct val="125000"/>
+                <a:spcPct val="110000"/>
               </a:lnSpc>
               <a:spcBef>
                 <a:spcPts val="0"/>
@@ -9901,7 +9901,7 @@
           <a:p>
             <a:pPr algn="just">
               <a:lnSpc>
-                <a:spcPct val="125000"/>
+                <a:spcPct val="110000"/>
               </a:lnSpc>
               <a:spcBef>
                 <a:spcPts val="0"/>
@@ -9923,7 +9923,7 @@
           <a:p>
             <a:pPr algn="just">
               <a:lnSpc>
-                <a:spcPct val="125000"/>
+                <a:spcPct val="110000"/>
               </a:lnSpc>
               <a:spcBef>
                 <a:spcPts val="0"/>
@@ -9945,7 +9945,7 @@
           <a:p>
             <a:pPr algn="just">
               <a:lnSpc>
-                <a:spcPct val="125000"/>
+                <a:spcPct val="110000"/>
               </a:lnSpc>
               <a:spcBef>
                 <a:spcPts val="0"/>
@@ -9967,7 +9967,7 @@
           <a:p>
             <a:pPr algn="just">
               <a:lnSpc>
-                <a:spcPct val="125000"/>
+                <a:spcPct val="110000"/>
               </a:lnSpc>
               <a:spcBef>
                 <a:spcPts val="0"/>
@@ -10081,7 +10081,7 @@
           <a:p>
             <a:pPr algn="just">
               <a:lnSpc>
-                <a:spcPct val="125000"/>
+                <a:spcPct val="110000"/>
               </a:lnSpc>
               <a:spcBef>
                 <a:spcPts val="0"/>
@@ -10103,7 +10103,7 @@
           <a:p>
             <a:pPr algn="just">
               <a:lnSpc>
-                <a:spcPct val="125000"/>
+                <a:spcPct val="110000"/>
               </a:lnSpc>
               <a:spcBef>
                 <a:spcPts val="0"/>
@@ -10125,7 +10125,7 @@
           <a:p>
             <a:pPr algn="just">
               <a:lnSpc>
-                <a:spcPct val="125000"/>
+                <a:spcPct val="110000"/>
               </a:lnSpc>
               <a:spcBef>
                 <a:spcPts val="0"/>
@@ -10147,7 +10147,7 @@
           <a:p>
             <a:pPr algn="just">
               <a:lnSpc>
-                <a:spcPct val="125000"/>
+                <a:spcPct val="110000"/>
               </a:lnSpc>
               <a:spcBef>
                 <a:spcPts val="0"/>
@@ -10169,7 +10169,7 @@
           <a:p>
             <a:pPr algn="just">
               <a:lnSpc>
-                <a:spcPct val="125000"/>
+                <a:spcPct val="110000"/>
               </a:lnSpc>
               <a:spcBef>
                 <a:spcPts val="0"/>
@@ -10191,7 +10191,7 @@
           <a:p>
             <a:pPr algn="just">
               <a:lnSpc>
-                <a:spcPct val="125000"/>
+                <a:spcPct val="110000"/>
               </a:lnSpc>
               <a:spcBef>
                 <a:spcPts val="0"/>
@@ -10213,7 +10213,7 @@
           <a:p>
             <a:pPr algn="just">
               <a:lnSpc>
-                <a:spcPct val="125000"/>
+                <a:spcPct val="110000"/>
               </a:lnSpc>
               <a:spcBef>
                 <a:spcPts val="0"/>
@@ -10235,7 +10235,7 @@
           <a:p>
             <a:pPr algn="just">
               <a:lnSpc>
-                <a:spcPct val="125000"/>
+                <a:spcPct val="110000"/>
               </a:lnSpc>
               <a:spcBef>
                 <a:spcPts val="0"/>
@@ -10257,7 +10257,7 @@
           <a:p>
             <a:pPr algn="just">
               <a:lnSpc>
-                <a:spcPct val="125000"/>
+                <a:spcPct val="110000"/>
               </a:lnSpc>
               <a:spcBef>
                 <a:spcPts val="0"/>
@@ -10279,7 +10279,7 @@
           <a:p>
             <a:pPr algn="just">
               <a:lnSpc>
-                <a:spcPct val="125000"/>
+                <a:spcPct val="110000"/>
               </a:lnSpc>
               <a:spcBef>
                 <a:spcPts val="0"/>
@@ -10393,7 +10393,7 @@
           <a:p>
             <a:pPr algn="just">
               <a:lnSpc>
-                <a:spcPct val="125000"/>
+                <a:spcPct val="110000"/>
               </a:lnSpc>
               <a:spcBef>
                 <a:spcPts val="0"/>
@@ -10415,7 +10415,7 @@
           <a:p>
             <a:pPr algn="just">
               <a:lnSpc>
-                <a:spcPct val="125000"/>
+                <a:spcPct val="110000"/>
               </a:lnSpc>
               <a:spcBef>
                 <a:spcPts val="0"/>
@@ -10437,7 +10437,7 @@
           <a:p>
             <a:pPr algn="just">
               <a:lnSpc>
-                <a:spcPct val="125000"/>
+                <a:spcPct val="110000"/>
               </a:lnSpc>
               <a:spcBef>
                 <a:spcPts val="0"/>
@@ -10459,7 +10459,7 @@
           <a:p>
             <a:pPr algn="just">
               <a:lnSpc>
-                <a:spcPct val="125000"/>
+                <a:spcPct val="110000"/>
               </a:lnSpc>
               <a:spcBef>
                 <a:spcPts val="0"/>
@@ -10481,7 +10481,7 @@
           <a:p>
             <a:pPr algn="just">
               <a:lnSpc>
-                <a:spcPct val="125000"/>
+                <a:spcPct val="110000"/>
               </a:lnSpc>
               <a:spcBef>
                 <a:spcPts val="0"/>
@@ -10503,7 +10503,7 @@
           <a:p>
             <a:pPr algn="just">
               <a:lnSpc>
-                <a:spcPct val="125000"/>
+                <a:spcPct val="110000"/>
               </a:lnSpc>
               <a:spcBef>
                 <a:spcPts val="0"/>
@@ -10525,7 +10525,7 @@
           <a:p>
             <a:pPr algn="just">
               <a:lnSpc>
-                <a:spcPct val="125000"/>
+                <a:spcPct val="110000"/>
               </a:lnSpc>
               <a:spcBef>
                 <a:spcPts val="0"/>
@@ -10547,7 +10547,7 @@
           <a:p>
             <a:pPr algn="just">
               <a:lnSpc>
-                <a:spcPct val="125000"/>
+                <a:spcPct val="110000"/>
               </a:lnSpc>
               <a:spcBef>
                 <a:spcPts val="0"/>
@@ -10569,7 +10569,7 @@
           <a:p>
             <a:pPr algn="just">
               <a:lnSpc>
-                <a:spcPct val="125000"/>
+                <a:spcPct val="110000"/>
               </a:lnSpc>
               <a:spcBef>
                 <a:spcPts val="0"/>
@@ -10683,7 +10683,7 @@
           <a:p>
             <a:pPr algn="just">
               <a:lnSpc>
-                <a:spcPct val="125000"/>
+                <a:spcPct val="110000"/>
               </a:lnSpc>
               <a:spcBef>
                 <a:spcPts val="0"/>
@@ -10705,7 +10705,7 @@
           <a:p>
             <a:pPr algn="just">
               <a:lnSpc>
-                <a:spcPct val="125000"/>
+                <a:spcPct val="110000"/>
               </a:lnSpc>
               <a:spcBef>
                 <a:spcPts val="0"/>
@@ -10727,7 +10727,7 @@
           <a:p>
             <a:pPr algn="just">
               <a:lnSpc>
-                <a:spcPct val="125000"/>
+                <a:spcPct val="110000"/>
               </a:lnSpc>
               <a:spcBef>
                 <a:spcPts val="0"/>
@@ -10749,7 +10749,7 @@
           <a:p>
             <a:pPr algn="just">
               <a:lnSpc>
-                <a:spcPct val="125000"/>
+                <a:spcPct val="110000"/>
               </a:lnSpc>
               <a:spcBef>
                 <a:spcPts val="0"/>
@@ -10771,7 +10771,7 @@
           <a:p>
             <a:pPr algn="just">
               <a:lnSpc>
-                <a:spcPct val="125000"/>
+                <a:spcPct val="110000"/>
               </a:lnSpc>
               <a:spcBef>
                 <a:spcPts val="0"/>
@@ -10793,7 +10793,7 @@
           <a:p>
             <a:pPr algn="just">
               <a:lnSpc>
-                <a:spcPct val="125000"/>
+                <a:spcPct val="110000"/>
               </a:lnSpc>
               <a:spcBef>
                 <a:spcPts val="0"/>
@@ -10815,7 +10815,7 @@
           <a:p>
             <a:pPr algn="just">
               <a:lnSpc>
-                <a:spcPct val="125000"/>
+                <a:spcPct val="110000"/>
               </a:lnSpc>
               <a:spcBef>
                 <a:spcPts val="0"/>
@@ -10837,7 +10837,7 @@
           <a:p>
             <a:pPr algn="just">
               <a:lnSpc>
-                <a:spcPct val="125000"/>
+                <a:spcPct val="110000"/>
               </a:lnSpc>
               <a:spcBef>
                 <a:spcPts val="0"/>
@@ -10859,7 +10859,7 @@
           <a:p>
             <a:pPr algn="just">
               <a:lnSpc>
-                <a:spcPct val="125000"/>
+                <a:spcPct val="110000"/>
               </a:lnSpc>
               <a:spcBef>
                 <a:spcPts val="0"/>
@@ -10881,7 +10881,7 @@
           <a:p>
             <a:pPr algn="just">
               <a:lnSpc>
-                <a:spcPct val="125000"/>
+                <a:spcPct val="110000"/>
               </a:lnSpc>
               <a:spcBef>
                 <a:spcPts val="0"/>
@@ -10903,7 +10903,7 @@
           <a:p>
             <a:pPr algn="just">
               <a:lnSpc>
-                <a:spcPct val="125000"/>
+                <a:spcPct val="110000"/>
               </a:lnSpc>
               <a:spcBef>
                 <a:spcPts val="0"/>
@@ -11017,7 +11017,7 @@
           <a:p>
             <a:pPr algn="just">
               <a:lnSpc>
-                <a:spcPct val="125000"/>
+                <a:spcPct val="110000"/>
               </a:lnSpc>
               <a:spcBef>
                 <a:spcPts val="0"/>
@@ -11039,7 +11039,7 @@
           <a:p>
             <a:pPr algn="just">
               <a:lnSpc>
-                <a:spcPct val="125000"/>
+                <a:spcPct val="110000"/>
               </a:lnSpc>
               <a:spcBef>
                 <a:spcPts val="0"/>
@@ -11061,7 +11061,7 @@
           <a:p>
             <a:pPr algn="just">
               <a:lnSpc>
-                <a:spcPct val="125000"/>
+                <a:spcPct val="110000"/>
               </a:lnSpc>
               <a:spcBef>
                 <a:spcPts val="0"/>
@@ -11083,7 +11083,7 @@
           <a:p>
             <a:pPr algn="just">
               <a:lnSpc>
-                <a:spcPct val="125000"/>
+                <a:spcPct val="110000"/>
               </a:lnSpc>
               <a:spcBef>
                 <a:spcPts val="0"/>
@@ -11105,7 +11105,7 @@
           <a:p>
             <a:pPr algn="just">
               <a:lnSpc>
-                <a:spcPct val="125000"/>
+                <a:spcPct val="110000"/>
               </a:lnSpc>
               <a:spcBef>
                 <a:spcPts val="0"/>
@@ -11127,7 +11127,7 @@
           <a:p>
             <a:pPr algn="just">
               <a:lnSpc>
-                <a:spcPct val="125000"/>
+                <a:spcPct val="110000"/>
               </a:lnSpc>
               <a:spcBef>
                 <a:spcPts val="0"/>
@@ -11149,7 +11149,7 @@
           <a:p>
             <a:pPr algn="just">
               <a:lnSpc>
-                <a:spcPct val="125000"/>
+                <a:spcPct val="110000"/>
               </a:lnSpc>
               <a:spcBef>
                 <a:spcPts val="0"/>
@@ -11171,7 +11171,7 @@
           <a:p>
             <a:pPr algn="just">
               <a:lnSpc>
-                <a:spcPct val="125000"/>
+                <a:spcPct val="110000"/>
               </a:lnSpc>
               <a:spcBef>
                 <a:spcPts val="0"/>
@@ -11193,7 +11193,7 @@
           <a:p>
             <a:pPr algn="just">
               <a:lnSpc>
-                <a:spcPct val="125000"/>
+                <a:spcPct val="110000"/>
               </a:lnSpc>
               <a:spcBef>
                 <a:spcPts val="0"/>
@@ -11307,7 +11307,7 @@
           <a:p>
             <a:pPr algn="just">
               <a:lnSpc>
-                <a:spcPct val="125000"/>
+                <a:spcPct val="110000"/>
               </a:lnSpc>
               <a:spcBef>
                 <a:spcPts val="0"/>
@@ -11329,7 +11329,7 @@
           <a:p>
             <a:pPr algn="just">
               <a:lnSpc>
-                <a:spcPct val="125000"/>
+                <a:spcPct val="110000"/>
               </a:lnSpc>
               <a:spcBef>
                 <a:spcPts val="0"/>
@@ -11351,7 +11351,7 @@
           <a:p>
             <a:pPr algn="just">
               <a:lnSpc>
-                <a:spcPct val="125000"/>
+                <a:spcPct val="110000"/>
               </a:lnSpc>
               <a:spcBef>
                 <a:spcPts val="0"/>
@@ -11373,7 +11373,7 @@
           <a:p>
             <a:pPr algn="just">
               <a:lnSpc>
-                <a:spcPct val="125000"/>
+                <a:spcPct val="110000"/>
               </a:lnSpc>
               <a:spcBef>
                 <a:spcPts val="0"/>
@@ -11395,7 +11395,7 @@
           <a:p>
             <a:pPr algn="just">
               <a:lnSpc>
-                <a:spcPct val="125000"/>
+                <a:spcPct val="110000"/>
               </a:lnSpc>
               <a:spcBef>
                 <a:spcPts val="0"/>
@@ -11417,7 +11417,7 @@
           <a:p>
             <a:pPr algn="just">
               <a:lnSpc>
-                <a:spcPct val="125000"/>
+                <a:spcPct val="110000"/>
               </a:lnSpc>
               <a:spcBef>
                 <a:spcPts val="0"/>
@@ -11439,7 +11439,7 @@
           <a:p>
             <a:pPr algn="just">
               <a:lnSpc>
-                <a:spcPct val="125000"/>
+                <a:spcPct val="110000"/>
               </a:lnSpc>
               <a:spcBef>
                 <a:spcPts val="0"/>
@@ -11461,7 +11461,7 @@
           <a:p>
             <a:pPr algn="just">
               <a:lnSpc>
-                <a:spcPct val="125000"/>
+                <a:spcPct val="110000"/>
               </a:lnSpc>
               <a:spcBef>
                 <a:spcPts val="0"/>
@@ -11483,7 +11483,7 @@
           <a:p>
             <a:pPr algn="just">
               <a:lnSpc>
-                <a:spcPct val="125000"/>
+                <a:spcPct val="110000"/>
               </a:lnSpc>
               <a:spcBef>
                 <a:spcPts val="0"/>
@@ -11505,7 +11505,7 @@
           <a:p>
             <a:pPr algn="just">
               <a:lnSpc>
-                <a:spcPct val="125000"/>
+                <a:spcPct val="110000"/>
               </a:lnSpc>
               <a:spcBef>
                 <a:spcPts val="0"/>
@@ -11619,7 +11619,7 @@
           <a:p>
             <a:pPr algn="just">
               <a:lnSpc>
-                <a:spcPct val="125000"/>
+                <a:spcPct val="110000"/>
               </a:lnSpc>
               <a:spcBef>
                 <a:spcPts val="0"/>
@@ -11641,7 +11641,7 @@
           <a:p>
             <a:pPr algn="just">
               <a:lnSpc>
-                <a:spcPct val="125000"/>
+                <a:spcPct val="110000"/>
               </a:lnSpc>
               <a:spcBef>
                 <a:spcPts val="0"/>
@@ -11663,7 +11663,7 @@
           <a:p>
             <a:pPr algn="just">
               <a:lnSpc>
-                <a:spcPct val="125000"/>
+                <a:spcPct val="110000"/>
               </a:lnSpc>
               <a:spcBef>
                 <a:spcPts val="0"/>
@@ -11685,7 +11685,7 @@
           <a:p>
             <a:pPr algn="just">
               <a:lnSpc>
-                <a:spcPct val="125000"/>
+                <a:spcPct val="110000"/>
               </a:lnSpc>
               <a:spcBef>
                 <a:spcPts val="0"/>
@@ -11707,7 +11707,7 @@
           <a:p>
             <a:pPr algn="just">
               <a:lnSpc>
-                <a:spcPct val="125000"/>
+                <a:spcPct val="110000"/>
               </a:lnSpc>
               <a:spcBef>
                 <a:spcPts val="0"/>
@@ -11729,7 +11729,7 @@
           <a:p>
             <a:pPr algn="just">
               <a:lnSpc>
-                <a:spcPct val="125000"/>
+                <a:spcPct val="110000"/>
               </a:lnSpc>
               <a:spcBef>
                 <a:spcPts val="0"/>
@@ -11751,7 +11751,7 @@
           <a:p>
             <a:pPr algn="just">
               <a:lnSpc>
-                <a:spcPct val="125000"/>
+                <a:spcPct val="110000"/>
               </a:lnSpc>
               <a:spcBef>
                 <a:spcPts val="0"/>
@@ -11773,7 +11773,7 @@
           <a:p>
             <a:pPr algn="just">
               <a:lnSpc>
-                <a:spcPct val="125000"/>
+                <a:spcPct val="110000"/>
               </a:lnSpc>
               <a:spcBef>
                 <a:spcPts val="0"/>
@@ -11795,7 +11795,7 @@
           <a:p>
             <a:pPr algn="just">
               <a:lnSpc>
-                <a:spcPct val="125000"/>
+                <a:spcPct val="110000"/>
               </a:lnSpc>
               <a:spcBef>
                 <a:spcPts val="0"/>
@@ -11909,7 +11909,7 @@
           <a:p>
             <a:pPr algn="just">
               <a:lnSpc>
-                <a:spcPct val="125000"/>
+                <a:spcPct val="110000"/>
               </a:lnSpc>
               <a:spcBef>
                 <a:spcPts val="0"/>
@@ -11931,7 +11931,7 @@
           <a:p>
             <a:pPr algn="just">
               <a:lnSpc>
-                <a:spcPct val="125000"/>
+                <a:spcPct val="110000"/>
               </a:lnSpc>
               <a:spcBef>
                 <a:spcPts val="0"/>
@@ -11953,7 +11953,7 @@
           <a:p>
             <a:pPr algn="just">
               <a:lnSpc>
-                <a:spcPct val="125000"/>
+                <a:spcPct val="110000"/>
               </a:lnSpc>
               <a:spcBef>
                 <a:spcPts val="0"/>
@@ -11975,7 +11975,7 @@
           <a:p>
             <a:pPr algn="just">
               <a:lnSpc>
-                <a:spcPct val="125000"/>
+                <a:spcPct val="110000"/>
               </a:lnSpc>
               <a:spcBef>
                 <a:spcPts val="0"/>
@@ -11997,7 +11997,7 @@
           <a:p>
             <a:pPr algn="just">
               <a:lnSpc>
-                <a:spcPct val="125000"/>
+                <a:spcPct val="110000"/>
               </a:lnSpc>
               <a:spcBef>
                 <a:spcPts val="0"/>
@@ -12019,7 +12019,7 @@
           <a:p>
             <a:pPr algn="just">
               <a:lnSpc>
-                <a:spcPct val="125000"/>
+                <a:spcPct val="110000"/>
               </a:lnSpc>
               <a:spcBef>
                 <a:spcPts val="0"/>
@@ -12041,7 +12041,7 @@
           <a:p>
             <a:pPr algn="just">
               <a:lnSpc>
-                <a:spcPct val="125000"/>
+                <a:spcPct val="110000"/>
               </a:lnSpc>
               <a:spcBef>
                 <a:spcPts val="0"/>
@@ -12063,7 +12063,7 @@
           <a:p>
             <a:pPr algn="just">
               <a:lnSpc>
-                <a:spcPct val="125000"/>
+                <a:spcPct val="110000"/>
               </a:lnSpc>
               <a:spcBef>
                 <a:spcPts val="0"/>
@@ -12085,7 +12085,7 @@
           <a:p>
             <a:pPr algn="just">
               <a:lnSpc>
-                <a:spcPct val="125000"/>
+                <a:spcPct val="110000"/>
               </a:lnSpc>
               <a:spcBef>
                 <a:spcPts val="0"/>
@@ -12107,7 +12107,7 @@
           <a:p>
             <a:pPr algn="just">
               <a:lnSpc>
-                <a:spcPct val="125000"/>
+                <a:spcPct val="110000"/>
               </a:lnSpc>
               <a:spcBef>
                 <a:spcPts val="0"/>
@@ -12129,7 +12129,7 @@
           <a:p>
             <a:pPr algn="just">
               <a:lnSpc>
-                <a:spcPct val="125000"/>
+                <a:spcPct val="110000"/>
               </a:lnSpc>
               <a:spcBef>
                 <a:spcPts val="0"/>
@@ -12151,7 +12151,7 @@
           <a:p>
             <a:pPr algn="just">
               <a:lnSpc>
-                <a:spcPct val="125000"/>
+                <a:spcPct val="110000"/>
               </a:lnSpc>
               <a:spcBef>
                 <a:spcPts val="0"/>
@@ -12265,7 +12265,7 @@
           <a:p>
             <a:pPr algn="just">
               <a:lnSpc>
-                <a:spcPct val="125000"/>
+                <a:spcPct val="110000"/>
               </a:lnSpc>
               <a:spcBef>
                 <a:spcPts val="0"/>
@@ -12287,7 +12287,7 @@
           <a:p>
             <a:pPr algn="just">
               <a:lnSpc>
-                <a:spcPct val="125000"/>
+                <a:spcPct val="110000"/>
               </a:lnSpc>
               <a:spcBef>
                 <a:spcPts val="0"/>
@@ -12309,7 +12309,7 @@
           <a:p>
             <a:pPr algn="just">
               <a:lnSpc>
-                <a:spcPct val="125000"/>
+                <a:spcPct val="110000"/>
               </a:lnSpc>
               <a:spcBef>
                 <a:spcPts val="0"/>
@@ -12331,7 +12331,7 @@
           <a:p>
             <a:pPr algn="just">
               <a:lnSpc>
-                <a:spcPct val="125000"/>
+                <a:spcPct val="110000"/>
               </a:lnSpc>
               <a:spcBef>
                 <a:spcPts val="0"/>
@@ -12353,7 +12353,7 @@
           <a:p>
             <a:pPr algn="just">
               <a:lnSpc>
-                <a:spcPct val="125000"/>
+                <a:spcPct val="110000"/>
               </a:lnSpc>
               <a:spcBef>
                 <a:spcPts val="0"/>
@@ -12375,7 +12375,7 @@
           <a:p>
             <a:pPr algn="just">
               <a:lnSpc>
-                <a:spcPct val="125000"/>
+                <a:spcPct val="110000"/>
               </a:lnSpc>
               <a:spcBef>
                 <a:spcPts val="0"/>
@@ -12397,7 +12397,7 @@
           <a:p>
             <a:pPr algn="just">
               <a:lnSpc>
-                <a:spcPct val="125000"/>
+                <a:spcPct val="110000"/>
               </a:lnSpc>
               <a:spcBef>
                 <a:spcPts val="0"/>
@@ -12419,7 +12419,7 @@
           <a:p>
             <a:pPr algn="just">
               <a:lnSpc>
-                <a:spcPct val="125000"/>
+                <a:spcPct val="110000"/>
               </a:lnSpc>
               <a:spcBef>
                 <a:spcPts val="0"/>
@@ -12441,7 +12441,7 @@
           <a:p>
             <a:pPr algn="just">
               <a:lnSpc>
-                <a:spcPct val="125000"/>
+                <a:spcPct val="110000"/>
               </a:lnSpc>
               <a:spcBef>
                 <a:spcPts val="0"/>
@@ -12555,7 +12555,7 @@
           <a:p>
             <a:pPr algn="just">
               <a:lnSpc>
-                <a:spcPct val="125000"/>
+                <a:spcPct val="110000"/>
               </a:lnSpc>
               <a:spcBef>
                 <a:spcPts val="0"/>
@@ -12577,7 +12577,7 @@
           <a:p>
             <a:pPr algn="just">
               <a:lnSpc>
-                <a:spcPct val="125000"/>
+                <a:spcPct val="110000"/>
               </a:lnSpc>
               <a:spcBef>
                 <a:spcPts val="0"/>
@@ -12599,7 +12599,7 @@
           <a:p>
             <a:pPr algn="just">
               <a:lnSpc>
-                <a:spcPct val="125000"/>
+                <a:spcPct val="110000"/>
               </a:lnSpc>
               <a:spcBef>
                 <a:spcPts val="0"/>
@@ -12621,7 +12621,7 @@
           <a:p>
             <a:pPr algn="just">
               <a:lnSpc>
-                <a:spcPct val="125000"/>
+                <a:spcPct val="110000"/>
               </a:lnSpc>
               <a:spcBef>
                 <a:spcPts val="0"/>
@@ -12643,7 +12643,7 @@
           <a:p>
             <a:pPr algn="just">
               <a:lnSpc>
-                <a:spcPct val="125000"/>
+                <a:spcPct val="110000"/>
               </a:lnSpc>
               <a:spcBef>
                 <a:spcPts val="0"/>
@@ -12665,7 +12665,7 @@
           <a:p>
             <a:pPr algn="just">
               <a:lnSpc>
-                <a:spcPct val="125000"/>
+                <a:spcPct val="110000"/>
               </a:lnSpc>
               <a:spcBef>
                 <a:spcPts val="0"/>
@@ -12687,7 +12687,7 @@
           <a:p>
             <a:pPr algn="just">
               <a:lnSpc>
-                <a:spcPct val="125000"/>
+                <a:spcPct val="110000"/>
               </a:lnSpc>
               <a:spcBef>
                 <a:spcPts val="0"/>
@@ -12709,7 +12709,7 @@
           <a:p>
             <a:pPr algn="just">
               <a:lnSpc>
-                <a:spcPct val="125000"/>
+                <a:spcPct val="110000"/>
               </a:lnSpc>
               <a:spcBef>
                 <a:spcPts val="0"/>
@@ -12731,7 +12731,7 @@
           <a:p>
             <a:pPr algn="just">
               <a:lnSpc>
-                <a:spcPct val="125000"/>
+                <a:spcPct val="110000"/>
               </a:lnSpc>
               <a:spcBef>
                 <a:spcPts val="0"/>
@@ -12753,7 +12753,7 @@
           <a:p>
             <a:pPr algn="just">
               <a:lnSpc>
-                <a:spcPct val="125000"/>
+                <a:spcPct val="110000"/>
               </a:lnSpc>
               <a:spcBef>
                 <a:spcPts val="0"/>
@@ -12867,7 +12867,7 @@
           <a:p>
             <a:pPr algn="just">
               <a:lnSpc>
-                <a:spcPct val="125000"/>
+                <a:spcPct val="110000"/>
               </a:lnSpc>
               <a:spcBef>
                 <a:spcPts val="0"/>
@@ -12889,7 +12889,7 @@
           <a:p>
             <a:pPr algn="just">
               <a:lnSpc>
-                <a:spcPct val="125000"/>
+                <a:spcPct val="110000"/>
               </a:lnSpc>
               <a:spcBef>
                 <a:spcPts val="0"/>
@@ -12911,7 +12911,7 @@
           <a:p>
             <a:pPr algn="just">
               <a:lnSpc>
-                <a:spcPct val="125000"/>
+                <a:spcPct val="110000"/>
               </a:lnSpc>
               <a:spcBef>
                 <a:spcPts val="0"/>
@@ -12933,7 +12933,7 @@
           <a:p>
             <a:pPr algn="just">
               <a:lnSpc>
-                <a:spcPct val="125000"/>
+                <a:spcPct val="110000"/>
               </a:lnSpc>
               <a:spcBef>
                 <a:spcPts val="0"/>
@@ -12955,7 +12955,7 @@
           <a:p>
             <a:pPr algn="just">
               <a:lnSpc>
-                <a:spcPct val="125000"/>
+                <a:spcPct val="110000"/>
               </a:lnSpc>
               <a:spcBef>
                 <a:spcPts val="0"/>
@@ -12977,7 +12977,7 @@
           <a:p>
             <a:pPr algn="just">
               <a:lnSpc>
-                <a:spcPct val="125000"/>
+                <a:spcPct val="110000"/>
               </a:lnSpc>
               <a:spcBef>
                 <a:spcPts val="0"/>
@@ -12999,7 +12999,7 @@
           <a:p>
             <a:pPr algn="just">
               <a:lnSpc>
-                <a:spcPct val="125000"/>
+                <a:spcPct val="110000"/>
               </a:lnSpc>
               <a:spcBef>
                 <a:spcPts val="0"/>
@@ -13021,7 +13021,7 @@
           <a:p>
             <a:pPr algn="just">
               <a:lnSpc>
-                <a:spcPct val="125000"/>
+                <a:spcPct val="110000"/>
               </a:lnSpc>
               <a:spcBef>
                 <a:spcPts val="0"/>
@@ -13043,7 +13043,7 @@
           <a:p>
             <a:pPr algn="just">
               <a:lnSpc>
-                <a:spcPct val="125000"/>
+                <a:spcPct val="110000"/>
               </a:lnSpc>
               <a:spcBef>
                 <a:spcPts val="0"/>
@@ -13065,7 +13065,7 @@
           <a:p>
             <a:pPr algn="just">
               <a:lnSpc>
-                <a:spcPct val="125000"/>
+                <a:spcPct val="110000"/>
               </a:lnSpc>
               <a:spcBef>
                 <a:spcPts val="0"/>
@@ -13179,7 +13179,7 @@
           <a:p>
             <a:pPr algn="just">
               <a:lnSpc>
-                <a:spcPct val="125000"/>
+                <a:spcPct val="110000"/>
               </a:lnSpc>
               <a:spcBef>
                 <a:spcPts val="0"/>
@@ -13201,7 +13201,7 @@
           <a:p>
             <a:pPr algn="just">
               <a:lnSpc>
-                <a:spcPct val="125000"/>
+                <a:spcPct val="110000"/>
               </a:lnSpc>
               <a:spcBef>
                 <a:spcPts val="0"/>
@@ -13223,7 +13223,7 @@
           <a:p>
             <a:pPr algn="just">
               <a:lnSpc>
-                <a:spcPct val="125000"/>
+                <a:spcPct val="110000"/>
               </a:lnSpc>
               <a:spcBef>
                 <a:spcPts val="0"/>
@@ -13245,7 +13245,7 @@
           <a:p>
             <a:pPr algn="just">
               <a:lnSpc>
-                <a:spcPct val="125000"/>
+                <a:spcPct val="110000"/>
               </a:lnSpc>
               <a:spcBef>
                 <a:spcPts val="0"/>
@@ -13267,7 +13267,7 @@
           <a:p>
             <a:pPr algn="just">
               <a:lnSpc>
-                <a:spcPct val="125000"/>
+                <a:spcPct val="110000"/>
               </a:lnSpc>
               <a:spcBef>
                 <a:spcPts val="0"/>
@@ -13289,7 +13289,7 @@
           <a:p>
             <a:pPr algn="just">
               <a:lnSpc>
-                <a:spcPct val="125000"/>
+                <a:spcPct val="110000"/>
               </a:lnSpc>
               <a:spcBef>
                 <a:spcPts val="0"/>
@@ -13311,7 +13311,7 @@
           <a:p>
             <a:pPr algn="just">
               <a:lnSpc>
-                <a:spcPct val="125000"/>
+                <a:spcPct val="110000"/>
               </a:lnSpc>
               <a:spcBef>
                 <a:spcPts val="0"/>
@@ -13333,7 +13333,7 @@
           <a:p>
             <a:pPr algn="just">
               <a:lnSpc>
-                <a:spcPct val="125000"/>
+                <a:spcPct val="110000"/>
               </a:lnSpc>
               <a:spcBef>
                 <a:spcPts val="0"/>
@@ -13355,7 +13355,7 @@
           <a:p>
             <a:pPr algn="just">
               <a:lnSpc>
-                <a:spcPct val="125000"/>
+                <a:spcPct val="110000"/>
               </a:lnSpc>
               <a:spcBef>
                 <a:spcPts val="0"/>
@@ -13377,7 +13377,7 @@
           <a:p>
             <a:pPr algn="just">
               <a:lnSpc>
-                <a:spcPct val="125000"/>
+                <a:spcPct val="110000"/>
               </a:lnSpc>
               <a:spcBef>
                 <a:spcPts val="0"/>
@@ -13399,7 +13399,7 @@
           <a:p>
             <a:pPr algn="just">
               <a:lnSpc>
-                <a:spcPct val="125000"/>
+                <a:spcPct val="110000"/>
               </a:lnSpc>
               <a:spcBef>
                 <a:spcPts val="0"/>
@@ -13421,7 +13421,7 @@
           <a:p>
             <a:pPr algn="just">
               <a:lnSpc>
-                <a:spcPct val="125000"/>
+                <a:spcPct val="110000"/>
               </a:lnSpc>
               <a:spcBef>
                 <a:spcPts val="0"/>
@@ -13443,7 +13443,7 @@
           <a:p>
             <a:pPr algn="just">
               <a:lnSpc>
-                <a:spcPct val="125000"/>
+                <a:spcPct val="110000"/>
               </a:lnSpc>
               <a:spcBef>
                 <a:spcPts val="0"/>
@@ -13465,7 +13465,7 @@
           <a:p>
             <a:pPr algn="just">
               <a:lnSpc>
-                <a:spcPct val="125000"/>
+                <a:spcPct val="110000"/>
               </a:lnSpc>
               <a:spcBef>
                 <a:spcPts val="0"/>
@@ -13579,7 +13579,7 @@
           <a:p>
             <a:pPr algn="just">
               <a:lnSpc>
-                <a:spcPct val="125000"/>
+                <a:spcPct val="110000"/>
               </a:lnSpc>
               <a:spcBef>
                 <a:spcPts val="0"/>
@@ -13601,7 +13601,7 @@
           <a:p>
             <a:pPr algn="just">
               <a:lnSpc>
-                <a:spcPct val="125000"/>
+                <a:spcPct val="110000"/>
               </a:lnSpc>
               <a:spcBef>
                 <a:spcPts val="0"/>
@@ -13623,7 +13623,7 @@
           <a:p>
             <a:pPr algn="just">
               <a:lnSpc>
-                <a:spcPct val="125000"/>
+                <a:spcPct val="110000"/>
               </a:lnSpc>
               <a:spcBef>
                 <a:spcPts val="0"/>
@@ -13645,7 +13645,7 @@
           <a:p>
             <a:pPr algn="just">
               <a:lnSpc>
-                <a:spcPct val="125000"/>
+                <a:spcPct val="110000"/>
               </a:lnSpc>
               <a:spcBef>
                 <a:spcPts val="0"/>
@@ -13667,7 +13667,7 @@
           <a:p>
             <a:pPr algn="just">
               <a:lnSpc>
-                <a:spcPct val="125000"/>
+                <a:spcPct val="110000"/>
               </a:lnSpc>
               <a:spcBef>
                 <a:spcPts val="0"/>
@@ -13689,7 +13689,7 @@
           <a:p>
             <a:pPr algn="just">
               <a:lnSpc>
-                <a:spcPct val="125000"/>
+                <a:spcPct val="110000"/>
               </a:lnSpc>
               <a:spcBef>
                 <a:spcPts val="0"/>
@@ -13711,7 +13711,7 @@
           <a:p>
             <a:pPr algn="just">
               <a:lnSpc>
-                <a:spcPct val="125000"/>
+                <a:spcPct val="110000"/>
               </a:lnSpc>
               <a:spcBef>
                 <a:spcPts val="0"/>
@@ -13733,7 +13733,7 @@
           <a:p>
             <a:pPr algn="just">
               <a:lnSpc>
-                <a:spcPct val="125000"/>
+                <a:spcPct val="110000"/>
               </a:lnSpc>
               <a:spcBef>
                 <a:spcPts val="0"/>
@@ -13755,7 +13755,7 @@
           <a:p>
             <a:pPr algn="just">
               <a:lnSpc>
-                <a:spcPct val="125000"/>
+                <a:spcPct val="110000"/>
               </a:lnSpc>
               <a:spcBef>
                 <a:spcPts val="0"/>
@@ -13869,7 +13869,7 @@
           <a:p>
             <a:pPr algn="just">
               <a:lnSpc>
-                <a:spcPct val="125000"/>
+                <a:spcPct val="110000"/>
               </a:lnSpc>
               <a:spcBef>
                 <a:spcPts val="0"/>
@@ -13891,7 +13891,7 @@
           <a:p>
             <a:pPr algn="just">
               <a:lnSpc>
-                <a:spcPct val="125000"/>
+                <a:spcPct val="110000"/>
               </a:lnSpc>
               <a:spcBef>
                 <a:spcPts val="0"/>
@@ -13913,7 +13913,7 @@
           <a:p>
             <a:pPr algn="just">
               <a:lnSpc>
-                <a:spcPct val="125000"/>
+                <a:spcPct val="110000"/>
               </a:lnSpc>
               <a:spcBef>
                 <a:spcPts val="0"/>
@@ -13935,7 +13935,7 @@
           <a:p>
             <a:pPr algn="just">
               <a:lnSpc>
-                <a:spcPct val="125000"/>
+                <a:spcPct val="110000"/>
               </a:lnSpc>
               <a:spcBef>
                 <a:spcPts val="0"/>
@@ -13957,7 +13957,7 @@
           <a:p>
             <a:pPr algn="just">
               <a:lnSpc>
-                <a:spcPct val="125000"/>
+                <a:spcPct val="110000"/>
               </a:lnSpc>
               <a:spcBef>
                 <a:spcPts val="0"/>
@@ -13979,7 +13979,7 @@
           <a:p>
             <a:pPr algn="just">
               <a:lnSpc>
-                <a:spcPct val="125000"/>
+                <a:spcPct val="110000"/>
               </a:lnSpc>
               <a:spcBef>
                 <a:spcPts val="0"/>
@@ -14001,7 +14001,7 @@
           <a:p>
             <a:pPr algn="just">
               <a:lnSpc>
-                <a:spcPct val="125000"/>
+                <a:spcPct val="110000"/>
               </a:lnSpc>
               <a:spcBef>
                 <a:spcPts val="0"/>
@@ -14023,7 +14023,7 @@
           <a:p>
             <a:pPr algn="just">
               <a:lnSpc>
-                <a:spcPct val="125000"/>
+                <a:spcPct val="110000"/>
               </a:lnSpc>
               <a:spcBef>
                 <a:spcPts val="0"/>
@@ -14045,7 +14045,7 @@
           <a:p>
             <a:pPr algn="just">
               <a:lnSpc>
-                <a:spcPct val="125000"/>
+                <a:spcPct val="110000"/>
               </a:lnSpc>
               <a:spcBef>
                 <a:spcPts val="0"/>
@@ -14067,7 +14067,7 @@
           <a:p>
             <a:pPr algn="just">
               <a:lnSpc>
-                <a:spcPct val="125000"/>
+                <a:spcPct val="110000"/>
               </a:lnSpc>
               <a:spcBef>
                 <a:spcPts val="0"/>
@@ -14181,7 +14181,7 @@
           <a:p>
             <a:pPr algn="just">
               <a:lnSpc>
-                <a:spcPct val="125000"/>
+                <a:spcPct val="110000"/>
               </a:lnSpc>
               <a:spcBef>
                 <a:spcPts val="0"/>
@@ -14203,7 +14203,7 @@
           <a:p>
             <a:pPr algn="just">
               <a:lnSpc>
-                <a:spcPct val="125000"/>
+                <a:spcPct val="110000"/>
               </a:lnSpc>
               <a:spcBef>
                 <a:spcPts val="0"/>
@@ -14225,7 +14225,7 @@
           <a:p>
             <a:pPr algn="just">
               <a:lnSpc>
-                <a:spcPct val="125000"/>
+                <a:spcPct val="110000"/>
               </a:lnSpc>
               <a:spcBef>
                 <a:spcPts val="0"/>
@@ -14247,7 +14247,7 @@
           <a:p>
             <a:pPr algn="just">
               <a:lnSpc>
-                <a:spcPct val="125000"/>
+                <a:spcPct val="110000"/>
               </a:lnSpc>
               <a:spcBef>
                 <a:spcPts val="0"/>
@@ -14269,7 +14269,7 @@
           <a:p>
             <a:pPr algn="just">
               <a:lnSpc>
-                <a:spcPct val="125000"/>
+                <a:spcPct val="110000"/>
               </a:lnSpc>
               <a:spcBef>
                 <a:spcPts val="0"/>
@@ -14291,7 +14291,7 @@
           <a:p>
             <a:pPr algn="just">
               <a:lnSpc>
-                <a:spcPct val="125000"/>
+                <a:spcPct val="110000"/>
               </a:lnSpc>
               <a:spcBef>
                 <a:spcPts val="0"/>
@@ -14313,7 +14313,7 @@
           <a:p>
             <a:pPr algn="just">
               <a:lnSpc>
-                <a:spcPct val="125000"/>
+                <a:spcPct val="110000"/>
               </a:lnSpc>
               <a:spcBef>
                 <a:spcPts val="0"/>
@@ -14335,7 +14335,7 @@
           <a:p>
             <a:pPr algn="just">
               <a:lnSpc>
-                <a:spcPct val="125000"/>
+                <a:spcPct val="110000"/>
               </a:lnSpc>
               <a:spcBef>
                 <a:spcPts val="0"/>
@@ -14357,7 +14357,7 @@
           <a:p>
             <a:pPr algn="just">
               <a:lnSpc>
-                <a:spcPct val="125000"/>
+                <a:spcPct val="110000"/>
               </a:lnSpc>
               <a:spcBef>
                 <a:spcPts val="0"/>
@@ -14379,7 +14379,7 @@
           <a:p>
             <a:pPr algn="just">
               <a:lnSpc>
-                <a:spcPct val="125000"/>
+                <a:spcPct val="110000"/>
               </a:lnSpc>
               <a:spcBef>
                 <a:spcPts val="0"/>
@@ -14493,7 +14493,7 @@
           <a:p>
             <a:pPr algn="just">
               <a:lnSpc>
-                <a:spcPct val="125000"/>
+                <a:spcPct val="110000"/>
               </a:lnSpc>
               <a:spcBef>
                 <a:spcPts val="0"/>
@@ -14515,7 +14515,7 @@
           <a:p>
             <a:pPr algn="just">
               <a:lnSpc>
-                <a:spcPct val="125000"/>
+                <a:spcPct val="110000"/>
               </a:lnSpc>
               <a:spcBef>
                 <a:spcPts val="0"/>
@@ -14537,7 +14537,7 @@
           <a:p>
             <a:pPr algn="just">
               <a:lnSpc>
-                <a:spcPct val="125000"/>
+                <a:spcPct val="110000"/>
               </a:lnSpc>
               <a:spcBef>
                 <a:spcPts val="0"/>
@@ -14559,7 +14559,7 @@
           <a:p>
             <a:pPr algn="just">
               <a:lnSpc>
-                <a:spcPct val="125000"/>
+                <a:spcPct val="110000"/>
               </a:lnSpc>
               <a:spcBef>
                 <a:spcPts val="0"/>
@@ -14581,7 +14581,7 @@
           <a:p>
             <a:pPr algn="just">
               <a:lnSpc>
-                <a:spcPct val="125000"/>
+                <a:spcPct val="110000"/>
               </a:lnSpc>
               <a:spcBef>
                 <a:spcPts val="0"/>
@@ -14603,7 +14603,7 @@
           <a:p>
             <a:pPr algn="just">
               <a:lnSpc>
-                <a:spcPct val="125000"/>
+                <a:spcPct val="110000"/>
               </a:lnSpc>
               <a:spcBef>
                 <a:spcPts val="0"/>
@@ -14625,7 +14625,7 @@
           <a:p>
             <a:pPr algn="just">
               <a:lnSpc>
-                <a:spcPct val="125000"/>
+                <a:spcPct val="110000"/>
               </a:lnSpc>
               <a:spcBef>
                 <a:spcPts val="0"/>
@@ -14647,7 +14647,7 @@
           <a:p>
             <a:pPr algn="just">
               <a:lnSpc>
-                <a:spcPct val="125000"/>
+                <a:spcPct val="110000"/>
               </a:lnSpc>
               <a:spcBef>
                 <a:spcPts val="0"/>
@@ -14669,7 +14669,7 @@
           <a:p>
             <a:pPr algn="just">
               <a:lnSpc>
-                <a:spcPct val="125000"/>
+                <a:spcPct val="110000"/>
               </a:lnSpc>
               <a:spcBef>
                 <a:spcPts val="0"/>
@@ -14691,7 +14691,7 @@
           <a:p>
             <a:pPr algn="just">
               <a:lnSpc>
-                <a:spcPct val="125000"/>
+                <a:spcPct val="110000"/>
               </a:lnSpc>
               <a:spcBef>
                 <a:spcPts val="0"/>
@@ -14805,7 +14805,7 @@
           <a:p>
             <a:pPr algn="just">
               <a:lnSpc>
-                <a:spcPct val="125000"/>
+                <a:spcPct val="110000"/>
               </a:lnSpc>
               <a:spcBef>
                 <a:spcPts val="0"/>
@@ -14827,7 +14827,7 @@
           <a:p>
             <a:pPr algn="just">
               <a:lnSpc>
-                <a:spcPct val="125000"/>
+                <a:spcPct val="110000"/>
               </a:lnSpc>
               <a:spcBef>
                 <a:spcPts val="0"/>
@@ -14849,7 +14849,7 @@
           <a:p>
             <a:pPr algn="just">
               <a:lnSpc>
-                <a:spcPct val="125000"/>
+                <a:spcPct val="110000"/>
               </a:lnSpc>
               <a:spcBef>
                 <a:spcPts val="0"/>
@@ -14871,7 +14871,7 @@
           <a:p>
             <a:pPr algn="just">
               <a:lnSpc>
-                <a:spcPct val="125000"/>
+                <a:spcPct val="110000"/>
               </a:lnSpc>
               <a:spcBef>
                 <a:spcPts val="0"/>
@@ -14893,7 +14893,7 @@
           <a:p>
             <a:pPr algn="just">
               <a:lnSpc>
-                <a:spcPct val="125000"/>
+                <a:spcPct val="110000"/>
               </a:lnSpc>
               <a:spcBef>
                 <a:spcPts val="0"/>
@@ -14915,7 +14915,7 @@
           <a:p>
             <a:pPr algn="just">
               <a:lnSpc>
-                <a:spcPct val="125000"/>
+                <a:spcPct val="110000"/>
               </a:lnSpc>
               <a:spcBef>
                 <a:spcPts val="0"/>
@@ -14937,7 +14937,7 @@
           <a:p>
             <a:pPr algn="just">
               <a:lnSpc>
-                <a:spcPct val="125000"/>
+                <a:spcPct val="110000"/>
               </a:lnSpc>
               <a:spcBef>
                 <a:spcPts val="0"/>
@@ -14959,7 +14959,7 @@
           <a:p>
             <a:pPr algn="just">
               <a:lnSpc>
-                <a:spcPct val="125000"/>
+                <a:spcPct val="110000"/>
               </a:lnSpc>
               <a:spcBef>
                 <a:spcPts val="0"/>
@@ -14981,7 +14981,7 @@
           <a:p>
             <a:pPr algn="just">
               <a:lnSpc>
-                <a:spcPct val="125000"/>
+                <a:spcPct val="110000"/>
               </a:lnSpc>
               <a:spcBef>
                 <a:spcPts val="0"/>

--- a/ppts_output_v3/01_增值税风险指引.pptx
+++ b/ppts_output_v3/01_增值税风险指引.pptx
@@ -3135,13 +3135,56 @@
       <p:grpSpPr/>
       <p:sp>
         <p:nvSpPr>
-          <p:cNvPr id="2" name="TextBox 1"/>
+          <p:cNvPr id="2" name="Oval 1"/>
+          <p:cNvSpPr/>
+          <p:nvPr/>
+        </p:nvSpPr>
+        <p:spPr>
+          <a:xfrm>
+            <a:off x="3353104" y="274320"/>
+            <a:ext cx="5486400" cy="5486400"/>
+          </a:xfrm>
+          <a:prstGeom prst="ellipse">
+            <a:avLst/>
+          </a:prstGeom>
+          <a:solidFill>
+            <a:srgbClr val="577698"/>
+          </a:solidFill>
+          <a:ln>
+            <a:noFill/>
+          </a:ln>
+        </p:spPr>
+        <p:style>
+          <a:lnRef idx="1">
+            <a:schemeClr val="accent1"/>
+          </a:lnRef>
+          <a:fillRef idx="3">
+            <a:schemeClr val="accent1"/>
+          </a:fillRef>
+          <a:effectRef idx="2">
+            <a:schemeClr val="accent1"/>
+          </a:effectRef>
+          <a:fontRef idx="minor">
+            <a:schemeClr val="lt1"/>
+          </a:fontRef>
+        </p:style>
+        <p:txBody>
+          <a:bodyPr rtlCol="0" anchor="ctr"/>
+          <a:lstStyle/>
+          <a:p>
+            <a:pPr algn="ctr"/>
+          </a:p>
+        </p:txBody>
+      </p:sp>
+      <p:sp>
+        <p:nvSpPr>
+          <p:cNvPr id="3" name="TextBox 2"/>
           <p:cNvSpPr txBox="1"/>
           <p:nvPr/>
         </p:nvSpPr>
         <p:spPr>
           <a:xfrm>
-            <a:off x="731520" y="1371600"/>
+            <a:off x="731520" y="1645920"/>
             <a:ext cx="10728655" cy="2286000"/>
           </a:xfrm>
           <a:prstGeom prst="rect">
@@ -3170,14 +3213,57 @@
       </p:sp>
       <p:sp>
         <p:nvSpPr>
-          <p:cNvPr id="3" name="TextBox 2"/>
+          <p:cNvPr id="4" name="Rectangle 3"/>
+          <p:cNvSpPr/>
+          <p:nvPr/>
+        </p:nvSpPr>
+        <p:spPr>
+          <a:xfrm>
+            <a:off x="4114800" y="3749039"/>
+            <a:ext cx="3962095" cy="18288"/>
+          </a:xfrm>
+          <a:prstGeom prst="rect">
+            <a:avLst/>
+          </a:prstGeom>
+          <a:solidFill>
+            <a:srgbClr val="FFFFFF"/>
+          </a:solidFill>
+          <a:ln>
+            <a:noFill/>
+          </a:ln>
+        </p:spPr>
+        <p:style>
+          <a:lnRef idx="1">
+            <a:schemeClr val="accent1"/>
+          </a:lnRef>
+          <a:fillRef idx="3">
+            <a:schemeClr val="accent1"/>
+          </a:fillRef>
+          <a:effectRef idx="2">
+            <a:schemeClr val="accent1"/>
+          </a:effectRef>
+          <a:fontRef idx="minor">
+            <a:schemeClr val="lt1"/>
+          </a:fontRef>
+        </p:style>
+        <p:txBody>
+          <a:bodyPr rtlCol="0" anchor="ctr"/>
+          <a:lstStyle/>
+          <a:p>
+            <a:pPr algn="ctr"/>
+          </a:p>
+        </p:txBody>
+      </p:sp>
+      <p:sp>
+        <p:nvSpPr>
+          <p:cNvPr id="5" name="TextBox 4"/>
           <p:cNvSpPr txBox="1"/>
           <p:nvPr/>
         </p:nvSpPr>
         <p:spPr>
           <a:xfrm>
-            <a:off x="731520" y="3840480"/>
-            <a:ext cx="10728655" cy="731520"/>
+            <a:off x="731520" y="3931920"/>
+            <a:ext cx="10728655" cy="548640"/>
           </a:xfrm>
           <a:prstGeom prst="rect">
             <a:avLst/>
@@ -3193,7 +3279,7 @@
             <a:pPr algn="ctr">
               <a:defRPr sz="2200">
                 <a:solidFill>
-                  <a:srgbClr val="AABBCC"/>
+                  <a:srgbClr val="CCCCCC"/>
                 </a:solidFill>
               </a:defRPr>
             </a:pPr>
@@ -3205,7 +3291,7 @@
       </p:sp>
       <p:sp>
         <p:nvSpPr>
-          <p:cNvPr id="4" name="TextBox 3"/>
+          <p:cNvPr id="6" name="TextBox 5"/>
           <p:cNvSpPr txBox="1"/>
           <p:nvPr/>
         </p:nvSpPr>
@@ -3228,7 +3314,7 @@
             <a:pPr algn="ctr">
               <a:defRPr sz="1600">
                 <a:solidFill>
-                  <a:srgbClr val="8899AA"/>
+                  <a:srgbClr val="AABBCC"/>
                 </a:solidFill>
               </a:defRPr>
             </a:pPr>
@@ -3550,6 +3636,49 @@
           </a:p>
         </p:txBody>
       </p:sp>
+      <p:sp>
+        <p:nvSpPr>
+          <p:cNvPr id="4" name="Rectangle 3"/>
+          <p:cNvSpPr/>
+          <p:nvPr/>
+        </p:nvSpPr>
+        <p:spPr>
+          <a:xfrm>
+            <a:off x="457200" y="6720840"/>
+            <a:ext cx="11277295" cy="27432"/>
+          </a:xfrm>
+          <a:prstGeom prst="rect">
+            <a:avLst/>
+          </a:prstGeom>
+          <a:solidFill>
+            <a:srgbClr val="1B3A5C"/>
+          </a:solidFill>
+          <a:ln>
+            <a:noFill/>
+          </a:ln>
+        </p:spPr>
+        <p:style>
+          <a:lnRef idx="1">
+            <a:schemeClr val="accent1"/>
+          </a:lnRef>
+          <a:fillRef idx="3">
+            <a:schemeClr val="accent1"/>
+          </a:fillRef>
+          <a:effectRef idx="2">
+            <a:schemeClr val="accent1"/>
+          </a:effectRef>
+          <a:fontRef idx="minor">
+            <a:schemeClr val="lt1"/>
+          </a:fontRef>
+        </p:style>
+        <p:txBody>
+          <a:bodyPr rtlCol="0" anchor="ctr"/>
+          <a:lstStyle/>
+          <a:p>
+            <a:pPr algn="ctr"/>
+          </a:p>
+        </p:txBody>
+      </p:sp>
     </p:spTree>
   </p:cSld>
   <p:clrMapOvr>
@@ -3840,6 +3969,49 @@
           </a:p>
         </p:txBody>
       </p:sp>
+      <p:sp>
+        <p:nvSpPr>
+          <p:cNvPr id="4" name="Rectangle 3"/>
+          <p:cNvSpPr/>
+          <p:nvPr/>
+        </p:nvSpPr>
+        <p:spPr>
+          <a:xfrm>
+            <a:off x="457200" y="6720840"/>
+            <a:ext cx="11277295" cy="27432"/>
+          </a:xfrm>
+          <a:prstGeom prst="rect">
+            <a:avLst/>
+          </a:prstGeom>
+          <a:solidFill>
+            <a:srgbClr val="1B3A5C"/>
+          </a:solidFill>
+          <a:ln>
+            <a:noFill/>
+          </a:ln>
+        </p:spPr>
+        <p:style>
+          <a:lnRef idx="1">
+            <a:schemeClr val="accent1"/>
+          </a:lnRef>
+          <a:fillRef idx="3">
+            <a:schemeClr val="accent1"/>
+          </a:fillRef>
+          <a:effectRef idx="2">
+            <a:schemeClr val="accent1"/>
+          </a:effectRef>
+          <a:fontRef idx="minor">
+            <a:schemeClr val="lt1"/>
+          </a:fontRef>
+        </p:style>
+        <p:txBody>
+          <a:bodyPr rtlCol="0" anchor="ctr"/>
+          <a:lstStyle/>
+          <a:p>
+            <a:pPr algn="ctr"/>
+          </a:p>
+        </p:txBody>
+      </p:sp>
     </p:spTree>
   </p:cSld>
   <p:clrMapOvr>
@@ -4174,6 +4346,49 @@
           </a:p>
         </p:txBody>
       </p:sp>
+      <p:sp>
+        <p:nvSpPr>
+          <p:cNvPr id="4" name="Rectangle 3"/>
+          <p:cNvSpPr/>
+          <p:nvPr/>
+        </p:nvSpPr>
+        <p:spPr>
+          <a:xfrm>
+            <a:off x="457200" y="6720840"/>
+            <a:ext cx="11277295" cy="27432"/>
+          </a:xfrm>
+          <a:prstGeom prst="rect">
+            <a:avLst/>
+          </a:prstGeom>
+          <a:solidFill>
+            <a:srgbClr val="1B3A5C"/>
+          </a:solidFill>
+          <a:ln>
+            <a:noFill/>
+          </a:ln>
+        </p:spPr>
+        <p:style>
+          <a:lnRef idx="1">
+            <a:schemeClr val="accent1"/>
+          </a:lnRef>
+          <a:fillRef idx="3">
+            <a:schemeClr val="accent1"/>
+          </a:fillRef>
+          <a:effectRef idx="2">
+            <a:schemeClr val="accent1"/>
+          </a:effectRef>
+          <a:fontRef idx="minor">
+            <a:schemeClr val="lt1"/>
+          </a:fontRef>
+        </p:style>
+        <p:txBody>
+          <a:bodyPr rtlCol="0" anchor="ctr"/>
+          <a:lstStyle/>
+          <a:p>
+            <a:pPr algn="ctr"/>
+          </a:p>
+        </p:txBody>
+      </p:sp>
     </p:spTree>
   </p:cSld>
   <p:clrMapOvr>
@@ -4486,6 +4701,49 @@
           </a:p>
         </p:txBody>
       </p:sp>
+      <p:sp>
+        <p:nvSpPr>
+          <p:cNvPr id="4" name="Rectangle 3"/>
+          <p:cNvSpPr/>
+          <p:nvPr/>
+        </p:nvSpPr>
+        <p:spPr>
+          <a:xfrm>
+            <a:off x="457200" y="6720840"/>
+            <a:ext cx="11277295" cy="27432"/>
+          </a:xfrm>
+          <a:prstGeom prst="rect">
+            <a:avLst/>
+          </a:prstGeom>
+          <a:solidFill>
+            <a:srgbClr val="1B3A5C"/>
+          </a:solidFill>
+          <a:ln>
+            <a:noFill/>
+          </a:ln>
+        </p:spPr>
+        <p:style>
+          <a:lnRef idx="1">
+            <a:schemeClr val="accent1"/>
+          </a:lnRef>
+          <a:fillRef idx="3">
+            <a:schemeClr val="accent1"/>
+          </a:fillRef>
+          <a:effectRef idx="2">
+            <a:schemeClr val="accent1"/>
+          </a:effectRef>
+          <a:fontRef idx="minor">
+            <a:schemeClr val="lt1"/>
+          </a:fontRef>
+        </p:style>
+        <p:txBody>
+          <a:bodyPr rtlCol="0" anchor="ctr"/>
+          <a:lstStyle/>
+          <a:p>
+            <a:pPr algn="ctr"/>
+          </a:p>
+        </p:txBody>
+      </p:sp>
     </p:spTree>
   </p:cSld>
   <p:clrMapOvr>
@@ -4820,6 +5078,49 @@
           </a:p>
         </p:txBody>
       </p:sp>
+      <p:sp>
+        <p:nvSpPr>
+          <p:cNvPr id="4" name="Rectangle 3"/>
+          <p:cNvSpPr/>
+          <p:nvPr/>
+        </p:nvSpPr>
+        <p:spPr>
+          <a:xfrm>
+            <a:off x="457200" y="6720840"/>
+            <a:ext cx="11277295" cy="27432"/>
+          </a:xfrm>
+          <a:prstGeom prst="rect">
+            <a:avLst/>
+          </a:prstGeom>
+          <a:solidFill>
+            <a:srgbClr val="1B3A5C"/>
+          </a:solidFill>
+          <a:ln>
+            <a:noFill/>
+          </a:ln>
+        </p:spPr>
+        <p:style>
+          <a:lnRef idx="1">
+            <a:schemeClr val="accent1"/>
+          </a:lnRef>
+          <a:fillRef idx="3">
+            <a:schemeClr val="accent1"/>
+          </a:fillRef>
+          <a:effectRef idx="2">
+            <a:schemeClr val="accent1"/>
+          </a:effectRef>
+          <a:fontRef idx="minor">
+            <a:schemeClr val="lt1"/>
+          </a:fontRef>
+        </p:style>
+        <p:txBody>
+          <a:bodyPr rtlCol="0" anchor="ctr"/>
+          <a:lstStyle/>
+          <a:p>
+            <a:pPr algn="ctr"/>
+          </a:p>
+        </p:txBody>
+      </p:sp>
     </p:spTree>
   </p:cSld>
   <p:clrMapOvr>
@@ -5110,6 +5411,49 @@
           </a:p>
         </p:txBody>
       </p:sp>
+      <p:sp>
+        <p:nvSpPr>
+          <p:cNvPr id="4" name="Rectangle 3"/>
+          <p:cNvSpPr/>
+          <p:nvPr/>
+        </p:nvSpPr>
+        <p:spPr>
+          <a:xfrm>
+            <a:off x="457200" y="6720840"/>
+            <a:ext cx="11277295" cy="27432"/>
+          </a:xfrm>
+          <a:prstGeom prst="rect">
+            <a:avLst/>
+          </a:prstGeom>
+          <a:solidFill>
+            <a:srgbClr val="1B3A5C"/>
+          </a:solidFill>
+          <a:ln>
+            <a:noFill/>
+          </a:ln>
+        </p:spPr>
+        <p:style>
+          <a:lnRef idx="1">
+            <a:schemeClr val="accent1"/>
+          </a:lnRef>
+          <a:fillRef idx="3">
+            <a:schemeClr val="accent1"/>
+          </a:fillRef>
+          <a:effectRef idx="2">
+            <a:schemeClr val="accent1"/>
+          </a:effectRef>
+          <a:fontRef idx="minor">
+            <a:schemeClr val="lt1"/>
+          </a:fontRef>
+        </p:style>
+        <p:txBody>
+          <a:bodyPr rtlCol="0" anchor="ctr"/>
+          <a:lstStyle/>
+          <a:p>
+            <a:pPr algn="ctr"/>
+          </a:p>
+        </p:txBody>
+      </p:sp>
     </p:spTree>
   </p:cSld>
   <p:clrMapOvr>
@@ -5422,6 +5766,49 @@
           </a:p>
         </p:txBody>
       </p:sp>
+      <p:sp>
+        <p:nvSpPr>
+          <p:cNvPr id="4" name="Rectangle 3"/>
+          <p:cNvSpPr/>
+          <p:nvPr/>
+        </p:nvSpPr>
+        <p:spPr>
+          <a:xfrm>
+            <a:off x="457200" y="6720840"/>
+            <a:ext cx="11277295" cy="27432"/>
+          </a:xfrm>
+          <a:prstGeom prst="rect">
+            <a:avLst/>
+          </a:prstGeom>
+          <a:solidFill>
+            <a:srgbClr val="1B3A5C"/>
+          </a:solidFill>
+          <a:ln>
+            <a:noFill/>
+          </a:ln>
+        </p:spPr>
+        <p:style>
+          <a:lnRef idx="1">
+            <a:schemeClr val="accent1"/>
+          </a:lnRef>
+          <a:fillRef idx="3">
+            <a:schemeClr val="accent1"/>
+          </a:fillRef>
+          <a:effectRef idx="2">
+            <a:schemeClr val="accent1"/>
+          </a:effectRef>
+          <a:fontRef idx="minor">
+            <a:schemeClr val="lt1"/>
+          </a:fontRef>
+        </p:style>
+        <p:txBody>
+          <a:bodyPr rtlCol="0" anchor="ctr"/>
+          <a:lstStyle/>
+          <a:p>
+            <a:pPr algn="ctr"/>
+          </a:p>
+        </p:txBody>
+      </p:sp>
     </p:spTree>
   </p:cSld>
   <p:clrMapOvr>
@@ -5756,6 +6143,49 @@
           </a:p>
         </p:txBody>
       </p:sp>
+      <p:sp>
+        <p:nvSpPr>
+          <p:cNvPr id="4" name="Rectangle 3"/>
+          <p:cNvSpPr/>
+          <p:nvPr/>
+        </p:nvSpPr>
+        <p:spPr>
+          <a:xfrm>
+            <a:off x="457200" y="6720840"/>
+            <a:ext cx="11277295" cy="27432"/>
+          </a:xfrm>
+          <a:prstGeom prst="rect">
+            <a:avLst/>
+          </a:prstGeom>
+          <a:solidFill>
+            <a:srgbClr val="1B3A5C"/>
+          </a:solidFill>
+          <a:ln>
+            <a:noFill/>
+          </a:ln>
+        </p:spPr>
+        <p:style>
+          <a:lnRef idx="1">
+            <a:schemeClr val="accent1"/>
+          </a:lnRef>
+          <a:fillRef idx="3">
+            <a:schemeClr val="accent1"/>
+          </a:fillRef>
+          <a:effectRef idx="2">
+            <a:schemeClr val="accent1"/>
+          </a:effectRef>
+          <a:fontRef idx="minor">
+            <a:schemeClr val="lt1"/>
+          </a:fontRef>
+        </p:style>
+        <p:txBody>
+          <a:bodyPr rtlCol="0" anchor="ctr"/>
+          <a:lstStyle/>
+          <a:p>
+            <a:pPr algn="ctr"/>
+          </a:p>
+        </p:txBody>
+      </p:sp>
     </p:spTree>
   </p:cSld>
   <p:clrMapOvr>
@@ -6068,6 +6498,49 @@
           </a:p>
         </p:txBody>
       </p:sp>
+      <p:sp>
+        <p:nvSpPr>
+          <p:cNvPr id="4" name="Rectangle 3"/>
+          <p:cNvSpPr/>
+          <p:nvPr/>
+        </p:nvSpPr>
+        <p:spPr>
+          <a:xfrm>
+            <a:off x="457200" y="6720840"/>
+            <a:ext cx="11277295" cy="27432"/>
+          </a:xfrm>
+          <a:prstGeom prst="rect">
+            <a:avLst/>
+          </a:prstGeom>
+          <a:solidFill>
+            <a:srgbClr val="1B3A5C"/>
+          </a:solidFill>
+          <a:ln>
+            <a:noFill/>
+          </a:ln>
+        </p:spPr>
+        <p:style>
+          <a:lnRef idx="1">
+            <a:schemeClr val="accent1"/>
+          </a:lnRef>
+          <a:fillRef idx="3">
+            <a:schemeClr val="accent1"/>
+          </a:fillRef>
+          <a:effectRef idx="2">
+            <a:schemeClr val="accent1"/>
+          </a:effectRef>
+          <a:fontRef idx="minor">
+            <a:schemeClr val="lt1"/>
+          </a:fontRef>
+        </p:style>
+        <p:txBody>
+          <a:bodyPr rtlCol="0" anchor="ctr"/>
+          <a:lstStyle/>
+          <a:p>
+            <a:pPr algn="ctr"/>
+          </a:p>
+        </p:txBody>
+      </p:sp>
     </p:spTree>
   </p:cSld>
   <p:clrMapOvr>
@@ -6380,6 +6853,49 @@
           </a:p>
         </p:txBody>
       </p:sp>
+      <p:sp>
+        <p:nvSpPr>
+          <p:cNvPr id="4" name="Rectangle 3"/>
+          <p:cNvSpPr/>
+          <p:nvPr/>
+        </p:nvSpPr>
+        <p:spPr>
+          <a:xfrm>
+            <a:off x="457200" y="6720840"/>
+            <a:ext cx="11277295" cy="27432"/>
+          </a:xfrm>
+          <a:prstGeom prst="rect">
+            <a:avLst/>
+          </a:prstGeom>
+          <a:solidFill>
+            <a:srgbClr val="1B3A5C"/>
+          </a:solidFill>
+          <a:ln>
+            <a:noFill/>
+          </a:ln>
+        </p:spPr>
+        <p:style>
+          <a:lnRef idx="1">
+            <a:schemeClr val="accent1"/>
+          </a:lnRef>
+          <a:fillRef idx="3">
+            <a:schemeClr val="accent1"/>
+          </a:fillRef>
+          <a:effectRef idx="2">
+            <a:schemeClr val="accent1"/>
+          </a:effectRef>
+          <a:fontRef idx="minor">
+            <a:schemeClr val="lt1"/>
+          </a:fontRef>
+        </p:style>
+        <p:txBody>
+          <a:bodyPr rtlCol="0" anchor="ctr"/>
+          <a:lstStyle/>
+          <a:p>
+            <a:pPr algn="ctr"/>
+          </a:p>
+        </p:txBody>
+      </p:sp>
     </p:spTree>
   </p:cSld>
   <p:clrMapOvr>
@@ -6758,6 +7274,49 @@
           </a:p>
         </p:txBody>
       </p:sp>
+      <p:sp>
+        <p:nvSpPr>
+          <p:cNvPr id="4" name="Rectangle 3"/>
+          <p:cNvSpPr/>
+          <p:nvPr/>
+        </p:nvSpPr>
+        <p:spPr>
+          <a:xfrm>
+            <a:off x="457200" y="6720840"/>
+            <a:ext cx="11277295" cy="27432"/>
+          </a:xfrm>
+          <a:prstGeom prst="rect">
+            <a:avLst/>
+          </a:prstGeom>
+          <a:solidFill>
+            <a:srgbClr val="1B3A5C"/>
+          </a:solidFill>
+          <a:ln>
+            <a:noFill/>
+          </a:ln>
+        </p:spPr>
+        <p:style>
+          <a:lnRef idx="1">
+            <a:schemeClr val="accent1"/>
+          </a:lnRef>
+          <a:fillRef idx="3">
+            <a:schemeClr val="accent1"/>
+          </a:fillRef>
+          <a:effectRef idx="2">
+            <a:schemeClr val="accent1"/>
+          </a:effectRef>
+          <a:fontRef idx="minor">
+            <a:schemeClr val="lt1"/>
+          </a:fontRef>
+        </p:style>
+        <p:txBody>
+          <a:bodyPr rtlCol="0" anchor="ctr"/>
+          <a:lstStyle/>
+          <a:p>
+            <a:pPr algn="ctr"/>
+          </a:p>
+        </p:txBody>
+      </p:sp>
     </p:spTree>
   </p:cSld>
   <p:clrMapOvr>
@@ -7070,6 +7629,49 @@
           </a:p>
         </p:txBody>
       </p:sp>
+      <p:sp>
+        <p:nvSpPr>
+          <p:cNvPr id="4" name="Rectangle 3"/>
+          <p:cNvSpPr/>
+          <p:nvPr/>
+        </p:nvSpPr>
+        <p:spPr>
+          <a:xfrm>
+            <a:off x="457200" y="6720840"/>
+            <a:ext cx="11277295" cy="27432"/>
+          </a:xfrm>
+          <a:prstGeom prst="rect">
+            <a:avLst/>
+          </a:prstGeom>
+          <a:solidFill>
+            <a:srgbClr val="1B3A5C"/>
+          </a:solidFill>
+          <a:ln>
+            <a:noFill/>
+          </a:ln>
+        </p:spPr>
+        <p:style>
+          <a:lnRef idx="1">
+            <a:schemeClr val="accent1"/>
+          </a:lnRef>
+          <a:fillRef idx="3">
+            <a:schemeClr val="accent1"/>
+          </a:fillRef>
+          <a:effectRef idx="2">
+            <a:schemeClr val="accent1"/>
+          </a:effectRef>
+          <a:fontRef idx="minor">
+            <a:schemeClr val="lt1"/>
+          </a:fontRef>
+        </p:style>
+        <p:txBody>
+          <a:bodyPr rtlCol="0" anchor="ctr"/>
+          <a:lstStyle/>
+          <a:p>
+            <a:pPr algn="ctr"/>
+          </a:p>
+        </p:txBody>
+      </p:sp>
     </p:spTree>
   </p:cSld>
   <p:clrMapOvr>
@@ -7382,6 +7984,49 @@
           </a:p>
         </p:txBody>
       </p:sp>
+      <p:sp>
+        <p:nvSpPr>
+          <p:cNvPr id="4" name="Rectangle 3"/>
+          <p:cNvSpPr/>
+          <p:nvPr/>
+        </p:nvSpPr>
+        <p:spPr>
+          <a:xfrm>
+            <a:off x="457200" y="6720840"/>
+            <a:ext cx="11277295" cy="27432"/>
+          </a:xfrm>
+          <a:prstGeom prst="rect">
+            <a:avLst/>
+          </a:prstGeom>
+          <a:solidFill>
+            <a:srgbClr val="1B3A5C"/>
+          </a:solidFill>
+          <a:ln>
+            <a:noFill/>
+          </a:ln>
+        </p:spPr>
+        <p:style>
+          <a:lnRef idx="1">
+            <a:schemeClr val="accent1"/>
+          </a:lnRef>
+          <a:fillRef idx="3">
+            <a:schemeClr val="accent1"/>
+          </a:fillRef>
+          <a:effectRef idx="2">
+            <a:schemeClr val="accent1"/>
+          </a:effectRef>
+          <a:fontRef idx="minor">
+            <a:schemeClr val="lt1"/>
+          </a:fontRef>
+        </p:style>
+        <p:txBody>
+          <a:bodyPr rtlCol="0" anchor="ctr"/>
+          <a:lstStyle/>
+          <a:p>
+            <a:pPr algn="ctr"/>
+          </a:p>
+        </p:txBody>
+      </p:sp>
     </p:spTree>
   </p:cSld>
   <p:clrMapOvr>
@@ -7672,6 +8317,49 @@
           </a:p>
         </p:txBody>
       </p:sp>
+      <p:sp>
+        <p:nvSpPr>
+          <p:cNvPr id="4" name="Rectangle 3"/>
+          <p:cNvSpPr/>
+          <p:nvPr/>
+        </p:nvSpPr>
+        <p:spPr>
+          <a:xfrm>
+            <a:off x="457200" y="6720840"/>
+            <a:ext cx="11277295" cy="27432"/>
+          </a:xfrm>
+          <a:prstGeom prst="rect">
+            <a:avLst/>
+          </a:prstGeom>
+          <a:solidFill>
+            <a:srgbClr val="1B3A5C"/>
+          </a:solidFill>
+          <a:ln>
+            <a:noFill/>
+          </a:ln>
+        </p:spPr>
+        <p:style>
+          <a:lnRef idx="1">
+            <a:schemeClr val="accent1"/>
+          </a:lnRef>
+          <a:fillRef idx="3">
+            <a:schemeClr val="accent1"/>
+          </a:fillRef>
+          <a:effectRef idx="2">
+            <a:schemeClr val="accent1"/>
+          </a:effectRef>
+          <a:fontRef idx="minor">
+            <a:schemeClr val="lt1"/>
+          </a:fontRef>
+        </p:style>
+        <p:txBody>
+          <a:bodyPr rtlCol="0" anchor="ctr"/>
+          <a:lstStyle/>
+          <a:p>
+            <a:pPr algn="ctr"/>
+          </a:p>
+        </p:txBody>
+      </p:sp>
     </p:spTree>
   </p:cSld>
   <p:clrMapOvr>
@@ -8028,6 +8716,49 @@
           </a:p>
         </p:txBody>
       </p:sp>
+      <p:sp>
+        <p:nvSpPr>
+          <p:cNvPr id="4" name="Rectangle 3"/>
+          <p:cNvSpPr/>
+          <p:nvPr/>
+        </p:nvSpPr>
+        <p:spPr>
+          <a:xfrm>
+            <a:off x="457200" y="6720840"/>
+            <a:ext cx="11277295" cy="27432"/>
+          </a:xfrm>
+          <a:prstGeom prst="rect">
+            <a:avLst/>
+          </a:prstGeom>
+          <a:solidFill>
+            <a:srgbClr val="1B3A5C"/>
+          </a:solidFill>
+          <a:ln>
+            <a:noFill/>
+          </a:ln>
+        </p:spPr>
+        <p:style>
+          <a:lnRef idx="1">
+            <a:schemeClr val="accent1"/>
+          </a:lnRef>
+          <a:fillRef idx="3">
+            <a:schemeClr val="accent1"/>
+          </a:fillRef>
+          <a:effectRef idx="2">
+            <a:schemeClr val="accent1"/>
+          </a:effectRef>
+          <a:fontRef idx="minor">
+            <a:schemeClr val="lt1"/>
+          </a:fontRef>
+        </p:style>
+        <p:txBody>
+          <a:bodyPr rtlCol="0" anchor="ctr"/>
+          <a:lstStyle/>
+          <a:p>
+            <a:pPr algn="ctr"/>
+          </a:p>
+        </p:txBody>
+      </p:sp>
     </p:spTree>
   </p:cSld>
   <p:clrMapOvr>
@@ -8340,6 +9071,49 @@
           </a:p>
         </p:txBody>
       </p:sp>
+      <p:sp>
+        <p:nvSpPr>
+          <p:cNvPr id="4" name="Rectangle 3"/>
+          <p:cNvSpPr/>
+          <p:nvPr/>
+        </p:nvSpPr>
+        <p:spPr>
+          <a:xfrm>
+            <a:off x="457200" y="6720840"/>
+            <a:ext cx="11277295" cy="27432"/>
+          </a:xfrm>
+          <a:prstGeom prst="rect">
+            <a:avLst/>
+          </a:prstGeom>
+          <a:solidFill>
+            <a:srgbClr val="1B3A5C"/>
+          </a:solidFill>
+          <a:ln>
+            <a:noFill/>
+          </a:ln>
+        </p:spPr>
+        <p:style>
+          <a:lnRef idx="1">
+            <a:schemeClr val="accent1"/>
+          </a:lnRef>
+          <a:fillRef idx="3">
+            <a:schemeClr val="accent1"/>
+          </a:fillRef>
+          <a:effectRef idx="2">
+            <a:schemeClr val="accent1"/>
+          </a:effectRef>
+          <a:fontRef idx="minor">
+            <a:schemeClr val="lt1"/>
+          </a:fontRef>
+        </p:style>
+        <p:txBody>
+          <a:bodyPr rtlCol="0" anchor="ctr"/>
+          <a:lstStyle/>
+          <a:p>
+            <a:pPr algn="ctr"/>
+          </a:p>
+        </p:txBody>
+      </p:sp>
     </p:spTree>
   </p:cSld>
   <p:clrMapOvr>
@@ -8762,6 +9536,49 @@
           </a:p>
         </p:txBody>
       </p:sp>
+      <p:sp>
+        <p:nvSpPr>
+          <p:cNvPr id="4" name="Rectangle 3"/>
+          <p:cNvSpPr/>
+          <p:nvPr/>
+        </p:nvSpPr>
+        <p:spPr>
+          <a:xfrm>
+            <a:off x="457200" y="6720840"/>
+            <a:ext cx="11277295" cy="27432"/>
+          </a:xfrm>
+          <a:prstGeom prst="rect">
+            <a:avLst/>
+          </a:prstGeom>
+          <a:solidFill>
+            <a:srgbClr val="1B3A5C"/>
+          </a:solidFill>
+          <a:ln>
+            <a:noFill/>
+          </a:ln>
+        </p:spPr>
+        <p:style>
+          <a:lnRef idx="1">
+            <a:schemeClr val="accent1"/>
+          </a:lnRef>
+          <a:fillRef idx="3">
+            <a:schemeClr val="accent1"/>
+          </a:fillRef>
+          <a:effectRef idx="2">
+            <a:schemeClr val="accent1"/>
+          </a:effectRef>
+          <a:fontRef idx="minor">
+            <a:schemeClr val="lt1"/>
+          </a:fontRef>
+        </p:style>
+        <p:txBody>
+          <a:bodyPr rtlCol="0" anchor="ctr"/>
+          <a:lstStyle/>
+          <a:p>
+            <a:pPr algn="ctr"/>
+          </a:p>
+        </p:txBody>
+      </p:sp>
     </p:spTree>
   </p:cSld>
   <p:clrMapOvr>
@@ -9074,6 +9891,49 @@
           </a:p>
         </p:txBody>
       </p:sp>
+      <p:sp>
+        <p:nvSpPr>
+          <p:cNvPr id="4" name="Rectangle 3"/>
+          <p:cNvSpPr/>
+          <p:nvPr/>
+        </p:nvSpPr>
+        <p:spPr>
+          <a:xfrm>
+            <a:off x="457200" y="6720840"/>
+            <a:ext cx="11277295" cy="27432"/>
+          </a:xfrm>
+          <a:prstGeom prst="rect">
+            <a:avLst/>
+          </a:prstGeom>
+          <a:solidFill>
+            <a:srgbClr val="1B3A5C"/>
+          </a:solidFill>
+          <a:ln>
+            <a:noFill/>
+          </a:ln>
+        </p:spPr>
+        <p:style>
+          <a:lnRef idx="1">
+            <a:schemeClr val="accent1"/>
+          </a:lnRef>
+          <a:fillRef idx="3">
+            <a:schemeClr val="accent1"/>
+          </a:fillRef>
+          <a:effectRef idx="2">
+            <a:schemeClr val="accent1"/>
+          </a:effectRef>
+          <a:fontRef idx="minor">
+            <a:schemeClr val="lt1"/>
+          </a:fontRef>
+        </p:style>
+        <p:txBody>
+          <a:bodyPr rtlCol="0" anchor="ctr"/>
+          <a:lstStyle/>
+          <a:p>
+            <a:pPr algn="ctr"/>
+          </a:p>
+        </p:txBody>
+      </p:sp>
     </p:spTree>
   </p:cSld>
   <p:clrMapOvr>
@@ -9364,6 +10224,49 @@
           </a:p>
         </p:txBody>
       </p:sp>
+      <p:sp>
+        <p:nvSpPr>
+          <p:cNvPr id="4" name="Rectangle 3"/>
+          <p:cNvSpPr/>
+          <p:nvPr/>
+        </p:nvSpPr>
+        <p:spPr>
+          <a:xfrm>
+            <a:off x="457200" y="6720840"/>
+            <a:ext cx="11277295" cy="27432"/>
+          </a:xfrm>
+          <a:prstGeom prst="rect">
+            <a:avLst/>
+          </a:prstGeom>
+          <a:solidFill>
+            <a:srgbClr val="1B3A5C"/>
+          </a:solidFill>
+          <a:ln>
+            <a:noFill/>
+          </a:ln>
+        </p:spPr>
+        <p:style>
+          <a:lnRef idx="1">
+            <a:schemeClr val="accent1"/>
+          </a:lnRef>
+          <a:fillRef idx="3">
+            <a:schemeClr val="accent1"/>
+          </a:fillRef>
+          <a:effectRef idx="2">
+            <a:schemeClr val="accent1"/>
+          </a:effectRef>
+          <a:fontRef idx="minor">
+            <a:schemeClr val="lt1"/>
+          </a:fontRef>
+        </p:style>
+        <p:txBody>
+          <a:bodyPr rtlCol="0" anchor="ctr"/>
+          <a:lstStyle/>
+          <a:p>
+            <a:pPr algn="ctr"/>
+          </a:p>
+        </p:txBody>
+      </p:sp>
     </p:spTree>
   </p:cSld>
   <p:clrMapOvr>
@@ -9676,6 +10579,49 @@
           </a:p>
         </p:txBody>
       </p:sp>
+      <p:sp>
+        <p:nvSpPr>
+          <p:cNvPr id="4" name="Rectangle 3"/>
+          <p:cNvSpPr/>
+          <p:nvPr/>
+        </p:nvSpPr>
+        <p:spPr>
+          <a:xfrm>
+            <a:off x="457200" y="6720840"/>
+            <a:ext cx="11277295" cy="27432"/>
+          </a:xfrm>
+          <a:prstGeom prst="rect">
+            <a:avLst/>
+          </a:prstGeom>
+          <a:solidFill>
+            <a:srgbClr val="1B3A5C"/>
+          </a:solidFill>
+          <a:ln>
+            <a:noFill/>
+          </a:ln>
+        </p:spPr>
+        <p:style>
+          <a:lnRef idx="1">
+            <a:schemeClr val="accent1"/>
+          </a:lnRef>
+          <a:fillRef idx="3">
+            <a:schemeClr val="accent1"/>
+          </a:fillRef>
+          <a:effectRef idx="2">
+            <a:schemeClr val="accent1"/>
+          </a:effectRef>
+          <a:fontRef idx="minor">
+            <a:schemeClr val="lt1"/>
+          </a:fontRef>
+        </p:style>
+        <p:txBody>
+          <a:bodyPr rtlCol="0" anchor="ctr"/>
+          <a:lstStyle/>
+          <a:p>
+            <a:pPr algn="ctr"/>
+          </a:p>
+        </p:txBody>
+      </p:sp>
     </p:spTree>
   </p:cSld>
   <p:clrMapOvr>
@@ -9988,6 +10934,49 @@
           </a:p>
         </p:txBody>
       </p:sp>
+      <p:sp>
+        <p:nvSpPr>
+          <p:cNvPr id="4" name="Rectangle 3"/>
+          <p:cNvSpPr/>
+          <p:nvPr/>
+        </p:nvSpPr>
+        <p:spPr>
+          <a:xfrm>
+            <a:off x="457200" y="6720840"/>
+            <a:ext cx="11277295" cy="27432"/>
+          </a:xfrm>
+          <a:prstGeom prst="rect">
+            <a:avLst/>
+          </a:prstGeom>
+          <a:solidFill>
+            <a:srgbClr val="1B3A5C"/>
+          </a:solidFill>
+          <a:ln>
+            <a:noFill/>
+          </a:ln>
+        </p:spPr>
+        <p:style>
+          <a:lnRef idx="1">
+            <a:schemeClr val="accent1"/>
+          </a:lnRef>
+          <a:fillRef idx="3">
+            <a:schemeClr val="accent1"/>
+          </a:fillRef>
+          <a:effectRef idx="2">
+            <a:schemeClr val="accent1"/>
+          </a:effectRef>
+          <a:fontRef idx="minor">
+            <a:schemeClr val="lt1"/>
+          </a:fontRef>
+        </p:style>
+        <p:txBody>
+          <a:bodyPr rtlCol="0" anchor="ctr"/>
+          <a:lstStyle/>
+          <a:p>
+            <a:pPr algn="ctr"/>
+          </a:p>
+        </p:txBody>
+      </p:sp>
     </p:spTree>
   </p:cSld>
   <p:clrMapOvr>
@@ -10300,6 +11289,49 @@
           </a:p>
         </p:txBody>
       </p:sp>
+      <p:sp>
+        <p:nvSpPr>
+          <p:cNvPr id="4" name="Rectangle 3"/>
+          <p:cNvSpPr/>
+          <p:nvPr/>
+        </p:nvSpPr>
+        <p:spPr>
+          <a:xfrm>
+            <a:off x="457200" y="6720840"/>
+            <a:ext cx="11277295" cy="27432"/>
+          </a:xfrm>
+          <a:prstGeom prst="rect">
+            <a:avLst/>
+          </a:prstGeom>
+          <a:solidFill>
+            <a:srgbClr val="1B3A5C"/>
+          </a:solidFill>
+          <a:ln>
+            <a:noFill/>
+          </a:ln>
+        </p:spPr>
+        <p:style>
+          <a:lnRef idx="1">
+            <a:schemeClr val="accent1"/>
+          </a:lnRef>
+          <a:fillRef idx="3">
+            <a:schemeClr val="accent1"/>
+          </a:fillRef>
+          <a:effectRef idx="2">
+            <a:schemeClr val="accent1"/>
+          </a:effectRef>
+          <a:fontRef idx="minor">
+            <a:schemeClr val="lt1"/>
+          </a:fontRef>
+        </p:style>
+        <p:txBody>
+          <a:bodyPr rtlCol="0" anchor="ctr"/>
+          <a:lstStyle/>
+          <a:p>
+            <a:pPr algn="ctr"/>
+          </a:p>
+        </p:txBody>
+      </p:sp>
     </p:spTree>
   </p:cSld>
   <p:clrMapOvr>
@@ -10590,6 +11622,49 @@
           </a:p>
         </p:txBody>
       </p:sp>
+      <p:sp>
+        <p:nvSpPr>
+          <p:cNvPr id="4" name="Rectangle 3"/>
+          <p:cNvSpPr/>
+          <p:nvPr/>
+        </p:nvSpPr>
+        <p:spPr>
+          <a:xfrm>
+            <a:off x="457200" y="6720840"/>
+            <a:ext cx="11277295" cy="27432"/>
+          </a:xfrm>
+          <a:prstGeom prst="rect">
+            <a:avLst/>
+          </a:prstGeom>
+          <a:solidFill>
+            <a:srgbClr val="1B3A5C"/>
+          </a:solidFill>
+          <a:ln>
+            <a:noFill/>
+          </a:ln>
+        </p:spPr>
+        <p:style>
+          <a:lnRef idx="1">
+            <a:schemeClr val="accent1"/>
+          </a:lnRef>
+          <a:fillRef idx="3">
+            <a:schemeClr val="accent1"/>
+          </a:fillRef>
+          <a:effectRef idx="2">
+            <a:schemeClr val="accent1"/>
+          </a:effectRef>
+          <a:fontRef idx="minor">
+            <a:schemeClr val="lt1"/>
+          </a:fontRef>
+        </p:style>
+        <p:txBody>
+          <a:bodyPr rtlCol="0" anchor="ctr"/>
+          <a:lstStyle/>
+          <a:p>
+            <a:pPr algn="ctr"/>
+          </a:p>
+        </p:txBody>
+      </p:sp>
     </p:spTree>
   </p:cSld>
   <p:clrMapOvr>
@@ -10924,6 +11999,49 @@
           </a:p>
         </p:txBody>
       </p:sp>
+      <p:sp>
+        <p:nvSpPr>
+          <p:cNvPr id="4" name="Rectangle 3"/>
+          <p:cNvSpPr/>
+          <p:nvPr/>
+        </p:nvSpPr>
+        <p:spPr>
+          <a:xfrm>
+            <a:off x="457200" y="6720840"/>
+            <a:ext cx="11277295" cy="27432"/>
+          </a:xfrm>
+          <a:prstGeom prst="rect">
+            <a:avLst/>
+          </a:prstGeom>
+          <a:solidFill>
+            <a:srgbClr val="1B3A5C"/>
+          </a:solidFill>
+          <a:ln>
+            <a:noFill/>
+          </a:ln>
+        </p:spPr>
+        <p:style>
+          <a:lnRef idx="1">
+            <a:schemeClr val="accent1"/>
+          </a:lnRef>
+          <a:fillRef idx="3">
+            <a:schemeClr val="accent1"/>
+          </a:fillRef>
+          <a:effectRef idx="2">
+            <a:schemeClr val="accent1"/>
+          </a:effectRef>
+          <a:fontRef idx="minor">
+            <a:schemeClr val="lt1"/>
+          </a:fontRef>
+        </p:style>
+        <p:txBody>
+          <a:bodyPr rtlCol="0" anchor="ctr"/>
+          <a:lstStyle/>
+          <a:p>
+            <a:pPr algn="ctr"/>
+          </a:p>
+        </p:txBody>
+      </p:sp>
     </p:spTree>
   </p:cSld>
   <p:clrMapOvr>
@@ -11214,6 +12332,49 @@
           </a:p>
         </p:txBody>
       </p:sp>
+      <p:sp>
+        <p:nvSpPr>
+          <p:cNvPr id="4" name="Rectangle 3"/>
+          <p:cNvSpPr/>
+          <p:nvPr/>
+        </p:nvSpPr>
+        <p:spPr>
+          <a:xfrm>
+            <a:off x="457200" y="6720840"/>
+            <a:ext cx="11277295" cy="27432"/>
+          </a:xfrm>
+          <a:prstGeom prst="rect">
+            <a:avLst/>
+          </a:prstGeom>
+          <a:solidFill>
+            <a:srgbClr val="1B3A5C"/>
+          </a:solidFill>
+          <a:ln>
+            <a:noFill/>
+          </a:ln>
+        </p:spPr>
+        <p:style>
+          <a:lnRef idx="1">
+            <a:schemeClr val="accent1"/>
+          </a:lnRef>
+          <a:fillRef idx="3">
+            <a:schemeClr val="accent1"/>
+          </a:fillRef>
+          <a:effectRef idx="2">
+            <a:schemeClr val="accent1"/>
+          </a:effectRef>
+          <a:fontRef idx="minor">
+            <a:schemeClr val="lt1"/>
+          </a:fontRef>
+        </p:style>
+        <p:txBody>
+          <a:bodyPr rtlCol="0" anchor="ctr"/>
+          <a:lstStyle/>
+          <a:p>
+            <a:pPr algn="ctr"/>
+          </a:p>
+        </p:txBody>
+      </p:sp>
     </p:spTree>
   </p:cSld>
   <p:clrMapOvr>
@@ -11526,6 +12687,49 @@
           </a:p>
         </p:txBody>
       </p:sp>
+      <p:sp>
+        <p:nvSpPr>
+          <p:cNvPr id="4" name="Rectangle 3"/>
+          <p:cNvSpPr/>
+          <p:nvPr/>
+        </p:nvSpPr>
+        <p:spPr>
+          <a:xfrm>
+            <a:off x="457200" y="6720840"/>
+            <a:ext cx="11277295" cy="27432"/>
+          </a:xfrm>
+          <a:prstGeom prst="rect">
+            <a:avLst/>
+          </a:prstGeom>
+          <a:solidFill>
+            <a:srgbClr val="1B3A5C"/>
+          </a:solidFill>
+          <a:ln>
+            <a:noFill/>
+          </a:ln>
+        </p:spPr>
+        <p:style>
+          <a:lnRef idx="1">
+            <a:schemeClr val="accent1"/>
+          </a:lnRef>
+          <a:fillRef idx="3">
+            <a:schemeClr val="accent1"/>
+          </a:fillRef>
+          <a:effectRef idx="2">
+            <a:schemeClr val="accent1"/>
+          </a:effectRef>
+          <a:fontRef idx="minor">
+            <a:schemeClr val="lt1"/>
+          </a:fontRef>
+        </p:style>
+        <p:txBody>
+          <a:bodyPr rtlCol="0" anchor="ctr"/>
+          <a:lstStyle/>
+          <a:p>
+            <a:pPr algn="ctr"/>
+          </a:p>
+        </p:txBody>
+      </p:sp>
     </p:spTree>
   </p:cSld>
   <p:clrMapOvr>
@@ -11816,6 +13020,49 @@
           </a:p>
         </p:txBody>
       </p:sp>
+      <p:sp>
+        <p:nvSpPr>
+          <p:cNvPr id="4" name="Rectangle 3"/>
+          <p:cNvSpPr/>
+          <p:nvPr/>
+        </p:nvSpPr>
+        <p:spPr>
+          <a:xfrm>
+            <a:off x="457200" y="6720840"/>
+            <a:ext cx="11277295" cy="27432"/>
+          </a:xfrm>
+          <a:prstGeom prst="rect">
+            <a:avLst/>
+          </a:prstGeom>
+          <a:solidFill>
+            <a:srgbClr val="1B3A5C"/>
+          </a:solidFill>
+          <a:ln>
+            <a:noFill/>
+          </a:ln>
+        </p:spPr>
+        <p:style>
+          <a:lnRef idx="1">
+            <a:schemeClr val="accent1"/>
+          </a:lnRef>
+          <a:fillRef idx="3">
+            <a:schemeClr val="accent1"/>
+          </a:fillRef>
+          <a:effectRef idx="2">
+            <a:schemeClr val="accent1"/>
+          </a:effectRef>
+          <a:fontRef idx="minor">
+            <a:schemeClr val="lt1"/>
+          </a:fontRef>
+        </p:style>
+        <p:txBody>
+          <a:bodyPr rtlCol="0" anchor="ctr"/>
+          <a:lstStyle/>
+          <a:p>
+            <a:pPr algn="ctr"/>
+          </a:p>
+        </p:txBody>
+      </p:sp>
     </p:spTree>
   </p:cSld>
   <p:clrMapOvr>
@@ -12172,6 +13419,49 @@
           </a:p>
         </p:txBody>
       </p:sp>
+      <p:sp>
+        <p:nvSpPr>
+          <p:cNvPr id="4" name="Rectangle 3"/>
+          <p:cNvSpPr/>
+          <p:nvPr/>
+        </p:nvSpPr>
+        <p:spPr>
+          <a:xfrm>
+            <a:off x="457200" y="6720840"/>
+            <a:ext cx="11277295" cy="27432"/>
+          </a:xfrm>
+          <a:prstGeom prst="rect">
+            <a:avLst/>
+          </a:prstGeom>
+          <a:solidFill>
+            <a:srgbClr val="1B3A5C"/>
+          </a:solidFill>
+          <a:ln>
+            <a:noFill/>
+          </a:ln>
+        </p:spPr>
+        <p:style>
+          <a:lnRef idx="1">
+            <a:schemeClr val="accent1"/>
+          </a:lnRef>
+          <a:fillRef idx="3">
+            <a:schemeClr val="accent1"/>
+          </a:fillRef>
+          <a:effectRef idx="2">
+            <a:schemeClr val="accent1"/>
+          </a:effectRef>
+          <a:fontRef idx="minor">
+            <a:schemeClr val="lt1"/>
+          </a:fontRef>
+        </p:style>
+        <p:txBody>
+          <a:bodyPr rtlCol="0" anchor="ctr"/>
+          <a:lstStyle/>
+          <a:p>
+            <a:pPr algn="ctr"/>
+          </a:p>
+        </p:txBody>
+      </p:sp>
     </p:spTree>
   </p:cSld>
   <p:clrMapOvr>
@@ -12462,6 +13752,49 @@
           </a:p>
         </p:txBody>
       </p:sp>
+      <p:sp>
+        <p:nvSpPr>
+          <p:cNvPr id="4" name="Rectangle 3"/>
+          <p:cNvSpPr/>
+          <p:nvPr/>
+        </p:nvSpPr>
+        <p:spPr>
+          <a:xfrm>
+            <a:off x="457200" y="6720840"/>
+            <a:ext cx="11277295" cy="27432"/>
+          </a:xfrm>
+          <a:prstGeom prst="rect">
+            <a:avLst/>
+          </a:prstGeom>
+          <a:solidFill>
+            <a:srgbClr val="1B3A5C"/>
+          </a:solidFill>
+          <a:ln>
+            <a:noFill/>
+          </a:ln>
+        </p:spPr>
+        <p:style>
+          <a:lnRef idx="1">
+            <a:schemeClr val="accent1"/>
+          </a:lnRef>
+          <a:fillRef idx="3">
+            <a:schemeClr val="accent1"/>
+          </a:fillRef>
+          <a:effectRef idx="2">
+            <a:schemeClr val="accent1"/>
+          </a:effectRef>
+          <a:fontRef idx="minor">
+            <a:schemeClr val="lt1"/>
+          </a:fontRef>
+        </p:style>
+        <p:txBody>
+          <a:bodyPr rtlCol="0" anchor="ctr"/>
+          <a:lstStyle/>
+          <a:p>
+            <a:pPr algn="ctr"/>
+          </a:p>
+        </p:txBody>
+      </p:sp>
     </p:spTree>
   </p:cSld>
   <p:clrMapOvr>
@@ -12774,6 +14107,49 @@
           </a:p>
         </p:txBody>
       </p:sp>
+      <p:sp>
+        <p:nvSpPr>
+          <p:cNvPr id="4" name="Rectangle 3"/>
+          <p:cNvSpPr/>
+          <p:nvPr/>
+        </p:nvSpPr>
+        <p:spPr>
+          <a:xfrm>
+            <a:off x="457200" y="6720840"/>
+            <a:ext cx="11277295" cy="27432"/>
+          </a:xfrm>
+          <a:prstGeom prst="rect">
+            <a:avLst/>
+          </a:prstGeom>
+          <a:solidFill>
+            <a:srgbClr val="1B3A5C"/>
+          </a:solidFill>
+          <a:ln>
+            <a:noFill/>
+          </a:ln>
+        </p:spPr>
+        <p:style>
+          <a:lnRef idx="1">
+            <a:schemeClr val="accent1"/>
+          </a:lnRef>
+          <a:fillRef idx="3">
+            <a:schemeClr val="accent1"/>
+          </a:fillRef>
+          <a:effectRef idx="2">
+            <a:schemeClr val="accent1"/>
+          </a:effectRef>
+          <a:fontRef idx="minor">
+            <a:schemeClr val="lt1"/>
+          </a:fontRef>
+        </p:style>
+        <p:txBody>
+          <a:bodyPr rtlCol="0" anchor="ctr"/>
+          <a:lstStyle/>
+          <a:p>
+            <a:pPr algn="ctr"/>
+          </a:p>
+        </p:txBody>
+      </p:sp>
     </p:spTree>
   </p:cSld>
   <p:clrMapOvr>
@@ -13086,6 +14462,49 @@
           </a:p>
         </p:txBody>
       </p:sp>
+      <p:sp>
+        <p:nvSpPr>
+          <p:cNvPr id="4" name="Rectangle 3"/>
+          <p:cNvSpPr/>
+          <p:nvPr/>
+        </p:nvSpPr>
+        <p:spPr>
+          <a:xfrm>
+            <a:off x="457200" y="6720840"/>
+            <a:ext cx="11277295" cy="27432"/>
+          </a:xfrm>
+          <a:prstGeom prst="rect">
+            <a:avLst/>
+          </a:prstGeom>
+          <a:solidFill>
+            <a:srgbClr val="1B3A5C"/>
+          </a:solidFill>
+          <a:ln>
+            <a:noFill/>
+          </a:ln>
+        </p:spPr>
+        <p:style>
+          <a:lnRef idx="1">
+            <a:schemeClr val="accent1"/>
+          </a:lnRef>
+          <a:fillRef idx="3">
+            <a:schemeClr val="accent1"/>
+          </a:fillRef>
+          <a:effectRef idx="2">
+            <a:schemeClr val="accent1"/>
+          </a:effectRef>
+          <a:fontRef idx="minor">
+            <a:schemeClr val="lt1"/>
+          </a:fontRef>
+        </p:style>
+        <p:txBody>
+          <a:bodyPr rtlCol="0" anchor="ctr"/>
+          <a:lstStyle/>
+          <a:p>
+            <a:pPr algn="ctr"/>
+          </a:p>
+        </p:txBody>
+      </p:sp>
     </p:spTree>
   </p:cSld>
   <p:clrMapOvr>
@@ -13486,6 +14905,49 @@
           </a:p>
         </p:txBody>
       </p:sp>
+      <p:sp>
+        <p:nvSpPr>
+          <p:cNvPr id="4" name="Rectangle 3"/>
+          <p:cNvSpPr/>
+          <p:nvPr/>
+        </p:nvSpPr>
+        <p:spPr>
+          <a:xfrm>
+            <a:off x="457200" y="6720840"/>
+            <a:ext cx="11277295" cy="27432"/>
+          </a:xfrm>
+          <a:prstGeom prst="rect">
+            <a:avLst/>
+          </a:prstGeom>
+          <a:solidFill>
+            <a:srgbClr val="1B3A5C"/>
+          </a:solidFill>
+          <a:ln>
+            <a:noFill/>
+          </a:ln>
+        </p:spPr>
+        <p:style>
+          <a:lnRef idx="1">
+            <a:schemeClr val="accent1"/>
+          </a:lnRef>
+          <a:fillRef idx="3">
+            <a:schemeClr val="accent1"/>
+          </a:fillRef>
+          <a:effectRef idx="2">
+            <a:schemeClr val="accent1"/>
+          </a:effectRef>
+          <a:fontRef idx="minor">
+            <a:schemeClr val="lt1"/>
+          </a:fontRef>
+        </p:style>
+        <p:txBody>
+          <a:bodyPr rtlCol="0" anchor="ctr"/>
+          <a:lstStyle/>
+          <a:p>
+            <a:pPr algn="ctr"/>
+          </a:p>
+        </p:txBody>
+      </p:sp>
     </p:spTree>
   </p:cSld>
   <p:clrMapOvr>
@@ -13776,6 +15238,49 @@
           </a:p>
         </p:txBody>
       </p:sp>
+      <p:sp>
+        <p:nvSpPr>
+          <p:cNvPr id="4" name="Rectangle 3"/>
+          <p:cNvSpPr/>
+          <p:nvPr/>
+        </p:nvSpPr>
+        <p:spPr>
+          <a:xfrm>
+            <a:off x="457200" y="6720840"/>
+            <a:ext cx="11277295" cy="27432"/>
+          </a:xfrm>
+          <a:prstGeom prst="rect">
+            <a:avLst/>
+          </a:prstGeom>
+          <a:solidFill>
+            <a:srgbClr val="1B3A5C"/>
+          </a:solidFill>
+          <a:ln>
+            <a:noFill/>
+          </a:ln>
+        </p:spPr>
+        <p:style>
+          <a:lnRef idx="1">
+            <a:schemeClr val="accent1"/>
+          </a:lnRef>
+          <a:fillRef idx="3">
+            <a:schemeClr val="accent1"/>
+          </a:fillRef>
+          <a:effectRef idx="2">
+            <a:schemeClr val="accent1"/>
+          </a:effectRef>
+          <a:fontRef idx="minor">
+            <a:schemeClr val="lt1"/>
+          </a:fontRef>
+        </p:style>
+        <p:txBody>
+          <a:bodyPr rtlCol="0" anchor="ctr"/>
+          <a:lstStyle/>
+          <a:p>
+            <a:pPr algn="ctr"/>
+          </a:p>
+        </p:txBody>
+      </p:sp>
     </p:spTree>
   </p:cSld>
   <p:clrMapOvr>
@@ -14088,6 +15593,49 @@
           </a:p>
         </p:txBody>
       </p:sp>
+      <p:sp>
+        <p:nvSpPr>
+          <p:cNvPr id="4" name="Rectangle 3"/>
+          <p:cNvSpPr/>
+          <p:nvPr/>
+        </p:nvSpPr>
+        <p:spPr>
+          <a:xfrm>
+            <a:off x="457200" y="6720840"/>
+            <a:ext cx="11277295" cy="27432"/>
+          </a:xfrm>
+          <a:prstGeom prst="rect">
+            <a:avLst/>
+          </a:prstGeom>
+          <a:solidFill>
+            <a:srgbClr val="1B3A5C"/>
+          </a:solidFill>
+          <a:ln>
+            <a:noFill/>
+          </a:ln>
+        </p:spPr>
+        <p:style>
+          <a:lnRef idx="1">
+            <a:schemeClr val="accent1"/>
+          </a:lnRef>
+          <a:fillRef idx="3">
+            <a:schemeClr val="accent1"/>
+          </a:fillRef>
+          <a:effectRef idx="2">
+            <a:schemeClr val="accent1"/>
+          </a:effectRef>
+          <a:fontRef idx="minor">
+            <a:schemeClr val="lt1"/>
+          </a:fontRef>
+        </p:style>
+        <p:txBody>
+          <a:bodyPr rtlCol="0" anchor="ctr"/>
+          <a:lstStyle/>
+          <a:p>
+            <a:pPr algn="ctr"/>
+          </a:p>
+        </p:txBody>
+      </p:sp>
     </p:spTree>
   </p:cSld>
   <p:clrMapOvr>
@@ -14400,6 +15948,49 @@
           </a:p>
         </p:txBody>
       </p:sp>
+      <p:sp>
+        <p:nvSpPr>
+          <p:cNvPr id="4" name="Rectangle 3"/>
+          <p:cNvSpPr/>
+          <p:nvPr/>
+        </p:nvSpPr>
+        <p:spPr>
+          <a:xfrm>
+            <a:off x="457200" y="6720840"/>
+            <a:ext cx="11277295" cy="27432"/>
+          </a:xfrm>
+          <a:prstGeom prst="rect">
+            <a:avLst/>
+          </a:prstGeom>
+          <a:solidFill>
+            <a:srgbClr val="1B3A5C"/>
+          </a:solidFill>
+          <a:ln>
+            <a:noFill/>
+          </a:ln>
+        </p:spPr>
+        <p:style>
+          <a:lnRef idx="1">
+            <a:schemeClr val="accent1"/>
+          </a:lnRef>
+          <a:fillRef idx="3">
+            <a:schemeClr val="accent1"/>
+          </a:fillRef>
+          <a:effectRef idx="2">
+            <a:schemeClr val="accent1"/>
+          </a:effectRef>
+          <a:fontRef idx="minor">
+            <a:schemeClr val="lt1"/>
+          </a:fontRef>
+        </p:style>
+        <p:txBody>
+          <a:bodyPr rtlCol="0" anchor="ctr"/>
+          <a:lstStyle/>
+          <a:p>
+            <a:pPr algn="ctr"/>
+          </a:p>
+        </p:txBody>
+      </p:sp>
     </p:spTree>
   </p:cSld>
   <p:clrMapOvr>
@@ -14712,6 +16303,49 @@
           </a:p>
         </p:txBody>
       </p:sp>
+      <p:sp>
+        <p:nvSpPr>
+          <p:cNvPr id="4" name="Rectangle 3"/>
+          <p:cNvSpPr/>
+          <p:nvPr/>
+        </p:nvSpPr>
+        <p:spPr>
+          <a:xfrm>
+            <a:off x="457200" y="6720840"/>
+            <a:ext cx="11277295" cy="27432"/>
+          </a:xfrm>
+          <a:prstGeom prst="rect">
+            <a:avLst/>
+          </a:prstGeom>
+          <a:solidFill>
+            <a:srgbClr val="1B3A5C"/>
+          </a:solidFill>
+          <a:ln>
+            <a:noFill/>
+          </a:ln>
+        </p:spPr>
+        <p:style>
+          <a:lnRef idx="1">
+            <a:schemeClr val="accent1"/>
+          </a:lnRef>
+          <a:fillRef idx="3">
+            <a:schemeClr val="accent1"/>
+          </a:fillRef>
+          <a:effectRef idx="2">
+            <a:schemeClr val="accent1"/>
+          </a:effectRef>
+          <a:fontRef idx="minor">
+            <a:schemeClr val="lt1"/>
+          </a:fontRef>
+        </p:style>
+        <p:txBody>
+          <a:bodyPr rtlCol="0" anchor="ctr"/>
+          <a:lstStyle/>
+          <a:p>
+            <a:pPr algn="ctr"/>
+          </a:p>
+        </p:txBody>
+      </p:sp>
     </p:spTree>
   </p:cSld>
   <p:clrMapOvr>
@@ -14999,6 +16633,49 @@
               </a:rPr>
               <a:t>企业展开自查，对价外费用与包装物押金单独核算。</a:t>
             </a:r>
+          </a:p>
+        </p:txBody>
+      </p:sp>
+      <p:sp>
+        <p:nvSpPr>
+          <p:cNvPr id="4" name="Rectangle 3"/>
+          <p:cNvSpPr/>
+          <p:nvPr/>
+        </p:nvSpPr>
+        <p:spPr>
+          <a:xfrm>
+            <a:off x="457200" y="6720840"/>
+            <a:ext cx="11277295" cy="27432"/>
+          </a:xfrm>
+          <a:prstGeom prst="rect">
+            <a:avLst/>
+          </a:prstGeom>
+          <a:solidFill>
+            <a:srgbClr val="1B3A5C"/>
+          </a:solidFill>
+          <a:ln>
+            <a:noFill/>
+          </a:ln>
+        </p:spPr>
+        <p:style>
+          <a:lnRef idx="1">
+            <a:schemeClr val="accent1"/>
+          </a:lnRef>
+          <a:fillRef idx="3">
+            <a:schemeClr val="accent1"/>
+          </a:fillRef>
+          <a:effectRef idx="2">
+            <a:schemeClr val="accent1"/>
+          </a:effectRef>
+          <a:fontRef idx="minor">
+            <a:schemeClr val="lt1"/>
+          </a:fontRef>
+        </p:style>
+        <p:txBody>
+          <a:bodyPr rtlCol="0" anchor="ctr"/>
+          <a:lstStyle/>
+          <a:p>
+            <a:pPr algn="ctr"/>
           </a:p>
         </p:txBody>
       </p:sp>

--- a/ppts_output_v3/01_增值税风险指引.pptx
+++ b/ppts_output_v3/01_增值税风险指引.pptx
@@ -3203,6 +3203,7 @@
                 <a:solidFill>
                   <a:srgbClr val="FFFFFF"/>
                 </a:solidFill>
+                <a:latin typeface="Microsoft YaHei"/>
               </a:defRPr>
             </a:pPr>
             <a:r>
@@ -3281,6 +3282,7 @@
                 <a:solidFill>
                   <a:srgbClr val="CCCCCC"/>
                 </a:solidFill>
+                <a:latin typeface="Microsoft YaHei"/>
               </a:defRPr>
             </a:pPr>
             <a:r>
@@ -3316,6 +3318,7 @@
                 <a:solidFill>
                   <a:srgbClr val="AABBCC"/>
                 </a:solidFill>
+                <a:latin typeface="Microsoft YaHei"/>
               </a:defRPr>
             </a:pPr>
             <a:r>
@@ -3387,6 +3390,7 @@
                 <a:solidFill>
                   <a:srgbClr val="FFFFFF"/>
                 </a:solidFill>
+                <a:latin typeface="Microsoft YaHei"/>
               </a:rPr>
               <a:t>增值税风险指引  |  风险点 9</a:t>
             </a:r>
@@ -3742,6 +3746,7 @@
                 <a:solidFill>
                   <a:srgbClr val="FFFFFF"/>
                 </a:solidFill>
+                <a:latin typeface="Microsoft YaHei"/>
               </a:rPr>
               <a:t>增值税风险指引  |  风险点 10</a:t>
             </a:r>
@@ -4075,6 +4080,7 @@
                 <a:solidFill>
                   <a:srgbClr val="FFFFFF"/>
                 </a:solidFill>
+                <a:latin typeface="Microsoft YaHei"/>
               </a:rPr>
               <a:t>增值税风险指引  |  风险点 11</a:t>
             </a:r>
@@ -4452,6 +4458,7 @@
                 <a:solidFill>
                   <a:srgbClr val="FFFFFF"/>
                 </a:solidFill>
+                <a:latin typeface="Microsoft YaHei"/>
               </a:rPr>
               <a:t>增值税风险指引  |  风险点 12</a:t>
             </a:r>
@@ -4807,6 +4814,7 @@
                 <a:solidFill>
                   <a:srgbClr val="FFFFFF"/>
                 </a:solidFill>
+                <a:latin typeface="Microsoft YaHei"/>
               </a:rPr>
               <a:t>增值税风险指引  |  风险点 13</a:t>
             </a:r>
@@ -5184,6 +5192,7 @@
                 <a:solidFill>
                   <a:srgbClr val="FFFFFF"/>
                 </a:solidFill>
+                <a:latin typeface="Microsoft YaHei"/>
               </a:rPr>
               <a:t>增值税风险指引  |  风险点 14</a:t>
             </a:r>
@@ -5517,6 +5526,7 @@
                 <a:solidFill>
                   <a:srgbClr val="FFFFFF"/>
                 </a:solidFill>
+                <a:latin typeface="Microsoft YaHei"/>
               </a:rPr>
               <a:t>增值税风险指引  |  风险点 15</a:t>
             </a:r>
@@ -5872,6 +5882,7 @@
                 <a:solidFill>
                   <a:srgbClr val="FFFFFF"/>
                 </a:solidFill>
+                <a:latin typeface="Microsoft YaHei"/>
               </a:rPr>
               <a:t>增值税风险指引  |  风险点 16</a:t>
             </a:r>
@@ -6249,6 +6260,7 @@
                 <a:solidFill>
                   <a:srgbClr val="FFFFFF"/>
                 </a:solidFill>
+                <a:latin typeface="Microsoft YaHei"/>
               </a:rPr>
               <a:t>增值税风险指引  |  风险点 17</a:t>
             </a:r>
@@ -6604,6 +6616,7 @@
                 <a:solidFill>
                   <a:srgbClr val="FFFFFF"/>
                 </a:solidFill>
+                <a:latin typeface="Microsoft YaHei"/>
               </a:rPr>
               <a:t>增值税风险指引  |  风险点 18</a:t>
             </a:r>
@@ -6959,6 +6972,7 @@
                 <a:solidFill>
                   <a:srgbClr val="FFFFFF"/>
                 </a:solidFill>
+                <a:latin typeface="Microsoft YaHei"/>
               </a:rPr>
               <a:t>增值税风险指引  |  风险点 1</a:t>
             </a:r>
@@ -7380,6 +7394,7 @@
                 <a:solidFill>
                   <a:srgbClr val="FFFFFF"/>
                 </a:solidFill>
+                <a:latin typeface="Microsoft YaHei"/>
               </a:rPr>
               <a:t>增值税风险指引  |  风险点 19</a:t>
             </a:r>
@@ -7735,6 +7750,7 @@
                 <a:solidFill>
                   <a:srgbClr val="FFFFFF"/>
                 </a:solidFill>
+                <a:latin typeface="Microsoft YaHei"/>
               </a:rPr>
               <a:t>增值税风险指引  |  风险点 20</a:t>
             </a:r>
@@ -8090,6 +8106,7 @@
                 <a:solidFill>
                   <a:srgbClr val="FFFFFF"/>
                 </a:solidFill>
+                <a:latin typeface="Microsoft YaHei"/>
               </a:rPr>
               <a:t>增值税风险指引  |  风险点 21</a:t>
             </a:r>
@@ -8423,6 +8440,7 @@
                 <a:solidFill>
                   <a:srgbClr val="FFFFFF"/>
                 </a:solidFill>
+                <a:latin typeface="Microsoft YaHei"/>
               </a:rPr>
               <a:t>增值税风险指引  |  风险点 22</a:t>
             </a:r>
@@ -8822,6 +8840,7 @@
                 <a:solidFill>
                   <a:srgbClr val="FFFFFF"/>
                 </a:solidFill>
+                <a:latin typeface="Microsoft YaHei"/>
               </a:rPr>
               <a:t>增值税风险指引  |  风险点 23</a:t>
             </a:r>
@@ -9177,6 +9196,7 @@
                 <a:solidFill>
                   <a:srgbClr val="FFFFFF"/>
                 </a:solidFill>
+                <a:latin typeface="Microsoft YaHei"/>
               </a:rPr>
               <a:t>增值税风险指引  |  风险点 24</a:t>
             </a:r>
@@ -9642,6 +9662,7 @@
                 <a:solidFill>
                   <a:srgbClr val="FFFFFF"/>
                 </a:solidFill>
+                <a:latin typeface="Microsoft YaHei"/>
               </a:rPr>
               <a:t>增值税风险指引  |  风险点 25</a:t>
             </a:r>
@@ -9997,6 +10018,7 @@
                 <a:solidFill>
                   <a:srgbClr val="FFFFFF"/>
                 </a:solidFill>
+                <a:latin typeface="Microsoft YaHei"/>
               </a:rPr>
               <a:t>增值税风险指引  |  风险点 26</a:t>
             </a:r>
@@ -10330,6 +10352,7 @@
                 <a:solidFill>
                   <a:srgbClr val="FFFFFF"/>
                 </a:solidFill>
+                <a:latin typeface="Microsoft YaHei"/>
               </a:rPr>
               <a:t>增值税风险指引  |  风险点 27</a:t>
             </a:r>
@@ -10685,6 +10708,7 @@
                 <a:solidFill>
                   <a:srgbClr val="FFFFFF"/>
                 </a:solidFill>
+                <a:latin typeface="Microsoft YaHei"/>
               </a:rPr>
               <a:t>增值税风险指引  |  风险点 28</a:t>
             </a:r>
@@ -11040,6 +11064,7 @@
                 <a:solidFill>
                   <a:srgbClr val="FFFFFF"/>
                 </a:solidFill>
+                <a:latin typeface="Microsoft YaHei"/>
               </a:rPr>
               <a:t>增值税风险指引  |  风险点 2</a:t>
             </a:r>
@@ -11395,6 +11420,7 @@
                 <a:solidFill>
                   <a:srgbClr val="FFFFFF"/>
                 </a:solidFill>
+                <a:latin typeface="Microsoft YaHei"/>
               </a:rPr>
               <a:t>增值税风险指引  |  风险点 29</a:t>
             </a:r>
@@ -11728,6 +11754,7 @@
                 <a:solidFill>
                   <a:srgbClr val="FFFFFF"/>
                 </a:solidFill>
+                <a:latin typeface="Microsoft YaHei"/>
               </a:rPr>
               <a:t>增值税风险指引  |  风险点 30</a:t>
             </a:r>
@@ -12105,6 +12132,7 @@
                 <a:solidFill>
                   <a:srgbClr val="FFFFFF"/>
                 </a:solidFill>
+                <a:latin typeface="Microsoft YaHei"/>
               </a:rPr>
               <a:t>增值税风险指引  |  风险点 31</a:t>
             </a:r>
@@ -12438,6 +12466,7 @@
                 <a:solidFill>
                   <a:srgbClr val="FFFFFF"/>
                 </a:solidFill>
+                <a:latin typeface="Microsoft YaHei"/>
               </a:rPr>
               <a:t>增值税风险指引  |  风险点 32</a:t>
             </a:r>
@@ -12793,6 +12822,7 @@
                 <a:solidFill>
                   <a:srgbClr val="FFFFFF"/>
                 </a:solidFill>
+                <a:latin typeface="Microsoft YaHei"/>
               </a:rPr>
               <a:t>增值税风险指引  |  风险点 33</a:t>
             </a:r>
@@ -13126,6 +13156,7 @@
                 <a:solidFill>
                   <a:srgbClr val="FFFFFF"/>
                 </a:solidFill>
+                <a:latin typeface="Microsoft YaHei"/>
               </a:rPr>
               <a:t>增值税风险指引  |  风险点 34</a:t>
             </a:r>
@@ -13525,6 +13556,7 @@
                 <a:solidFill>
                   <a:srgbClr val="FFFFFF"/>
                 </a:solidFill>
+                <a:latin typeface="Microsoft YaHei"/>
               </a:rPr>
               <a:t>增值税风险指引  |  风险点 35</a:t>
             </a:r>
@@ -13858,6 +13890,7 @@
                 <a:solidFill>
                   <a:srgbClr val="FFFFFF"/>
                 </a:solidFill>
+                <a:latin typeface="Microsoft YaHei"/>
               </a:rPr>
               <a:t>增值税风险指引  |  风险点 36</a:t>
             </a:r>
@@ -14213,6 +14246,7 @@
                 <a:solidFill>
                   <a:srgbClr val="FFFFFF"/>
                 </a:solidFill>
+                <a:latin typeface="Microsoft YaHei"/>
               </a:rPr>
               <a:t>增值税风险指引  |  风险点 37</a:t>
             </a:r>
@@ -14568,6 +14602,7 @@
                 <a:solidFill>
                   <a:srgbClr val="FFFFFF"/>
                 </a:solidFill>
+                <a:latin typeface="Microsoft YaHei"/>
               </a:rPr>
               <a:t>增值税风险指引  |  风险点 3</a:t>
             </a:r>
@@ -15011,6 +15046,7 @@
                 <a:solidFill>
                   <a:srgbClr val="FFFFFF"/>
                 </a:solidFill>
+                <a:latin typeface="Microsoft YaHei"/>
               </a:rPr>
               <a:t>增值税风险指引  |  风险点 4</a:t>
             </a:r>
@@ -15344,6 +15380,7 @@
                 <a:solidFill>
                   <a:srgbClr val="FFFFFF"/>
                 </a:solidFill>
+                <a:latin typeface="Microsoft YaHei"/>
               </a:rPr>
               <a:t>增值税风险指引  |  风险点 5</a:t>
             </a:r>
@@ -15699,6 +15736,7 @@
                 <a:solidFill>
                   <a:srgbClr val="FFFFFF"/>
                 </a:solidFill>
+                <a:latin typeface="Microsoft YaHei"/>
               </a:rPr>
               <a:t>增值税风险指引  |  风险点 6</a:t>
             </a:r>
@@ -16054,6 +16092,7 @@
                 <a:solidFill>
                   <a:srgbClr val="FFFFFF"/>
                 </a:solidFill>
+                <a:latin typeface="Microsoft YaHei"/>
               </a:rPr>
               <a:t>增值税风险指引  |  风险点 7</a:t>
             </a:r>
@@ -16409,6 +16448,7 @@
                 <a:solidFill>
                   <a:srgbClr val="FFFFFF"/>
                 </a:solidFill>
+                <a:latin typeface="Microsoft YaHei"/>
               </a:rPr>
               <a:t>增值税风险指引  |  风险点 8</a:t>
             </a:r>
